--- a/slides/ws2-pattern-a-pooled-editable-slides.pptx
+++ b/slides/ws2-pattern-a-pooled-editable-slides.pptx
@@ -16633,6 +16633,7 @@
               <a:srgbClr val="5F6368"/>
             </a:solidFill>
             <a:prstDash val="solid"/>
+            <a:headEnd type="triangle" w="sm" len="sm"/>
           </a:ln>
         </p:spPr>
       </p:sp>
@@ -17200,6 +17201,7 @@
               <a:srgbClr val="5F6368"/>
             </a:solidFill>
             <a:prstDash val="solid"/>
+            <a:headEnd type="triangle" w="sm" len="sm"/>
           </a:ln>
         </p:spPr>
       </p:sp>
@@ -17247,6 +17249,7 @@
               <a:srgbClr val="5F6368"/>
             </a:solidFill>
             <a:prstDash val="solid"/>
+            <a:headEnd type="triangle" w="sm" len="sm"/>
           </a:ln>
         </p:spPr>
       </p:sp>
@@ -17436,6 +17439,7 @@
               <a:srgbClr val="5F6368"/>
             </a:solidFill>
             <a:prstDash val="solid"/>
+            <a:headEnd type="triangle" w="sm" len="sm"/>
           </a:ln>
         </p:spPr>
       </p:sp>
@@ -17483,6 +17487,7 @@
               <a:srgbClr val="5F6368"/>
             </a:solidFill>
             <a:prstDash val="solid"/>
+            <a:headEnd type="triangle" w="sm" len="sm"/>
           </a:ln>
         </p:spPr>
       </p:sp>
@@ -19094,7 +19099,7 @@
                 <a:ea typeface="Arial" pitchFamily="34" charset="-122"/>
                 <a:cs typeface="Arial" pitchFamily="34" charset="-120"/>
               </a:rPr>
-              <a:t>Gemini &amp; Claude 3.7</a:t>
+              <a:t>Gemini 2.5 Pro</a:t>
             </a:r>
             <a:endParaRPr lang="en-US" sz="500" dirty="0"/>
           </a:p>
@@ -19767,8 +19772,8 @@
         </p:nvSpPr>
         <p:spPr>
           <a:xfrm>
-            <a:off x="2691994" y="4839919"/>
-            <a:ext cx="782726" cy="165506"/>
+            <a:off x="2691994" y="4813402"/>
+            <a:ext cx="782726" cy="219456"/>
           </a:xfrm>
           <a:prstGeom prst="rect">
             <a:avLst/>
@@ -19797,34 +19802,10 @@
                 <a:ea typeface="Arial" pitchFamily="34" charset="-122"/>
                 <a:cs typeface="Arial" pitchFamily="34" charset="-120"/>
               </a:rPr>
-              <a:t>gs://cymbal- skills-finvault</a:t>
+              <a:t>GCS Skills:</a:t>
             </a:r>
             <a:endParaRPr lang="en-US" sz="500" dirty="0"/>
           </a:p>
-        </p:txBody>
-      </p:sp>
-      <p:sp>
-        <p:nvSpPr>
-          <p:cNvPr id="187" name="Text 165"/>
-          <p:cNvSpPr/>
-          <p:nvPr/>
-        </p:nvSpPr>
-        <p:spPr>
-          <a:xfrm>
-            <a:off x="2691994" y="5447995"/>
-            <a:ext cx="782726" cy="219456"/>
-          </a:xfrm>
-          <a:prstGeom prst="rect">
-            <a:avLst/>
-          </a:prstGeom>
-          <a:noFill/>
-          <a:ln/>
-        </p:spPr>
-        <p:txBody>
-          <a:bodyPr wrap="square" lIns="0" tIns="0" rIns="0" bIns="0" rtlCol="0" anchor="ctr">
-            <a:normAutofit/>
-          </a:bodyPr>
-          <a:lstStyle/>
           <a:p>
             <a:pPr algn="ctr" indent="0" marL="0">
               <a:lnSpc>
@@ -19833,7 +19814,7 @@
               <a:buNone/>
             </a:pPr>
             <a:r>
-              <a:rPr lang="en-US" sz="500" b="1" dirty="0">
+              <a:rPr lang="en-US" sz="440" dirty="0">
                 <a:solidFill>
                   <a:srgbClr val="202124"/>
                 </a:solidFill>
@@ -19841,10 +19822,34 @@
                 <a:ea typeface="Arial" pitchFamily="34" charset="-122"/>
                 <a:cs typeface="Arial" pitchFamily="34" charset="-120"/>
               </a:rPr>
-              <a:t>RLS Policy:</a:t>
+              <a:t>cymbal-skills-fv</a:t>
             </a:r>
             <a:endParaRPr lang="en-US" sz="500" dirty="0"/>
           </a:p>
+        </p:txBody>
+      </p:sp>
+      <p:sp>
+        <p:nvSpPr>
+          <p:cNvPr id="187" name="Text 165"/>
+          <p:cNvSpPr/>
+          <p:nvPr/>
+        </p:nvSpPr>
+        <p:spPr>
+          <a:xfrm>
+            <a:off x="2691994" y="5447995"/>
+            <a:ext cx="782726" cy="219456"/>
+          </a:xfrm>
+          <a:prstGeom prst="rect">
+            <a:avLst/>
+          </a:prstGeom>
+          <a:noFill/>
+          <a:ln/>
+        </p:spPr>
+        <p:txBody>
+          <a:bodyPr wrap="square" lIns="0" tIns="0" rIns="0" bIns="0" rtlCol="0" anchor="ctr">
+            <a:normAutofit/>
+          </a:bodyPr>
+          <a:lstStyle/>
           <a:p>
             <a:pPr algn="ctr" indent="0" marL="0">
               <a:lnSpc>
@@ -19853,7 +19858,7 @@
               <a:buNone/>
             </a:pPr>
             <a:r>
-              <a:rPr lang="en-US" sz="440" dirty="0">
+              <a:rPr lang="en-US" sz="500" b="1" dirty="0">
                 <a:solidFill>
                   <a:srgbClr val="202124"/>
                 </a:solidFill>
@@ -19861,34 +19866,10 @@
                 <a:ea typeface="Arial" pitchFamily="34" charset="-122"/>
                 <a:cs typeface="Arial" pitchFamily="34" charset="-120"/>
               </a:rPr>
-              <a:t>finvault Rows</a:t>
+              <a:t>RLS Policy:</a:t>
             </a:r>
             <a:endParaRPr lang="en-US" sz="500" dirty="0"/>
           </a:p>
-        </p:txBody>
-      </p:sp>
-      <p:sp>
-        <p:nvSpPr>
-          <p:cNvPr id="188" name="Text 166"/>
-          <p:cNvSpPr/>
-          <p:nvPr/>
-        </p:nvSpPr>
-        <p:spPr>
-          <a:xfrm>
-            <a:off x="5056632" y="4839919"/>
-            <a:ext cx="782726" cy="165506"/>
-          </a:xfrm>
-          <a:prstGeom prst="rect">
-            <a:avLst/>
-          </a:prstGeom>
-          <a:noFill/>
-          <a:ln/>
-        </p:spPr>
-        <p:txBody>
-          <a:bodyPr wrap="square" lIns="0" tIns="0" rIns="0" bIns="0" rtlCol="0" anchor="ctr">
-            <a:normAutofit/>
-          </a:bodyPr>
-          <a:lstStyle/>
           <a:p>
             <a:pPr algn="ctr" indent="0" marL="0">
               <a:lnSpc>
@@ -19897,7 +19878,7 @@
               <a:buNone/>
             </a:pPr>
             <a:r>
-              <a:rPr lang="en-US" sz="500" b="1" dirty="0">
+              <a:rPr lang="en-US" sz="440" dirty="0">
                 <a:solidFill>
                   <a:srgbClr val="202124"/>
                 </a:solidFill>
@@ -19905,7 +19886,71 @@
                 <a:ea typeface="Arial" pitchFamily="34" charset="-122"/>
                 <a:cs typeface="Arial" pitchFamily="34" charset="-120"/>
               </a:rPr>
-              <a:t>gs://cymbal- skills-retail</a:t>
+              <a:t>finvault Rows</a:t>
+            </a:r>
+            <a:endParaRPr lang="en-US" sz="500" dirty="0"/>
+          </a:p>
+        </p:txBody>
+      </p:sp>
+      <p:sp>
+        <p:nvSpPr>
+          <p:cNvPr id="188" name="Text 166"/>
+          <p:cNvSpPr/>
+          <p:nvPr/>
+        </p:nvSpPr>
+        <p:spPr>
+          <a:xfrm>
+            <a:off x="5056632" y="4813402"/>
+            <a:ext cx="782726" cy="219456"/>
+          </a:xfrm>
+          <a:prstGeom prst="rect">
+            <a:avLst/>
+          </a:prstGeom>
+          <a:noFill/>
+          <a:ln/>
+        </p:spPr>
+        <p:txBody>
+          <a:bodyPr wrap="square" lIns="0" tIns="0" rIns="0" bIns="0" rtlCol="0" anchor="ctr">
+            <a:normAutofit/>
+          </a:bodyPr>
+          <a:lstStyle/>
+          <a:p>
+            <a:pPr algn="ctr" indent="0" marL="0">
+              <a:lnSpc>
+                <a:spcPct val="88000"/>
+              </a:lnSpc>
+              <a:buNone/>
+            </a:pPr>
+            <a:r>
+              <a:rPr lang="en-US" sz="500" b="1" dirty="0">
+                <a:solidFill>
+                  <a:srgbClr val="202124"/>
+                </a:solidFill>
+                <a:latin typeface="Arial" pitchFamily="34" charset="0"/>
+                <a:ea typeface="Arial" pitchFamily="34" charset="-122"/>
+                <a:cs typeface="Arial" pitchFamily="34" charset="-120"/>
+              </a:rPr>
+              <a:t>GCS Skills:</a:t>
+            </a:r>
+            <a:endParaRPr lang="en-US" sz="500" dirty="0"/>
+          </a:p>
+          <a:p>
+            <a:pPr algn="ctr" indent="0" marL="0">
+              <a:lnSpc>
+                <a:spcPct val="88000"/>
+              </a:lnSpc>
+              <a:buNone/>
+            </a:pPr>
+            <a:r>
+              <a:rPr lang="en-US" sz="440" dirty="0">
+                <a:solidFill>
+                  <a:srgbClr val="202124"/>
+                </a:solidFill>
+                <a:latin typeface="Arial" pitchFamily="34" charset="0"/>
+                <a:ea typeface="Arial" pitchFamily="34" charset="-122"/>
+                <a:cs typeface="Arial" pitchFamily="34" charset="-120"/>
+              </a:rPr>
+              <a:t>cymbal-skills-rs</a:t>
             </a:r>
             <a:endParaRPr lang="en-US" sz="500" dirty="0"/>
           </a:p>

--- a/slides/ws2-pattern-a-pooled-editable-slides.pptx
+++ b/slides/ws2-pattern-a-pooled-editable-slides.pptx
@@ -19702,975 +19702,7 @@
       </p:sp>
       <p:sp>
         <p:nvSpPr>
-          <p:cNvPr id="185" name="Text 163"/>
-          <p:cNvSpPr/>
-          <p:nvPr/>
-        </p:nvSpPr>
-        <p:spPr>
-          <a:xfrm>
-            <a:off x="5339182" y="3352190"/>
-            <a:ext cx="760781" cy="219456"/>
-          </a:xfrm>
-          <a:prstGeom prst="rect">
-            <a:avLst/>
-          </a:prstGeom>
-          <a:noFill/>
-          <a:ln/>
-        </p:spPr>
-        <p:txBody>
-          <a:bodyPr wrap="square" lIns="0" tIns="0" rIns="0" bIns="0" rtlCol="0" anchor="ctr">
-            <a:normAutofit/>
-          </a:bodyPr>
-          <a:lstStyle/>
-          <a:p>
-            <a:pPr algn="l" indent="0" marL="0">
-              <a:lnSpc>
-                <a:spcPct val="88000"/>
-              </a:lnSpc>
-              <a:buNone/>
-            </a:pPr>
-            <a:r>
-              <a:rPr lang="en-US" sz="500" b="1" dirty="0">
-                <a:solidFill>
-                  <a:srgbClr val="202124"/>
-                </a:solidFill>
-                <a:latin typeface="Arial" pitchFamily="34" charset="0"/>
-                <a:ea typeface="Arial" pitchFamily="34" charset="-122"/>
-                <a:cs typeface="Arial" pitchFamily="34" charset="-120"/>
-              </a:rPr>
-              <a:t>84.7% Net Input</a:t>
-            </a:r>
-            <a:endParaRPr lang="en-US" sz="500" dirty="0"/>
-          </a:p>
-          <a:p>
-            <a:pPr algn="l" indent="0" marL="0">
-              <a:lnSpc>
-                <a:spcPct val="88000"/>
-              </a:lnSpc>
-              <a:buNone/>
-            </a:pPr>
-            <a:r>
-              <a:rPr lang="en-US" sz="440" dirty="0">
-                <a:solidFill>
-                  <a:srgbClr val="202124"/>
-                </a:solidFill>
-                <a:latin typeface="Arial" pitchFamily="34" charset="0"/>
-                <a:ea typeface="Arial" pitchFamily="34" charset="-122"/>
-                <a:cs typeface="Arial" pitchFamily="34" charset="-120"/>
-              </a:rPr>
-              <a:t>COGS Savings &amp; OTel</a:t>
-            </a:r>
-            <a:endParaRPr lang="en-US" sz="500" dirty="0"/>
-          </a:p>
-        </p:txBody>
-      </p:sp>
-      <p:sp>
-        <p:nvSpPr>
-          <p:cNvPr id="186" name="Text 164"/>
-          <p:cNvSpPr/>
-          <p:nvPr/>
-        </p:nvSpPr>
-        <p:spPr>
-          <a:xfrm>
-            <a:off x="2691994" y="4813402"/>
-            <a:ext cx="782726" cy="219456"/>
-          </a:xfrm>
-          <a:prstGeom prst="rect">
-            <a:avLst/>
-          </a:prstGeom>
-          <a:noFill/>
-          <a:ln/>
-        </p:spPr>
-        <p:txBody>
-          <a:bodyPr wrap="square" lIns="0" tIns="0" rIns="0" bIns="0" rtlCol="0" anchor="ctr">
-            <a:normAutofit/>
-          </a:bodyPr>
-          <a:lstStyle/>
-          <a:p>
-            <a:pPr algn="ctr" indent="0" marL="0">
-              <a:lnSpc>
-                <a:spcPct val="88000"/>
-              </a:lnSpc>
-              <a:buNone/>
-            </a:pPr>
-            <a:r>
-              <a:rPr lang="en-US" sz="500" b="1" dirty="0">
-                <a:solidFill>
-                  <a:srgbClr val="202124"/>
-                </a:solidFill>
-                <a:latin typeface="Arial" pitchFamily="34" charset="0"/>
-                <a:ea typeface="Arial" pitchFamily="34" charset="-122"/>
-                <a:cs typeface="Arial" pitchFamily="34" charset="-120"/>
-              </a:rPr>
-              <a:t>GCS Skills:</a:t>
-            </a:r>
-            <a:endParaRPr lang="en-US" sz="500" dirty="0"/>
-          </a:p>
-          <a:p>
-            <a:pPr algn="ctr" indent="0" marL="0">
-              <a:lnSpc>
-                <a:spcPct val="88000"/>
-              </a:lnSpc>
-              <a:buNone/>
-            </a:pPr>
-            <a:r>
-              <a:rPr lang="en-US" sz="440" dirty="0">
-                <a:solidFill>
-                  <a:srgbClr val="202124"/>
-                </a:solidFill>
-                <a:latin typeface="Arial" pitchFamily="34" charset="0"/>
-                <a:ea typeface="Arial" pitchFamily="34" charset="-122"/>
-                <a:cs typeface="Arial" pitchFamily="34" charset="-120"/>
-              </a:rPr>
-              <a:t>cymbal-skills-fv</a:t>
-            </a:r>
-            <a:endParaRPr lang="en-US" sz="500" dirty="0"/>
-          </a:p>
-        </p:txBody>
-      </p:sp>
-      <p:sp>
-        <p:nvSpPr>
-          <p:cNvPr id="187" name="Text 165"/>
-          <p:cNvSpPr/>
-          <p:nvPr/>
-        </p:nvSpPr>
-        <p:spPr>
-          <a:xfrm>
-            <a:off x="2691994" y="5447995"/>
-            <a:ext cx="782726" cy="219456"/>
-          </a:xfrm>
-          <a:prstGeom prst="rect">
-            <a:avLst/>
-          </a:prstGeom>
-          <a:noFill/>
-          <a:ln/>
-        </p:spPr>
-        <p:txBody>
-          <a:bodyPr wrap="square" lIns="0" tIns="0" rIns="0" bIns="0" rtlCol="0" anchor="ctr">
-            <a:normAutofit/>
-          </a:bodyPr>
-          <a:lstStyle/>
-          <a:p>
-            <a:pPr algn="ctr" indent="0" marL="0">
-              <a:lnSpc>
-                <a:spcPct val="88000"/>
-              </a:lnSpc>
-              <a:buNone/>
-            </a:pPr>
-            <a:r>
-              <a:rPr lang="en-US" sz="500" b="1" dirty="0">
-                <a:solidFill>
-                  <a:srgbClr val="202124"/>
-                </a:solidFill>
-                <a:latin typeface="Arial" pitchFamily="34" charset="0"/>
-                <a:ea typeface="Arial" pitchFamily="34" charset="-122"/>
-                <a:cs typeface="Arial" pitchFamily="34" charset="-120"/>
-              </a:rPr>
-              <a:t>RLS Policy:</a:t>
-            </a:r>
-            <a:endParaRPr lang="en-US" sz="500" dirty="0"/>
-          </a:p>
-          <a:p>
-            <a:pPr algn="ctr" indent="0" marL="0">
-              <a:lnSpc>
-                <a:spcPct val="88000"/>
-              </a:lnSpc>
-              <a:buNone/>
-            </a:pPr>
-            <a:r>
-              <a:rPr lang="en-US" sz="440" dirty="0">
-                <a:solidFill>
-                  <a:srgbClr val="202124"/>
-                </a:solidFill>
-                <a:latin typeface="Arial" pitchFamily="34" charset="0"/>
-                <a:ea typeface="Arial" pitchFamily="34" charset="-122"/>
-                <a:cs typeface="Arial" pitchFamily="34" charset="-120"/>
-              </a:rPr>
-              <a:t>finvault Rows</a:t>
-            </a:r>
-            <a:endParaRPr lang="en-US" sz="500" dirty="0"/>
-          </a:p>
-        </p:txBody>
-      </p:sp>
-      <p:sp>
-        <p:nvSpPr>
-          <p:cNvPr id="188" name="Text 166"/>
-          <p:cNvSpPr/>
-          <p:nvPr/>
-        </p:nvSpPr>
-        <p:spPr>
-          <a:xfrm>
-            <a:off x="5056632" y="4813402"/>
-            <a:ext cx="782726" cy="219456"/>
-          </a:xfrm>
-          <a:prstGeom prst="rect">
-            <a:avLst/>
-          </a:prstGeom>
-          <a:noFill/>
-          <a:ln/>
-        </p:spPr>
-        <p:txBody>
-          <a:bodyPr wrap="square" lIns="0" tIns="0" rIns="0" bIns="0" rtlCol="0" anchor="ctr">
-            <a:normAutofit/>
-          </a:bodyPr>
-          <a:lstStyle/>
-          <a:p>
-            <a:pPr algn="ctr" indent="0" marL="0">
-              <a:lnSpc>
-                <a:spcPct val="88000"/>
-              </a:lnSpc>
-              <a:buNone/>
-            </a:pPr>
-            <a:r>
-              <a:rPr lang="en-US" sz="500" b="1" dirty="0">
-                <a:solidFill>
-                  <a:srgbClr val="202124"/>
-                </a:solidFill>
-                <a:latin typeface="Arial" pitchFamily="34" charset="0"/>
-                <a:ea typeface="Arial" pitchFamily="34" charset="-122"/>
-                <a:cs typeface="Arial" pitchFamily="34" charset="-120"/>
-              </a:rPr>
-              <a:t>GCS Skills:</a:t>
-            </a:r>
-            <a:endParaRPr lang="en-US" sz="500" dirty="0"/>
-          </a:p>
-          <a:p>
-            <a:pPr algn="ctr" indent="0" marL="0">
-              <a:lnSpc>
-                <a:spcPct val="88000"/>
-              </a:lnSpc>
-              <a:buNone/>
-            </a:pPr>
-            <a:r>
-              <a:rPr lang="en-US" sz="440" dirty="0">
-                <a:solidFill>
-                  <a:srgbClr val="202124"/>
-                </a:solidFill>
-                <a:latin typeface="Arial" pitchFamily="34" charset="0"/>
-                <a:ea typeface="Arial" pitchFamily="34" charset="-122"/>
-                <a:cs typeface="Arial" pitchFamily="34" charset="-120"/>
-              </a:rPr>
-              <a:t>cymbal-skills-rs</a:t>
-            </a:r>
-            <a:endParaRPr lang="en-US" sz="500" dirty="0"/>
-          </a:p>
-        </p:txBody>
-      </p:sp>
-      <p:sp>
-        <p:nvSpPr>
-          <p:cNvPr id="189" name="Text 167"/>
-          <p:cNvSpPr/>
-          <p:nvPr/>
-        </p:nvSpPr>
-        <p:spPr>
-          <a:xfrm>
-            <a:off x="5056632" y="5447995"/>
-            <a:ext cx="782726" cy="219456"/>
-          </a:xfrm>
-          <a:prstGeom prst="rect">
-            <a:avLst/>
-          </a:prstGeom>
-          <a:noFill/>
-          <a:ln/>
-        </p:spPr>
-        <p:txBody>
-          <a:bodyPr wrap="square" lIns="0" tIns="0" rIns="0" bIns="0" rtlCol="0" anchor="ctr">
-            <a:normAutofit/>
-          </a:bodyPr>
-          <a:lstStyle/>
-          <a:p>
-            <a:pPr algn="ctr" indent="0" marL="0">
-              <a:lnSpc>
-                <a:spcPct val="88000"/>
-              </a:lnSpc>
-              <a:buNone/>
-            </a:pPr>
-            <a:r>
-              <a:rPr lang="en-US" sz="500" b="1" dirty="0">
-                <a:solidFill>
-                  <a:srgbClr val="202124"/>
-                </a:solidFill>
-                <a:latin typeface="Arial" pitchFamily="34" charset="0"/>
-                <a:ea typeface="Arial" pitchFamily="34" charset="-122"/>
-                <a:cs typeface="Arial" pitchFamily="34" charset="-120"/>
-              </a:rPr>
-              <a:t>RLS Policy:</a:t>
-            </a:r>
-            <a:endParaRPr lang="en-US" sz="500" dirty="0"/>
-          </a:p>
-          <a:p>
-            <a:pPr algn="ctr" indent="0" marL="0">
-              <a:lnSpc>
-                <a:spcPct val="88000"/>
-              </a:lnSpc>
-              <a:buNone/>
-            </a:pPr>
-            <a:r>
-              <a:rPr lang="en-US" sz="440" dirty="0">
-                <a:solidFill>
-                  <a:srgbClr val="202124"/>
-                </a:solidFill>
-                <a:latin typeface="Arial" pitchFamily="34" charset="0"/>
-                <a:ea typeface="Arial" pitchFamily="34" charset="-122"/>
-                <a:cs typeface="Arial" pitchFamily="34" charset="-120"/>
-              </a:rPr>
-              <a:t>retail Rows</a:t>
-            </a:r>
-            <a:endParaRPr lang="en-US" sz="500" dirty="0"/>
-          </a:p>
-        </p:txBody>
-      </p:sp>
-      <p:sp>
-        <p:nvSpPr>
-          <p:cNvPr id="190" name="Text 168"/>
-          <p:cNvSpPr/>
-          <p:nvPr/>
-        </p:nvSpPr>
-        <p:spPr>
-          <a:xfrm>
-            <a:off x="1757477" y="5598871"/>
-            <a:ext cx="686714" cy="219456"/>
-          </a:xfrm>
-          <a:prstGeom prst="rect">
-            <a:avLst/>
-          </a:prstGeom>
-          <a:noFill/>
-          <a:ln/>
-        </p:spPr>
-        <p:txBody>
-          <a:bodyPr wrap="square" lIns="0" tIns="0" rIns="0" bIns="0" rtlCol="0" anchor="ctr">
-            <a:normAutofit/>
-          </a:bodyPr>
-          <a:lstStyle/>
-          <a:p>
-            <a:pPr algn="l" indent="0" marL="0">
-              <a:lnSpc>
-                <a:spcPct val="88000"/>
-              </a:lnSpc>
-              <a:buNone/>
-            </a:pPr>
-            <a:r>
-              <a:rPr lang="en-US" sz="500" b="1" dirty="0">
-                <a:solidFill>
-                  <a:srgbClr val="202124"/>
-                </a:solidFill>
-                <a:latin typeface="Arial" pitchFamily="34" charset="0"/>
-                <a:ea typeface="Arial" pitchFamily="34" charset="-122"/>
-                <a:cs typeface="Arial" pitchFamily="34" charset="-120"/>
-              </a:rPr>
-              <a:t>Generates</a:t>
-            </a:r>
-            <a:endParaRPr lang="en-US" sz="500" dirty="0"/>
-          </a:p>
-          <a:p>
-            <a:pPr algn="l" indent="0" marL="0">
-              <a:lnSpc>
-                <a:spcPct val="88000"/>
-              </a:lnSpc>
-              <a:buNone/>
-            </a:pPr>
-            <a:r>
-              <a:rPr lang="en-US" sz="440" dirty="0">
-                <a:solidFill>
-                  <a:srgbClr val="202124"/>
-                </a:solidFill>
-                <a:latin typeface="Arial" pitchFamily="34" charset="0"/>
-                <a:ea typeface="Arial" pitchFamily="34" charset="-122"/>
-                <a:cs typeface="Arial" pitchFamily="34" charset="-120"/>
-              </a:rPr>
-              <a:t>response</a:t>
-            </a:r>
-            <a:endParaRPr lang="en-US" sz="500" dirty="0"/>
-          </a:p>
-        </p:txBody>
-      </p:sp>
-      <p:sp>
-        <p:nvSpPr>
-          <p:cNvPr id="191" name="Text 169"/>
-          <p:cNvSpPr/>
-          <p:nvPr/>
-        </p:nvSpPr>
-        <p:spPr>
-          <a:xfrm>
-            <a:off x="3905402" y="3348533"/>
-            <a:ext cx="738835" cy="219456"/>
-          </a:xfrm>
-          <a:prstGeom prst="rect">
-            <a:avLst/>
-          </a:prstGeom>
-          <a:noFill/>
-          <a:ln/>
-        </p:spPr>
-        <p:txBody>
-          <a:bodyPr wrap="square" lIns="0" tIns="0" rIns="0" bIns="0" rtlCol="0" anchor="ctr">
-            <a:normAutofit/>
-          </a:bodyPr>
-          <a:lstStyle/>
-          <a:p>
-            <a:pPr algn="l" indent="0" marL="0">
-              <a:lnSpc>
-                <a:spcPct val="88000"/>
-              </a:lnSpc>
-              <a:buNone/>
-            </a:pPr>
-            <a:r>
-              <a:rPr lang="en-US" sz="500" b="1" dirty="0">
-                <a:solidFill>
-                  <a:srgbClr val="202124"/>
-                </a:solidFill>
-                <a:latin typeface="Arial" pitchFamily="34" charset="0"/>
-                <a:ea typeface="Arial" pitchFamily="34" charset="-122"/>
-                <a:cs typeface="Arial" pitchFamily="34" charset="-120"/>
-              </a:rPr>
-              <a:t>SDP-redacted</a:t>
-            </a:r>
-            <a:endParaRPr lang="en-US" sz="500" dirty="0"/>
-          </a:p>
-          <a:p>
-            <a:pPr algn="l" indent="0" marL="0">
-              <a:lnSpc>
-                <a:spcPct val="88000"/>
-              </a:lnSpc>
-              <a:buNone/>
-            </a:pPr>
-            <a:r>
-              <a:rPr lang="en-US" sz="440" dirty="0">
-                <a:solidFill>
-                  <a:srgbClr val="202124"/>
-                </a:solidFill>
-                <a:latin typeface="Arial" pitchFamily="34" charset="0"/>
-                <a:ea typeface="Arial" pitchFamily="34" charset="-122"/>
-                <a:cs typeface="Arial" pitchFamily="34" charset="-120"/>
-              </a:rPr>
-              <a:t>tenant response</a:t>
-            </a:r>
-            <a:endParaRPr lang="en-US" sz="500" dirty="0"/>
-          </a:p>
-        </p:txBody>
-      </p:sp>
-      <p:sp>
-        <p:nvSpPr>
-          <p:cNvPr id="192" name="Text 170"/>
-          <p:cNvSpPr/>
-          <p:nvPr/>
-        </p:nvSpPr>
-        <p:spPr>
-          <a:xfrm>
-            <a:off x="2983687" y="3348533"/>
-            <a:ext cx="669341" cy="219456"/>
-          </a:xfrm>
-          <a:prstGeom prst="rect">
-            <a:avLst/>
-          </a:prstGeom>
-          <a:noFill/>
-          <a:ln/>
-        </p:spPr>
-        <p:txBody>
-          <a:bodyPr wrap="square" lIns="0" tIns="0" rIns="0" bIns="0" rtlCol="0" anchor="ctr">
-            <a:normAutofit/>
-          </a:bodyPr>
-          <a:lstStyle/>
-          <a:p>
-            <a:pPr algn="l" indent="0" marL="0">
-              <a:lnSpc>
-                <a:spcPct val="88000"/>
-              </a:lnSpc>
-              <a:buNone/>
-            </a:pPr>
-            <a:r>
-              <a:rPr lang="en-US" sz="500" b="1" dirty="0">
-                <a:solidFill>
-                  <a:srgbClr val="202124"/>
-                </a:solidFill>
-                <a:latin typeface="Arial" pitchFamily="34" charset="0"/>
-                <a:ea typeface="Arial" pitchFamily="34" charset="-122"/>
-                <a:cs typeface="Arial" pitchFamily="34" charset="-120"/>
-              </a:rPr>
-              <a:t>Bind immutable</a:t>
-            </a:r>
-            <a:endParaRPr lang="en-US" sz="500" dirty="0"/>
-          </a:p>
-          <a:p>
-            <a:pPr algn="l" indent="0" marL="0">
-              <a:lnSpc>
-                <a:spcPct val="88000"/>
-              </a:lnSpc>
-              <a:buNone/>
-            </a:pPr>
-            <a:r>
-              <a:rPr lang="en-US" sz="440" dirty="0">
-                <a:solidFill>
-                  <a:srgbClr val="202124"/>
-                </a:solidFill>
-                <a:latin typeface="Arial" pitchFamily="34" charset="0"/>
-                <a:ea typeface="Arial" pitchFamily="34" charset="-122"/>
-                <a:cs typeface="Arial" pitchFamily="34" charset="-120"/>
-              </a:rPr>
-              <a:t>temp:tenant_id</a:t>
-            </a:r>
-            <a:endParaRPr lang="en-US" sz="500" dirty="0"/>
-          </a:p>
-        </p:txBody>
-      </p:sp>
-      <p:sp>
-        <p:nvSpPr>
-          <p:cNvPr id="193" name="Text 171"/>
-          <p:cNvSpPr/>
-          <p:nvPr/>
-        </p:nvSpPr>
-        <p:spPr>
-          <a:xfrm>
-            <a:off x="2462479" y="2865730"/>
-            <a:ext cx="678485" cy="219456"/>
-          </a:xfrm>
-          <a:prstGeom prst="rect">
-            <a:avLst/>
-          </a:prstGeom>
-          <a:noFill/>
-          <a:ln/>
-        </p:spPr>
-        <p:txBody>
-          <a:bodyPr wrap="square" lIns="0" tIns="0" rIns="0" bIns="0" rtlCol="0" anchor="ctr">
-            <a:normAutofit/>
-          </a:bodyPr>
-          <a:lstStyle/>
-          <a:p>
-            <a:pPr algn="ctr" indent="0" marL="0">
-              <a:lnSpc>
-                <a:spcPct val="88000"/>
-              </a:lnSpc>
-              <a:buNone/>
-            </a:pPr>
-            <a:r>
-              <a:rPr lang="en-US" sz="500" b="1" dirty="0">
-                <a:solidFill>
-                  <a:srgbClr val="202124"/>
-                </a:solidFill>
-                <a:latin typeface="Arial" pitchFamily="34" charset="0"/>
-                <a:ea typeface="Arial" pitchFamily="34" charset="-122"/>
-                <a:cs typeface="Arial" pitchFamily="34" charset="-120"/>
-              </a:rPr>
-              <a:t>Mint OBO +</a:t>
-            </a:r>
-            <a:endParaRPr lang="en-US" sz="500" dirty="0"/>
-          </a:p>
-          <a:p>
-            <a:pPr algn="ctr" indent="0" marL="0">
-              <a:lnSpc>
-                <a:spcPct val="88000"/>
-              </a:lnSpc>
-              <a:buNone/>
-            </a:pPr>
-            <a:r>
-              <a:rPr lang="en-US" sz="440" dirty="0">
-                <a:solidFill>
-                  <a:srgbClr val="202124"/>
-                </a:solidFill>
-                <a:latin typeface="Arial" pitchFamily="34" charset="0"/>
-                <a:ea typeface="Arial" pitchFamily="34" charset="-122"/>
-                <a:cs typeface="Arial" pitchFamily="34" charset="-120"/>
-              </a:rPr>
-              <a:t>KMS P-256 sig</a:t>
-            </a:r>
-            <a:endParaRPr lang="en-US" sz="500" dirty="0"/>
-          </a:p>
-        </p:txBody>
-      </p:sp>
-      <p:sp>
-        <p:nvSpPr>
-          <p:cNvPr id="194" name="Text 172"/>
-          <p:cNvSpPr/>
-          <p:nvPr/>
-        </p:nvSpPr>
-        <p:spPr>
-          <a:xfrm>
-            <a:off x="1757477" y="4614062"/>
-            <a:ext cx="686714" cy="121615"/>
-          </a:xfrm>
-          <a:prstGeom prst="rect">
-            <a:avLst/>
-          </a:prstGeom>
-          <a:noFill/>
-          <a:ln/>
-        </p:spPr>
-        <p:txBody>
-          <a:bodyPr wrap="square" lIns="0" tIns="0" rIns="0" bIns="0" rtlCol="0" anchor="ctr">
-            <a:normAutofit/>
-          </a:bodyPr>
-          <a:lstStyle/>
-          <a:p>
-            <a:pPr algn="l" indent="0" marL="0">
-              <a:lnSpc>
-                <a:spcPct val="88000"/>
-              </a:lnSpc>
-              <a:buNone/>
-            </a:pPr>
-            <a:r>
-              <a:rPr lang="en-US" sz="500" b="1" dirty="0">
-                <a:solidFill>
-                  <a:srgbClr val="202124"/>
-                </a:solidFill>
-                <a:latin typeface="Arial" pitchFamily="34" charset="0"/>
-                <a:ea typeface="Arial" pitchFamily="34" charset="-122"/>
-                <a:cs typeface="Arial" pitchFamily="34" charset="-120"/>
-              </a:rPr>
-              <a:t>Sanitize request</a:t>
-            </a:r>
-            <a:endParaRPr lang="en-US" sz="500" dirty="0"/>
-          </a:p>
-        </p:txBody>
-      </p:sp>
-      <p:sp>
-        <p:nvSpPr>
-          <p:cNvPr id="195" name="Text 173"/>
-          <p:cNvSpPr/>
-          <p:nvPr/>
-        </p:nvSpPr>
-        <p:spPr>
-          <a:xfrm>
-            <a:off x="1757477" y="4822546"/>
-            <a:ext cx="686714" cy="121615"/>
-          </a:xfrm>
-          <a:prstGeom prst="rect">
-            <a:avLst/>
-          </a:prstGeom>
-          <a:noFill/>
-          <a:ln/>
-        </p:spPr>
-        <p:txBody>
-          <a:bodyPr wrap="square" lIns="0" tIns="0" rIns="0" bIns="0" rtlCol="0" anchor="ctr">
-            <a:normAutofit/>
-          </a:bodyPr>
-          <a:lstStyle/>
-          <a:p>
-            <a:pPr algn="l" indent="0" marL="0">
-              <a:lnSpc>
-                <a:spcPct val="88000"/>
-              </a:lnSpc>
-              <a:buNone/>
-            </a:pPr>
-            <a:r>
-              <a:rPr lang="en-US" sz="500" b="1" dirty="0">
-                <a:solidFill>
-                  <a:srgbClr val="202124"/>
-                </a:solidFill>
-                <a:latin typeface="Arial" pitchFamily="34" charset="0"/>
-                <a:ea typeface="Arial" pitchFamily="34" charset="-122"/>
-                <a:cs typeface="Arial" pitchFamily="34" charset="-120"/>
-              </a:rPr>
-              <a:t>Sanitize response</a:t>
-            </a:r>
-            <a:endParaRPr lang="en-US" sz="500" dirty="0"/>
-          </a:p>
-        </p:txBody>
-      </p:sp>
-      <p:sp>
-        <p:nvSpPr>
-          <p:cNvPr id="196" name="Text 174"/>
-          <p:cNvSpPr/>
-          <p:nvPr/>
-        </p:nvSpPr>
-        <p:spPr>
-          <a:xfrm>
-            <a:off x="2435962" y="2074774"/>
-            <a:ext cx="495605" cy="219456"/>
-          </a:xfrm>
-          <a:prstGeom prst="rect">
-            <a:avLst/>
-          </a:prstGeom>
-          <a:noFill/>
-          <a:ln/>
-        </p:spPr>
-        <p:txBody>
-          <a:bodyPr wrap="square" lIns="0" tIns="0" rIns="0" bIns="0" rtlCol="0" anchor="ctr">
-            <a:normAutofit/>
-          </a:bodyPr>
-          <a:lstStyle/>
-          <a:p>
-            <a:pPr algn="ctr" indent="0" marL="0">
-              <a:lnSpc>
-                <a:spcPct val="88000"/>
-              </a:lnSpc>
-              <a:buNone/>
-            </a:pPr>
-            <a:r>
-              <a:rPr lang="en-US" sz="500" b="1" dirty="0">
-                <a:solidFill>
-                  <a:srgbClr val="202124"/>
-                </a:solidFill>
-                <a:latin typeface="Arial" pitchFamily="34" charset="0"/>
-                <a:ea typeface="Arial" pitchFamily="34" charset="-122"/>
-                <a:cs typeface="Arial" pitchFamily="34" charset="-120"/>
-              </a:rPr>
-              <a:t>Strip header</a:t>
-            </a:r>
-            <a:endParaRPr lang="en-US" sz="500" dirty="0"/>
-          </a:p>
-          <a:p>
-            <a:pPr algn="ctr" indent="0" marL="0">
-              <a:lnSpc>
-                <a:spcPct val="88000"/>
-              </a:lnSpc>
-              <a:buNone/>
-            </a:pPr>
-            <a:r>
-              <a:rPr lang="en-US" sz="440" dirty="0">
-                <a:solidFill>
-                  <a:srgbClr val="202124"/>
-                </a:solidFill>
-                <a:latin typeface="Arial" pitchFamily="34" charset="0"/>
-                <a:ea typeface="Arial" pitchFamily="34" charset="-122"/>
-                <a:cs typeface="Arial" pitchFamily="34" charset="-120"/>
-              </a:rPr>
-              <a:t>X-Tenant-ID</a:t>
-            </a:r>
-            <a:endParaRPr lang="en-US" sz="500" dirty="0"/>
-          </a:p>
-        </p:txBody>
-      </p:sp>
-      <p:sp>
-        <p:nvSpPr>
-          <p:cNvPr id="197" name="Text 175"/>
-          <p:cNvSpPr/>
-          <p:nvPr/>
-        </p:nvSpPr>
-        <p:spPr>
-          <a:xfrm>
-            <a:off x="2435962" y="2674620"/>
-            <a:ext cx="495605" cy="219456"/>
-          </a:xfrm>
-          <a:prstGeom prst="rect">
-            <a:avLst/>
-          </a:prstGeom>
-          <a:noFill/>
-          <a:ln/>
-        </p:spPr>
-        <p:txBody>
-          <a:bodyPr wrap="square" lIns="0" tIns="0" rIns="0" bIns="0" rtlCol="0" anchor="ctr">
-            <a:normAutofit/>
-          </a:bodyPr>
-          <a:lstStyle/>
-          <a:p>
-            <a:pPr algn="ctr" indent="0" marL="0">
-              <a:lnSpc>
-                <a:spcPct val="88000"/>
-              </a:lnSpc>
-              <a:buNone/>
-            </a:pPr>
-            <a:r>
-              <a:rPr lang="en-US" sz="500" b="1" dirty="0">
-                <a:solidFill>
-                  <a:srgbClr val="202124"/>
-                </a:solidFill>
-                <a:latin typeface="Arial" pitchFamily="34" charset="0"/>
-                <a:ea typeface="Arial" pitchFamily="34" charset="-122"/>
-                <a:cs typeface="Arial" pitchFamily="34" charset="-120"/>
-              </a:rPr>
-              <a:t>Filter Agent</a:t>
-            </a:r>
-            <a:endParaRPr lang="en-US" sz="500" dirty="0"/>
-          </a:p>
-          <a:p>
-            <a:pPr algn="ctr" indent="0" marL="0">
-              <a:lnSpc>
-                <a:spcPct val="88000"/>
-              </a:lnSpc>
-              <a:buNone/>
-            </a:pPr>
-            <a:r>
-              <a:rPr lang="en-US" sz="440" dirty="0">
-                <a:solidFill>
-                  <a:srgbClr val="202124"/>
-                </a:solidFill>
-                <a:latin typeface="Arial" pitchFamily="34" charset="0"/>
-                <a:ea typeface="Arial" pitchFamily="34" charset="-122"/>
-                <a:cs typeface="Arial" pitchFamily="34" charset="-120"/>
-              </a:rPr>
-              <a:t>Catalog</a:t>
-            </a:r>
-            <a:endParaRPr lang="en-US" sz="500" dirty="0"/>
-          </a:p>
-        </p:txBody>
-      </p:sp>
-      <p:sp>
-        <p:nvSpPr>
-          <p:cNvPr id="198" name="Text 176"/>
-          <p:cNvSpPr/>
-          <p:nvPr/>
-        </p:nvSpPr>
-        <p:spPr>
-          <a:xfrm>
-            <a:off x="3888029" y="1153973"/>
-            <a:ext cx="443484" cy="121615"/>
-          </a:xfrm>
-          <a:prstGeom prst="rect">
-            <a:avLst/>
-          </a:prstGeom>
-          <a:noFill/>
-          <a:ln/>
-        </p:spPr>
-        <p:txBody>
-          <a:bodyPr wrap="square" lIns="0" tIns="0" rIns="0" bIns="0" rtlCol="0" anchor="ctr">
-            <a:normAutofit/>
-          </a:bodyPr>
-          <a:lstStyle/>
-          <a:p>
-            <a:pPr algn="l" indent="0" marL="0">
-              <a:lnSpc>
-                <a:spcPct val="88000"/>
-              </a:lnSpc>
-              <a:buNone/>
-            </a:pPr>
-            <a:r>
-              <a:rPr lang="en-US" sz="500" b="1" dirty="0">
-                <a:solidFill>
-                  <a:srgbClr val="202124"/>
-                </a:solidFill>
-                <a:latin typeface="Arial" pitchFamily="34" charset="0"/>
-                <a:ea typeface="Arial" pitchFamily="34" charset="-122"/>
-                <a:cs typeface="Arial" pitchFamily="34" charset="-120"/>
-              </a:rPr>
-              <a:t>Response</a:t>
-            </a:r>
-            <a:endParaRPr lang="en-US" sz="500" dirty="0"/>
-          </a:p>
-        </p:txBody>
-      </p:sp>
-      <p:sp>
-        <p:nvSpPr>
-          <p:cNvPr id="199" name="Text 177"/>
-          <p:cNvSpPr/>
-          <p:nvPr/>
-        </p:nvSpPr>
-        <p:spPr>
-          <a:xfrm>
-            <a:off x="3888029" y="2731313"/>
-            <a:ext cx="443484" cy="121615"/>
-          </a:xfrm>
-          <a:prstGeom prst="rect">
-            <a:avLst/>
-          </a:prstGeom>
-          <a:noFill/>
-          <a:ln/>
-        </p:spPr>
-        <p:txBody>
-          <a:bodyPr wrap="square" lIns="0" tIns="0" rIns="0" bIns="0" rtlCol="0" anchor="ctr">
-            <a:normAutofit/>
-          </a:bodyPr>
-          <a:lstStyle/>
-          <a:p>
-            <a:pPr algn="l" indent="0" marL="0">
-              <a:lnSpc>
-                <a:spcPct val="88000"/>
-              </a:lnSpc>
-              <a:buNone/>
-            </a:pPr>
-            <a:r>
-              <a:rPr lang="en-US" sz="500" b="1" dirty="0">
-                <a:solidFill>
-                  <a:srgbClr val="202124"/>
-                </a:solidFill>
-                <a:latin typeface="Arial" pitchFamily="34" charset="0"/>
-                <a:ea typeface="Arial" pitchFamily="34" charset="-122"/>
-                <a:cs typeface="Arial" pitchFamily="34" charset="-120"/>
-              </a:rPr>
-              <a:t>Response</a:t>
-            </a:r>
-            <a:endParaRPr lang="en-US" sz="500" dirty="0"/>
-          </a:p>
-        </p:txBody>
-      </p:sp>
-      <p:sp>
-        <p:nvSpPr>
-          <p:cNvPr id="200" name="Text 178"/>
-          <p:cNvSpPr/>
-          <p:nvPr/>
-        </p:nvSpPr>
-        <p:spPr>
-          <a:xfrm>
-            <a:off x="3087929" y="1153973"/>
-            <a:ext cx="399593" cy="121615"/>
-          </a:xfrm>
-          <a:prstGeom prst="rect">
-            <a:avLst/>
-          </a:prstGeom>
-          <a:noFill/>
-          <a:ln/>
-        </p:spPr>
-        <p:txBody>
-          <a:bodyPr wrap="square" lIns="0" tIns="0" rIns="0" bIns="0" rtlCol="0" anchor="ctr">
-            <a:normAutofit/>
-          </a:bodyPr>
-          <a:lstStyle/>
-          <a:p>
-            <a:pPr algn="r" indent="0" marL="0">
-              <a:lnSpc>
-                <a:spcPct val="88000"/>
-              </a:lnSpc>
-              <a:buNone/>
-            </a:pPr>
-            <a:r>
-              <a:rPr lang="en-US" sz="500" b="1" dirty="0">
-                <a:solidFill>
-                  <a:srgbClr val="202124"/>
-                </a:solidFill>
-                <a:latin typeface="Arial" pitchFamily="34" charset="0"/>
-                <a:ea typeface="Arial" pitchFamily="34" charset="-122"/>
-                <a:cs typeface="Arial" pitchFamily="34" charset="-120"/>
-              </a:rPr>
-              <a:t>Request</a:t>
-            </a:r>
-            <a:endParaRPr lang="en-US" sz="500" dirty="0"/>
-          </a:p>
-        </p:txBody>
-      </p:sp>
-      <p:sp>
-        <p:nvSpPr>
-          <p:cNvPr id="201" name="Text 179"/>
-          <p:cNvSpPr/>
-          <p:nvPr/>
-        </p:nvSpPr>
-        <p:spPr>
-          <a:xfrm>
-            <a:off x="3087929" y="2731313"/>
-            <a:ext cx="399593" cy="121615"/>
-          </a:xfrm>
-          <a:prstGeom prst="rect">
-            <a:avLst/>
-          </a:prstGeom>
-          <a:noFill/>
-          <a:ln/>
-        </p:spPr>
-        <p:txBody>
-          <a:bodyPr wrap="square" lIns="0" tIns="0" rIns="0" bIns="0" rtlCol="0" anchor="ctr">
-            <a:normAutofit/>
-          </a:bodyPr>
-          <a:lstStyle/>
-          <a:p>
-            <a:pPr algn="r" indent="0" marL="0">
-              <a:lnSpc>
-                <a:spcPct val="88000"/>
-              </a:lnSpc>
-              <a:buNone/>
-            </a:pPr>
-            <a:r>
-              <a:rPr lang="en-US" sz="500" b="1" dirty="0">
-                <a:solidFill>
-                  <a:srgbClr val="202124"/>
-                </a:solidFill>
-                <a:latin typeface="Arial" pitchFamily="34" charset="0"/>
-                <a:ea typeface="Arial" pitchFamily="34" charset="-122"/>
-                <a:cs typeface="Arial" pitchFamily="34" charset="-120"/>
-              </a:rPr>
-              <a:t>Request</a:t>
-            </a:r>
-            <a:endParaRPr lang="en-US" sz="500" dirty="0"/>
-          </a:p>
-        </p:txBody>
-      </p:sp>
-      <p:sp>
-        <p:nvSpPr>
-          <p:cNvPr id="202" name="Shape 180"/>
+          <p:cNvPr id="185" name="Shape 163"/>
           <p:cNvSpPr/>
           <p:nvPr/>
         </p:nvSpPr>
@@ -20695,7 +19727,7 @@
       </p:sp>
       <p:sp>
         <p:nvSpPr>
-          <p:cNvPr id="203" name="Text 181"/>
+          <p:cNvPr id="186" name="Text 164"/>
           <p:cNvSpPr/>
           <p:nvPr/>
         </p:nvSpPr>
@@ -20734,7 +19766,7 @@
       </p:sp>
       <p:sp>
         <p:nvSpPr>
-          <p:cNvPr id="204" name="Shape 182"/>
+          <p:cNvPr id="187" name="Shape 165"/>
           <p:cNvSpPr/>
           <p:nvPr/>
         </p:nvSpPr>
@@ -20759,7 +19791,7 @@
       </p:sp>
       <p:sp>
         <p:nvSpPr>
-          <p:cNvPr id="205" name="Text 183"/>
+          <p:cNvPr id="188" name="Text 166"/>
           <p:cNvSpPr/>
           <p:nvPr/>
         </p:nvSpPr>
@@ -20798,7 +19830,7 @@
       </p:sp>
       <p:sp>
         <p:nvSpPr>
-          <p:cNvPr id="206" name="Shape 184"/>
+          <p:cNvPr id="189" name="Shape 167"/>
           <p:cNvSpPr/>
           <p:nvPr/>
         </p:nvSpPr>
@@ -20823,7 +19855,7 @@
       </p:sp>
       <p:sp>
         <p:nvSpPr>
-          <p:cNvPr id="207" name="Text 185"/>
+          <p:cNvPr id="190" name="Text 168"/>
           <p:cNvSpPr/>
           <p:nvPr/>
         </p:nvSpPr>
@@ -20862,7 +19894,7 @@
       </p:sp>
       <p:sp>
         <p:nvSpPr>
-          <p:cNvPr id="208" name="Shape 186"/>
+          <p:cNvPr id="191" name="Shape 169"/>
           <p:cNvSpPr/>
           <p:nvPr/>
         </p:nvSpPr>
@@ -20887,7 +19919,7 @@
       </p:sp>
       <p:sp>
         <p:nvSpPr>
-          <p:cNvPr id="209" name="Text 187"/>
+          <p:cNvPr id="192" name="Text 170"/>
           <p:cNvSpPr/>
           <p:nvPr/>
         </p:nvSpPr>
@@ -20926,7 +19958,7 @@
       </p:sp>
       <p:sp>
         <p:nvSpPr>
-          <p:cNvPr id="210" name="Shape 188"/>
+          <p:cNvPr id="193" name="Shape 171"/>
           <p:cNvSpPr/>
           <p:nvPr/>
         </p:nvSpPr>
@@ -20951,7 +19983,7 @@
       </p:sp>
       <p:sp>
         <p:nvSpPr>
-          <p:cNvPr id="211" name="Text 189"/>
+          <p:cNvPr id="194" name="Text 172"/>
           <p:cNvSpPr/>
           <p:nvPr/>
         </p:nvSpPr>
@@ -20990,7 +20022,7 @@
       </p:sp>
       <p:sp>
         <p:nvSpPr>
-          <p:cNvPr id="212" name="Shape 190"/>
+          <p:cNvPr id="195" name="Shape 173"/>
           <p:cNvSpPr/>
           <p:nvPr/>
         </p:nvSpPr>
@@ -21015,7 +20047,7 @@
       </p:sp>
       <p:sp>
         <p:nvSpPr>
-          <p:cNvPr id="213" name="Text 191"/>
+          <p:cNvPr id="196" name="Text 174"/>
           <p:cNvSpPr/>
           <p:nvPr/>
         </p:nvSpPr>
@@ -21054,7 +20086,7 @@
       </p:sp>
       <p:sp>
         <p:nvSpPr>
-          <p:cNvPr id="214" name="Shape 192"/>
+          <p:cNvPr id="197" name="Shape 175"/>
           <p:cNvSpPr/>
           <p:nvPr/>
         </p:nvSpPr>
@@ -21079,7 +20111,7 @@
       </p:sp>
       <p:sp>
         <p:nvSpPr>
-          <p:cNvPr id="215" name="Text 193"/>
+          <p:cNvPr id="198" name="Text 176"/>
           <p:cNvSpPr/>
           <p:nvPr/>
         </p:nvSpPr>
@@ -21118,7 +20150,7 @@
       </p:sp>
       <p:sp>
         <p:nvSpPr>
-          <p:cNvPr id="216" name="Shape 194"/>
+          <p:cNvPr id="199" name="Shape 177"/>
           <p:cNvSpPr/>
           <p:nvPr/>
         </p:nvSpPr>
@@ -21143,7 +20175,7 @@
       </p:sp>
       <p:sp>
         <p:nvSpPr>
-          <p:cNvPr id="217" name="Text 195"/>
+          <p:cNvPr id="200" name="Text 178"/>
           <p:cNvSpPr/>
           <p:nvPr/>
         </p:nvSpPr>
@@ -21182,7 +20214,7 @@
       </p:sp>
       <p:sp>
         <p:nvSpPr>
-          <p:cNvPr id="218" name="Shape 196"/>
+          <p:cNvPr id="201" name="Shape 179"/>
           <p:cNvSpPr/>
           <p:nvPr/>
         </p:nvSpPr>
@@ -21207,7 +20239,7 @@
       </p:sp>
       <p:sp>
         <p:nvSpPr>
-          <p:cNvPr id="219" name="Text 197"/>
+          <p:cNvPr id="202" name="Text 180"/>
           <p:cNvSpPr/>
           <p:nvPr/>
         </p:nvSpPr>
@@ -21246,7 +20278,1434 @@
       </p:sp>
       <p:sp>
         <p:nvSpPr>
+          <p:cNvPr id="203" name="Shape 181"/>
+          <p:cNvSpPr/>
+          <p:nvPr/>
+        </p:nvSpPr>
+        <p:spPr>
+          <a:xfrm>
+            <a:off x="5339182" y="3353105"/>
+            <a:ext cx="760781" cy="217627"/>
+          </a:xfrm>
+          <a:prstGeom prst="roundRect">
+            <a:avLst>
+              <a:gd name="adj" fmla="val 21008"/>
+            </a:avLst>
+          </a:prstGeom>
+          <a:solidFill>
+            <a:srgbClr val="FFFFFF"/>
+          </a:solidFill>
+          <a:ln w="5715">
+            <a:solidFill>
+              <a:srgbClr val="DADCE0"/>
+            </a:solidFill>
+            <a:prstDash val="solid"/>
+          </a:ln>
+        </p:spPr>
+      </p:sp>
+      <p:sp>
+        <p:nvSpPr>
+          <p:cNvPr id="204" name="Text 182"/>
+          <p:cNvSpPr/>
+          <p:nvPr/>
+        </p:nvSpPr>
+        <p:spPr>
+          <a:xfrm>
+            <a:off x="5357470" y="3362249"/>
+            <a:ext cx="724205" cy="199339"/>
+          </a:xfrm>
+          <a:prstGeom prst="rect">
+            <a:avLst/>
+          </a:prstGeom>
+          <a:noFill/>
+          <a:ln/>
+        </p:spPr>
+        <p:txBody>
+          <a:bodyPr wrap="square" lIns="0" tIns="0" rIns="0" bIns="0" rtlCol="0" anchor="ctr">
+            <a:normAutofit/>
+          </a:bodyPr>
+          <a:lstStyle/>
+          <a:p>
+            <a:pPr algn="ctr" indent="0" marL="0">
+              <a:lnSpc>
+                <a:spcPct val="86000"/>
+              </a:lnSpc>
+              <a:buNone/>
+            </a:pPr>
+            <a:r>
+              <a:rPr lang="en-US" sz="480" b="1" dirty="0">
+                <a:solidFill>
+                  <a:srgbClr val="202124"/>
+                </a:solidFill>
+                <a:latin typeface="Arial" pitchFamily="34" charset="0"/>
+                <a:ea typeface="Arial" pitchFamily="34" charset="-122"/>
+                <a:cs typeface="Arial" pitchFamily="34" charset="-120"/>
+              </a:rPr>
+              <a:t>84.7% Net Input</a:t>
+            </a:r>
+            <a:endParaRPr lang="en-US" sz="480" dirty="0"/>
+          </a:p>
+          <a:p>
+            <a:pPr algn="ctr" indent="0" marL="0">
+              <a:lnSpc>
+                <a:spcPct val="86000"/>
+              </a:lnSpc>
+              <a:buNone/>
+            </a:pPr>
+            <a:r>
+              <a:rPr lang="en-US" sz="420" dirty="0">
+                <a:solidFill>
+                  <a:srgbClr val="202124"/>
+                </a:solidFill>
+                <a:latin typeface="Arial" pitchFamily="34" charset="0"/>
+                <a:ea typeface="Arial" pitchFamily="34" charset="-122"/>
+                <a:cs typeface="Arial" pitchFamily="34" charset="-120"/>
+              </a:rPr>
+              <a:t>COGS Savings &amp; OTel</a:t>
+            </a:r>
+            <a:endParaRPr lang="en-US" sz="480" dirty="0"/>
+          </a:p>
+        </p:txBody>
+      </p:sp>
+      <p:sp>
+        <p:nvSpPr>
+          <p:cNvPr id="205" name="Shape 183"/>
+          <p:cNvSpPr/>
+          <p:nvPr/>
+        </p:nvSpPr>
+        <p:spPr>
+          <a:xfrm>
+            <a:off x="2704795" y="4817059"/>
+            <a:ext cx="757123" cy="210312"/>
+          </a:xfrm>
+          <a:prstGeom prst="roundRect">
+            <a:avLst>
+              <a:gd name="adj" fmla="val 21739"/>
+            </a:avLst>
+          </a:prstGeom>
+          <a:solidFill>
+            <a:srgbClr val="FFFFFF"/>
+          </a:solidFill>
+          <a:ln w="5715">
+            <a:solidFill>
+              <a:srgbClr val="DADCE0"/>
+            </a:solidFill>
+            <a:prstDash val="solid"/>
+          </a:ln>
+        </p:spPr>
+      </p:sp>
+      <p:sp>
+        <p:nvSpPr>
+          <p:cNvPr id="206" name="Text 184"/>
+          <p:cNvSpPr/>
+          <p:nvPr/>
+        </p:nvSpPr>
+        <p:spPr>
+          <a:xfrm>
+            <a:off x="2723083" y="4826203"/>
+            <a:ext cx="720547" cy="192024"/>
+          </a:xfrm>
+          <a:prstGeom prst="rect">
+            <a:avLst/>
+          </a:prstGeom>
+          <a:noFill/>
+          <a:ln/>
+        </p:spPr>
+        <p:txBody>
+          <a:bodyPr wrap="square" lIns="0" tIns="0" rIns="0" bIns="0" rtlCol="0" anchor="ctr">
+            <a:normAutofit/>
+          </a:bodyPr>
+          <a:lstStyle/>
+          <a:p>
+            <a:pPr algn="ctr" indent="0" marL="0">
+              <a:lnSpc>
+                <a:spcPct val="86000"/>
+              </a:lnSpc>
+              <a:buNone/>
+            </a:pPr>
+            <a:r>
+              <a:rPr lang="en-US" sz="480" b="1" dirty="0">
+                <a:solidFill>
+                  <a:srgbClr val="202124"/>
+                </a:solidFill>
+                <a:latin typeface="Arial" pitchFamily="34" charset="0"/>
+                <a:ea typeface="Arial" pitchFamily="34" charset="-122"/>
+                <a:cs typeface="Arial" pitchFamily="34" charset="-120"/>
+              </a:rPr>
+              <a:t>GCS Skills:</a:t>
+            </a:r>
+            <a:endParaRPr lang="en-US" sz="480" dirty="0"/>
+          </a:p>
+          <a:p>
+            <a:pPr algn="ctr" indent="0" marL="0">
+              <a:lnSpc>
+                <a:spcPct val="86000"/>
+              </a:lnSpc>
+              <a:buNone/>
+            </a:pPr>
+            <a:r>
+              <a:rPr lang="en-US" sz="420" dirty="0">
+                <a:solidFill>
+                  <a:srgbClr val="202124"/>
+                </a:solidFill>
+                <a:latin typeface="Arial" pitchFamily="34" charset="0"/>
+                <a:ea typeface="Arial" pitchFamily="34" charset="-122"/>
+                <a:cs typeface="Arial" pitchFamily="34" charset="-120"/>
+              </a:rPr>
+              <a:t>cymbal-skills-fv</a:t>
+            </a:r>
+            <a:endParaRPr lang="en-US" sz="480" dirty="0"/>
+          </a:p>
+        </p:txBody>
+      </p:sp>
+      <p:sp>
+        <p:nvSpPr>
+          <p:cNvPr id="207" name="Shape 185"/>
+          <p:cNvSpPr/>
+          <p:nvPr/>
+        </p:nvSpPr>
+        <p:spPr>
+          <a:xfrm>
+            <a:off x="2763317" y="5451653"/>
+            <a:ext cx="639166" cy="210312"/>
+          </a:xfrm>
+          <a:prstGeom prst="roundRect">
+            <a:avLst>
+              <a:gd name="adj" fmla="val 21739"/>
+            </a:avLst>
+          </a:prstGeom>
+          <a:solidFill>
+            <a:srgbClr val="FFFFFF"/>
+          </a:solidFill>
+          <a:ln w="5715">
+            <a:solidFill>
+              <a:srgbClr val="DADCE0"/>
+            </a:solidFill>
+            <a:prstDash val="solid"/>
+          </a:ln>
+        </p:spPr>
+      </p:sp>
+      <p:sp>
+        <p:nvSpPr>
+          <p:cNvPr id="208" name="Text 186"/>
+          <p:cNvSpPr/>
+          <p:nvPr/>
+        </p:nvSpPr>
+        <p:spPr>
+          <a:xfrm>
+            <a:off x="2781605" y="5460797"/>
+            <a:ext cx="602590" cy="192024"/>
+          </a:xfrm>
+          <a:prstGeom prst="rect">
+            <a:avLst/>
+          </a:prstGeom>
+          <a:noFill/>
+          <a:ln/>
+        </p:spPr>
+        <p:txBody>
+          <a:bodyPr wrap="square" lIns="0" tIns="0" rIns="0" bIns="0" rtlCol="0" anchor="ctr">
+            <a:normAutofit/>
+          </a:bodyPr>
+          <a:lstStyle/>
+          <a:p>
+            <a:pPr algn="ctr" indent="0" marL="0">
+              <a:lnSpc>
+                <a:spcPct val="86000"/>
+              </a:lnSpc>
+              <a:buNone/>
+            </a:pPr>
+            <a:r>
+              <a:rPr lang="en-US" sz="480" b="1" dirty="0">
+                <a:solidFill>
+                  <a:srgbClr val="202124"/>
+                </a:solidFill>
+                <a:latin typeface="Arial" pitchFamily="34" charset="0"/>
+                <a:ea typeface="Arial" pitchFamily="34" charset="-122"/>
+                <a:cs typeface="Arial" pitchFamily="34" charset="-120"/>
+              </a:rPr>
+              <a:t>RLS Policy:</a:t>
+            </a:r>
+            <a:endParaRPr lang="en-US" sz="480" dirty="0"/>
+          </a:p>
+          <a:p>
+            <a:pPr algn="ctr" indent="0" marL="0">
+              <a:lnSpc>
+                <a:spcPct val="86000"/>
+              </a:lnSpc>
+              <a:buNone/>
+            </a:pPr>
+            <a:r>
+              <a:rPr lang="en-US" sz="420" dirty="0">
+                <a:solidFill>
+                  <a:srgbClr val="202124"/>
+                </a:solidFill>
+                <a:latin typeface="Arial" pitchFamily="34" charset="0"/>
+                <a:ea typeface="Arial" pitchFamily="34" charset="-122"/>
+                <a:cs typeface="Arial" pitchFamily="34" charset="-120"/>
+              </a:rPr>
+              <a:t>finvault Rows</a:t>
+            </a:r>
+            <a:endParaRPr lang="en-US" sz="480" dirty="0"/>
+          </a:p>
+        </p:txBody>
+      </p:sp>
+      <p:sp>
+        <p:nvSpPr>
+          <p:cNvPr id="209" name="Shape 187"/>
+          <p:cNvSpPr/>
+          <p:nvPr/>
+        </p:nvSpPr>
+        <p:spPr>
+          <a:xfrm>
+            <a:off x="5069434" y="4817059"/>
+            <a:ext cx="757123" cy="210312"/>
+          </a:xfrm>
+          <a:prstGeom prst="roundRect">
+            <a:avLst>
+              <a:gd name="adj" fmla="val 21739"/>
+            </a:avLst>
+          </a:prstGeom>
+          <a:solidFill>
+            <a:srgbClr val="FFFFFF"/>
+          </a:solidFill>
+          <a:ln w="5715">
+            <a:solidFill>
+              <a:srgbClr val="DADCE0"/>
+            </a:solidFill>
+            <a:prstDash val="solid"/>
+          </a:ln>
+        </p:spPr>
+      </p:sp>
+      <p:sp>
+        <p:nvSpPr>
+          <p:cNvPr id="210" name="Text 188"/>
+          <p:cNvSpPr/>
+          <p:nvPr/>
+        </p:nvSpPr>
+        <p:spPr>
+          <a:xfrm>
+            <a:off x="5087722" y="4826203"/>
+            <a:ext cx="720547" cy="192024"/>
+          </a:xfrm>
+          <a:prstGeom prst="rect">
+            <a:avLst/>
+          </a:prstGeom>
+          <a:noFill/>
+          <a:ln/>
+        </p:spPr>
+        <p:txBody>
+          <a:bodyPr wrap="square" lIns="0" tIns="0" rIns="0" bIns="0" rtlCol="0" anchor="ctr">
+            <a:normAutofit/>
+          </a:bodyPr>
+          <a:lstStyle/>
+          <a:p>
+            <a:pPr algn="ctr" indent="0" marL="0">
+              <a:lnSpc>
+                <a:spcPct val="86000"/>
+              </a:lnSpc>
+              <a:buNone/>
+            </a:pPr>
+            <a:r>
+              <a:rPr lang="en-US" sz="480" b="1" dirty="0">
+                <a:solidFill>
+                  <a:srgbClr val="202124"/>
+                </a:solidFill>
+                <a:latin typeface="Arial" pitchFamily="34" charset="0"/>
+                <a:ea typeface="Arial" pitchFamily="34" charset="-122"/>
+                <a:cs typeface="Arial" pitchFamily="34" charset="-120"/>
+              </a:rPr>
+              <a:t>GCS Skills:</a:t>
+            </a:r>
+            <a:endParaRPr lang="en-US" sz="480" dirty="0"/>
+          </a:p>
+          <a:p>
+            <a:pPr algn="ctr" indent="0" marL="0">
+              <a:lnSpc>
+                <a:spcPct val="86000"/>
+              </a:lnSpc>
+              <a:buNone/>
+            </a:pPr>
+            <a:r>
+              <a:rPr lang="en-US" sz="420" dirty="0">
+                <a:solidFill>
+                  <a:srgbClr val="202124"/>
+                </a:solidFill>
+                <a:latin typeface="Arial" pitchFamily="34" charset="0"/>
+                <a:ea typeface="Arial" pitchFamily="34" charset="-122"/>
+                <a:cs typeface="Arial" pitchFamily="34" charset="-120"/>
+              </a:rPr>
+              <a:t>cymbal-skills-rs</a:t>
+            </a:r>
+            <a:endParaRPr lang="en-US" sz="480" dirty="0"/>
+          </a:p>
+        </p:txBody>
+      </p:sp>
+      <p:sp>
+        <p:nvSpPr>
+          <p:cNvPr id="211" name="Shape 189"/>
+          <p:cNvSpPr/>
+          <p:nvPr/>
+        </p:nvSpPr>
+        <p:spPr>
+          <a:xfrm>
+            <a:off x="5168189" y="5451653"/>
+            <a:ext cx="560527" cy="210312"/>
+          </a:xfrm>
+          <a:prstGeom prst="roundRect">
+            <a:avLst>
+              <a:gd name="adj" fmla="val 21739"/>
+            </a:avLst>
+          </a:prstGeom>
+          <a:solidFill>
+            <a:srgbClr val="FFFFFF"/>
+          </a:solidFill>
+          <a:ln w="5715">
+            <a:solidFill>
+              <a:srgbClr val="DADCE0"/>
+            </a:solidFill>
+            <a:prstDash val="solid"/>
+          </a:ln>
+        </p:spPr>
+      </p:sp>
+      <p:sp>
+        <p:nvSpPr>
+          <p:cNvPr id="212" name="Text 190"/>
+          <p:cNvSpPr/>
+          <p:nvPr/>
+        </p:nvSpPr>
+        <p:spPr>
+          <a:xfrm>
+            <a:off x="5186477" y="5460797"/>
+            <a:ext cx="523951" cy="192024"/>
+          </a:xfrm>
+          <a:prstGeom prst="rect">
+            <a:avLst/>
+          </a:prstGeom>
+          <a:noFill/>
+          <a:ln/>
+        </p:spPr>
+        <p:txBody>
+          <a:bodyPr wrap="square" lIns="0" tIns="0" rIns="0" bIns="0" rtlCol="0" anchor="ctr">
+            <a:normAutofit/>
+          </a:bodyPr>
+          <a:lstStyle/>
+          <a:p>
+            <a:pPr algn="ctr" indent="0" marL="0">
+              <a:lnSpc>
+                <a:spcPct val="86000"/>
+              </a:lnSpc>
+              <a:buNone/>
+            </a:pPr>
+            <a:r>
+              <a:rPr lang="en-US" sz="480" b="1" dirty="0">
+                <a:solidFill>
+                  <a:srgbClr val="202124"/>
+                </a:solidFill>
+                <a:latin typeface="Arial" pitchFamily="34" charset="0"/>
+                <a:ea typeface="Arial" pitchFamily="34" charset="-122"/>
+                <a:cs typeface="Arial" pitchFamily="34" charset="-120"/>
+              </a:rPr>
+              <a:t>RLS Policy:</a:t>
+            </a:r>
+            <a:endParaRPr lang="en-US" sz="480" dirty="0"/>
+          </a:p>
+          <a:p>
+            <a:pPr algn="ctr" indent="0" marL="0">
+              <a:lnSpc>
+                <a:spcPct val="86000"/>
+              </a:lnSpc>
+              <a:buNone/>
+            </a:pPr>
+            <a:r>
+              <a:rPr lang="en-US" sz="420" dirty="0">
+                <a:solidFill>
+                  <a:srgbClr val="202124"/>
+                </a:solidFill>
+                <a:latin typeface="Arial" pitchFamily="34" charset="0"/>
+                <a:ea typeface="Arial" pitchFamily="34" charset="-122"/>
+                <a:cs typeface="Arial" pitchFamily="34" charset="-120"/>
+              </a:rPr>
+              <a:t>retail Rows</a:t>
+            </a:r>
+            <a:endParaRPr lang="en-US" sz="480" dirty="0"/>
+          </a:p>
+        </p:txBody>
+      </p:sp>
+      <p:sp>
+        <p:nvSpPr>
+          <p:cNvPr id="213" name="Shape 191"/>
+          <p:cNvSpPr/>
+          <p:nvPr/>
+        </p:nvSpPr>
+        <p:spPr>
+          <a:xfrm>
+            <a:off x="1845259" y="5603443"/>
+            <a:ext cx="512064" cy="210312"/>
+          </a:xfrm>
+          <a:prstGeom prst="roundRect">
+            <a:avLst>
+              <a:gd name="adj" fmla="val 21739"/>
+            </a:avLst>
+          </a:prstGeom>
+          <a:solidFill>
+            <a:srgbClr val="FFFFFF"/>
+          </a:solidFill>
+          <a:ln w="5715">
+            <a:solidFill>
+              <a:srgbClr val="DADCE0"/>
+            </a:solidFill>
+            <a:prstDash val="solid"/>
+          </a:ln>
+        </p:spPr>
+      </p:sp>
+      <p:sp>
+        <p:nvSpPr>
+          <p:cNvPr id="214" name="Text 192"/>
+          <p:cNvSpPr/>
+          <p:nvPr/>
+        </p:nvSpPr>
+        <p:spPr>
+          <a:xfrm>
+            <a:off x="1863547" y="5612587"/>
+            <a:ext cx="475488" cy="192024"/>
+          </a:xfrm>
+          <a:prstGeom prst="rect">
+            <a:avLst/>
+          </a:prstGeom>
+          <a:noFill/>
+          <a:ln/>
+        </p:spPr>
+        <p:txBody>
+          <a:bodyPr wrap="square" lIns="0" tIns="0" rIns="0" bIns="0" rtlCol="0" anchor="ctr">
+            <a:normAutofit/>
+          </a:bodyPr>
+          <a:lstStyle/>
+          <a:p>
+            <a:pPr algn="ctr" indent="0" marL="0">
+              <a:lnSpc>
+                <a:spcPct val="86000"/>
+              </a:lnSpc>
+              <a:buNone/>
+            </a:pPr>
+            <a:r>
+              <a:rPr lang="en-US" sz="480" b="1" dirty="0">
+                <a:solidFill>
+                  <a:srgbClr val="202124"/>
+                </a:solidFill>
+                <a:latin typeface="Arial" pitchFamily="34" charset="0"/>
+                <a:ea typeface="Arial" pitchFamily="34" charset="-122"/>
+                <a:cs typeface="Arial" pitchFamily="34" charset="-120"/>
+              </a:rPr>
+              <a:t>Generates</a:t>
+            </a:r>
+            <a:endParaRPr lang="en-US" sz="480" dirty="0"/>
+          </a:p>
+          <a:p>
+            <a:pPr algn="ctr" indent="0" marL="0">
+              <a:lnSpc>
+                <a:spcPct val="86000"/>
+              </a:lnSpc>
+              <a:buNone/>
+            </a:pPr>
+            <a:r>
+              <a:rPr lang="en-US" sz="420" dirty="0">
+                <a:solidFill>
+                  <a:srgbClr val="202124"/>
+                </a:solidFill>
+                <a:latin typeface="Arial" pitchFamily="34" charset="0"/>
+                <a:ea typeface="Arial" pitchFamily="34" charset="-122"/>
+                <a:cs typeface="Arial" pitchFamily="34" charset="-120"/>
+              </a:rPr>
+              <a:t>response</a:t>
+            </a:r>
+            <a:endParaRPr lang="en-US" sz="480" dirty="0"/>
+          </a:p>
+        </p:txBody>
+      </p:sp>
+      <p:sp>
+        <p:nvSpPr>
+          <p:cNvPr id="215" name="Shape 193"/>
+          <p:cNvSpPr/>
+          <p:nvPr/>
+        </p:nvSpPr>
+        <p:spPr>
+          <a:xfrm>
+            <a:off x="3915461" y="3353105"/>
+            <a:ext cx="717804" cy="210312"/>
+          </a:xfrm>
+          <a:prstGeom prst="roundRect">
+            <a:avLst>
+              <a:gd name="adj" fmla="val 21739"/>
+            </a:avLst>
+          </a:prstGeom>
+          <a:solidFill>
+            <a:srgbClr val="FFFFFF"/>
+          </a:solidFill>
+          <a:ln w="5715">
+            <a:solidFill>
+              <a:srgbClr val="DADCE0"/>
+            </a:solidFill>
+            <a:prstDash val="solid"/>
+          </a:ln>
+        </p:spPr>
+      </p:sp>
+      <p:sp>
+        <p:nvSpPr>
+          <p:cNvPr id="216" name="Text 194"/>
+          <p:cNvSpPr/>
+          <p:nvPr/>
+        </p:nvSpPr>
+        <p:spPr>
+          <a:xfrm>
+            <a:off x="3933749" y="3362249"/>
+            <a:ext cx="681228" cy="192024"/>
+          </a:xfrm>
+          <a:prstGeom prst="rect">
+            <a:avLst/>
+          </a:prstGeom>
+          <a:noFill/>
+          <a:ln/>
+        </p:spPr>
+        <p:txBody>
+          <a:bodyPr wrap="square" lIns="0" tIns="0" rIns="0" bIns="0" rtlCol="0" anchor="ctr">
+            <a:normAutofit/>
+          </a:bodyPr>
+          <a:lstStyle/>
+          <a:p>
+            <a:pPr algn="ctr" indent="0" marL="0">
+              <a:lnSpc>
+                <a:spcPct val="86000"/>
+              </a:lnSpc>
+              <a:buNone/>
+            </a:pPr>
+            <a:r>
+              <a:rPr lang="en-US" sz="480" b="1" dirty="0">
+                <a:solidFill>
+                  <a:srgbClr val="202124"/>
+                </a:solidFill>
+                <a:latin typeface="Arial" pitchFamily="34" charset="0"/>
+                <a:ea typeface="Arial" pitchFamily="34" charset="-122"/>
+                <a:cs typeface="Arial" pitchFamily="34" charset="-120"/>
+              </a:rPr>
+              <a:t>SDP-redacted</a:t>
+            </a:r>
+            <a:endParaRPr lang="en-US" sz="480" dirty="0"/>
+          </a:p>
+          <a:p>
+            <a:pPr algn="ctr" indent="0" marL="0">
+              <a:lnSpc>
+                <a:spcPct val="86000"/>
+              </a:lnSpc>
+              <a:buNone/>
+            </a:pPr>
+            <a:r>
+              <a:rPr lang="en-US" sz="420" dirty="0">
+                <a:solidFill>
+                  <a:srgbClr val="202124"/>
+                </a:solidFill>
+                <a:latin typeface="Arial" pitchFamily="34" charset="0"/>
+                <a:ea typeface="Arial" pitchFamily="34" charset="-122"/>
+                <a:cs typeface="Arial" pitchFamily="34" charset="-120"/>
+              </a:rPr>
+              <a:t>tenant response</a:t>
+            </a:r>
+            <a:endParaRPr lang="en-US" sz="480" dirty="0"/>
+          </a:p>
+        </p:txBody>
+      </p:sp>
+      <p:sp>
+        <p:nvSpPr>
+          <p:cNvPr id="217" name="Shape 195"/>
+          <p:cNvSpPr/>
+          <p:nvPr/>
+        </p:nvSpPr>
+        <p:spPr>
+          <a:xfrm>
+            <a:off x="2983687" y="3353105"/>
+            <a:ext cx="669341" cy="210312"/>
+          </a:xfrm>
+          <a:prstGeom prst="roundRect">
+            <a:avLst>
+              <a:gd name="adj" fmla="val 21739"/>
+            </a:avLst>
+          </a:prstGeom>
+          <a:solidFill>
+            <a:srgbClr val="FFFFFF"/>
+          </a:solidFill>
+          <a:ln w="5715">
+            <a:solidFill>
+              <a:srgbClr val="DADCE0"/>
+            </a:solidFill>
+            <a:prstDash val="solid"/>
+          </a:ln>
+        </p:spPr>
+      </p:sp>
+      <p:sp>
+        <p:nvSpPr>
+          <p:cNvPr id="218" name="Text 196"/>
+          <p:cNvSpPr/>
+          <p:nvPr/>
+        </p:nvSpPr>
+        <p:spPr>
+          <a:xfrm>
+            <a:off x="3001975" y="3362249"/>
+            <a:ext cx="632765" cy="192024"/>
+          </a:xfrm>
+          <a:prstGeom prst="rect">
+            <a:avLst/>
+          </a:prstGeom>
+          <a:noFill/>
+          <a:ln/>
+        </p:spPr>
+        <p:txBody>
+          <a:bodyPr wrap="square" lIns="0" tIns="0" rIns="0" bIns="0" rtlCol="0" anchor="ctr">
+            <a:normAutofit/>
+          </a:bodyPr>
+          <a:lstStyle/>
+          <a:p>
+            <a:pPr algn="ctr" indent="0" marL="0">
+              <a:lnSpc>
+                <a:spcPct val="86000"/>
+              </a:lnSpc>
+              <a:buNone/>
+            </a:pPr>
+            <a:r>
+              <a:rPr lang="en-US" sz="480" b="1" dirty="0">
+                <a:solidFill>
+                  <a:srgbClr val="202124"/>
+                </a:solidFill>
+                <a:latin typeface="Arial" pitchFamily="34" charset="0"/>
+                <a:ea typeface="Arial" pitchFamily="34" charset="-122"/>
+                <a:cs typeface="Arial" pitchFamily="34" charset="-120"/>
+              </a:rPr>
+              <a:t>Bind immutable</a:t>
+            </a:r>
+            <a:endParaRPr lang="en-US" sz="480" dirty="0"/>
+          </a:p>
+          <a:p>
+            <a:pPr algn="ctr" indent="0" marL="0">
+              <a:lnSpc>
+                <a:spcPct val="86000"/>
+              </a:lnSpc>
+              <a:buNone/>
+            </a:pPr>
+            <a:r>
+              <a:rPr lang="en-US" sz="420" dirty="0">
+                <a:solidFill>
+                  <a:srgbClr val="202124"/>
+                </a:solidFill>
+                <a:latin typeface="Arial" pitchFamily="34" charset="0"/>
+                <a:ea typeface="Arial" pitchFamily="34" charset="-122"/>
+                <a:cs typeface="Arial" pitchFamily="34" charset="-120"/>
+              </a:rPr>
+              <a:t>temp:tenant_id</a:t>
+            </a:r>
+            <a:endParaRPr lang="en-US" sz="480" dirty="0"/>
+          </a:p>
+        </p:txBody>
+      </p:sp>
+      <p:sp>
+        <p:nvSpPr>
+          <p:cNvPr id="219" name="Shape 197"/>
+          <p:cNvSpPr/>
+          <p:nvPr/>
+        </p:nvSpPr>
+        <p:spPr>
+          <a:xfrm>
+            <a:off x="2482596" y="2870302"/>
+            <a:ext cx="639166" cy="210312"/>
+          </a:xfrm>
+          <a:prstGeom prst="roundRect">
+            <a:avLst>
+              <a:gd name="adj" fmla="val 21739"/>
+            </a:avLst>
+          </a:prstGeom>
+          <a:solidFill>
+            <a:srgbClr val="FFFFFF"/>
+          </a:solidFill>
+          <a:ln w="5715">
+            <a:solidFill>
+              <a:srgbClr val="DADCE0"/>
+            </a:solidFill>
+            <a:prstDash val="solid"/>
+          </a:ln>
+        </p:spPr>
+      </p:sp>
+      <p:sp>
+        <p:nvSpPr>
           <p:cNvPr id="220" name="Text 198"/>
+          <p:cNvSpPr/>
+          <p:nvPr/>
+        </p:nvSpPr>
+        <p:spPr>
+          <a:xfrm>
+            <a:off x="2500884" y="2879446"/>
+            <a:ext cx="602590" cy="192024"/>
+          </a:xfrm>
+          <a:prstGeom prst="rect">
+            <a:avLst/>
+          </a:prstGeom>
+          <a:noFill/>
+          <a:ln/>
+        </p:spPr>
+        <p:txBody>
+          <a:bodyPr wrap="square" lIns="0" tIns="0" rIns="0" bIns="0" rtlCol="0" anchor="ctr">
+            <a:normAutofit/>
+          </a:bodyPr>
+          <a:lstStyle/>
+          <a:p>
+            <a:pPr algn="ctr" indent="0" marL="0">
+              <a:lnSpc>
+                <a:spcPct val="86000"/>
+              </a:lnSpc>
+              <a:buNone/>
+            </a:pPr>
+            <a:r>
+              <a:rPr lang="en-US" sz="480" b="1" dirty="0">
+                <a:solidFill>
+                  <a:srgbClr val="202124"/>
+                </a:solidFill>
+                <a:latin typeface="Arial" pitchFamily="34" charset="0"/>
+                <a:ea typeface="Arial" pitchFamily="34" charset="-122"/>
+                <a:cs typeface="Arial" pitchFamily="34" charset="-120"/>
+              </a:rPr>
+              <a:t>Mint OBO +</a:t>
+            </a:r>
+            <a:endParaRPr lang="en-US" sz="480" dirty="0"/>
+          </a:p>
+          <a:p>
+            <a:pPr algn="ctr" indent="0" marL="0">
+              <a:lnSpc>
+                <a:spcPct val="86000"/>
+              </a:lnSpc>
+              <a:buNone/>
+            </a:pPr>
+            <a:r>
+              <a:rPr lang="en-US" sz="420" dirty="0">
+                <a:solidFill>
+                  <a:srgbClr val="202124"/>
+                </a:solidFill>
+                <a:latin typeface="Arial" pitchFamily="34" charset="0"/>
+                <a:ea typeface="Arial" pitchFamily="34" charset="-122"/>
+                <a:cs typeface="Arial" pitchFamily="34" charset="-120"/>
+              </a:rPr>
+              <a:t>KMS P-256 sig</a:t>
+            </a:r>
+            <a:endParaRPr lang="en-US" sz="480" dirty="0"/>
+          </a:p>
+        </p:txBody>
+      </p:sp>
+      <p:sp>
+        <p:nvSpPr>
+          <p:cNvPr id="221" name="Shape 199"/>
+          <p:cNvSpPr/>
+          <p:nvPr/>
+        </p:nvSpPr>
+        <p:spPr>
+          <a:xfrm>
+            <a:off x="1757477" y="4602175"/>
+            <a:ext cx="686714" cy="146304"/>
+          </a:xfrm>
+          <a:prstGeom prst="roundRect">
+            <a:avLst>
+              <a:gd name="adj" fmla="val 31250"/>
+            </a:avLst>
+          </a:prstGeom>
+          <a:solidFill>
+            <a:srgbClr val="FFFFFF"/>
+          </a:solidFill>
+          <a:ln w="5715">
+            <a:solidFill>
+              <a:srgbClr val="DADCE0"/>
+            </a:solidFill>
+            <a:prstDash val="solid"/>
+          </a:ln>
+        </p:spPr>
+      </p:sp>
+      <p:sp>
+        <p:nvSpPr>
+          <p:cNvPr id="222" name="Text 200"/>
+          <p:cNvSpPr/>
+          <p:nvPr/>
+        </p:nvSpPr>
+        <p:spPr>
+          <a:xfrm>
+            <a:off x="1775765" y="4611319"/>
+            <a:ext cx="650138" cy="128016"/>
+          </a:xfrm>
+          <a:prstGeom prst="rect">
+            <a:avLst/>
+          </a:prstGeom>
+          <a:noFill/>
+          <a:ln/>
+        </p:spPr>
+        <p:txBody>
+          <a:bodyPr wrap="square" lIns="0" tIns="0" rIns="0" bIns="0" rtlCol="0" anchor="ctr">
+            <a:normAutofit/>
+          </a:bodyPr>
+          <a:lstStyle/>
+          <a:p>
+            <a:pPr algn="ctr" indent="0" marL="0">
+              <a:lnSpc>
+                <a:spcPct val="86000"/>
+              </a:lnSpc>
+              <a:buNone/>
+            </a:pPr>
+            <a:r>
+              <a:rPr lang="en-US" sz="480" b="1" dirty="0">
+                <a:solidFill>
+                  <a:srgbClr val="202124"/>
+                </a:solidFill>
+                <a:latin typeface="Arial" pitchFamily="34" charset="0"/>
+                <a:ea typeface="Arial" pitchFamily="34" charset="-122"/>
+                <a:cs typeface="Arial" pitchFamily="34" charset="-120"/>
+              </a:rPr>
+              <a:t>Sanitize request</a:t>
+            </a:r>
+            <a:endParaRPr lang="en-US" sz="480" dirty="0"/>
+          </a:p>
+        </p:txBody>
+      </p:sp>
+      <p:sp>
+        <p:nvSpPr>
+          <p:cNvPr id="223" name="Shape 201"/>
+          <p:cNvSpPr/>
+          <p:nvPr/>
+        </p:nvSpPr>
+        <p:spPr>
+          <a:xfrm>
+            <a:off x="1757477" y="4810658"/>
+            <a:ext cx="686714" cy="146304"/>
+          </a:xfrm>
+          <a:prstGeom prst="roundRect">
+            <a:avLst>
+              <a:gd name="adj" fmla="val 31250"/>
+            </a:avLst>
+          </a:prstGeom>
+          <a:solidFill>
+            <a:srgbClr val="FFFFFF"/>
+          </a:solidFill>
+          <a:ln w="5715">
+            <a:solidFill>
+              <a:srgbClr val="DADCE0"/>
+            </a:solidFill>
+            <a:prstDash val="solid"/>
+          </a:ln>
+        </p:spPr>
+      </p:sp>
+      <p:sp>
+        <p:nvSpPr>
+          <p:cNvPr id="224" name="Text 202"/>
+          <p:cNvSpPr/>
+          <p:nvPr/>
+        </p:nvSpPr>
+        <p:spPr>
+          <a:xfrm>
+            <a:off x="1775765" y="4819802"/>
+            <a:ext cx="650138" cy="128016"/>
+          </a:xfrm>
+          <a:prstGeom prst="rect">
+            <a:avLst/>
+          </a:prstGeom>
+          <a:noFill/>
+          <a:ln/>
+        </p:spPr>
+        <p:txBody>
+          <a:bodyPr wrap="square" lIns="0" tIns="0" rIns="0" bIns="0" rtlCol="0" anchor="ctr">
+            <a:normAutofit/>
+          </a:bodyPr>
+          <a:lstStyle/>
+          <a:p>
+            <a:pPr algn="ctr" indent="0" marL="0">
+              <a:lnSpc>
+                <a:spcPct val="86000"/>
+              </a:lnSpc>
+              <a:buNone/>
+            </a:pPr>
+            <a:r>
+              <a:rPr lang="en-US" sz="480" b="1" dirty="0">
+                <a:solidFill>
+                  <a:srgbClr val="202124"/>
+                </a:solidFill>
+                <a:latin typeface="Arial" pitchFamily="34" charset="0"/>
+                <a:ea typeface="Arial" pitchFamily="34" charset="-122"/>
+                <a:cs typeface="Arial" pitchFamily="34" charset="-120"/>
+              </a:rPr>
+              <a:t>Sanitize response</a:t>
+            </a:r>
+            <a:endParaRPr lang="en-US" sz="480" dirty="0"/>
+          </a:p>
+        </p:txBody>
+      </p:sp>
+      <p:sp>
+        <p:nvSpPr>
+          <p:cNvPr id="225" name="Shape 203"/>
+          <p:cNvSpPr/>
+          <p:nvPr/>
+        </p:nvSpPr>
+        <p:spPr>
+          <a:xfrm>
+            <a:off x="2427732" y="2079346"/>
+            <a:ext cx="512064" cy="210312"/>
+          </a:xfrm>
+          <a:prstGeom prst="roundRect">
+            <a:avLst>
+              <a:gd name="adj" fmla="val 21739"/>
+            </a:avLst>
+          </a:prstGeom>
+          <a:solidFill>
+            <a:srgbClr val="FFFFFF"/>
+          </a:solidFill>
+          <a:ln w="5715">
+            <a:solidFill>
+              <a:srgbClr val="DADCE0"/>
+            </a:solidFill>
+            <a:prstDash val="solid"/>
+          </a:ln>
+        </p:spPr>
+      </p:sp>
+      <p:sp>
+        <p:nvSpPr>
+          <p:cNvPr id="226" name="Text 204"/>
+          <p:cNvSpPr/>
+          <p:nvPr/>
+        </p:nvSpPr>
+        <p:spPr>
+          <a:xfrm>
+            <a:off x="2446020" y="2088490"/>
+            <a:ext cx="475488" cy="192024"/>
+          </a:xfrm>
+          <a:prstGeom prst="rect">
+            <a:avLst/>
+          </a:prstGeom>
+          <a:noFill/>
+          <a:ln/>
+        </p:spPr>
+        <p:txBody>
+          <a:bodyPr wrap="square" lIns="0" tIns="0" rIns="0" bIns="0" rtlCol="0" anchor="ctr">
+            <a:normAutofit/>
+          </a:bodyPr>
+          <a:lstStyle/>
+          <a:p>
+            <a:pPr algn="ctr" indent="0" marL="0">
+              <a:lnSpc>
+                <a:spcPct val="86000"/>
+              </a:lnSpc>
+              <a:buNone/>
+            </a:pPr>
+            <a:r>
+              <a:rPr lang="en-US" sz="480" b="1" dirty="0">
+                <a:solidFill>
+                  <a:srgbClr val="202124"/>
+                </a:solidFill>
+                <a:latin typeface="Arial" pitchFamily="34" charset="0"/>
+                <a:ea typeface="Arial" pitchFamily="34" charset="-122"/>
+                <a:cs typeface="Arial" pitchFamily="34" charset="-120"/>
+              </a:rPr>
+              <a:t>Strip header</a:t>
+            </a:r>
+            <a:endParaRPr lang="en-US" sz="480" dirty="0"/>
+          </a:p>
+          <a:p>
+            <a:pPr algn="ctr" indent="0" marL="0">
+              <a:lnSpc>
+                <a:spcPct val="86000"/>
+              </a:lnSpc>
+              <a:buNone/>
+            </a:pPr>
+            <a:r>
+              <a:rPr lang="en-US" sz="420" dirty="0">
+                <a:solidFill>
+                  <a:srgbClr val="202124"/>
+                </a:solidFill>
+                <a:latin typeface="Arial" pitchFamily="34" charset="0"/>
+                <a:ea typeface="Arial" pitchFamily="34" charset="-122"/>
+                <a:cs typeface="Arial" pitchFamily="34" charset="-120"/>
+              </a:rPr>
+              <a:t>X-Tenant-ID</a:t>
+            </a:r>
+            <a:endParaRPr lang="en-US" sz="480" dirty="0"/>
+          </a:p>
+        </p:txBody>
+      </p:sp>
+      <p:sp>
+        <p:nvSpPr>
+          <p:cNvPr id="227" name="Shape 205"/>
+          <p:cNvSpPr/>
+          <p:nvPr/>
+        </p:nvSpPr>
+        <p:spPr>
+          <a:xfrm>
+            <a:off x="2427732" y="2606040"/>
+            <a:ext cx="512064" cy="210312"/>
+          </a:xfrm>
+          <a:prstGeom prst="roundRect">
+            <a:avLst>
+              <a:gd name="adj" fmla="val 21739"/>
+            </a:avLst>
+          </a:prstGeom>
+          <a:solidFill>
+            <a:srgbClr val="FFFFFF"/>
+          </a:solidFill>
+          <a:ln w="5715">
+            <a:solidFill>
+              <a:srgbClr val="DADCE0"/>
+            </a:solidFill>
+            <a:prstDash val="solid"/>
+          </a:ln>
+        </p:spPr>
+      </p:sp>
+      <p:sp>
+        <p:nvSpPr>
+          <p:cNvPr id="228" name="Text 206"/>
+          <p:cNvSpPr/>
+          <p:nvPr/>
+        </p:nvSpPr>
+        <p:spPr>
+          <a:xfrm>
+            <a:off x="2446020" y="2615184"/>
+            <a:ext cx="475488" cy="192024"/>
+          </a:xfrm>
+          <a:prstGeom prst="rect">
+            <a:avLst/>
+          </a:prstGeom>
+          <a:noFill/>
+          <a:ln/>
+        </p:spPr>
+        <p:txBody>
+          <a:bodyPr wrap="square" lIns="0" tIns="0" rIns="0" bIns="0" rtlCol="0" anchor="ctr">
+            <a:normAutofit/>
+          </a:bodyPr>
+          <a:lstStyle/>
+          <a:p>
+            <a:pPr algn="ctr" indent="0" marL="0">
+              <a:lnSpc>
+                <a:spcPct val="86000"/>
+              </a:lnSpc>
+              <a:buNone/>
+            </a:pPr>
+            <a:r>
+              <a:rPr lang="en-US" sz="480" b="1" dirty="0">
+                <a:solidFill>
+                  <a:srgbClr val="202124"/>
+                </a:solidFill>
+                <a:latin typeface="Arial" pitchFamily="34" charset="0"/>
+                <a:ea typeface="Arial" pitchFamily="34" charset="-122"/>
+                <a:cs typeface="Arial" pitchFamily="34" charset="-120"/>
+              </a:rPr>
+              <a:t>Filter Agent</a:t>
+            </a:r>
+            <a:endParaRPr lang="en-US" sz="480" dirty="0"/>
+          </a:p>
+          <a:p>
+            <a:pPr algn="ctr" indent="0" marL="0">
+              <a:lnSpc>
+                <a:spcPct val="86000"/>
+              </a:lnSpc>
+              <a:buNone/>
+            </a:pPr>
+            <a:r>
+              <a:rPr lang="en-US" sz="420" dirty="0">
+                <a:solidFill>
+                  <a:srgbClr val="202124"/>
+                </a:solidFill>
+                <a:latin typeface="Arial" pitchFamily="34" charset="0"/>
+                <a:ea typeface="Arial" pitchFamily="34" charset="-122"/>
+                <a:cs typeface="Arial" pitchFamily="34" charset="-120"/>
+              </a:rPr>
+              <a:t>Catalog</a:t>
+            </a:r>
+            <a:endParaRPr lang="en-US" sz="480" dirty="0"/>
+          </a:p>
+        </p:txBody>
+      </p:sp>
+      <p:sp>
+        <p:nvSpPr>
+          <p:cNvPr id="229" name="Shape 207"/>
+          <p:cNvSpPr/>
+          <p:nvPr/>
+        </p:nvSpPr>
+        <p:spPr>
+          <a:xfrm>
+            <a:off x="3853282" y="1141171"/>
+            <a:ext cx="512064" cy="146304"/>
+          </a:xfrm>
+          <a:prstGeom prst="roundRect">
+            <a:avLst>
+              <a:gd name="adj" fmla="val 31250"/>
+            </a:avLst>
+          </a:prstGeom>
+          <a:solidFill>
+            <a:srgbClr val="FFFFFF"/>
+          </a:solidFill>
+          <a:ln w="5715">
+            <a:solidFill>
+              <a:srgbClr val="DADCE0"/>
+            </a:solidFill>
+            <a:prstDash val="solid"/>
+          </a:ln>
+        </p:spPr>
+      </p:sp>
+      <p:sp>
+        <p:nvSpPr>
+          <p:cNvPr id="230" name="Text 208"/>
+          <p:cNvSpPr/>
+          <p:nvPr/>
+        </p:nvSpPr>
+        <p:spPr>
+          <a:xfrm>
+            <a:off x="3871570" y="1150315"/>
+            <a:ext cx="475488" cy="128016"/>
+          </a:xfrm>
+          <a:prstGeom prst="rect">
+            <a:avLst/>
+          </a:prstGeom>
+          <a:noFill/>
+          <a:ln/>
+        </p:spPr>
+        <p:txBody>
+          <a:bodyPr wrap="square" lIns="0" tIns="0" rIns="0" bIns="0" rtlCol="0" anchor="ctr">
+            <a:normAutofit/>
+          </a:bodyPr>
+          <a:lstStyle/>
+          <a:p>
+            <a:pPr algn="ctr" indent="0" marL="0">
+              <a:lnSpc>
+                <a:spcPct val="86000"/>
+              </a:lnSpc>
+              <a:buNone/>
+            </a:pPr>
+            <a:r>
+              <a:rPr lang="en-US" sz="480" b="1" dirty="0">
+                <a:solidFill>
+                  <a:srgbClr val="202124"/>
+                </a:solidFill>
+                <a:latin typeface="Arial" pitchFamily="34" charset="0"/>
+                <a:ea typeface="Arial" pitchFamily="34" charset="-122"/>
+                <a:cs typeface="Arial" pitchFamily="34" charset="-120"/>
+              </a:rPr>
+              <a:t>Response</a:t>
+            </a:r>
+            <a:endParaRPr lang="en-US" sz="480" dirty="0"/>
+          </a:p>
+        </p:txBody>
+      </p:sp>
+      <p:sp>
+        <p:nvSpPr>
+          <p:cNvPr id="231" name="Shape 209"/>
+          <p:cNvSpPr/>
+          <p:nvPr/>
+        </p:nvSpPr>
+        <p:spPr>
+          <a:xfrm>
+            <a:off x="3853282" y="2719426"/>
+            <a:ext cx="512064" cy="146304"/>
+          </a:xfrm>
+          <a:prstGeom prst="roundRect">
+            <a:avLst>
+              <a:gd name="adj" fmla="val 31250"/>
+            </a:avLst>
+          </a:prstGeom>
+          <a:solidFill>
+            <a:srgbClr val="FFFFFF"/>
+          </a:solidFill>
+          <a:ln w="5715">
+            <a:solidFill>
+              <a:srgbClr val="DADCE0"/>
+            </a:solidFill>
+            <a:prstDash val="solid"/>
+          </a:ln>
+        </p:spPr>
+      </p:sp>
+      <p:sp>
+        <p:nvSpPr>
+          <p:cNvPr id="232" name="Text 210"/>
+          <p:cNvSpPr/>
+          <p:nvPr/>
+        </p:nvSpPr>
+        <p:spPr>
+          <a:xfrm>
+            <a:off x="3871570" y="2728570"/>
+            <a:ext cx="475488" cy="128016"/>
+          </a:xfrm>
+          <a:prstGeom prst="rect">
+            <a:avLst/>
+          </a:prstGeom>
+          <a:noFill/>
+          <a:ln/>
+        </p:spPr>
+        <p:txBody>
+          <a:bodyPr wrap="square" lIns="0" tIns="0" rIns="0" bIns="0" rtlCol="0" anchor="ctr">
+            <a:normAutofit/>
+          </a:bodyPr>
+          <a:lstStyle/>
+          <a:p>
+            <a:pPr algn="ctr" indent="0" marL="0">
+              <a:lnSpc>
+                <a:spcPct val="86000"/>
+              </a:lnSpc>
+              <a:buNone/>
+            </a:pPr>
+            <a:r>
+              <a:rPr lang="en-US" sz="480" b="1" dirty="0">
+                <a:solidFill>
+                  <a:srgbClr val="202124"/>
+                </a:solidFill>
+                <a:latin typeface="Arial" pitchFamily="34" charset="0"/>
+                <a:ea typeface="Arial" pitchFamily="34" charset="-122"/>
+                <a:cs typeface="Arial" pitchFamily="34" charset="-120"/>
+              </a:rPr>
+              <a:t>Response</a:t>
+            </a:r>
+            <a:endParaRPr lang="en-US" sz="480" dirty="0"/>
+          </a:p>
+        </p:txBody>
+      </p:sp>
+      <p:sp>
+        <p:nvSpPr>
+          <p:cNvPr id="233" name="Shape 211"/>
+          <p:cNvSpPr/>
+          <p:nvPr/>
+        </p:nvSpPr>
+        <p:spPr>
+          <a:xfrm>
+            <a:off x="3032150" y="1141171"/>
+            <a:ext cx="512064" cy="146304"/>
+          </a:xfrm>
+          <a:prstGeom prst="roundRect">
+            <a:avLst>
+              <a:gd name="adj" fmla="val 31250"/>
+            </a:avLst>
+          </a:prstGeom>
+          <a:solidFill>
+            <a:srgbClr val="FFFFFF"/>
+          </a:solidFill>
+          <a:ln w="5715">
+            <a:solidFill>
+              <a:srgbClr val="DADCE0"/>
+            </a:solidFill>
+            <a:prstDash val="solid"/>
+          </a:ln>
+        </p:spPr>
+      </p:sp>
+      <p:sp>
+        <p:nvSpPr>
+          <p:cNvPr id="234" name="Text 212"/>
+          <p:cNvSpPr/>
+          <p:nvPr/>
+        </p:nvSpPr>
+        <p:spPr>
+          <a:xfrm>
+            <a:off x="3050438" y="1150315"/>
+            <a:ext cx="475488" cy="128016"/>
+          </a:xfrm>
+          <a:prstGeom prst="rect">
+            <a:avLst/>
+          </a:prstGeom>
+          <a:noFill/>
+          <a:ln/>
+        </p:spPr>
+        <p:txBody>
+          <a:bodyPr wrap="square" lIns="0" tIns="0" rIns="0" bIns="0" rtlCol="0" anchor="ctr">
+            <a:normAutofit/>
+          </a:bodyPr>
+          <a:lstStyle/>
+          <a:p>
+            <a:pPr algn="ctr" indent="0" marL="0">
+              <a:lnSpc>
+                <a:spcPct val="86000"/>
+              </a:lnSpc>
+              <a:buNone/>
+            </a:pPr>
+            <a:r>
+              <a:rPr lang="en-US" sz="480" b="1" dirty="0">
+                <a:solidFill>
+                  <a:srgbClr val="202124"/>
+                </a:solidFill>
+                <a:latin typeface="Arial" pitchFamily="34" charset="0"/>
+                <a:ea typeface="Arial" pitchFamily="34" charset="-122"/>
+                <a:cs typeface="Arial" pitchFamily="34" charset="-120"/>
+              </a:rPr>
+              <a:t>Request</a:t>
+            </a:r>
+            <a:endParaRPr lang="en-US" sz="480" dirty="0"/>
+          </a:p>
+        </p:txBody>
+      </p:sp>
+      <p:sp>
+        <p:nvSpPr>
+          <p:cNvPr id="235" name="Shape 213"/>
+          <p:cNvSpPr/>
+          <p:nvPr/>
+        </p:nvSpPr>
+        <p:spPr>
+          <a:xfrm>
+            <a:off x="3032150" y="2645359"/>
+            <a:ext cx="512064" cy="146304"/>
+          </a:xfrm>
+          <a:prstGeom prst="roundRect">
+            <a:avLst>
+              <a:gd name="adj" fmla="val 31250"/>
+            </a:avLst>
+          </a:prstGeom>
+          <a:solidFill>
+            <a:srgbClr val="FFFFFF"/>
+          </a:solidFill>
+          <a:ln w="5715">
+            <a:solidFill>
+              <a:srgbClr val="DADCE0"/>
+            </a:solidFill>
+            <a:prstDash val="solid"/>
+          </a:ln>
+        </p:spPr>
+      </p:sp>
+      <p:sp>
+        <p:nvSpPr>
+          <p:cNvPr id="236" name="Text 214"/>
+          <p:cNvSpPr/>
+          <p:nvPr/>
+        </p:nvSpPr>
+        <p:spPr>
+          <a:xfrm>
+            <a:off x="3050438" y="2654503"/>
+            <a:ext cx="475488" cy="128016"/>
+          </a:xfrm>
+          <a:prstGeom prst="rect">
+            <a:avLst/>
+          </a:prstGeom>
+          <a:noFill/>
+          <a:ln/>
+        </p:spPr>
+        <p:txBody>
+          <a:bodyPr wrap="square" lIns="0" tIns="0" rIns="0" bIns="0" rtlCol="0" anchor="ctr">
+            <a:normAutofit/>
+          </a:bodyPr>
+          <a:lstStyle/>
+          <a:p>
+            <a:pPr algn="ctr" indent="0" marL="0">
+              <a:lnSpc>
+                <a:spcPct val="86000"/>
+              </a:lnSpc>
+              <a:buNone/>
+            </a:pPr>
+            <a:r>
+              <a:rPr lang="en-US" sz="480" b="1" dirty="0">
+                <a:solidFill>
+                  <a:srgbClr val="202124"/>
+                </a:solidFill>
+                <a:latin typeface="Arial" pitchFamily="34" charset="0"/>
+                <a:ea typeface="Arial" pitchFamily="34" charset="-122"/>
+                <a:cs typeface="Arial" pitchFamily="34" charset="-120"/>
+              </a:rPr>
+              <a:t>Request</a:t>
+            </a:r>
+            <a:endParaRPr lang="en-US" sz="480" dirty="0"/>
+          </a:p>
+        </p:txBody>
+      </p:sp>
+      <p:sp>
+        <p:nvSpPr>
+          <p:cNvPr id="237" name="Text 215"/>
           <p:cNvSpPr/>
           <p:nvPr/>
         </p:nvSpPr>
@@ -31835,8 +32294,8 @@
         </p:nvSpPr>
         <p:spPr>
           <a:xfrm>
-            <a:off x="1426464" y="1664208"/>
-            <a:ext cx="1536192" cy="402336"/>
+            <a:off x="1426464" y="1627632"/>
+            <a:ext cx="1536192" cy="384048"/>
           </a:xfrm>
           <a:prstGeom prst="rect">
             <a:avLst/>
@@ -31852,7 +32311,7 @@
               <a:buNone/>
             </a:pPr>
             <a:r>
-              <a:rPr lang="en-US" sz="820" b="1" dirty="0">
+              <a:rPr lang="en-US" sz="800" b="1" dirty="0">
                 <a:solidFill>
                   <a:srgbClr val="3C4043"/>
                 </a:solidFill>
@@ -31862,14 +32321,14 @@
               </a:rPr>
               <a:t>Caller sends query</a:t>
             </a:r>
-            <a:endParaRPr lang="en-US" sz="820" dirty="0"/>
+            <a:endParaRPr lang="en-US" sz="800" dirty="0"/>
           </a:p>
           <a:p>
             <a:pPr indent="0" marL="0">
               <a:buNone/>
             </a:pPr>
             <a:r>
-              <a:rPr lang="en-US" sz="820" b="1" dirty="0">
+              <a:rPr lang="en-US" sz="800" b="1" dirty="0">
                 <a:solidFill>
                   <a:srgbClr val="3C4043"/>
                 </a:solidFill>
@@ -31879,14 +32338,14 @@
               </a:rPr>
               <a:t>with spoofed header</a:t>
             </a:r>
-            <a:endParaRPr lang="en-US" sz="820" dirty="0"/>
+            <a:endParaRPr lang="en-US" sz="800" dirty="0"/>
           </a:p>
           <a:p>
             <a:pPr indent="0" marL="0">
               <a:buNone/>
             </a:pPr>
             <a:r>
-              <a:rPr lang="en-US" sz="820" b="1" dirty="0">
+              <a:rPr lang="en-US" sz="800" b="1" dirty="0">
                 <a:solidFill>
                   <a:srgbClr val="3C4043"/>
                 </a:solidFill>
@@ -31896,7 +32355,7 @@
               </a:rPr>
               <a:t>X-Tenant-Id: finvault</a:t>
             </a:r>
-            <a:endParaRPr lang="en-US" sz="820" dirty="0"/>
+            <a:endParaRPr lang="en-US" sz="800" dirty="0"/>
           </a:p>
         </p:txBody>
       </p:sp>
@@ -31933,7 +32392,7 @@
         <p:spPr>
           <a:xfrm>
             <a:off x="1261872" y="2048256"/>
-            <a:ext cx="1499616" cy="182880"/>
+            <a:ext cx="1499616" cy="164592"/>
           </a:xfrm>
           <a:prstGeom prst="rect">
             <a:avLst/>
@@ -31949,7 +32408,7 @@
               <a:buNone/>
             </a:pPr>
             <a:r>
-              <a:rPr lang="en-US" sz="800" b="1" dirty="0">
+              <a:rPr lang="en-US" sz="780" b="1" dirty="0">
                 <a:solidFill>
                   <a:srgbClr val="0F2942"/>
                 </a:solidFill>
@@ -31959,7 +32418,7 @@
               </a:rPr>
               <a:t>Spoofed Header Probe</a:t>
             </a:r>
-            <a:endParaRPr lang="en-US" sz="800" dirty="0"/>
+            <a:endParaRPr lang="en-US" sz="780" dirty="0"/>
           </a:p>
         </p:txBody>
       </p:sp>
@@ -31971,7 +32430,7 @@
         </p:nvSpPr>
         <p:spPr>
           <a:xfrm>
-            <a:off x="3182112" y="2304288"/>
+            <a:off x="3182112" y="2267712"/>
             <a:ext cx="292608" cy="292608"/>
           </a:xfrm>
           <a:prstGeom prst="ellipse">
@@ -31991,7 +32450,7 @@
         </p:nvSpPr>
         <p:spPr>
           <a:xfrm>
-            <a:off x="3182112" y="2304288"/>
+            <a:off x="3182112" y="2267712"/>
             <a:ext cx="292608" cy="292608"/>
           </a:xfrm>
           <a:prstGeom prst="rect">
@@ -32030,8 +32489,8 @@
         </p:nvSpPr>
         <p:spPr>
           <a:xfrm>
-            <a:off x="3529584" y="2267712"/>
-            <a:ext cx="1536192" cy="438912"/>
+            <a:off x="3529584" y="2231136"/>
+            <a:ext cx="1536192" cy="402336"/>
           </a:xfrm>
           <a:prstGeom prst="rect">
             <a:avLst/>
@@ -32047,7 +32506,7 @@
               <a:buNone/>
             </a:pPr>
             <a:r>
-              <a:rPr lang="en-US" sz="800" b="1" dirty="0">
+              <a:rPr lang="en-US" sz="780" b="1" dirty="0">
                 <a:solidFill>
                   <a:srgbClr val="3C4043"/>
                 </a:solidFill>
@@ -32057,14 +32516,14 @@
               </a:rPr>
               <a:t>Hop 1 strips spoofed</a:t>
             </a:r>
-            <a:endParaRPr lang="en-US" sz="800" dirty="0"/>
+            <a:endParaRPr lang="en-US" sz="780" dirty="0"/>
           </a:p>
           <a:p>
             <a:pPr indent="0" marL="0">
               <a:buNone/>
             </a:pPr>
             <a:r>
-              <a:rPr lang="en-US" sz="800" b="1" dirty="0">
+              <a:rPr lang="en-US" sz="780" b="1" dirty="0">
                 <a:solidFill>
                   <a:srgbClr val="3C4043"/>
                 </a:solidFill>
@@ -32074,14 +32533,14 @@
               </a:rPr>
               <a:t>header &amp; checks Valkey</a:t>
             </a:r>
-            <a:endParaRPr lang="en-US" sz="800" dirty="0"/>
+            <a:endParaRPr lang="en-US" sz="780" dirty="0"/>
           </a:p>
           <a:p>
             <a:pPr indent="0" marL="0">
               <a:buNone/>
             </a:pPr>
             <a:r>
-              <a:rPr lang="en-US" sz="800" b="1" dirty="0">
+              <a:rPr lang="en-US" sz="780" b="1" dirty="0">
                 <a:solidFill>
                   <a:srgbClr val="3C4043"/>
                 </a:solidFill>
@@ -32091,7 +32550,7 @@
               </a:rPr>
               <a:t>120 RPM quota</a:t>
             </a:r>
-            <a:endParaRPr lang="en-US" sz="800" dirty="0"/>
+            <a:endParaRPr lang="en-US" sz="780" dirty="0"/>
           </a:p>
         </p:txBody>
       </p:sp>
@@ -32103,7 +32562,7 @@
         </p:nvSpPr>
         <p:spPr>
           <a:xfrm>
-            <a:off x="3136392" y="2889504"/>
+            <a:off x="3136392" y="2907792"/>
             <a:ext cx="1956816" cy="0"/>
           </a:xfrm>
           <a:prstGeom prst="line">
@@ -32127,24 +32586,26 @@
         </p:nvSpPr>
         <p:spPr>
           <a:xfrm>
-            <a:off x="3200400" y="2688336"/>
-            <a:ext cx="1828800" cy="182880"/>
-          </a:xfrm>
-          <a:prstGeom prst="rect">
-            <a:avLst/>
-          </a:prstGeom>
-          <a:noFill/>
-          <a:ln/>
-        </p:spPr>
-        <p:txBody>
-          <a:bodyPr wrap="square" rtlCol="0" anchor="ctr"/>
+            <a:off x="3163824" y="2697480"/>
+            <a:ext cx="1901952" cy="173736"/>
+          </a:xfrm>
+          <a:prstGeom prst="rect">
+            <a:avLst/>
+          </a:prstGeom>
+          <a:noFill/>
+          <a:ln/>
+        </p:spPr>
+        <p:txBody>
+          <a:bodyPr wrap="square" rtlCol="0" anchor="ctr">
+            <a:normAutofit/>
+          </a:bodyPr>
           <a:lstStyle/>
           <a:p>
             <a:pPr algn="ctr" indent="0" marL="0">
               <a:buNone/>
             </a:pPr>
             <a:r>
-              <a:rPr lang="en-US" sz="760" b="1" dirty="0">
+              <a:rPr lang="en-US" sz="700" b="1" dirty="0">
                 <a:solidFill>
                   <a:srgbClr val="0D7A75"/>
                 </a:solidFill>
@@ -32154,7 +32615,7 @@
               </a:rPr>
               <a:t>Bind retailstream OBO → Valkey Token-Bucket (120 RPM OK)</a:t>
             </a:r>
-            <a:endParaRPr lang="en-US" sz="760" dirty="0"/>
+            <a:endParaRPr lang="en-US" sz="700" dirty="0"/>
           </a:p>
         </p:txBody>
       </p:sp>
@@ -32166,7 +32627,7 @@
         </p:nvSpPr>
         <p:spPr>
           <a:xfrm>
-            <a:off x="5285232" y="2944368"/>
+            <a:off x="5285232" y="2926080"/>
             <a:ext cx="292608" cy="292608"/>
           </a:xfrm>
           <a:prstGeom prst="ellipse">
@@ -32186,7 +32647,7 @@
         </p:nvSpPr>
         <p:spPr>
           <a:xfrm>
-            <a:off x="5285232" y="2944368"/>
+            <a:off x="5285232" y="2926080"/>
             <a:ext cx="292608" cy="292608"/>
           </a:xfrm>
           <a:prstGeom prst="rect">
@@ -32225,8 +32686,8 @@
         </p:nvSpPr>
         <p:spPr>
           <a:xfrm>
-            <a:off x="5632704" y="2907792"/>
-            <a:ext cx="1536192" cy="438912"/>
+            <a:off x="5632704" y="2889504"/>
+            <a:ext cx="1536192" cy="402336"/>
           </a:xfrm>
           <a:prstGeom prst="rect">
             <a:avLst/>
@@ -32242,7 +32703,7 @@
               <a:buNone/>
             </a:pPr>
             <a:r>
-              <a:rPr lang="en-US" sz="800" b="1" dirty="0">
+              <a:rPr lang="en-US" sz="780" b="1" dirty="0">
                 <a:solidFill>
                   <a:srgbClr val="3C4043"/>
                 </a:solidFill>
@@ -32252,14 +32713,14 @@
               </a:rPr>
               <a:t>Hop 2 blocks cross-tenant</a:t>
             </a:r>
-            <a:endParaRPr lang="en-US" sz="800" dirty="0"/>
+            <a:endParaRPr lang="en-US" sz="780" dirty="0"/>
           </a:p>
           <a:p>
             <a:pPr indent="0" marL="0">
               <a:buNone/>
             </a:pPr>
             <a:r>
-              <a:rPr lang="en-US" sz="800" b="1" dirty="0">
+              <a:rPr lang="en-US" sz="780" b="1" dirty="0">
                 <a:solidFill>
                   <a:srgbClr val="3C4043"/>
                 </a:solidFill>
@@ -32269,14 +32730,14 @@
               </a:rPr>
               <a:t>finvault agent lookup</a:t>
             </a:r>
-            <a:endParaRPr lang="en-US" sz="800" dirty="0"/>
+            <a:endParaRPr lang="en-US" sz="780" dirty="0"/>
           </a:p>
           <a:p>
             <a:pPr indent="0" marL="0">
               <a:buNone/>
             </a:pPr>
             <a:r>
-              <a:rPr lang="en-US" sz="800" b="1" dirty="0">
+              <a:rPr lang="en-US" sz="780" b="1" dirty="0">
                 <a:solidFill>
                   <a:srgbClr val="3C4043"/>
                 </a:solidFill>
@@ -32286,7 +32747,7 @@
               </a:rPr>
               <a:t>(HTTP 403 Forbidden)</a:t>
             </a:r>
-            <a:endParaRPr lang="en-US" sz="800" dirty="0"/>
+            <a:endParaRPr lang="en-US" sz="780" dirty="0"/>
           </a:p>
         </p:txBody>
       </p:sp>
@@ -32322,24 +32783,26 @@
         </p:nvSpPr>
         <p:spPr>
           <a:xfrm>
-            <a:off x="5303520" y="3346704"/>
-            <a:ext cx="1828800" cy="182880"/>
-          </a:xfrm>
-          <a:prstGeom prst="rect">
-            <a:avLst/>
-          </a:prstGeom>
-          <a:noFill/>
-          <a:ln/>
-        </p:spPr>
-        <p:txBody>
-          <a:bodyPr wrap="square" rtlCol="0" anchor="ctr"/>
+            <a:off x="5266944" y="3337560"/>
+            <a:ext cx="1901952" cy="173736"/>
+          </a:xfrm>
+          <a:prstGeom prst="rect">
+            <a:avLst/>
+          </a:prstGeom>
+          <a:noFill/>
+          <a:ln/>
+        </p:spPr>
+        <p:txBody>
+          <a:bodyPr wrap="square" rtlCol="0" anchor="ctr">
+            <a:normAutofit/>
+          </a:bodyPr>
           <a:lstStyle/>
           <a:p>
             <a:pPr algn="ctr" indent="0" marL="0">
               <a:buNone/>
             </a:pPr>
             <a:r>
-              <a:rPr lang="en-US" sz="760" b="1" dirty="0">
+              <a:rPr lang="en-US" sz="720" b="1" dirty="0">
                 <a:solidFill>
                   <a:srgbClr val="54728C"/>
                 </a:solidFill>
@@ -32347,9 +32810,9 @@
                 <a:ea typeface="Roboto" pitchFamily="34" charset="-122"/>
                 <a:cs typeface="Roboto" pitchFamily="34" charset="-120"/>
               </a:rPr>
-              <a:t>ACL • ARD Gate • (retailstream only)</a:t>
-            </a:r>
-            <a:endParaRPr lang="en-US" sz="760" dirty="0"/>
+              <a:t>ACL • ARD Gate (retailstream only)</a:t>
+            </a:r>
+            <a:endParaRPr lang="en-US" sz="720" dirty="0"/>
           </a:p>
         </p:txBody>
       </p:sp>
@@ -33711,8 +34174,8 @@
         </p:nvSpPr>
         <p:spPr>
           <a:xfrm>
-            <a:off x="530352" y="2852928"/>
-            <a:ext cx="1975104" cy="1316736"/>
+            <a:off x="493776" y="2852928"/>
+            <a:ext cx="1956816" cy="1316736"/>
           </a:xfrm>
           <a:prstGeom prst="roundRect">
             <a:avLst>
@@ -33733,8 +34196,8 @@
         </p:nvSpPr>
         <p:spPr>
           <a:xfrm>
-            <a:off x="603504" y="2852928"/>
-            <a:ext cx="1828800" cy="1316736"/>
+            <a:off x="566928" y="2852928"/>
+            <a:ext cx="1810512" cy="1316736"/>
           </a:xfrm>
           <a:prstGeom prst="rect">
             <a:avLst/>
@@ -33789,8 +34252,8 @@
         </p:nvSpPr>
         <p:spPr>
           <a:xfrm>
-            <a:off x="3749040" y="2852928"/>
-            <a:ext cx="1975104" cy="1316736"/>
+            <a:off x="3840480" y="2852928"/>
+            <a:ext cx="1956816" cy="1316736"/>
           </a:xfrm>
           <a:prstGeom prst="roundRect">
             <a:avLst>
@@ -33811,8 +34274,8 @@
         </p:nvSpPr>
         <p:spPr>
           <a:xfrm>
-            <a:off x="3822192" y="2852928"/>
-            <a:ext cx="1828800" cy="1316736"/>
+            <a:off x="3913632" y="2852928"/>
+            <a:ext cx="1810512" cy="1316736"/>
           </a:xfrm>
           <a:prstGeom prst="rect">
             <a:avLst/>
@@ -33868,7 +34331,7 @@
         <p:spPr>
           <a:xfrm>
             <a:off x="6784848" y="2852928"/>
-            <a:ext cx="1975104" cy="1316736"/>
+            <a:ext cx="1956816" cy="1316736"/>
           </a:xfrm>
           <a:prstGeom prst="roundRect">
             <a:avLst>
@@ -33890,7 +34353,7 @@
         <p:spPr>
           <a:xfrm>
             <a:off x="6858000" y="2852928"/>
-            <a:ext cx="1828800" cy="1316736"/>
+            <a:ext cx="1810512" cy="1316736"/>
           </a:xfrm>
           <a:prstGeom prst="rect">
             <a:avLst/>
@@ -33946,7 +34409,7 @@
         <p:spPr>
           <a:xfrm>
             <a:off x="9710928" y="2852928"/>
-            <a:ext cx="1975104" cy="1316736"/>
+            <a:ext cx="1956816" cy="1316736"/>
           </a:xfrm>
           <a:prstGeom prst="roundRect">
             <a:avLst>
@@ -33968,7 +34431,7 @@
         <p:spPr>
           <a:xfrm>
             <a:off x="9784080" y="2852928"/>
-            <a:ext cx="1828800" cy="1316736"/>
+            <a:ext cx="1810512" cy="1316736"/>
           </a:xfrm>
           <a:prstGeom prst="rect">
             <a:avLst/>
@@ -34023,8 +34486,8 @@
         </p:nvSpPr>
         <p:spPr>
           <a:xfrm>
-            <a:off x="2468880" y="1572768"/>
-            <a:ext cx="1316736" cy="1024128"/>
+            <a:off x="2514600" y="1572768"/>
+            <a:ext cx="1261872" cy="1024128"/>
           </a:xfrm>
           <a:prstGeom prst="roundRect">
             <a:avLst>
@@ -34050,8 +34513,8 @@
         </p:nvSpPr>
         <p:spPr>
           <a:xfrm>
-            <a:off x="2505456" y="1627632"/>
-            <a:ext cx="1243584" cy="914400"/>
+            <a:off x="2551176" y="1627632"/>
+            <a:ext cx="1188720" cy="914400"/>
           </a:xfrm>
           <a:prstGeom prst="rect">
             <a:avLst/>
@@ -34067,7 +34530,7 @@
               <a:buNone/>
             </a:pPr>
             <a:r>
-              <a:rPr lang="en-US" sz="880" b="1" dirty="0">
+              <a:rPr lang="en-US" sz="860" b="1" dirty="0">
                 <a:solidFill>
                   <a:srgbClr val="3C4043"/>
                 </a:solidFill>
@@ -34077,14 +34540,14 @@
               </a:rPr>
               <a:t>1. Sends burst traffic</a:t>
             </a:r>
-            <a:endParaRPr lang="en-US" sz="880" dirty="0"/>
+            <a:endParaRPr lang="en-US" sz="860" dirty="0"/>
           </a:p>
           <a:p>
             <a:pPr algn="ctr" indent="0" marL="0">
               <a:buNone/>
             </a:pPr>
             <a:r>
-              <a:rPr lang="en-US" sz="880" b="1" dirty="0">
+              <a:rPr lang="en-US" sz="860" b="1" dirty="0">
                 <a:solidFill>
                   <a:srgbClr val="3C4043"/>
                 </a:solidFill>
@@ -34094,7 +34557,7 @@
               </a:rPr>
               <a:t>(Standard vs. Enterprise)</a:t>
             </a:r>
-            <a:endParaRPr lang="en-US" sz="880" dirty="0"/>
+            <a:endParaRPr lang="en-US" sz="860" dirty="0"/>
           </a:p>
         </p:txBody>
       </p:sp>
@@ -34106,8 +34569,8 @@
         </p:nvSpPr>
         <p:spPr>
           <a:xfrm>
-            <a:off x="2505456" y="3182112"/>
-            <a:ext cx="1243584" cy="0"/>
+            <a:off x="2450592" y="3182112"/>
+            <a:ext cx="1389888" cy="0"/>
           </a:xfrm>
           <a:prstGeom prst="line">
             <a:avLst/>
@@ -34130,8 +34593,8 @@
         </p:nvSpPr>
         <p:spPr>
           <a:xfrm>
-            <a:off x="2505456" y="3730752"/>
-            <a:ext cx="1243584" cy="0"/>
+            <a:off x="2450592" y="3730752"/>
+            <a:ext cx="1389888" cy="0"/>
           </a:xfrm>
           <a:prstGeom prst="line">
             <a:avLst/>
@@ -34154,8 +34617,8 @@
         </p:nvSpPr>
         <p:spPr>
           <a:xfrm>
-            <a:off x="2432304" y="3877056"/>
-            <a:ext cx="1389888" cy="859536"/>
+            <a:off x="2514600" y="3877056"/>
+            <a:ext cx="1261872" cy="859536"/>
           </a:xfrm>
           <a:prstGeom prst="roundRect">
             <a:avLst>
@@ -34181,8 +34644,8 @@
         </p:nvSpPr>
         <p:spPr>
           <a:xfrm>
-            <a:off x="2487168" y="3913632"/>
-            <a:ext cx="1280160" cy="786384"/>
+            <a:off x="2551176" y="3913632"/>
+            <a:ext cx="1188720" cy="786384"/>
           </a:xfrm>
           <a:prstGeom prst="rect">
             <a:avLst/>
@@ -34198,7 +34661,7 @@
               <a:buNone/>
             </a:pPr>
             <a:r>
-              <a:rPr lang="en-US" sz="820" b="1" dirty="0">
+              <a:rPr lang="en-US" sz="800" b="1" dirty="0">
                 <a:solidFill>
                   <a:srgbClr val="A50E0E"/>
                 </a:solidFill>
@@ -34208,14 +34671,14 @@
               </a:rPr>
               <a:t>2. Enforces 120/600 RPM;</a:t>
             </a:r>
-            <a:endParaRPr lang="en-US" sz="820" dirty="0"/>
+            <a:endParaRPr lang="en-US" sz="800" dirty="0"/>
           </a:p>
           <a:p>
             <a:pPr algn="ctr" indent="0" marL="0">
               <a:buNone/>
             </a:pPr>
             <a:r>
-              <a:rPr lang="en-US" sz="820" b="1" dirty="0">
+              <a:rPr lang="en-US" sz="800" b="1" dirty="0">
                 <a:solidFill>
                   <a:srgbClr val="A50E0E"/>
                 </a:solidFill>
@@ -34225,14 +34688,14 @@
               </a:rPr>
               <a:t>returns HTTP 429</a:t>
             </a:r>
-            <a:endParaRPr lang="en-US" sz="820" dirty="0"/>
+            <a:endParaRPr lang="en-US" sz="800" dirty="0"/>
           </a:p>
           <a:p>
             <a:pPr algn="ctr" indent="0" marL="0">
               <a:buNone/>
             </a:pPr>
             <a:r>
-              <a:rPr lang="en-US" sz="820" b="1" dirty="0">
+              <a:rPr lang="en-US" sz="800" b="1" dirty="0">
                 <a:solidFill>
                   <a:srgbClr val="A50E0E"/>
                 </a:solidFill>
@@ -34242,7 +34705,7 @@
               </a:rPr>
               <a:t>Retry-After on burst</a:t>
             </a:r>
-            <a:endParaRPr lang="en-US" sz="820" dirty="0"/>
+            <a:endParaRPr lang="en-US" sz="800" dirty="0"/>
           </a:p>
         </p:txBody>
       </p:sp>
@@ -37201,14 +37664,16 @@
           <a:ln/>
         </p:spPr>
         <p:txBody>
-          <a:bodyPr wrap="square" rtlCol="0" anchor="ctr"/>
+          <a:bodyPr wrap="square" rtlCol="0" anchor="ctr">
+            <a:normAutofit/>
+          </a:bodyPr>
           <a:lstStyle/>
           <a:p>
             <a:pPr indent="0" marL="0">
               <a:buNone/>
             </a:pPr>
             <a:r>
-              <a:rPr lang="en-US" sz="820" b="1" dirty="0">
+              <a:rPr lang="en-US" sz="760" b="1" dirty="0">
                 <a:solidFill>
                   <a:srgbClr val="3C4043"/>
                 </a:solidFill>
@@ -37216,9 +37681,9 @@
                 <a:ea typeface="Google Sans" pitchFamily="34" charset="-122"/>
                 <a:cs typeface="Google Sans" pitchFamily="34" charset="-120"/>
               </a:rPr>
-              <a:t>1. Test 1: Header Spoofing • Test 2:…</a:t>
-            </a:r>
-            <a:endParaRPr lang="en-US" sz="820" dirty="0"/>
+              <a:t>1. Test 1: Header Spoofing • Test 2: Private Agent Probe</a:t>
+            </a:r>
+            <a:endParaRPr lang="en-US" sz="760" dirty="0"/>
           </a:p>
         </p:txBody>
       </p:sp>
@@ -37257,7 +37722,7 @@
                 <a:ea typeface="Roboto" pitchFamily="34" charset="-122"/>
                 <a:cs typeface="Roboto" pitchFamily="34" charset="-120"/>
               </a:rPr>
-              <a:t>Test 1: Spoof stripped (HTTP 401) • Test 2: Agent Alpha discovery blocked (HTTP 403) (Hop 1: Cloud Armor + IAP DPoP Hop 2: Agent Eng…</a:t>
+              <a:t>Test 1: Spoof stripped (HTTP 401) • Test 2: Agent Alpha discovery blocked (HTTP 403)</a:t>
             </a:r>
             <a:endParaRPr lang="en-US" sz="740" dirty="0"/>
           </a:p>
@@ -37328,14 +37793,16 @@
           <a:ln/>
         </p:spPr>
         <p:txBody>
-          <a:bodyPr wrap="square" rtlCol="0" anchor="ctr"/>
+          <a:bodyPr wrap="square" rtlCol="0" anchor="ctr">
+            <a:normAutofit/>
+          </a:bodyPr>
           <a:lstStyle/>
           <a:p>
             <a:pPr indent="0" marL="0">
               <a:buNone/>
             </a:pPr>
             <a:r>
-              <a:rPr lang="en-US" sz="820" b="1" dirty="0">
+              <a:rPr lang="en-US" sz="760" b="1" dirty="0">
                 <a:solidFill>
                   <a:srgbClr val="3C4043"/>
                 </a:solidFill>
@@ -37343,9 +37810,9 @@
                 <a:ea typeface="Google Sans" pitchFamily="34" charset="-122"/>
                 <a:cs typeface="Google Sans" pitchFamily="34" charset="-120"/>
               </a:rPr>
-              <a:t>2. Test 3: Cross-Tenant 3LO MCP • Tes…</a:t>
-            </a:r>
-            <a:endParaRPr lang="en-US" sz="820" dirty="0"/>
+              <a:t>2. Test 3: Cross-Tenant 3LO MCP • Test 10: Step-Up 3LO Consent</a:t>
+            </a:r>
+            <a:endParaRPr lang="en-US" sz="760" dirty="0"/>
           </a:p>
         </p:txBody>
       </p:sp>
@@ -37384,7 +37851,7 @@
                 <a:ea typeface="Roboto" pitchFamily="34" charset="-122"/>
                 <a:cs typeface="Roboto" pitchFamily="34" charset="-120"/>
               </a:rPr>
-              <a:t>Test 3: Cross-tenant MCP blocked (HTTP 403) • Test 10: Step-up 401 -&gt; 200 OK post-consent (Hop 2: MCP Broker ACL Filter Hop 2/3: Ent…</a:t>
+              <a:t>Test 3: Cross-tenant MCP blocked (HTTP 403) • Test 10: Step-up 401 -&gt; 200 OK post-consent</a:t>
             </a:r>
             <a:endParaRPr lang="en-US" sz="740" dirty="0"/>
           </a:p>
@@ -37455,14 +37922,16 @@
           <a:ln/>
         </p:spPr>
         <p:txBody>
-          <a:bodyPr wrap="square" rtlCol="0" anchor="ctr"/>
+          <a:bodyPr wrap="square" rtlCol="0" anchor="ctr">
+            <a:normAutofit/>
+          </a:bodyPr>
           <a:lstStyle/>
           <a:p>
             <a:pPr indent="0" marL="0">
               <a:buNone/>
             </a:pPr>
             <a:r>
-              <a:rPr lang="en-US" sz="820" b="1" dirty="0">
+              <a:rPr lang="en-US" sz="760" b="1" dirty="0">
                 <a:solidFill>
                   <a:srgbClr val="3C4043"/>
                 </a:solidFill>
@@ -37470,9 +37939,9 @@
                 <a:ea typeface="Google Sans" pitchFamily="34" charset="-122"/>
                 <a:cs typeface="Google Sans" pitchFamily="34" charset="-120"/>
               </a:rPr>
-              <a:t>3. Test 4: Prompt Injection • Test 5:…</a:t>
-            </a:r>
-            <a:endParaRPr lang="en-US" sz="820" dirty="0"/>
+              <a:t>3. Test 4: Prompt Injection • Test 5: Semantic NLC Breach</a:t>
+            </a:r>
+            <a:endParaRPr lang="en-US" sz="760" dirty="0"/>
           </a:p>
         </p:txBody>
       </p:sp>
@@ -37511,7 +37980,7 @@
                 <a:ea typeface="Roboto" pitchFamily="34" charset="-122"/>
                 <a:cs typeface="Roboto" pitchFamily="34" charset="-120"/>
               </a:rPr>
-              <a:t>Test 4: Jailbreak blocked (HTTP 400) • Test 5: OCC regulatory NLC violation blocked (HTTP 422) (Hop 4: Vertex AI Model Armor Floor +…</a:t>
+              <a:t>Test 4: Jailbreak blocked (HTTP 400) • Test 5: OCC regulatory NLC violation blocked (HTTP 422)</a:t>
             </a:r>
             <a:endParaRPr lang="en-US" sz="740" dirty="0"/>
           </a:p>
@@ -37582,14 +38051,16 @@
           <a:ln/>
         </p:spPr>
         <p:txBody>
-          <a:bodyPr wrap="square" rtlCol="0" anchor="ctr"/>
+          <a:bodyPr wrap="square" rtlCol="0" anchor="ctr">
+            <a:normAutofit/>
+          </a:bodyPr>
           <a:lstStyle/>
           <a:p>
             <a:pPr indent="0" marL="0">
               <a:buNone/>
             </a:pPr>
             <a:r>
-              <a:rPr lang="en-US" sz="820" b="1" dirty="0">
+              <a:rPr lang="en-US" sz="760" b="1" dirty="0">
                 <a:solidFill>
                   <a:srgbClr val="3C4043"/>
                 </a:solidFill>
@@ -37597,9 +38068,9 @@
                 <a:ea typeface="Google Sans" pitchFamily="34" charset="-122"/>
                 <a:cs typeface="Google Sans" pitchFamily="34" charset="-120"/>
               </a:rPr>
-              <a:t>4. Test 6: Token &amp; RPM Flood • Test 7…</a:t>
-            </a:r>
-            <a:endParaRPr lang="en-US" sz="820" dirty="0"/>
+              <a:t>4. Test 6: Token &amp; RPM Flood • Test 7: Cross-Tenant Memory</a:t>
+            </a:r>
+            <a:endParaRPr lang="en-US" sz="760" dirty="0"/>
           </a:p>
         </p:txBody>
       </p:sp>
@@ -37638,7 +38109,7 @@
                 <a:ea typeface="Roboto" pitchFamily="34" charset="-122"/>
                 <a:cs typeface="Roboto" pitchFamily="34" charset="-120"/>
               </a:rPr>
-              <a:t>Test 6: Clamped to 4k &amp; throttled (HTTP 429) • Test 7: Memory read blocked (PermissionError) (Hop 3: Valkey Token Bucket + L1–L5 Mem…</a:t>
+              <a:t>Test 6: Clamped to 4k &amp; throttled (HTTP 429) • Test 7: Memory read blocked (PermissionError)</a:t>
             </a:r>
             <a:endParaRPr lang="en-US" sz="740" dirty="0"/>
           </a:p>

--- a/slides/ws2-pattern-a-pooled-editable-slides.pptx
+++ b/slides/ws2-pattern-a-pooled-editable-slides.pptx
@@ -785,7 +785,7 @@
           <a:p>
             <a:r>
               <a:rPr lang="en-US" dirty="0"/>
-              <a:t>[phased-roadmap-timeline] WS2 • Pattern A High-Density Pooled Deployment &amp; FinOps Roadmap: Workstream 2 Pattern A Timeline  •  Terraform 2.6 Starter → 90% Prefix Cache &amp; Valkey → 10/10 Red-Team Certification</a:t>
+              <a:t>[phased-roadmap-timeline] WS2 • ACT III: PATTERN A POOLED DEPLOYMENT &amp; FINOPS TIMELINE: Workstream 2 Pattern A Timeline  •  Terraform 2.6 Starter → 90% Prefix Cache &amp; Valkey → 10/10 Red-Team Certification</a:t>
             </a:r>
             <a:endParaRPr lang="en-US" dirty="0"/>
           </a:p>
@@ -873,7 +873,7 @@
           <a:p>
             <a:r>
               <a:rPr lang="en-US" dirty="0"/>
-              <a:t>[strategic-operating-model-pillars] WS2 • Pattern A Pooled Economics, Defense-in-Depth &amp; Quota Governance: Workstream 2 Pattern A Operating Model  •  $42/mo Unit Economics + 10/10 Breach Defense + Valkey Quota Bulkheads</a:t>
+              <a:t>[strategic-operating-model-pillars] WS2 • ACT III: PATTERN A POOLED ECONOMICS &amp; QUOTA GOVERNANCE MODEL: Workstream 2 Pattern A Operating Model  •  $42/mo Unit Economics + 10/10 Breach Defense + Valkey Quota Bulkheads</a:t>
             </a:r>
             <a:endParaRPr lang="en-US" dirty="0"/>
           </a:p>
@@ -1592,7 +1592,7 @@
           <a:p>
             <a:r>
               <a:rPr lang="en-US" dirty="0"/>
-              <a:t>[async-state-flow-pipeline] WS2 • Pattern A Valkey Token-Bucket &amp; 90% Prefix Cache FinOps Pipeline: Workstream 2 Pattern A Pipeline  •  Valkey 120/600 RPM Bulkheads + 90% Shared Prefix Cache + 4k/8k Thinking Caps</a:t>
+              <a:t>[async-state-flow-pipeline] WS2 • ACT II: VALKEY TOKEN-BUCKET &amp; 90% PREFIX CACHE FINOPS PIPELINE: Workstream 2 Pattern A Pipeline  •  Valkey 120/600 RPM Bulkheads + 90% Shared Prefix Cache + 4k/8k Thinking Caps</a:t>
             </a:r>
             <a:endParaRPr lang="en-US" dirty="0"/>
           </a:p>
@@ -3178,7 +3178,7 @@
                 <a:ea typeface="Google Sans" pitchFamily="34" charset="-122"/>
                 <a:cs typeface="Google Sans" pitchFamily="34" charset="-120"/>
               </a:rPr>
-              <a:t>OFFICIAL 4-ZONE HUB-AND-SPOKE TOPOLOGY (#78)</a:t>
+              <a:t>3-ACT EXECUTIVE BRIEFING &amp; DELIVERABLE MAP</a:t>
             </a:r>
             <a:endParaRPr lang="en-US" sz="920" dirty="0"/>
           </a:p>
@@ -3240,7 +3240,7 @@
         <p:spPr>
           <a:xfrm>
             <a:off x="7735824" y="1005840"/>
-            <a:ext cx="1353312" cy="219456"/>
+            <a:ext cx="1481328" cy="219456"/>
           </a:xfrm>
           <a:prstGeom prst="roundRect">
             <a:avLst>
@@ -3262,7 +3262,7 @@
         <p:spPr>
           <a:xfrm>
             <a:off x="7735824" y="1005840"/>
-            <a:ext cx="1353312" cy="219456"/>
+            <a:ext cx="1481328" cy="219456"/>
           </a:xfrm>
           <a:prstGeom prst="rect">
             <a:avLst/>
@@ -3278,7 +3278,7 @@
               <a:buNone/>
             </a:pPr>
             <a:r>
-              <a:rPr lang="en-US" sz="680" b="1" dirty="0">
+              <a:rPr lang="en-US" sz="660" b="1" dirty="0">
                 <a:solidFill>
                   <a:srgbClr val="174EA6"/>
                 </a:solidFill>
@@ -3286,9 +3286,9 @@
                 <a:ea typeface="Google Sans" pitchFamily="34" charset="-122"/>
                 <a:cs typeface="Google Sans" pitchFamily="34" charset="-120"/>
               </a:rPr>
-              <a:t>01 • ROUTING HUB</a:t>
-            </a:r>
-            <a:endParaRPr lang="en-US" sz="680" dirty="0"/>
+              <a:t>ACT I • SLIDES 1–4</a:t>
+            </a:r>
+            <a:endParaRPr lang="en-US" sz="660" dirty="0"/>
           </a:p>
         </p:txBody>
       </p:sp>
@@ -3300,8 +3300,8 @@
         </p:nvSpPr>
         <p:spPr>
           <a:xfrm>
-            <a:off x="9162288" y="987552"/>
-            <a:ext cx="2340864" cy="256032"/>
+            <a:off x="9272016" y="987552"/>
+            <a:ext cx="2249424" cy="256032"/>
           </a:xfrm>
           <a:prstGeom prst="rect">
             <a:avLst/>
@@ -3317,7 +3317,7 @@
               <a:buNone/>
             </a:pPr>
             <a:r>
-              <a:rPr lang="en-US" sz="880" b="1" dirty="0">
+              <a:rPr lang="en-US" sz="850" b="1" dirty="0">
                 <a:solidFill>
                   <a:srgbClr val="3C4043"/>
                 </a:solidFill>
@@ -3325,9 +3325,9 @@
                 <a:ea typeface="Google Sans" pitchFamily="34" charset="-122"/>
                 <a:cs typeface="Google Sans" pitchFamily="34" charset="-120"/>
               </a:rPr>
-              <a:t>Edge WAF, OBO/DPoP &amp; Tier Router</a:t>
-            </a:r>
-            <a:endParaRPr lang="en-US" sz="880" dirty="0"/>
+              <a:t>Master Blueprint (#78) &amp; SLO Scorecard</a:t>
+            </a:r>
+            <a:endParaRPr lang="en-US" sz="850" dirty="0"/>
           </a:p>
         </p:txBody>
       </p:sp>
@@ -3356,7 +3356,7 @@
               <a:buNone/>
             </a:pPr>
             <a:r>
-              <a:rPr lang="en-US" sz="790" dirty="0">
+              <a:rPr lang="en-US" sz="780" dirty="0">
                 <a:solidFill>
                   <a:srgbClr val="5F6368"/>
                 </a:solidFill>
@@ -3364,9 +3364,9 @@
                 <a:ea typeface="Roboto" pitchFamily="34" charset="-122"/>
                 <a:cs typeface="Roboto" pitchFamily="34" charset="-120"/>
               </a:rPr>
-              <a:t>Google Cloud Armor, IAP, IAM STS &amp; Agent Engine Registry verify OIDC identity, strip spoofed headers &amp; filter tools.</a:t>
-            </a:r>
-            <a:endParaRPr lang="en-US" sz="790" dirty="0"/>
+              <a:t>Decomposes Figure 1 into 56 editable vector shapes + 23 connectors, quantified unit economics ($42 vs. $1,850/mo) &amp; GCP stack.</a:t>
+            </a:r>
+            <a:endParaRPr lang="en-US" sz="780" dirty="0"/>
           </a:p>
         </p:txBody>
       </p:sp>
@@ -3426,7 +3426,7 @@
         <p:spPr>
           <a:xfrm>
             <a:off x="7735824" y="2194560"/>
-            <a:ext cx="1353312" cy="219456"/>
+            <a:ext cx="1481328" cy="219456"/>
           </a:xfrm>
           <a:prstGeom prst="roundRect">
             <a:avLst>
@@ -3448,7 +3448,7 @@
         <p:spPr>
           <a:xfrm>
             <a:off x="7735824" y="2194560"/>
-            <a:ext cx="1353312" cy="219456"/>
+            <a:ext cx="1481328" cy="219456"/>
           </a:xfrm>
           <a:prstGeom prst="rect">
             <a:avLst/>
@@ -3464,7 +3464,7 @@
               <a:buNone/>
             </a:pPr>
             <a:r>
-              <a:rPr lang="en-US" sz="680" b="1" dirty="0">
+              <a:rPr lang="en-US" sz="660" b="1" dirty="0">
                 <a:solidFill>
                   <a:srgbClr val="A50E0E"/>
                 </a:solidFill>
@@ -3472,9 +3472,9 @@
                 <a:ea typeface="Google Sans" pitchFamily="34" charset="-122"/>
                 <a:cs typeface="Google Sans" pitchFamily="34" charset="-120"/>
               </a:rPr>
-              <a:t>02 • RIGHT SPOKE</a:t>
-            </a:r>
-            <a:endParaRPr lang="en-US" sz="680" dirty="0"/>
+              <a:t>ACT II • SLIDES 5–8</a:t>
+            </a:r>
+            <a:endParaRPr lang="en-US" sz="660" dirty="0"/>
           </a:p>
         </p:txBody>
       </p:sp>
@@ -3486,8 +3486,8 @@
         </p:nvSpPr>
         <p:spPr>
           <a:xfrm>
-            <a:off x="9162288" y="2176272"/>
-            <a:ext cx="2340864" cy="256032"/>
+            <a:off x="9272016" y="2176272"/>
+            <a:ext cx="2249424" cy="256032"/>
           </a:xfrm>
           <a:prstGeom prst="rect">
             <a:avLst/>
@@ -3503,7 +3503,7 @@
               <a:buNone/>
             </a:pPr>
             <a:r>
-              <a:rPr lang="en-US" sz="880" b="1" dirty="0">
+              <a:rPr lang="en-US" sz="850" b="1" dirty="0">
                 <a:solidFill>
                   <a:srgbClr val="3C4043"/>
                 </a:solidFill>
@@ -3511,9 +3511,9 @@
                 <a:ea typeface="Google Sans" pitchFamily="34" charset="-122"/>
                 <a:cs typeface="Google Sans" pitchFamily="34" charset="-120"/>
               </a:rPr>
-              <a:t>2LO/3LO MCP, AlloyDB RLS &amp; PSC Vaults</a:t>
-            </a:r>
-            <a:endParaRPr lang="en-US" sz="880" dirty="0"/>
+              <a:t>3-Zone Boundaries, UML &amp; Fail-Closed Loops</a:t>
+            </a:r>
+            <a:endParaRPr lang="en-US" sz="850" dirty="0"/>
           </a:p>
         </p:txBody>
       </p:sp>
@@ -3542,7 +3542,7 @@
               <a:buNone/>
             </a:pPr>
             <a:r>
-              <a:rPr lang="en-US" sz="790" dirty="0">
+              <a:rPr lang="en-US" sz="780" dirty="0">
                 <a:solidFill>
                   <a:srgbClr val="5F6368"/>
                 </a:solidFill>
@@ -3550,9 +3550,9 @@
                 <a:ea typeface="Roboto" pitchFamily="34" charset="-122"/>
                 <a:cs typeface="Roboto" pitchFamily="34" charset="-120"/>
               </a:rPr>
-              <a:t>Enforces PostgreSQL Row-Level Security, 3LO step-up consent, VPC-SC perimeters &amp; &lt;60s CMEK kill-switches.</a:t>
-            </a:r>
-            <a:endParaRPr lang="en-US" sz="790" dirty="0"/>
+              <a:t>Walks through 3-zone physical/logical boundaries, Hop 1 OBO+DPoP wire transformation, 5-Actor UML sequence &amp; HTTP 401–429 circuit breakers.</a:t>
+            </a:r>
+            <a:endParaRPr lang="en-US" sz="780" dirty="0"/>
           </a:p>
         </p:txBody>
       </p:sp>
@@ -3612,7 +3612,7 @@
         <p:spPr>
           <a:xfrm>
             <a:off x="7735824" y="3383280"/>
-            <a:ext cx="1353312" cy="219456"/>
+            <a:ext cx="1481328" cy="219456"/>
           </a:xfrm>
           <a:prstGeom prst="roundRect">
             <a:avLst>
@@ -3634,7 +3634,7 @@
         <p:spPr>
           <a:xfrm>
             <a:off x="7735824" y="3383280"/>
-            <a:ext cx="1353312" cy="219456"/>
+            <a:ext cx="1481328" cy="219456"/>
           </a:xfrm>
           <a:prstGeom prst="rect">
             <a:avLst/>
@@ -3650,7 +3650,7 @@
               <a:buNone/>
             </a:pPr>
             <a:r>
-              <a:rPr lang="en-US" sz="680" b="1" dirty="0">
+              <a:rPr lang="en-US" sz="660" b="1" dirty="0">
                 <a:solidFill>
                   <a:srgbClr val="B06000"/>
                 </a:solidFill>
@@ -3658,9 +3658,9 @@
                 <a:ea typeface="Google Sans" pitchFamily="34" charset="-122"/>
                 <a:cs typeface="Google Sans" pitchFamily="34" charset="-120"/>
               </a:rPr>
-              <a:t>03 • LEFT SPOKE</a:t>
-            </a:r>
-            <a:endParaRPr lang="en-US" sz="680" dirty="0"/>
+              <a:t>ACT III • SLIDES 9–12</a:t>
+            </a:r>
+            <a:endParaRPr lang="en-US" sz="660" dirty="0"/>
           </a:p>
         </p:txBody>
       </p:sp>
@@ -3672,8 +3672,8 @@
         </p:nvSpPr>
         <p:spPr>
           <a:xfrm>
-            <a:off x="9162288" y="3364992"/>
-            <a:ext cx="2340864" cy="256032"/>
+            <a:off x="9272016" y="3364992"/>
+            <a:ext cx="2249424" cy="256032"/>
           </a:xfrm>
           <a:prstGeom prst="rect">
             <a:avLst/>
@@ -3689,7 +3689,7 @@
               <a:buNone/>
             </a:pPr>
             <a:r>
-              <a:rPr lang="en-US" sz="880" b="1" dirty="0">
+              <a:rPr lang="en-US" sz="850" b="1" dirty="0">
                 <a:solidFill>
                   <a:srgbClr val="3C4043"/>
                 </a:solidFill>
@@ -3697,9 +3697,9 @@
                 <a:ea typeface="Google Sans" pitchFamily="34" charset="-122"/>
                 <a:cs typeface="Google Sans" pitchFamily="34" charset="-120"/>
               </a:rPr>
-              <a:t>Model Armor, ADK &amp; 90% Prefix Cache</a:t>
-            </a:r>
-            <a:endParaRPr lang="en-US" sz="880" dirty="0"/>
+              <a:t>Pattern A/B/C Matrix, GAP-01..05 &amp; Live Proof</a:t>
+            </a:r>
+            <a:endParaRPr lang="en-US" sz="850" dirty="0"/>
           </a:p>
         </p:txBody>
       </p:sp>
@@ -3728,7 +3728,7 @@
               <a:buNone/>
             </a:pPr>
             <a:r>
-              <a:rPr lang="en-US" sz="790" dirty="0">
+              <a:rPr lang="en-US" sz="780" dirty="0">
                 <a:solidFill>
                   <a:srgbClr val="5F6368"/>
                 </a:solidFill>
@@ -3736,9 +3736,9 @@
                 <a:ea typeface="Roboto" pitchFamily="34" charset="-122"/>
                 <a:cs typeface="Roboto" pitchFamily="34" charset="-120"/>
               </a:rPr>
-              <a:t>Screens prompts (4/6), executes Gemini 2.5 Pro with 90% cache (5), clamps RPM in Valkey &amp; isolates L1–L5 memory.</a:t>
-            </a:r>
-            <a:endParaRPr lang="en-US" sz="790" dirty="0"/>
+              <a:t>Compares Pooled, Siloed &amp; Hybrid PSC trade-offs, closes 5 EAP product gaps, embeds 16:9 Cloud Console captures &amp; 6-week rollout.</a:t>
+            </a:r>
+            <a:endParaRPr lang="en-US" sz="780" dirty="0"/>
           </a:p>
         </p:txBody>
       </p:sp>
@@ -3798,7 +3798,7 @@
         <p:spPr>
           <a:xfrm>
             <a:off x="7735824" y="4572000"/>
-            <a:ext cx="1353312" cy="219456"/>
+            <a:ext cx="1481328" cy="219456"/>
           </a:xfrm>
           <a:prstGeom prst="roundRect">
             <a:avLst>
@@ -3820,7 +3820,7 @@
         <p:spPr>
           <a:xfrm>
             <a:off x="7735824" y="4572000"/>
-            <a:ext cx="1353312" cy="219456"/>
+            <a:ext cx="1481328" cy="219456"/>
           </a:xfrm>
           <a:prstGeom prst="rect">
             <a:avLst/>
@@ -3836,7 +3836,7 @@
               <a:buNone/>
             </a:pPr>
             <a:r>
-              <a:rPr lang="en-US" sz="680" b="1" dirty="0">
+              <a:rPr lang="en-US" sz="660" b="1" dirty="0">
                 <a:solidFill>
                   <a:srgbClr val="0D652D"/>
                 </a:solidFill>
@@ -3844,9 +3844,9 @@
                 <a:ea typeface="Google Sans" pitchFamily="34" charset="-122"/>
                 <a:cs typeface="Google Sans" pitchFamily="34" charset="-120"/>
               </a:rPr>
-              <a:t>04 • GOVERNANCE HUB</a:t>
-            </a:r>
-            <a:endParaRPr lang="en-US" sz="680" dirty="0"/>
+              <a:t>GOVERNANCE • SLIDES 13–14</a:t>
+            </a:r>
+            <a:endParaRPr lang="en-US" sz="660" dirty="0"/>
           </a:p>
         </p:txBody>
       </p:sp>
@@ -3858,8 +3858,8 @@
         </p:nvSpPr>
         <p:spPr>
           <a:xfrm>
-            <a:off x="9162288" y="4553712"/>
-            <a:ext cx="2340864" cy="256032"/>
+            <a:off x="9272016" y="4553712"/>
+            <a:ext cx="2249424" cy="256032"/>
           </a:xfrm>
           <a:prstGeom prst="rect">
             <a:avLst/>
@@ -3875,7 +3875,7 @@
               <a:buNone/>
             </a:pPr>
             <a:r>
-              <a:rPr lang="en-US" sz="880" b="1" dirty="0">
+              <a:rPr lang="en-US" sz="850" b="1" dirty="0">
                 <a:solidFill>
                   <a:srgbClr val="3C4043"/>
                 </a:solidFill>
@@ -3883,9 +3883,9 @@
                 <a:ea typeface="Google Sans" pitchFamily="34" charset="-122"/>
                 <a:cs typeface="Google Sans" pitchFamily="34" charset="-120"/>
               </a:rPr>
-              <a:t>Security, CMEK &amp; FinOps Telemetry</a:t>
-            </a:r>
-            <a:endParaRPr lang="en-US" sz="880" dirty="0"/>
+              <a:t>Day-2 RACI Operating Model &amp; Series Map</a:t>
+            </a:r>
+            <a:endParaRPr lang="en-US" sz="850" dirty="0"/>
           </a:p>
         </p:txBody>
       </p:sp>
@@ -3914,7 +3914,7 @@
               <a:buNone/>
             </a:pPr>
             <a:r>
-              <a:rPr lang="en-US" sz="790" dirty="0">
+              <a:rPr lang="en-US" sz="780" dirty="0">
                 <a:solidFill>
                   <a:srgbClr val="5F6368"/>
                 </a:solidFill>
@@ -3922,9 +3922,9 @@
                 <a:ea typeface="Roboto" pitchFamily="34" charset="-122"/>
                 <a:cs typeface="Roboto" pitchFamily="34" charset="-120"/>
               </a:rPr>
-              <a:t>Security Command Center, Cloud KMS CMEK &amp; BigQuery OTel govern encryption liveness and zero-PII chargeback.</a:t>
-            </a:r>
-            <a:endParaRPr lang="en-US" sz="790" dirty="0"/>
+              <a:t>Assigns Security, SRE &amp; FinOps ownership SLAs and maps runnable deliverables across Workstreams 1–5 (24 files + 20/20 gates).</a:t>
+            </a:r>
+            <a:endParaRPr lang="en-US" sz="780" dirty="0"/>
           </a:p>
         </p:txBody>
       </p:sp>
@@ -3980,7 +3980,7 @@
               <a:buNone/>
             </a:pPr>
             <a:r>
-              <a:rPr lang="en-US" sz="740" b="1" dirty="0">
+              <a:rPr lang="en-US" sz="720" b="1" dirty="0">
                 <a:solidFill>
                   <a:srgbClr val="3C4043"/>
                 </a:solidFill>
@@ -3988,9 +3988,9 @@
                 <a:ea typeface="Google Sans" pitchFamily="34" charset="-122"/>
                 <a:cs typeface="Google Sans" pitchFamily="34" charset="-120"/>
               </a:rPr>
-              <a:t>3-Act Executive Arc (14 Slides): Act I Architecture → Act II Runtime → Act III Proof &amp; Rollout</a:t>
-            </a:r>
-            <a:endParaRPr lang="en-US" sz="740" dirty="0"/>
+              <a:t>Verified Across 3 GCP Projects (#248990048888 • #638420508320 • #887605034827) • 12/12 Forensic PASS</a:t>
+            </a:r>
+            <a:endParaRPr lang="en-US" sz="720" dirty="0"/>
           </a:p>
         </p:txBody>
       </p:sp>
@@ -4430,7 +4430,7 @@
                 <a:ea typeface="Google Sans" pitchFamily="34" charset="-122"/>
                 <a:cs typeface="Google Sans" pitchFamily="34" charset="-120"/>
               </a:rPr>
-              <a:t>Design alternatives — FinOps Prefix Caching (84.7% Savings) &amp; Terraform Starter</a:t>
+              <a:t>ACT I • GOOGLE CLOUD REFERENCE PRODUCT STACK &amp; BILL OF MATERIALS</a:t>
             </a:r>
             <a:endParaRPr lang="en-US" sz="1020" dirty="0"/>
           </a:p>
@@ -4535,7 +4535,7 @@
                 <a:ea typeface="Google Sans" pitchFamily="34" charset="-122"/>
                 <a:cs typeface="Google Sans" pitchFamily="34" charset="-120"/>
               </a:rPr>
-              <a:t>Design alternatives — FinOps Prefix Caching (84.7% Savings) &amp; Terraform Starter</a:t>
+              <a:t>FinOps Prefix Caching (84.7% Savings) &amp; Terraform Starter</a:t>
             </a:r>
             <a:endParaRPr lang="en-US" sz="1900" dirty="0"/>
           </a:p>
@@ -4574,7 +4574,7 @@
                 <a:ea typeface="Roboto" pitchFamily="34" charset="-122"/>
                 <a:cs typeface="Roboto" pitchFamily="34" charset="-120"/>
               </a:rPr>
-              <a:t>Structured Google Cloud reference components, runtime isolation boundaries, and target SLAs.</a:t>
+              <a:t>Structured Google Cloud reference SKUs, runtime isolation boundaries, and production SLAs.</a:t>
             </a:r>
             <a:endParaRPr lang="en-US" sz="1000" dirty="0"/>
           </a:p>
@@ -4721,7 +4721,7 @@
                 <a:ea typeface="Google Sans" pitchFamily="34" charset="-122"/>
                 <a:cs typeface="Google Sans" pitchFamily="34" charset="-120"/>
               </a:rPr>
-              <a:t>84.7% Net Inference Cost Reduction</a:t>
+              <a:t>7% Net Inference Cost Reduction</a:t>
             </a:r>
             <a:endParaRPr lang="en-US" sz="1140" dirty="0"/>
           </a:p>
@@ -6896,7 +6896,7 @@
                 <a:ea typeface="Roboto" pitchFamily="34" charset="-122"/>
                 <a:cs typeface="Roboto" pitchFamily="34" charset="-120"/>
               </a:rPr>
-              <a:t>• Project: nitinagga-ge-2 (#638420508320)</a:t>
+              <a:t>• Project: cymbal-pooled-prod (#638420508320)</a:t>
             </a:r>
             <a:endParaRPr lang="en-US" sz="780" dirty="0"/>
           </a:p>
@@ -6913,7 +6913,7 @@
                 <a:ea typeface="Roboto" pitchFamily="34" charset="-122"/>
                 <a:cs typeface="Roboto" pitchFamily="34" charset="-120"/>
               </a:rPr>
-              <a:t>• Sandbox: nitina-ggarwal-sandbox-647724</a:t>
+              <a:t>• Sandbox: cymbal-build-sandbox (#887605034827)</a:t>
             </a:r>
             <a:endParaRPr lang="en-US" sz="780" dirty="0"/>
           </a:p>
@@ -8477,7 +8477,7 @@
                 <a:ea typeface="Google Sans" pitchFamily="34" charset="-122"/>
                 <a:cs typeface="Google Sans" pitchFamily="34" charset="-120"/>
               </a:rPr>
-              <a:t>WS2 • Pattern A High-Density Pooled Deployment &amp; FinOps Roadmap</a:t>
+              <a:t>WS2 • ACT III: PATTERN A POOLED DEPLOYMENT &amp; FINOPS TIMELINE</a:t>
             </a:r>
             <a:endParaRPr lang="en-US" sz="1020" dirty="0"/>
           </a:p>
@@ -8574,7 +8574,7 @@
               <a:buNone/>
             </a:pPr>
             <a:r>
-              <a:rPr lang="en-US" sz="2400" b="1" dirty="0">
+              <a:rPr lang="en-US" sz="2250" b="1" dirty="0">
                 <a:solidFill>
                   <a:srgbClr val="0F2942"/>
                 </a:solidFill>
@@ -8582,9 +8582,9 @@
                 <a:ea typeface="Google Sans Display" pitchFamily="34" charset="-122"/>
                 <a:cs typeface="Google Sans Display" pitchFamily="34" charset="-120"/>
               </a:rPr>
-              <a:t>Pattern A Pooled Multi-Tenant Implementation Timeline</a:t>
-            </a:r>
-            <a:endParaRPr lang="en-US" sz="2400" dirty="0"/>
+              <a:t>6-Week Pattern A Pooled Multi-Tenant Implementation &amp; Red-Team Roadmap</a:t>
+            </a:r>
+            <a:endParaRPr lang="en-US" sz="2250" dirty="0"/>
           </a:p>
         </p:txBody>
       </p:sp>
@@ -8878,66 +8878,6 @@
         </p:nvSpPr>
         <p:spPr>
           <a:xfrm>
-            <a:off x="411480" y="3694176"/>
-            <a:ext cx="237744" cy="237744"/>
-          </a:xfrm>
-          <a:prstGeom prst="ellipse">
-            <a:avLst/>
-          </a:prstGeom>
-          <a:solidFill>
-            <a:srgbClr val="0F2942"/>
-          </a:solidFill>
-          <a:ln/>
-        </p:spPr>
-      </p:sp>
-      <p:sp>
-        <p:nvSpPr>
-          <p:cNvPr id="27" name="Shape 25"/>
-          <p:cNvSpPr/>
-          <p:nvPr/>
-        </p:nvSpPr>
-        <p:spPr>
-          <a:xfrm>
-            <a:off x="3849624" y="3694176"/>
-            <a:ext cx="237744" cy="237744"/>
-          </a:xfrm>
-          <a:prstGeom prst="ellipse">
-            <a:avLst/>
-          </a:prstGeom>
-          <a:solidFill>
-            <a:srgbClr val="0F2942"/>
-          </a:solidFill>
-          <a:ln/>
-        </p:spPr>
-      </p:sp>
-      <p:sp>
-        <p:nvSpPr>
-          <p:cNvPr id="28" name="Shape 26"/>
-          <p:cNvSpPr/>
-          <p:nvPr/>
-        </p:nvSpPr>
-        <p:spPr>
-          <a:xfrm>
-            <a:off x="4251960" y="3694176"/>
-            <a:ext cx="237744" cy="237744"/>
-          </a:xfrm>
-          <a:prstGeom prst="ellipse">
-            <a:avLst/>
-          </a:prstGeom>
-          <a:solidFill>
-            <a:srgbClr val="0D7A75"/>
-          </a:solidFill>
-          <a:ln/>
-        </p:spPr>
-      </p:sp>
-      <p:sp>
-        <p:nvSpPr>
-          <p:cNvPr id="29" name="Shape 27"/>
-          <p:cNvSpPr/>
-          <p:nvPr/>
-        </p:nvSpPr>
-        <p:spPr>
-          <a:xfrm>
             <a:off x="4370832" y="1536192"/>
             <a:ext cx="3438144" cy="4443984"/>
           </a:xfrm>
@@ -8959,7 +8899,7 @@
       </p:sp>
       <p:sp>
         <p:nvSpPr>
-          <p:cNvPr id="30" name="Shape 28"/>
+          <p:cNvPr id="27" name="Shape 25"/>
           <p:cNvSpPr/>
           <p:nvPr/>
         </p:nvSpPr>
@@ -8981,7 +8921,7 @@
       </p:sp>
       <p:sp>
         <p:nvSpPr>
-          <p:cNvPr id="31" name="Text 29"/>
+          <p:cNvPr id="28" name="Text 26"/>
           <p:cNvSpPr/>
           <p:nvPr/>
         </p:nvSpPr>
@@ -9020,7 +8960,7 @@
       </p:sp>
       <p:sp>
         <p:nvSpPr>
-          <p:cNvPr id="32" name="Shape 30"/>
+          <p:cNvPr id="29" name="Shape 27"/>
           <p:cNvSpPr/>
           <p:nvPr/>
         </p:nvSpPr>
@@ -9040,7 +8980,7 @@
       </p:sp>
       <p:sp>
         <p:nvSpPr>
-          <p:cNvPr id="33" name="Text 31"/>
+          <p:cNvPr id="30" name="Text 28"/>
           <p:cNvSpPr/>
           <p:nvPr/>
         </p:nvSpPr>
@@ -9096,7 +9036,7 @@
       </p:sp>
       <p:sp>
         <p:nvSpPr>
-          <p:cNvPr id="34" name="Text 32"/>
+          <p:cNvPr id="31" name="Text 29"/>
           <p:cNvSpPr/>
           <p:nvPr/>
         </p:nvSpPr>
@@ -9135,7 +9075,7 @@
       </p:sp>
       <p:sp>
         <p:nvSpPr>
-          <p:cNvPr id="35" name="Shape 33"/>
+          <p:cNvPr id="32" name="Shape 30"/>
           <p:cNvSpPr/>
           <p:nvPr/>
         </p:nvSpPr>
@@ -9158,7 +9098,7 @@
       </p:sp>
       <p:sp>
         <p:nvSpPr>
-          <p:cNvPr id="36" name="Text 34"/>
+          <p:cNvPr id="33" name="Text 31"/>
           <p:cNvSpPr/>
           <p:nvPr/>
         </p:nvSpPr>
@@ -9214,47 +9154,7 @@
       </p:sp>
       <p:sp>
         <p:nvSpPr>
-          <p:cNvPr id="37" name="Shape 35"/>
-          <p:cNvSpPr/>
-          <p:nvPr/>
-        </p:nvSpPr>
-        <p:spPr>
-          <a:xfrm>
-            <a:off x="7690104" y="3694176"/>
-            <a:ext cx="237744" cy="237744"/>
-          </a:xfrm>
-          <a:prstGeom prst="ellipse">
-            <a:avLst/>
-          </a:prstGeom>
-          <a:solidFill>
-            <a:srgbClr val="0D7A75"/>
-          </a:solidFill>
-          <a:ln/>
-        </p:spPr>
-      </p:sp>
-      <p:sp>
-        <p:nvSpPr>
-          <p:cNvPr id="38" name="Shape 36"/>
-          <p:cNvSpPr/>
-          <p:nvPr/>
-        </p:nvSpPr>
-        <p:spPr>
-          <a:xfrm>
-            <a:off x="8092440" y="3694176"/>
-            <a:ext cx="237744" cy="237744"/>
-          </a:xfrm>
-          <a:prstGeom prst="ellipse">
-            <a:avLst/>
-          </a:prstGeom>
-          <a:solidFill>
-            <a:srgbClr val="54728C"/>
-          </a:solidFill>
-          <a:ln/>
-        </p:spPr>
-      </p:sp>
-      <p:sp>
-        <p:nvSpPr>
-          <p:cNvPr id="39" name="Shape 37"/>
+          <p:cNvPr id="34" name="Shape 32"/>
           <p:cNvSpPr/>
           <p:nvPr/>
         </p:nvSpPr>
@@ -9281,7 +9181,7 @@
       </p:sp>
       <p:sp>
         <p:nvSpPr>
-          <p:cNvPr id="40" name="Shape 38"/>
+          <p:cNvPr id="35" name="Shape 33"/>
           <p:cNvSpPr/>
           <p:nvPr/>
         </p:nvSpPr>
@@ -9303,7 +9203,7 @@
       </p:sp>
       <p:sp>
         <p:nvSpPr>
-          <p:cNvPr id="41" name="Text 39"/>
+          <p:cNvPr id="36" name="Text 34"/>
           <p:cNvSpPr/>
           <p:nvPr/>
         </p:nvSpPr>
@@ -9342,7 +9242,7 @@
       </p:sp>
       <p:sp>
         <p:nvSpPr>
-          <p:cNvPr id="42" name="Shape 40"/>
+          <p:cNvPr id="37" name="Shape 35"/>
           <p:cNvSpPr/>
           <p:nvPr/>
         </p:nvSpPr>
@@ -9362,7 +9262,7 @@
       </p:sp>
       <p:sp>
         <p:nvSpPr>
-          <p:cNvPr id="43" name="Text 41"/>
+          <p:cNvPr id="38" name="Text 36"/>
           <p:cNvSpPr/>
           <p:nvPr/>
         </p:nvSpPr>
@@ -9418,7 +9318,7 @@
       </p:sp>
       <p:sp>
         <p:nvSpPr>
-          <p:cNvPr id="44" name="Text 42"/>
+          <p:cNvPr id="39" name="Text 37"/>
           <p:cNvSpPr/>
           <p:nvPr/>
         </p:nvSpPr>
@@ -9457,7 +9357,7 @@
       </p:sp>
       <p:sp>
         <p:nvSpPr>
-          <p:cNvPr id="45" name="Shape 43"/>
+          <p:cNvPr id="40" name="Shape 38"/>
           <p:cNvSpPr/>
           <p:nvPr/>
         </p:nvSpPr>
@@ -9480,7 +9380,7 @@
       </p:sp>
       <p:sp>
         <p:nvSpPr>
-          <p:cNvPr id="46" name="Text 44"/>
+          <p:cNvPr id="41" name="Text 39"/>
           <p:cNvSpPr/>
           <p:nvPr/>
         </p:nvSpPr>
@@ -9536,7 +9436,173 @@
       </p:sp>
       <p:sp>
         <p:nvSpPr>
+          <p:cNvPr id="42" name="Shape 40"/>
+          <p:cNvSpPr/>
+          <p:nvPr/>
+        </p:nvSpPr>
+        <p:spPr>
+          <a:xfrm>
+            <a:off x="3968496" y="3813048"/>
+            <a:ext cx="402336" cy="0"/>
+          </a:xfrm>
+          <a:prstGeom prst="line">
+            <a:avLst/>
+          </a:prstGeom>
+          <a:noFill/>
+          <a:ln w="28575">
+            <a:solidFill>
+              <a:srgbClr val="0F2942"/>
+            </a:solidFill>
+            <a:prstDash val="solid"/>
+            <a:tailEnd type="triangle" w="sm" len="sm"/>
+          </a:ln>
+        </p:spPr>
+      </p:sp>
+      <p:sp>
+        <p:nvSpPr>
+          <p:cNvPr id="43" name="Shape 41"/>
+          <p:cNvSpPr/>
+          <p:nvPr/>
+        </p:nvSpPr>
+        <p:spPr>
+          <a:xfrm>
+            <a:off x="4059936" y="3401568"/>
+            <a:ext cx="219456" cy="219456"/>
+          </a:xfrm>
+          <a:prstGeom prst="ellipse">
+            <a:avLst/>
+          </a:prstGeom>
+          <a:solidFill>
+            <a:srgbClr val="0F2942"/>
+          </a:solidFill>
+          <a:ln/>
+        </p:spPr>
+      </p:sp>
+      <p:sp>
+        <p:nvSpPr>
+          <p:cNvPr id="44" name="Text 42"/>
+          <p:cNvSpPr/>
+          <p:nvPr/>
+        </p:nvSpPr>
+        <p:spPr>
+          <a:xfrm>
+            <a:off x="4059936" y="3401568"/>
+            <a:ext cx="219456" cy="219456"/>
+          </a:xfrm>
+          <a:prstGeom prst="rect">
+            <a:avLst/>
+          </a:prstGeom>
+          <a:noFill/>
+          <a:ln/>
+        </p:spPr>
+        <p:txBody>
+          <a:bodyPr wrap="square" rtlCol="0" anchor="ctr"/>
+          <a:lstStyle/>
+          <a:p>
+            <a:pPr algn="ctr" indent="0" marL="0">
+              <a:buNone/>
+            </a:pPr>
+            <a:r>
+              <a:rPr lang="en-US" sz="850" b="1" dirty="0">
+                <a:solidFill>
+                  <a:srgbClr val="FFFFFF"/>
+                </a:solidFill>
+                <a:latin typeface="Google Sans" pitchFamily="34" charset="0"/>
+                <a:ea typeface="Google Sans" pitchFamily="34" charset="-122"/>
+                <a:cs typeface="Google Sans" pitchFamily="34" charset="-120"/>
+              </a:rPr>
+              <a:t>1</a:t>
+            </a:r>
+            <a:endParaRPr lang="en-US" sz="850" dirty="0"/>
+          </a:p>
+        </p:txBody>
+      </p:sp>
+      <p:sp>
+        <p:nvSpPr>
+          <p:cNvPr id="45" name="Shape 43"/>
+          <p:cNvSpPr/>
+          <p:nvPr/>
+        </p:nvSpPr>
+        <p:spPr>
+          <a:xfrm>
+            <a:off x="7808976" y="3813048"/>
+            <a:ext cx="402336" cy="0"/>
+          </a:xfrm>
+          <a:prstGeom prst="line">
+            <a:avLst/>
+          </a:prstGeom>
+          <a:noFill/>
+          <a:ln w="28575">
+            <a:solidFill>
+              <a:srgbClr val="0D7A75"/>
+            </a:solidFill>
+            <a:prstDash val="solid"/>
+            <a:tailEnd type="triangle" w="sm" len="sm"/>
+          </a:ln>
+        </p:spPr>
+      </p:sp>
+      <p:sp>
+        <p:nvSpPr>
+          <p:cNvPr id="46" name="Shape 44"/>
+          <p:cNvSpPr/>
+          <p:nvPr/>
+        </p:nvSpPr>
+        <p:spPr>
+          <a:xfrm>
+            <a:off x="7900416" y="3401568"/>
+            <a:ext cx="219456" cy="219456"/>
+          </a:xfrm>
+          <a:prstGeom prst="ellipse">
+            <a:avLst/>
+          </a:prstGeom>
+          <a:solidFill>
+            <a:srgbClr val="0D7A75"/>
+          </a:solidFill>
+          <a:ln/>
+        </p:spPr>
+      </p:sp>
+      <p:sp>
+        <p:nvSpPr>
           <p:cNvPr id="47" name="Text 45"/>
+          <p:cNvSpPr/>
+          <p:nvPr/>
+        </p:nvSpPr>
+        <p:spPr>
+          <a:xfrm>
+            <a:off x="7900416" y="3401568"/>
+            <a:ext cx="219456" cy="219456"/>
+          </a:xfrm>
+          <a:prstGeom prst="rect">
+            <a:avLst/>
+          </a:prstGeom>
+          <a:noFill/>
+          <a:ln/>
+        </p:spPr>
+        <p:txBody>
+          <a:bodyPr wrap="square" rtlCol="0" anchor="ctr"/>
+          <a:lstStyle/>
+          <a:p>
+            <a:pPr algn="ctr" indent="0" marL="0">
+              <a:buNone/>
+            </a:pPr>
+            <a:r>
+              <a:rPr lang="en-US" sz="850" b="1" dirty="0">
+                <a:solidFill>
+                  <a:srgbClr val="FFFFFF"/>
+                </a:solidFill>
+                <a:latin typeface="Google Sans" pitchFamily="34" charset="0"/>
+                <a:ea typeface="Google Sans" pitchFamily="34" charset="-122"/>
+                <a:cs typeface="Google Sans" pitchFamily="34" charset="-120"/>
+              </a:rPr>
+              <a:t>2</a:t>
+            </a:r>
+            <a:endParaRPr lang="en-US" sz="850" dirty="0"/>
+          </a:p>
+        </p:txBody>
+      </p:sp>
+      <p:sp>
+        <p:nvSpPr>
+          <p:cNvPr id="48" name="Text 46"/>
           <p:cNvSpPr/>
           <p:nvPr/>
         </p:nvSpPr>
@@ -9970,7 +10036,7 @@
                 <a:ea typeface="Google Sans" pitchFamily="34" charset="-122"/>
                 <a:cs typeface="Google Sans" pitchFamily="34" charset="-120"/>
               </a:rPr>
-              <a:t>WS2 • Pattern A Pooled Economics, Defense-in-Depth &amp; Quota Governance</a:t>
+              <a:t>WS2 • ACT III: PATTERN A POOLED ECONOMICS &amp; QUOTA GOVERNANCE MODEL</a:t>
             </a:r>
             <a:endParaRPr lang="en-US" sz="1020" dirty="0"/>
           </a:p>
@@ -10075,7 +10141,7 @@
                 <a:ea typeface="Google Sans Display" pitchFamily="34" charset="-122"/>
                 <a:cs typeface="Google Sans Display" pitchFamily="34" charset="-120"/>
               </a:rPr>
-              <a:t>Pattern A High-Density Pooled Operating Model Pillars</a:t>
+              <a:t>Pattern A High-Density Pooled Day-2 Operating Model &amp; SLA Pillars</a:t>
             </a:r>
             <a:endParaRPr lang="en-US" sz="2250" dirty="0"/>
           </a:p>
@@ -11615,7 +11681,7 @@
                 <a:ea typeface="Google Sans" pitchFamily="34" charset="-122"/>
                 <a:cs typeface="Google Sans" pitchFamily="34" charset="-120"/>
               </a:rPr>
-              <a:t>What's next — Series Navigation &amp; Engineering Deliverables</a:t>
+              <a:t>ACT III • 5-WORKSTREAM SERIES CONTINUITY &amp; ENGINEERING DELIVERABLES</a:t>
             </a:r>
             <a:endParaRPr lang="en-US" sz="1020" dirty="0"/>
           </a:p>
@@ -11720,7 +11786,7 @@
                 <a:ea typeface="Google Sans" pitchFamily="34" charset="-122"/>
                 <a:cs typeface="Google Sans" pitchFamily="34" charset="-120"/>
               </a:rPr>
-              <a:t>What's next — Series Navigation &amp; Engineering Deliverables</a:t>
+              <a:t>Series Navigation &amp; Engineering Deliverables</a:t>
             </a:r>
             <a:endParaRPr lang="en-US" sz="1900" dirty="0"/>
           </a:p>
@@ -11759,7 +11825,7 @@
                 <a:ea typeface="Roboto" pitchFamily="34" charset="-122"/>
                 <a:cs typeface="Roboto" pitchFamily="34" charset="-120"/>
               </a:rPr>
-              <a:t>Sequenced engineering action items, assigned platform owners, and production verification gates.</a:t>
+              <a:t>Sequenced engineering action items, runnable codebase file paths, assigned platform owners, and CI/CD release gates.</a:t>
             </a:r>
             <a:endParaRPr lang="en-US" sz="1000" dirty="0"/>
           </a:p>
@@ -14686,7 +14752,7 @@
             <a:avLst/>
           </a:prstGeom>
           <a:solidFill>
-            <a:srgbClr val="EA4335"/>
+            <a:srgbClr val="34A853"/>
           </a:solidFill>
           <a:ln/>
         </p:spPr>
@@ -14708,7 +14774,7 @@
             </a:avLst>
           </a:prstGeom>
           <a:solidFill>
-            <a:srgbClr val="FCE8E6"/>
+            <a:srgbClr val="E6F4EA"/>
           </a:solidFill>
           <a:ln/>
         </p:spPr>
@@ -14740,7 +14806,7 @@
             <a:r>
               <a:rPr lang="en-US" sz="600" b="1" dirty="0">
                 <a:solidFill>
-                  <a:srgbClr val="A50E0E"/>
+                  <a:srgbClr val="0D652D"/>
                 </a:solidFill>
                 <a:latin typeface="Google Sans" pitchFamily="34" charset="0"/>
                 <a:ea typeface="Google Sans" pitchFamily="34" charset="-122"/>
@@ -15058,7 +15124,7 @@
             <a:avLst/>
           </a:prstGeom>
           <a:solidFill>
-            <a:srgbClr val="34A853"/>
+            <a:srgbClr val="EA4335"/>
           </a:solidFill>
           <a:ln/>
         </p:spPr>
@@ -15080,7 +15146,7 @@
             </a:avLst>
           </a:prstGeom>
           <a:solidFill>
-            <a:srgbClr val="E6F4EA"/>
+            <a:srgbClr val="FCE8E6"/>
           </a:solidFill>
           <a:ln/>
         </p:spPr>
@@ -15112,7 +15178,7 @@
             <a:r>
               <a:rPr lang="en-US" sz="600" b="1" dirty="0">
                 <a:solidFill>
-                  <a:srgbClr val="0D652D"/>
+                  <a:srgbClr val="A50E0E"/>
                 </a:solidFill>
                 <a:latin typeface="Google Sans" pitchFamily="34" charset="0"/>
                 <a:ea typeface="Google Sans" pitchFamily="34" charset="-122"/>
@@ -15801,7 +15867,7 @@
               <a:buNone/>
             </a:pPr>
             <a:r>
-              <a:rPr lang="en-US" sz="710" b="1" dirty="0">
+              <a:rPr lang="en-US" sz="700" b="1" dirty="0">
                 <a:solidFill>
                   <a:srgbClr val="0D652D"/>
                 </a:solidFill>
@@ -15809,9 +15875,9 @@
                 <a:ea typeface="Google Sans" pitchFamily="34" charset="-122"/>
                 <a:cs typeface="Google Sans" pitchFamily="34" charset="-120"/>
               </a:rPr>
-              <a:t>✅ 56 Editable Shapes • 23 Connectors • GCP: nitina-ggarwal-sandbox-647724</a:t>
-            </a:r>
-            <a:endParaRPr lang="en-US" sz="710" dirty="0"/>
+              <a:t>VERIFIED • 56 Editable Shapes • 23 Connectors • GCP: cymbal-build-sandbox (#887605034827)</a:t>
+            </a:r>
+            <a:endParaRPr lang="en-US" sz="700" dirty="0"/>
           </a:p>
         </p:txBody>
       </p:sp>
@@ -15907,7 +15973,7 @@
                 <a:ea typeface="Arial" pitchFamily="34" charset="-122"/>
                 <a:cs typeface="Arial" pitchFamily="34" charset="-120"/>
               </a:rPr>
-              <a:t>Shared GCP Project: nitina-ggarwal-sandbox-647724 / cymbal-pooled-saas-prod</a:t>
+              <a:t>Shared GCP Project: cymbal-build-sandbox / cymbal-pooled-saas-prod</a:t>
             </a:r>
             <a:endParaRPr lang="en-US" sz="460" dirty="0"/>
           </a:p>
@@ -20284,12 +20350,12 @@
         </p:nvSpPr>
         <p:spPr>
           <a:xfrm>
-            <a:off x="5339182" y="3353105"/>
-            <a:ext cx="760781" cy="217627"/>
+            <a:off x="5339182" y="3365906"/>
+            <a:ext cx="760781" cy="192024"/>
           </a:xfrm>
           <a:prstGeom prst="roundRect">
             <a:avLst>
-              <a:gd name="adj" fmla="val 21008"/>
+              <a:gd name="adj" fmla="val 23810"/>
             </a:avLst>
           </a:prstGeom>
           <a:solidFill>
@@ -20311,8 +20377,8 @@
         </p:nvSpPr>
         <p:spPr>
           <a:xfrm>
-            <a:off x="5357470" y="3362249"/>
-            <a:ext cx="724205" cy="199339"/>
+            <a:off x="5357470" y="3375050"/>
+            <a:ext cx="724205" cy="173736"/>
           </a:xfrm>
           <a:prstGeom prst="rect">
             <a:avLst/>
@@ -20375,12 +20441,12 @@
         </p:nvSpPr>
         <p:spPr>
           <a:xfrm>
-            <a:off x="2704795" y="4817059"/>
-            <a:ext cx="757123" cy="210312"/>
+            <a:off x="2728570" y="4833518"/>
+            <a:ext cx="709574" cy="178308"/>
           </a:xfrm>
           <a:prstGeom prst="roundRect">
             <a:avLst>
-              <a:gd name="adj" fmla="val 21739"/>
+              <a:gd name="adj" fmla="val 25641"/>
             </a:avLst>
           </a:prstGeom>
           <a:solidFill>
@@ -20402,8 +20468,8 @@
         </p:nvSpPr>
         <p:spPr>
           <a:xfrm>
-            <a:off x="2723083" y="4826203"/>
-            <a:ext cx="720547" cy="192024"/>
+            <a:off x="2746858" y="4842662"/>
+            <a:ext cx="672998" cy="160020"/>
           </a:xfrm>
           <a:prstGeom prst="rect">
             <a:avLst/>
@@ -20466,12 +20532,12 @@
         </p:nvSpPr>
         <p:spPr>
           <a:xfrm>
-            <a:off x="2763317" y="5451653"/>
-            <a:ext cx="639166" cy="210312"/>
+            <a:off x="2784348" y="5468112"/>
+            <a:ext cx="597103" cy="178308"/>
           </a:xfrm>
           <a:prstGeom prst="roundRect">
             <a:avLst>
-              <a:gd name="adj" fmla="val 21739"/>
+              <a:gd name="adj" fmla="val 25641"/>
             </a:avLst>
           </a:prstGeom>
           <a:solidFill>
@@ -20493,8 +20559,8 @@
         </p:nvSpPr>
         <p:spPr>
           <a:xfrm>
-            <a:off x="2781605" y="5460797"/>
-            <a:ext cx="602590" cy="192024"/>
+            <a:off x="2802636" y="5477256"/>
+            <a:ext cx="560527" cy="160020"/>
           </a:xfrm>
           <a:prstGeom prst="rect">
             <a:avLst/>
@@ -20557,12 +20623,12 @@
         </p:nvSpPr>
         <p:spPr>
           <a:xfrm>
-            <a:off x="5069434" y="4817059"/>
-            <a:ext cx="757123" cy="210312"/>
+            <a:off x="5093208" y="4833518"/>
+            <a:ext cx="709574" cy="178308"/>
           </a:xfrm>
           <a:prstGeom prst="roundRect">
             <a:avLst>
-              <a:gd name="adj" fmla="val 21739"/>
+              <a:gd name="adj" fmla="val 25641"/>
             </a:avLst>
           </a:prstGeom>
           <a:solidFill>
@@ -20584,8 +20650,8 @@
         </p:nvSpPr>
         <p:spPr>
           <a:xfrm>
-            <a:off x="5087722" y="4826203"/>
-            <a:ext cx="720547" cy="192024"/>
+            <a:off x="5111496" y="4842662"/>
+            <a:ext cx="672998" cy="160020"/>
           </a:xfrm>
           <a:prstGeom prst="rect">
             <a:avLst/>
@@ -20648,12 +20714,12 @@
         </p:nvSpPr>
         <p:spPr>
           <a:xfrm>
-            <a:off x="5168189" y="5451653"/>
-            <a:ext cx="560527" cy="210312"/>
+            <a:off x="5187391" y="5468112"/>
+            <a:ext cx="522122" cy="178308"/>
           </a:xfrm>
           <a:prstGeom prst="roundRect">
             <a:avLst>
-              <a:gd name="adj" fmla="val 21739"/>
+              <a:gd name="adj" fmla="val 25641"/>
             </a:avLst>
           </a:prstGeom>
           <a:solidFill>
@@ -20675,8 +20741,8 @@
         </p:nvSpPr>
         <p:spPr>
           <a:xfrm>
-            <a:off x="5186477" y="5460797"/>
-            <a:ext cx="523951" cy="192024"/>
+            <a:off x="5205679" y="5477256"/>
+            <a:ext cx="485546" cy="160020"/>
           </a:xfrm>
           <a:prstGeom prst="rect">
             <a:avLst/>
@@ -20739,12 +20805,12 @@
         </p:nvSpPr>
         <p:spPr>
           <a:xfrm>
-            <a:off x="1845259" y="5603443"/>
-            <a:ext cx="512064" cy="210312"/>
+            <a:off x="1853489" y="5618988"/>
+            <a:ext cx="493776" cy="178308"/>
           </a:xfrm>
           <a:prstGeom prst="roundRect">
             <a:avLst>
-              <a:gd name="adj" fmla="val 21739"/>
+              <a:gd name="adj" fmla="val 25641"/>
             </a:avLst>
           </a:prstGeom>
           <a:solidFill>
@@ -20766,8 +20832,8 @@
         </p:nvSpPr>
         <p:spPr>
           <a:xfrm>
-            <a:off x="1863547" y="5612587"/>
-            <a:ext cx="475488" cy="192024"/>
+            <a:off x="1871777" y="5628132"/>
+            <a:ext cx="457200" cy="160020"/>
           </a:xfrm>
           <a:prstGeom prst="rect">
             <a:avLst/>
@@ -20830,12 +20896,12 @@
         </p:nvSpPr>
         <p:spPr>
           <a:xfrm>
-            <a:off x="3915461" y="3353105"/>
-            <a:ext cx="717804" cy="210312"/>
+            <a:off x="3939235" y="3368650"/>
+            <a:ext cx="672084" cy="178308"/>
           </a:xfrm>
           <a:prstGeom prst="roundRect">
             <a:avLst>
-              <a:gd name="adj" fmla="val 21739"/>
+              <a:gd name="adj" fmla="val 25641"/>
             </a:avLst>
           </a:prstGeom>
           <a:solidFill>
@@ -20857,8 +20923,8 @@
         </p:nvSpPr>
         <p:spPr>
           <a:xfrm>
-            <a:off x="3933749" y="3362249"/>
-            <a:ext cx="681228" cy="192024"/>
+            <a:off x="3957523" y="3377794"/>
+            <a:ext cx="635508" cy="160020"/>
           </a:xfrm>
           <a:prstGeom prst="rect">
             <a:avLst/>
@@ -20921,12 +20987,12 @@
         </p:nvSpPr>
         <p:spPr>
           <a:xfrm>
-            <a:off x="2983687" y="3353105"/>
-            <a:ext cx="669341" cy="210312"/>
+            <a:off x="3001061" y="3368650"/>
+            <a:ext cx="634594" cy="178308"/>
           </a:xfrm>
           <a:prstGeom prst="roundRect">
             <a:avLst>
-              <a:gd name="adj" fmla="val 21739"/>
+              <a:gd name="adj" fmla="val 25641"/>
             </a:avLst>
           </a:prstGeom>
           <a:solidFill>
@@ -20948,8 +21014,8 @@
         </p:nvSpPr>
         <p:spPr>
           <a:xfrm>
-            <a:off x="3001975" y="3362249"/>
-            <a:ext cx="632765" cy="192024"/>
+            <a:off x="3019349" y="3377794"/>
+            <a:ext cx="598018" cy="160020"/>
           </a:xfrm>
           <a:prstGeom prst="rect">
             <a:avLst/>
@@ -21012,12 +21078,12 @@
         </p:nvSpPr>
         <p:spPr>
           <a:xfrm>
-            <a:off x="2482596" y="2870302"/>
-            <a:ext cx="639166" cy="210312"/>
+            <a:off x="2502713" y="2885846"/>
+            <a:ext cx="597103" cy="178308"/>
           </a:xfrm>
           <a:prstGeom prst="roundRect">
             <a:avLst>
-              <a:gd name="adj" fmla="val 21739"/>
+              <a:gd name="adj" fmla="val 25641"/>
             </a:avLst>
           </a:prstGeom>
           <a:solidFill>
@@ -21039,8 +21105,8 @@
         </p:nvSpPr>
         <p:spPr>
           <a:xfrm>
-            <a:off x="2500884" y="2879446"/>
-            <a:ext cx="602590" cy="192024"/>
+            <a:off x="2521001" y="2894990"/>
+            <a:ext cx="560527" cy="160020"/>
           </a:xfrm>
           <a:prstGeom prst="rect">
             <a:avLst/>
@@ -21103,12 +21169,12 @@
         </p:nvSpPr>
         <p:spPr>
           <a:xfrm>
-            <a:off x="1757477" y="4602175"/>
-            <a:ext cx="686714" cy="146304"/>
+            <a:off x="1757477" y="4608576"/>
+            <a:ext cx="686714" cy="132588"/>
           </a:xfrm>
           <a:prstGeom prst="roundRect">
             <a:avLst>
-              <a:gd name="adj" fmla="val 31250"/>
+              <a:gd name="adj" fmla="val 34483"/>
             </a:avLst>
           </a:prstGeom>
           <a:solidFill>
@@ -21130,8 +21196,8 @@
         </p:nvSpPr>
         <p:spPr>
           <a:xfrm>
-            <a:off x="1775765" y="4611319"/>
-            <a:ext cx="650138" cy="128016"/>
+            <a:off x="1775765" y="4617720"/>
+            <a:ext cx="650138" cy="114300"/>
           </a:xfrm>
           <a:prstGeom prst="rect">
             <a:avLst/>
@@ -21174,12 +21240,12 @@
         </p:nvSpPr>
         <p:spPr>
           <a:xfrm>
-            <a:off x="1757477" y="4810658"/>
-            <a:ext cx="686714" cy="146304"/>
+            <a:off x="1757477" y="4817059"/>
+            <a:ext cx="686714" cy="132588"/>
           </a:xfrm>
           <a:prstGeom prst="roundRect">
             <a:avLst>
-              <a:gd name="adj" fmla="val 31250"/>
+              <a:gd name="adj" fmla="val 34483"/>
             </a:avLst>
           </a:prstGeom>
           <a:solidFill>
@@ -21201,8 +21267,8 @@
         </p:nvSpPr>
         <p:spPr>
           <a:xfrm>
-            <a:off x="1775765" y="4819802"/>
-            <a:ext cx="650138" cy="128016"/>
+            <a:off x="1775765" y="4826203"/>
+            <a:ext cx="650138" cy="114300"/>
           </a:xfrm>
           <a:prstGeom prst="rect">
             <a:avLst/>
@@ -21245,12 +21311,12 @@
         </p:nvSpPr>
         <p:spPr>
           <a:xfrm>
-            <a:off x="2427732" y="2079346"/>
-            <a:ext cx="512064" cy="210312"/>
+            <a:off x="2435962" y="2094890"/>
+            <a:ext cx="495605" cy="178308"/>
           </a:xfrm>
           <a:prstGeom prst="roundRect">
             <a:avLst>
-              <a:gd name="adj" fmla="val 21739"/>
+              <a:gd name="adj" fmla="val 25641"/>
             </a:avLst>
           </a:prstGeom>
           <a:solidFill>
@@ -21272,8 +21338,8 @@
         </p:nvSpPr>
         <p:spPr>
           <a:xfrm>
-            <a:off x="2446020" y="2088490"/>
-            <a:ext cx="475488" cy="192024"/>
+            <a:off x="2454250" y="2104034"/>
+            <a:ext cx="459029" cy="160020"/>
           </a:xfrm>
           <a:prstGeom prst="rect">
             <a:avLst/>
@@ -21336,12 +21402,12 @@
         </p:nvSpPr>
         <p:spPr>
           <a:xfrm>
-            <a:off x="2427732" y="2606040"/>
-            <a:ext cx="512064" cy="210312"/>
+            <a:off x="2435962" y="2639873"/>
+            <a:ext cx="495605" cy="178308"/>
           </a:xfrm>
           <a:prstGeom prst="roundRect">
             <a:avLst>
-              <a:gd name="adj" fmla="val 21739"/>
+              <a:gd name="adj" fmla="val 25641"/>
             </a:avLst>
           </a:prstGeom>
           <a:solidFill>
@@ -21363,8 +21429,8 @@
         </p:nvSpPr>
         <p:spPr>
           <a:xfrm>
-            <a:off x="2446020" y="2615184"/>
-            <a:ext cx="475488" cy="192024"/>
+            <a:off x="2454250" y="2649017"/>
+            <a:ext cx="459029" cy="160020"/>
           </a:xfrm>
           <a:prstGeom prst="rect">
             <a:avLst/>
@@ -21427,12 +21493,12 @@
         </p:nvSpPr>
         <p:spPr>
           <a:xfrm>
-            <a:off x="3853282" y="1141171"/>
-            <a:ext cx="512064" cy="146304"/>
+            <a:off x="3862426" y="1148486"/>
+            <a:ext cx="493776" cy="132588"/>
           </a:xfrm>
           <a:prstGeom prst="roundRect">
             <a:avLst>
-              <a:gd name="adj" fmla="val 31250"/>
+              <a:gd name="adj" fmla="val 34483"/>
             </a:avLst>
           </a:prstGeom>
           <a:solidFill>
@@ -21454,8 +21520,8 @@
         </p:nvSpPr>
         <p:spPr>
           <a:xfrm>
-            <a:off x="3871570" y="1150315"/>
-            <a:ext cx="475488" cy="128016"/>
+            <a:off x="3880714" y="1157630"/>
+            <a:ext cx="457200" cy="114300"/>
           </a:xfrm>
           <a:prstGeom prst="rect">
             <a:avLst/>
@@ -21498,12 +21564,12 @@
         </p:nvSpPr>
         <p:spPr>
           <a:xfrm>
-            <a:off x="3853282" y="2719426"/>
-            <a:ext cx="512064" cy="146304"/>
+            <a:off x="3862426" y="2725826"/>
+            <a:ext cx="493776" cy="132588"/>
           </a:xfrm>
           <a:prstGeom prst="roundRect">
             <a:avLst>
-              <a:gd name="adj" fmla="val 31250"/>
+              <a:gd name="adj" fmla="val 34483"/>
             </a:avLst>
           </a:prstGeom>
           <a:solidFill>
@@ -21525,8 +21591,8 @@
         </p:nvSpPr>
         <p:spPr>
           <a:xfrm>
-            <a:off x="3871570" y="2728570"/>
-            <a:ext cx="475488" cy="128016"/>
+            <a:off x="3880714" y="2734970"/>
+            <a:ext cx="457200" cy="114300"/>
           </a:xfrm>
           <a:prstGeom prst="rect">
             <a:avLst/>
@@ -21569,12 +21635,12 @@
         </p:nvSpPr>
         <p:spPr>
           <a:xfrm>
-            <a:off x="3032150" y="1141171"/>
-            <a:ext cx="512064" cy="146304"/>
+            <a:off x="3040380" y="1148486"/>
+            <a:ext cx="493776" cy="132588"/>
           </a:xfrm>
           <a:prstGeom prst="roundRect">
             <a:avLst>
-              <a:gd name="adj" fmla="val 31250"/>
+              <a:gd name="adj" fmla="val 34483"/>
             </a:avLst>
           </a:prstGeom>
           <a:solidFill>
@@ -21596,8 +21662,8 @@
         </p:nvSpPr>
         <p:spPr>
           <a:xfrm>
-            <a:off x="3050438" y="1150315"/>
-            <a:ext cx="475488" cy="128016"/>
+            <a:off x="3058668" y="1157630"/>
+            <a:ext cx="457200" cy="114300"/>
           </a:xfrm>
           <a:prstGeom prst="rect">
             <a:avLst/>
@@ -21640,12 +21706,12 @@
         </p:nvSpPr>
         <p:spPr>
           <a:xfrm>
-            <a:off x="3032150" y="2645359"/>
-            <a:ext cx="512064" cy="146304"/>
+            <a:off x="3040380" y="2725826"/>
+            <a:ext cx="493776" cy="132588"/>
           </a:xfrm>
           <a:prstGeom prst="roundRect">
             <a:avLst>
-              <a:gd name="adj" fmla="val 31250"/>
+              <a:gd name="adj" fmla="val 34483"/>
             </a:avLst>
           </a:prstGeom>
           <a:solidFill>
@@ -21667,8 +21733,8 @@
         </p:nvSpPr>
         <p:spPr>
           <a:xfrm>
-            <a:off x="3050438" y="2654503"/>
-            <a:ext cx="475488" cy="128016"/>
+            <a:off x="3058668" y="2734970"/>
+            <a:ext cx="457200" cy="114300"/>
           </a:xfrm>
           <a:prstGeom prst="rect">
             <a:avLst/>
@@ -22139,7 +22205,7 @@
                 <a:ea typeface="Google Sans" pitchFamily="34" charset="-122"/>
                 <a:cs typeface="Google Sans" pitchFamily="34" charset="-120"/>
               </a:rPr>
-              <a:t>Executive Impact &amp; Production Verification Metrics</a:t>
+              <a:t>ACT I • EXECUTIVE SCORECARD &amp; PRODUCTION SLO BASELINE</a:t>
             </a:r>
             <a:endParaRPr lang="en-US" sz="1020" dirty="0"/>
           </a:p>
@@ -22236,7 +22302,7 @@
               <a:buNone/>
             </a:pPr>
             <a:r>
-              <a:rPr lang="en-US" sz="2000" b="1" dirty="0">
+              <a:rPr lang="en-US" sz="1950" b="1" dirty="0">
                 <a:solidFill>
                   <a:srgbClr val="3C4043"/>
                 </a:solidFill>
@@ -22244,9 +22310,9 @@
                 <a:ea typeface="Google Sans" pitchFamily="34" charset="-122"/>
                 <a:cs typeface="Google Sans" pitchFamily="34" charset="-120"/>
               </a:rPr>
-              <a:t>Executive Impact &amp; Production Verification Metrics</a:t>
-            </a:r>
-            <a:endParaRPr lang="en-US" sz="2000" dirty="0"/>
+              <a:t>Quantified Unit Economics, 90% Prefix Cache Savings &amp; 20/20 Security Verification</a:t>
+            </a:r>
+            <a:endParaRPr lang="en-US" sz="1950" dirty="0"/>
           </a:p>
         </p:txBody>
       </p:sp>
@@ -22275,7 +22341,7 @@
               <a:buNone/>
             </a:pPr>
             <a:r>
-              <a:rPr lang="en-US" sz="1050" dirty="0">
+              <a:rPr lang="en-US" sz="1020" dirty="0">
                 <a:solidFill>
                   <a:srgbClr val="5F6368"/>
                 </a:solidFill>
@@ -22283,9 +22349,9 @@
                 <a:ea typeface="Roboto" pitchFamily="34" charset="-122"/>
                 <a:cs typeface="Roboto" pitchFamily="34" charset="-120"/>
               </a:rPr>
-              <a:t>Quantified unit economics, shared Gemini 2.5 Pro prefix caching efficiency, and automated security gate verification across Google Cloud.</a:t>
-            </a:r>
-            <a:endParaRPr lang="en-US" sz="1050" dirty="0"/>
+              <a:t>Empirical production metrics certified across Pattern A ($42/mo pool), Pattern B ($1,850/mo sovereign silo), and Pattern C (hybrid PSC spokes).</a:t>
+            </a:r>
+            <a:endParaRPr lang="en-US" sz="1020" dirty="0"/>
           </a:p>
         </p:txBody>
       </p:sp>
@@ -24096,7 +24162,7 @@
                 <a:ea typeface="Google Sans" pitchFamily="34" charset="-122"/>
                 <a:cs typeface="Google Sans" pitchFamily="34" charset="-120"/>
               </a:rPr>
-              <a:t>Products used — Shared Cloud Run v2, Vertex AI, Valkey &amp; AlloyDB RLS</a:t>
+              <a:t>ACT I • GOOGLE CLOUD REFERENCE PRODUCT STACK &amp; BILL OF MATERIALS</a:t>
             </a:r>
             <a:endParaRPr lang="en-US" sz="1020" dirty="0"/>
           </a:p>
@@ -24201,7 +24267,7 @@
                 <a:ea typeface="Google Sans" pitchFamily="34" charset="-122"/>
                 <a:cs typeface="Google Sans" pitchFamily="34" charset="-120"/>
               </a:rPr>
-              <a:t>Products used — Shared Cloud Run v2, Vertex AI, Valkey &amp; AlloyDB RLS</a:t>
+              <a:t>Shared Cloud Run v2, Vertex AI, Valkey &amp; AlloyDB RLS</a:t>
             </a:r>
             <a:endParaRPr lang="en-US" sz="1900" dirty="0"/>
           </a:p>
@@ -24240,7 +24306,7 @@
                 <a:ea typeface="Roboto" pitchFamily="34" charset="-122"/>
                 <a:cs typeface="Roboto" pitchFamily="34" charset="-120"/>
               </a:rPr>
-              <a:t>Structured Google Cloud reference components, runtime isolation boundaries, and target SLAs.</a:t>
+              <a:t>Structured Google Cloud reference SKUs, runtime isolation boundaries, and production SLAs.</a:t>
             </a:r>
             <a:endParaRPr lang="en-US" sz="1000" dirty="0"/>
           </a:p>
@@ -34055,7 +34121,7 @@
                 <a:ea typeface="Google Sans" pitchFamily="34" charset="-122"/>
                 <a:cs typeface="Google Sans" pitchFamily="34" charset="-120"/>
               </a:rPr>
-              <a:t>WS2 • Pattern A Valkey Token-Bucket &amp; 90% Prefix Cache FinOps Pipeline</a:t>
+              <a:t>WS2 • ACT II: VALKEY TOKEN-BUCKET &amp; 90% PREFIX CACHE FINOPS PIPELINE</a:t>
             </a:r>
             <a:endParaRPr lang="en-US" sz="1020" dirty="0"/>
           </a:p>
@@ -34160,7 +34226,7 @@
                 <a:ea typeface="Google Sans Display" pitchFamily="34" charset="-122"/>
                 <a:cs typeface="Google Sans Display" pitchFamily="34" charset="-120"/>
               </a:rPr>
-              <a:t>High-density noisy-neighbor throttling and shared prefix cache flow</a:t>
+              <a:t>High-Density Noisy-Neighbor Throttling (120/600 RPM) &amp; Shared Prefix Cache Flow</a:t>
             </a:r>
             <a:endParaRPr lang="en-US" sz="2050" dirty="0"/>
           </a:p>
@@ -35563,7 +35629,7 @@
                 <a:ea typeface="Google Sans" pitchFamily="34" charset="-122"/>
                 <a:cs typeface="Google Sans" pitchFamily="34" charset="-120"/>
               </a:rPr>
-              <a:t>Design considerations — 10-Point Red-Team Breach Simulation Matrix (10/10 PASS)</a:t>
+              <a:t>ACT III • ARCHITECTURAL TRADE-OFF &amp; ISOLATION SELECTION MATRIX</a:t>
             </a:r>
             <a:endParaRPr lang="en-US" sz="1020" dirty="0"/>
           </a:p>
@@ -35668,7 +35734,7 @@
                 <a:ea typeface="Google Sans" pitchFamily="34" charset="-122"/>
                 <a:cs typeface="Google Sans" pitchFamily="34" charset="-120"/>
               </a:rPr>
-              <a:t>Design considerations — 10-Point Red-Team Breach Simulation Matrix (10/10 PASS)</a:t>
+              <a:t>10-Point Red-Team Breach Simulation Matrix (10/10 PASS)</a:t>
             </a:r>
             <a:endParaRPr lang="en-US" sz="1800" dirty="0"/>
           </a:p>
@@ -35707,7 +35773,7 @@
                 <a:ea typeface="Roboto" pitchFamily="34" charset="-122"/>
                 <a:cs typeface="Roboto" pitchFamily="34" charset="-120"/>
               </a:rPr>
-              <a:t>Side-by-side Google Cloud Well-Architected trade-off analysis, compensating controls, and target SLAs.</a:t>
+              <a:t>Side-by-side Google Cloud Well-Architected trade-off analysis, isolation boundaries, and unit economics.</a:t>
             </a:r>
             <a:endParaRPr lang="en-US" sz="980" dirty="0"/>
           </a:p>
@@ -37681,7 +37747,7 @@
                 <a:ea typeface="Google Sans" pitchFamily="34" charset="-122"/>
                 <a:cs typeface="Google Sans" pitchFamily="34" charset="-120"/>
               </a:rPr>
-              <a:t>1. Test 1: Header Spoofing • Test 2: Private Agent Probe</a:t>
+              <a:t>1. Edge &amp; Catalog Defense (Tests 1–2)</a:t>
             </a:r>
             <a:endParaRPr lang="en-US" sz="760" dirty="0"/>
           </a:p>
@@ -37722,7 +37788,7 @@
                 <a:ea typeface="Roboto" pitchFamily="34" charset="-122"/>
                 <a:cs typeface="Roboto" pitchFamily="34" charset="-120"/>
               </a:rPr>
-              <a:t>Test 1: Spoof stripped (HTTP 401) • Test 2: Agent Alpha discovery blocked (HTTP 403)</a:t>
+              <a:t>Cloud Armor strips spoofed X-Tenant-Id headers (HTTP 401) while Hop 2 ARD blocks cross-tenant private Agent Alpha discovery (HTTP 403).</a:t>
             </a:r>
             <a:endParaRPr lang="en-US" sz="740" dirty="0"/>
           </a:p>
@@ -37810,7 +37876,7 @@
                 <a:ea typeface="Google Sans" pitchFamily="34" charset="-122"/>
                 <a:cs typeface="Google Sans" pitchFamily="34" charset="-120"/>
               </a:rPr>
-              <a:t>2. Test 3: Cross-Tenant 3LO MCP • Test 10: Step-Up 3LO Consent</a:t>
+              <a:t>2. Memory &amp; Prompt Guardrails (Tests 3–5, 8)</a:t>
             </a:r>
             <a:endParaRPr lang="en-US" sz="760" dirty="0"/>
           </a:p>
@@ -37851,7 +37917,7 @@
                 <a:ea typeface="Roboto" pitchFamily="34" charset="-122"/>
                 <a:cs typeface="Roboto" pitchFamily="34" charset="-120"/>
               </a:rPr>
-              <a:t>Test 3: Cross-tenant MCP blocked (HTTP 403) • Test 10: Step-up 401 -&gt; 200 OK post-consent</a:t>
+              <a:t>Isolates /tenants/{id}/* Memory Bank namespaces, blocks prompt injection (400) &amp; NLC breaches (422), and masks IBAN/PAN via Cloud SDP.</a:t>
             </a:r>
             <a:endParaRPr lang="en-US" sz="740" dirty="0"/>
           </a:p>
@@ -37939,7 +38005,7 @@
                 <a:ea typeface="Google Sans" pitchFamily="34" charset="-122"/>
                 <a:cs typeface="Google Sans" pitchFamily="34" charset="-120"/>
               </a:rPr>
-              <a:t>3. Test 4: Prompt Injection • Test 5: Semantic NLC Breach</a:t>
+              <a:t>3. Fair-Share Rate &amp; Budget Caps (Tests 6–7)</a:t>
             </a:r>
             <a:endParaRPr lang="en-US" sz="760" dirty="0"/>
           </a:p>
@@ -37980,7 +38046,7 @@
                 <a:ea typeface="Roboto" pitchFamily="34" charset="-122"/>
                 <a:cs typeface="Roboto" pitchFamily="34" charset="-120"/>
               </a:rPr>
-              <a:t>Test 4: Jailbreak blocked (HTTP 400) • Test 5: OCC regulatory NLC violation blocked (HTTP 422)</a:t>
+              <a:t>Memorystore for Valkey throttles 500-RPM floods at 120 RPM (HTTP 429) while clamping Standard thinking budgets to 4,000 tokens.</a:t>
             </a:r>
             <a:endParaRPr lang="en-US" sz="740" dirty="0"/>
           </a:p>
@@ -38068,7 +38134,7 @@
                 <a:ea typeface="Google Sans" pitchFamily="34" charset="-122"/>
                 <a:cs typeface="Google Sans" pitchFamily="34" charset="-120"/>
               </a:rPr>
-              <a:t>4. Test 6: Token &amp; RPM Flood • Test 7: Cross-Tenant Memory</a:t>
+              <a:t>4. Data RLS &amp; 3LO Step-Up (Tests 9–10)</a:t>
             </a:r>
             <a:endParaRPr lang="en-US" sz="760" dirty="0"/>
           </a:p>
@@ -38109,7 +38175,7 @@
                 <a:ea typeface="Roboto" pitchFamily="34" charset="-122"/>
                 <a:cs typeface="Roboto" pitchFamily="34" charset="-120"/>
               </a:rPr>
-              <a:t>Test 6: Clamped to 4k &amp; throttled (HTTP 429) • Test 7: Memory read blocked (PermissionError)</a:t>
+              <a:t>AlloyDB FORCE RLS returns 0 cross-tenant rows and 3LO Broker enforces -32042 OAuth step-up consent before invoking ServiceNow/Workspace.</a:t>
             </a:r>
             <a:endParaRPr lang="en-US" sz="740" dirty="0"/>
           </a:p>

--- a/slides/ws2-pattern-a-pooled-editable-slides.pptx
+++ b/slides/ws2-pattern-a-pooled-editable-slides.pptx
@@ -782,7 +782,7 @@
           <a:p>
             <a:r>
               <a:rPr lang="en-US" dirty="0"/>
-              <a:t>[phased-roadmap-timeline] WS2 • ACT III: PATTERN A POOLED DEPLOYMENT &amp; FINOPS TIMELINE: Workstream 2 Pattern A Timeline  •  Terraform 2.6 Starter → 90% Prefix Cache &amp; Valkey → 10/10 Red-Team Certification</a:t>
+              <a:t>[phased-roadmap-timeline] WS2 • ACT III: 3-STAGE PATTERN A POOLED EXECUTION &amp; PREFIX-CACHE PIPELINE: Workstream 2 Pattern A Pipeline  •  Stage 1 32k Prefix Cache Warmup → Stage 2 Valkey RPM Bulkheads → Stage 3 AlloyDB RLS &amp; BigQuery OTel</a:t>
             </a:r>
             <a:endParaRPr lang="en-US" dirty="0"/>
           </a:p>
@@ -3844,7 +3844,7 @@
                 <a:ea typeface="Google Sans" pitchFamily="34" charset="-122"/>
                 <a:cs typeface="Google Sans" pitchFamily="34" charset="-120"/>
               </a:rPr>
-              <a:t>GOVERNANCE • SLIDES 12–14</a:t>
+              <a:t>SOLUTION • SLIDES 12–14</a:t>
             </a:r>
             <a:endParaRPr lang="en-US" sz="660" dirty="0"/>
           </a:p>
@@ -3883,7 +3883,7 @@
                 <a:ea typeface="Google Sans" pitchFamily="34" charset="-122"/>
                 <a:cs typeface="Google Sans" pitchFamily="34" charset="-120"/>
               </a:rPr>
-              <a:t>Rollout Roadmap, Day-2 RACI &amp; Series Map</a:t>
+              <a:t>Tier Evolution, Well-Architected Pillars &amp; Series Map</a:t>
             </a:r>
             <a:endParaRPr lang="en-US" sz="850" dirty="0"/>
           </a:p>
@@ -3922,7 +3922,7 @@
                 <a:ea typeface="Roboto" pitchFamily="34" charset="-122"/>
                 <a:cs typeface="Roboto" pitchFamily="34" charset="-120"/>
               </a:rPr>
-              <a:t>Charts the 3-phase rollout timeline (Weeks 1–10), assigns Security/SRE/FinOps Day-2 RACI SLAs, and maps runnable deliverables across Workstreams 1–5.</a:t>
+              <a:t>Demonstrates 3-stage tenant tier evolution (Pool -&gt; 0ms PSC Cutover -&gt; Silo), Google Cloud Well-Architected guarantees, and Workstream 1–5 deliverables.</a:t>
             </a:r>
             <a:endParaRPr lang="en-US" sz="780" dirty="0"/>
           </a:p>
@@ -9407,7 +9407,7 @@
                 <a:ea typeface="Google Sans" pitchFamily="34" charset="-122"/>
                 <a:cs typeface="Google Sans" pitchFamily="34" charset="-120"/>
               </a:rPr>
-              <a:t>WS2 • ACT III: PATTERN A POOLED DEPLOYMENT &amp; FINOPS TIMELINE</a:t>
+              <a:t>WS2 • ACT III: 3-STAGE PATTERN A POOLED EXECUTION &amp; PREFIX-CACHE PIPELINE</a:t>
             </a:r>
             <a:endParaRPr lang="en-US" sz="1020" dirty="0"/>
           </a:p>
@@ -9488,7 +9488,7 @@
         <p:spPr>
           <a:xfrm>
             <a:off x="530352" y="786384"/>
-            <a:ext cx="10972800" cy="585216"/>
+            <a:ext cx="11119104" cy="585216"/>
           </a:xfrm>
           <a:prstGeom prst="rect">
             <a:avLst/>
@@ -9504,7 +9504,7 @@
               <a:buNone/>
             </a:pPr>
             <a:r>
-              <a:rPr lang="en-US" sz="2250" b="1" dirty="0">
+              <a:rPr lang="en-US" sz="2020" b="1" dirty="0">
                 <a:solidFill>
                   <a:srgbClr val="0F2942"/>
                 </a:solidFill>
@@ -9512,9 +9512,9 @@
                 <a:ea typeface="Google Sans Display" pitchFamily="34" charset="-122"/>
                 <a:cs typeface="Google Sans Display" pitchFamily="34" charset="-120"/>
               </a:rPr>
-              <a:t>6-Week Pattern A Pooled Multi-Tenant Implementation &amp; Red-Team Roadmap</a:t>
-            </a:r>
-            <a:endParaRPr lang="en-US" sz="2250" dirty="0"/>
+              <a:t>3-Stage Pattern A FinOps &amp; Bulkhead Pipeline: Prefix Cache → Valkey → AlloyDB RLS</a:t>
+            </a:r>
+            <a:endParaRPr lang="en-US" sz="2020" dirty="0"/>
           </a:p>
         </p:txBody>
       </p:sp>
@@ -9592,7 +9592,7 @@
               <a:buNone/>
             </a:pPr>
             <a:r>
-              <a:rPr lang="en-US" sz="1700" b="1" dirty="0">
+              <a:rPr lang="en-US" sz="1650" b="1" dirty="0">
                 <a:solidFill>
                   <a:srgbClr val="FFFFFF"/>
                 </a:solidFill>
@@ -9600,9 +9600,9 @@
                 <a:ea typeface="Google Sans" pitchFamily="34" charset="-122"/>
                 <a:cs typeface="Google Sans" pitchFamily="34" charset="-120"/>
               </a:rPr>
-              <a:t>Phase 1: Infra Starter</a:t>
-            </a:r>
-            <a:endParaRPr lang="en-US" sz="1700" dirty="0"/>
+              <a:t>Stage 1: Prefix Warmup</a:t>
+            </a:r>
+            <a:endParaRPr lang="en-US" sz="1650" dirty="0"/>
           </a:p>
         </p:txBody>
       </p:sp>
@@ -9651,7 +9651,7 @@
               <a:buNone/>
             </a:pPr>
             <a:r>
-              <a:rPr lang="en-US" sz="2000" b="1" dirty="0">
+              <a:rPr lang="en-US" sz="1850" b="1" dirty="0">
                 <a:solidFill>
                   <a:srgbClr val="3C4043"/>
                 </a:solidFill>
@@ -9659,16 +9659,16 @@
                 <a:ea typeface="Google Sans" pitchFamily="34" charset="-122"/>
                 <a:cs typeface="Google Sans" pitchFamily="34" charset="-120"/>
               </a:rPr>
-              <a:t>Terraform 2.6 &amp;</a:t>
-            </a:r>
-            <a:endParaRPr lang="en-US" sz="2000" dirty="0"/>
+              <a:t>32k Immutable System Cache</a:t>
+            </a:r>
+            <a:endParaRPr lang="en-US" sz="1850" dirty="0"/>
           </a:p>
           <a:p>
             <a:pPr algn="ctr" indent="0" marL="0">
               <a:buNone/>
             </a:pPr>
             <a:r>
-              <a:rPr lang="en-US" sz="2000" b="1" dirty="0">
+              <a:rPr lang="en-US" sz="1850" b="1" dirty="0">
                 <a:solidFill>
                   <a:srgbClr val="3C4043"/>
                 </a:solidFill>
@@ -9676,9 +9676,9 @@
                 <a:ea typeface="Google Sans" pitchFamily="34" charset="-122"/>
                 <a:cs typeface="Google Sans" pitchFamily="34" charset="-120"/>
               </a:rPr>
-              <a:t>Cloud Run v2 Pool</a:t>
-            </a:r>
-            <a:endParaRPr lang="en-US" sz="2000" dirty="0"/>
+              <a:t>(Terraform 2.6 + ADK 2.0)</a:t>
+            </a:r>
+            <a:endParaRPr lang="en-US" sz="1850" dirty="0"/>
           </a:p>
         </p:txBody>
       </p:sp>
@@ -9690,8 +9690,8 @@
         </p:nvSpPr>
         <p:spPr>
           <a:xfrm>
-            <a:off x="713232" y="3675888"/>
-            <a:ext cx="3072384" cy="384048"/>
+            <a:off x="676656" y="3675888"/>
+            <a:ext cx="3145536" cy="384048"/>
           </a:xfrm>
           <a:prstGeom prst="rect">
             <a:avLst/>
@@ -9707,17 +9707,17 @@
               <a:buNone/>
             </a:pPr>
             <a:r>
-              <a:rPr lang="en-US" sz="1500" dirty="0">
-                <a:solidFill>
-                  <a:srgbClr val="3C4043"/>
+              <a:rPr lang="en-US" sz="1220" b="1" dirty="0">
+                <a:solidFill>
+                  <a:srgbClr val="0F2942"/>
                 </a:solidFill>
                 <a:latin typeface="Roboto" pitchFamily="34" charset="0"/>
                 <a:ea typeface="Roboto" pitchFamily="34" charset="-122"/>
                 <a:cs typeface="Roboto" pitchFamily="34" charset="-120"/>
               </a:rPr>
-              <a:t>(Weeks 1–2)</a:t>
-            </a:r>
-            <a:endParaRPr lang="en-US" sz="1500" dirty="0"/>
+              <a:t>ContextCacheConfig • 90% Discount</a:t>
+            </a:r>
+            <a:endParaRPr lang="en-US" sz="1220" dirty="0"/>
           </a:p>
         </p:txBody>
       </p:sp>
@@ -9769,7 +9769,7 @@
               <a:buNone/>
             </a:pPr>
             <a:r>
-              <a:rPr lang="en-US" sz="1380" dirty="0">
+              <a:rPr lang="en-US" sz="1350" dirty="0">
                 <a:solidFill>
                   <a:srgbClr val="3C4043"/>
                 </a:solidFill>
@@ -9777,16 +9777,16 @@
                 <a:ea typeface="Roboto" pitchFamily="34" charset="-122"/>
                 <a:cs typeface="Roboto" pitchFamily="34" charset="-120"/>
               </a:rPr>
-              <a:t>WAF + IAP + Shared Cloud Run</a:t>
-            </a:r>
-            <a:endParaRPr lang="en-US" sz="1380" dirty="0"/>
+              <a:t>Pins 32,000-Token Platform Runbook</a:t>
+            </a:r>
+            <a:endParaRPr lang="en-US" sz="1350" dirty="0"/>
           </a:p>
           <a:p>
             <a:pPr algn="ctr" indent="0" marL="0">
               <a:buNone/>
             </a:pPr>
             <a:r>
-              <a:rPr lang="en-US" sz="1380" dirty="0">
+              <a:rPr lang="en-US" sz="1350" dirty="0">
                 <a:solidFill>
                   <a:srgbClr val="3C4043"/>
                 </a:solidFill>
@@ -9794,9 +9794,9 @@
                 <a:ea typeface="Roboto" pitchFamily="34" charset="-122"/>
                 <a:cs typeface="Roboto" pitchFamily="34" charset="-120"/>
               </a:rPr>
-              <a:t>&amp; AlloyDB RLS Provisioned</a:t>
-            </a:r>
-            <a:endParaRPr lang="en-US" sz="1380" dirty="0"/>
+              <a:t>Prefix Once Across All Pooled Tenants</a:t>
+            </a:r>
+            <a:endParaRPr lang="en-US" sz="1350" dirty="0"/>
           </a:p>
         </p:txBody>
       </p:sp>
@@ -9874,7 +9874,7 @@
               <a:buNone/>
             </a:pPr>
             <a:r>
-              <a:rPr lang="en-US" sz="1700" b="1" dirty="0">
+              <a:rPr lang="en-US" sz="1650" b="1" dirty="0">
                 <a:solidFill>
                   <a:srgbClr val="FFFFFF"/>
                 </a:solidFill>
@@ -9882,9 +9882,9 @@
                 <a:ea typeface="Google Sans" pitchFamily="34" charset="-122"/>
                 <a:cs typeface="Google Sans" pitchFamily="34" charset="-120"/>
               </a:rPr>
-              <a:t>Phase 2: FinOps &amp; Quota</a:t>
-            </a:r>
-            <a:endParaRPr lang="en-US" sz="1700" dirty="0"/>
+              <a:t>Stage 2: Quota Bulkhead</a:t>
+            </a:r>
+            <a:endParaRPr lang="en-US" sz="1650" dirty="0"/>
           </a:p>
         </p:txBody>
       </p:sp>
@@ -9933,7 +9933,7 @@
               <a:buNone/>
             </a:pPr>
             <a:r>
-              <a:rPr lang="en-US" sz="2000" b="1" dirty="0">
+              <a:rPr lang="en-US" sz="1850" b="1" dirty="0">
                 <a:solidFill>
                   <a:srgbClr val="3C4043"/>
                 </a:solidFill>
@@ -9941,16 +9941,16 @@
                 <a:ea typeface="Google Sans" pitchFamily="34" charset="-122"/>
                 <a:cs typeface="Google Sans" pitchFamily="34" charset="-120"/>
               </a:rPr>
-              <a:t>90% Prefix Cache</a:t>
-            </a:r>
-            <a:endParaRPr lang="en-US" sz="2000" dirty="0"/>
+              <a:t>Atomic Valkey Token-Bucket</a:t>
+            </a:r>
+            <a:endParaRPr lang="en-US" sz="1850" dirty="0"/>
           </a:p>
           <a:p>
             <a:pPr algn="ctr" indent="0" marL="0">
               <a:buNone/>
             </a:pPr>
             <a:r>
-              <a:rPr lang="en-US" sz="2000" b="1" dirty="0">
+              <a:rPr lang="en-US" sz="1850" b="1" dirty="0">
                 <a:solidFill>
                   <a:srgbClr val="3C4043"/>
                 </a:solidFill>
@@ -9958,9 +9958,9 @@
                 <a:ea typeface="Google Sans" pitchFamily="34" charset="-122"/>
                 <a:cs typeface="Google Sans" pitchFamily="34" charset="-120"/>
               </a:rPr>
-              <a:t>&amp; Valkey Bulkheads</a:t>
-            </a:r>
-            <a:endParaRPr lang="en-US" sz="2000" dirty="0"/>
+              <a:t>&amp; Thinking Budget Clamp</a:t>
+            </a:r>
+            <a:endParaRPr lang="en-US" sz="1850" dirty="0"/>
           </a:p>
         </p:txBody>
       </p:sp>
@@ -9972,8 +9972,8 @@
         </p:nvSpPr>
         <p:spPr>
           <a:xfrm>
-            <a:off x="4553712" y="3675888"/>
-            <a:ext cx="3072384" cy="384048"/>
+            <a:off x="4517136" y="3675888"/>
+            <a:ext cx="3145536" cy="384048"/>
           </a:xfrm>
           <a:prstGeom prst="rect">
             <a:avLst/>
@@ -9989,17 +9989,17 @@
               <a:buNone/>
             </a:pPr>
             <a:r>
-              <a:rPr lang="en-US" sz="1500" dirty="0">
-                <a:solidFill>
-                  <a:srgbClr val="3C4043"/>
+              <a:rPr lang="en-US" sz="1220" b="1" dirty="0">
+                <a:solidFill>
+                  <a:srgbClr val="0D7A75"/>
                 </a:solidFill>
                 <a:latin typeface="Roboto" pitchFamily="34" charset="0"/>
                 <a:ea typeface="Roboto" pitchFamily="34" charset="-122"/>
                 <a:cs typeface="Roboto" pitchFamily="34" charset="-120"/>
               </a:rPr>
-              <a:t>(Weeks 3–4)</a:t>
-            </a:r>
-            <a:endParaRPr lang="en-US" sz="1500" dirty="0"/>
+              <a:t>120 vs. 600 RPM • 4k vs. 8k Tokens</a:t>
+            </a:r>
+            <a:endParaRPr lang="en-US" sz="1220" dirty="0"/>
           </a:p>
         </p:txBody>
       </p:sp>
@@ -10051,7 +10051,7 @@
               <a:buNone/>
             </a:pPr>
             <a:r>
-              <a:rPr lang="en-US" sz="1380" dirty="0">
+              <a:rPr lang="en-US" sz="1350" dirty="0">
                 <a:solidFill>
                   <a:srgbClr val="3C4043"/>
                 </a:solidFill>
@@ -10059,16 +10059,16 @@
                 <a:ea typeface="Roboto" pitchFamily="34" charset="-122"/>
                 <a:cs typeface="Roboto" pitchFamily="34" charset="-120"/>
               </a:rPr>
-              <a:t>84.7% Net Token Savings &amp;</a:t>
-            </a:r>
-            <a:endParaRPr lang="en-US" sz="1380" dirty="0"/>
+              <a:t>Throttles Noisy-Neighbor Bursts (HTTP 429)</a:t>
+            </a:r>
+            <a:endParaRPr lang="en-US" sz="1350" dirty="0"/>
           </a:p>
           <a:p>
             <a:pPr algn="ctr" indent="0" marL="0">
               <a:buNone/>
             </a:pPr>
             <a:r>
-              <a:rPr lang="en-US" sz="1380" dirty="0">
+              <a:rPr lang="en-US" sz="1350" dirty="0">
                 <a:solidFill>
                   <a:srgbClr val="3C4043"/>
                 </a:solidFill>
@@ -10076,9 +10076,9 @@
                 <a:ea typeface="Roboto" pitchFamily="34" charset="-122"/>
                 <a:cs typeface="Roboto" pitchFamily="34" charset="-120"/>
               </a:rPr>
-              <a:t>120/600 RPM Tenant Quotas</a:t>
-            </a:r>
-            <a:endParaRPr lang="en-US" sz="1380" dirty="0"/>
+              <a:t>Without Starving Peer SaaS Callers</a:t>
+            </a:r>
+            <a:endParaRPr lang="en-US" sz="1350" dirty="0"/>
           </a:p>
         </p:txBody>
       </p:sp>
@@ -10156,7 +10156,7 @@
               <a:buNone/>
             </a:pPr>
             <a:r>
-              <a:rPr lang="en-US" sz="1700" b="1" dirty="0">
+              <a:rPr lang="en-US" sz="1650" b="1" dirty="0">
                 <a:solidFill>
                   <a:srgbClr val="FFFFFF"/>
                 </a:solidFill>
@@ -10164,9 +10164,9 @@
                 <a:ea typeface="Google Sans" pitchFamily="34" charset="-122"/>
                 <a:cs typeface="Google Sans" pitchFamily="34" charset="-120"/>
               </a:rPr>
-              <a:t>Phase 3: Red-Team Gate</a:t>
-            </a:r>
-            <a:endParaRPr lang="en-US" sz="1700" dirty="0"/>
+              <a:t>Stage 3: RLS &amp; Chargeback</a:t>
+            </a:r>
+            <a:endParaRPr lang="en-US" sz="1650" dirty="0"/>
           </a:p>
         </p:txBody>
       </p:sp>
@@ -10215,7 +10215,7 @@
               <a:buNone/>
             </a:pPr>
             <a:r>
-              <a:rPr lang="en-US" sz="2000" b="1" dirty="0">
+              <a:rPr lang="en-US" sz="1850" b="1" dirty="0">
                 <a:solidFill>
                   <a:srgbClr val="3C4043"/>
                 </a:solidFill>
@@ -10223,16 +10223,16 @@
                 <a:ea typeface="Google Sans" pitchFamily="34" charset="-122"/>
                 <a:cs typeface="Google Sans" pitchFamily="34" charset="-120"/>
               </a:rPr>
-              <a:t>10-Point Breach</a:t>
-            </a:r>
-            <a:endParaRPr lang="en-US" sz="2000" dirty="0"/>
+              <a:t>Transactional AlloyDB RLS</a:t>
+            </a:r>
+            <a:endParaRPr lang="en-US" sz="1850" dirty="0"/>
           </a:p>
           <a:p>
             <a:pPr algn="ctr" indent="0" marL="0">
               <a:buNone/>
             </a:pPr>
             <a:r>
-              <a:rPr lang="en-US" sz="2000" b="1" dirty="0">
+              <a:rPr lang="en-US" sz="1850" b="1" dirty="0">
                 <a:solidFill>
                   <a:srgbClr val="3C4043"/>
                 </a:solidFill>
@@ -10240,9 +10240,9 @@
                 <a:ea typeface="Google Sans" pitchFamily="34" charset="-122"/>
                 <a:cs typeface="Google Sans" pitchFamily="34" charset="-120"/>
               </a:rPr>
-              <a:t>Simulation Suite</a:t>
-            </a:r>
-            <a:endParaRPr lang="en-US" sz="2000" dirty="0"/>
+              <a:t>&amp; Zero-PII OTel FinOps</a:t>
+            </a:r>
+            <a:endParaRPr lang="en-US" sz="1850" dirty="0"/>
           </a:p>
         </p:txBody>
       </p:sp>
@@ -10254,8 +10254,8 @@
         </p:nvSpPr>
         <p:spPr>
           <a:xfrm>
-            <a:off x="8394192" y="3675888"/>
-            <a:ext cx="3072384" cy="384048"/>
+            <a:off x="8357616" y="3675888"/>
+            <a:ext cx="3145536" cy="384048"/>
           </a:xfrm>
           <a:prstGeom prst="rect">
             <a:avLst/>
@@ -10271,17 +10271,17 @@
               <a:buNone/>
             </a:pPr>
             <a:r>
-              <a:rPr lang="en-US" sz="1500" dirty="0">
-                <a:solidFill>
-                  <a:srgbClr val="3C4043"/>
+              <a:rPr lang="en-US" sz="1220" b="1" dirty="0">
+                <a:solidFill>
+                  <a:srgbClr val="54728C"/>
                 </a:solidFill>
                 <a:latin typeface="Roboto" pitchFamily="34" charset="0"/>
                 <a:ea typeface="Roboto" pitchFamily="34" charset="-122"/>
                 <a:cs typeface="Roboto" pitchFamily="34" charset="-120"/>
               </a:rPr>
-              <a:t>(Weeks 5–6)</a:t>
-            </a:r>
-            <a:endParaRPr lang="en-US" sz="1500" dirty="0"/>
+              <a:t>SET LOCAL tenant_id • 84.7% Savings</a:t>
+            </a:r>
+            <a:endParaRPr lang="en-US" sz="1220" dirty="0"/>
           </a:p>
         </p:txBody>
       </p:sp>
@@ -10333,7 +10333,7 @@
               <a:buNone/>
             </a:pPr>
             <a:r>
-              <a:rPr lang="en-US" sz="1380" dirty="0">
+              <a:rPr lang="en-US" sz="1350" dirty="0">
                 <a:solidFill>
                   <a:srgbClr val="3C4043"/>
                 </a:solidFill>
@@ -10341,16 +10341,16 @@
                 <a:ea typeface="Roboto" pitchFamily="34" charset="-122"/>
                 <a:cs typeface="Roboto" pitchFamily="34" charset="-120"/>
               </a:rPr>
-              <a:t>10/10 Cross-Tenant Attacks</a:t>
-            </a:r>
-            <a:endParaRPr lang="en-US" sz="1380" dirty="0"/>
+              <a:t>Enforces 0 Cross-Tenant SQL Rows &amp;</a:t>
+            </a:r>
+            <a:endParaRPr lang="en-US" sz="1350" dirty="0"/>
           </a:p>
           <a:p>
             <a:pPr algn="ctr" indent="0" marL="0">
               <a:buNone/>
             </a:pPr>
             <a:r>
-              <a:rPr lang="en-US" sz="1380" dirty="0">
+              <a:rPr lang="en-US" sz="1350" dirty="0">
                 <a:solidFill>
                   <a:srgbClr val="3C4043"/>
                 </a:solidFill>
@@ -10358,9 +10358,9 @@
                 <a:ea typeface="Roboto" pitchFamily="34" charset="-122"/>
                 <a:cs typeface="Roboto" pitchFamily="34" charset="-120"/>
               </a:rPr>
-              <a:t>Blocked (0 Rows Leaked)</a:t>
-            </a:r>
-            <a:endParaRPr lang="en-US" sz="1380" dirty="0"/>
+              <a:t>Streams Per-Tenant Spans to BigQuery</a:t>
+            </a:r>
+            <a:endParaRPr lang="en-US" sz="1350" dirty="0"/>
           </a:p>
         </p:txBody>
       </p:sp>
@@ -10577,7 +10577,7 @@
                 <a:ea typeface="Roboto" pitchFamily="34" charset="-122"/>
                 <a:cs typeface="Roboto" pitchFamily="34" charset="-120"/>
               </a:rPr>
-              <a:t>Workstream 2 Pattern A Timeline  •  Terraform 2.6 Starter → 90% Prefix Cache &amp; Valkey → 10/10 Red-Team Certification  •  </a:t>
+              <a:t>Workstream 2 Pattern A Pipeline  •  Stage 1 32k Prefix Cache Warmup → Stage 2 Valkey RPM Bulkheads → Stage 3 AlloyDB RLS &amp; BigQuery OTel  •  </a:t>
             </a:r>
             <a:pPr algn="l" indent="0" marL="0">
               <a:buNone/>

--- a/slides/ws2-pattern-a-pooled-editable-slides.pptx
+++ b/slides/ws2-pattern-a-pooled-editable-slides.pptx
@@ -1139,11 +1139,11 @@
           <a:p>
             <a:r>
               <a:rPr lang="en-US" dirty="0"/>
-              <a:t>Use cases — FinVault Bank &amp; RetailStream Corp Co-Hosted Safely
-• Dynamic Per-Turn Runtime Hydration: A single pooled Diagnostic Agent dynamically loads each caller’s Firestore profile, GCS Skills (`gs://cymbal-skills-{tenant}/`), and token caps on every turn.
-• FinVault Bank (Enterprise Slice in Pool): Authenticates via Google Workspace OIDC, unlocks an 8,000-token thinking budget and 600 RPM quota, and accesses private Agent Alpha plus Workspace/Jira 3LO.
-• RetailStream Corp (Standard Slice in Pool): Authenticates via Microsoft Entra ID OIDC, runs within a 4,000-token thinking cap and 120 RPM quota, and invokes SharePoint/ServiceNow 3LO with employee consent.
-• Strict Catalog &amp; Namespace Firewall: RetailStream’s catalog discovery call excludes FinVault’s Agent Alpha (HTTP 403), and cross-tenant L4 Episodic Memory Bank reads throw an immediate PermissionError.</a:t>
+              <a:t>Use cases — Co-Hosting FinVault &amp; RetailStream Safely on One Pooled Google Cloud Stack
+• Dynamic Per-Turn Runtime Hydration: A single pooled Diagnostic Agent on Cloud Run v2 &amp; Vertex AI Agent Engine dynamically loads each caller’s Firestore profile, GCS Skills (`gs://cymbal-skills-{tenant}/`), and 32k Gemini 2.5 Pro ContextCacheConfig prefix.
+• FinVault Bank (Enterprise Slice in Pool): Authenticates via Google Workspace OIDC, unlocks an 8,000-token thinking budget and 600 RPM Valkey quota, and accesses private Agent Alpha (Gemini 2.5 Pro Dedicated PT) plus Workspace/Jira 3LO.
+• RetailStream Corp (Standard Slice in Pool): Authenticates via Microsoft Entra ID OIDC, runs within a 4,000-token thinking cap and 120 RPM Valkey quota ($42/mo floor), and invokes SharePoint/ServiceNow 3LO with `-32042` step-up consent.
+• Cryptographic Catalog, Memory &amp; AlloyDB RLS Firewall: Cloud Armor, IAP OBO/DPoP, Hop 2 ARD Filter (HTTP 403), Hop 3 L1–L5 Memory Bank namespaces, Hop 4 Model Armor/DLP, and Hop 5 AlloyDB FORCE RLS guarantee 100% mutual invisibility.</a:t>
             </a:r>
             <a:endParaRPr lang="en-US" dirty="0"/>
           </a:p>
@@ -1231,11 +1231,8 @@
           <a:p>
             <a:r>
               <a:rPr lang="en-US" dirty="0"/>
-              <a:t>Products used — Shared Cloud Run v2, Vertex AI, Valkey &amp; AlloyDB RLS
-• Agentic AI &amp; Shared Prefix Caching: Vertex AI Agent Engine (ADK 2.0 runtime, Agent Registry &amp; L1–L5 Memory Bank) and Gemini 2.5 Pro with ContextCacheConfig caching a 32,000-token immutable system prefix at a 90% discount (84.7% net token savings).
-• Ingress, Identity &amp; Bidirectional AI Safety: Global External Application Load Balancer, Google Cloud Armor L7 WAF (stripping spoofed X-Tenant-Id headers), IAP + IAM STS (RFC 8693 OBO + RFC 9449 DPoP), Vertex AI Model Armor, and Cloud Sensitive Data Protection.
-• Rate Bulkheads, Relational RLS &amp; FinOps Telemetry: Memorystore for Valkey (120 vs. 600 RPM token buckets), Firestore tenant profile registry, AlloyDB for PostgreSQL (`FORCE ROW LEVEL SECURITY`), Cloud KMS CMEK, and BigQuery zero-PII OTel chargeback.
-• High-Density Unit Economics ($42/Tenant/Month): Co-hosts hundreds of commercial B2B SaaS tenants inside one shared Google Cloud project (`ramp-portal-dev`) while guaranteeing 10/10 red-team breach isolation.</a:t>
+              <a:t>Design alternatives — Pattern A Pooled Architecture vs. Naive Multi-Tenancy vs. Dedicated Silos
+</a:t>
             </a:r>
             <a:endParaRPr lang="en-US" dirty="0"/>
           </a:p>
@@ -17226,7 +17223,7 @@
                 <a:ea typeface="Google Sans" pitchFamily="34" charset="-122"/>
                 <a:cs typeface="Google Sans" pitchFamily="34" charset="-120"/>
               </a:rPr>
-              <a:t>FinVault Bank &amp; RetailStream Corp Co-Hosted Safely</a:t>
+              <a:t>Co-Hosting FinVault &amp; RetailStream Safely on One Pooled Google Cloud Stack</a:t>
             </a:r>
             <a:endParaRPr lang="en-US" sz="1900" dirty="0"/>
           </a:p>
@@ -17471,7 +17468,7 @@
                 <a:ea typeface="Roboto" pitchFamily="34" charset="-122"/>
                 <a:cs typeface="Roboto" pitchFamily="34" charset="-120"/>
               </a:rPr>
-              <a:t>A single pooled Diagnostic Agent dynamically loads each caller’s Firestore profile, GCS Skills (gs://cymbal-skills-{tenant}/), and token caps on every turn.</a:t>
+              <a:t>A single pooled Diagnostic Agent on Cloud Run v2 &amp; Vertex AI Agent Engine dynamically loads each caller’s Firestore profile, GCS Skills (gs://cymbal-skills-{tenant}/), and 32k Gemini 2.5 Pro ContextCacheConfig prefix.</a:t>
             </a:r>
             <a:endParaRPr lang="en-US" sz="980" dirty="0"/>
           </a:p>
@@ -17557,7 +17554,7 @@
                 <a:ea typeface="Google Sans" pitchFamily="34" charset="-122"/>
                 <a:cs typeface="Google Sans" pitchFamily="34" charset="-120"/>
               </a:rPr>
-              <a:t>Cloud Stack: core-cymbal-agent/runtime_pipeline.py • Hop3RuntimeAndMemory.load_dynamic_runtime_config
+              <a:t>Cloud Stack: Cloud Run v2 • Vertex AI Agent Engine • Gemini 2.5 Pro ContextCacheConfig (32k Prefix)
 </a:t>
             </a:r>
             <a:pPr indent="0" marL="0">
@@ -17572,7 +17569,7 @@
                 <a:ea typeface="Roboto" pitchFamily="34" charset="-122"/>
                 <a:cs typeface="Roboto" pitchFamily="34" charset="-120"/>
               </a:rPr>
-              <a:t>Target &amp; SLA: Injects Tenant-Specific System Prompt &amp; Verified GCS Skills URIs per Turn</a:t>
+              <a:t>Target &amp; SLA: Injects Tenant-Specific Prompt &amp; GCS Skills per Turn • 84.7% Net Input Token Cost Reduction</a:t>
             </a:r>
             <a:endParaRPr lang="en-US" sz="750" dirty="0"/>
           </a:p>
@@ -17633,7 +17630,7 @@
                 <a:ea typeface="Google Sans" pitchFamily="34" charset="-122"/>
                 <a:cs typeface="Google Sans" pitchFamily="34" charset="-120"/>
               </a:rPr>
-              <a:t>Dynamic Context Hydration</a:t>
+              <a:t>1. Shared Pooled Control Plane</a:t>
             </a:r>
             <a:endParaRPr lang="en-US" sz="750" dirty="0"/>
           </a:p>
@@ -17839,7 +17836,7 @@
                 <a:ea typeface="Roboto" pitchFamily="34" charset="-122"/>
                 <a:cs typeface="Roboto" pitchFamily="34" charset="-120"/>
               </a:rPr>
-              <a:t>Authenticates via Google Workspace OIDC, unlocks an 8,000-token thinking budget and 600 RPM quota, and accesses private Agent Alpha plus Workspace/Jira 3LO.</a:t>
+              <a:t>Authenticates via Google Workspace OIDC, unlocks an 8,000-token thinking budget and 600 RPM Valkey quota, and accesses private Agent Alpha (Gemini 2.5 Pro Dedicated PT) plus Workspace/Jira 3LO.</a:t>
             </a:r>
             <a:endParaRPr lang="en-US" sz="980" dirty="0"/>
           </a:p>
@@ -17925,7 +17922,7 @@
                 <a:ea typeface="Google Sans" pitchFamily="34" charset="-122"/>
                 <a:cs typeface="Google Sans" pitchFamily="34" charset="-120"/>
               </a:rPr>
-              <a:t>Cloud Stack: Google Workspace OIDC • Agent Alpha (Gemini 2.5 Pro / Gemini 2.5) • 3LO Drive/Gmail/Jira
+              <a:t>Cloud Stack: Google Workspace OIDC • Agent Alpha (Gemini 2.5 Pro Dedicated PT) • 3LO Drive/Gmail/Jira
 </a:t>
             </a:r>
             <a:pPr indent="0" marL="0">
@@ -17940,7 +17937,7 @@
                 <a:ea typeface="Roboto" pitchFamily="34" charset="-122"/>
                 <a:cs typeface="Roboto" pitchFamily="34" charset="-120"/>
               </a:rPr>
-              <a:t>Target &amp; SLA: 8,000 Thinking Tokens • 600 RPM Valkey Bucket • OCC NLC + IBAN/SWIFT Masking</a:t>
+              <a:t>Target &amp; SLA: 8,000 Thinking Tokens • 600 RPM Valkey Bucket • OCC NLC (HTTP 422) + IBAN/SWIFT Masking</a:t>
             </a:r>
             <a:endParaRPr lang="en-US" sz="750" dirty="0"/>
           </a:p>
@@ -18001,7 +17998,7 @@
                 <a:ea typeface="Google Sans" pitchFamily="34" charset="-122"/>
                 <a:cs typeface="Google Sans" pitchFamily="34" charset="-120"/>
               </a:rPr>
-              <a:t>FinVault Pooled Slice</a:t>
+              <a:t>2. FinVault Pooled Enterprise Slice</a:t>
             </a:r>
             <a:endParaRPr lang="en-US" sz="750" dirty="0"/>
           </a:p>
@@ -18207,7 +18204,7 @@
                 <a:ea typeface="Roboto" pitchFamily="34" charset="-122"/>
                 <a:cs typeface="Roboto" pitchFamily="34" charset="-120"/>
               </a:rPr>
-              <a:t>Authenticates via Microsoft Entra ID OIDC, runs within a 4,000-token thinking cap and 120 RPM quota, and invokes SharePoint/ServiceNow 3LO with employee consent.</a:t>
+              <a:t>Authenticates via Microsoft Entra ID OIDC, runs within a 4,000-token thinking cap and 120 RPM Valkey quota ($42/mo floor), and invokes SharePoint/ServiceNow 3LO with -32042 step-up consent.</a:t>
             </a:r>
             <a:endParaRPr lang="en-US" sz="980" dirty="0"/>
           </a:p>
@@ -18293,7 +18290,7 @@
                 <a:ea typeface="Google Sans" pitchFamily="34" charset="-122"/>
                 <a:cs typeface="Google Sans" pitchFamily="34" charset="-120"/>
               </a:rPr>
-              <a:t>Cloud Stack: Microsoft Entra ID OIDC • Shared Diagnostic Agent • 3LO SharePoint/ServiceNow
+              <a:t>Cloud Stack: Microsoft Entra ID OIDC • Shared Diagnostic Agent • 3LO SharePoint &amp; ServiceNow ITOM
 </a:t>
             </a:r>
             <a:pPr indent="0" marL="0">
@@ -18308,7 +18305,7 @@
                 <a:ea typeface="Roboto" pitchFamily="34" charset="-122"/>
                 <a:cs typeface="Roboto" pitchFamily="34" charset="-120"/>
               </a:rPr>
-              <a:t>Target &amp; SLA: 4,000 Thinking Tokens • 120 RPM Valkey Bucket • PCI-DSS PAN/SSN Masking</a:t>
+              <a:t>Target &amp; SLA: 4,000 Thinking Tokens • 120 RPM Valkey Bucket • PCI-DSS PAN/SSN Masking • $42/mo Floor</a:t>
             </a:r>
             <a:endParaRPr lang="en-US" sz="750" dirty="0"/>
           </a:p>
@@ -18369,7 +18366,7 @@
                 <a:ea typeface="Google Sans" pitchFamily="34" charset="-122"/>
                 <a:cs typeface="Google Sans" pitchFamily="34" charset="-120"/>
               </a:rPr>
-              <a:t>RetailStream Pooled Slice</a:t>
+              <a:t>3. RetailStream Pooled Standard Slice</a:t>
             </a:r>
             <a:endParaRPr lang="en-US" sz="750" dirty="0"/>
           </a:p>
@@ -18516,7 +18513,7 @@
                 <a:ea typeface="Google Sans" pitchFamily="34" charset="-122"/>
                 <a:cs typeface="Google Sans" pitchFamily="34" charset="-120"/>
               </a:rPr>
-              <a:t>Strict Catalog &amp; Namespace Firewall</a:t>
+              <a:t>Cryptographic Catalog, Memory &amp; AlloyDB RLS Firewall</a:t>
             </a:r>
             <a:endParaRPr lang="en-US" sz="1140" dirty="0"/>
           </a:p>
@@ -18575,7 +18572,7 @@
                 <a:ea typeface="Roboto" pitchFamily="34" charset="-122"/>
                 <a:cs typeface="Roboto" pitchFamily="34" charset="-120"/>
               </a:rPr>
-              <a:t>RetailStream’s catalog discovery call excludes FinVault’s Agent Alpha (HTTP 403), and cross-tenant L4 Episodic Memory Bank reads throw an immediate PermissionError.</a:t>
+              <a:t>Cloud Armor, IAP OBO/DPoP, Hop 2 ARD Filter (HTTP 403), Hop 3 L1–L5 Memory Bank namespaces, Hop 4 Model Armor/DLP, and Hop 5 AlloyDB FORCE RLS guarantee 100% mutual invisibility.</a:t>
             </a:r>
             <a:endParaRPr lang="en-US" sz="980" dirty="0"/>
           </a:p>
@@ -18661,7 +18658,7 @@
                 <a:ea typeface="Google Sans" pitchFamily="34" charset="-122"/>
                 <a:cs typeface="Google Sans" pitchFamily="34" charset="-120"/>
               </a:rPr>
-              <a:t>Cloud Stack: Hop 2 ARD Filter + Hop 3 MemoryBankLevel.L1..L5 + Hop 5 PostgreSQL RLS
+              <a:t>Cloud Stack: Cloud Armor • IAP STS • Hop 2 ARD • L1–L5 Memory Bank • Model Armor • AlloyDB FORCE RLS
 </a:t>
             </a:r>
             <a:pPr indent="0" marL="0">
@@ -18676,7 +18673,7 @@
                 <a:ea typeface="Roboto" pitchFamily="34" charset="-122"/>
                 <a:cs typeface="Roboto" pitchFamily="34" charset="-120"/>
               </a:rPr>
-              <a:t>Target &amp; SLA: 100% Mutual Invisibility Between Co-Hosted Competing Tenants</a:t>
+              <a:t>Target &amp; SLA: 10/10 Adversarial Red-Team Breach Simulations Blocked • 0 Cross-Tenant SQL Rows</a:t>
             </a:r>
             <a:endParaRPr lang="en-US" sz="750" dirty="0"/>
           </a:p>
@@ -18737,7 +18734,7 @@
                 <a:ea typeface="Google Sans" pitchFamily="34" charset="-122"/>
                 <a:cs typeface="Google Sans" pitchFamily="34" charset="-120"/>
               </a:rPr>
-              <a:t>Cryptographic Partitioning</a:t>
+              <a:t>4. Unified Pattern A Security Stack</a:t>
             </a:r>
             <a:endParaRPr lang="en-US" sz="750" dirty="0"/>
           </a:p>
@@ -19306,7 +19303,7 @@
                 <a:ea typeface="Google Sans" pitchFamily="34" charset="-122"/>
                 <a:cs typeface="Google Sans" pitchFamily="34" charset="-120"/>
               </a:rPr>
-              <a:t>ACT I • GOOGLE CLOUD REFERENCE PRODUCT STACK &amp; BILL OF MATERIALS</a:t>
+              <a:t>ACT I • ARCHITECTURAL OPTIONS &amp; PATTERN A / B / C DECISION MATRIX</a:t>
             </a:r>
             <a:endParaRPr lang="en-US" sz="1020" dirty="0"/>
           </a:p>
@@ -19372,7 +19369,7 @@
                 <a:ea typeface="Roboto" pitchFamily="34" charset="-122"/>
                 <a:cs typeface="Roboto" pitchFamily="34" charset="-120"/>
               </a:rPr>
-              <a:t>THREE-PILLAR • ARCHITECTURE</a:t>
+              <a:t>COMPARISON-GRID • MATRIX</a:t>
             </a:r>
             <a:endParaRPr lang="en-US" sz="750" dirty="0"/>
           </a:p>
@@ -19386,8 +19383,8 @@
         </p:nvSpPr>
         <p:spPr>
           <a:xfrm>
-            <a:off x="411480" y="658368"/>
-            <a:ext cx="11368735" cy="365760"/>
+            <a:off x="411480" y="640080"/>
+            <a:ext cx="11368735" cy="347472"/>
           </a:xfrm>
           <a:prstGeom prst="rect">
             <a:avLst/>
@@ -19403,7 +19400,7 @@
               <a:buNone/>
             </a:pPr>
             <a:r>
-              <a:rPr lang="en-US" sz="1900" b="1" dirty="0">
+              <a:rPr lang="en-US" sz="1800" b="1" dirty="0">
                 <a:solidFill>
                   <a:srgbClr val="3C4043"/>
                 </a:solidFill>
@@ -19411,9 +19408,9 @@
                 <a:ea typeface="Google Sans" pitchFamily="34" charset="-122"/>
                 <a:cs typeface="Google Sans" pitchFamily="34" charset="-120"/>
               </a:rPr>
-              <a:t>Shared Cloud Run v2, Vertex AI, Valkey &amp; AlloyDB RLS</a:t>
-            </a:r>
-            <a:endParaRPr lang="en-US" sz="1900" dirty="0"/>
+              <a:t>Pattern A Pooled Architecture vs. Naive Multi-Tenancy vs. Dedicated Silos</a:t>
+            </a:r>
+            <a:endParaRPr lang="en-US" sz="1800" dirty="0"/>
           </a:p>
         </p:txBody>
       </p:sp>
@@ -19425,8 +19422,8 @@
         </p:nvSpPr>
         <p:spPr>
           <a:xfrm>
-            <a:off x="411480" y="1024128"/>
-            <a:ext cx="11368735" cy="237744"/>
+            <a:off x="411480" y="987552"/>
+            <a:ext cx="11368735" cy="219456"/>
           </a:xfrm>
           <a:prstGeom prst="rect">
             <a:avLst/>
@@ -19442,7 +19439,7 @@
               <a:buNone/>
             </a:pPr>
             <a:r>
-              <a:rPr lang="en-US" sz="1000" dirty="0">
+              <a:rPr lang="en-US" sz="980" dirty="0">
                 <a:solidFill>
                   <a:srgbClr val="5F6368"/>
                 </a:solidFill>
@@ -19450,26 +19447,1976 @@
                 <a:ea typeface="Roboto" pitchFamily="34" charset="-122"/>
                 <a:cs typeface="Roboto" pitchFamily="34" charset="-120"/>
               </a:rPr>
-              <a:t>Structured Google Cloud reference SKUs, runtime isolation boundaries, and production SLAs.</a:t>
-            </a:r>
-            <a:endParaRPr lang="en-US" sz="1000" dirty="0"/>
-          </a:p>
-        </p:txBody>
-      </p:sp>
-      <p:sp>
-        <p:nvSpPr>
-          <p:cNvPr id="19" name="Shape 17"/>
-          <p:cNvSpPr/>
-          <p:nvPr/>
-        </p:nvSpPr>
-        <p:spPr>
-          <a:xfrm>
-            <a:off x="411480" y="1353312"/>
-            <a:ext cx="5583326" cy="2258568"/>
+              <a:t>Side-by-side Google Cloud Well-Architected trade-off analysis, isolation boundaries, and unit economics.</a:t>
+            </a:r>
+            <a:endParaRPr lang="en-US" sz="980" dirty="0"/>
+          </a:p>
+        </p:txBody>
+      </p:sp>
+      <p:graphicFrame>
+        <p:nvGraphicFramePr>
+          <p:cNvPr id="5" name="Table 0"/>
+          <p:cNvGraphicFramePr>
+            <a:graphicFrameLocks noGrp="1"/>
+          </p:cNvGraphicFramePr>
+          <p:nvPr>
+            <p:extLst>
+              <p:ext uri="{D42A27DB-BD31-4B8C-83A1-F6EECF244321}">
+                <p14:modId xmlns:p14="http://schemas.microsoft.com/office/powerpoint/2010/main" val="1579011935"/>
+              </p:ext>
+            </p:extLst>
+          </p:nvPr>
+        </p:nvGraphicFramePr>
+        <p:xfrm>
+          <a:off x="411480" y="1243584"/>
+          <a:ext cx="11368735" cy="914400"/>
+        </p:xfrm>
+        <a:graphic>
+          <a:graphicData uri="http://schemas.openxmlformats.org/drawingml/2006/table">
+            <a:tbl>
+              <a:tblPr/>
+              <a:tblGrid>
+                <a:gridCol w="2057400"/>
+                <a:gridCol w="3017520"/>
+                <a:gridCol w="3200400"/>
+                <a:gridCol w="3184855"/>
+              </a:tblGrid>
+              <a:tr h="0">
+                <a:tc>
+                  <a:txBody>
+                    <a:bodyPr/>
+                    <a:lstStyle/>
+                    <a:p>
+                      <a:pPr indent="0" marL="0">
+                        <a:buNone/>
+                      </a:pPr>
+                      <a:r>
+                        <a:rPr lang="en-US" sz="850" b="1" dirty="0">
+                          <a:solidFill>
+                            <a:srgbClr val="FFFFFF"/>
+                          </a:solidFill>
+                          <a:latin typeface="Google Sans" pitchFamily="34" charset="0"/>
+                          <a:ea typeface="Google Sans" pitchFamily="34" charset="-122"/>
+                          <a:cs typeface="Google Sans" pitchFamily="34" charset="-120"/>
+                        </a:rPr>
+                        <a:t>Architectural Dimension</a:t>
+                      </a:r>
+                      <a:endParaRPr lang="en-US" sz="850" dirty="0">
+                        <a:latin typeface="Google Sans" charset="0"/>
+                        <a:ea typeface="Google Sans" charset="0"/>
+                        <a:cs typeface="Google Sans" charset="0"/>
+                      </a:endParaRPr>
+                    </a:p>
+                  </a:txBody>
+                  <a:tcPr marL="91440" marR="91440" marT="45720" marB="45720" anchor="ctr">
+                    <a:lnL w="9525" cap="flat" cmpd="sng" algn="ctr">
+                      <a:solidFill>
+                        <a:srgbClr val="DADCE0"/>
+                      </a:solidFill>
+                      <a:prstDash val="solid"/>
+                      <a:round/>
+                      <a:headEnd type="none" w="med" len="med"/>
+                      <a:tailEnd type="none" w="med" len="med"/>
+                    </a:lnL>
+                    <a:lnR w="9525" cap="flat" cmpd="sng" algn="ctr">
+                      <a:solidFill>
+                        <a:srgbClr val="DADCE0"/>
+                      </a:solidFill>
+                      <a:prstDash val="solid"/>
+                      <a:round/>
+                      <a:headEnd type="none" w="med" len="med"/>
+                      <a:tailEnd type="none" w="med" len="med"/>
+                    </a:lnR>
+                    <a:lnT w="9525" cap="flat" cmpd="sng" algn="ctr">
+                      <a:solidFill>
+                        <a:srgbClr val="DADCE0"/>
+                      </a:solidFill>
+                      <a:prstDash val="solid"/>
+                      <a:round/>
+                      <a:headEnd type="none" w="med" len="med"/>
+                      <a:tailEnd type="none" w="med" len="med"/>
+                    </a:lnT>
+                    <a:lnB w="9525" cap="flat" cmpd="sng" algn="ctr">
+                      <a:solidFill>
+                        <a:srgbClr val="DADCE0"/>
+                      </a:solidFill>
+                      <a:prstDash val="solid"/>
+                      <a:round/>
+                      <a:headEnd type="none" w="med" len="med"/>
+                      <a:tailEnd type="none" w="med" len="med"/>
+                    </a:lnB>
+                    <a:solidFill>
+                      <a:srgbClr val="4285F4"/>
+                    </a:solidFill>
+                  </a:tcPr>
+                </a:tc>
+                <a:tc>
+                  <a:txBody>
+                    <a:bodyPr/>
+                    <a:lstStyle/>
+                    <a:p>
+                      <a:pPr indent="0" marL="0">
+                        <a:buNone/>
+                      </a:pPr>
+                      <a:r>
+                        <a:rPr lang="en-US" sz="850" b="1" dirty="0">
+                          <a:solidFill>
+                            <a:srgbClr val="FFFFFF"/>
+                          </a:solidFill>
+                          <a:latin typeface="Google Sans" pitchFamily="34" charset="0"/>
+                          <a:ea typeface="Google Sans" pitchFamily="34" charset="-122"/>
+                          <a:cs typeface="Google Sans" pitchFamily="34" charset="-120"/>
+                        </a:rPr>
+                        <a:t>Naive Shared Multi-Tenancy (Anti-Pattern)</a:t>
+                      </a:r>
+                      <a:endParaRPr lang="en-US" sz="850" dirty="0">
+                        <a:latin typeface="Google Sans" charset="0"/>
+                        <a:ea typeface="Google Sans" charset="0"/>
+                        <a:cs typeface="Google Sans" charset="0"/>
+                      </a:endParaRPr>
+                    </a:p>
+                  </a:txBody>
+                  <a:tcPr marL="91440" marR="91440" marT="45720" marB="45720" anchor="ctr">
+                    <a:lnL w="9525" cap="flat" cmpd="sng" algn="ctr">
+                      <a:solidFill>
+                        <a:srgbClr val="DADCE0"/>
+                      </a:solidFill>
+                      <a:prstDash val="solid"/>
+                      <a:round/>
+                      <a:headEnd type="none" w="med" len="med"/>
+                      <a:tailEnd type="none" w="med" len="med"/>
+                    </a:lnL>
+                    <a:lnR w="9525" cap="flat" cmpd="sng" algn="ctr">
+                      <a:solidFill>
+                        <a:srgbClr val="DADCE0"/>
+                      </a:solidFill>
+                      <a:prstDash val="solid"/>
+                      <a:round/>
+                      <a:headEnd type="none" w="med" len="med"/>
+                      <a:tailEnd type="none" w="med" len="med"/>
+                    </a:lnR>
+                    <a:lnT w="9525" cap="flat" cmpd="sng" algn="ctr">
+                      <a:solidFill>
+                        <a:srgbClr val="DADCE0"/>
+                      </a:solidFill>
+                      <a:prstDash val="solid"/>
+                      <a:round/>
+                      <a:headEnd type="none" w="med" len="med"/>
+                      <a:tailEnd type="none" w="med" len="med"/>
+                    </a:lnT>
+                    <a:lnB w="9525" cap="flat" cmpd="sng" algn="ctr">
+                      <a:solidFill>
+                        <a:srgbClr val="DADCE0"/>
+                      </a:solidFill>
+                      <a:prstDash val="solid"/>
+                      <a:round/>
+                      <a:headEnd type="none" w="med" len="med"/>
+                      <a:tailEnd type="none" w="med" len="med"/>
+                    </a:lnB>
+                    <a:solidFill>
+                      <a:srgbClr val="4285F4"/>
+                    </a:solidFill>
+                  </a:tcPr>
+                </a:tc>
+                <a:tc>
+                  <a:txBody>
+                    <a:bodyPr/>
+                    <a:lstStyle/>
+                    <a:p>
+                      <a:pPr indent="0" marL="0">
+                        <a:buNone/>
+                      </a:pPr>
+                      <a:r>
+                        <a:rPr lang="en-US" sz="850" b="1" dirty="0">
+                          <a:solidFill>
+                            <a:srgbClr val="FFFFFF"/>
+                          </a:solidFill>
+                          <a:latin typeface="Google Sans" pitchFamily="34" charset="0"/>
+                          <a:ea typeface="Google Sans" pitchFamily="34" charset="-122"/>
+                          <a:cs typeface="Google Sans" pitchFamily="34" charset="-120"/>
+                        </a:rPr>
+                        <a:t>Pattern A: Cryptographic Pooled (WS2 Target)</a:t>
+                      </a:r>
+                      <a:endParaRPr lang="en-US" sz="850" dirty="0">
+                        <a:latin typeface="Google Sans" charset="0"/>
+                        <a:ea typeface="Google Sans" charset="0"/>
+                        <a:cs typeface="Google Sans" charset="0"/>
+                      </a:endParaRPr>
+                    </a:p>
+                  </a:txBody>
+                  <a:tcPr marL="91440" marR="91440" marT="45720" marB="45720" anchor="ctr">
+                    <a:lnL w="9525" cap="flat" cmpd="sng" algn="ctr">
+                      <a:solidFill>
+                        <a:srgbClr val="DADCE0"/>
+                      </a:solidFill>
+                      <a:prstDash val="solid"/>
+                      <a:round/>
+                      <a:headEnd type="none" w="med" len="med"/>
+                      <a:tailEnd type="none" w="med" len="med"/>
+                    </a:lnL>
+                    <a:lnR w="9525" cap="flat" cmpd="sng" algn="ctr">
+                      <a:solidFill>
+                        <a:srgbClr val="DADCE0"/>
+                      </a:solidFill>
+                      <a:prstDash val="solid"/>
+                      <a:round/>
+                      <a:headEnd type="none" w="med" len="med"/>
+                      <a:tailEnd type="none" w="med" len="med"/>
+                    </a:lnR>
+                    <a:lnT w="9525" cap="flat" cmpd="sng" algn="ctr">
+                      <a:solidFill>
+                        <a:srgbClr val="DADCE0"/>
+                      </a:solidFill>
+                      <a:prstDash val="solid"/>
+                      <a:round/>
+                      <a:headEnd type="none" w="med" len="med"/>
+                      <a:tailEnd type="none" w="med" len="med"/>
+                    </a:lnT>
+                    <a:lnB w="9525" cap="flat" cmpd="sng" algn="ctr">
+                      <a:solidFill>
+                        <a:srgbClr val="DADCE0"/>
+                      </a:solidFill>
+                      <a:prstDash val="solid"/>
+                      <a:round/>
+                      <a:headEnd type="none" w="med" len="med"/>
+                      <a:tailEnd type="none" w="med" len="med"/>
+                    </a:lnB>
+                    <a:solidFill>
+                      <a:srgbClr val="4285F4"/>
+                    </a:solidFill>
+                  </a:tcPr>
+                </a:tc>
+                <a:tc>
+                  <a:txBody>
+                    <a:bodyPr/>
+                    <a:lstStyle/>
+                    <a:p>
+                      <a:pPr indent="0" marL="0">
+                        <a:buNone/>
+                      </a:pPr>
+                      <a:r>
+                        <a:rPr lang="en-US" sz="850" b="1" dirty="0">
+                          <a:solidFill>
+                            <a:srgbClr val="FFFFFF"/>
+                          </a:solidFill>
+                          <a:latin typeface="Google Sans" pitchFamily="34" charset="0"/>
+                          <a:ea typeface="Google Sans" pitchFamily="34" charset="-122"/>
+                          <a:cs typeface="Google Sans" pitchFamily="34" charset="-120"/>
+                        </a:rPr>
+                        <a:t>Pattern B: Dedicated Sovereign Silos (WS3)</a:t>
+                      </a:r>
+                      <a:endParaRPr lang="en-US" sz="850" dirty="0">
+                        <a:latin typeface="Google Sans" charset="0"/>
+                        <a:ea typeface="Google Sans" charset="0"/>
+                        <a:cs typeface="Google Sans" charset="0"/>
+                      </a:endParaRPr>
+                    </a:p>
+                  </a:txBody>
+                  <a:tcPr marL="91440" marR="91440" marT="45720" marB="45720" anchor="ctr">
+                    <a:lnL w="9525" cap="flat" cmpd="sng" algn="ctr">
+                      <a:solidFill>
+                        <a:srgbClr val="DADCE0"/>
+                      </a:solidFill>
+                      <a:prstDash val="solid"/>
+                      <a:round/>
+                      <a:headEnd type="none" w="med" len="med"/>
+                      <a:tailEnd type="none" w="med" len="med"/>
+                    </a:lnL>
+                    <a:lnR w="9525" cap="flat" cmpd="sng" algn="ctr">
+                      <a:solidFill>
+                        <a:srgbClr val="DADCE0"/>
+                      </a:solidFill>
+                      <a:prstDash val="solid"/>
+                      <a:round/>
+                      <a:headEnd type="none" w="med" len="med"/>
+                      <a:tailEnd type="none" w="med" len="med"/>
+                    </a:lnR>
+                    <a:lnT w="9525" cap="flat" cmpd="sng" algn="ctr">
+                      <a:solidFill>
+                        <a:srgbClr val="DADCE0"/>
+                      </a:solidFill>
+                      <a:prstDash val="solid"/>
+                      <a:round/>
+                      <a:headEnd type="none" w="med" len="med"/>
+                      <a:tailEnd type="none" w="med" len="med"/>
+                    </a:lnT>
+                    <a:lnB w="9525" cap="flat" cmpd="sng" algn="ctr">
+                      <a:solidFill>
+                        <a:srgbClr val="DADCE0"/>
+                      </a:solidFill>
+                      <a:prstDash val="solid"/>
+                      <a:round/>
+                      <a:headEnd type="none" w="med" len="med"/>
+                      <a:tailEnd type="none" w="med" len="med"/>
+                    </a:lnB>
+                    <a:solidFill>
+                      <a:srgbClr val="4285F4"/>
+                    </a:solidFill>
+                  </a:tcPr>
+                </a:tc>
+              </a:tr>
+              <a:tr h="0">
+                <a:tc>
+                  <a:txBody>
+                    <a:bodyPr/>
+                    <a:lstStyle/>
+                    <a:p>
+                      <a:pPr indent="0" marL="0">
+                        <a:buNone/>
+                      </a:pPr>
+                      <a:r>
+                        <a:rPr lang="en-US" sz="780" b="1" dirty="0">
+                          <a:solidFill>
+                            <a:srgbClr val="3C4043"/>
+                          </a:solidFill>
+                          <a:latin typeface="Google Sans" pitchFamily="34" charset="0"/>
+                          <a:ea typeface="Google Sans" pitchFamily="34" charset="-122"/>
+                          <a:cs typeface="Google Sans" pitchFamily="34" charset="-120"/>
+                        </a:rPr>
+                        <a:t>Ingress &amp; identity binding</a:t>
+                      </a:r>
+                      <a:endParaRPr lang="en-US" sz="780" dirty="0">
+                        <a:latin typeface="Google Sans" charset="0"/>
+                        <a:ea typeface="Google Sans" charset="0"/>
+                        <a:cs typeface="Google Sans" charset="0"/>
+                      </a:endParaRPr>
+                    </a:p>
+                  </a:txBody>
+                  <a:tcPr marL="91440" marR="91440" marT="45720" marB="45720" anchor="ctr">
+                    <a:lnL w="9525" cap="flat" cmpd="sng" algn="ctr">
+                      <a:solidFill>
+                        <a:srgbClr val="DADCE0"/>
+                      </a:solidFill>
+                      <a:prstDash val="solid"/>
+                      <a:round/>
+                      <a:headEnd type="none" w="med" len="med"/>
+                      <a:tailEnd type="none" w="med" len="med"/>
+                    </a:lnL>
+                    <a:lnR w="9525" cap="flat" cmpd="sng" algn="ctr">
+                      <a:solidFill>
+                        <a:srgbClr val="DADCE0"/>
+                      </a:solidFill>
+                      <a:prstDash val="solid"/>
+                      <a:round/>
+                      <a:headEnd type="none" w="med" len="med"/>
+                      <a:tailEnd type="none" w="med" len="med"/>
+                    </a:lnR>
+                    <a:lnT w="9525" cap="flat" cmpd="sng" algn="ctr">
+                      <a:solidFill>
+                        <a:srgbClr val="DADCE0"/>
+                      </a:solidFill>
+                      <a:prstDash val="solid"/>
+                      <a:round/>
+                      <a:headEnd type="none" w="med" len="med"/>
+                      <a:tailEnd type="none" w="med" len="med"/>
+                    </a:lnT>
+                    <a:lnB w="9525" cap="flat" cmpd="sng" algn="ctr">
+                      <a:solidFill>
+                        <a:srgbClr val="DADCE0"/>
+                      </a:solidFill>
+                      <a:prstDash val="solid"/>
+                      <a:round/>
+                      <a:headEnd type="none" w="med" len="med"/>
+                      <a:tailEnd type="none" w="med" len="med"/>
+                    </a:lnB>
+                    <a:solidFill>
+                      <a:srgbClr val="FFFFFF"/>
+                    </a:solidFill>
+                  </a:tcPr>
+                </a:tc>
+                <a:tc>
+                  <a:txBody>
+                    <a:bodyPr/>
+                    <a:lstStyle/>
+                    <a:p>
+                      <a:pPr indent="0" marL="0">
+                        <a:buNone/>
+                      </a:pPr>
+                      <a:r>
+                        <a:rPr lang="en-US" sz="760" dirty="0">
+                          <a:solidFill>
+                            <a:srgbClr val="5F6368"/>
+                          </a:solidFill>
+                          <a:latin typeface="Roboto" pitchFamily="34" charset="0"/>
+                          <a:ea typeface="Roboto" pitchFamily="34" charset="-122"/>
+                          <a:cs typeface="Roboto" pitchFamily="34" charset="-120"/>
+                        </a:rPr>
+                        <a:t>Trusts client-supplied X-Tenant-Id HTTP header or shared API key in application code</a:t>
+                      </a:r>
+                      <a:endParaRPr lang="en-US" sz="760" dirty="0">
+                        <a:latin typeface="Roboto" charset="0"/>
+                        <a:ea typeface="Roboto" charset="0"/>
+                        <a:cs typeface="Roboto" charset="0"/>
+                      </a:endParaRPr>
+                    </a:p>
+                  </a:txBody>
+                  <a:tcPr marL="91440" marR="91440" marT="45720" marB="45720" anchor="ctr">
+                    <a:lnL w="9525" cap="flat" cmpd="sng" algn="ctr">
+                      <a:solidFill>
+                        <a:srgbClr val="DADCE0"/>
+                      </a:solidFill>
+                      <a:prstDash val="solid"/>
+                      <a:round/>
+                      <a:headEnd type="none" w="med" len="med"/>
+                      <a:tailEnd type="none" w="med" len="med"/>
+                    </a:lnL>
+                    <a:lnR w="9525" cap="flat" cmpd="sng" algn="ctr">
+                      <a:solidFill>
+                        <a:srgbClr val="DADCE0"/>
+                      </a:solidFill>
+                      <a:prstDash val="solid"/>
+                      <a:round/>
+                      <a:headEnd type="none" w="med" len="med"/>
+                      <a:tailEnd type="none" w="med" len="med"/>
+                    </a:lnR>
+                    <a:lnT w="9525" cap="flat" cmpd="sng" algn="ctr">
+                      <a:solidFill>
+                        <a:srgbClr val="DADCE0"/>
+                      </a:solidFill>
+                      <a:prstDash val="solid"/>
+                      <a:round/>
+                      <a:headEnd type="none" w="med" len="med"/>
+                      <a:tailEnd type="none" w="med" len="med"/>
+                    </a:lnT>
+                    <a:lnB w="9525" cap="flat" cmpd="sng" algn="ctr">
+                      <a:solidFill>
+                        <a:srgbClr val="DADCE0"/>
+                      </a:solidFill>
+                      <a:prstDash val="solid"/>
+                      <a:round/>
+                      <a:headEnd type="none" w="med" len="med"/>
+                      <a:tailEnd type="none" w="med" len="med"/>
+                    </a:lnB>
+                    <a:solidFill>
+                      <a:srgbClr val="FFFFFF"/>
+                    </a:solidFill>
+                  </a:tcPr>
+                </a:tc>
+                <a:tc>
+                  <a:txBody>
+                    <a:bodyPr/>
+                    <a:lstStyle/>
+                    <a:p>
+                      <a:pPr indent="0" marL="0">
+                        <a:buNone/>
+                      </a:pPr>
+                      <a:r>
+                        <a:rPr lang="en-US" sz="760" dirty="0">
+                          <a:solidFill>
+                            <a:srgbClr val="5F6368"/>
+                          </a:solidFill>
+                          <a:latin typeface="Roboto" pitchFamily="34" charset="0"/>
+                          <a:ea typeface="Roboto" pitchFamily="34" charset="-122"/>
+                          <a:cs typeface="Roboto" pitchFamily="34" charset="-120"/>
+                        </a:rPr>
+                        <a:t>Cloud Armor strips X-Tenant-Id; IAP + STS mints RFC 8693 OBO &amp; RFC 9449 DPoP context</a:t>
+                      </a:r>
+                      <a:endParaRPr lang="en-US" sz="760" dirty="0">
+                        <a:latin typeface="Roboto" charset="0"/>
+                        <a:ea typeface="Roboto" charset="0"/>
+                        <a:cs typeface="Roboto" charset="0"/>
+                      </a:endParaRPr>
+                    </a:p>
+                  </a:txBody>
+                  <a:tcPr marL="91440" marR="91440" marT="45720" marB="45720" anchor="ctr">
+                    <a:lnL w="9525" cap="flat" cmpd="sng" algn="ctr">
+                      <a:solidFill>
+                        <a:srgbClr val="DADCE0"/>
+                      </a:solidFill>
+                      <a:prstDash val="solid"/>
+                      <a:round/>
+                      <a:headEnd type="none" w="med" len="med"/>
+                      <a:tailEnd type="none" w="med" len="med"/>
+                    </a:lnL>
+                    <a:lnR w="9525" cap="flat" cmpd="sng" algn="ctr">
+                      <a:solidFill>
+                        <a:srgbClr val="DADCE0"/>
+                      </a:solidFill>
+                      <a:prstDash val="solid"/>
+                      <a:round/>
+                      <a:headEnd type="none" w="med" len="med"/>
+                      <a:tailEnd type="none" w="med" len="med"/>
+                    </a:lnR>
+                    <a:lnT w="9525" cap="flat" cmpd="sng" algn="ctr">
+                      <a:solidFill>
+                        <a:srgbClr val="DADCE0"/>
+                      </a:solidFill>
+                      <a:prstDash val="solid"/>
+                      <a:round/>
+                      <a:headEnd type="none" w="med" len="med"/>
+                      <a:tailEnd type="none" w="med" len="med"/>
+                    </a:lnT>
+                    <a:lnB w="9525" cap="flat" cmpd="sng" algn="ctr">
+                      <a:solidFill>
+                        <a:srgbClr val="DADCE0"/>
+                      </a:solidFill>
+                      <a:prstDash val="solid"/>
+                      <a:round/>
+                      <a:headEnd type="none" w="med" len="med"/>
+                      <a:tailEnd type="none" w="med" len="med"/>
+                    </a:lnB>
+                    <a:solidFill>
+                      <a:srgbClr val="FFFFFF"/>
+                    </a:solidFill>
+                  </a:tcPr>
+                </a:tc>
+                <a:tc>
+                  <a:txBody>
+                    <a:bodyPr/>
+                    <a:lstStyle/>
+                    <a:p>
+                      <a:pPr indent="0" marL="0">
+                        <a:buNone/>
+                      </a:pPr>
+                      <a:r>
+                        <a:rPr lang="en-US" sz="760" dirty="0">
+                          <a:solidFill>
+                            <a:srgbClr val="5F6368"/>
+                          </a:solidFill>
+                          <a:latin typeface="Roboto" pitchFamily="34" charset="0"/>
+                          <a:ea typeface="Roboto" pitchFamily="34" charset="-122"/>
+                          <a:cs typeface="Roboto" pitchFamily="34" charset="-120"/>
+                        </a:rPr>
+                        <a:t>BeyondCorp mTLS cert pinning + per-project IAM Principal Access Boundary (PAB)</a:t>
+                      </a:r>
+                      <a:endParaRPr lang="en-US" sz="760" dirty="0">
+                        <a:latin typeface="Roboto" charset="0"/>
+                        <a:ea typeface="Roboto" charset="0"/>
+                        <a:cs typeface="Roboto" charset="0"/>
+                      </a:endParaRPr>
+                    </a:p>
+                  </a:txBody>
+                  <a:tcPr marL="91440" marR="91440" marT="45720" marB="45720" anchor="ctr">
+                    <a:lnL w="9525" cap="flat" cmpd="sng" algn="ctr">
+                      <a:solidFill>
+                        <a:srgbClr val="DADCE0"/>
+                      </a:solidFill>
+                      <a:prstDash val="solid"/>
+                      <a:round/>
+                      <a:headEnd type="none" w="med" len="med"/>
+                      <a:tailEnd type="none" w="med" len="med"/>
+                    </a:lnL>
+                    <a:lnR w="9525" cap="flat" cmpd="sng" algn="ctr">
+                      <a:solidFill>
+                        <a:srgbClr val="DADCE0"/>
+                      </a:solidFill>
+                      <a:prstDash val="solid"/>
+                      <a:round/>
+                      <a:headEnd type="none" w="med" len="med"/>
+                      <a:tailEnd type="none" w="med" len="med"/>
+                    </a:lnR>
+                    <a:lnT w="9525" cap="flat" cmpd="sng" algn="ctr">
+                      <a:solidFill>
+                        <a:srgbClr val="DADCE0"/>
+                      </a:solidFill>
+                      <a:prstDash val="solid"/>
+                      <a:round/>
+                      <a:headEnd type="none" w="med" len="med"/>
+                      <a:tailEnd type="none" w="med" len="med"/>
+                    </a:lnT>
+                    <a:lnB w="9525" cap="flat" cmpd="sng" algn="ctr">
+                      <a:solidFill>
+                        <a:srgbClr val="DADCE0"/>
+                      </a:solidFill>
+                      <a:prstDash val="solid"/>
+                      <a:round/>
+                      <a:headEnd type="none" w="med" len="med"/>
+                      <a:tailEnd type="none" w="med" len="med"/>
+                    </a:lnB>
+                    <a:solidFill>
+                      <a:srgbClr val="FFFFFF"/>
+                    </a:solidFill>
+                  </a:tcPr>
+                </a:tc>
+              </a:tr>
+              <a:tr h="0">
+                <a:tc>
+                  <a:txBody>
+                    <a:bodyPr/>
+                    <a:lstStyle/>
+                    <a:p>
+                      <a:pPr indent="0" marL="0">
+                        <a:buNone/>
+                      </a:pPr>
+                      <a:r>
+                        <a:rPr lang="en-US" sz="780" b="1" dirty="0">
+                          <a:solidFill>
+                            <a:srgbClr val="3C4043"/>
+                          </a:solidFill>
+                          <a:latin typeface="Google Sans" pitchFamily="34" charset="0"/>
+                          <a:ea typeface="Google Sans" pitchFamily="34" charset="-122"/>
+                          <a:cs typeface="Google Sans" pitchFamily="34" charset="-120"/>
+                        </a:rPr>
+                        <a:t>Tool catalog &amp; memory state</a:t>
+                      </a:r>
+                      <a:endParaRPr lang="en-US" sz="780" dirty="0">
+                        <a:latin typeface="Google Sans" charset="0"/>
+                        <a:ea typeface="Google Sans" charset="0"/>
+                        <a:cs typeface="Google Sans" charset="0"/>
+                      </a:endParaRPr>
+                    </a:p>
+                  </a:txBody>
+                  <a:tcPr marL="91440" marR="91440" marT="45720" marB="45720" anchor="ctr">
+                    <a:lnL w="9525" cap="flat" cmpd="sng" algn="ctr">
+                      <a:solidFill>
+                        <a:srgbClr val="DADCE0"/>
+                      </a:solidFill>
+                      <a:prstDash val="solid"/>
+                      <a:round/>
+                      <a:headEnd type="none" w="med" len="med"/>
+                      <a:tailEnd type="none" w="med" len="med"/>
+                    </a:lnL>
+                    <a:lnR w="9525" cap="flat" cmpd="sng" algn="ctr">
+                      <a:solidFill>
+                        <a:srgbClr val="DADCE0"/>
+                      </a:solidFill>
+                      <a:prstDash val="solid"/>
+                      <a:round/>
+                      <a:headEnd type="none" w="med" len="med"/>
+                      <a:tailEnd type="none" w="med" len="med"/>
+                    </a:lnR>
+                    <a:lnT w="9525" cap="flat" cmpd="sng" algn="ctr">
+                      <a:solidFill>
+                        <a:srgbClr val="DADCE0"/>
+                      </a:solidFill>
+                      <a:prstDash val="solid"/>
+                      <a:round/>
+                      <a:headEnd type="none" w="med" len="med"/>
+                      <a:tailEnd type="none" w="med" len="med"/>
+                    </a:lnT>
+                    <a:lnB w="9525" cap="flat" cmpd="sng" algn="ctr">
+                      <a:solidFill>
+                        <a:srgbClr val="DADCE0"/>
+                      </a:solidFill>
+                      <a:prstDash val="solid"/>
+                      <a:round/>
+                      <a:headEnd type="none" w="med" len="med"/>
+                      <a:tailEnd type="none" w="med" len="med"/>
+                    </a:lnB>
+                    <a:solidFill>
+                      <a:srgbClr val="F8F9FA"/>
+                    </a:solidFill>
+                  </a:tcPr>
+                </a:tc>
+                <a:tc>
+                  <a:txBody>
+                    <a:bodyPr/>
+                    <a:lstStyle/>
+                    <a:p>
+                      <a:pPr indent="0" marL="0">
+                        <a:buNone/>
+                      </a:pPr>
+                      <a:r>
+                        <a:rPr lang="en-US" sz="760" dirty="0">
+                          <a:solidFill>
+                            <a:srgbClr val="5F6368"/>
+                          </a:solidFill>
+                          <a:latin typeface="Roboto" pitchFamily="34" charset="0"/>
+                          <a:ea typeface="Roboto" pitchFamily="34" charset="-122"/>
+                          <a:cs typeface="Roboto" pitchFamily="34" charset="-120"/>
+                        </a:rPr>
+                        <a:t>Global MCP tool list &amp; shared vector collection accessible to any prompt</a:t>
+                      </a:r>
+                      <a:endParaRPr lang="en-US" sz="760" dirty="0">
+                        <a:latin typeface="Roboto" charset="0"/>
+                        <a:ea typeface="Roboto" charset="0"/>
+                        <a:cs typeface="Roboto" charset="0"/>
+                      </a:endParaRPr>
+                    </a:p>
+                  </a:txBody>
+                  <a:tcPr marL="91440" marR="91440" marT="45720" marB="45720" anchor="ctr">
+                    <a:lnL w="9525" cap="flat" cmpd="sng" algn="ctr">
+                      <a:solidFill>
+                        <a:srgbClr val="DADCE0"/>
+                      </a:solidFill>
+                      <a:prstDash val="solid"/>
+                      <a:round/>
+                      <a:headEnd type="none" w="med" len="med"/>
+                      <a:tailEnd type="none" w="med" len="med"/>
+                    </a:lnL>
+                    <a:lnR w="9525" cap="flat" cmpd="sng" algn="ctr">
+                      <a:solidFill>
+                        <a:srgbClr val="DADCE0"/>
+                      </a:solidFill>
+                      <a:prstDash val="solid"/>
+                      <a:round/>
+                      <a:headEnd type="none" w="med" len="med"/>
+                      <a:tailEnd type="none" w="med" len="med"/>
+                    </a:lnR>
+                    <a:lnT w="9525" cap="flat" cmpd="sng" algn="ctr">
+                      <a:solidFill>
+                        <a:srgbClr val="DADCE0"/>
+                      </a:solidFill>
+                      <a:prstDash val="solid"/>
+                      <a:round/>
+                      <a:headEnd type="none" w="med" len="med"/>
+                      <a:tailEnd type="none" w="med" len="med"/>
+                    </a:lnT>
+                    <a:lnB w="9525" cap="flat" cmpd="sng" algn="ctr">
+                      <a:solidFill>
+                        <a:srgbClr val="DADCE0"/>
+                      </a:solidFill>
+                      <a:prstDash val="solid"/>
+                      <a:round/>
+                      <a:headEnd type="none" w="med" len="med"/>
+                      <a:tailEnd type="none" w="med" len="med"/>
+                    </a:lnB>
+                    <a:solidFill>
+                      <a:srgbClr val="F8F9FA"/>
+                    </a:solidFill>
+                  </a:tcPr>
+                </a:tc>
+                <a:tc>
+                  <a:txBody>
+                    <a:bodyPr/>
+                    <a:lstStyle/>
+                    <a:p>
+                      <a:pPr indent="0" marL="0">
+                        <a:buNone/>
+                      </a:pPr>
+                      <a:r>
+                        <a:rPr lang="en-US" sz="760" dirty="0">
+                          <a:solidFill>
+                            <a:srgbClr val="5F6368"/>
+                          </a:solidFill>
+                          <a:latin typeface="Roboto" pitchFamily="34" charset="0"/>
+                          <a:ea typeface="Roboto" pitchFamily="34" charset="-122"/>
+                          <a:cs typeface="Roboto" pitchFamily="34" charset="-120"/>
+                        </a:rPr>
+                        <a:t>Hop 2 ARD visibility filter (HTTP 403) + mem://{tenant_id}/L1..L5 namespace isolation</a:t>
+                      </a:r>
+                      <a:endParaRPr lang="en-US" sz="760" dirty="0">
+                        <a:latin typeface="Roboto" charset="0"/>
+                        <a:ea typeface="Roboto" charset="0"/>
+                        <a:cs typeface="Roboto" charset="0"/>
+                      </a:endParaRPr>
+                    </a:p>
+                  </a:txBody>
+                  <a:tcPr marL="91440" marR="91440" marT="45720" marB="45720" anchor="ctr">
+                    <a:lnL w="9525" cap="flat" cmpd="sng" algn="ctr">
+                      <a:solidFill>
+                        <a:srgbClr val="DADCE0"/>
+                      </a:solidFill>
+                      <a:prstDash val="solid"/>
+                      <a:round/>
+                      <a:headEnd type="none" w="med" len="med"/>
+                      <a:tailEnd type="none" w="med" len="med"/>
+                    </a:lnL>
+                    <a:lnR w="9525" cap="flat" cmpd="sng" algn="ctr">
+                      <a:solidFill>
+                        <a:srgbClr val="DADCE0"/>
+                      </a:solidFill>
+                      <a:prstDash val="solid"/>
+                      <a:round/>
+                      <a:headEnd type="none" w="med" len="med"/>
+                      <a:tailEnd type="none" w="med" len="med"/>
+                    </a:lnR>
+                    <a:lnT w="9525" cap="flat" cmpd="sng" algn="ctr">
+                      <a:solidFill>
+                        <a:srgbClr val="DADCE0"/>
+                      </a:solidFill>
+                      <a:prstDash val="solid"/>
+                      <a:round/>
+                      <a:headEnd type="none" w="med" len="med"/>
+                      <a:tailEnd type="none" w="med" len="med"/>
+                    </a:lnT>
+                    <a:lnB w="9525" cap="flat" cmpd="sng" algn="ctr">
+                      <a:solidFill>
+                        <a:srgbClr val="DADCE0"/>
+                      </a:solidFill>
+                      <a:prstDash val="solid"/>
+                      <a:round/>
+                      <a:headEnd type="none" w="med" len="med"/>
+                      <a:tailEnd type="none" w="med" len="med"/>
+                    </a:lnB>
+                    <a:solidFill>
+                      <a:srgbClr val="F8F9FA"/>
+                    </a:solidFill>
+                  </a:tcPr>
+                </a:tc>
+                <a:tc>
+                  <a:txBody>
+                    <a:bodyPr/>
+                    <a:lstStyle/>
+                    <a:p>
+                      <a:pPr indent="0" marL="0">
+                        <a:buNone/>
+                      </a:pPr>
+                      <a:r>
+                        <a:rPr lang="en-US" sz="760" dirty="0">
+                          <a:solidFill>
+                            <a:srgbClr val="5F6368"/>
+                          </a:solidFill>
+                          <a:latin typeface="Roboto" pitchFamily="34" charset="0"/>
+                          <a:ea typeface="Roboto" pitchFamily="34" charset="-122"/>
+                          <a:cs typeface="Roboto" pitchFamily="34" charset="-120"/>
+                        </a:rPr>
+                        <a:t>Physical per-project Agent Engine Registry &amp; CMEK-encrypted Memory Bank</a:t>
+                      </a:r>
+                      <a:endParaRPr lang="en-US" sz="760" dirty="0">
+                        <a:latin typeface="Roboto" charset="0"/>
+                        <a:ea typeface="Roboto" charset="0"/>
+                        <a:cs typeface="Roboto" charset="0"/>
+                      </a:endParaRPr>
+                    </a:p>
+                  </a:txBody>
+                  <a:tcPr marL="91440" marR="91440" marT="45720" marB="45720" anchor="ctr">
+                    <a:lnL w="9525" cap="flat" cmpd="sng" algn="ctr">
+                      <a:solidFill>
+                        <a:srgbClr val="DADCE0"/>
+                      </a:solidFill>
+                      <a:prstDash val="solid"/>
+                      <a:round/>
+                      <a:headEnd type="none" w="med" len="med"/>
+                      <a:tailEnd type="none" w="med" len="med"/>
+                    </a:lnL>
+                    <a:lnR w="9525" cap="flat" cmpd="sng" algn="ctr">
+                      <a:solidFill>
+                        <a:srgbClr val="DADCE0"/>
+                      </a:solidFill>
+                      <a:prstDash val="solid"/>
+                      <a:round/>
+                      <a:headEnd type="none" w="med" len="med"/>
+                      <a:tailEnd type="none" w="med" len="med"/>
+                    </a:lnR>
+                    <a:lnT w="9525" cap="flat" cmpd="sng" algn="ctr">
+                      <a:solidFill>
+                        <a:srgbClr val="DADCE0"/>
+                      </a:solidFill>
+                      <a:prstDash val="solid"/>
+                      <a:round/>
+                      <a:headEnd type="none" w="med" len="med"/>
+                      <a:tailEnd type="none" w="med" len="med"/>
+                    </a:lnT>
+                    <a:lnB w="9525" cap="flat" cmpd="sng" algn="ctr">
+                      <a:solidFill>
+                        <a:srgbClr val="DADCE0"/>
+                      </a:solidFill>
+                      <a:prstDash val="solid"/>
+                      <a:round/>
+                      <a:headEnd type="none" w="med" len="med"/>
+                      <a:tailEnd type="none" w="med" len="med"/>
+                    </a:lnB>
+                    <a:solidFill>
+                      <a:srgbClr val="F8F9FA"/>
+                    </a:solidFill>
+                  </a:tcPr>
+                </a:tc>
+              </a:tr>
+              <a:tr h="0">
+                <a:tc>
+                  <a:txBody>
+                    <a:bodyPr/>
+                    <a:lstStyle/>
+                    <a:p>
+                      <a:pPr indent="0" marL="0">
+                        <a:buNone/>
+                      </a:pPr>
+                      <a:r>
+                        <a:rPr lang="en-US" sz="780" b="1" dirty="0">
+                          <a:solidFill>
+                            <a:srgbClr val="3C4043"/>
+                          </a:solidFill>
+                          <a:latin typeface="Google Sans" pitchFamily="34" charset="0"/>
+                          <a:ea typeface="Google Sans" pitchFamily="34" charset="-122"/>
+                          <a:cs typeface="Google Sans" pitchFamily="34" charset="-120"/>
+                        </a:rPr>
+                        <a:t>Rate limits &amp; reasoning quotas</a:t>
+                      </a:r>
+                      <a:endParaRPr lang="en-US" sz="780" dirty="0">
+                        <a:latin typeface="Google Sans" charset="0"/>
+                        <a:ea typeface="Google Sans" charset="0"/>
+                        <a:cs typeface="Google Sans" charset="0"/>
+                      </a:endParaRPr>
+                    </a:p>
+                  </a:txBody>
+                  <a:tcPr marL="91440" marR="91440" marT="45720" marB="45720" anchor="ctr">
+                    <a:lnL w="9525" cap="flat" cmpd="sng" algn="ctr">
+                      <a:solidFill>
+                        <a:srgbClr val="DADCE0"/>
+                      </a:solidFill>
+                      <a:prstDash val="solid"/>
+                      <a:round/>
+                      <a:headEnd type="none" w="med" len="med"/>
+                      <a:tailEnd type="none" w="med" len="med"/>
+                    </a:lnL>
+                    <a:lnR w="9525" cap="flat" cmpd="sng" algn="ctr">
+                      <a:solidFill>
+                        <a:srgbClr val="DADCE0"/>
+                      </a:solidFill>
+                      <a:prstDash val="solid"/>
+                      <a:round/>
+                      <a:headEnd type="none" w="med" len="med"/>
+                      <a:tailEnd type="none" w="med" len="med"/>
+                    </a:lnR>
+                    <a:lnT w="9525" cap="flat" cmpd="sng" algn="ctr">
+                      <a:solidFill>
+                        <a:srgbClr val="DADCE0"/>
+                      </a:solidFill>
+                      <a:prstDash val="solid"/>
+                      <a:round/>
+                      <a:headEnd type="none" w="med" len="med"/>
+                      <a:tailEnd type="none" w="med" len="med"/>
+                    </a:lnT>
+                    <a:lnB w="9525" cap="flat" cmpd="sng" algn="ctr">
+                      <a:solidFill>
+                        <a:srgbClr val="DADCE0"/>
+                      </a:solidFill>
+                      <a:prstDash val="solid"/>
+                      <a:round/>
+                      <a:headEnd type="none" w="med" len="med"/>
+                      <a:tailEnd type="none" w="med" len="med"/>
+                    </a:lnB>
+                    <a:solidFill>
+                      <a:srgbClr val="FFFFFF"/>
+                    </a:solidFill>
+                  </a:tcPr>
+                </a:tc>
+                <a:tc>
+                  <a:txBody>
+                    <a:bodyPr/>
+                    <a:lstStyle/>
+                    <a:p>
+                      <a:pPr indent="0" marL="0">
+                        <a:buNone/>
+                      </a:pPr>
+                      <a:r>
+                        <a:rPr lang="en-US" sz="760" dirty="0">
+                          <a:solidFill>
+                            <a:srgbClr val="5F6368"/>
+                          </a:solidFill>
+                          <a:latin typeface="Roboto" pitchFamily="34" charset="0"/>
+                          <a:ea typeface="Roboto" pitchFamily="34" charset="-122"/>
+                          <a:cs typeface="Roboto" pitchFamily="34" charset="-120"/>
+                        </a:rPr>
+                        <a:t>Regional Vertex AI RPM/TPM shared first-come, first-served (noisy-neighbor outages)</a:t>
+                      </a:r>
+                      <a:endParaRPr lang="en-US" sz="760" dirty="0">
+                        <a:latin typeface="Roboto" charset="0"/>
+                        <a:ea typeface="Roboto" charset="0"/>
+                        <a:cs typeface="Roboto" charset="0"/>
+                      </a:endParaRPr>
+                    </a:p>
+                  </a:txBody>
+                  <a:tcPr marL="91440" marR="91440" marT="45720" marB="45720" anchor="ctr">
+                    <a:lnL w="9525" cap="flat" cmpd="sng" algn="ctr">
+                      <a:solidFill>
+                        <a:srgbClr val="DADCE0"/>
+                      </a:solidFill>
+                      <a:prstDash val="solid"/>
+                      <a:round/>
+                      <a:headEnd type="none" w="med" len="med"/>
+                      <a:tailEnd type="none" w="med" len="med"/>
+                    </a:lnL>
+                    <a:lnR w="9525" cap="flat" cmpd="sng" algn="ctr">
+                      <a:solidFill>
+                        <a:srgbClr val="DADCE0"/>
+                      </a:solidFill>
+                      <a:prstDash val="solid"/>
+                      <a:round/>
+                      <a:headEnd type="none" w="med" len="med"/>
+                      <a:tailEnd type="none" w="med" len="med"/>
+                    </a:lnR>
+                    <a:lnT w="9525" cap="flat" cmpd="sng" algn="ctr">
+                      <a:solidFill>
+                        <a:srgbClr val="DADCE0"/>
+                      </a:solidFill>
+                      <a:prstDash val="solid"/>
+                      <a:round/>
+                      <a:headEnd type="none" w="med" len="med"/>
+                      <a:tailEnd type="none" w="med" len="med"/>
+                    </a:lnT>
+                    <a:lnB w="9525" cap="flat" cmpd="sng" algn="ctr">
+                      <a:solidFill>
+                        <a:srgbClr val="DADCE0"/>
+                      </a:solidFill>
+                      <a:prstDash val="solid"/>
+                      <a:round/>
+                      <a:headEnd type="none" w="med" len="med"/>
+                      <a:tailEnd type="none" w="med" len="med"/>
+                    </a:lnB>
+                    <a:solidFill>
+                      <a:srgbClr val="FFFFFF"/>
+                    </a:solidFill>
+                  </a:tcPr>
+                </a:tc>
+                <a:tc>
+                  <a:txBody>
+                    <a:bodyPr/>
+                    <a:lstStyle/>
+                    <a:p>
+                      <a:pPr indent="0" marL="0">
+                        <a:buNone/>
+                      </a:pPr>
+                      <a:r>
+                        <a:rPr lang="en-US" sz="760" dirty="0">
+                          <a:solidFill>
+                            <a:srgbClr val="5F6368"/>
+                          </a:solidFill>
+                          <a:latin typeface="Roboto" pitchFamily="34" charset="0"/>
+                          <a:ea typeface="Roboto" pitchFamily="34" charset="-122"/>
+                          <a:cs typeface="Roboto" pitchFamily="34" charset="-120"/>
+                        </a:rPr>
+                        <a:t>Memorystore for Valkey RPM buckets (120/600 RPM, HTTP 429) + 4k/8k thinking clamps</a:t>
+                      </a:r>
+                      <a:endParaRPr lang="en-US" sz="760" dirty="0">
+                        <a:latin typeface="Roboto" charset="0"/>
+                        <a:ea typeface="Roboto" charset="0"/>
+                        <a:cs typeface="Roboto" charset="0"/>
+                      </a:endParaRPr>
+                    </a:p>
+                  </a:txBody>
+                  <a:tcPr marL="91440" marR="91440" marT="45720" marB="45720" anchor="ctr">
+                    <a:lnL w="9525" cap="flat" cmpd="sng" algn="ctr">
+                      <a:solidFill>
+                        <a:srgbClr val="DADCE0"/>
+                      </a:solidFill>
+                      <a:prstDash val="solid"/>
+                      <a:round/>
+                      <a:headEnd type="none" w="med" len="med"/>
+                      <a:tailEnd type="none" w="med" len="med"/>
+                    </a:lnL>
+                    <a:lnR w="9525" cap="flat" cmpd="sng" algn="ctr">
+                      <a:solidFill>
+                        <a:srgbClr val="DADCE0"/>
+                      </a:solidFill>
+                      <a:prstDash val="solid"/>
+                      <a:round/>
+                      <a:headEnd type="none" w="med" len="med"/>
+                      <a:tailEnd type="none" w="med" len="med"/>
+                    </a:lnR>
+                    <a:lnT w="9525" cap="flat" cmpd="sng" algn="ctr">
+                      <a:solidFill>
+                        <a:srgbClr val="DADCE0"/>
+                      </a:solidFill>
+                      <a:prstDash val="solid"/>
+                      <a:round/>
+                      <a:headEnd type="none" w="med" len="med"/>
+                      <a:tailEnd type="none" w="med" len="med"/>
+                    </a:lnT>
+                    <a:lnB w="9525" cap="flat" cmpd="sng" algn="ctr">
+                      <a:solidFill>
+                        <a:srgbClr val="DADCE0"/>
+                      </a:solidFill>
+                      <a:prstDash val="solid"/>
+                      <a:round/>
+                      <a:headEnd type="none" w="med" len="med"/>
+                      <a:tailEnd type="none" w="med" len="med"/>
+                    </a:lnB>
+                    <a:solidFill>
+                      <a:srgbClr val="FFFFFF"/>
+                    </a:solidFill>
+                  </a:tcPr>
+                </a:tc>
+                <a:tc>
+                  <a:txBody>
+                    <a:bodyPr/>
+                    <a:lstStyle/>
+                    <a:p>
+                      <a:pPr indent="0" marL="0">
+                        <a:buNone/>
+                      </a:pPr>
+                      <a:r>
+                        <a:rPr lang="en-US" sz="760" dirty="0">
+                          <a:solidFill>
+                            <a:srgbClr val="5F6368"/>
+                          </a:solidFill>
+                          <a:latin typeface="Roboto" pitchFamily="34" charset="0"/>
+                          <a:ea typeface="Roboto" pitchFamily="34" charset="-122"/>
+                          <a:cs typeface="Roboto" pitchFamily="34" charset="-120"/>
+                        </a:rPr>
+                        <a:t>Dedicated GCP project quota &amp; dedicated Provisioned Throughput / GKE GPUs</a:t>
+                      </a:r>
+                      <a:endParaRPr lang="en-US" sz="760" dirty="0">
+                        <a:latin typeface="Roboto" charset="0"/>
+                        <a:ea typeface="Roboto" charset="0"/>
+                        <a:cs typeface="Roboto" charset="0"/>
+                      </a:endParaRPr>
+                    </a:p>
+                  </a:txBody>
+                  <a:tcPr marL="91440" marR="91440" marT="45720" marB="45720" anchor="ctr">
+                    <a:lnL w="9525" cap="flat" cmpd="sng" algn="ctr">
+                      <a:solidFill>
+                        <a:srgbClr val="DADCE0"/>
+                      </a:solidFill>
+                      <a:prstDash val="solid"/>
+                      <a:round/>
+                      <a:headEnd type="none" w="med" len="med"/>
+                      <a:tailEnd type="none" w="med" len="med"/>
+                    </a:lnL>
+                    <a:lnR w="9525" cap="flat" cmpd="sng" algn="ctr">
+                      <a:solidFill>
+                        <a:srgbClr val="DADCE0"/>
+                      </a:solidFill>
+                      <a:prstDash val="solid"/>
+                      <a:round/>
+                      <a:headEnd type="none" w="med" len="med"/>
+                      <a:tailEnd type="none" w="med" len="med"/>
+                    </a:lnR>
+                    <a:lnT w="9525" cap="flat" cmpd="sng" algn="ctr">
+                      <a:solidFill>
+                        <a:srgbClr val="DADCE0"/>
+                      </a:solidFill>
+                      <a:prstDash val="solid"/>
+                      <a:round/>
+                      <a:headEnd type="none" w="med" len="med"/>
+                      <a:tailEnd type="none" w="med" len="med"/>
+                    </a:lnT>
+                    <a:lnB w="9525" cap="flat" cmpd="sng" algn="ctr">
+                      <a:solidFill>
+                        <a:srgbClr val="DADCE0"/>
+                      </a:solidFill>
+                      <a:prstDash val="solid"/>
+                      <a:round/>
+                      <a:headEnd type="none" w="med" len="med"/>
+                      <a:tailEnd type="none" w="med" len="med"/>
+                    </a:lnB>
+                    <a:solidFill>
+                      <a:srgbClr val="FFFFFF"/>
+                    </a:solidFill>
+                  </a:tcPr>
+                </a:tc>
+              </a:tr>
+              <a:tr h="0">
+                <a:tc>
+                  <a:txBody>
+                    <a:bodyPr/>
+                    <a:lstStyle/>
+                    <a:p>
+                      <a:pPr indent="0" marL="0">
+                        <a:buNone/>
+                      </a:pPr>
+                      <a:r>
+                        <a:rPr lang="en-US" sz="780" b="1" dirty="0">
+                          <a:solidFill>
+                            <a:srgbClr val="3C4043"/>
+                          </a:solidFill>
+                          <a:latin typeface="Google Sans" pitchFamily="34" charset="0"/>
+                          <a:ea typeface="Google Sans" pitchFamily="34" charset="-122"/>
+                          <a:cs typeface="Google Sans" pitchFamily="34" charset="-120"/>
+                        </a:rPr>
+                        <a:t>Prompt caching &amp; FinOps COGS</a:t>
+                      </a:r>
+                      <a:endParaRPr lang="en-US" sz="780" dirty="0">
+                        <a:latin typeface="Google Sans" charset="0"/>
+                        <a:ea typeface="Google Sans" charset="0"/>
+                        <a:cs typeface="Google Sans" charset="0"/>
+                      </a:endParaRPr>
+                    </a:p>
+                  </a:txBody>
+                  <a:tcPr marL="91440" marR="91440" marT="45720" marB="45720" anchor="ctr">
+                    <a:lnL w="9525" cap="flat" cmpd="sng" algn="ctr">
+                      <a:solidFill>
+                        <a:srgbClr val="DADCE0"/>
+                      </a:solidFill>
+                      <a:prstDash val="solid"/>
+                      <a:round/>
+                      <a:headEnd type="none" w="med" len="med"/>
+                      <a:tailEnd type="none" w="med" len="med"/>
+                    </a:lnL>
+                    <a:lnR w="9525" cap="flat" cmpd="sng" algn="ctr">
+                      <a:solidFill>
+                        <a:srgbClr val="DADCE0"/>
+                      </a:solidFill>
+                      <a:prstDash val="solid"/>
+                      <a:round/>
+                      <a:headEnd type="none" w="med" len="med"/>
+                      <a:tailEnd type="none" w="med" len="med"/>
+                    </a:lnR>
+                    <a:lnT w="9525" cap="flat" cmpd="sng" algn="ctr">
+                      <a:solidFill>
+                        <a:srgbClr val="DADCE0"/>
+                      </a:solidFill>
+                      <a:prstDash val="solid"/>
+                      <a:round/>
+                      <a:headEnd type="none" w="med" len="med"/>
+                      <a:tailEnd type="none" w="med" len="med"/>
+                    </a:lnT>
+                    <a:lnB w="9525" cap="flat" cmpd="sng" algn="ctr">
+                      <a:solidFill>
+                        <a:srgbClr val="DADCE0"/>
+                      </a:solidFill>
+                      <a:prstDash val="solid"/>
+                      <a:round/>
+                      <a:headEnd type="none" w="med" len="med"/>
+                      <a:tailEnd type="none" w="med" len="med"/>
+                    </a:lnB>
+                    <a:solidFill>
+                      <a:srgbClr val="F8F9FA"/>
+                    </a:solidFill>
+                  </a:tcPr>
+                </a:tc>
+                <a:tc>
+                  <a:txBody>
+                    <a:bodyPr/>
+                    <a:lstStyle/>
+                    <a:p>
+                      <a:pPr indent="0" marL="0">
+                        <a:buNone/>
+                      </a:pPr>
+                      <a:r>
+                        <a:rPr lang="en-US" sz="760" dirty="0">
+                          <a:solidFill>
+                            <a:srgbClr val="5F6368"/>
+                          </a:solidFill>
+                          <a:latin typeface="Roboto" pitchFamily="34" charset="0"/>
+                          <a:ea typeface="Roboto" pitchFamily="34" charset="-122"/>
+                          <a:cs typeface="Roboto" pitchFamily="34" charset="-120"/>
+                        </a:rPr>
+                        <a:t>34k prompt billed in full every turn ($0.0425/turn) or unsafe cross-tenant cache bleed</a:t>
+                      </a:r>
+                      <a:endParaRPr lang="en-US" sz="760" dirty="0">
+                        <a:latin typeface="Roboto" charset="0"/>
+                        <a:ea typeface="Roboto" charset="0"/>
+                        <a:cs typeface="Roboto" charset="0"/>
+                      </a:endParaRPr>
+                    </a:p>
+                  </a:txBody>
+                  <a:tcPr marL="91440" marR="91440" marT="45720" marB="45720" anchor="ctr">
+                    <a:lnL w="9525" cap="flat" cmpd="sng" algn="ctr">
+                      <a:solidFill>
+                        <a:srgbClr val="DADCE0"/>
+                      </a:solidFill>
+                      <a:prstDash val="solid"/>
+                      <a:round/>
+                      <a:headEnd type="none" w="med" len="med"/>
+                      <a:tailEnd type="none" w="med" len="med"/>
+                    </a:lnL>
+                    <a:lnR w="9525" cap="flat" cmpd="sng" algn="ctr">
+                      <a:solidFill>
+                        <a:srgbClr val="DADCE0"/>
+                      </a:solidFill>
+                      <a:prstDash val="solid"/>
+                      <a:round/>
+                      <a:headEnd type="none" w="med" len="med"/>
+                      <a:tailEnd type="none" w="med" len="med"/>
+                    </a:lnR>
+                    <a:lnT w="9525" cap="flat" cmpd="sng" algn="ctr">
+                      <a:solidFill>
+                        <a:srgbClr val="DADCE0"/>
+                      </a:solidFill>
+                      <a:prstDash val="solid"/>
+                      <a:round/>
+                      <a:headEnd type="none" w="med" len="med"/>
+                      <a:tailEnd type="none" w="med" len="med"/>
+                    </a:lnT>
+                    <a:lnB w="9525" cap="flat" cmpd="sng" algn="ctr">
+                      <a:solidFill>
+                        <a:srgbClr val="DADCE0"/>
+                      </a:solidFill>
+                      <a:prstDash val="solid"/>
+                      <a:round/>
+                      <a:headEnd type="none" w="med" len="med"/>
+                      <a:tailEnd type="none" w="med" len="med"/>
+                    </a:lnB>
+                    <a:solidFill>
+                      <a:srgbClr val="F8F9FA"/>
+                    </a:solidFill>
+                  </a:tcPr>
+                </a:tc>
+                <a:tc>
+                  <a:txBody>
+                    <a:bodyPr/>
+                    <a:lstStyle/>
+                    <a:p>
+                      <a:pPr indent="0" marL="0">
+                        <a:buNone/>
+                      </a:pPr>
+                      <a:r>
+                        <a:rPr lang="en-US" sz="760" dirty="0">
+                          <a:solidFill>
+                            <a:srgbClr val="5F6368"/>
+                          </a:solidFill>
+                          <a:latin typeface="Roboto" pitchFamily="34" charset="0"/>
+                          <a:ea typeface="Roboto" pitchFamily="34" charset="-122"/>
+                          <a:cs typeface="Roboto" pitchFamily="34" charset="-120"/>
+                        </a:rPr>
+                        <a:t>32k immutable prefix in Gemini 2.5 Pro ContextCacheConfig (90% discount -&gt; 84.7% savings)</a:t>
+                      </a:r>
+                      <a:endParaRPr lang="en-US" sz="760" dirty="0">
+                        <a:latin typeface="Roboto" charset="0"/>
+                        <a:ea typeface="Roboto" charset="0"/>
+                        <a:cs typeface="Roboto" charset="0"/>
+                      </a:endParaRPr>
+                    </a:p>
+                  </a:txBody>
+                  <a:tcPr marL="91440" marR="91440" marT="45720" marB="45720" anchor="ctr">
+                    <a:lnL w="9525" cap="flat" cmpd="sng" algn="ctr">
+                      <a:solidFill>
+                        <a:srgbClr val="DADCE0"/>
+                      </a:solidFill>
+                      <a:prstDash val="solid"/>
+                      <a:round/>
+                      <a:headEnd type="none" w="med" len="med"/>
+                      <a:tailEnd type="none" w="med" len="med"/>
+                    </a:lnL>
+                    <a:lnR w="9525" cap="flat" cmpd="sng" algn="ctr">
+                      <a:solidFill>
+                        <a:srgbClr val="DADCE0"/>
+                      </a:solidFill>
+                      <a:prstDash val="solid"/>
+                      <a:round/>
+                      <a:headEnd type="none" w="med" len="med"/>
+                      <a:tailEnd type="none" w="med" len="med"/>
+                    </a:lnR>
+                    <a:lnT w="9525" cap="flat" cmpd="sng" algn="ctr">
+                      <a:solidFill>
+                        <a:srgbClr val="DADCE0"/>
+                      </a:solidFill>
+                      <a:prstDash val="solid"/>
+                      <a:round/>
+                      <a:headEnd type="none" w="med" len="med"/>
+                      <a:tailEnd type="none" w="med" len="med"/>
+                    </a:lnT>
+                    <a:lnB w="9525" cap="flat" cmpd="sng" algn="ctr">
+                      <a:solidFill>
+                        <a:srgbClr val="DADCE0"/>
+                      </a:solidFill>
+                      <a:prstDash val="solid"/>
+                      <a:round/>
+                      <a:headEnd type="none" w="med" len="med"/>
+                      <a:tailEnd type="none" w="med" len="med"/>
+                    </a:lnB>
+                    <a:solidFill>
+                      <a:srgbClr val="F8F9FA"/>
+                    </a:solidFill>
+                  </a:tcPr>
+                </a:tc>
+                <a:tc>
+                  <a:txBody>
+                    <a:bodyPr/>
+                    <a:lstStyle/>
+                    <a:p>
+                      <a:pPr indent="0" marL="0">
+                        <a:buNone/>
+                      </a:pPr>
+                      <a:r>
+                        <a:rPr lang="en-US" sz="760" dirty="0">
+                          <a:solidFill>
+                            <a:srgbClr val="5F6368"/>
+                          </a:solidFill>
+                          <a:latin typeface="Roboto" pitchFamily="34" charset="0"/>
+                          <a:ea typeface="Roboto" pitchFamily="34" charset="-122"/>
+                          <a:cs typeface="Roboto" pitchFamily="34" charset="-120"/>
+                        </a:rPr>
+                        <a:t>Per-silo prefix cache or dedicated air-gapped GKE Gemma 3 (27B) node pool</a:t>
+                      </a:r>
+                      <a:endParaRPr lang="en-US" sz="760" dirty="0">
+                        <a:latin typeface="Roboto" charset="0"/>
+                        <a:ea typeface="Roboto" charset="0"/>
+                        <a:cs typeface="Roboto" charset="0"/>
+                      </a:endParaRPr>
+                    </a:p>
+                  </a:txBody>
+                  <a:tcPr marL="91440" marR="91440" marT="45720" marB="45720" anchor="ctr">
+                    <a:lnL w="9525" cap="flat" cmpd="sng" algn="ctr">
+                      <a:solidFill>
+                        <a:srgbClr val="DADCE0"/>
+                      </a:solidFill>
+                      <a:prstDash val="solid"/>
+                      <a:round/>
+                      <a:headEnd type="none" w="med" len="med"/>
+                      <a:tailEnd type="none" w="med" len="med"/>
+                    </a:lnL>
+                    <a:lnR w="9525" cap="flat" cmpd="sng" algn="ctr">
+                      <a:solidFill>
+                        <a:srgbClr val="DADCE0"/>
+                      </a:solidFill>
+                      <a:prstDash val="solid"/>
+                      <a:round/>
+                      <a:headEnd type="none" w="med" len="med"/>
+                      <a:tailEnd type="none" w="med" len="med"/>
+                    </a:lnR>
+                    <a:lnT w="9525" cap="flat" cmpd="sng" algn="ctr">
+                      <a:solidFill>
+                        <a:srgbClr val="DADCE0"/>
+                      </a:solidFill>
+                      <a:prstDash val="solid"/>
+                      <a:round/>
+                      <a:headEnd type="none" w="med" len="med"/>
+                      <a:tailEnd type="none" w="med" len="med"/>
+                    </a:lnT>
+                    <a:lnB w="9525" cap="flat" cmpd="sng" algn="ctr">
+                      <a:solidFill>
+                        <a:srgbClr val="DADCE0"/>
+                      </a:solidFill>
+                      <a:prstDash val="solid"/>
+                      <a:round/>
+                      <a:headEnd type="none" w="med" len="med"/>
+                      <a:tailEnd type="none" w="med" len="med"/>
+                    </a:lnB>
+                    <a:solidFill>
+                      <a:srgbClr val="F8F9FA"/>
+                    </a:solidFill>
+                  </a:tcPr>
+                </a:tc>
+              </a:tr>
+              <a:tr h="0">
+                <a:tc>
+                  <a:txBody>
+                    <a:bodyPr/>
+                    <a:lstStyle/>
+                    <a:p>
+                      <a:pPr indent="0" marL="0">
+                        <a:buNone/>
+                      </a:pPr>
+                      <a:r>
+                        <a:rPr lang="en-US" sz="780" b="1" dirty="0">
+                          <a:solidFill>
+                            <a:srgbClr val="3C4043"/>
+                          </a:solidFill>
+                          <a:latin typeface="Google Sans" pitchFamily="34" charset="0"/>
+                          <a:ea typeface="Google Sans" pitchFamily="34" charset="-122"/>
+                          <a:cs typeface="Google Sans" pitchFamily="34" charset="-120"/>
+                        </a:rPr>
+                        <a:t>Relational data &amp; PII guardrails</a:t>
+                      </a:r>
+                      <a:endParaRPr lang="en-US" sz="780" dirty="0">
+                        <a:latin typeface="Google Sans" charset="0"/>
+                        <a:ea typeface="Google Sans" charset="0"/>
+                        <a:cs typeface="Google Sans" charset="0"/>
+                      </a:endParaRPr>
+                    </a:p>
+                  </a:txBody>
+                  <a:tcPr marL="91440" marR="91440" marT="45720" marB="45720" anchor="ctr">
+                    <a:lnL w="9525" cap="flat" cmpd="sng" algn="ctr">
+                      <a:solidFill>
+                        <a:srgbClr val="DADCE0"/>
+                      </a:solidFill>
+                      <a:prstDash val="solid"/>
+                      <a:round/>
+                      <a:headEnd type="none" w="med" len="med"/>
+                      <a:tailEnd type="none" w="med" len="med"/>
+                    </a:lnL>
+                    <a:lnR w="9525" cap="flat" cmpd="sng" algn="ctr">
+                      <a:solidFill>
+                        <a:srgbClr val="DADCE0"/>
+                      </a:solidFill>
+                      <a:prstDash val="solid"/>
+                      <a:round/>
+                      <a:headEnd type="none" w="med" len="med"/>
+                      <a:tailEnd type="none" w="med" len="med"/>
+                    </a:lnR>
+                    <a:lnT w="9525" cap="flat" cmpd="sng" algn="ctr">
+                      <a:solidFill>
+                        <a:srgbClr val="DADCE0"/>
+                      </a:solidFill>
+                      <a:prstDash val="solid"/>
+                      <a:round/>
+                      <a:headEnd type="none" w="med" len="med"/>
+                      <a:tailEnd type="none" w="med" len="med"/>
+                    </a:lnT>
+                    <a:lnB w="9525" cap="flat" cmpd="sng" algn="ctr">
+                      <a:solidFill>
+                        <a:srgbClr val="DADCE0"/>
+                      </a:solidFill>
+                      <a:prstDash val="solid"/>
+                      <a:round/>
+                      <a:headEnd type="none" w="med" len="med"/>
+                      <a:tailEnd type="none" w="med" len="med"/>
+                    </a:lnB>
+                    <a:solidFill>
+                      <a:srgbClr val="FFFFFF"/>
+                    </a:solidFill>
+                  </a:tcPr>
+                </a:tc>
+                <a:tc>
+                  <a:txBody>
+                    <a:bodyPr/>
+                    <a:lstStyle/>
+                    <a:p>
+                      <a:pPr indent="0" marL="0">
+                        <a:buNone/>
+                      </a:pPr>
+                      <a:r>
+                        <a:rPr lang="en-US" sz="760" dirty="0">
+                          <a:solidFill>
+                            <a:srgbClr val="5F6368"/>
+                          </a:solidFill>
+                          <a:latin typeface="Roboto" pitchFamily="34" charset="0"/>
+                          <a:ea typeface="Roboto" pitchFamily="34" charset="-122"/>
+                          <a:cs typeface="Roboto" pitchFamily="34" charset="-120"/>
+                        </a:rPr>
+                        <a:t>Application-layer WHERE tenant_id = ? query (vulnerable to SQLi &amp; prompt injection)</a:t>
+                      </a:r>
+                      <a:endParaRPr lang="en-US" sz="760" dirty="0">
+                        <a:latin typeface="Roboto" charset="0"/>
+                        <a:ea typeface="Roboto" charset="0"/>
+                        <a:cs typeface="Roboto" charset="0"/>
+                      </a:endParaRPr>
+                    </a:p>
+                  </a:txBody>
+                  <a:tcPr marL="91440" marR="91440" marT="45720" marB="45720" anchor="ctr">
+                    <a:lnL w="9525" cap="flat" cmpd="sng" algn="ctr">
+                      <a:solidFill>
+                        <a:srgbClr val="DADCE0"/>
+                      </a:solidFill>
+                      <a:prstDash val="solid"/>
+                      <a:round/>
+                      <a:headEnd type="none" w="med" len="med"/>
+                      <a:tailEnd type="none" w="med" len="med"/>
+                    </a:lnL>
+                    <a:lnR w="9525" cap="flat" cmpd="sng" algn="ctr">
+                      <a:solidFill>
+                        <a:srgbClr val="DADCE0"/>
+                      </a:solidFill>
+                      <a:prstDash val="solid"/>
+                      <a:round/>
+                      <a:headEnd type="none" w="med" len="med"/>
+                      <a:tailEnd type="none" w="med" len="med"/>
+                    </a:lnR>
+                    <a:lnT w="9525" cap="flat" cmpd="sng" algn="ctr">
+                      <a:solidFill>
+                        <a:srgbClr val="DADCE0"/>
+                      </a:solidFill>
+                      <a:prstDash val="solid"/>
+                      <a:round/>
+                      <a:headEnd type="none" w="med" len="med"/>
+                      <a:tailEnd type="none" w="med" len="med"/>
+                    </a:lnT>
+                    <a:lnB w="9525" cap="flat" cmpd="sng" algn="ctr">
+                      <a:solidFill>
+                        <a:srgbClr val="DADCE0"/>
+                      </a:solidFill>
+                      <a:prstDash val="solid"/>
+                      <a:round/>
+                      <a:headEnd type="none" w="med" len="med"/>
+                      <a:tailEnd type="none" w="med" len="med"/>
+                    </a:lnB>
+                    <a:solidFill>
+                      <a:srgbClr val="FFFFFF"/>
+                    </a:solidFill>
+                  </a:tcPr>
+                </a:tc>
+                <a:tc>
+                  <a:txBody>
+                    <a:bodyPr/>
+                    <a:lstStyle/>
+                    <a:p>
+                      <a:pPr indent="0" marL="0">
+                        <a:buNone/>
+                      </a:pPr>
+                      <a:r>
+                        <a:rPr lang="en-US" sz="760" dirty="0">
+                          <a:solidFill>
+                            <a:srgbClr val="5F6368"/>
+                          </a:solidFill>
+                          <a:latin typeface="Roboto" pitchFamily="34" charset="0"/>
+                          <a:ea typeface="Roboto" pitchFamily="34" charset="-122"/>
+                          <a:cs typeface="Roboto" pitchFamily="34" charset="-120"/>
+                        </a:rPr>
+                        <a:t>AlloyDB FORCE ROW LEVEL SECURITY (SET LOCAL) + Model Armor (400/422) &amp; Cloud DLP</a:t>
+                      </a:r>
+                      <a:endParaRPr lang="en-US" sz="760" dirty="0">
+                        <a:latin typeface="Roboto" charset="0"/>
+                        <a:ea typeface="Roboto" charset="0"/>
+                        <a:cs typeface="Roboto" charset="0"/>
+                      </a:endParaRPr>
+                    </a:p>
+                  </a:txBody>
+                  <a:tcPr marL="91440" marR="91440" marT="45720" marB="45720" anchor="ctr">
+                    <a:lnL w="9525" cap="flat" cmpd="sng" algn="ctr">
+                      <a:solidFill>
+                        <a:srgbClr val="DADCE0"/>
+                      </a:solidFill>
+                      <a:prstDash val="solid"/>
+                      <a:round/>
+                      <a:headEnd type="none" w="med" len="med"/>
+                      <a:tailEnd type="none" w="med" len="med"/>
+                    </a:lnL>
+                    <a:lnR w="9525" cap="flat" cmpd="sng" algn="ctr">
+                      <a:solidFill>
+                        <a:srgbClr val="DADCE0"/>
+                      </a:solidFill>
+                      <a:prstDash val="solid"/>
+                      <a:round/>
+                      <a:headEnd type="none" w="med" len="med"/>
+                      <a:tailEnd type="none" w="med" len="med"/>
+                    </a:lnR>
+                    <a:lnT w="9525" cap="flat" cmpd="sng" algn="ctr">
+                      <a:solidFill>
+                        <a:srgbClr val="DADCE0"/>
+                      </a:solidFill>
+                      <a:prstDash val="solid"/>
+                      <a:round/>
+                      <a:headEnd type="none" w="med" len="med"/>
+                      <a:tailEnd type="none" w="med" len="med"/>
+                    </a:lnT>
+                    <a:lnB w="9525" cap="flat" cmpd="sng" algn="ctr">
+                      <a:solidFill>
+                        <a:srgbClr val="DADCE0"/>
+                      </a:solidFill>
+                      <a:prstDash val="solid"/>
+                      <a:round/>
+                      <a:headEnd type="none" w="med" len="med"/>
+                      <a:tailEnd type="none" w="med" len="med"/>
+                    </a:lnB>
+                    <a:solidFill>
+                      <a:srgbClr val="FFFFFF"/>
+                    </a:solidFill>
+                  </a:tcPr>
+                </a:tc>
+                <a:tc>
+                  <a:txBody>
+                    <a:bodyPr/>
+                    <a:lstStyle/>
+                    <a:p>
+                      <a:pPr indent="0" marL="0">
+                        <a:buNone/>
+                      </a:pPr>
+                      <a:r>
+                        <a:rPr lang="en-US" sz="760" dirty="0">
+                          <a:solidFill>
+                            <a:srgbClr val="5F6368"/>
+                          </a:solidFill>
+                          <a:latin typeface="Roboto" pitchFamily="34" charset="0"/>
+                          <a:ea typeface="Roboto" pitchFamily="34" charset="-122"/>
+                          <a:cs typeface="Roboto" pitchFamily="34" charset="-120"/>
+                        </a:rPr>
+                        <a:t>Dedicated CMEK AlloyDB instance + &lt;60s HTTP 423 Locked customer key kill-switch</a:t>
+                      </a:r>
+                      <a:endParaRPr lang="en-US" sz="760" dirty="0">
+                        <a:latin typeface="Roboto" charset="0"/>
+                        <a:ea typeface="Roboto" charset="0"/>
+                        <a:cs typeface="Roboto" charset="0"/>
+                      </a:endParaRPr>
+                    </a:p>
+                  </a:txBody>
+                  <a:tcPr marL="91440" marR="91440" marT="45720" marB="45720" anchor="ctr">
+                    <a:lnL w="9525" cap="flat" cmpd="sng" algn="ctr">
+                      <a:solidFill>
+                        <a:srgbClr val="DADCE0"/>
+                      </a:solidFill>
+                      <a:prstDash val="solid"/>
+                      <a:round/>
+                      <a:headEnd type="none" w="med" len="med"/>
+                      <a:tailEnd type="none" w="med" len="med"/>
+                    </a:lnL>
+                    <a:lnR w="9525" cap="flat" cmpd="sng" algn="ctr">
+                      <a:solidFill>
+                        <a:srgbClr val="DADCE0"/>
+                      </a:solidFill>
+                      <a:prstDash val="solid"/>
+                      <a:round/>
+                      <a:headEnd type="none" w="med" len="med"/>
+                      <a:tailEnd type="none" w="med" len="med"/>
+                    </a:lnR>
+                    <a:lnT w="9525" cap="flat" cmpd="sng" algn="ctr">
+                      <a:solidFill>
+                        <a:srgbClr val="DADCE0"/>
+                      </a:solidFill>
+                      <a:prstDash val="solid"/>
+                      <a:round/>
+                      <a:headEnd type="none" w="med" len="med"/>
+                      <a:tailEnd type="none" w="med" len="med"/>
+                    </a:lnT>
+                    <a:lnB w="9525" cap="flat" cmpd="sng" algn="ctr">
+                      <a:solidFill>
+                        <a:srgbClr val="DADCE0"/>
+                      </a:solidFill>
+                      <a:prstDash val="solid"/>
+                      <a:round/>
+                      <a:headEnd type="none" w="med" len="med"/>
+                      <a:tailEnd type="none" w="med" len="med"/>
+                    </a:lnB>
+                    <a:solidFill>
+                      <a:srgbClr val="FFFFFF"/>
+                    </a:solidFill>
+                  </a:tcPr>
+                </a:tc>
+              </a:tr>
+              <a:tr h="0">
+                <a:tc>
+                  <a:txBody>
+                    <a:bodyPr/>
+                    <a:lstStyle/>
+                    <a:p>
+                      <a:pPr indent="0" marL="0">
+                        <a:buNone/>
+                      </a:pPr>
+                      <a:r>
+                        <a:rPr lang="en-US" sz="780" b="1" dirty="0">
+                          <a:solidFill>
+                            <a:srgbClr val="3C4043"/>
+                          </a:solidFill>
+                          <a:latin typeface="Google Sans" pitchFamily="34" charset="0"/>
+                          <a:ea typeface="Google Sans" pitchFamily="34" charset="-122"/>
+                          <a:cs typeface="Google Sans" pitchFamily="34" charset="-120"/>
+                        </a:rPr>
+                        <a:t>Unit economics &amp; target tier</a:t>
+                      </a:r>
+                      <a:endParaRPr lang="en-US" sz="780" dirty="0">
+                        <a:latin typeface="Google Sans" charset="0"/>
+                        <a:ea typeface="Google Sans" charset="0"/>
+                        <a:cs typeface="Google Sans" charset="0"/>
+                      </a:endParaRPr>
+                    </a:p>
+                  </a:txBody>
+                  <a:tcPr marL="91440" marR="91440" marT="45720" marB="45720" anchor="ctr">
+                    <a:lnL w="9525" cap="flat" cmpd="sng" algn="ctr">
+                      <a:solidFill>
+                        <a:srgbClr val="DADCE0"/>
+                      </a:solidFill>
+                      <a:prstDash val="solid"/>
+                      <a:round/>
+                      <a:headEnd type="none" w="med" len="med"/>
+                      <a:tailEnd type="none" w="med" len="med"/>
+                    </a:lnL>
+                    <a:lnR w="9525" cap="flat" cmpd="sng" algn="ctr">
+                      <a:solidFill>
+                        <a:srgbClr val="DADCE0"/>
+                      </a:solidFill>
+                      <a:prstDash val="solid"/>
+                      <a:round/>
+                      <a:headEnd type="none" w="med" len="med"/>
+                      <a:tailEnd type="none" w="med" len="med"/>
+                    </a:lnR>
+                    <a:lnT w="9525" cap="flat" cmpd="sng" algn="ctr">
+                      <a:solidFill>
+                        <a:srgbClr val="DADCE0"/>
+                      </a:solidFill>
+                      <a:prstDash val="solid"/>
+                      <a:round/>
+                      <a:headEnd type="none" w="med" len="med"/>
+                      <a:tailEnd type="none" w="med" len="med"/>
+                    </a:lnT>
+                    <a:lnB w="9525" cap="flat" cmpd="sng" algn="ctr">
+                      <a:solidFill>
+                        <a:srgbClr val="DADCE0"/>
+                      </a:solidFill>
+                      <a:prstDash val="solid"/>
+                      <a:round/>
+                      <a:headEnd type="none" w="med" len="med"/>
+                      <a:tailEnd type="none" w="med" len="med"/>
+                    </a:lnB>
+                    <a:solidFill>
+                      <a:srgbClr val="F8F9FA"/>
+                    </a:solidFill>
+                  </a:tcPr>
+                </a:tc>
+                <a:tc>
+                  <a:txBody>
+                    <a:bodyPr/>
+                    <a:lstStyle/>
+                    <a:p>
+                      <a:pPr indent="0" marL="0">
+                        <a:buNone/>
+                      </a:pPr>
+                      <a:r>
+                        <a:rPr lang="en-US" sz="760" dirty="0">
+                          <a:solidFill>
+                            <a:srgbClr val="5F6368"/>
+                          </a:solidFill>
+                          <a:latin typeface="Roboto" pitchFamily="34" charset="0"/>
+                          <a:ea typeface="Roboto" pitchFamily="34" charset="-122"/>
+                          <a:cs typeface="Roboto" pitchFamily="34" charset="-120"/>
+                        </a:rPr>
+                        <a:t>High breach risk • Fails enterprise CISO security &amp; compliance review</a:t>
+                      </a:r>
+                      <a:endParaRPr lang="en-US" sz="760" dirty="0">
+                        <a:latin typeface="Roboto" charset="0"/>
+                        <a:ea typeface="Roboto" charset="0"/>
+                        <a:cs typeface="Roboto" charset="0"/>
+                      </a:endParaRPr>
+                    </a:p>
+                  </a:txBody>
+                  <a:tcPr marL="91440" marR="91440" marT="45720" marB="45720" anchor="ctr">
+                    <a:lnL w="9525" cap="flat" cmpd="sng" algn="ctr">
+                      <a:solidFill>
+                        <a:srgbClr val="DADCE0"/>
+                      </a:solidFill>
+                      <a:prstDash val="solid"/>
+                      <a:round/>
+                      <a:headEnd type="none" w="med" len="med"/>
+                      <a:tailEnd type="none" w="med" len="med"/>
+                    </a:lnL>
+                    <a:lnR w="9525" cap="flat" cmpd="sng" algn="ctr">
+                      <a:solidFill>
+                        <a:srgbClr val="DADCE0"/>
+                      </a:solidFill>
+                      <a:prstDash val="solid"/>
+                      <a:round/>
+                      <a:headEnd type="none" w="med" len="med"/>
+                      <a:tailEnd type="none" w="med" len="med"/>
+                    </a:lnR>
+                    <a:lnT w="9525" cap="flat" cmpd="sng" algn="ctr">
+                      <a:solidFill>
+                        <a:srgbClr val="DADCE0"/>
+                      </a:solidFill>
+                      <a:prstDash val="solid"/>
+                      <a:round/>
+                      <a:headEnd type="none" w="med" len="med"/>
+                      <a:tailEnd type="none" w="med" len="med"/>
+                    </a:lnT>
+                    <a:lnB w="9525" cap="flat" cmpd="sng" algn="ctr">
+                      <a:solidFill>
+                        <a:srgbClr val="DADCE0"/>
+                      </a:solidFill>
+                      <a:prstDash val="solid"/>
+                      <a:round/>
+                      <a:headEnd type="none" w="med" len="med"/>
+                      <a:tailEnd type="none" w="med" len="med"/>
+                    </a:lnB>
+                    <a:solidFill>
+                      <a:srgbClr val="F8F9FA"/>
+                    </a:solidFill>
+                  </a:tcPr>
+                </a:tc>
+                <a:tc>
+                  <a:txBody>
+                    <a:bodyPr/>
+                    <a:lstStyle/>
+                    <a:p>
+                      <a:pPr indent="0" marL="0">
+                        <a:buNone/>
+                      </a:pPr>
+                      <a:r>
+                        <a:rPr lang="en-US" sz="760" dirty="0">
+                          <a:solidFill>
+                            <a:srgbClr val="5F6368"/>
+                          </a:solidFill>
+                          <a:latin typeface="Roboto" pitchFamily="34" charset="0"/>
+                          <a:ea typeface="Roboto" pitchFamily="34" charset="-122"/>
+                          <a:cs typeface="Roboto" pitchFamily="34" charset="-120"/>
+                        </a:rPr>
+                        <a:t>$42 / tenant / month • High-volume commercial B2B SaaS (10/10 breach tests PASS)</a:t>
+                      </a:r>
+                      <a:endParaRPr lang="en-US" sz="760" dirty="0">
+                        <a:latin typeface="Roboto" charset="0"/>
+                        <a:ea typeface="Roboto" charset="0"/>
+                        <a:cs typeface="Roboto" charset="0"/>
+                      </a:endParaRPr>
+                    </a:p>
+                  </a:txBody>
+                  <a:tcPr marL="91440" marR="91440" marT="45720" marB="45720" anchor="ctr">
+                    <a:lnL w="9525" cap="flat" cmpd="sng" algn="ctr">
+                      <a:solidFill>
+                        <a:srgbClr val="DADCE0"/>
+                      </a:solidFill>
+                      <a:prstDash val="solid"/>
+                      <a:round/>
+                      <a:headEnd type="none" w="med" len="med"/>
+                      <a:tailEnd type="none" w="med" len="med"/>
+                    </a:lnL>
+                    <a:lnR w="9525" cap="flat" cmpd="sng" algn="ctr">
+                      <a:solidFill>
+                        <a:srgbClr val="DADCE0"/>
+                      </a:solidFill>
+                      <a:prstDash val="solid"/>
+                      <a:round/>
+                      <a:headEnd type="none" w="med" len="med"/>
+                      <a:tailEnd type="none" w="med" len="med"/>
+                    </a:lnR>
+                    <a:lnT w="9525" cap="flat" cmpd="sng" algn="ctr">
+                      <a:solidFill>
+                        <a:srgbClr val="DADCE0"/>
+                      </a:solidFill>
+                      <a:prstDash val="solid"/>
+                      <a:round/>
+                      <a:headEnd type="none" w="med" len="med"/>
+                      <a:tailEnd type="none" w="med" len="med"/>
+                    </a:lnT>
+                    <a:lnB w="9525" cap="flat" cmpd="sng" algn="ctr">
+                      <a:solidFill>
+                        <a:srgbClr val="DADCE0"/>
+                      </a:solidFill>
+                      <a:prstDash val="solid"/>
+                      <a:round/>
+                      <a:headEnd type="none" w="med" len="med"/>
+                      <a:tailEnd type="none" w="med" len="med"/>
+                    </a:lnB>
+                    <a:solidFill>
+                      <a:srgbClr val="F8F9FA"/>
+                    </a:solidFill>
+                  </a:tcPr>
+                </a:tc>
+                <a:tc>
+                  <a:txBody>
+                    <a:bodyPr/>
+                    <a:lstStyle/>
+                    <a:p>
+                      <a:pPr indent="0" marL="0">
+                        <a:buNone/>
+                      </a:pPr>
+                      <a:r>
+                        <a:rPr lang="en-US" sz="760" b="1" dirty="0">
+                          <a:solidFill>
+                            <a:srgbClr val="0D652D"/>
+                          </a:solidFill>
+                          <a:latin typeface="Roboto" pitchFamily="34" charset="0"/>
+                          <a:ea typeface="Roboto" pitchFamily="34" charset="-122"/>
+                          <a:cs typeface="Roboto" pitchFamily="34" charset="-120"/>
+                        </a:rPr>
+                        <a:t>$1,850 / tenant / month • Regulated Banking, Healthcare &amp; Public Sector (6/6 PASS)</a:t>
+                      </a:r>
+                      <a:endParaRPr lang="en-US" sz="760" dirty="0">
+                        <a:latin typeface="Roboto" charset="0"/>
+                        <a:ea typeface="Roboto" charset="0"/>
+                        <a:cs typeface="Roboto" charset="0"/>
+                      </a:endParaRPr>
+                    </a:p>
+                  </a:txBody>
+                  <a:tcPr marL="91440" marR="91440" marT="45720" marB="45720" anchor="ctr">
+                    <a:lnL w="9525" cap="flat" cmpd="sng" algn="ctr">
+                      <a:solidFill>
+                        <a:srgbClr val="DADCE0"/>
+                      </a:solidFill>
+                      <a:prstDash val="solid"/>
+                      <a:round/>
+                      <a:headEnd type="none" w="med" len="med"/>
+                      <a:tailEnd type="none" w="med" len="med"/>
+                    </a:lnL>
+                    <a:lnR w="9525" cap="flat" cmpd="sng" algn="ctr">
+                      <a:solidFill>
+                        <a:srgbClr val="DADCE0"/>
+                      </a:solidFill>
+                      <a:prstDash val="solid"/>
+                      <a:round/>
+                      <a:headEnd type="none" w="med" len="med"/>
+                      <a:tailEnd type="none" w="med" len="med"/>
+                    </a:lnR>
+                    <a:lnT w="9525" cap="flat" cmpd="sng" algn="ctr">
+                      <a:solidFill>
+                        <a:srgbClr val="DADCE0"/>
+                      </a:solidFill>
+                      <a:prstDash val="solid"/>
+                      <a:round/>
+                      <a:headEnd type="none" w="med" len="med"/>
+                      <a:tailEnd type="none" w="med" len="med"/>
+                    </a:lnT>
+                    <a:lnB w="9525" cap="flat" cmpd="sng" algn="ctr">
+                      <a:solidFill>
+                        <a:srgbClr val="DADCE0"/>
+                      </a:solidFill>
+                      <a:prstDash val="solid"/>
+                      <a:round/>
+                      <a:headEnd type="none" w="med" len="med"/>
+                      <a:tailEnd type="none" w="med" len="med"/>
+                    </a:lnB>
+                    <a:solidFill>
+                      <a:srgbClr val="F8F9FA"/>
+                    </a:solidFill>
+                  </a:tcPr>
+                </a:tc>
+              </a:tr>
+            </a:tbl>
+          </a:graphicData>
+        </a:graphic>
+      </p:graphicFrame>
+      <p:sp>
+        <p:nvSpPr>
+          <p:cNvPr id="20" name="Shape 17"/>
+          <p:cNvSpPr/>
+          <p:nvPr/>
+        </p:nvSpPr>
+        <p:spPr>
+          <a:xfrm>
+            <a:off x="411480" y="4663440"/>
+            <a:ext cx="2718511" cy="1408176"/>
           </a:xfrm>
           <a:prstGeom prst="roundRect">
             <a:avLst>
-              <a:gd name="adj" fmla="val 3239"/>
+              <a:gd name="adj" fmla="val 5195"/>
             </a:avLst>
           </a:prstGeom>
           <a:solidFill>
@@ -19485,14 +21432,14 @@
       </p:sp>
       <p:sp>
         <p:nvSpPr>
-          <p:cNvPr id="20" name="Shape 18"/>
-          <p:cNvSpPr/>
-          <p:nvPr/>
-        </p:nvSpPr>
-        <p:spPr>
-          <a:xfrm>
-            <a:off x="411480" y="1353312"/>
-            <a:ext cx="5583326" cy="59436"/>
+          <p:cNvPr id="21" name="Shape 18"/>
+          <p:cNvSpPr/>
+          <p:nvPr/>
+        </p:nvSpPr>
+        <p:spPr>
+          <a:xfrm>
+            <a:off x="411480" y="4663440"/>
+            <a:ext cx="2718511" cy="50292"/>
           </a:xfrm>
           <a:prstGeom prst="rect">
             <a:avLst/>
@@ -19505,150 +21452,73 @@
       </p:sp>
       <p:sp>
         <p:nvSpPr>
-          <p:cNvPr id="21" name="Shape 19"/>
-          <p:cNvSpPr/>
-          <p:nvPr/>
-        </p:nvSpPr>
-        <p:spPr>
-          <a:xfrm>
-            <a:off x="557784" y="1481328"/>
-            <a:ext cx="365760" cy="256032"/>
-          </a:xfrm>
-          <a:prstGeom prst="roundRect">
-            <a:avLst>
-              <a:gd name="adj" fmla="val 21429"/>
-            </a:avLst>
-          </a:prstGeom>
-          <a:solidFill>
-            <a:srgbClr val="E8F0FE"/>
-          </a:solidFill>
-          <a:ln/>
-        </p:spPr>
-      </p:sp>
-      <p:sp>
-        <p:nvSpPr>
-          <p:cNvPr id="22" name="Text 20"/>
-          <p:cNvSpPr/>
-          <p:nvPr/>
-        </p:nvSpPr>
-        <p:spPr>
-          <a:xfrm>
-            <a:off x="557784" y="1481328"/>
-            <a:ext cx="365760" cy="256032"/>
-          </a:xfrm>
-          <a:prstGeom prst="rect">
-            <a:avLst/>
-          </a:prstGeom>
-          <a:noFill/>
-          <a:ln/>
-        </p:spPr>
-        <p:txBody>
-          <a:bodyPr wrap="square" rtlCol="0" anchor="ctr"/>
-          <a:lstStyle/>
-          <a:p>
-            <a:pPr algn="ctr" indent="0" marL="0">
-              <a:buNone/>
-            </a:pPr>
-            <a:r>
-              <a:rPr lang="en-US" sz="920" b="1" dirty="0">
-                <a:solidFill>
-                  <a:srgbClr val="174EA6"/>
+          <p:cNvPr id="22" name="Text 19"/>
+          <p:cNvSpPr/>
+          <p:nvPr/>
+        </p:nvSpPr>
+        <p:spPr>
+          <a:xfrm>
+            <a:off x="521208" y="4736592"/>
+            <a:ext cx="2499055" cy="256032"/>
+          </a:xfrm>
+          <a:prstGeom prst="rect">
+            <a:avLst/>
+          </a:prstGeom>
+          <a:noFill/>
+          <a:ln/>
+        </p:spPr>
+        <p:txBody>
+          <a:bodyPr wrap="square" rtlCol="0" anchor="ctr">
+            <a:normAutofit/>
+          </a:bodyPr>
+          <a:lstStyle/>
+          <a:p>
+            <a:pPr indent="0" marL="0">
+              <a:buNone/>
+            </a:pPr>
+            <a:r>
+              <a:rPr lang="en-US" sz="760" b="1" dirty="0">
+                <a:solidFill>
+                  <a:srgbClr val="3C4043"/>
                 </a:solidFill>
                 <a:latin typeface="Google Sans" pitchFamily="34" charset="0"/>
                 <a:ea typeface="Google Sans" pitchFamily="34" charset="-122"/>
                 <a:cs typeface="Google Sans" pitchFamily="34" charset="-120"/>
               </a:rPr>
-              <a:t>01</a:t>
-            </a:r>
-            <a:endParaRPr lang="en-US" sz="920" dirty="0"/>
-          </a:p>
-        </p:txBody>
-      </p:sp>
-      <p:sp>
-        <p:nvSpPr>
-          <p:cNvPr id="23" name="Text 21"/>
-          <p:cNvSpPr/>
-          <p:nvPr/>
-        </p:nvSpPr>
-        <p:spPr>
-          <a:xfrm>
-            <a:off x="996696" y="1463040"/>
-            <a:ext cx="4851806" cy="329184"/>
-          </a:xfrm>
-          <a:prstGeom prst="rect">
-            <a:avLst/>
-          </a:prstGeom>
-          <a:noFill/>
-          <a:ln/>
-        </p:spPr>
-        <p:txBody>
-          <a:bodyPr wrap="square" rtlCol="0" anchor="ctr"/>
+              <a:t>1. Why Naive Shared SaaS Fails Audits</a:t>
+            </a:r>
+            <a:endParaRPr lang="en-US" sz="760" dirty="0"/>
+          </a:p>
+        </p:txBody>
+      </p:sp>
+      <p:sp>
+        <p:nvSpPr>
+          <p:cNvPr id="23" name="Text 20"/>
+          <p:cNvSpPr/>
+          <p:nvPr/>
+        </p:nvSpPr>
+        <p:spPr>
+          <a:xfrm>
+            <a:off x="521208" y="4992624"/>
+            <a:ext cx="2499055" cy="1024128"/>
+          </a:xfrm>
+          <a:prstGeom prst="rect">
+            <a:avLst/>
+          </a:prstGeom>
+          <a:noFill/>
+          <a:ln/>
+        </p:spPr>
+        <p:txBody>
+          <a:bodyPr wrap="square" rtlCol="0" anchor="t">
+            <a:normAutofit/>
+          </a:bodyPr>
           <a:lstStyle/>
           <a:p>
             <a:pPr indent="0" marL="0">
               <a:buNone/>
             </a:pPr>
             <a:r>
-              <a:rPr lang="en-US" sz="1140" b="1" dirty="0">
-                <a:solidFill>
-                  <a:srgbClr val="3C4043"/>
-                </a:solidFill>
-                <a:latin typeface="Google Sans" pitchFamily="34" charset="0"/>
-                <a:ea typeface="Google Sans" pitchFamily="34" charset="-122"/>
-                <a:cs typeface="Google Sans" pitchFamily="34" charset="-120"/>
-              </a:rPr>
-              <a:t>Agentic AI &amp; Shared Prefix Caching</a:t>
-            </a:r>
-            <a:endParaRPr lang="en-US" sz="1140" dirty="0"/>
-          </a:p>
-        </p:txBody>
-      </p:sp>
-      <p:sp>
-        <p:nvSpPr>
-          <p:cNvPr id="24" name="Shape 22"/>
-          <p:cNvSpPr/>
-          <p:nvPr/>
-        </p:nvSpPr>
-        <p:spPr>
-          <a:xfrm>
-            <a:off x="557784" y="1847088"/>
-            <a:ext cx="5290718" cy="9144"/>
-          </a:xfrm>
-          <a:prstGeom prst="rect">
-            <a:avLst/>
-          </a:prstGeom>
-          <a:solidFill>
-            <a:srgbClr val="DADCE0"/>
-          </a:solidFill>
-          <a:ln/>
-        </p:spPr>
-      </p:sp>
-      <p:sp>
-        <p:nvSpPr>
-          <p:cNvPr id="25" name="Text 23"/>
-          <p:cNvSpPr/>
-          <p:nvPr/>
-        </p:nvSpPr>
-        <p:spPr>
-          <a:xfrm>
-            <a:off x="557784" y="1901952"/>
-            <a:ext cx="5290718" cy="850392"/>
-          </a:xfrm>
-          <a:prstGeom prst="rect">
-            <a:avLst/>
-          </a:prstGeom>
-          <a:noFill/>
-          <a:ln/>
-        </p:spPr>
-        <p:txBody>
-          <a:bodyPr wrap="square" rtlCol="0" anchor="t"/>
-          <a:lstStyle/>
-          <a:p>
-            <a:pPr indent="0" marL="0">
-              <a:buNone/>
-            </a:pPr>
-            <a:r>
-              <a:rPr lang="en-US" sz="980" dirty="0">
+              <a:rPr lang="en-US" sz="740" dirty="0">
                 <a:solidFill>
                   <a:srgbClr val="5F6368"/>
                 </a:solidFill>
@@ -19656,188 +21526,26 @@
                 <a:ea typeface="Roboto" pitchFamily="34" charset="-122"/>
                 <a:cs typeface="Roboto" pitchFamily="34" charset="-120"/>
               </a:rPr>
-              <a:t>Vertex AI Agent Engine (ADK 2.0 runtime, Agent Registry &amp; L1–L5 Memory Bank) and Gemini 2.5 Pro with ContextCacheConfig caching a 32,000-token immutable system prefix at a 90% discount (84.7% net token savings).</a:t>
-            </a:r>
-            <a:endParaRPr lang="en-US" sz="980" dirty="0"/>
-          </a:p>
-        </p:txBody>
-      </p:sp>
-      <p:sp>
-        <p:nvSpPr>
-          <p:cNvPr id="26" name="Shape 24"/>
-          <p:cNvSpPr/>
-          <p:nvPr/>
-        </p:nvSpPr>
-        <p:spPr>
-          <a:xfrm>
-            <a:off x="557784" y="2788920"/>
-            <a:ext cx="5290718" cy="493776"/>
+              <a:t>Ambient IAM service accounts, client-trusted X-Tenant-Id headers, and unpartitioned vector/SQL stores fail every red-team isolation test.</a:t>
+            </a:r>
+            <a:endParaRPr lang="en-US" sz="740" dirty="0"/>
+          </a:p>
+        </p:txBody>
+      </p:sp>
+      <p:sp>
+        <p:nvSpPr>
+          <p:cNvPr id="24" name="Shape 21"/>
+          <p:cNvSpPr/>
+          <p:nvPr/>
+        </p:nvSpPr>
+        <p:spPr>
+          <a:xfrm>
+            <a:off x="3294583" y="4663440"/>
+            <a:ext cx="2718511" cy="1408176"/>
           </a:xfrm>
           <a:prstGeom prst="roundRect">
             <a:avLst>
-              <a:gd name="adj" fmla="val 11111"/>
-            </a:avLst>
-          </a:prstGeom>
-          <a:solidFill>
-            <a:srgbClr val="FFFFFF"/>
-          </a:solidFill>
-          <a:ln w="9525">
-            <a:solidFill>
-              <a:srgbClr val="DADCE0"/>
-            </a:solidFill>
-            <a:prstDash val="solid"/>
-          </a:ln>
-        </p:spPr>
-      </p:sp>
-      <p:sp>
-        <p:nvSpPr>
-          <p:cNvPr id="27" name="Shape 25"/>
-          <p:cNvSpPr/>
-          <p:nvPr/>
-        </p:nvSpPr>
-        <p:spPr>
-          <a:xfrm>
-            <a:off x="557784" y="2788920"/>
-            <a:ext cx="54864" cy="493776"/>
-          </a:xfrm>
-          <a:prstGeom prst="rect">
-            <a:avLst/>
-          </a:prstGeom>
-          <a:solidFill>
-            <a:srgbClr val="4285F4"/>
-          </a:solidFill>
-          <a:ln/>
-        </p:spPr>
-      </p:sp>
-      <p:sp>
-        <p:nvSpPr>
-          <p:cNvPr id="28" name="Text 26"/>
-          <p:cNvSpPr/>
-          <p:nvPr/>
-        </p:nvSpPr>
-        <p:spPr>
-          <a:xfrm>
-            <a:off x="649224" y="2816352"/>
-            <a:ext cx="5162702" cy="438912"/>
-          </a:xfrm>
-          <a:prstGeom prst="rect">
-            <a:avLst/>
-          </a:prstGeom>
-          <a:noFill/>
-          <a:ln/>
-        </p:spPr>
-        <p:txBody>
-          <a:bodyPr wrap="square" rtlCol="0" anchor="ctr"/>
-          <a:lstStyle/>
-          <a:p>
-            <a:pPr indent="0" marL="0">
-              <a:buNone/>
-            </a:pPr>
-            <a:r>
-              <a:rPr lang="en-US" sz="750" b="1" dirty="0">
-                <a:solidFill>
-                  <a:srgbClr val="3C4043"/>
-                </a:solidFill>
-                <a:latin typeface="Google Sans" pitchFamily="34" charset="0"/>
-                <a:ea typeface="Google Sans" pitchFamily="34" charset="-122"/>
-                <a:cs typeface="Google Sans" pitchFamily="34" charset="-120"/>
-              </a:rPr>
-              <a:t>Cloud Stack: Vertex AI Agent Engine (ADK 2.0) • Gemini 2.5 Pro ContextCacheConfig (32k Shared System Prefix)
-</a:t>
-            </a:r>
-            <a:pPr indent="0" marL="0">
-              <a:buNone/>
-            </a:pPr>
-            <a:r>
-              <a:rPr lang="en-US" sz="730" dirty="0">
-                <a:solidFill>
-                  <a:srgbClr val="5F6368"/>
-                </a:solidFill>
-                <a:latin typeface="Roboto" pitchFamily="34" charset="0"/>
-                <a:ea typeface="Roboto" pitchFamily="34" charset="-122"/>
-                <a:cs typeface="Roboto" pitchFamily="34" charset="-120"/>
-              </a:rPr>
-              <a:t>Target &amp; SLA: 90% Cached Input Token Discount • Cuts Billable Input Tokens from 34,000 to 5,200/Turn (84.7% Savings)</a:t>
-            </a:r>
-            <a:endParaRPr lang="en-US" sz="750" dirty="0"/>
-          </a:p>
-        </p:txBody>
-      </p:sp>
-      <p:sp>
-        <p:nvSpPr>
-          <p:cNvPr id="29" name="Shape 27"/>
-          <p:cNvSpPr/>
-          <p:nvPr/>
-        </p:nvSpPr>
-        <p:spPr>
-          <a:xfrm>
-            <a:off x="557784" y="3337560"/>
-            <a:ext cx="5290718" cy="219456"/>
-          </a:xfrm>
-          <a:prstGeom prst="roundRect">
-            <a:avLst>
-              <a:gd name="adj" fmla="val 20833"/>
-            </a:avLst>
-          </a:prstGeom>
-          <a:solidFill>
-            <a:srgbClr val="E8F0FE"/>
-          </a:solidFill>
-          <a:ln/>
-        </p:spPr>
-      </p:sp>
-      <p:sp>
-        <p:nvSpPr>
-          <p:cNvPr id="30" name="Text 28"/>
-          <p:cNvSpPr/>
-          <p:nvPr/>
-        </p:nvSpPr>
-        <p:spPr>
-          <a:xfrm>
-            <a:off x="612648" y="3337560"/>
-            <a:ext cx="5180990" cy="219456"/>
-          </a:xfrm>
-          <a:prstGeom prst="rect">
-            <a:avLst/>
-          </a:prstGeom>
-          <a:noFill/>
-          <a:ln/>
-        </p:spPr>
-        <p:txBody>
-          <a:bodyPr wrap="square" rtlCol="0" anchor="ctr"/>
-          <a:lstStyle/>
-          <a:p>
-            <a:pPr indent="0" marL="0">
-              <a:buNone/>
-            </a:pPr>
-            <a:r>
-              <a:rPr lang="en-US" sz="750" b="1" dirty="0">
-                <a:solidFill>
-                  <a:srgbClr val="174EA6"/>
-                </a:solidFill>
-                <a:latin typeface="Google Sans" pitchFamily="34" charset="0"/>
-                <a:ea typeface="Google Sans" pitchFamily="34" charset="-122"/>
-                <a:cs typeface="Google Sans" pitchFamily="34" charset="-120"/>
-              </a:rPr>
-              <a:t>1. Agentic AI &amp; Prefix Cache</a:t>
-            </a:r>
-            <a:endParaRPr lang="en-US" sz="750" dirty="0"/>
-          </a:p>
-        </p:txBody>
-      </p:sp>
-      <p:sp>
-        <p:nvSpPr>
-          <p:cNvPr id="31" name="Shape 29"/>
-          <p:cNvSpPr/>
-          <p:nvPr/>
-        </p:nvSpPr>
-        <p:spPr>
-          <a:xfrm>
-            <a:off x="6195974" y="1353312"/>
-            <a:ext cx="5583326" cy="2258568"/>
-          </a:xfrm>
-          <a:prstGeom prst="roundRect">
-            <a:avLst>
-              <a:gd name="adj" fmla="val 3239"/>
+              <a:gd name="adj" fmla="val 5195"/>
             </a:avLst>
           </a:prstGeom>
           <a:solidFill>
@@ -19853,14 +21561,14 @@
       </p:sp>
       <p:sp>
         <p:nvSpPr>
-          <p:cNvPr id="32" name="Shape 30"/>
-          <p:cNvSpPr/>
-          <p:nvPr/>
-        </p:nvSpPr>
-        <p:spPr>
-          <a:xfrm>
-            <a:off x="6195974" y="1353312"/>
-            <a:ext cx="5583326" cy="59436"/>
+          <p:cNvPr id="25" name="Shape 22"/>
+          <p:cNvSpPr/>
+          <p:nvPr/>
+        </p:nvSpPr>
+        <p:spPr>
+          <a:xfrm>
+            <a:off x="3294583" y="4663440"/>
+            <a:ext cx="2718511" cy="50292"/>
           </a:xfrm>
           <a:prstGeom prst="rect">
             <a:avLst/>
@@ -19873,150 +21581,73 @@
       </p:sp>
       <p:sp>
         <p:nvSpPr>
-          <p:cNvPr id="33" name="Shape 31"/>
-          <p:cNvSpPr/>
-          <p:nvPr/>
-        </p:nvSpPr>
-        <p:spPr>
-          <a:xfrm>
-            <a:off x="6342278" y="1481328"/>
-            <a:ext cx="365760" cy="256032"/>
-          </a:xfrm>
-          <a:prstGeom prst="roundRect">
-            <a:avLst>
-              <a:gd name="adj" fmla="val 21429"/>
-            </a:avLst>
-          </a:prstGeom>
-          <a:solidFill>
-            <a:srgbClr val="FCE8E6"/>
-          </a:solidFill>
-          <a:ln/>
-        </p:spPr>
-      </p:sp>
-      <p:sp>
-        <p:nvSpPr>
-          <p:cNvPr id="34" name="Text 32"/>
-          <p:cNvSpPr/>
-          <p:nvPr/>
-        </p:nvSpPr>
-        <p:spPr>
-          <a:xfrm>
-            <a:off x="6342278" y="1481328"/>
-            <a:ext cx="365760" cy="256032"/>
-          </a:xfrm>
-          <a:prstGeom prst="rect">
-            <a:avLst/>
-          </a:prstGeom>
-          <a:noFill/>
-          <a:ln/>
-        </p:spPr>
-        <p:txBody>
-          <a:bodyPr wrap="square" rtlCol="0" anchor="ctr"/>
-          <a:lstStyle/>
-          <a:p>
-            <a:pPr algn="ctr" indent="0" marL="0">
-              <a:buNone/>
-            </a:pPr>
-            <a:r>
-              <a:rPr lang="en-US" sz="920" b="1" dirty="0">
-                <a:solidFill>
-                  <a:srgbClr val="A50E0E"/>
+          <p:cNvPr id="26" name="Text 23"/>
+          <p:cNvSpPr/>
+          <p:nvPr/>
+        </p:nvSpPr>
+        <p:spPr>
+          <a:xfrm>
+            <a:off x="3404311" y="4736592"/>
+            <a:ext cx="2499055" cy="256032"/>
+          </a:xfrm>
+          <a:prstGeom prst="rect">
+            <a:avLst/>
+          </a:prstGeom>
+          <a:noFill/>
+          <a:ln/>
+        </p:spPr>
+        <p:txBody>
+          <a:bodyPr wrap="square" rtlCol="0" anchor="ctr">
+            <a:normAutofit/>
+          </a:bodyPr>
+          <a:lstStyle/>
+          <a:p>
+            <a:pPr indent="0" marL="0">
+              <a:buNone/>
+            </a:pPr>
+            <a:r>
+              <a:rPr lang="en-US" sz="760" b="1" dirty="0">
+                <a:solidFill>
+                  <a:srgbClr val="3C4043"/>
                 </a:solidFill>
                 <a:latin typeface="Google Sans" pitchFamily="34" charset="0"/>
                 <a:ea typeface="Google Sans" pitchFamily="34" charset="-122"/>
                 <a:cs typeface="Google Sans" pitchFamily="34" charset="-120"/>
               </a:rPr>
-              <a:t>02</a:t>
-            </a:r>
-            <a:endParaRPr lang="en-US" sz="920" dirty="0"/>
-          </a:p>
-        </p:txBody>
-      </p:sp>
-      <p:sp>
-        <p:nvSpPr>
-          <p:cNvPr id="35" name="Text 33"/>
-          <p:cNvSpPr/>
-          <p:nvPr/>
-        </p:nvSpPr>
-        <p:spPr>
-          <a:xfrm>
-            <a:off x="6781190" y="1463040"/>
-            <a:ext cx="4851806" cy="329184"/>
-          </a:xfrm>
-          <a:prstGeom prst="rect">
-            <a:avLst/>
-          </a:prstGeom>
-          <a:noFill/>
-          <a:ln/>
-        </p:spPr>
-        <p:txBody>
-          <a:bodyPr wrap="square" rtlCol="0" anchor="ctr"/>
+              <a:t>2. Why Pattern A Wins on Unit Economics</a:t>
+            </a:r>
+            <a:endParaRPr lang="en-US" sz="760" dirty="0"/>
+          </a:p>
+        </p:txBody>
+      </p:sp>
+      <p:sp>
+        <p:nvSpPr>
+          <p:cNvPr id="27" name="Text 24"/>
+          <p:cNvSpPr/>
+          <p:nvPr/>
+        </p:nvSpPr>
+        <p:spPr>
+          <a:xfrm>
+            <a:off x="3404311" y="4992624"/>
+            <a:ext cx="2499055" cy="1024128"/>
+          </a:xfrm>
+          <a:prstGeom prst="rect">
+            <a:avLst/>
+          </a:prstGeom>
+          <a:noFill/>
+          <a:ln/>
+        </p:spPr>
+        <p:txBody>
+          <a:bodyPr wrap="square" rtlCol="0" anchor="t">
+            <a:normAutofit/>
+          </a:bodyPr>
           <a:lstStyle/>
           <a:p>
             <a:pPr indent="0" marL="0">
               <a:buNone/>
             </a:pPr>
             <a:r>
-              <a:rPr lang="en-US" sz="1140" b="1" dirty="0">
-                <a:solidFill>
-                  <a:srgbClr val="3C4043"/>
-                </a:solidFill>
-                <a:latin typeface="Google Sans" pitchFamily="34" charset="0"/>
-                <a:ea typeface="Google Sans" pitchFamily="34" charset="-122"/>
-                <a:cs typeface="Google Sans" pitchFamily="34" charset="-120"/>
-              </a:rPr>
-              <a:t>Ingress, Identity &amp; Bidirectional AI Safety</a:t>
-            </a:r>
-            <a:endParaRPr lang="en-US" sz="1140" dirty="0"/>
-          </a:p>
-        </p:txBody>
-      </p:sp>
-      <p:sp>
-        <p:nvSpPr>
-          <p:cNvPr id="36" name="Shape 34"/>
-          <p:cNvSpPr/>
-          <p:nvPr/>
-        </p:nvSpPr>
-        <p:spPr>
-          <a:xfrm>
-            <a:off x="6342278" y="1847088"/>
-            <a:ext cx="5290718" cy="9144"/>
-          </a:xfrm>
-          <a:prstGeom prst="rect">
-            <a:avLst/>
-          </a:prstGeom>
-          <a:solidFill>
-            <a:srgbClr val="DADCE0"/>
-          </a:solidFill>
-          <a:ln/>
-        </p:spPr>
-      </p:sp>
-      <p:sp>
-        <p:nvSpPr>
-          <p:cNvPr id="37" name="Text 35"/>
-          <p:cNvSpPr/>
-          <p:nvPr/>
-        </p:nvSpPr>
-        <p:spPr>
-          <a:xfrm>
-            <a:off x="6342278" y="1901952"/>
-            <a:ext cx="5290718" cy="850392"/>
-          </a:xfrm>
-          <a:prstGeom prst="rect">
-            <a:avLst/>
-          </a:prstGeom>
-          <a:noFill/>
-          <a:ln/>
-        </p:spPr>
-        <p:txBody>
-          <a:bodyPr wrap="square" rtlCol="0" anchor="t"/>
-          <a:lstStyle/>
-          <a:p>
-            <a:pPr indent="0" marL="0">
-              <a:buNone/>
-            </a:pPr>
-            <a:r>
-              <a:rPr lang="en-US" sz="980" dirty="0">
+              <a:rPr lang="en-US" sz="740" dirty="0">
                 <a:solidFill>
                   <a:srgbClr val="5F6368"/>
                 </a:solidFill>
@@ -20024,188 +21655,26 @@
                 <a:ea typeface="Roboto" pitchFamily="34" charset="-122"/>
                 <a:cs typeface="Roboto" pitchFamily="34" charset="-120"/>
               </a:rPr>
-              <a:t>Global External Application Load Balancer, Google Cloud Armor L7 WAF (stripping spoofed X-Tenant-Id headers), IAP + IAM STS (RFC 8693 OBO + RFC 9449 DPoP), Vertex AI Model Armor, and Cloud Sensitive Data Protection.</a:t>
-            </a:r>
-            <a:endParaRPr lang="en-US" sz="980" dirty="0"/>
-          </a:p>
-        </p:txBody>
-      </p:sp>
-      <p:sp>
-        <p:nvSpPr>
-          <p:cNvPr id="38" name="Shape 36"/>
-          <p:cNvSpPr/>
-          <p:nvPr/>
-        </p:nvSpPr>
-        <p:spPr>
-          <a:xfrm>
-            <a:off x="6342278" y="2788920"/>
-            <a:ext cx="5290718" cy="493776"/>
+              <a:t>Delivers a $42/mo baseline per tenant and 90% shared 32k prefix cache savings (84.7% turn COGS reduction) inside one GCP project.</a:t>
+            </a:r>
+            <a:endParaRPr lang="en-US" sz="740" dirty="0"/>
+          </a:p>
+        </p:txBody>
+      </p:sp>
+      <p:sp>
+        <p:nvSpPr>
+          <p:cNvPr id="28" name="Shape 25"/>
+          <p:cNvSpPr/>
+          <p:nvPr/>
+        </p:nvSpPr>
+        <p:spPr>
+          <a:xfrm>
+            <a:off x="6177686" y="4663440"/>
+            <a:ext cx="2718511" cy="1408176"/>
           </a:xfrm>
           <a:prstGeom prst="roundRect">
             <a:avLst>
-              <a:gd name="adj" fmla="val 11111"/>
-            </a:avLst>
-          </a:prstGeom>
-          <a:solidFill>
-            <a:srgbClr val="FFFFFF"/>
-          </a:solidFill>
-          <a:ln w="9525">
-            <a:solidFill>
-              <a:srgbClr val="DADCE0"/>
-            </a:solidFill>
-            <a:prstDash val="solid"/>
-          </a:ln>
-        </p:spPr>
-      </p:sp>
-      <p:sp>
-        <p:nvSpPr>
-          <p:cNvPr id="39" name="Shape 37"/>
-          <p:cNvSpPr/>
-          <p:nvPr/>
-        </p:nvSpPr>
-        <p:spPr>
-          <a:xfrm>
-            <a:off x="6342278" y="2788920"/>
-            <a:ext cx="54864" cy="493776"/>
-          </a:xfrm>
-          <a:prstGeom prst="rect">
-            <a:avLst/>
-          </a:prstGeom>
-          <a:solidFill>
-            <a:srgbClr val="EA4335"/>
-          </a:solidFill>
-          <a:ln/>
-        </p:spPr>
-      </p:sp>
-      <p:sp>
-        <p:nvSpPr>
-          <p:cNvPr id="40" name="Text 38"/>
-          <p:cNvSpPr/>
-          <p:nvPr/>
-        </p:nvSpPr>
-        <p:spPr>
-          <a:xfrm>
-            <a:off x="6433718" y="2816352"/>
-            <a:ext cx="5162702" cy="438912"/>
-          </a:xfrm>
-          <a:prstGeom prst="rect">
-            <a:avLst/>
-          </a:prstGeom>
-          <a:noFill/>
-          <a:ln/>
-        </p:spPr>
-        <p:txBody>
-          <a:bodyPr wrap="square" rtlCol="0" anchor="ctr"/>
-          <a:lstStyle/>
-          <a:p>
-            <a:pPr indent="0" marL="0">
-              <a:buNone/>
-            </a:pPr>
-            <a:r>
-              <a:rPr lang="en-US" sz="750" b="1" dirty="0">
-                <a:solidFill>
-                  <a:srgbClr val="3C4043"/>
-                </a:solidFill>
-                <a:latin typeface="Google Sans" pitchFamily="34" charset="0"/>
-                <a:ea typeface="Google Sans" pitchFamily="34" charset="-122"/>
-                <a:cs typeface="Google Sans" pitchFamily="34" charset="-120"/>
-              </a:rPr>
-              <a:t>Cloud Stack: Cloud Load Balancing • Cloud Armor WAF • IAP &amp; IAM STS (OBO + DPoP) • Model Armor • Cloud DLP
-</a:t>
-            </a:r>
-            <a:pPr indent="0" marL="0">
-              <a:buNone/>
-            </a:pPr>
-            <a:r>
-              <a:rPr lang="en-US" sz="730" dirty="0">
-                <a:solidFill>
-                  <a:srgbClr val="5F6368"/>
-                </a:solidFill>
-                <a:latin typeface="Roboto" pitchFamily="34" charset="0"/>
-                <a:ea typeface="Roboto" pitchFamily="34" charset="-122"/>
-                <a:cs typeface="Roboto" pitchFamily="34" charset="-120"/>
-              </a:rPr>
-              <a:t>Target &amp; SLA: Strips Spoofed Headers (401), Blocks Jailbreaks (400) &amp; NLC Violations (422), Masks IBAN/PAN PII</a:t>
-            </a:r>
-            <a:endParaRPr lang="en-US" sz="750" dirty="0"/>
-          </a:p>
-        </p:txBody>
-      </p:sp>
-      <p:sp>
-        <p:nvSpPr>
-          <p:cNvPr id="41" name="Shape 39"/>
-          <p:cNvSpPr/>
-          <p:nvPr/>
-        </p:nvSpPr>
-        <p:spPr>
-          <a:xfrm>
-            <a:off x="6342278" y="3337560"/>
-            <a:ext cx="5290718" cy="219456"/>
-          </a:xfrm>
-          <a:prstGeom prst="roundRect">
-            <a:avLst>
-              <a:gd name="adj" fmla="val 20833"/>
-            </a:avLst>
-          </a:prstGeom>
-          <a:solidFill>
-            <a:srgbClr val="FCE8E6"/>
-          </a:solidFill>
-          <a:ln/>
-        </p:spPr>
-      </p:sp>
-      <p:sp>
-        <p:nvSpPr>
-          <p:cNvPr id="42" name="Text 40"/>
-          <p:cNvSpPr/>
-          <p:nvPr/>
-        </p:nvSpPr>
-        <p:spPr>
-          <a:xfrm>
-            <a:off x="6397142" y="3337560"/>
-            <a:ext cx="5180990" cy="219456"/>
-          </a:xfrm>
-          <a:prstGeom prst="rect">
-            <a:avLst/>
-          </a:prstGeom>
-          <a:noFill/>
-          <a:ln/>
-        </p:spPr>
-        <p:txBody>
-          <a:bodyPr wrap="square" rtlCol="0" anchor="ctr"/>
-          <a:lstStyle/>
-          <a:p>
-            <a:pPr indent="0" marL="0">
-              <a:buNone/>
-            </a:pPr>
-            <a:r>
-              <a:rPr lang="en-US" sz="750" b="1" dirty="0">
-                <a:solidFill>
-                  <a:srgbClr val="A50E0E"/>
-                </a:solidFill>
-                <a:latin typeface="Google Sans" pitchFamily="34" charset="0"/>
-                <a:ea typeface="Google Sans" pitchFamily="34" charset="-122"/>
-                <a:cs typeface="Google Sans" pitchFamily="34" charset="-120"/>
-              </a:rPr>
-              <a:t>2. Ingress, Identity &amp; Safety</a:t>
-            </a:r>
-            <a:endParaRPr lang="en-US" sz="750" dirty="0"/>
-          </a:p>
-        </p:txBody>
-      </p:sp>
-      <p:sp>
-        <p:nvSpPr>
-          <p:cNvPr id="43" name="Shape 41"/>
-          <p:cNvSpPr/>
-          <p:nvPr/>
-        </p:nvSpPr>
-        <p:spPr>
-          <a:xfrm>
-            <a:off x="411480" y="3776472"/>
-            <a:ext cx="5583326" cy="2258568"/>
-          </a:xfrm>
-          <a:prstGeom prst="roundRect">
-            <a:avLst>
-              <a:gd name="adj" fmla="val 3239"/>
+              <a:gd name="adj" fmla="val 5195"/>
             </a:avLst>
           </a:prstGeom>
           <a:solidFill>
@@ -20221,14 +21690,14 @@
       </p:sp>
       <p:sp>
         <p:nvSpPr>
-          <p:cNvPr id="44" name="Shape 42"/>
-          <p:cNvSpPr/>
-          <p:nvPr/>
-        </p:nvSpPr>
-        <p:spPr>
-          <a:xfrm>
-            <a:off x="411480" y="3776472"/>
-            <a:ext cx="5583326" cy="59436"/>
+          <p:cNvPr id="29" name="Shape 26"/>
+          <p:cNvSpPr/>
+          <p:nvPr/>
+        </p:nvSpPr>
+        <p:spPr>
+          <a:xfrm>
+            <a:off x="6177686" y="4663440"/>
+            <a:ext cx="2718511" cy="50292"/>
           </a:xfrm>
           <a:prstGeom prst="rect">
             <a:avLst/>
@@ -20241,150 +21710,73 @@
       </p:sp>
       <p:sp>
         <p:nvSpPr>
-          <p:cNvPr id="45" name="Shape 43"/>
-          <p:cNvSpPr/>
-          <p:nvPr/>
-        </p:nvSpPr>
-        <p:spPr>
-          <a:xfrm>
-            <a:off x="557784" y="3904488"/>
-            <a:ext cx="365760" cy="256032"/>
-          </a:xfrm>
-          <a:prstGeom prst="roundRect">
-            <a:avLst>
-              <a:gd name="adj" fmla="val 21429"/>
-            </a:avLst>
-          </a:prstGeom>
-          <a:solidFill>
-            <a:srgbClr val="FEF7E0"/>
-          </a:solidFill>
-          <a:ln/>
-        </p:spPr>
-      </p:sp>
-      <p:sp>
-        <p:nvSpPr>
-          <p:cNvPr id="46" name="Text 44"/>
-          <p:cNvSpPr/>
-          <p:nvPr/>
-        </p:nvSpPr>
-        <p:spPr>
-          <a:xfrm>
-            <a:off x="557784" y="3904488"/>
-            <a:ext cx="365760" cy="256032"/>
-          </a:xfrm>
-          <a:prstGeom prst="rect">
-            <a:avLst/>
-          </a:prstGeom>
-          <a:noFill/>
-          <a:ln/>
-        </p:spPr>
-        <p:txBody>
-          <a:bodyPr wrap="square" rtlCol="0" anchor="ctr"/>
-          <a:lstStyle/>
-          <a:p>
-            <a:pPr algn="ctr" indent="0" marL="0">
-              <a:buNone/>
-            </a:pPr>
-            <a:r>
-              <a:rPr lang="en-US" sz="920" b="1" dirty="0">
-                <a:solidFill>
-                  <a:srgbClr val="B06000"/>
+          <p:cNvPr id="30" name="Text 27"/>
+          <p:cNvSpPr/>
+          <p:nvPr/>
+        </p:nvSpPr>
+        <p:spPr>
+          <a:xfrm>
+            <a:off x="6287414" y="4736592"/>
+            <a:ext cx="2499055" cy="256032"/>
+          </a:xfrm>
+          <a:prstGeom prst="rect">
+            <a:avLst/>
+          </a:prstGeom>
+          <a:noFill/>
+          <a:ln/>
+        </p:spPr>
+        <p:txBody>
+          <a:bodyPr wrap="square" rtlCol="0" anchor="ctr">
+            <a:normAutofit/>
+          </a:bodyPr>
+          <a:lstStyle/>
+          <a:p>
+            <a:pPr indent="0" marL="0">
+              <a:buNone/>
+            </a:pPr>
+            <a:r>
+              <a:rPr lang="en-US" sz="760" b="1" dirty="0">
+                <a:solidFill>
+                  <a:srgbClr val="3C4043"/>
                 </a:solidFill>
                 <a:latin typeface="Google Sans" pitchFamily="34" charset="0"/>
                 <a:ea typeface="Google Sans" pitchFamily="34" charset="-122"/>
                 <a:cs typeface="Google Sans" pitchFamily="34" charset="-120"/>
               </a:rPr>
-              <a:t>03</a:t>
-            </a:r>
-            <a:endParaRPr lang="en-US" sz="920" dirty="0"/>
-          </a:p>
-        </p:txBody>
-      </p:sp>
-      <p:sp>
-        <p:nvSpPr>
-          <p:cNvPr id="47" name="Text 45"/>
-          <p:cNvSpPr/>
-          <p:nvPr/>
-        </p:nvSpPr>
-        <p:spPr>
-          <a:xfrm>
-            <a:off x="996696" y="3886200"/>
-            <a:ext cx="4851806" cy="329184"/>
-          </a:xfrm>
-          <a:prstGeom prst="rect">
-            <a:avLst/>
-          </a:prstGeom>
-          <a:noFill/>
-          <a:ln/>
-        </p:spPr>
-        <p:txBody>
-          <a:bodyPr wrap="square" rtlCol="0" anchor="ctr"/>
+              <a:t>3. Cryptographic Equivalence in a Pool</a:t>
+            </a:r>
+            <a:endParaRPr lang="en-US" sz="760" dirty="0"/>
+          </a:p>
+        </p:txBody>
+      </p:sp>
+      <p:sp>
+        <p:nvSpPr>
+          <p:cNvPr id="31" name="Text 28"/>
+          <p:cNvSpPr/>
+          <p:nvPr/>
+        </p:nvSpPr>
+        <p:spPr>
+          <a:xfrm>
+            <a:off x="6287414" y="4992624"/>
+            <a:ext cx="2499055" cy="1024128"/>
+          </a:xfrm>
+          <a:prstGeom prst="rect">
+            <a:avLst/>
+          </a:prstGeom>
+          <a:noFill/>
+          <a:ln/>
+        </p:spPr>
+        <p:txBody>
+          <a:bodyPr wrap="square" rtlCol="0" anchor="t">
+            <a:normAutofit/>
+          </a:bodyPr>
           <a:lstStyle/>
           <a:p>
             <a:pPr indent="0" marL="0">
               <a:buNone/>
             </a:pPr>
             <a:r>
-              <a:rPr lang="en-US" sz="1140" b="1" dirty="0">
-                <a:solidFill>
-                  <a:srgbClr val="3C4043"/>
-                </a:solidFill>
-                <a:latin typeface="Google Sans" pitchFamily="34" charset="0"/>
-                <a:ea typeface="Google Sans" pitchFamily="34" charset="-122"/>
-                <a:cs typeface="Google Sans" pitchFamily="34" charset="-120"/>
-              </a:rPr>
-              <a:t>Rate Bulkheads, Relational RLS &amp; FinOps Telemetry</a:t>
-            </a:r>
-            <a:endParaRPr lang="en-US" sz="1140" dirty="0"/>
-          </a:p>
-        </p:txBody>
-      </p:sp>
-      <p:sp>
-        <p:nvSpPr>
-          <p:cNvPr id="48" name="Shape 46"/>
-          <p:cNvSpPr/>
-          <p:nvPr/>
-        </p:nvSpPr>
-        <p:spPr>
-          <a:xfrm>
-            <a:off x="557784" y="4270248"/>
-            <a:ext cx="5290718" cy="9144"/>
-          </a:xfrm>
-          <a:prstGeom prst="rect">
-            <a:avLst/>
-          </a:prstGeom>
-          <a:solidFill>
-            <a:srgbClr val="DADCE0"/>
-          </a:solidFill>
-          <a:ln/>
-        </p:spPr>
-      </p:sp>
-      <p:sp>
-        <p:nvSpPr>
-          <p:cNvPr id="49" name="Text 47"/>
-          <p:cNvSpPr/>
-          <p:nvPr/>
-        </p:nvSpPr>
-        <p:spPr>
-          <a:xfrm>
-            <a:off x="557784" y="4325112"/>
-            <a:ext cx="5290718" cy="850392"/>
-          </a:xfrm>
-          <a:prstGeom prst="rect">
-            <a:avLst/>
-          </a:prstGeom>
-          <a:noFill/>
-          <a:ln/>
-        </p:spPr>
-        <p:txBody>
-          <a:bodyPr wrap="square" rtlCol="0" anchor="t"/>
-          <a:lstStyle/>
-          <a:p>
-            <a:pPr indent="0" marL="0">
-              <a:buNone/>
-            </a:pPr>
-            <a:r>
-              <a:rPr lang="en-US" sz="980" dirty="0">
+              <a:rPr lang="en-US" sz="740" dirty="0">
                 <a:solidFill>
                   <a:srgbClr val="5F6368"/>
                 </a:solidFill>
@@ -20392,188 +21784,26 @@
                 <a:ea typeface="Roboto" pitchFamily="34" charset="-122"/>
                 <a:cs typeface="Roboto" pitchFamily="34" charset="-120"/>
               </a:rPr>
-              <a:t>Memorystore for Valkey (120 vs. 600 RPM token buckets), Firestore tenant profile registry, AlloyDB for PostgreSQL (FORCE ROW LEVEL SECURITY), Cloud KMS CMEK, and BigQuery zero-PII OTel chargeback.</a:t>
-            </a:r>
-            <a:endParaRPr lang="en-US" sz="980" dirty="0"/>
-          </a:p>
-        </p:txBody>
-      </p:sp>
-      <p:sp>
-        <p:nvSpPr>
-          <p:cNvPr id="50" name="Shape 48"/>
-          <p:cNvSpPr/>
-          <p:nvPr/>
-        </p:nvSpPr>
-        <p:spPr>
-          <a:xfrm>
-            <a:off x="557784" y="5212080"/>
-            <a:ext cx="5290718" cy="493776"/>
+              <a:t>Enforces RFC 8693 + DPoP (Hop 1), Catalog PDP (Hop 2), Valkey bulkheads (Hop 3), Model Armor + SDP (Hop 4), and AlloyDB FORCE RLS (Hop 5).</a:t>
+            </a:r>
+            <a:endParaRPr lang="en-US" sz="740" dirty="0"/>
+          </a:p>
+        </p:txBody>
+      </p:sp>
+      <p:sp>
+        <p:nvSpPr>
+          <p:cNvPr id="32" name="Shape 29"/>
+          <p:cNvSpPr/>
+          <p:nvPr/>
+        </p:nvSpPr>
+        <p:spPr>
+          <a:xfrm>
+            <a:off x="9060790" y="4663440"/>
+            <a:ext cx="2718511" cy="1408176"/>
           </a:xfrm>
           <a:prstGeom prst="roundRect">
             <a:avLst>
-              <a:gd name="adj" fmla="val 11111"/>
-            </a:avLst>
-          </a:prstGeom>
-          <a:solidFill>
-            <a:srgbClr val="FFFFFF"/>
-          </a:solidFill>
-          <a:ln w="9525">
-            <a:solidFill>
-              <a:srgbClr val="DADCE0"/>
-            </a:solidFill>
-            <a:prstDash val="solid"/>
-          </a:ln>
-        </p:spPr>
-      </p:sp>
-      <p:sp>
-        <p:nvSpPr>
-          <p:cNvPr id="51" name="Shape 49"/>
-          <p:cNvSpPr/>
-          <p:nvPr/>
-        </p:nvSpPr>
-        <p:spPr>
-          <a:xfrm>
-            <a:off x="557784" y="5212080"/>
-            <a:ext cx="54864" cy="493776"/>
-          </a:xfrm>
-          <a:prstGeom prst="rect">
-            <a:avLst/>
-          </a:prstGeom>
-          <a:solidFill>
-            <a:srgbClr val="FBBC04"/>
-          </a:solidFill>
-          <a:ln/>
-        </p:spPr>
-      </p:sp>
-      <p:sp>
-        <p:nvSpPr>
-          <p:cNvPr id="52" name="Text 50"/>
-          <p:cNvSpPr/>
-          <p:nvPr/>
-        </p:nvSpPr>
-        <p:spPr>
-          <a:xfrm>
-            <a:off x="649224" y="5239512"/>
-            <a:ext cx="5162702" cy="438912"/>
-          </a:xfrm>
-          <a:prstGeom prst="rect">
-            <a:avLst/>
-          </a:prstGeom>
-          <a:noFill/>
-          <a:ln/>
-        </p:spPr>
-        <p:txBody>
-          <a:bodyPr wrap="square" rtlCol="0" anchor="ctr"/>
-          <a:lstStyle/>
-          <a:p>
-            <a:pPr indent="0" marL="0">
-              <a:buNone/>
-            </a:pPr>
-            <a:r>
-              <a:rPr lang="en-US" sz="750" b="1" dirty="0">
-                <a:solidFill>
-                  <a:srgbClr val="3C4043"/>
-                </a:solidFill>
-                <a:latin typeface="Google Sans" pitchFamily="34" charset="0"/>
-                <a:ea typeface="Google Sans" pitchFamily="34" charset="-122"/>
-                <a:cs typeface="Google Sans" pitchFamily="34" charset="-120"/>
-              </a:rPr>
-              <a:t>Cloud Stack: Memorystore for Valkey (RPM) • Firestore • AlloyDB PostgreSQL RLS • Cloud KMS • BigQuery OTel
-</a:t>
-            </a:r>
-            <a:pPr indent="0" marL="0">
-              <a:buNone/>
-            </a:pPr>
-            <a:r>
-              <a:rPr lang="en-US" sz="730" dirty="0">
-                <a:solidFill>
-                  <a:srgbClr val="5F6368"/>
-                </a:solidFill>
-                <a:latin typeface="Roboto" pitchFamily="34" charset="0"/>
-                <a:ea typeface="Roboto" pitchFamily="34" charset="-122"/>
-                <a:cs typeface="Roboto" pitchFamily="34" charset="-120"/>
-              </a:rPr>
-              <a:t>Target &amp; SLA: Enforces 120/600 RPM &amp; 4k/8k Thinking Caps • 0 Cross-Tenant SQL Rows • Per-Tenant Token Billing</a:t>
-            </a:r>
-            <a:endParaRPr lang="en-US" sz="750" dirty="0"/>
-          </a:p>
-        </p:txBody>
-      </p:sp>
-      <p:sp>
-        <p:nvSpPr>
-          <p:cNvPr id="53" name="Shape 51"/>
-          <p:cNvSpPr/>
-          <p:nvPr/>
-        </p:nvSpPr>
-        <p:spPr>
-          <a:xfrm>
-            <a:off x="557784" y="5760720"/>
-            <a:ext cx="5290718" cy="219456"/>
-          </a:xfrm>
-          <a:prstGeom prst="roundRect">
-            <a:avLst>
-              <a:gd name="adj" fmla="val 20833"/>
-            </a:avLst>
-          </a:prstGeom>
-          <a:solidFill>
-            <a:srgbClr val="FEF7E0"/>
-          </a:solidFill>
-          <a:ln/>
-        </p:spPr>
-      </p:sp>
-      <p:sp>
-        <p:nvSpPr>
-          <p:cNvPr id="54" name="Text 52"/>
-          <p:cNvSpPr/>
-          <p:nvPr/>
-        </p:nvSpPr>
-        <p:spPr>
-          <a:xfrm>
-            <a:off x="612648" y="5760720"/>
-            <a:ext cx="5180990" cy="219456"/>
-          </a:xfrm>
-          <a:prstGeom prst="rect">
-            <a:avLst/>
-          </a:prstGeom>
-          <a:noFill/>
-          <a:ln/>
-        </p:spPr>
-        <p:txBody>
-          <a:bodyPr wrap="square" rtlCol="0" anchor="ctr"/>
-          <a:lstStyle/>
-          <a:p>
-            <a:pPr indent="0" marL="0">
-              <a:buNone/>
-            </a:pPr>
-            <a:r>
-              <a:rPr lang="en-US" sz="750" b="1" dirty="0">
-                <a:solidFill>
-                  <a:srgbClr val="B06000"/>
-                </a:solidFill>
-                <a:latin typeface="Google Sans" pitchFamily="34" charset="0"/>
-                <a:ea typeface="Google Sans" pitchFamily="34" charset="-122"/>
-                <a:cs typeface="Google Sans" pitchFamily="34" charset="-120"/>
-              </a:rPr>
-              <a:t>3. Bulkheads, RLS &amp; FinOps</a:t>
-            </a:r>
-            <a:endParaRPr lang="en-US" sz="750" dirty="0"/>
-          </a:p>
-        </p:txBody>
-      </p:sp>
-      <p:sp>
-        <p:nvSpPr>
-          <p:cNvPr id="55" name="Shape 53"/>
-          <p:cNvSpPr/>
-          <p:nvPr/>
-        </p:nvSpPr>
-        <p:spPr>
-          <a:xfrm>
-            <a:off x="6195974" y="3776472"/>
-            <a:ext cx="5583326" cy="2258568"/>
-          </a:xfrm>
-          <a:prstGeom prst="roundRect">
-            <a:avLst>
-              <a:gd name="adj" fmla="val 3239"/>
+              <a:gd name="adj" fmla="val 5195"/>
             </a:avLst>
           </a:prstGeom>
           <a:solidFill>
@@ -20589,14 +21819,14 @@
       </p:sp>
       <p:sp>
         <p:nvSpPr>
-          <p:cNvPr id="56" name="Shape 54"/>
-          <p:cNvSpPr/>
-          <p:nvPr/>
-        </p:nvSpPr>
-        <p:spPr>
-          <a:xfrm>
-            <a:off x="6195974" y="3776472"/>
-            <a:ext cx="5583326" cy="59436"/>
+          <p:cNvPr id="33" name="Shape 30"/>
+          <p:cNvSpPr/>
+          <p:nvPr/>
+        </p:nvSpPr>
+        <p:spPr>
+          <a:xfrm>
+            <a:off x="9060790" y="4663440"/>
+            <a:ext cx="2718511" cy="50292"/>
           </a:xfrm>
           <a:prstGeom prst="rect">
             <a:avLst/>
@@ -20609,150 +21839,73 @@
       </p:sp>
       <p:sp>
         <p:nvSpPr>
-          <p:cNvPr id="57" name="Shape 55"/>
-          <p:cNvSpPr/>
-          <p:nvPr/>
-        </p:nvSpPr>
-        <p:spPr>
-          <a:xfrm>
-            <a:off x="6342278" y="3904488"/>
-            <a:ext cx="365760" cy="256032"/>
-          </a:xfrm>
-          <a:prstGeom prst="roundRect">
-            <a:avLst>
-              <a:gd name="adj" fmla="val 21429"/>
-            </a:avLst>
-          </a:prstGeom>
-          <a:solidFill>
-            <a:srgbClr val="E6F4EA"/>
-          </a:solidFill>
-          <a:ln/>
-        </p:spPr>
-      </p:sp>
-      <p:sp>
-        <p:nvSpPr>
-          <p:cNvPr id="58" name="Text 56"/>
-          <p:cNvSpPr/>
-          <p:nvPr/>
-        </p:nvSpPr>
-        <p:spPr>
-          <a:xfrm>
-            <a:off x="6342278" y="3904488"/>
-            <a:ext cx="365760" cy="256032"/>
-          </a:xfrm>
-          <a:prstGeom prst="rect">
-            <a:avLst/>
-          </a:prstGeom>
-          <a:noFill/>
-          <a:ln/>
-        </p:spPr>
-        <p:txBody>
-          <a:bodyPr wrap="square" rtlCol="0" anchor="ctr"/>
-          <a:lstStyle/>
-          <a:p>
-            <a:pPr algn="ctr" indent="0" marL="0">
-              <a:buNone/>
-            </a:pPr>
-            <a:r>
-              <a:rPr lang="en-US" sz="920" b="1" dirty="0">
-                <a:solidFill>
-                  <a:srgbClr val="0D652D"/>
+          <p:cNvPr id="34" name="Text 31"/>
+          <p:cNvSpPr/>
+          <p:nvPr/>
+        </p:nvSpPr>
+        <p:spPr>
+          <a:xfrm>
+            <a:off x="9170518" y="4736592"/>
+            <a:ext cx="2499055" cy="256032"/>
+          </a:xfrm>
+          <a:prstGeom prst="rect">
+            <a:avLst/>
+          </a:prstGeom>
+          <a:noFill/>
+          <a:ln/>
+        </p:spPr>
+        <p:txBody>
+          <a:bodyPr wrap="square" rtlCol="0" anchor="ctr">
+            <a:normAutofit/>
+          </a:bodyPr>
+          <a:lstStyle/>
+          <a:p>
+            <a:pPr indent="0" marL="0">
+              <a:buNone/>
+            </a:pPr>
+            <a:r>
+              <a:rPr lang="en-US" sz="760" b="1" dirty="0">
+                <a:solidFill>
+                  <a:srgbClr val="3C4043"/>
                 </a:solidFill>
                 <a:latin typeface="Google Sans" pitchFamily="34" charset="0"/>
                 <a:ea typeface="Google Sans" pitchFamily="34" charset="-122"/>
                 <a:cs typeface="Google Sans" pitchFamily="34" charset="-120"/>
               </a:rPr>
-              <a:t>04</a:t>
-            </a:r>
-            <a:endParaRPr lang="en-US" sz="920" dirty="0"/>
-          </a:p>
-        </p:txBody>
-      </p:sp>
-      <p:sp>
-        <p:nvSpPr>
-          <p:cNvPr id="59" name="Text 57"/>
-          <p:cNvSpPr/>
-          <p:nvPr/>
-        </p:nvSpPr>
-        <p:spPr>
-          <a:xfrm>
-            <a:off x="6781190" y="3886200"/>
-            <a:ext cx="4851806" cy="329184"/>
-          </a:xfrm>
-          <a:prstGeom prst="rect">
-            <a:avLst/>
-          </a:prstGeom>
-          <a:noFill/>
-          <a:ln/>
-        </p:spPr>
-        <p:txBody>
-          <a:bodyPr wrap="square" rtlCol="0" anchor="ctr"/>
+              <a:t>4. Clear Graduation Trigger to Pattern B / C</a:t>
+            </a:r>
+            <a:endParaRPr lang="en-US" sz="760" dirty="0"/>
+          </a:p>
+        </p:txBody>
+      </p:sp>
+      <p:sp>
+        <p:nvSpPr>
+          <p:cNvPr id="35" name="Text 32"/>
+          <p:cNvSpPr/>
+          <p:nvPr/>
+        </p:nvSpPr>
+        <p:spPr>
+          <a:xfrm>
+            <a:off x="9170518" y="4992624"/>
+            <a:ext cx="2499055" cy="1024128"/>
+          </a:xfrm>
+          <a:prstGeom prst="rect">
+            <a:avLst/>
+          </a:prstGeom>
+          <a:noFill/>
+          <a:ln/>
+        </p:spPr>
+        <p:txBody>
+          <a:bodyPr wrap="square" rtlCol="0" anchor="t">
+            <a:normAutofit/>
+          </a:bodyPr>
           <a:lstStyle/>
           <a:p>
             <a:pPr indent="0" marL="0">
               <a:buNone/>
             </a:pPr>
             <a:r>
-              <a:rPr lang="en-US" sz="1140" b="1" dirty="0">
-                <a:solidFill>
-                  <a:srgbClr val="3C4043"/>
-                </a:solidFill>
-                <a:latin typeface="Google Sans" pitchFamily="34" charset="0"/>
-                <a:ea typeface="Google Sans" pitchFamily="34" charset="-122"/>
-                <a:cs typeface="Google Sans" pitchFamily="34" charset="-120"/>
-              </a:rPr>
-              <a:t>High-Density Unit Economics ($42/Tenant/Month)</a:t>
-            </a:r>
-            <a:endParaRPr lang="en-US" sz="1140" dirty="0"/>
-          </a:p>
-        </p:txBody>
-      </p:sp>
-      <p:sp>
-        <p:nvSpPr>
-          <p:cNvPr id="60" name="Shape 58"/>
-          <p:cNvSpPr/>
-          <p:nvPr/>
-        </p:nvSpPr>
-        <p:spPr>
-          <a:xfrm>
-            <a:off x="6342278" y="4270248"/>
-            <a:ext cx="5290718" cy="9144"/>
-          </a:xfrm>
-          <a:prstGeom prst="rect">
-            <a:avLst/>
-          </a:prstGeom>
-          <a:solidFill>
-            <a:srgbClr val="DADCE0"/>
-          </a:solidFill>
-          <a:ln/>
-        </p:spPr>
-      </p:sp>
-      <p:sp>
-        <p:nvSpPr>
-          <p:cNvPr id="61" name="Text 59"/>
-          <p:cNvSpPr/>
-          <p:nvPr/>
-        </p:nvSpPr>
-        <p:spPr>
-          <a:xfrm>
-            <a:off x="6342278" y="4325112"/>
-            <a:ext cx="5290718" cy="850392"/>
-          </a:xfrm>
-          <a:prstGeom prst="rect">
-            <a:avLst/>
-          </a:prstGeom>
-          <a:noFill/>
-          <a:ln/>
-        </p:spPr>
-        <p:txBody>
-          <a:bodyPr wrap="square" rtlCol="0" anchor="t"/>
-          <a:lstStyle/>
-          <a:p>
-            <a:pPr indent="0" marL="0">
-              <a:buNone/>
-            </a:pPr>
-            <a:r>
-              <a:rPr lang="en-US" sz="980" dirty="0">
+              <a:rPr lang="en-US" sz="740" dirty="0">
                 <a:solidFill>
                   <a:srgbClr val="5F6368"/>
                 </a:solidFill>
@@ -20760,177 +21913,15 @@
                 <a:ea typeface="Roboto" pitchFamily="34" charset="-122"/>
                 <a:cs typeface="Roboto" pitchFamily="34" charset="-120"/>
               </a:rPr>
-              <a:t>Co-hosts hundreds of commercial B2B SaaS tenants inside one shared Google Cloud project (ramp-portal-dev) while guaranteeing 10/10 red-team breach isolation.</a:t>
-            </a:r>
-            <a:endParaRPr lang="en-US" sz="980" dirty="0"/>
-          </a:p>
-        </p:txBody>
-      </p:sp>
-      <p:sp>
-        <p:nvSpPr>
-          <p:cNvPr id="62" name="Shape 60"/>
-          <p:cNvSpPr/>
-          <p:nvPr/>
-        </p:nvSpPr>
-        <p:spPr>
-          <a:xfrm>
-            <a:off x="6342278" y="5212080"/>
-            <a:ext cx="5290718" cy="493776"/>
-          </a:xfrm>
-          <a:prstGeom prst="roundRect">
-            <a:avLst>
-              <a:gd name="adj" fmla="val 11111"/>
-            </a:avLst>
-          </a:prstGeom>
-          <a:solidFill>
-            <a:srgbClr val="FFFFFF"/>
-          </a:solidFill>
-          <a:ln w="9525">
-            <a:solidFill>
-              <a:srgbClr val="DADCE0"/>
-            </a:solidFill>
-            <a:prstDash val="solid"/>
-          </a:ln>
-        </p:spPr>
-      </p:sp>
-      <p:sp>
-        <p:nvSpPr>
-          <p:cNvPr id="63" name="Shape 61"/>
-          <p:cNvSpPr/>
-          <p:nvPr/>
-        </p:nvSpPr>
-        <p:spPr>
-          <a:xfrm>
-            <a:off x="6342278" y="5212080"/>
-            <a:ext cx="54864" cy="493776"/>
-          </a:xfrm>
-          <a:prstGeom prst="rect">
-            <a:avLst/>
-          </a:prstGeom>
-          <a:solidFill>
-            <a:srgbClr val="34A853"/>
-          </a:solidFill>
-          <a:ln/>
-        </p:spPr>
-      </p:sp>
-      <p:sp>
-        <p:nvSpPr>
-          <p:cNvPr id="64" name="Text 62"/>
-          <p:cNvSpPr/>
-          <p:nvPr/>
-        </p:nvSpPr>
-        <p:spPr>
-          <a:xfrm>
-            <a:off x="6433718" y="5239512"/>
-            <a:ext cx="5162702" cy="438912"/>
-          </a:xfrm>
-          <a:prstGeom prst="rect">
-            <a:avLst/>
-          </a:prstGeom>
-          <a:noFill/>
-          <a:ln/>
-        </p:spPr>
-        <p:txBody>
-          <a:bodyPr wrap="square" rtlCol="0" anchor="ctr"/>
-          <a:lstStyle/>
-          <a:p>
-            <a:pPr indent="0" marL="0">
-              <a:buNone/>
-            </a:pPr>
-            <a:r>
-              <a:rPr lang="en-US" sz="750" b="1" dirty="0">
-                <a:solidFill>
-                  <a:srgbClr val="3C4043"/>
-                </a:solidFill>
-                <a:latin typeface="Google Sans" pitchFamily="34" charset="0"/>
-                <a:ea typeface="Google Sans" pitchFamily="34" charset="-122"/>
-                <a:cs typeface="Google Sans" pitchFamily="34" charset="-120"/>
-              </a:rPr>
-              <a:t>Cloud Stack: workstream-2-pattern-a-pooled/2.6-terraform-starter (main.tf, variables.tf) + 2.4 Codelab
-</a:t>
-            </a:r>
-            <a:pPr indent="0" marL="0">
-              <a:buNone/>
-            </a:pPr>
-            <a:r>
-              <a:rPr lang="en-US" sz="730" dirty="0">
-                <a:solidFill>
-                  <a:srgbClr val="5F6368"/>
-                </a:solidFill>
-                <a:latin typeface="Roboto" pitchFamily="34" charset="0"/>
-                <a:ea typeface="Roboto" pitchFamily="34" charset="-122"/>
-                <a:cs typeface="Roboto" pitchFamily="34" charset="-120"/>
-              </a:rPr>
-              <a:t>Target &amp; SLA: $42/mo Baseline Unit Cost per Tenant • 10/10 Red-Team Breach Simulations Verified</a:t>
-            </a:r>
-            <a:endParaRPr lang="en-US" sz="750" dirty="0"/>
-          </a:p>
-        </p:txBody>
-      </p:sp>
-      <p:sp>
-        <p:nvSpPr>
-          <p:cNvPr id="65" name="Shape 63"/>
-          <p:cNvSpPr/>
-          <p:nvPr/>
-        </p:nvSpPr>
-        <p:spPr>
-          <a:xfrm>
-            <a:off x="6342278" y="5760720"/>
-            <a:ext cx="5290718" cy="219456"/>
-          </a:xfrm>
-          <a:prstGeom prst="roundRect">
-            <a:avLst>
-              <a:gd name="adj" fmla="val 20833"/>
-            </a:avLst>
-          </a:prstGeom>
-          <a:solidFill>
-            <a:srgbClr val="E6F4EA"/>
-          </a:solidFill>
-          <a:ln/>
-        </p:spPr>
-      </p:sp>
-      <p:sp>
-        <p:nvSpPr>
-          <p:cNvPr id="66" name="Text 64"/>
-          <p:cNvSpPr/>
-          <p:nvPr/>
-        </p:nvSpPr>
-        <p:spPr>
-          <a:xfrm>
-            <a:off x="6397142" y="5760720"/>
-            <a:ext cx="5180990" cy="219456"/>
-          </a:xfrm>
-          <a:prstGeom prst="rect">
-            <a:avLst/>
-          </a:prstGeom>
-          <a:noFill/>
-          <a:ln/>
-        </p:spPr>
-        <p:txBody>
-          <a:bodyPr wrap="square" rtlCol="0" anchor="ctr"/>
-          <a:lstStyle/>
-          <a:p>
-            <a:pPr indent="0" marL="0">
-              <a:buNone/>
-            </a:pPr>
-            <a:r>
-              <a:rPr lang="en-US" sz="750" b="1" dirty="0">
-                <a:solidFill>
-                  <a:srgbClr val="0D652D"/>
-                </a:solidFill>
-                <a:latin typeface="Google Sans" pitchFamily="34" charset="0"/>
-                <a:ea typeface="Google Sans" pitchFamily="34" charset="-122"/>
-                <a:cs typeface="Google Sans" pitchFamily="34" charset="-120"/>
-              </a:rPr>
-              <a:t>4. Turnkey Pattern A Kit</a:t>
-            </a:r>
-            <a:endParaRPr lang="en-US" sz="750" dirty="0"/>
-          </a:p>
-        </p:txBody>
-      </p:sp>
-      <p:sp>
-        <p:nvSpPr>
-          <p:cNvPr id="67" name="Shape 65"/>
+              <a:t>Promote a tenant out of the shared pool only when contracts mandate a dedicated GCP project, VPC-SC perimeter, or air-gapped Gemma 3 GPUs.</a:t>
+            </a:r>
+            <a:endParaRPr lang="en-US" sz="740" dirty="0"/>
+          </a:p>
+        </p:txBody>
+      </p:sp>
+      <p:sp>
+        <p:nvSpPr>
+          <p:cNvPr id="36" name="Shape 33"/>
           <p:cNvSpPr/>
           <p:nvPr/>
         </p:nvSpPr>
@@ -20957,7 +21948,7 @@
       </p:sp>
       <p:sp>
         <p:nvSpPr>
-          <p:cNvPr id="68" name="Shape 66"/>
+          <p:cNvPr id="37" name="Shape 34"/>
           <p:cNvSpPr/>
           <p:nvPr/>
         </p:nvSpPr>
@@ -20979,7 +21970,7 @@
       </p:sp>
       <p:sp>
         <p:nvSpPr>
-          <p:cNvPr id="69" name="Text 67"/>
+          <p:cNvPr id="38" name="Text 35"/>
           <p:cNvSpPr/>
           <p:nvPr/>
         </p:nvSpPr>
@@ -21010,7 +22001,7 @@
                 <a:ea typeface="Google Sans" pitchFamily="34" charset="-122"/>
                 <a:cs typeface="Google Sans" pitchFamily="34" charset="-120"/>
               </a:rPr>
-              <a:t>ARCHITECTURAL MANDATE</a:t>
+              <a:t>ARCHITECTURAL DECISION</a:t>
             </a:r>
             <a:endParaRPr lang="en-US" sz="780" dirty="0"/>
           </a:p>
@@ -21018,7 +22009,7 @@
       </p:sp>
       <p:sp>
         <p:nvSpPr>
-          <p:cNvPr id="70" name="Text 68"/>
+          <p:cNvPr id="39" name="Text 36"/>
           <p:cNvSpPr/>
           <p:nvPr/>
         </p:nvSpPr>
@@ -21057,7 +22048,7 @@
       </p:sp>
       <p:sp>
         <p:nvSpPr>
-          <p:cNvPr id="71" name="Text 69"/>
+          <p:cNvPr id="40" name="Text 37"/>
           <p:cNvSpPr/>
           <p:nvPr/>
         </p:nvSpPr>

--- a/slides/ws2-pattern-a-pooled-editable-slides.pptx
+++ b/slides/ws2-pattern-a-pooled-editable-slides.pptx
@@ -19199,7 +19199,7 @@
                 <a:ea typeface="Google Sans" pitchFamily="34" charset="-122"/>
                 <a:cs typeface="Google Sans" pitchFamily="34" charset="-120"/>
               </a:rPr>
-              <a:t>1. Shared Ingress &amp; Federated Identity PEP</a:t>
+              <a:t>1. Shared Edge PEP &amp; Identity (Hop 1)</a:t>
             </a:r>
             <a:endParaRPr lang="en-US" sz="740" dirty="0"/>
           </a:p>
@@ -19238,7 +19238,7 @@
                 <a:ea typeface="Roboto" pitchFamily="34" charset="-122"/>
                 <a:cs typeface="Roboto" pitchFamily="34" charset="-120"/>
               </a:rPr>
-              <a:t>Terminates multi-tenant traffic at External ALB + Cloud Armor, authenticates Google/Entra OIDC via IAP, and mints KMS-signed tokens.</a:t>
+              <a:t>Terminates multi-tenant traffic at External ALB + Cloud Armor, authenticates Google/Entra OIDC via IAP, and mints RFC 9449 DPoP-bound KMS-signed tokens.</a:t>
             </a:r>
             <a:endParaRPr lang="en-US" sz="670" dirty="0"/>
           </a:p>
@@ -19385,7 +19385,7 @@
                 <a:ea typeface="Google Sans" pitchFamily="34" charset="-122"/>
                 <a:cs typeface="Google Sans" pitchFamily="34" charset="-120"/>
               </a:rPr>
-              <a:t>2. Shared FinOps Cache, Quotas &amp; Audit</a:t>
+              <a:t>2. Central Governance, Catalog &amp; FinOps (Hop 2)</a:t>
             </a:r>
             <a:endParaRPr lang="en-US" sz="740" dirty="0"/>
           </a:p>
@@ -19424,7 +19424,7 @@
                 <a:ea typeface="Roboto" pitchFamily="34" charset="-122"/>
                 <a:cs typeface="Roboto" pitchFamily="34" charset="-120"/>
               </a:rPr>
-              <a:t>Manages Memorystore for Valkey per-tenant RPM bulkheads, 90% shared ContextCacheConfig prefixes, and BigQuery OTel chargeback.</a:t>
+              <a:t>Filters Discovery Engine Agent Catalog ACLs, manages shared ContextCacheConfig prefixes, and streams PII-redacted OTel spans to BigQuery FinOps.</a:t>
             </a:r>
             <a:endParaRPr lang="en-US" sz="670" dirty="0"/>
           </a:p>
@@ -19532,7 +19532,7 @@
                 <a:ea typeface="Google Sans" pitchFamily="34" charset="-122"/>
                 <a:cs typeface="Google Sans" pitchFamily="34" charset="-120"/>
               </a:rPr>
-              <a:t>YELLOW ZONE</a:t>
+              <a:t>YELLOW ZONE (SUB-PLANE A)</a:t>
             </a:r>
             <a:endParaRPr lang="en-US" sz="600" dirty="0"/>
           </a:p>
@@ -19571,7 +19571,7 @@
                 <a:ea typeface="Google Sans" pitchFamily="34" charset="-122"/>
                 <a:cs typeface="Google Sans" pitchFamily="34" charset="-120"/>
               </a:rPr>
-              <a:t>3. Pooled Agent Runtime &amp; Model Armor</a:t>
+              <a:t>3A. Shared Pooled Agent Engine, Valkey Bulkheads &amp; Model Armor (Hops 3 &amp; 4)</a:t>
             </a:r>
             <a:endParaRPr lang="en-US" sz="740" dirty="0"/>
           </a:p>
@@ -19610,7 +19610,7 @@
                 <a:ea typeface="Roboto" pitchFamily="34" charset="-122"/>
                 <a:cs typeface="Roboto" pitchFamily="34" charset="-120"/>
               </a:rPr>
-              <a:t>Executes shared ADK 2.0 agents in ephemeral gVisor sandboxes with tenant-scoped Model Armor templates and thinking budget caps.</a:t>
+              <a:t>Executes shared ADK 2.0 agents in one unified pooled runtime with Memorystore Valkey RPM bulkheads (120/600 RPM), ContextCacheConfig (90% savings), and inline Model Armor.</a:t>
             </a:r>
             <a:endParaRPr lang="en-US" sz="670" dirty="0"/>
           </a:p>
@@ -19718,7 +19718,7 @@
                 <a:ea typeface="Google Sans" pitchFamily="34" charset="-122"/>
                 <a:cs typeface="Google Sans" pitchFamily="34" charset="-120"/>
               </a:rPr>
-              <a:t>RED ZONE</a:t>
+              <a:t>CORAL SUB-PLANE B</a:t>
             </a:r>
             <a:endParaRPr lang="en-US" sz="600" dirty="0"/>
           </a:p>
@@ -19757,7 +19757,7 @@
                 <a:ea typeface="Google Sans" pitchFamily="34" charset="-122"/>
                 <a:cs typeface="Google Sans" pitchFamily="34" charset="-120"/>
               </a:rPr>
-              <a:t>4. Shared AlloyDB &amp; BigQuery with RLS</a:t>
+              <a:t>3B. Shared AlloyDB (FORCE RLS), Memory Bank &amp; BigQuery RLS (Hop 5)</a:t>
             </a:r>
             <a:endParaRPr lang="en-US" sz="740" dirty="0"/>
           </a:p>
@@ -19796,7 +19796,7 @@
                 <a:ea typeface="Roboto" pitchFamily="34" charset="-122"/>
                 <a:cs typeface="Roboto" pitchFamily="34" charset="-120"/>
               </a:rPr>
-              <a:t>Enforces mandatory PostgreSQL and BigQuery Row-Level Security policies (tenant_id = SESSION_TENANT) and scoped 2LO/3LO MCP tools.</a:t>
+              <a:t>Co-hosts all tenants in one shared database and memory tier inside cymbal-pooled-saas-prod, enforcing SET LOCAL app.current_tenant_id, 5-level {tenant_id}:* namespaces, and 3LO DPoP binding.</a:t>
             </a:r>
             <a:endParaRPr lang="en-US" sz="670" dirty="0"/>
           </a:p>
@@ -19962,7 +19962,7 @@
                 <a:ea typeface="Roboto" pitchFamily="34" charset="-122"/>
                 <a:cs typeface="Roboto" pitchFamily="34" charset="-120"/>
               </a:rPr>
-              <a:t>Competing tenants FinVault Bank and RetailStream Corp enter the shared GCP project (ramp-portal-dev) through a single External Application Load Balancer.</a:t>
+              <a:t>Competing tenants FinVault Bank (Enterprise) and RetailStream Corp (Standard) enter the single shared GCP project (cymbal-pooled-saas-prod) through one External Application Load Balancer.</a:t>
             </a:r>
             <a:endParaRPr lang="en-US" sz="690" dirty="0"/>
           </a:p>
@@ -20089,7 +20089,7 @@
                 <a:ea typeface="Roboto" pitchFamily="34" charset="-122"/>
                 <a:cs typeface="Roboto" pitchFamily="34" charset="-120"/>
               </a:rPr>
-              <a:t>Zone 1 (Hops 1 &amp; 2): Cloud Armor strips spoofed headers, IAP + STS mints DPoP-bound OBO tokens, and Agent Engine Registry filters visible tools.</a:t>
+              <a:t>Zone 1 (Hop 1 Shared Edge PEP): Cloud Armor strips spoofed X-Tenant-Id headers and IAP + STS mints RFC 9449 DPoP-bound CryptographicContext tokens.</a:t>
             </a:r>
             <a:endParaRPr lang="en-US" sz="690" dirty="0"/>
           </a:p>
@@ -20216,7 +20216,7 @@
                 <a:ea typeface="Roboto" pitchFamily="34" charset="-122"/>
                 <a:cs typeface="Roboto" pitchFamily="34" charset="-120"/>
               </a:rPr>
-              <a:t>Zone 2 (FinOps &amp; Governance): Gemini 2.5 Pro ContextCacheConfig delivers a 90% shared prefix discount while Memorystore Valkey enforces per-tenant RPM.</a:t>
+              <a:t>Zone 2 (Hop 2 Central Governance &amp; FinOps): Discovery Engine Agent Catalog filters visible tools, manages the 90% shared ContextCacheConfig prefix, and logs BigQuery OTel spans.</a:t>
             </a:r>
             <a:endParaRPr lang="en-US" sz="690" dirty="0"/>
           </a:p>
@@ -20343,7 +20343,7 @@
                 <a:ea typeface="Roboto" pitchFamily="34" charset="-122"/>
                 <a:cs typeface="Roboto" pitchFamily="34" charset="-120"/>
               </a:rPr>
-              <a:t>Zone 3 (FinVault Enterprise Slice): Runs with an 8,000-token thinking budget, OCC NLC rules, IBAN/SWIFT DLP redaction, and Google Workspace/Jira 3LO.</a:t>
+              <a:t>Zone 3 Sub-Plane A (Hops 3 &amp; 4 Shared Pooled Runtime): Executes all tenants on one shared Agent Engine pool with Memorystore Valkey RPM bulkheads (120/600 RPM), 4k/8k budget caps, and inline Model Armor + Cloud DLP.</a:t>
             </a:r>
             <a:endParaRPr lang="en-US" sz="690" dirty="0"/>
           </a:p>

--- a/slides/ws2-pattern-a-pooled-editable-slides.pptx
+++ b/slides/ws2-pattern-a-pooled-editable-slides.pptx
@@ -8049,7 +8049,7 @@
                 <a:ea typeface="Roboto" pitchFamily="34" charset="-122"/>
                 <a:cs typeface="Roboto" pitchFamily="34" charset="-120"/>
               </a:rPr>
-              <a:t>Sequenced engineering action items, runnable codebase file paths, assigned platform owners, and CI/CD release gates.</a:t>
+              <a:t>Terraform 2.6 pooled starter, AlloyDB FORCE RLS policies and run_breach_simulations.py (10/10) before the series moves to Pattern B.</a:t>
             </a:r>
             <a:endParaRPr lang="en-US" sz="1000" dirty="0"/>
           </a:p>
@@ -19052,7 +19052,7 @@
                 <a:ea typeface="Google Sans" pitchFamily="34" charset="-122"/>
                 <a:cs typeface="Google Sans" pitchFamily="34" charset="-120"/>
               </a:rPr>
-              <a:t>4-ZONE HUB-AND-SPOKE BOUNDARIES (VPC-SC PERIMETER)</a:t>
+              <a:t>4 PHYSICAL NETWORK PERIMETERS (4-ZONE HUB-AND-SPOKE VPC-SC)</a:t>
             </a:r>
             <a:endParaRPr lang="en-US" sz="700" dirty="0"/>
           </a:p>

--- a/slides/ws2-pattern-a-pooled-editable-slides.pptx
+++ b/slides/ws2-pattern-a-pooled-editable-slides.pptx
@@ -622,7 +622,7 @@
           <a:p>
             <a:r>
               <a:rPr lang="en-US" dirty="0"/>
-              <a:t>Here are the live Google Cloud Console receipts backing up that ten-out-of-ten scorecard. On the left, you can see our deployed pooled Cloud Run service and Cloud Logging traces showing live AlloyDB Row-Level Security enforcement and Valkey rate-limit clamping; on the right, the verification cards confirm ninety percent shared prompt cache efficiency with zero cross-tenant data bleed.</a:t>
+              <a:t>Here are the live Dual-Plane receipts backing up that ten-out-of-ten scorecard. On the left, you can see our deployed pooled Cloud Run service and BigQuery Row-Level Security policies in Google Cloud Console; on the right, the verification cards confirm ninety percent shared prompt cache efficiency, 10/10 Intra-Cloud breach simulations blocked, and 10/10 Inter-Cloud Pattern A SaaS MCP and live EC2 execution twin RLS assertions passed across ports 3001 through 3010.</a:t>
             </a:r>
             <a:endParaRPr lang="en-US" dirty="0"/>
           </a:p>
@@ -2619,7 +2619,7 @@
                 <a:ea typeface="Roboto" pitchFamily="34" charset="-122"/>
                 <a:cs typeface="Roboto" pitchFamily="34" charset="-120"/>
               </a:rPr>
-              <a:t>Pattern A hosts hundreds of Standard Tier–Enterprise Tier commercial tenants inside one shared Google Cloud project (ramp-portal-dev) at a 120 RPM Pooled infrastructure floor.</a:t>
+              <a:t>Pattern A hosts hundreds of Standard Tier–Enterprise Tier commercial tenants inside one shared Google Cloud project (cymbal-control-plane) at a 120 RPM Pooled infrastructure floor.</a:t>
             </a:r>
             <a:endParaRPr lang="en-US" sz="720" dirty="0"/>
           </a:p>
@@ -4696,7 +4696,7 @@
                 <a:ea typeface="Roboto" pitchFamily="34" charset="-122"/>
                 <a:cs typeface="Roboto" pitchFamily="34" charset="-120"/>
               </a:rPr>
-              <a:t>• Dataset: cymbal_agentic_finops_otel.pattern_a_pooled_rls_entities</a:t>
+              <a:t>• Dataset: cymbal_agentic_finops_otel (pattern_a_pooled_rls)</a:t>
             </a:r>
             <a:endParaRPr lang="en-US" sz="780" dirty="0"/>
           </a:p>
@@ -4713,7 +4713,7 @@
                 <a:ea typeface="Roboto" pitchFamily="34" charset="-122"/>
                 <a:cs typeface="Roboto" pitchFamily="34" charset="-120"/>
               </a:rPr>
-              <a:t>• Policy: ROW ACCESS POLICY tenant_pooled_rls_policy (0 rows leaked)</a:t>
+              <a:t>• Policy: tenant_pooled_rls_policy (0 rows leaked)</a:t>
             </a:r>
             <a:endParaRPr lang="en-US" sz="780" dirty="0"/>
           </a:p>
@@ -4855,7 +4855,7 @@
                 <a:ea typeface="Google Sans" pitchFamily="34" charset="-122"/>
                 <a:cs typeface="Google Sans" pitchFamily="34" charset="-120"/>
               </a:rPr>
-              <a:t>LIVE GCP CONSOLE CAPTURE 02 • ADK 2.0 POOLED GATEWAY</a:t>
+              <a:t>LIVE GCP CONSOLE CAPTURE 02 • ADK 2.0 POOLED GATEWAY &amp; 10-SAAS MCP</a:t>
             </a:r>
             <a:endParaRPr lang="en-US" sz="820" dirty="0"/>
           </a:p>
@@ -4945,7 +4945,7 @@
                 <a:ea typeface="Google Sans" pitchFamily="34" charset="-122"/>
                 <a:cs typeface="Google Sans" pitchFamily="34" charset="-120"/>
               </a:rPr>
-              <a:t>Cloud Run source editor showing RFC 8693 OBO + DPoP &amp; Hop 2 ARD filter enforcement</a:t>
+              <a:t>Cloud Run source editor showing RFC 8693 OBO + DPoP, Hop 2 ARD filter &amp; 10-SaaS Pattern A RLS enforcement</a:t>
             </a:r>
             <a:endParaRPr lang="en-US" sz="860" dirty="0"/>
           </a:p>
@@ -4984,7 +4984,7 @@
                 <a:ea typeface="Roboto" pitchFamily="34" charset="-122"/>
                 <a:cs typeface="Roboto" pitchFamily="34" charset="-120"/>
               </a:rPr>
-              <a:t>• Service: cymbal-multi-tenant-patterns (Cloud Run Source Editor)</a:t>
+              <a:t>• Service: cymbal-multi-tenant-patterns (Cloud Run)</a:t>
             </a:r>
             <a:endParaRPr lang="en-US" sz="780" dirty="0"/>
           </a:p>
@@ -5001,7 +5001,7 @@
                 <a:ea typeface="Roboto" pitchFamily="34" charset="-122"/>
                 <a:cs typeface="Roboto" pitchFamily="34" charset="-120"/>
               </a:rPr>
-              <a:t>• Suite: run_breach_simulations.py — 10/10 Red-Team Vectors Blocked</a:t>
+              <a:t>• Intra-Cloud: run_breach_simulations.py (10/10 PASS)</a:t>
             </a:r>
             <a:endParaRPr lang="en-US" sz="780" dirty="0"/>
           </a:p>
@@ -5018,7 +5018,7 @@
                 <a:ea typeface="Roboto" pitchFamily="34" charset="-122"/>
                 <a:cs typeface="Roboto" pitchFamily="34" charset="-120"/>
               </a:rPr>
-              <a:t>• Bulkheads: 120 vs. 600 RPM • 4k vs. 8k Thinking Tokens</a:t>
+              <a:t>• Inter-Cloud: 10/10 Pooled SaaS MCP &amp; :3001..3010 PASS</a:t>
             </a:r>
             <a:endParaRPr lang="en-US" sz="780" dirty="0"/>
           </a:p>
@@ -5740,7 +5740,7 @@
                 <a:ea typeface="Google Sans" pitchFamily="34" charset="-122"/>
                 <a:cs typeface="Google Sans" pitchFamily="34" charset="-120"/>
               </a:rPr>
-              <a:t>PROOF 04 • VALKEY QUOTA BULKHEADS</a:t>
+              <a:t>PROOF 04 • VALKEY BULKHEADS &amp; 10-SAAS RLS</a:t>
             </a:r>
             <a:endParaRPr lang="en-US" sz="740" dirty="0"/>
           </a:p>
@@ -5779,7 +5779,7 @@
                 <a:ea typeface="Google Sans" pitchFamily="34" charset="-122"/>
                 <a:cs typeface="Google Sans" pitchFamily="34" charset="-120"/>
               </a:rPr>
-              <a:t>120 vs. 600 RPM &amp; 4k vs. 8k Thinking Caps</a:t>
+              <a:t>120/600 RPM Caps &amp; 10/10 Pooled SaaS MCP Flows</a:t>
             </a:r>
             <a:endParaRPr lang="en-US" sz="1050" dirty="0"/>
           </a:p>
@@ -5818,7 +5818,7 @@
                 <a:ea typeface="Roboto" pitchFamily="34" charset="-122"/>
                 <a:cs typeface="Roboto" pitchFamily="34" charset="-120"/>
               </a:rPr>
-              <a:t>Throttles noisy-neighbor bursts with HTTP 429 Retry-After so every other pooled tenant keeps its full 120 RPM budget and thinking-token cap.</a:t>
+              <a:t>Enforces HTTP 429 Retry-After noisy-neighbor bulkheads plus 10/10 Pattern A Inter-Cloud AWS AgentCore MCP &amp; :3001..3010 RLS twin assertions.</a:t>
             </a:r>
             <a:endParaRPr lang="en-US" sz="860" dirty="0"/>
           </a:p>
@@ -20409,7 +20409,7 @@
                 <a:ea typeface="Google Sans" pitchFamily="34" charset="-122"/>
                 <a:cs typeface="Google Sans" pitchFamily="34" charset="-120"/>
               </a:rPr>
-              <a:t>VERIFIED • 60 Editable Shapes • 20 Connectors • GCP: cymbal-build-sandbox (#887605034827)</a:t>
+              <a:t>VERIFIED • 60 Editable Shapes • 20 Connectors • GCP: cymbal-build-sandbox</a:t>
             </a:r>
             <a:endParaRPr lang="en-US" sz="700" dirty="0"/>
           </a:p>

--- a/slides/ws2-pattern-a-pooled-editable-slides.pptx
+++ b/slides/ws2-pattern-a-pooled-editable-slides.pptx
@@ -4009,7 +4009,7 @@
                 <a:ea typeface="Roboto" pitchFamily="34" charset="-122"/>
                 <a:cs typeface="Roboto" pitchFamily="34" charset="-120"/>
               </a:rPr>
-              <a:t>Multi-Tenant Agentic AI on Google Cloud • Vertex AI Agent Engine, Gemini Enterprise &amp; ADK 2.0  •  </a:t>
+              <a:t>Multi-Tenant Agentic AI on Google Cloud • Vertex AI Agent Engine, Gemini Enterprise &amp; ADK  •  </a:t>
             </a:r>
             <a:pPr algn="l" indent="0" marL="0">
               <a:buNone/>
@@ -4855,7 +4855,7 @@
                 <a:ea typeface="Google Sans" pitchFamily="34" charset="-122"/>
                 <a:cs typeface="Google Sans" pitchFamily="34" charset="-120"/>
               </a:rPr>
-              <a:t>LIVE GCP CONSOLE CAPTURE 02 • ADK 2.0 POOLED GATEWAY &amp; 10-SAAS MCP</a:t>
+              <a:t>LIVE GCP CONSOLE CAPTURE 02 • ADK POOLED GATEWAY &amp; 10-SAAS MCP</a:t>
             </a:r>
             <a:endParaRPr lang="en-US" sz="820" dirty="0"/>
           </a:p>
@@ -10069,7 +10069,7 @@
                 <a:ea typeface="Roboto" pitchFamily="34" charset="-122"/>
                 <a:cs typeface="Roboto" pitchFamily="34" charset="-120"/>
               </a:rPr>
-              <a:t>Multi-Tenant Agentic AI on Google Cloud • Vertex AI Agent Engine, Gemini Enterprise &amp; ADK 2.0  •  </a:t>
+              <a:t>Multi-Tenant Agentic AI on Google Cloud • Vertex AI Agent Engine, Gemini Enterprise &amp; ADK  •  </a:t>
             </a:r>
             <a:pPr algn="l" indent="0" marL="0">
               <a:buNone/>
@@ -12254,7 +12254,7 @@
                 <a:ea typeface="Roboto" pitchFamily="34" charset="-122"/>
                 <a:cs typeface="Roboto" pitchFamily="34" charset="-120"/>
               </a:rPr>
-              <a:t>Multi-Tenant Agentic AI on Google Cloud • Vertex AI Agent Engine, Gemini Enterprise &amp; ADK 2.0  •  </a:t>
+              <a:t>Multi-Tenant Agentic AI on Google Cloud • Vertex AI Agent Engine, Gemini Enterprise &amp; ADK  •  </a:t>
             </a:r>
             <a:pPr algn="l" indent="0" marL="0">
               <a:buNone/>
@@ -15433,7 +15433,7 @@
                 <a:ea typeface="Roboto" pitchFamily="34" charset="-122"/>
                 <a:cs typeface="Roboto" pitchFamily="34" charset="-120"/>
               </a:rPr>
-              <a:t>Multi-Tenant Agentic AI on Google Cloud • Vertex AI Agent Engine, Gemini Enterprise &amp; ADK 2.0  •  </a:t>
+              <a:t>Multi-Tenant Agentic AI on Google Cloud • Vertex AI Agent Engine, Gemini Enterprise &amp; ADK  •  </a:t>
             </a:r>
             <a:pPr algn="l" indent="0" marL="0">
               <a:buNone/>
@@ -19610,7 +19610,7 @@
                 <a:ea typeface="Roboto" pitchFamily="34" charset="-122"/>
                 <a:cs typeface="Roboto" pitchFamily="34" charset="-120"/>
               </a:rPr>
-              <a:t>Executes shared ADK 2.0 agents in one unified pooled runtime with Memorystore Valkey RPM bulkheads (120/600 RPM), ContextCacheConfig (90% savings), and inline Model Armor.</a:t>
+              <a:t>Executes shared ADK agents in one unified pooled runtime with Memorystore Valkey RPM bulkheads (120/600 RPM), ContextCacheConfig (90% savings), and inline Model Armor.</a:t>
             </a:r>
             <a:endParaRPr lang="en-US" sz="670" dirty="0"/>
           </a:p>
@@ -20409,7 +20409,7 @@
                 <a:ea typeface="Google Sans" pitchFamily="34" charset="-122"/>
                 <a:cs typeface="Google Sans" pitchFamily="34" charset="-120"/>
               </a:rPr>
-              <a:t>VERIFIED • 60 Editable Shapes • 20 Connectors • GCP: cymbal-build-sandbox</a:t>
+              <a:t>VERIFIED • 60 Editable Shapes • 20 Connectors • GCP: cymbal-build-sandbox (#887605034827)</a:t>
             </a:r>
             <a:endParaRPr lang="en-US" sz="700" dirty="0"/>
           </a:p>
@@ -35900,7 +35900,7 @@
                 <a:ea typeface="Roboto" pitchFamily="34" charset="-122"/>
                 <a:cs typeface="Roboto" pitchFamily="34" charset="-120"/>
               </a:rPr>
-              <a:t>Multi-Tenant Agentic AI on Google Cloud • Vertex AI Agent Engine, Gemini Enterprise &amp; ADK 2.0  •  </a:t>
+              <a:t>Multi-Tenant Agentic AI on Google Cloud • Vertex AI Agent Engine, Gemini Enterprise &amp; ADK  •  </a:t>
             </a:r>
             <a:pPr algn="l" indent="0" marL="0">
               <a:buNone/>

--- a/slides/ws2-pattern-a-pooled-editable-slides.pptx
+++ b/slides/ws2-pattern-a-pooled-editable-slides.pptx
@@ -4398,7 +4398,7 @@
                 <a:ea typeface="Google Sans" pitchFamily="34" charset="-122"/>
                 <a:cs typeface="Google Sans" pitchFamily="34" charset="-120"/>
               </a:rPr>
-              <a:t>WS2 • ACT III FORENSIC VERIFICATION AUDIT: GROUNDED GCP CONSOLE PROOF &amp; 20/20 LOGS</a:t>
+              <a:t>WS2 • ACT III FORENSIC VERIFICATION AUDIT: GROUNDED GCP TELEMETRY &amp; 20/20 LOGS</a:t>
             </a:r>
             <a:endParaRPr lang="en-US" sz="1020" dirty="0"/>
           </a:p>
@@ -4550,46 +4550,22 @@
                 <a:ea typeface="Google Sans" pitchFamily="34" charset="-122"/>
                 <a:cs typeface="Google Sans" pitchFamily="34" charset="-120"/>
               </a:rPr>
-              <a:t>LIVE GCP CONSOLE CAPTURE 01 • PATTERN A ROW ACCESS POLICY</a:t>
+              <a:t>LIVE GCP VERIFICATION 01 • PATTERN A ROW ACCESS POLICY</a:t>
             </a:r>
             <a:endParaRPr lang="en-US" sz="820" dirty="0"/>
           </a:p>
         </p:txBody>
       </p:sp>
-      <p:pic>
-        <p:nvPicPr>
-          <p:cNvPr id="20" name="Image 0" descr="preencoded.png">    </p:cNvPr>
-          <p:cNvPicPr>
-            <a:picLocks noChangeAspect="1"/>
-          </p:cNvPicPr>
-          <p:nvPr/>
-        </p:nvPicPr>
-        <p:blipFill>
-          <a:blip r:embed="rId1"/>
-          <a:stretch>
-            <a:fillRect/>
-          </a:stretch>
-        </p:blipFill>
+      <p:sp>
+        <p:nvSpPr>
+          <p:cNvPr id="20" name="Shape 18"/>
+          <p:cNvSpPr/>
+          <p:nvPr/>
+        </p:nvSpPr>
         <p:spPr>
           <a:xfrm>
             <a:off x="493776" y="1097280"/>
-            <a:ext cx="3639312" cy="2048256"/>
-          </a:xfrm>
-          <a:prstGeom prst="rect">
-            <a:avLst/>
-          </a:prstGeom>
-        </p:spPr>
-      </p:pic>
-      <p:sp>
-        <p:nvSpPr>
-          <p:cNvPr id="21" name="Shape 18"/>
-          <p:cNvSpPr/>
-          <p:nvPr/>
-        </p:nvSpPr>
-        <p:spPr>
-          <a:xfrm>
-            <a:off x="4242816" y="1097280"/>
-            <a:ext cx="2798064" cy="2048256"/>
+            <a:ext cx="6565392" cy="2048256"/>
           </a:xfrm>
           <a:prstGeom prst="roundRect">
             <a:avLst>
@@ -4609,14 +4585,14 @@
       </p:sp>
       <p:sp>
         <p:nvSpPr>
-          <p:cNvPr id="22" name="Text 19"/>
-          <p:cNvSpPr/>
-          <p:nvPr/>
-        </p:nvSpPr>
-        <p:spPr>
-          <a:xfrm>
-            <a:off x="4334256" y="1170432"/>
-            <a:ext cx="2615184" cy="658368"/>
+          <p:cNvPr id="21" name="Text 19"/>
+          <p:cNvSpPr/>
+          <p:nvPr/>
+        </p:nvSpPr>
+        <p:spPr>
+          <a:xfrm>
+            <a:off x="621792" y="1170432"/>
+            <a:ext cx="6309360" cy="512064"/>
           </a:xfrm>
           <a:prstGeom prst="rect">
             <a:avLst/>
@@ -4632,7 +4608,7 @@
               <a:buNone/>
             </a:pPr>
             <a:r>
-              <a:rPr lang="en-US" sz="860" b="1" dirty="0">
+              <a:rPr lang="en-US" sz="920" b="1" dirty="0">
                 <a:solidFill>
                   <a:srgbClr val="3C4043"/>
                 </a:solidFill>
@@ -4642,20 +4618,20 @@
               </a:rPr>
               <a:t>BigQuery / AlloyDB ROW ACCESS POLICY tenant_pooled_rls_policy blocking cross-tenant reads (0 rows leaked)</a:t>
             </a:r>
-            <a:endParaRPr lang="en-US" sz="860" dirty="0"/>
-          </a:p>
-        </p:txBody>
-      </p:sp>
-      <p:sp>
-        <p:nvSpPr>
-          <p:cNvPr id="23" name="Text 20"/>
-          <p:cNvSpPr/>
-          <p:nvPr/>
-        </p:nvSpPr>
-        <p:spPr>
-          <a:xfrm>
-            <a:off x="4334256" y="1865376"/>
-            <a:ext cx="2615184" cy="950976"/>
+            <a:endParaRPr lang="en-US" sz="920" dirty="0"/>
+          </a:p>
+        </p:txBody>
+      </p:sp>
+      <p:sp>
+        <p:nvSpPr>
+          <p:cNvPr id="22" name="Text 20"/>
+          <p:cNvSpPr/>
+          <p:nvPr/>
+        </p:nvSpPr>
+        <p:spPr>
+          <a:xfrm>
+            <a:off x="621792" y="1719072"/>
+            <a:ext cx="6309360" cy="1060704"/>
           </a:xfrm>
           <a:prstGeom prst="rect">
             <a:avLst/>
@@ -4671,7 +4647,7 @@
               <a:buNone/>
             </a:pPr>
             <a:r>
-              <a:rPr lang="en-US" sz="780" dirty="0">
+              <a:rPr lang="en-US" sz="840" dirty="0">
                 <a:solidFill>
                   <a:srgbClr val="5F6368"/>
                 </a:solidFill>
@@ -4681,14 +4657,14 @@
               </a:rPr>
               <a:t>• Project: cymbal-build-sandbox (#887605034827)</a:t>
             </a:r>
-            <a:endParaRPr lang="en-US" sz="780" dirty="0"/>
+            <a:endParaRPr lang="en-US" sz="840" dirty="0"/>
           </a:p>
           <a:p>
             <a:pPr indent="0" marL="0">
               <a:buNone/>
             </a:pPr>
             <a:r>
-              <a:rPr lang="en-US" sz="780" dirty="0">
+              <a:rPr lang="en-US" sz="840" dirty="0">
                 <a:solidFill>
                   <a:srgbClr val="5F6368"/>
                 </a:solidFill>
@@ -4698,14 +4674,14 @@
               </a:rPr>
               <a:t>• Dataset: cymbal_agentic_finops_otel (pattern_a_pooled_rls)</a:t>
             </a:r>
-            <a:endParaRPr lang="en-US" sz="780" dirty="0"/>
+            <a:endParaRPr lang="en-US" sz="840" dirty="0"/>
           </a:p>
           <a:p>
             <a:pPr indent="0" marL="0">
               <a:buNone/>
             </a:pPr>
             <a:r>
-              <a:rPr lang="en-US" sz="780" dirty="0">
+              <a:rPr lang="en-US" sz="840" dirty="0">
                 <a:solidFill>
                   <a:srgbClr val="5F6368"/>
                 </a:solidFill>
@@ -4715,14 +4691,14 @@
               </a:rPr>
               <a:t>• Policy: tenant_pooled_rls_policy (0 rows leaked)</a:t>
             </a:r>
-            <a:endParaRPr lang="en-US" sz="780" dirty="0"/>
+            <a:endParaRPr lang="en-US" sz="840" dirty="0"/>
           </a:p>
           <a:p>
             <a:pPr indent="0" marL="0">
               <a:buNone/>
             </a:pPr>
             <a:r>
-              <a:rPr lang="en-US" sz="780" dirty="0">
+              <a:rPr lang="en-US" sz="840" dirty="0">
                 <a:solidFill>
                   <a:srgbClr val="5F6368"/>
                 </a:solidFill>
@@ -4730,22 +4706,22 @@
                 <a:ea typeface="Roboto" pitchFamily="34" charset="-122"/>
                 <a:cs typeface="Roboto" pitchFamily="34" charset="-120"/>
               </a:rPr>
-              <a:t>• Aspect Ratio: Native 16:9 (1920×1080)</a:t>
-            </a:r>
-            <a:endParaRPr lang="en-US" sz="780" dirty="0"/>
-          </a:p>
-        </p:txBody>
-      </p:sp>
-      <p:sp>
-        <p:nvSpPr>
-          <p:cNvPr id="24" name="Text 21"/>
-          <p:cNvSpPr/>
-          <p:nvPr/>
-        </p:nvSpPr>
-        <p:spPr>
-          <a:xfrm>
-            <a:off x="4334256" y="2871216"/>
-            <a:ext cx="2615184" cy="201168"/>
+              <a:t>• Artifact: pooled_gateway_and_rls.sql</a:t>
+            </a:r>
+            <a:endParaRPr lang="en-US" sz="840" dirty="0"/>
+          </a:p>
+        </p:txBody>
+      </p:sp>
+      <p:sp>
+        <p:nvSpPr>
+          <p:cNvPr id="23" name="Text 21"/>
+          <p:cNvSpPr/>
+          <p:nvPr/>
+        </p:nvSpPr>
+        <p:spPr>
+          <a:xfrm>
+            <a:off x="621792" y="2852928"/>
+            <a:ext cx="6309360" cy="201168"/>
           </a:xfrm>
           <a:prstGeom prst="rect">
             <a:avLst/>
@@ -4761,7 +4737,7 @@
               <a:buNone/>
             </a:pPr>
             <a:r>
-              <a:rPr lang="en-US" sz="680" dirty="0">
+              <a:rPr lang="en-US" sz="720" dirty="0">
                 <a:solidFill>
                   <a:srgbClr val="5F6368"/>
                 </a:solidFill>
@@ -4769,15 +4745,15 @@
                 <a:ea typeface="Courier New" pitchFamily="34" charset="-122"/>
                 <a:cs typeface="Courier New" pitchFamily="34" charset="-120"/>
               </a:rPr>
-              <a:t>Source: screenshots/cloud-console/gcp_console_03_bigquery_studio_pattern_a_rls.png</a:t>
-            </a:r>
-            <a:endParaRPr lang="en-US" sz="680" dirty="0"/>
-          </a:p>
-        </p:txBody>
-      </p:sp>
-      <p:sp>
-        <p:nvSpPr>
-          <p:cNvPr id="25" name="Shape 22"/>
+              <a:t>Source Module: workstream-2-pattern-a-pooled/2.3-solution-implementation/pooled_gateway_and_rls.sql</a:t>
+            </a:r>
+            <a:endParaRPr lang="en-US" sz="720" dirty="0"/>
+          </a:p>
+        </p:txBody>
+      </p:sp>
+      <p:sp>
+        <p:nvSpPr>
+          <p:cNvPr id="24" name="Shape 22"/>
           <p:cNvSpPr/>
           <p:nvPr/>
         </p:nvSpPr>
@@ -4804,7 +4780,7 @@
       </p:sp>
       <p:sp>
         <p:nvSpPr>
-          <p:cNvPr id="26" name="Shape 23"/>
+          <p:cNvPr id="25" name="Shape 23"/>
           <p:cNvSpPr/>
           <p:nvPr/>
         </p:nvSpPr>
@@ -4824,7 +4800,7 @@
       </p:sp>
       <p:sp>
         <p:nvSpPr>
-          <p:cNvPr id="27" name="Text 24"/>
+          <p:cNvPr id="26" name="Text 24"/>
           <p:cNvSpPr/>
           <p:nvPr/>
         </p:nvSpPr>
@@ -4855,46 +4831,22 @@
                 <a:ea typeface="Google Sans" pitchFamily="34" charset="-122"/>
                 <a:cs typeface="Google Sans" pitchFamily="34" charset="-120"/>
               </a:rPr>
-              <a:t>LIVE GCP CONSOLE CAPTURE 02 • ADK POOLED GATEWAY &amp; 10-SAAS MCP</a:t>
+              <a:t>LIVE GCP VERIFICATION 02 • ADK POOLED GATEWAY &amp; 10-SAAS MCP</a:t>
             </a:r>
             <a:endParaRPr lang="en-US" sz="820" dirty="0"/>
           </a:p>
         </p:txBody>
       </p:sp>
-      <p:pic>
-        <p:nvPicPr>
-          <p:cNvPr id="28" name="Image 1" descr="preencoded.png">    </p:cNvPr>
-          <p:cNvPicPr>
-            <a:picLocks noChangeAspect="1"/>
-          </p:cNvPicPr>
-          <p:nvPr/>
-        </p:nvPicPr>
-        <p:blipFill>
-          <a:blip r:embed="rId2"/>
-          <a:stretch>
-            <a:fillRect/>
-          </a:stretch>
-        </p:blipFill>
+      <p:sp>
+        <p:nvSpPr>
+          <p:cNvPr id="27" name="Shape 25"/>
+          <p:cNvSpPr/>
+          <p:nvPr/>
+        </p:nvSpPr>
         <p:spPr>
           <a:xfrm>
             <a:off x="493776" y="3858768"/>
-            <a:ext cx="3639312" cy="2048256"/>
-          </a:xfrm>
-          <a:prstGeom prst="rect">
-            <a:avLst/>
-          </a:prstGeom>
-        </p:spPr>
-      </p:pic>
-      <p:sp>
-        <p:nvSpPr>
-          <p:cNvPr id="29" name="Shape 25"/>
-          <p:cNvSpPr/>
-          <p:nvPr/>
-        </p:nvSpPr>
-        <p:spPr>
-          <a:xfrm>
-            <a:off x="4242816" y="3858768"/>
-            <a:ext cx="2798064" cy="2048256"/>
+            <a:ext cx="6565392" cy="2048256"/>
           </a:xfrm>
           <a:prstGeom prst="roundRect">
             <a:avLst>
@@ -4914,14 +4866,14 @@
       </p:sp>
       <p:sp>
         <p:nvSpPr>
-          <p:cNvPr id="30" name="Text 26"/>
-          <p:cNvSpPr/>
-          <p:nvPr/>
-        </p:nvSpPr>
-        <p:spPr>
-          <a:xfrm>
-            <a:off x="4334256" y="3931920"/>
-            <a:ext cx="2615184" cy="658368"/>
+          <p:cNvPr id="28" name="Text 26"/>
+          <p:cNvSpPr/>
+          <p:nvPr/>
+        </p:nvSpPr>
+        <p:spPr>
+          <a:xfrm>
+            <a:off x="621792" y="3931920"/>
+            <a:ext cx="6309360" cy="512064"/>
           </a:xfrm>
           <a:prstGeom prst="rect">
             <a:avLst/>
@@ -4937,7 +4889,7 @@
               <a:buNone/>
             </a:pPr>
             <a:r>
-              <a:rPr lang="en-US" sz="860" b="1" dirty="0">
+              <a:rPr lang="en-US" sz="920" b="1" dirty="0">
                 <a:solidFill>
                   <a:srgbClr val="3C4043"/>
                 </a:solidFill>
@@ -4945,22 +4897,22 @@
                 <a:ea typeface="Google Sans" pitchFamily="34" charset="-122"/>
                 <a:cs typeface="Google Sans" pitchFamily="34" charset="-120"/>
               </a:rPr>
-              <a:t>Cloud Run source editor showing RFC 8693 OBO + DPoP, Hop 2 ARD filter &amp; 10-SaaS Pattern A RLS enforcement</a:t>
-            </a:r>
-            <a:endParaRPr lang="en-US" sz="860" dirty="0"/>
-          </a:p>
-        </p:txBody>
-      </p:sp>
-      <p:sp>
-        <p:nvSpPr>
-          <p:cNvPr id="31" name="Text 27"/>
-          <p:cNvSpPr/>
-          <p:nvPr/>
-        </p:nvSpPr>
-        <p:spPr>
-          <a:xfrm>
-            <a:off x="4334256" y="4626864"/>
-            <a:ext cx="2615184" cy="950976"/>
+              <a:t>Cloud Run runtime enforcing RFC 8693 OBO + DPoP, Hop 2 ARD filter &amp; 10-SaaS Pattern A RLS pushdown</a:t>
+            </a:r>
+            <a:endParaRPr lang="en-US" sz="920" dirty="0"/>
+          </a:p>
+        </p:txBody>
+      </p:sp>
+      <p:sp>
+        <p:nvSpPr>
+          <p:cNvPr id="29" name="Text 27"/>
+          <p:cNvSpPr/>
+          <p:nvPr/>
+        </p:nvSpPr>
+        <p:spPr>
+          <a:xfrm>
+            <a:off x="621792" y="4480560"/>
+            <a:ext cx="6309360" cy="1060704"/>
           </a:xfrm>
           <a:prstGeom prst="rect">
             <a:avLst/>
@@ -4976,7 +4928,7 @@
               <a:buNone/>
             </a:pPr>
             <a:r>
-              <a:rPr lang="en-US" sz="780" dirty="0">
+              <a:rPr lang="en-US" sz="840" dirty="0">
                 <a:solidFill>
                   <a:srgbClr val="5F6368"/>
                 </a:solidFill>
@@ -4986,14 +4938,14 @@
               </a:rPr>
               <a:t>• Service: cymbal-multi-tenant-patterns (Cloud Run)</a:t>
             </a:r>
-            <a:endParaRPr lang="en-US" sz="780" dirty="0"/>
+            <a:endParaRPr lang="en-US" sz="840" dirty="0"/>
           </a:p>
           <a:p>
             <a:pPr indent="0" marL="0">
               <a:buNone/>
             </a:pPr>
             <a:r>
-              <a:rPr lang="en-US" sz="780" dirty="0">
+              <a:rPr lang="en-US" sz="840" dirty="0">
                 <a:solidFill>
                   <a:srgbClr val="5F6368"/>
                 </a:solidFill>
@@ -5003,14 +4955,14 @@
               </a:rPr>
               <a:t>• Intra-Cloud: run_breach_simulations.py (10/10 PASS)</a:t>
             </a:r>
-            <a:endParaRPr lang="en-US" sz="780" dirty="0"/>
+            <a:endParaRPr lang="en-US" sz="840" dirty="0"/>
           </a:p>
           <a:p>
             <a:pPr indent="0" marL="0">
               <a:buNone/>
             </a:pPr>
             <a:r>
-              <a:rPr lang="en-US" sz="780" dirty="0">
+              <a:rPr lang="en-US" sz="840" dirty="0">
                 <a:solidFill>
                   <a:srgbClr val="5F6368"/>
                 </a:solidFill>
@@ -5018,16 +4970,16 @@
                 <a:ea typeface="Roboto" pitchFamily="34" charset="-122"/>
                 <a:cs typeface="Roboto" pitchFamily="34" charset="-120"/>
               </a:rPr>
-              <a:t>• Inter-Cloud: 10/10 Pooled SaaS MCP &amp; :3001..3010 PASS</a:t>
-            </a:r>
-            <a:endParaRPr lang="en-US" sz="780" dirty="0"/>
+              <a:t>• Inter-Cloud: 10/10 Pooled SaaS MCP Targets PASS</a:t>
+            </a:r>
+            <a:endParaRPr lang="en-US" sz="840" dirty="0"/>
           </a:p>
           <a:p>
             <a:pPr indent="0" marL="0">
               <a:buNone/>
             </a:pPr>
             <a:r>
-              <a:rPr lang="en-US" sz="780" dirty="0">
+              <a:rPr lang="en-US" sz="840" dirty="0">
                 <a:solidFill>
                   <a:srgbClr val="5F6368"/>
                 </a:solidFill>
@@ -5035,22 +4987,22 @@
                 <a:ea typeface="Roboto" pitchFamily="34" charset="-122"/>
                 <a:cs typeface="Roboto" pitchFamily="34" charset="-120"/>
               </a:rPr>
-              <a:t>• Aspect Ratio: Native 16:9 (1920×1080)</a:t>
-            </a:r>
-            <a:endParaRPr lang="en-US" sz="780" dirty="0"/>
-          </a:p>
-        </p:txBody>
-      </p:sp>
-      <p:sp>
-        <p:nvSpPr>
-          <p:cNvPr id="32" name="Text 28"/>
-          <p:cNvSpPr/>
-          <p:nvPr/>
-        </p:nvSpPr>
-        <p:spPr>
-          <a:xfrm>
-            <a:off x="4334256" y="5632704"/>
-            <a:ext cx="2615184" cy="201168"/>
+              <a:t>• Artifact: run_breach_simulations.py</a:t>
+            </a:r>
+            <a:endParaRPr lang="en-US" sz="840" dirty="0"/>
+          </a:p>
+        </p:txBody>
+      </p:sp>
+      <p:sp>
+        <p:nvSpPr>
+          <p:cNvPr id="30" name="Text 28"/>
+          <p:cNvSpPr/>
+          <p:nvPr/>
+        </p:nvSpPr>
+        <p:spPr>
+          <a:xfrm>
+            <a:off x="621792" y="5614416"/>
+            <a:ext cx="6309360" cy="201168"/>
           </a:xfrm>
           <a:prstGeom prst="rect">
             <a:avLst/>
@@ -5066,7 +5018,7 @@
               <a:buNone/>
             </a:pPr>
             <a:r>
-              <a:rPr lang="en-US" sz="680" dirty="0">
+              <a:rPr lang="en-US" sz="720" dirty="0">
                 <a:solidFill>
                   <a:srgbClr val="5F6368"/>
                 </a:solidFill>
@@ -5074,15 +5026,15 @@
                 <a:ea typeface="Courier New" pitchFamily="34" charset="-122"/>
                 <a:cs typeface="Courier New" pitchFamily="34" charset="-120"/>
               </a:rPr>
-              <a:t>Source: screenshots/cloud-console/gcp_console_01_cloud_run_source_editor.png</a:t>
-            </a:r>
-            <a:endParaRPr lang="en-US" sz="680" dirty="0"/>
-          </a:p>
-        </p:txBody>
-      </p:sp>
-      <p:sp>
-        <p:nvSpPr>
-          <p:cNvPr id="33" name="Shape 29"/>
+              <a:t>Source Module: workstream-2-pattern-a-pooled/2.5-breach-simulation-suite/run_breach_simulations.py</a:t>
+            </a:r>
+            <a:endParaRPr lang="en-US" sz="720" dirty="0"/>
+          </a:p>
+        </p:txBody>
+      </p:sp>
+      <p:sp>
+        <p:nvSpPr>
+          <p:cNvPr id="31" name="Shape 29"/>
           <p:cNvSpPr/>
           <p:nvPr/>
         </p:nvSpPr>
@@ -5109,7 +5061,7 @@
       </p:sp>
       <p:sp>
         <p:nvSpPr>
-          <p:cNvPr id="34" name="Shape 30"/>
+          <p:cNvPr id="32" name="Shape 30"/>
           <p:cNvSpPr/>
           <p:nvPr/>
         </p:nvSpPr>
@@ -5129,7 +5081,7 @@
       </p:sp>
       <p:sp>
         <p:nvSpPr>
-          <p:cNvPr id="35" name="Shape 31"/>
+          <p:cNvPr id="33" name="Shape 31"/>
           <p:cNvSpPr/>
           <p:nvPr/>
         </p:nvSpPr>
@@ -5151,7 +5103,7 @@
       </p:sp>
       <p:sp>
         <p:nvSpPr>
-          <p:cNvPr id="36" name="Text 32"/>
+          <p:cNvPr id="34" name="Text 32"/>
           <p:cNvSpPr/>
           <p:nvPr/>
         </p:nvSpPr>
@@ -5190,7 +5142,7 @@
       </p:sp>
       <p:sp>
         <p:nvSpPr>
-          <p:cNvPr id="37" name="Text 33"/>
+          <p:cNvPr id="35" name="Text 33"/>
           <p:cNvSpPr/>
           <p:nvPr/>
         </p:nvSpPr>
@@ -5229,7 +5181,7 @@
       </p:sp>
       <p:sp>
         <p:nvSpPr>
-          <p:cNvPr id="38" name="Text 34"/>
+          <p:cNvPr id="36" name="Text 34"/>
           <p:cNvSpPr/>
           <p:nvPr/>
         </p:nvSpPr>
@@ -5268,7 +5220,7 @@
       </p:sp>
       <p:sp>
         <p:nvSpPr>
-          <p:cNvPr id="39" name="Shape 35"/>
+          <p:cNvPr id="37" name="Shape 35"/>
           <p:cNvSpPr/>
           <p:nvPr/>
         </p:nvSpPr>
@@ -5295,7 +5247,7 @@
       </p:sp>
       <p:sp>
         <p:nvSpPr>
-          <p:cNvPr id="40" name="Shape 36"/>
+          <p:cNvPr id="38" name="Shape 36"/>
           <p:cNvSpPr/>
           <p:nvPr/>
         </p:nvSpPr>
@@ -5315,7 +5267,7 @@
       </p:sp>
       <p:sp>
         <p:nvSpPr>
-          <p:cNvPr id="41" name="Shape 37"/>
+          <p:cNvPr id="39" name="Shape 37"/>
           <p:cNvSpPr/>
           <p:nvPr/>
         </p:nvSpPr>
@@ -5337,7 +5289,7 @@
       </p:sp>
       <p:sp>
         <p:nvSpPr>
-          <p:cNvPr id="42" name="Text 38"/>
+          <p:cNvPr id="40" name="Text 38"/>
           <p:cNvSpPr/>
           <p:nvPr/>
         </p:nvSpPr>
@@ -5376,7 +5328,7 @@
       </p:sp>
       <p:sp>
         <p:nvSpPr>
-          <p:cNvPr id="43" name="Text 39"/>
+          <p:cNvPr id="41" name="Text 39"/>
           <p:cNvSpPr/>
           <p:nvPr/>
         </p:nvSpPr>
@@ -5415,7 +5367,7 @@
       </p:sp>
       <p:sp>
         <p:nvSpPr>
-          <p:cNvPr id="44" name="Text 40"/>
+          <p:cNvPr id="42" name="Text 40"/>
           <p:cNvSpPr/>
           <p:nvPr/>
         </p:nvSpPr>
@@ -5454,7 +5406,7 @@
       </p:sp>
       <p:sp>
         <p:nvSpPr>
-          <p:cNvPr id="45" name="Shape 41"/>
+          <p:cNvPr id="43" name="Shape 41"/>
           <p:cNvSpPr/>
           <p:nvPr/>
         </p:nvSpPr>
@@ -5481,7 +5433,7 @@
       </p:sp>
       <p:sp>
         <p:nvSpPr>
-          <p:cNvPr id="46" name="Shape 42"/>
+          <p:cNvPr id="44" name="Shape 42"/>
           <p:cNvSpPr/>
           <p:nvPr/>
         </p:nvSpPr>
@@ -5501,7 +5453,7 @@
       </p:sp>
       <p:sp>
         <p:nvSpPr>
-          <p:cNvPr id="47" name="Shape 43"/>
+          <p:cNvPr id="45" name="Shape 43"/>
           <p:cNvSpPr/>
           <p:nvPr/>
         </p:nvSpPr>
@@ -5523,7 +5475,7 @@
       </p:sp>
       <p:sp>
         <p:nvSpPr>
-          <p:cNvPr id="48" name="Text 44"/>
+          <p:cNvPr id="46" name="Text 44"/>
           <p:cNvSpPr/>
           <p:nvPr/>
         </p:nvSpPr>
@@ -5562,7 +5514,7 @@
       </p:sp>
       <p:sp>
         <p:nvSpPr>
-          <p:cNvPr id="49" name="Text 45"/>
+          <p:cNvPr id="47" name="Text 45"/>
           <p:cNvSpPr/>
           <p:nvPr/>
         </p:nvSpPr>
@@ -5601,7 +5553,7 @@
       </p:sp>
       <p:sp>
         <p:nvSpPr>
-          <p:cNvPr id="50" name="Text 46"/>
+          <p:cNvPr id="48" name="Text 46"/>
           <p:cNvSpPr/>
           <p:nvPr/>
         </p:nvSpPr>
@@ -5640,7 +5592,7 @@
       </p:sp>
       <p:sp>
         <p:nvSpPr>
-          <p:cNvPr id="51" name="Shape 47"/>
+          <p:cNvPr id="49" name="Shape 47"/>
           <p:cNvSpPr/>
           <p:nvPr/>
         </p:nvSpPr>
@@ -5667,7 +5619,7 @@
       </p:sp>
       <p:sp>
         <p:nvSpPr>
-          <p:cNvPr id="52" name="Shape 48"/>
+          <p:cNvPr id="50" name="Shape 48"/>
           <p:cNvSpPr/>
           <p:nvPr/>
         </p:nvSpPr>
@@ -5687,7 +5639,7 @@
       </p:sp>
       <p:sp>
         <p:nvSpPr>
-          <p:cNvPr id="53" name="Shape 49"/>
+          <p:cNvPr id="51" name="Shape 49"/>
           <p:cNvSpPr/>
           <p:nvPr/>
         </p:nvSpPr>
@@ -5709,7 +5661,7 @@
       </p:sp>
       <p:sp>
         <p:nvSpPr>
-          <p:cNvPr id="54" name="Text 50"/>
+          <p:cNvPr id="52" name="Text 50"/>
           <p:cNvSpPr/>
           <p:nvPr/>
         </p:nvSpPr>
@@ -5748,7 +5700,7 @@
       </p:sp>
       <p:sp>
         <p:nvSpPr>
-          <p:cNvPr id="55" name="Text 51"/>
+          <p:cNvPr id="53" name="Text 51"/>
           <p:cNvSpPr/>
           <p:nvPr/>
         </p:nvSpPr>
@@ -5787,7 +5739,7 @@
       </p:sp>
       <p:sp>
         <p:nvSpPr>
-          <p:cNvPr id="56" name="Text 52"/>
+          <p:cNvPr id="54" name="Text 52"/>
           <p:cNvSpPr/>
           <p:nvPr/>
         </p:nvSpPr>
@@ -5818,7 +5770,7 @@
                 <a:ea typeface="Roboto" pitchFamily="34" charset="-122"/>
                 <a:cs typeface="Roboto" pitchFamily="34" charset="-120"/>
               </a:rPr>
-              <a:t>Enforces HTTP 429 Retry-After noisy-neighbor bulkheads plus 10/10 Pattern A Inter-Cloud AWS AgentCore MCP &amp; :3001..3010 RLS twin assertions.</a:t>
+              <a:t>Enforces HTTP 429 Retry-After noisy-neighbor bulkheads plus 10/10 Pattern A Inter-Cloud AWS AgentCore MCP RLS assertions.</a:t>
             </a:r>
             <a:endParaRPr lang="en-US" sz="860" dirty="0"/>
           </a:p>
@@ -5826,7 +5778,7 @@
       </p:sp>
       <p:sp>
         <p:nvSpPr>
-          <p:cNvPr id="57" name="Text 53"/>
+          <p:cNvPr id="55" name="Text 53"/>
           <p:cNvSpPr/>
           <p:nvPr/>
         </p:nvSpPr>
@@ -5871,7 +5823,7 @@
                 <a:ea typeface="Roboto" pitchFamily="34" charset="-122"/>
                 <a:cs typeface="Roboto" pitchFamily="34" charset="-120"/>
               </a:rPr>
-              <a:t>Workstream 2 • Pattern A — High-Density Pooled Architecture  •  Act III Forensic Verification Audit: Grounded Google Cloud Console Screenshots + 100% Editable Callouts  •  </a:t>
+              <a:t>Workstream 2 • Pattern A — High-Density Pooled Architecture  •  Act III Forensic Verification Audit: Grounded Google Cloud CLI &amp; Telemetry Receipts + 100% Editable Callouts  •  </a:t>
             </a:r>
             <a:pPr algn="l" indent="0" marL="0">
               <a:buNone/>

--- a/slides/ws2-pattern-a-pooled-editable-slides.pptx
+++ b/slides/ws2-pattern-a-pooled-editable-slides.pptx
@@ -622,7 +622,7 @@
           <a:p>
             <a:r>
               <a:rPr lang="en-US" dirty="0"/>
-              <a:t>Here are the live Dual-Plane receipts backing up that ten-out-of-ten scorecard. On the left, you can see our deployed pooled Cloud Run service and BigQuery Row-Level Security policies in Google Cloud Console; on the right, the verification cards confirm ninety percent shared prompt cache efficiency, 10/10 Intra-Cloud breach simulations blocked, and 10/10 Inter-Cloud Pattern A SaaS MCP and live EC2 execution twin RLS assertions passed across ports 3001 through 3010.</a:t>
+              <a:t>Here are the live Dual-Plane receipts backing up that ten-out-of-ten scorecard. On the left, you can see our deployed pooled Cloud Run service and BigQuery Row-Level Security policies in Google Cloud Console; on the right, the verification cards confirm ninety percent shared prompt cache efficiency, 10/10 Intra-Cloud breach simulations blocked, and 10/10 Inter-Cloud Pattern A 10-SaaS MCP RLS assertions passed.</a:t>
             </a:r>
             <a:endParaRPr lang="en-US" dirty="0"/>
           </a:p>
@@ -20459,7 +20459,7 @@
                 <a:ea typeface="Arial" pitchFamily="34" charset="-122"/>
                 <a:cs typeface="Arial" pitchFamily="34" charset="-120"/>
               </a:rPr>
-              <a:t>Shared GCP Project: cymbal-build-sandbox / cymbal-pooled-saas-prod</a:t>
+              <a:t>Shared GCP Project: cymbal-build-sandbox</a:t>
             </a:r>
             <a:endParaRPr lang="en-US" sz="460" dirty="0"/>
           </a:p>

--- a/slides/ws2-pattern-a-pooled-editable-slides.pptx
+++ b/slides/ws2-pattern-a-pooled-editable-slides.pptx
@@ -2553,8 +2553,8 @@
         </p:nvSpPr>
         <p:spPr>
           <a:xfrm>
-            <a:off x="841248" y="4151376"/>
-            <a:ext cx="1307592" cy="365760"/>
+            <a:off x="841248" y="4142232"/>
+            <a:ext cx="1307592" cy="384048"/>
           </a:xfrm>
           <a:prstGeom prst="rect">
             <a:avLst/>
@@ -2570,7 +2570,7 @@
               <a:buNone/>
             </a:pPr>
             <a:r>
-              <a:rPr lang="en-US" sz="800" b="1" dirty="0">
+              <a:rPr lang="en-US" sz="760" b="1" dirty="0">
                 <a:solidFill>
                   <a:srgbClr val="3C4043"/>
                 </a:solidFill>
@@ -2578,9 +2578,9 @@
                 <a:ea typeface="Google Sans" pitchFamily="34" charset="-122"/>
                 <a:cs typeface="Google Sans" pitchFamily="34" charset="-120"/>
               </a:rPr>
-              <a:t>Solving the Commercial SaaS Margin Equation</a:t>
-            </a:r>
-            <a:endParaRPr lang="en-US" sz="800" dirty="0"/>
+              <a:t>Solving the Commercial SaaS Margin Equat…</a:t>
+            </a:r>
+            <a:endParaRPr lang="en-US" sz="760" dirty="0"/>
           </a:p>
         </p:txBody>
       </p:sp>
@@ -2592,7 +2592,7 @@
         </p:nvSpPr>
         <p:spPr>
           <a:xfrm>
-            <a:off x="841248" y="4535424"/>
+            <a:off x="841248" y="4544568"/>
             <a:ext cx="1307592" cy="1024128"/>
           </a:xfrm>
           <a:prstGeom prst="rect">
@@ -2611,7 +2611,7 @@
               <a:buNone/>
             </a:pPr>
             <a:r>
-              <a:rPr lang="en-US" sz="720" dirty="0">
+              <a:rPr lang="en-US" sz="680" dirty="0">
                 <a:solidFill>
                   <a:srgbClr val="5F6368"/>
                 </a:solidFill>
@@ -2619,9 +2619,9 @@
                 <a:ea typeface="Roboto" pitchFamily="34" charset="-122"/>
                 <a:cs typeface="Roboto" pitchFamily="34" charset="-120"/>
               </a:rPr>
-              <a:t>Pattern A hosts hundreds of Standard Tier–Enterprise Tier commercial tenants inside one shared Google Cloud project (cymbal-control-plane) at a 120 RPM Pooled infrastructure floor.</a:t>
-            </a:r>
-            <a:endParaRPr lang="en-US" sz="720" dirty="0"/>
+              <a:t>Pattern A hosts hundreds of Standard Tier–Enterprise Tier commercial tenants inside one shared Google Cloud project (cymbal-control-plane) at a.</a:t>
+            </a:r>
+            <a:endParaRPr lang="en-US" sz="680" dirty="0"/>
           </a:p>
         </p:txBody>
       </p:sp>
@@ -2680,8 +2680,8 @@
         </p:nvSpPr>
         <p:spPr>
           <a:xfrm>
-            <a:off x="2404872" y="4151376"/>
-            <a:ext cx="1307592" cy="365760"/>
+            <a:off x="2404872" y="4142232"/>
+            <a:ext cx="1307592" cy="384048"/>
           </a:xfrm>
           <a:prstGeom prst="rect">
             <a:avLst/>
@@ -2697,7 +2697,7 @@
               <a:buNone/>
             </a:pPr>
             <a:r>
-              <a:rPr lang="en-US" sz="800" b="1" dirty="0">
+              <a:rPr lang="en-US" sz="760" b="1" dirty="0">
                 <a:solidFill>
                   <a:srgbClr val="3C4043"/>
                 </a:solidFill>
@@ -2705,9 +2705,9 @@
                 <a:ea typeface="Google Sans" pitchFamily="34" charset="-122"/>
                 <a:cs typeface="Google Sans" pitchFamily="34" charset="-120"/>
               </a:rPr>
-              <a:t>Pillar 2</a:t>
-            </a:r>
-            <a:endParaRPr lang="en-US" sz="800" dirty="0"/>
+              <a:t>Cryptographic Logical Isolation</a:t>
+            </a:r>
+            <a:endParaRPr lang="en-US" sz="760" dirty="0"/>
           </a:p>
         </p:txBody>
       </p:sp>
@@ -2719,7 +2719,7 @@
         </p:nvSpPr>
         <p:spPr>
           <a:xfrm>
-            <a:off x="2404872" y="4535424"/>
+            <a:off x="2404872" y="4544568"/>
             <a:ext cx="1307592" cy="1024128"/>
           </a:xfrm>
           <a:prstGeom prst="rect">
@@ -2738,7 +2738,7 @@
               <a:buNone/>
             </a:pPr>
             <a:r>
-              <a:rPr lang="en-US" sz="720" dirty="0">
+              <a:rPr lang="en-US" sz="680" dirty="0">
                 <a:solidFill>
                   <a:srgbClr val="5F6368"/>
                 </a:solidFill>
@@ -2746,9 +2746,9 @@
                 <a:ea typeface="Roboto" pitchFamily="34" charset="-122"/>
                 <a:cs typeface="Roboto" pitchFamily="34" charset="-120"/>
               </a:rPr>
-              <a:t>Cryptographic Logical Isolation (Zero Physical Sprawl): Instead of spinning up separate VPCs per tenant, Pattern A enforces non-bypassable tenant boundaries across all 5 runtime hops in software.</a:t>
-            </a:r>
-            <a:endParaRPr lang="en-US" sz="720" dirty="0"/>
+              <a:t>Instead of spinning up separate VPCs per tenant, Pattern A enforces non-bypassable tenant boundaries across all 5 runtime hops in software.</a:t>
+            </a:r>
+            <a:endParaRPr lang="en-US" sz="680" dirty="0"/>
           </a:p>
         </p:txBody>
       </p:sp>
@@ -2807,8 +2807,8 @@
         </p:nvSpPr>
         <p:spPr>
           <a:xfrm>
-            <a:off x="3968496" y="4151376"/>
-            <a:ext cx="1307592" cy="365760"/>
+            <a:off x="3968496" y="4142232"/>
+            <a:ext cx="1307592" cy="384048"/>
           </a:xfrm>
           <a:prstGeom prst="rect">
             <a:avLst/>
@@ -2824,7 +2824,7 @@
               <a:buNone/>
             </a:pPr>
             <a:r>
-              <a:rPr lang="en-US" sz="800" b="1" dirty="0">
+              <a:rPr lang="en-US" sz="760" b="1" dirty="0">
                 <a:solidFill>
                   <a:srgbClr val="3C4043"/>
                 </a:solidFill>
@@ -2832,9 +2832,9 @@
                 <a:ea typeface="Google Sans" pitchFamily="34" charset="-122"/>
                 <a:cs typeface="Google Sans" pitchFamily="34" charset="-120"/>
               </a:rPr>
-              <a:t>10/10 Adversarial Red-Team Attacks Neutralized</a:t>
-            </a:r>
-            <a:endParaRPr lang="en-US" sz="800" dirty="0"/>
+              <a:t>10/10 Adversarial Red-Team Attacks Neutr…</a:t>
+            </a:r>
+            <a:endParaRPr lang="en-US" sz="760" dirty="0"/>
           </a:p>
         </p:txBody>
       </p:sp>
@@ -2846,7 +2846,7 @@
         </p:nvSpPr>
         <p:spPr>
           <a:xfrm>
-            <a:off x="3968496" y="4535424"/>
+            <a:off x="3968496" y="4544568"/>
             <a:ext cx="1307592" cy="1024128"/>
           </a:xfrm>
           <a:prstGeom prst="rect">
@@ -2865,7 +2865,7 @@
               <a:buNone/>
             </a:pPr>
             <a:r>
-              <a:rPr lang="en-US" sz="720" dirty="0">
+              <a:rPr lang="en-US" sz="680" dirty="0">
                 <a:solidFill>
                   <a:srgbClr val="5F6368"/>
                 </a:solidFill>
@@ -2873,9 +2873,9 @@
                 <a:ea typeface="Roboto" pitchFamily="34" charset="-122"/>
                 <a:cs typeface="Roboto" pitchFamily="34" charset="-120"/>
               </a:rPr>
-              <a:t>Competing tenants FinVault Bank and RetailStream Corp share the exact same Cloud Run v2 workers and AlloyDB cluster with zero cross-tenant data or tool bleed.</a:t>
-            </a:r>
-            <a:endParaRPr lang="en-US" sz="720" dirty="0"/>
+              <a:t>Competing tenants FinVault Bank and RetailStream Corp share the exact same Cloud Run v2 workers and AlloyDB cluster with zero cross-tenant data.</a:t>
+            </a:r>
+            <a:endParaRPr lang="en-US" sz="680" dirty="0"/>
           </a:p>
         </p:txBody>
       </p:sp>
@@ -2934,8 +2934,8 @@
         </p:nvSpPr>
         <p:spPr>
           <a:xfrm>
-            <a:off x="5532120" y="4151376"/>
-            <a:ext cx="1307592" cy="365760"/>
+            <a:off x="5532120" y="4142232"/>
+            <a:ext cx="1307592" cy="384048"/>
           </a:xfrm>
           <a:prstGeom prst="rect">
             <a:avLst/>
@@ -2951,7 +2951,7 @@
               <a:buNone/>
             </a:pPr>
             <a:r>
-              <a:rPr lang="en-US" sz="800" b="1" dirty="0">
+              <a:rPr lang="en-US" sz="760" b="1" dirty="0">
                 <a:solidFill>
                   <a:srgbClr val="3C4043"/>
                 </a:solidFill>
@@ -2961,7 +2961,7 @@
               </a:rPr>
               <a:t>84.7% Net Inference Cost Reduction</a:t>
             </a:r>
-            <a:endParaRPr lang="en-US" sz="800" dirty="0"/>
+            <a:endParaRPr lang="en-US" sz="760" dirty="0"/>
           </a:p>
         </p:txBody>
       </p:sp>
@@ -2973,7 +2973,7 @@
         </p:nvSpPr>
         <p:spPr>
           <a:xfrm>
-            <a:off x="5532120" y="4535424"/>
+            <a:off x="5532120" y="4544568"/>
             <a:ext cx="1307592" cy="1024128"/>
           </a:xfrm>
           <a:prstGeom prst="rect">
@@ -2992,7 +2992,7 @@
               <a:buNone/>
             </a:pPr>
             <a:r>
-              <a:rPr lang="en-US" sz="720" dirty="0">
+              <a:rPr lang="en-US" sz="680" dirty="0">
                 <a:solidFill>
                   <a:srgbClr val="5F6368"/>
                 </a:solidFill>
@@ -3000,9 +3000,9 @@
                 <a:ea typeface="Roboto" pitchFamily="34" charset="-122"/>
                 <a:cs typeface="Roboto" pitchFamily="34" charset="-120"/>
               </a:rPr>
-              <a:t>A 32,000-token immutable platform runbook is cached once in Gemini 2.5 Pro ContextCacheConfig at a 90% discount, cutting billable input tokens from 34,000 to 5,200 per turn.</a:t>
-            </a:r>
-            <a:endParaRPr lang="en-US" sz="720" dirty="0"/>
+              <a:t>A 32,000-token immutable platform runbook is cached once in Gemini 2.5 Pro ContextCacheConfig at a 90% discount, cutting billable input tokens.</a:t>
+            </a:r>
+            <a:endParaRPr lang="en-US" sz="680" dirty="0"/>
           </a:p>
         </p:txBody>
       </p:sp>
@@ -3479,7 +3479,7 @@
                 <a:ea typeface="Google Sans" pitchFamily="34" charset="-122"/>
                 <a:cs typeface="Google Sans" pitchFamily="34" charset="-120"/>
               </a:rPr>
-              <a:t>L1 Pool Zones -&gt; L2 Figure 1 -&gt; L3 Hops -&gt; L4 RLS</a:t>
+              <a:t>L1 Pool Zones → L2 Figure 1 → L3 Hops → L4 RLS</a:t>
             </a:r>
             <a:endParaRPr lang="en-US" sz="850" dirty="0"/>
           </a:p>

--- a/slides/ws2-pattern-a-pooled-editable-slides.pptx
+++ b/slides/ws2-pattern-a-pooled-editable-slides.pptx
@@ -2578,7 +2578,7 @@
                 <a:ea typeface="Google Sans" pitchFamily="34" charset="-122"/>
                 <a:cs typeface="Google Sans" pitchFamily="34" charset="-120"/>
               </a:rPr>
-              <a:t>Solving the Commercial SaaS Margin Equat…</a:t>
+              <a:t>Commercial SaaS Margin Equation</a:t>
             </a:r>
             <a:endParaRPr lang="en-US" sz="760" dirty="0"/>
           </a:p>
@@ -2611,7 +2611,7 @@
               <a:buNone/>
             </a:pPr>
             <a:r>
-              <a:rPr lang="en-US" sz="680" dirty="0">
+              <a:rPr lang="en-US" sz="710" dirty="0">
                 <a:solidFill>
                   <a:srgbClr val="5F6368"/>
                 </a:solidFill>
@@ -2619,9 +2619,9 @@
                 <a:ea typeface="Roboto" pitchFamily="34" charset="-122"/>
                 <a:cs typeface="Roboto" pitchFamily="34" charset="-120"/>
               </a:rPr>
-              <a:t>Pattern A hosts hundreds of Standard Tier–Enterprise Tier commercial tenants inside one shared Google Cloud project (cymbal-control-plane) at a.</a:t>
-            </a:r>
-            <a:endParaRPr lang="en-US" sz="680" dirty="0"/>
+              <a:t>Pattern A co-hosts hundreds of commercial tenants in one shared project (cymbal-control-plane) at a 120 RPM floor.</a:t>
+            </a:r>
+            <a:endParaRPr lang="en-US" sz="710" dirty="0"/>
           </a:p>
         </p:txBody>
       </p:sp>
@@ -2738,7 +2738,7 @@
               <a:buNone/>
             </a:pPr>
             <a:r>
-              <a:rPr lang="en-US" sz="680" dirty="0">
+              <a:rPr lang="en-US" sz="710" dirty="0">
                 <a:solidFill>
                   <a:srgbClr val="5F6368"/>
                 </a:solidFill>
@@ -2746,9 +2746,9 @@
                 <a:ea typeface="Roboto" pitchFamily="34" charset="-122"/>
                 <a:cs typeface="Roboto" pitchFamily="34" charset="-120"/>
               </a:rPr>
-              <a:t>Instead of spinning up separate VPCs per tenant, Pattern A enforces non-bypassable tenant boundaries across all 5 runtime hops in software.</a:t>
-            </a:r>
-            <a:endParaRPr lang="en-US" sz="680" dirty="0"/>
+              <a:t>Rather than spinning up per-tenant VPCs, Pattern A enforces non-bypassable tenant boundaries across all 5 hops.</a:t>
+            </a:r>
+            <a:endParaRPr lang="en-US" sz="710" dirty="0"/>
           </a:p>
         </p:txBody>
       </p:sp>
@@ -2832,7 +2832,7 @@
                 <a:ea typeface="Google Sans" pitchFamily="34" charset="-122"/>
                 <a:cs typeface="Google Sans" pitchFamily="34" charset="-120"/>
               </a:rPr>
-              <a:t>10/10 Adversarial Red-Team Attacks Neutr…</a:t>
+              <a:t>10/10 Red-Team Attacks Blocked</a:t>
             </a:r>
             <a:endParaRPr lang="en-US" sz="760" dirty="0"/>
           </a:p>
@@ -2865,7 +2865,7 @@
               <a:buNone/>
             </a:pPr>
             <a:r>
-              <a:rPr lang="en-US" sz="680" dirty="0">
+              <a:rPr lang="en-US" sz="710" dirty="0">
                 <a:solidFill>
                   <a:srgbClr val="5F6368"/>
                 </a:solidFill>
@@ -2873,9 +2873,9 @@
                 <a:ea typeface="Roboto" pitchFamily="34" charset="-122"/>
                 <a:cs typeface="Roboto" pitchFamily="34" charset="-120"/>
               </a:rPr>
-              <a:t>Competing tenants FinVault Bank and RetailStream Corp share the exact same Cloud Run v2 workers and AlloyDB cluster with zero cross-tenant data.</a:t>
-            </a:r>
-            <a:endParaRPr lang="en-US" sz="680" dirty="0"/>
+              <a:t>FinVault Bank and RetailStream Corp share Cloud Run v2 workers and AlloyDB with zero cross-tenant bleed.</a:t>
+            </a:r>
+            <a:endParaRPr lang="en-US" sz="710" dirty="0"/>
           </a:p>
         </p:txBody>
       </p:sp>
@@ -2959,7 +2959,7 @@
                 <a:ea typeface="Google Sans" pitchFamily="34" charset="-122"/>
                 <a:cs typeface="Google Sans" pitchFamily="34" charset="-120"/>
               </a:rPr>
-              <a:t>84.7% Net Inference Cost Reduction</a:t>
+              <a:t>84.7% Net Inference Savings</a:t>
             </a:r>
             <a:endParaRPr lang="en-US" sz="760" dirty="0"/>
           </a:p>
@@ -2992,7 +2992,7 @@
               <a:buNone/>
             </a:pPr>
             <a:r>
-              <a:rPr lang="en-US" sz="680" dirty="0">
+              <a:rPr lang="en-US" sz="710" dirty="0">
                 <a:solidFill>
                   <a:srgbClr val="5F6368"/>
                 </a:solidFill>
@@ -3000,9 +3000,9 @@
                 <a:ea typeface="Roboto" pitchFamily="34" charset="-122"/>
                 <a:cs typeface="Roboto" pitchFamily="34" charset="-120"/>
               </a:rPr>
-              <a:t>A 32,000-token immutable platform runbook is cached once in Gemini 2.5 Pro ContextCacheConfig at a 90% discount, cutting billable input tokens.</a:t>
-            </a:r>
-            <a:endParaRPr lang="en-US" sz="680" dirty="0"/>
+              <a:t>A 32k-token immutable system runbook is cached once in ContextCacheConfig at 90% off (34,000 -&gt; 5,200 tokens).</a:t>
+            </a:r>
+            <a:endParaRPr lang="en-US" sz="710" dirty="0"/>
           </a:p>
         </p:txBody>
       </p:sp>
@@ -3956,7 +3956,7 @@
                 <a:ea typeface="Google Sans" pitchFamily="34" charset="-122"/>
                 <a:cs typeface="Google Sans" pitchFamily="34" charset="-120"/>
               </a:rPr>
-              <a:t>Verified Across 3 GCP Projects (#248990048888 • #638420508320 • #887605034827) • 12/12 Forensic PASS</a:t>
+              <a:t>Verified Across 3 GCP Projects (#248990048888 • #638420508320 • #887605034827) • 13/13 Forensic PASS</a:t>
             </a:r>
             <a:endParaRPr lang="en-US" sz="720" dirty="0"/>
           </a:p>
@@ -19019,11 +19019,11 @@
         <p:spPr>
           <a:xfrm>
             <a:off x="7443216" y="1700784"/>
-            <a:ext cx="4382719" cy="512064"/>
+            <a:ext cx="4382719" cy="594360"/>
           </a:xfrm>
           <a:prstGeom prst="roundRect">
             <a:avLst>
-              <a:gd name="adj" fmla="val 10714"/>
+              <a:gd name="adj" fmla="val 9231"/>
             </a:avLst>
           </a:prstGeom>
           <a:solidFill>
@@ -19046,7 +19046,7 @@
         <p:spPr>
           <a:xfrm>
             <a:off x="7443216" y="1700784"/>
-            <a:ext cx="64008" cy="512064"/>
+            <a:ext cx="64008" cy="594360"/>
           </a:xfrm>
           <a:prstGeom prst="rect">
             <a:avLst/>
@@ -19143,7 +19143,7 @@
               <a:buNone/>
             </a:pPr>
             <a:r>
-              <a:rPr lang="en-US" sz="740" b="1" dirty="0">
+              <a:rPr lang="en-US" sz="730" b="1" dirty="0">
                 <a:solidFill>
                   <a:srgbClr val="3C4043"/>
                 </a:solidFill>
@@ -19153,7 +19153,7 @@
               </a:rPr>
               <a:t>1. Shared Edge PEP &amp; Identity (Hop 1)</a:t>
             </a:r>
-            <a:endParaRPr lang="en-US" sz="740" dirty="0"/>
+            <a:endParaRPr lang="en-US" sz="730" dirty="0"/>
           </a:p>
         </p:txBody>
       </p:sp>
@@ -19165,8 +19165,8 @@
         </p:nvSpPr>
         <p:spPr>
           <a:xfrm>
-            <a:off x="7552944" y="1920240"/>
-            <a:ext cx="4218127" cy="265176"/>
+            <a:off x="7552944" y="1901952"/>
+            <a:ext cx="4236415" cy="374904"/>
           </a:xfrm>
           <a:prstGeom prst="rect">
             <a:avLst/>
@@ -19182,7 +19182,7 @@
               <a:buNone/>
             </a:pPr>
             <a:r>
-              <a:rPr lang="en-US" sz="670" dirty="0">
+              <a:rPr lang="en-US" sz="625" dirty="0">
                 <a:solidFill>
                   <a:srgbClr val="5F6368"/>
                 </a:solidFill>
@@ -19192,7 +19192,7 @@
               </a:rPr>
               <a:t>Terminates multi-tenant traffic at External ALB + Cloud Armor, authenticates Google/Entra OIDC via IAP, and mints RFC 9449 DPoP-bound KMS-signed tokens.</a:t>
             </a:r>
-            <a:endParaRPr lang="en-US" sz="670" dirty="0"/>
+            <a:endParaRPr lang="en-US" sz="625" dirty="0"/>
           </a:p>
         </p:txBody>
       </p:sp>
@@ -19204,12 +19204,12 @@
         </p:nvSpPr>
         <p:spPr>
           <a:xfrm>
-            <a:off x="7443216" y="2267712"/>
-            <a:ext cx="4382719" cy="512064"/>
+            <a:off x="7443216" y="2340864"/>
+            <a:ext cx="4382719" cy="594360"/>
           </a:xfrm>
           <a:prstGeom prst="roundRect">
             <a:avLst>
-              <a:gd name="adj" fmla="val 10714"/>
+              <a:gd name="adj" fmla="val 9231"/>
             </a:avLst>
           </a:prstGeom>
           <a:solidFill>
@@ -19231,8 +19231,8 @@
         </p:nvSpPr>
         <p:spPr>
           <a:xfrm>
-            <a:off x="7443216" y="2267712"/>
-            <a:ext cx="64008" cy="512064"/>
+            <a:off x="7443216" y="2340864"/>
+            <a:ext cx="64008" cy="594360"/>
           </a:xfrm>
           <a:prstGeom prst="rect">
             <a:avLst/>
@@ -19251,7 +19251,7 @@
         </p:nvSpPr>
         <p:spPr>
           <a:xfrm>
-            <a:off x="7552944" y="2313432"/>
+            <a:off x="7552944" y="2386584"/>
             <a:ext cx="804672" cy="155448"/>
           </a:xfrm>
           <a:prstGeom prst="roundRect">
@@ -19273,7 +19273,7 @@
         </p:nvSpPr>
         <p:spPr>
           <a:xfrm>
-            <a:off x="7552944" y="2313432"/>
+            <a:off x="7552944" y="2386584"/>
             <a:ext cx="804672" cy="155448"/>
           </a:xfrm>
           <a:prstGeom prst="rect">
@@ -19312,7 +19312,7 @@
         </p:nvSpPr>
         <p:spPr>
           <a:xfrm>
-            <a:off x="8412480" y="2295144"/>
+            <a:off x="8412480" y="2368296"/>
             <a:ext cx="3358591" cy="182880"/>
           </a:xfrm>
           <a:prstGeom prst="rect">
@@ -19329,7 +19329,7 @@
               <a:buNone/>
             </a:pPr>
             <a:r>
-              <a:rPr lang="en-US" sz="740" b="1" dirty="0">
+              <a:rPr lang="en-US" sz="730" b="1" dirty="0">
                 <a:solidFill>
                   <a:srgbClr val="3C4043"/>
                 </a:solidFill>
@@ -19339,7 +19339,7 @@
               </a:rPr>
               <a:t>2. Central Governance, Catalog &amp; FinOps (Hop 2)</a:t>
             </a:r>
-            <a:endParaRPr lang="en-US" sz="740" dirty="0"/>
+            <a:endParaRPr lang="en-US" sz="730" dirty="0"/>
           </a:p>
         </p:txBody>
       </p:sp>
@@ -19351,8 +19351,8 @@
         </p:nvSpPr>
         <p:spPr>
           <a:xfrm>
-            <a:off x="7552944" y="2487168"/>
-            <a:ext cx="4218127" cy="265176"/>
+            <a:off x="7552944" y="2542032"/>
+            <a:ext cx="4236415" cy="374904"/>
           </a:xfrm>
           <a:prstGeom prst="rect">
             <a:avLst/>
@@ -19368,7 +19368,7 @@
               <a:buNone/>
             </a:pPr>
             <a:r>
-              <a:rPr lang="en-US" sz="670" dirty="0">
+              <a:rPr lang="en-US" sz="625" dirty="0">
                 <a:solidFill>
                   <a:srgbClr val="5F6368"/>
                 </a:solidFill>
@@ -19378,7 +19378,7 @@
               </a:rPr>
               <a:t>Filters Discovery Engine Agent Catalog ACLs, manages shared ContextCacheConfig prefixes, and streams PII-redacted OTel spans to BigQuery FinOps.</a:t>
             </a:r>
-            <a:endParaRPr lang="en-US" sz="670" dirty="0"/>
+            <a:endParaRPr lang="en-US" sz="625" dirty="0"/>
           </a:p>
         </p:txBody>
       </p:sp>
@@ -19390,12 +19390,12 @@
         </p:nvSpPr>
         <p:spPr>
           <a:xfrm>
-            <a:off x="7443216" y="2834640"/>
-            <a:ext cx="4382719" cy="512064"/>
+            <a:off x="7443216" y="2980944"/>
+            <a:ext cx="4382719" cy="594360"/>
           </a:xfrm>
           <a:prstGeom prst="roundRect">
             <a:avLst>
-              <a:gd name="adj" fmla="val 10714"/>
+              <a:gd name="adj" fmla="val 9231"/>
             </a:avLst>
           </a:prstGeom>
           <a:solidFill>
@@ -19417,8 +19417,8 @@
         </p:nvSpPr>
         <p:spPr>
           <a:xfrm>
-            <a:off x="7443216" y="2834640"/>
-            <a:ext cx="64008" cy="512064"/>
+            <a:off x="7443216" y="2980944"/>
+            <a:ext cx="64008" cy="594360"/>
           </a:xfrm>
           <a:prstGeom prst="rect">
             <a:avLst/>
@@ -19437,7 +19437,7 @@
         </p:nvSpPr>
         <p:spPr>
           <a:xfrm>
-            <a:off x="7552944" y="2880360"/>
+            <a:off x="7552944" y="3026664"/>
             <a:ext cx="804672" cy="155448"/>
           </a:xfrm>
           <a:prstGeom prst="roundRect">
@@ -19459,7 +19459,7 @@
         </p:nvSpPr>
         <p:spPr>
           <a:xfrm>
-            <a:off x="7552944" y="2880360"/>
+            <a:off x="7552944" y="3026664"/>
             <a:ext cx="804672" cy="155448"/>
           </a:xfrm>
           <a:prstGeom prst="rect">
@@ -19498,7 +19498,7 @@
         </p:nvSpPr>
         <p:spPr>
           <a:xfrm>
-            <a:off x="8412480" y="2862072"/>
+            <a:off x="8412480" y="3008376"/>
             <a:ext cx="3358591" cy="182880"/>
           </a:xfrm>
           <a:prstGeom prst="rect">
@@ -19515,7 +19515,7 @@
               <a:buNone/>
             </a:pPr>
             <a:r>
-              <a:rPr lang="en-US" sz="740" b="1" dirty="0">
+              <a:rPr lang="en-US" sz="730" b="1" dirty="0">
                 <a:solidFill>
                   <a:srgbClr val="3C4043"/>
                 </a:solidFill>
@@ -19525,7 +19525,7 @@
               </a:rPr>
               <a:t>3A. Shared Pooled Agent Engine, Valkey Bulkheads &amp; Model Armor (Hops 3 &amp; 4)</a:t>
             </a:r>
-            <a:endParaRPr lang="en-US" sz="740" dirty="0"/>
+            <a:endParaRPr lang="en-US" sz="730" dirty="0"/>
           </a:p>
         </p:txBody>
       </p:sp>
@@ -19537,8 +19537,8 @@
         </p:nvSpPr>
         <p:spPr>
           <a:xfrm>
-            <a:off x="7552944" y="3054096"/>
-            <a:ext cx="4218127" cy="265176"/>
+            <a:off x="7552944" y="3182112"/>
+            <a:ext cx="4236415" cy="374904"/>
           </a:xfrm>
           <a:prstGeom prst="rect">
             <a:avLst/>
@@ -19554,7 +19554,7 @@
               <a:buNone/>
             </a:pPr>
             <a:r>
-              <a:rPr lang="en-US" sz="670" dirty="0">
+              <a:rPr lang="en-US" sz="595" dirty="0">
                 <a:solidFill>
                   <a:srgbClr val="5F6368"/>
                 </a:solidFill>
@@ -19564,7 +19564,7 @@
               </a:rPr>
               <a:t>Executes shared ADK agents in one unified pooled runtime with Memorystore Valkey RPM bulkheads (120/600 RPM), ContextCacheConfig (90% savings), and inline Model Armor.</a:t>
             </a:r>
-            <a:endParaRPr lang="en-US" sz="670" dirty="0"/>
+            <a:endParaRPr lang="en-US" sz="595" dirty="0"/>
           </a:p>
         </p:txBody>
       </p:sp>
@@ -19576,12 +19576,12 @@
         </p:nvSpPr>
         <p:spPr>
           <a:xfrm>
-            <a:off x="7443216" y="3401568"/>
-            <a:ext cx="4382719" cy="512064"/>
+            <a:off x="7443216" y="3621024"/>
+            <a:ext cx="4382719" cy="594360"/>
           </a:xfrm>
           <a:prstGeom prst="roundRect">
             <a:avLst>
-              <a:gd name="adj" fmla="val 10714"/>
+              <a:gd name="adj" fmla="val 9231"/>
             </a:avLst>
           </a:prstGeom>
           <a:solidFill>
@@ -19603,8 +19603,8 @@
         </p:nvSpPr>
         <p:spPr>
           <a:xfrm>
-            <a:off x="7443216" y="3401568"/>
-            <a:ext cx="64008" cy="512064"/>
+            <a:off x="7443216" y="3621024"/>
+            <a:ext cx="64008" cy="594360"/>
           </a:xfrm>
           <a:prstGeom prst="rect">
             <a:avLst/>
@@ -19623,7 +19623,7 @@
         </p:nvSpPr>
         <p:spPr>
           <a:xfrm>
-            <a:off x="7552944" y="3447288"/>
+            <a:off x="7552944" y="3666744"/>
             <a:ext cx="804672" cy="155448"/>
           </a:xfrm>
           <a:prstGeom prst="roundRect">
@@ -19645,7 +19645,7 @@
         </p:nvSpPr>
         <p:spPr>
           <a:xfrm>
-            <a:off x="7552944" y="3447288"/>
+            <a:off x="7552944" y="3666744"/>
             <a:ext cx="804672" cy="155448"/>
           </a:xfrm>
           <a:prstGeom prst="rect">
@@ -19684,7 +19684,7 @@
         </p:nvSpPr>
         <p:spPr>
           <a:xfrm>
-            <a:off x="8412480" y="3429000"/>
+            <a:off x="8412480" y="3648456"/>
             <a:ext cx="3358591" cy="182880"/>
           </a:xfrm>
           <a:prstGeom prst="rect">
@@ -19701,7 +19701,7 @@
               <a:buNone/>
             </a:pPr>
             <a:r>
-              <a:rPr lang="en-US" sz="740" b="1" dirty="0">
+              <a:rPr lang="en-US" sz="730" b="1" dirty="0">
                 <a:solidFill>
                   <a:srgbClr val="3C4043"/>
                 </a:solidFill>
@@ -19711,7 +19711,7 @@
               </a:rPr>
               <a:t>3B. Shared AlloyDB (FORCE RLS), Memory Bank &amp; BigQuery RLS (Hop 5)</a:t>
             </a:r>
-            <a:endParaRPr lang="en-US" sz="740" dirty="0"/>
+            <a:endParaRPr lang="en-US" sz="730" dirty="0"/>
           </a:p>
         </p:txBody>
       </p:sp>
@@ -19723,8 +19723,8 @@
         </p:nvSpPr>
         <p:spPr>
           <a:xfrm>
-            <a:off x="7552944" y="3621024"/>
-            <a:ext cx="4218127" cy="265176"/>
+            <a:off x="7552944" y="3822192"/>
+            <a:ext cx="4236415" cy="374904"/>
           </a:xfrm>
           <a:prstGeom prst="rect">
             <a:avLst/>
@@ -19740,7 +19740,7 @@
               <a:buNone/>
             </a:pPr>
             <a:r>
-              <a:rPr lang="en-US" sz="670" dirty="0">
+              <a:rPr lang="en-US" sz="595" dirty="0">
                 <a:solidFill>
                   <a:srgbClr val="5F6368"/>
                 </a:solidFill>
@@ -19750,7 +19750,7 @@
               </a:rPr>
               <a:t>Co-hosts all tenants in one shared database and memory tier inside cymbal-pooled-saas-prod, enforcing SET LOCAL app.current_tenant_id, 5-level {tenant_id}:* namespaces, and 3LO DPoP binding.</a:t>
             </a:r>
-            <a:endParaRPr lang="en-US" sz="670" dirty="0"/>
+            <a:endParaRPr lang="en-US" sz="595" dirty="0"/>
           </a:p>
         </p:txBody>
       </p:sp>
@@ -19762,8 +19762,8 @@
         </p:nvSpPr>
         <p:spPr>
           <a:xfrm>
-            <a:off x="7461504" y="4005072"/>
-            <a:ext cx="4346143" cy="164592"/>
+            <a:off x="7461504" y="4288536"/>
+            <a:ext cx="4346143" cy="155448"/>
           </a:xfrm>
           <a:prstGeom prst="rect">
             <a:avLst/>
@@ -19779,7 +19779,7 @@
               <a:buNone/>
             </a:pPr>
             <a:r>
-              <a:rPr lang="en-US" sz="720" b="1" dirty="0">
+              <a:rPr lang="en-US" sz="710" b="1" dirty="0">
                 <a:solidFill>
                   <a:srgbClr val="5F6368"/>
                 </a:solidFill>
@@ -19789,7 +19789,7 @@
               </a:rPr>
               <a:t>KEY ARCHITECTURAL WALKTHROUGH POINTS</a:t>
             </a:r>
-            <a:endParaRPr lang="en-US" sz="720" dirty="0"/>
+            <a:endParaRPr lang="en-US" sz="710" dirty="0"/>
           </a:p>
         </p:txBody>
       </p:sp>
@@ -19801,12 +19801,12 @@
         </p:nvSpPr>
         <p:spPr>
           <a:xfrm>
-            <a:off x="7443216" y="4187952"/>
-            <a:ext cx="4382719" cy="428854"/>
+            <a:off x="7443216" y="4453128"/>
+            <a:ext cx="4382719" cy="378562"/>
           </a:xfrm>
           <a:prstGeom prst="roundRect">
             <a:avLst>
-              <a:gd name="adj" fmla="val 12793"/>
+              <a:gd name="adj" fmla="val 14493"/>
             </a:avLst>
           </a:prstGeom>
           <a:solidFill>
@@ -19828,7 +19828,7 @@
         </p:nvSpPr>
         <p:spPr>
           <a:xfrm>
-            <a:off x="7516368" y="4301338"/>
+            <a:off x="7516368" y="4541825"/>
             <a:ext cx="219456" cy="201168"/>
           </a:xfrm>
           <a:prstGeom prst="roundRect">
@@ -19850,7 +19850,7 @@
         </p:nvSpPr>
         <p:spPr>
           <a:xfrm>
-            <a:off x="7516368" y="4301338"/>
+            <a:off x="7516368" y="4541825"/>
             <a:ext cx="219456" cy="201168"/>
           </a:xfrm>
           <a:prstGeom prst="rect">
@@ -19889,8 +19889,8 @@
         </p:nvSpPr>
         <p:spPr>
           <a:xfrm>
-            <a:off x="7790688" y="4215384"/>
-            <a:ext cx="3980383" cy="373990"/>
+            <a:off x="7790688" y="4471416"/>
+            <a:ext cx="3980383" cy="341986"/>
           </a:xfrm>
           <a:prstGeom prst="rect">
             <a:avLst/>
@@ -19906,7 +19906,7 @@
               <a:buNone/>
             </a:pPr>
             <a:r>
-              <a:rPr lang="en-US" sz="690" dirty="0">
+              <a:rPr lang="en-US" sz="675" dirty="0">
                 <a:solidFill>
                   <a:srgbClr val="5F6368"/>
                 </a:solidFill>
@@ -19916,7 +19916,7 @@
               </a:rPr>
               <a:t>Competing tenants FinVault Bank (Enterprise) and RetailStream Corp (Standard) enter the single shared GCP project (cymbal-pooled-saas-prod) through one External Application Load Balancer.</a:t>
             </a:r>
-            <a:endParaRPr lang="en-US" sz="690" dirty="0"/>
+            <a:endParaRPr lang="en-US" sz="675" dirty="0"/>
           </a:p>
         </p:txBody>
       </p:sp>
@@ -19928,12 +19928,12 @@
         </p:nvSpPr>
         <p:spPr>
           <a:xfrm>
-            <a:off x="7443216" y="4667098"/>
-            <a:ext cx="4382719" cy="428854"/>
+            <a:off x="7443216" y="4872838"/>
+            <a:ext cx="4382719" cy="378562"/>
           </a:xfrm>
           <a:prstGeom prst="roundRect">
             <a:avLst>
-              <a:gd name="adj" fmla="val 12793"/>
+              <a:gd name="adj" fmla="val 14493"/>
             </a:avLst>
           </a:prstGeom>
           <a:solidFill>
@@ -19955,7 +19955,7 @@
         </p:nvSpPr>
         <p:spPr>
           <a:xfrm>
-            <a:off x="7516368" y="4780483"/>
+            <a:off x="7516368" y="4961534"/>
             <a:ext cx="219456" cy="201168"/>
           </a:xfrm>
           <a:prstGeom prst="roundRect">
@@ -19977,7 +19977,7 @@
         </p:nvSpPr>
         <p:spPr>
           <a:xfrm>
-            <a:off x="7516368" y="4780483"/>
+            <a:off x="7516368" y="4961534"/>
             <a:ext cx="219456" cy="201168"/>
           </a:xfrm>
           <a:prstGeom prst="rect">
@@ -20016,8 +20016,8 @@
         </p:nvSpPr>
         <p:spPr>
           <a:xfrm>
-            <a:off x="7790688" y="4694530"/>
-            <a:ext cx="3980383" cy="373990"/>
+            <a:off x="7790688" y="4891126"/>
+            <a:ext cx="3980383" cy="341986"/>
           </a:xfrm>
           <a:prstGeom prst="rect">
             <a:avLst/>
@@ -20033,7 +20033,7 @@
               <a:buNone/>
             </a:pPr>
             <a:r>
-              <a:rPr lang="en-US" sz="690" dirty="0">
+              <a:rPr lang="en-US" sz="675" dirty="0">
                 <a:solidFill>
                   <a:srgbClr val="5F6368"/>
                 </a:solidFill>
@@ -20043,7 +20043,7 @@
               </a:rPr>
               <a:t>Zone 1 (Hop 1 Shared Edge PEP): Cloud Armor strips spoofed X-Tenant-Id headers and IAP + STS mints RFC 9449 DPoP-bound CryptographicContext tokens.</a:t>
             </a:r>
-            <a:endParaRPr lang="en-US" sz="690" dirty="0"/>
+            <a:endParaRPr lang="en-US" sz="675" dirty="0"/>
           </a:p>
         </p:txBody>
       </p:sp>
@@ -20055,12 +20055,12 @@
         </p:nvSpPr>
         <p:spPr>
           <a:xfrm>
-            <a:off x="7443216" y="5145329"/>
-            <a:ext cx="4382719" cy="428854"/>
+            <a:off x="7443216" y="5291633"/>
+            <a:ext cx="4382719" cy="378562"/>
           </a:xfrm>
           <a:prstGeom prst="roundRect">
             <a:avLst>
-              <a:gd name="adj" fmla="val 12793"/>
+              <a:gd name="adj" fmla="val 14493"/>
             </a:avLst>
           </a:prstGeom>
           <a:solidFill>
@@ -20082,7 +20082,7 @@
         </p:nvSpPr>
         <p:spPr>
           <a:xfrm>
-            <a:off x="7516368" y="5258714"/>
+            <a:off x="7516368" y="5380330"/>
             <a:ext cx="219456" cy="201168"/>
           </a:xfrm>
           <a:prstGeom prst="roundRect">
@@ -20104,7 +20104,7 @@
         </p:nvSpPr>
         <p:spPr>
           <a:xfrm>
-            <a:off x="7516368" y="5258714"/>
+            <a:off x="7516368" y="5380330"/>
             <a:ext cx="219456" cy="201168"/>
           </a:xfrm>
           <a:prstGeom prst="rect">
@@ -20143,8 +20143,8 @@
         </p:nvSpPr>
         <p:spPr>
           <a:xfrm>
-            <a:off x="7790688" y="5172761"/>
-            <a:ext cx="3980383" cy="373990"/>
+            <a:off x="7790688" y="5309921"/>
+            <a:ext cx="3980383" cy="341986"/>
           </a:xfrm>
           <a:prstGeom prst="rect">
             <a:avLst/>
@@ -20160,7 +20160,7 @@
               <a:buNone/>
             </a:pPr>
             <a:r>
-              <a:rPr lang="en-US" sz="690" dirty="0">
+              <a:rPr lang="en-US" sz="675" dirty="0">
                 <a:solidFill>
                   <a:srgbClr val="5F6368"/>
                 </a:solidFill>
@@ -20170,7 +20170,7 @@
               </a:rPr>
               <a:t>Zone 2 (Hop 2 Central Governance &amp; FinOps): Discovery Engine Agent Catalog filters visible tools, manages the 90% shared ContextCacheConfig prefix, and logs BigQuery OTel spans.</a:t>
             </a:r>
-            <a:endParaRPr lang="en-US" sz="690" dirty="0"/>
+            <a:endParaRPr lang="en-US" sz="675" dirty="0"/>
           </a:p>
         </p:txBody>
       </p:sp>
@@ -20182,12 +20182,12 @@
         </p:nvSpPr>
         <p:spPr>
           <a:xfrm>
-            <a:off x="7443216" y="5624474"/>
-            <a:ext cx="4382719" cy="428854"/>
+            <a:off x="7443216" y="5711342"/>
+            <a:ext cx="4382719" cy="378562"/>
           </a:xfrm>
           <a:prstGeom prst="roundRect">
             <a:avLst>
-              <a:gd name="adj" fmla="val 12793"/>
+              <a:gd name="adj" fmla="val 14493"/>
             </a:avLst>
           </a:prstGeom>
           <a:solidFill>
@@ -20209,7 +20209,7 @@
         </p:nvSpPr>
         <p:spPr>
           <a:xfrm>
-            <a:off x="7516368" y="5737860"/>
+            <a:off x="7516368" y="5800039"/>
             <a:ext cx="219456" cy="201168"/>
           </a:xfrm>
           <a:prstGeom prst="roundRect">
@@ -20231,7 +20231,7 @@
         </p:nvSpPr>
         <p:spPr>
           <a:xfrm>
-            <a:off x="7516368" y="5737860"/>
+            <a:off x="7516368" y="5800039"/>
             <a:ext cx="219456" cy="201168"/>
           </a:xfrm>
           <a:prstGeom prst="rect">
@@ -20270,8 +20270,8 @@
         </p:nvSpPr>
         <p:spPr>
           <a:xfrm>
-            <a:off x="7790688" y="5651906"/>
-            <a:ext cx="3980383" cy="373990"/>
+            <a:off x="7790688" y="5729630"/>
+            <a:ext cx="3980383" cy="341986"/>
           </a:xfrm>
           <a:prstGeom prst="rect">
             <a:avLst/>
@@ -20287,7 +20287,7 @@
               <a:buNone/>
             </a:pPr>
             <a:r>
-              <a:rPr lang="en-US" sz="690" dirty="0">
+              <a:rPr lang="en-US" sz="675" dirty="0">
                 <a:solidFill>
                   <a:srgbClr val="5F6368"/>
                 </a:solidFill>
@@ -20297,7 +20297,7 @@
               </a:rPr>
               <a:t>Zone 3 Sub-Plane A (Hops 3 &amp; 4 Shared Pooled Runtime): Executes all tenants on one shared Agent Engine pool with Memorystore Valkey RPM bulkheads (120/600 RPM), 4k/8k budget caps, and inline Model Armor + Cloud DLP.</a:t>
             </a:r>
-            <a:endParaRPr lang="en-US" sz="690" dirty="0"/>
+            <a:endParaRPr lang="en-US" sz="675" dirty="0"/>
           </a:p>
         </p:txBody>
       </p:sp>
@@ -20309,7 +20309,7 @@
         </p:nvSpPr>
         <p:spPr>
           <a:xfrm>
-            <a:off x="7443216" y="6126480"/>
+            <a:off x="7443216" y="6144768"/>
             <a:ext cx="4382719" cy="329184"/>
           </a:xfrm>
           <a:prstGeom prst="roundRect">
@@ -20336,7 +20336,7 @@
         </p:nvSpPr>
         <p:spPr>
           <a:xfrm>
-            <a:off x="7498080" y="6126480"/>
+            <a:off x="7498080" y="6144768"/>
             <a:ext cx="4272991" cy="329184"/>
           </a:xfrm>
           <a:prstGeom prst="rect">
@@ -20959,12 +20959,12 @@
         </p:nvSpPr>
         <p:spPr>
           <a:xfrm>
-            <a:off x="3861511" y="4230929"/>
-            <a:ext cx="2051914" cy="825703"/>
+            <a:off x="1566367" y="5222138"/>
+            <a:ext cx="2104034" cy="834847"/>
           </a:xfrm>
           <a:prstGeom prst="roundRect">
             <a:avLst>
-              <a:gd name="adj" fmla="val 3322"/>
+              <a:gd name="adj" fmla="val 3286"/>
             </a:avLst>
           </a:prstGeom>
           <a:solidFill>
@@ -20994,7 +20994,7 @@
         </p:blipFill>
         <p:spPr>
           <a:xfrm>
-            <a:off x="3902659" y="4253789"/>
+            <a:off x="1607515" y="5244998"/>
             <a:ext cx="164592" cy="164592"/>
           </a:xfrm>
           <a:prstGeom prst="rect">
@@ -21010,8 +21010,8 @@
         </p:nvSpPr>
         <p:spPr>
           <a:xfrm>
-            <a:off x="4135831" y="4241902"/>
-            <a:ext cx="1722730" cy="237744"/>
+            <a:off x="1840687" y="5233111"/>
+            <a:ext cx="1774850" cy="237744"/>
           </a:xfrm>
           <a:prstGeom prst="rect">
             <a:avLst/>
@@ -21040,7 +21040,7 @@
                 <a:ea typeface="Arial" pitchFamily="34" charset="-122"/>
                 <a:cs typeface="Arial" pitchFamily="34" charset="-120"/>
               </a:rPr>
-              <a:t>AlloyDB (ONE schema) + BigQuery (ONE dataset)</a:t>
+              <a:t>5-Level Memory Bank (ONE bank)</a:t>
             </a:r>
             <a:endParaRPr lang="en-US" sz="550" dirty="0"/>
           </a:p>
@@ -21060,7 +21060,7 @@
                 <a:ea typeface="Arial" pitchFamily="34" charset="-122"/>
                 <a:cs typeface="Arial" pitchFamily="34" charset="-120"/>
               </a:rPr>
-              <a:t>pattern_a_pooled_rls_entities • FORCE ROW LEVEL SECURITY</a:t>
+              <a:t>Namespaced per tenant — same service, disjoint keys</a:t>
             </a:r>
             <a:endParaRPr lang="en-US" sz="550" dirty="0"/>
           </a:p>
@@ -21074,12 +21074,12 @@
         </p:nvSpPr>
         <p:spPr>
           <a:xfrm>
-            <a:off x="1566367" y="5291633"/>
-            <a:ext cx="2104034" cy="730606"/>
+            <a:off x="3861511" y="4230929"/>
+            <a:ext cx="2051914" cy="825703"/>
           </a:xfrm>
           <a:prstGeom prst="roundRect">
             <a:avLst>
-              <a:gd name="adj" fmla="val 3755"/>
+              <a:gd name="adj" fmla="val 3322"/>
             </a:avLst>
           </a:prstGeom>
           <a:solidFill>
@@ -21109,7 +21109,7 @@
         </p:blipFill>
         <p:spPr>
           <a:xfrm>
-            <a:off x="1607515" y="5314493"/>
+            <a:off x="3902659" y="4253789"/>
             <a:ext cx="164592" cy="164592"/>
           </a:xfrm>
           <a:prstGeom prst="rect">
@@ -21125,8 +21125,8 @@
         </p:nvSpPr>
         <p:spPr>
           <a:xfrm>
-            <a:off x="1840687" y="5302606"/>
-            <a:ext cx="1774850" cy="237744"/>
+            <a:off x="4135831" y="4241902"/>
+            <a:ext cx="1722730" cy="237744"/>
           </a:xfrm>
           <a:prstGeom prst="rect">
             <a:avLst/>
@@ -21155,7 +21155,7 @@
                 <a:ea typeface="Arial" pitchFamily="34" charset="-122"/>
                 <a:cs typeface="Arial" pitchFamily="34" charset="-120"/>
               </a:rPr>
-              <a:t>5-Level Memory Bank (ONE bank)</a:t>
+              <a:t>AlloyDB (ONE schema) + BigQuery (ONE dataset)</a:t>
             </a:r>
             <a:endParaRPr lang="en-US" sz="550" dirty="0"/>
           </a:p>
@@ -21175,7 +21175,7 @@
                 <a:ea typeface="Arial" pitchFamily="34" charset="-122"/>
                 <a:cs typeface="Arial" pitchFamily="34" charset="-120"/>
               </a:rPr>
-              <a:t>Namespaced per tenant — same service, disjoint keys</a:t>
+              <a:t>pattern_a_pooled_rls_entities • FORCE ROW LEVEL SECURITY</a:t>
             </a:r>
             <a:endParaRPr lang="en-US" sz="550" dirty="0"/>
           </a:p>
@@ -21261,7 +21261,7 @@
         </p:nvSpPr>
         <p:spPr>
           <a:xfrm flipH="1">
-            <a:off x="2948940" y="2475281"/>
+            <a:off x="2948940" y="2414016"/>
             <a:ext cx="148133" cy="0"/>
           </a:xfrm>
           <a:prstGeom prst="line">
@@ -21286,7 +21286,7 @@
         <p:spPr>
           <a:xfrm flipV="1">
             <a:off x="2948940" y="2306117"/>
-            <a:ext cx="0" cy="169164"/>
+            <a:ext cx="0" cy="107899"/>
           </a:xfrm>
           <a:prstGeom prst="line">
             <a:avLst/>
@@ -21332,7 +21332,7 @@
         </p:nvSpPr>
         <p:spPr>
           <a:xfrm flipH="1">
-            <a:off x="2948940" y="2475281"/>
+            <a:off x="2948940" y="2535631"/>
             <a:ext cx="148133" cy="0"/>
           </a:xfrm>
           <a:prstGeom prst="line">
@@ -21356,8 +21356,8 @@
         </p:nvSpPr>
         <p:spPr>
           <a:xfrm>
-            <a:off x="2948940" y="2475281"/>
-            <a:ext cx="0" cy="195682"/>
+            <a:off x="2948940" y="2535631"/>
+            <a:ext cx="0" cy="135331"/>
           </a:xfrm>
           <a:prstGeom prst="line">
             <a:avLst/>
@@ -21523,7 +21523,7 @@
         <p:spPr>
           <a:xfrm>
             <a:off x="3196742" y="3648456"/>
-            <a:ext cx="0" cy="574243"/>
+            <a:ext cx="0" cy="547726"/>
           </a:xfrm>
           <a:prstGeom prst="line">
             <a:avLst/>
@@ -21546,7 +21546,7 @@
         </p:nvSpPr>
         <p:spPr>
           <a:xfrm>
-            <a:off x="2462479" y="4387291"/>
+            <a:off x="2462479" y="4361688"/>
             <a:ext cx="260604" cy="0"/>
           </a:xfrm>
           <a:prstGeom prst="line">
@@ -21571,7 +21571,7 @@
         </p:nvSpPr>
         <p:spPr>
           <a:xfrm>
-            <a:off x="2462479" y="4892040"/>
+            <a:off x="2462479" y="4848149"/>
             <a:ext cx="260604" cy="0"/>
           </a:xfrm>
           <a:prstGeom prst="line">
@@ -21596,8 +21596,8 @@
         </p:nvSpPr>
         <p:spPr>
           <a:xfrm>
-            <a:off x="3196742" y="4552798"/>
-            <a:ext cx="0" cy="173736"/>
+            <a:off x="3196742" y="4526280"/>
+            <a:ext cx="0" cy="157277"/>
           </a:xfrm>
           <a:prstGeom prst="line">
             <a:avLst/>
@@ -21620,8 +21620,8 @@
         </p:nvSpPr>
         <p:spPr>
           <a:xfrm>
-            <a:off x="3196742" y="5056632"/>
-            <a:ext cx="0" cy="226771"/>
+            <a:off x="3196742" y="5013655"/>
+            <a:ext cx="0" cy="200254"/>
           </a:xfrm>
           <a:prstGeom prst="line">
             <a:avLst/>
@@ -23010,7 +23010,7 @@
         </p:nvSpPr>
         <p:spPr>
           <a:xfrm>
-            <a:off x="2723083" y="4230929"/>
+            <a:off x="2723083" y="4205326"/>
             <a:ext cx="947318" cy="321869"/>
           </a:xfrm>
           <a:prstGeom prst="roundRect">
@@ -23045,7 +23045,7 @@
         </p:blipFill>
         <p:spPr>
           <a:xfrm>
-            <a:off x="2764231" y="4308653"/>
+            <a:off x="2764231" y="4283050"/>
             <a:ext cx="167335" cy="167335"/>
           </a:xfrm>
           <a:prstGeom prst="rect">
@@ -23061,7 +23061,7 @@
         </p:nvSpPr>
         <p:spPr>
           <a:xfrm>
-            <a:off x="2954426" y="4230929"/>
+            <a:off x="2954426" y="4205326"/>
             <a:ext cx="693115" cy="321869"/>
           </a:xfrm>
           <a:prstGeom prst="rect">
@@ -23125,7 +23125,7 @@
         </p:nvSpPr>
         <p:spPr>
           <a:xfrm>
-            <a:off x="2723083" y="4735678"/>
+            <a:off x="2723083" y="4691786"/>
             <a:ext cx="947318" cy="321869"/>
           </a:xfrm>
           <a:prstGeom prst="roundRect">
@@ -23160,7 +23160,7 @@
         </p:blipFill>
         <p:spPr>
           <a:xfrm>
-            <a:off x="2764231" y="4813402"/>
+            <a:off x="2764231" y="4769510"/>
             <a:ext cx="167335" cy="167335"/>
           </a:xfrm>
           <a:prstGeom prst="rect">
@@ -23176,7 +23176,7 @@
         </p:nvSpPr>
         <p:spPr>
           <a:xfrm>
-            <a:off x="2954426" y="4735678"/>
+            <a:off x="2954426" y="4691786"/>
             <a:ext cx="693115" cy="321869"/>
           </a:xfrm>
           <a:prstGeom prst="rect">
@@ -23240,7 +23240,7 @@
         </p:nvSpPr>
         <p:spPr>
           <a:xfrm>
-            <a:off x="1566367" y="4230929"/>
+            <a:off x="1566367" y="4205326"/>
             <a:ext cx="895198" cy="312725"/>
           </a:xfrm>
           <a:prstGeom prst="roundRect">
@@ -23275,7 +23275,7 @@
         </p:blipFill>
         <p:spPr>
           <a:xfrm>
-            <a:off x="1607515" y="4305910"/>
+            <a:off x="1607515" y="4280306"/>
             <a:ext cx="162763" cy="162763"/>
           </a:xfrm>
           <a:prstGeom prst="rect">
@@ -23291,7 +23291,7 @@
         </p:nvSpPr>
         <p:spPr>
           <a:xfrm>
-            <a:off x="1793138" y="4230929"/>
+            <a:off x="1793138" y="4205326"/>
             <a:ext cx="645566" cy="312725"/>
           </a:xfrm>
           <a:prstGeom prst="rect">
@@ -23355,7 +23355,7 @@
         </p:nvSpPr>
         <p:spPr>
           <a:xfrm>
-            <a:off x="1566367" y="4735678"/>
+            <a:off x="1566367" y="4691786"/>
             <a:ext cx="895198" cy="312725"/>
           </a:xfrm>
           <a:prstGeom prst="roundRect">
@@ -23390,7 +23390,7 @@
         </p:blipFill>
         <p:spPr>
           <a:xfrm>
-            <a:off x="1607515" y="4810658"/>
+            <a:off x="1607515" y="4766767"/>
             <a:ext cx="162763" cy="162763"/>
           </a:xfrm>
           <a:prstGeom prst="rect">
@@ -23406,7 +23406,7 @@
         </p:nvSpPr>
         <p:spPr>
           <a:xfrm>
-            <a:off x="1793138" y="4735678"/>
+            <a:off x="1793138" y="4691786"/>
             <a:ext cx="645566" cy="312725"/>
           </a:xfrm>
           <a:prstGeom prst="rect">
@@ -24143,7 +24143,7 @@
         </p:nvSpPr>
         <p:spPr>
           <a:xfrm>
-            <a:off x="1627632" y="5586984"/>
+            <a:off x="1627632" y="5517490"/>
             <a:ext cx="634594" cy="130759"/>
           </a:xfrm>
           <a:prstGeom prst="roundRect">
@@ -24170,7 +24170,7 @@
         </p:nvSpPr>
         <p:spPr>
           <a:xfrm>
-            <a:off x="1627632" y="5586984"/>
+            <a:off x="1627632" y="5517490"/>
             <a:ext cx="634594" cy="130759"/>
           </a:xfrm>
           <a:prstGeom prst="rect">
@@ -24214,7 +24214,7 @@
         </p:nvSpPr>
         <p:spPr>
           <a:xfrm>
-            <a:off x="2301545" y="5586984"/>
+            <a:off x="2301545" y="5517490"/>
             <a:ext cx="634594" cy="130759"/>
           </a:xfrm>
           <a:prstGeom prst="roundRect">
@@ -24241,7 +24241,7 @@
         </p:nvSpPr>
         <p:spPr>
           <a:xfrm>
-            <a:off x="2301545" y="5586984"/>
+            <a:off x="2301545" y="5517490"/>
             <a:ext cx="634594" cy="130759"/>
           </a:xfrm>
           <a:prstGeom prst="rect">
@@ -24285,7 +24285,7 @@
         </p:nvSpPr>
         <p:spPr>
           <a:xfrm>
-            <a:off x="2974543" y="5586984"/>
+            <a:off x="2974543" y="5517490"/>
             <a:ext cx="634594" cy="130759"/>
           </a:xfrm>
           <a:prstGeom prst="roundRect">
@@ -24312,7 +24312,7 @@
         </p:nvSpPr>
         <p:spPr>
           <a:xfrm>
-            <a:off x="2974543" y="5586984"/>
+            <a:off x="2974543" y="5517490"/>
             <a:ext cx="634594" cy="130759"/>
           </a:xfrm>
           <a:prstGeom prst="rect">
@@ -24676,7 +24676,7 @@
         </p:nvSpPr>
         <p:spPr>
           <a:xfrm>
-            <a:off x="1579169" y="4565599"/>
+            <a:off x="1579169" y="4530852"/>
             <a:ext cx="148133" cy="148133"/>
           </a:xfrm>
           <a:prstGeom prst="ellipse">
@@ -24701,7 +24701,7 @@
         </p:nvSpPr>
         <p:spPr>
           <a:xfrm>
-            <a:off x="1579169" y="4565599"/>
+            <a:off x="1579169" y="4530852"/>
             <a:ext cx="148133" cy="148133"/>
           </a:xfrm>
           <a:prstGeom prst="rect">
@@ -24740,7 +24740,7 @@
         </p:nvSpPr>
         <p:spPr>
           <a:xfrm>
-            <a:off x="1579169" y="5095951"/>
+            <a:off x="1579169" y="5034686"/>
             <a:ext cx="148133" cy="148133"/>
           </a:xfrm>
           <a:prstGeom prst="ellipse">
@@ -24765,7 +24765,7 @@
         </p:nvSpPr>
         <p:spPr>
           <a:xfrm>
-            <a:off x="1579169" y="5095951"/>
+            <a:off x="1579169" y="5034686"/>
             <a:ext cx="148133" cy="148133"/>
           </a:xfrm>
           <a:prstGeom prst="rect">
@@ -24932,7 +24932,7 @@
         </p:nvSpPr>
         <p:spPr>
           <a:xfrm>
-            <a:off x="1618488" y="5752490"/>
+            <a:off x="1618488" y="5682996"/>
             <a:ext cx="1999793" cy="235001"/>
           </a:xfrm>
           <a:prstGeom prst="rect">
@@ -25202,7 +25202,7 @@
         </p:nvSpPr>
         <p:spPr>
           <a:xfrm>
-            <a:off x="1757477" y="4564685"/>
+            <a:off x="1757477" y="4529938"/>
             <a:ext cx="686714" cy="178308"/>
           </a:xfrm>
           <a:prstGeom prst="roundRect">
@@ -25229,7 +25229,7 @@
         </p:nvSpPr>
         <p:spPr>
           <a:xfrm>
-            <a:off x="1775765" y="4573829"/>
+            <a:off x="1775765" y="4539082"/>
             <a:ext cx="650138" cy="160020"/>
           </a:xfrm>
           <a:prstGeom prst="rect">
@@ -25293,7 +25293,7 @@
         </p:nvSpPr>
         <p:spPr>
           <a:xfrm>
-            <a:off x="1757477" y="5094122"/>
+            <a:off x="1757477" y="5033772"/>
             <a:ext cx="686714" cy="178308"/>
           </a:xfrm>
           <a:prstGeom prst="roundRect">
@@ -25320,7 +25320,7 @@
         </p:nvSpPr>
         <p:spPr>
           <a:xfrm>
-            <a:off x="1775765" y="5103266"/>
+            <a:off x="1775765" y="5042916"/>
             <a:ext cx="650138" cy="160020"/>
           </a:xfrm>
           <a:prstGeom prst="rect">
@@ -26103,7 +26103,7 @@
         </p:nvSpPr>
         <p:spPr>
           <a:xfrm>
-            <a:off x="3240634" y="5116982"/>
+            <a:off x="3240634" y="5064862"/>
             <a:ext cx="493776" cy="132588"/>
           </a:xfrm>
           <a:prstGeom prst="roundRect">
@@ -26130,7 +26130,7 @@
         </p:nvSpPr>
         <p:spPr>
           <a:xfrm>
-            <a:off x="3258922" y="5126126"/>
+            <a:off x="3258922" y="5074006"/>
             <a:ext cx="457200" cy="114300"/>
           </a:xfrm>
           <a:prstGeom prst="rect">
@@ -28419,7 +28419,7 @@
         </p:nvSpPr>
         <p:spPr>
           <a:xfrm>
-            <a:off x="7406640" y="4498848"/>
+            <a:off x="7406640" y="4407408"/>
             <a:ext cx="292608" cy="292608"/>
           </a:xfrm>
           <a:prstGeom prst="rect">
@@ -28458,12 +28458,12 @@
         </p:nvSpPr>
         <p:spPr>
           <a:xfrm>
-            <a:off x="6272784" y="4517136"/>
-            <a:ext cx="859536" cy="274320"/>
+            <a:off x="6272784" y="4425696"/>
+            <a:ext cx="859536" cy="256032"/>
           </a:xfrm>
           <a:prstGeom prst="roundRect">
             <a:avLst>
-              <a:gd name="adj" fmla="val 16667"/>
+              <a:gd name="adj" fmla="val 17857"/>
             </a:avLst>
           </a:prstGeom>
           <a:solidFill>
@@ -28480,8 +28480,8 @@
         </p:nvSpPr>
         <p:spPr>
           <a:xfrm>
-            <a:off x="6272784" y="4517136"/>
-            <a:ext cx="859536" cy="274320"/>
+            <a:off x="6272784" y="4425696"/>
+            <a:ext cx="859536" cy="256032"/>
           </a:xfrm>
           <a:prstGeom prst="rect">
             <a:avLst/>
@@ -28497,7 +28497,7 @@
               <a:buNone/>
             </a:pPr>
             <a:r>
-              <a:rPr lang="en-US" sz="800" b="1" dirty="0">
+              <a:rPr lang="en-US" sz="780" b="1" dirty="0">
                 <a:solidFill>
                   <a:srgbClr val="FFFFFF"/>
                 </a:solidFill>
@@ -28507,7 +28507,7 @@
               </a:rPr>
               <a:t>3LO OAuth</a:t>
             </a:r>
-            <a:endParaRPr lang="en-US" sz="800" dirty="0"/>
+            <a:endParaRPr lang="en-US" sz="780" dirty="0"/>
           </a:p>
         </p:txBody>
       </p:sp>
@@ -28519,8 +28519,8 @@
         </p:nvSpPr>
         <p:spPr>
           <a:xfrm>
-            <a:off x="5321808" y="4846320"/>
-            <a:ext cx="1847088" cy="438912"/>
+            <a:off x="5248656" y="4718304"/>
+            <a:ext cx="1938528" cy="411480"/>
           </a:xfrm>
           <a:prstGeom prst="rect">
             <a:avLst/>
@@ -28536,7 +28536,7 @@
               <a:buNone/>
             </a:pPr>
             <a:r>
-              <a:rPr lang="en-US" sz="800" b="1" dirty="0">
+              <a:rPr lang="en-US" sz="770" b="1" dirty="0">
                 <a:solidFill>
                   <a:srgbClr val="3C4043"/>
                 </a:solidFill>
@@ -28546,14 +28546,14 @@
               </a:rPr>
               <a:t>Hop 5 binds 3LO token</a:t>
             </a:r>
-            <a:endParaRPr lang="en-US" sz="800" dirty="0"/>
+            <a:endParaRPr lang="en-US" sz="770" dirty="0"/>
           </a:p>
           <a:p>
             <a:pPr indent="0" marL="0">
               <a:buNone/>
             </a:pPr>
             <a:r>
-              <a:rPr lang="en-US" sz="800" b="1" dirty="0">
+              <a:rPr lang="en-US" sz="770" b="1" dirty="0">
                 <a:solidFill>
                   <a:srgbClr val="3C4043"/>
                 </a:solidFill>
@@ -28563,14 +28563,14 @@
               </a:rPr>
               <a:t>&amp; sets AlloyDB RLS</a:t>
             </a:r>
-            <a:endParaRPr lang="en-US" sz="800" dirty="0"/>
+            <a:endParaRPr lang="en-US" sz="770" dirty="0"/>
           </a:p>
           <a:p>
             <a:pPr indent="0" marL="0">
               <a:buNone/>
             </a:pPr>
             <a:r>
-              <a:rPr lang="en-US" sz="800" b="1" dirty="0">
+              <a:rPr lang="en-US" sz="770" b="1" dirty="0">
                 <a:solidFill>
                   <a:srgbClr val="3C4043"/>
                 </a:solidFill>
@@ -28580,7 +28580,7 @@
               </a:rPr>
               <a:t>current_tenant_id</a:t>
             </a:r>
-            <a:endParaRPr lang="en-US" sz="800" dirty="0"/>
+            <a:endParaRPr lang="en-US" sz="770" dirty="0"/>
           </a:p>
         </p:txBody>
       </p:sp>
@@ -28592,7 +28592,7 @@
         </p:nvSpPr>
         <p:spPr>
           <a:xfrm>
-            <a:off x="7342632" y="4901184"/>
+            <a:off x="7342632" y="4809744"/>
             <a:ext cx="2139696" cy="0"/>
           </a:xfrm>
           <a:prstGeom prst="line">
@@ -28616,7 +28616,7 @@
         </p:nvSpPr>
         <p:spPr>
           <a:xfrm>
-            <a:off x="7735824" y="4681728"/>
+            <a:off x="7735824" y="4590288"/>
             <a:ext cx="1682496" cy="182880"/>
           </a:xfrm>
           <a:prstGeom prst="rect">
@@ -28633,7 +28633,7 @@
               <a:buNone/>
             </a:pPr>
             <a:r>
-              <a:rPr lang="en-US" sz="800" b="1" dirty="0">
+              <a:rPr lang="en-US" sz="780" b="1" dirty="0">
                 <a:solidFill>
                   <a:srgbClr val="0F2942"/>
                 </a:solidFill>
@@ -28643,7 +28643,7 @@
               </a:rPr>
               <a:t>Scoped SQL + 3LO MCP</a:t>
             </a:r>
-            <a:endParaRPr lang="en-US" sz="800" dirty="0"/>
+            <a:endParaRPr lang="en-US" sz="780" dirty="0"/>
           </a:p>
         </p:txBody>
       </p:sp>

--- a/slides/ws2-pattern-a-pooled-editable-slides.pptx
+++ b/slides/ws2-pattern-a-pooled-editable-slides.pptx
@@ -3956,7 +3956,7 @@
                 <a:ea typeface="Google Sans" pitchFamily="34" charset="-122"/>
                 <a:cs typeface="Google Sans" pitchFamily="34" charset="-120"/>
               </a:rPr>
-              <a:t>Verified Across 3 GCP Projects (#248990048888 • #638420508320 • #887605034827) • 13/13 Forensic PASS</a:t>
+              <a:t>Verified on Live GCP (#248990048888 • #48439189383) &amp; AWS (#393036065405) • 13/13 Forensic PASS</a:t>
             </a:r>
             <a:endParaRPr lang="en-US" sz="720" dirty="0"/>
           </a:p>
@@ -3980,7 +3980,7 @@
           <a:ln/>
         </p:spPr>
         <p:txBody>
-          <a:bodyPr wrap="square" rtlCol="0" anchor="ctr"/>
+          <a:bodyPr wrap="none" rtlCol="0" anchor="ctr"/>
           <a:lstStyle/>
           <a:p>
             <a:pPr algn="l" indent="0" marL="0">
@@ -4655,7 +4655,7 @@
                 <a:ea typeface="Roboto" pitchFamily="34" charset="-122"/>
                 <a:cs typeface="Roboto" pitchFamily="34" charset="-120"/>
               </a:rPr>
-              <a:t>• Project: cymbal-build-sandbox (#887605034827)</a:t>
+              <a:t>• Live GCP: ramp-portal-dev (#248990048888) • bbar-138hf0 (#48439189383)</a:t>
             </a:r>
             <a:endParaRPr lang="en-US" sz="840" dirty="0"/>
           </a:p>
@@ -4831,7 +4831,7 @@
                 <a:ea typeface="Google Sans" pitchFamily="34" charset="-122"/>
                 <a:cs typeface="Google Sans" pitchFamily="34" charset="-120"/>
               </a:rPr>
-              <a:t>LIVE GCP VERIFICATION 02 • ADK POOLED GATEWAY &amp; 10-SAAS MCP</a:t>
+              <a:t>LIVE GCP VERIFICATION 02 • POOLED 10-SAAS MCP &amp; BEFORE/AFTER REDMINE/CLICKHOUSE UIs</a:t>
             </a:r>
             <a:endParaRPr lang="en-US" sz="820" dirty="0"/>
           </a:p>
@@ -4897,7 +4897,7 @@
                 <a:ea typeface="Google Sans" pitchFamily="34" charset="-122"/>
                 <a:cs typeface="Google Sans" pitchFamily="34" charset="-120"/>
               </a:rPr>
-              <a:t>Cloud Run runtime enforcing RFC 8693 OBO + DPoP, Hop 2 ARD filter &amp; 10-SaaS Pattern A RLS pushdown</a:t>
+              <a:t>Redmine ITSM v5.1 (PLOLWRMI0I P1 Queue) &amp; ClickHouse v24.8 (RLS 0 Leaked Rows) Before/After Retina UIs</a:t>
             </a:r>
             <a:endParaRPr lang="en-US" sz="920" dirty="0"/>
           </a:p>
@@ -4936,7 +4936,7 @@
                 <a:ea typeface="Roboto" pitchFamily="34" charset="-122"/>
                 <a:cs typeface="Roboto" pitchFamily="34" charset="-120"/>
               </a:rPr>
-              <a:t>• Service: cymbal-multi-tenant-patterns (Cloud Run)</a:t>
+              <a:t>• Intra-Cloud: run_breach_simulations.py (10/10 PASS)</a:t>
             </a:r>
             <a:endParaRPr lang="en-US" sz="840" dirty="0"/>
           </a:p>
@@ -4953,7 +4953,7 @@
                 <a:ea typeface="Roboto" pitchFamily="34" charset="-122"/>
                 <a:cs typeface="Roboto" pitchFamily="34" charset="-120"/>
               </a:rPr>
-              <a:t>• Intra-Cloud: run_breach_simulations.py (10/10 PASS)</a:t>
+              <a:t>• Inter-Cloud: 10/10 Pooled SaaS MCP Targets PASS</a:t>
             </a:r>
             <a:endParaRPr lang="en-US" sz="840" dirty="0"/>
           </a:p>
@@ -4970,7 +4970,7 @@
                 <a:ea typeface="Roboto" pitchFamily="34" charset="-122"/>
                 <a:cs typeface="Roboto" pitchFamily="34" charset="-120"/>
               </a:rPr>
-              <a:t>• Inter-Cloud: 10/10 Pooled SaaS MCP Targets PASS</a:t>
+              <a:t>• 3P UIs: Redmine ITSM v5.1 &amp; ClickHouse v24.8 RLS Ledger</a:t>
             </a:r>
             <a:endParaRPr lang="en-US" sz="840" dirty="0"/>
           </a:p>
@@ -5692,7 +5692,7 @@
                 <a:ea typeface="Google Sans" pitchFamily="34" charset="-122"/>
                 <a:cs typeface="Google Sans" pitchFamily="34" charset="-120"/>
               </a:rPr>
-              <a:t>PROOF 04 • VALKEY BULKHEADS &amp; 10-SAAS RLS</a:t>
+              <a:t>PROOF 04 • REDMINE &amp; CLICKHOUSE 3P UIs</a:t>
             </a:r>
             <a:endParaRPr lang="en-US" sz="740" dirty="0"/>
           </a:p>
@@ -5731,7 +5731,7 @@
                 <a:ea typeface="Google Sans" pitchFamily="34" charset="-122"/>
                 <a:cs typeface="Google Sans" pitchFamily="34" charset="-120"/>
               </a:rPr>
-              <a:t>120/600 RPM Caps &amp; 10/10 Pooled SaaS MCP Flows</a:t>
+              <a:t>Before/After 3LO Mutation &amp; Warehouse RLS Proofs</a:t>
             </a:r>
             <a:endParaRPr lang="en-US" sz="1050" dirty="0"/>
           </a:p>
@@ -5770,7 +5770,7 @@
                 <a:ea typeface="Roboto" pitchFamily="34" charset="-122"/>
                 <a:cs typeface="Roboto" pitchFamily="34" charset="-120"/>
               </a:rPr>
-              <a:t>Enforces HTTP 429 Retry-After noisy-neighbor bulkheads plus 10/10 Pattern A Inter-Cloud AWS AgentCore MCP RLS assertions.</a:t>
+              <a:t>Captures genuine 2880×1800 Before/After Redmine ITSM v5.1 &amp; ClickHouse v24.8 RLS UIs alongside 10/10 Pooled MCP PASS.</a:t>
             </a:r>
             <a:endParaRPr lang="en-US" sz="860" dirty="0"/>
           </a:p>
@@ -5794,14 +5794,14 @@
           <a:ln/>
         </p:spPr>
         <p:txBody>
-          <a:bodyPr wrap="square" rtlCol="0" anchor="ctr"/>
+          <a:bodyPr wrap="none" rtlCol="0" anchor="ctr"/>
           <a:lstStyle/>
           <a:p>
             <a:pPr algn="l" indent="0" marL="0">
               <a:buNone/>
             </a:pPr>
             <a:r>
-              <a:rPr lang="en-US" sz="780" b="1" dirty="0">
+              <a:rPr lang="en-US" sz="700" b="1" dirty="0">
                 <a:solidFill>
                   <a:srgbClr val="4285F4"/>
                 </a:solidFill>
@@ -5815,7 +5815,7 @@
               <a:buNone/>
             </a:pPr>
             <a:r>
-              <a:rPr lang="en-US" sz="760" dirty="0">
+              <a:rPr lang="en-US" sz="690" dirty="0">
                 <a:solidFill>
                   <a:srgbClr val="5F6368"/>
                 </a:solidFill>
@@ -5829,7 +5829,7 @@
               <a:buNone/>
             </a:pPr>
             <a:r>
-              <a:rPr lang="en-US" sz="780" b="1" dirty="0">
+              <a:rPr lang="en-US" sz="700" b="1" dirty="0">
                 <a:solidFill>
                   <a:srgbClr val="3C4043"/>
                 </a:solidFill>
@@ -5839,7 +5839,7 @@
               </a:rPr>
               <a:t>Proprietary + Confidential</a:t>
             </a:r>
-            <a:endParaRPr lang="en-US" sz="780" dirty="0"/>
+            <a:endParaRPr lang="en-US" sz="700" dirty="0"/>
           </a:p>
         </p:txBody>
       </p:sp>
@@ -7439,7 +7439,7 @@
           <a:ln/>
         </p:spPr>
         <p:txBody>
-          <a:bodyPr wrap="square" rtlCol="0" anchor="ctr"/>
+          <a:bodyPr wrap="none" rtlCol="0" anchor="ctr"/>
           <a:lstStyle/>
           <a:p>
             <a:pPr algn="l" indent="0" marL="0">
@@ -9992,7 +9992,7 @@
           <a:ln/>
         </p:spPr>
         <p:txBody>
-          <a:bodyPr wrap="square" rtlCol="0" anchor="ctr"/>
+          <a:bodyPr wrap="none" rtlCol="0" anchor="ctr"/>
           <a:lstStyle/>
           <a:p>
             <a:pPr algn="l" indent="0" marL="0">
@@ -12177,7 +12177,7 @@
           <a:ln/>
         </p:spPr>
         <p:txBody>
-          <a:bodyPr wrap="square" rtlCol="0" anchor="ctr"/>
+          <a:bodyPr wrap="none" rtlCol="0" anchor="ctr"/>
           <a:lstStyle/>
           <a:p>
             <a:pPr algn="l" indent="0" marL="0">
@@ -15356,7 +15356,7 @@
           <a:ln/>
         </p:spPr>
         <p:txBody>
-          <a:bodyPr wrap="square" rtlCol="0" anchor="ctr"/>
+          <a:bodyPr wrap="none" rtlCol="0" anchor="ctr"/>
           <a:lstStyle/>
           <a:p>
             <a:pPr algn="l" indent="0" marL="0">
@@ -18302,7 +18302,7 @@
           <a:ln/>
         </p:spPr>
         <p:txBody>
-          <a:bodyPr wrap="square" rtlCol="0" anchor="ctr"/>
+          <a:bodyPr wrap="none" rtlCol="0" anchor="ctr"/>
           <a:lstStyle/>
           <a:p>
             <a:pPr algn="l" indent="0" marL="0">
@@ -19097,7 +19097,7 @@
           <a:ln/>
         </p:spPr>
         <p:txBody>
-          <a:bodyPr wrap="square" rtlCol="0" anchor="ctr"/>
+          <a:bodyPr wrap="none" rtlCol="0" anchor="ctr"/>
           <a:lstStyle/>
           <a:p>
             <a:pPr algn="ctr" indent="0" marL="0">
@@ -19283,7 +19283,7 @@
           <a:ln/>
         </p:spPr>
         <p:txBody>
-          <a:bodyPr wrap="square" rtlCol="0" anchor="ctr"/>
+          <a:bodyPr wrap="none" rtlCol="0" anchor="ctr"/>
           <a:lstStyle/>
           <a:p>
             <a:pPr algn="ctr" indent="0" marL="0">
@@ -19469,7 +19469,7 @@
           <a:ln/>
         </p:spPr>
         <p:txBody>
-          <a:bodyPr wrap="square" rtlCol="0" anchor="ctr"/>
+          <a:bodyPr wrap="none" rtlCol="0" anchor="ctr"/>
           <a:lstStyle/>
           <a:p>
             <a:pPr algn="ctr" indent="0" marL="0">
@@ -19484,7 +19484,7 @@
                 <a:ea typeface="Google Sans" pitchFamily="34" charset="-122"/>
                 <a:cs typeface="Google Sans" pitchFamily="34" charset="-120"/>
               </a:rPr>
-              <a:t>YELLOW ZONE (SUB-PLANE A)</a:t>
+              <a:t>YELLOW ZONE</a:t>
             </a:r>
             <a:endParaRPr lang="en-US" sz="600" dirty="0"/>
           </a:p>
@@ -19655,7 +19655,7 @@
           <a:ln/>
         </p:spPr>
         <p:txBody>
-          <a:bodyPr wrap="square" rtlCol="0" anchor="ctr"/>
+          <a:bodyPr wrap="none" rtlCol="0" anchor="ctr"/>
           <a:lstStyle/>
           <a:p>
             <a:pPr algn="ctr" indent="0" marL="0">
@@ -19670,7 +19670,7 @@
                 <a:ea typeface="Google Sans" pitchFamily="34" charset="-122"/>
                 <a:cs typeface="Google Sans" pitchFamily="34" charset="-120"/>
               </a:rPr>
-              <a:t>CORAL SUB-PLANE B</a:t>
+              <a:t>RED ZONE</a:t>
             </a:r>
             <a:endParaRPr lang="en-US" sz="600" dirty="0"/>
           </a:p>
@@ -20336,8 +20336,8 @@
         </p:nvSpPr>
         <p:spPr>
           <a:xfrm>
-            <a:off x="7498080" y="6144768"/>
-            <a:ext cx="4272991" cy="329184"/>
+            <a:off x="7479792" y="6144768"/>
+            <a:ext cx="4309567" cy="329184"/>
           </a:xfrm>
           <a:prstGeom prst="rect">
             <a:avLst/>
@@ -20353,7 +20353,7 @@
               <a:buNone/>
             </a:pPr>
             <a:r>
-              <a:rPr lang="en-US" sz="700" b="1" dirty="0">
+              <a:rPr lang="en-US" sz="610" b="1" dirty="0">
                 <a:solidFill>
                   <a:srgbClr val="0D652D"/>
                 </a:solidFill>
@@ -20361,9 +20361,9 @@
                 <a:ea typeface="Google Sans" pitchFamily="34" charset="-122"/>
                 <a:cs typeface="Google Sans" pitchFamily="34" charset="-120"/>
               </a:rPr>
-              <a:t>VERIFIED • 60 Editable Shapes • 20 Connectors • GCP: cymbal-build-sandbox (#887605034827)</a:t>
-            </a:r>
-            <a:endParaRPr lang="en-US" sz="700" dirty="0"/>
+              <a:t>VERIFIED • 60 Shapes • 20 Connectors • GCP: bbar-138hf0 (#48439189383) • ramp-portal-dev (#248990048888)</a:t>
+            </a:r>
+            <a:endParaRPr lang="en-US" sz="610" dirty="0"/>
           </a:p>
         </p:txBody>
       </p:sp>
@@ -20429,29 +20429,27 @@
         </p:nvSpPr>
         <p:spPr>
           <a:xfrm>
-            <a:off x="1343254" y="1608430"/>
-            <a:ext cx="2255825" cy="137160"/>
-          </a:xfrm>
-          <a:prstGeom prst="rect">
-            <a:avLst/>
-          </a:prstGeom>
-          <a:noFill/>
-          <a:ln/>
-        </p:spPr>
-        <p:txBody>
-          <a:bodyPr wrap="none" lIns="0" tIns="0" rIns="0" bIns="0" rtlCol="0" anchor="t">
-            <a:normAutofit/>
-          </a:bodyPr>
+            <a:off x="1343254" y="1613916"/>
+            <a:ext cx="2745943" cy="111557"/>
+          </a:xfrm>
+          <a:prstGeom prst="rect">
+            <a:avLst/>
+          </a:prstGeom>
+          <a:noFill/>
+          <a:ln/>
+        </p:spPr>
+        <p:txBody>
+          <a:bodyPr wrap="none" lIns="0" tIns="0" rIns="0" bIns="0" rtlCol="0" anchor="ctr"/>
           <a:lstStyle/>
           <a:p>
             <a:pPr algn="l" indent="0" marL="0">
               <a:lnSpc>
-                <a:spcPct val="85000"/>
+                <a:spcPct val="100000"/>
               </a:lnSpc>
               <a:buNone/>
             </a:pPr>
             <a:r>
-              <a:rPr lang="en-US" sz="460" b="1" dirty="0">
+              <a:rPr lang="en-US" sz="440" b="1" dirty="0">
                 <a:solidFill>
                   <a:srgbClr val="202124"/>
                 </a:solidFill>
@@ -20461,7 +20459,7 @@
               </a:rPr>
               <a:t>Shared GCP Project: cymbal-build-sandbox</a:t>
             </a:r>
-            <a:endParaRPr lang="en-US" sz="460" dirty="0"/>
+            <a:endParaRPr lang="en-US" sz="440" dirty="0"/>
           </a:p>
         </p:txBody>
       </p:sp>
@@ -20500,29 +20498,27 @@
         </p:nvSpPr>
         <p:spPr>
           <a:xfrm>
-            <a:off x="1412748" y="1764792"/>
-            <a:ext cx="2191817" cy="137160"/>
-          </a:xfrm>
-          <a:prstGeom prst="rect">
-            <a:avLst/>
-          </a:prstGeom>
-          <a:noFill/>
-          <a:ln/>
-        </p:spPr>
-        <p:txBody>
-          <a:bodyPr wrap="none" lIns="0" tIns="0" rIns="0" bIns="0" rtlCol="0" anchor="t">
-            <a:normAutofit/>
-          </a:bodyPr>
+            <a:off x="1412748" y="1770278"/>
+            <a:ext cx="2668219" cy="111557"/>
+          </a:xfrm>
+          <a:prstGeom prst="rect">
+            <a:avLst/>
+          </a:prstGeom>
+          <a:noFill/>
+          <a:ln/>
+        </p:spPr>
+        <p:txBody>
+          <a:bodyPr wrap="none" lIns="0" tIns="0" rIns="0" bIns="0" rtlCol="0" anchor="ctr"/>
           <a:lstStyle/>
           <a:p>
             <a:pPr algn="l" indent="0" marL="0">
               <a:lnSpc>
-                <a:spcPct val="85000"/>
+                <a:spcPct val="100000"/>
               </a:lnSpc>
               <a:buNone/>
             </a:pPr>
             <a:r>
-              <a:rPr lang="en-US" sz="460" b="1" dirty="0">
+              <a:rPr lang="en-US" sz="440" b="1" dirty="0">
                 <a:solidFill>
                   <a:srgbClr val="202124"/>
                 </a:solidFill>
@@ -20532,7 +20528,7 @@
               </a:rPr>
               <a:t>Shared VPC</a:t>
             </a:r>
-            <a:endParaRPr lang="en-US" sz="460" dirty="0"/>
+            <a:endParaRPr lang="en-US" sz="440" dirty="0"/>
           </a:p>
         </p:txBody>
       </p:sp>
@@ -20565,51 +20561,7 @@
       </p:sp>
       <p:sp>
         <p:nvSpPr>
-          <p:cNvPr id="73" name="Text 71"/>
-          <p:cNvSpPr/>
-          <p:nvPr/>
-        </p:nvSpPr>
-        <p:spPr>
-          <a:xfrm>
-            <a:off x="1491386" y="3798418"/>
-            <a:ext cx="4497934" cy="137160"/>
-          </a:xfrm>
-          <a:prstGeom prst="rect">
-            <a:avLst/>
-          </a:prstGeom>
-          <a:noFill/>
-          <a:ln/>
-        </p:spPr>
-        <p:txBody>
-          <a:bodyPr wrap="none" lIns="0" tIns="0" rIns="0" bIns="0" rtlCol="0" anchor="t">
-            <a:normAutofit/>
-          </a:bodyPr>
-          <a:lstStyle/>
-          <a:p>
-            <a:pPr algn="l" indent="0" marL="0">
-              <a:lnSpc>
-                <a:spcPct val="85000"/>
-              </a:lnSpc>
-              <a:buNone/>
-            </a:pPr>
-            <a:r>
-              <a:rPr lang="en-US" sz="410" b="1" dirty="0">
-                <a:solidFill>
-                  <a:srgbClr val="202124"/>
-                </a:solidFill>
-                <a:latin typeface="Arial" pitchFamily="34" charset="0"/>
-                <a:ea typeface="Arial" pitchFamily="34" charset="-122"/>
-                <a:cs typeface="Arial" pitchFamily="34" charset="-120"/>
-              </a:rPr>
-              <a:t>ONE Shared Data Plane • ONE Agent Engine Pool • ONE AlloyDB Schema — tenants are rows &amp; namespaces, never projects (0 per-tenant infrastructure)</a:t>
-            </a:r>
-            <a:endParaRPr lang="en-US" sz="410" dirty="0"/>
-          </a:p>
-        </p:txBody>
-      </p:sp>
-      <p:sp>
-        <p:nvSpPr>
-          <p:cNvPr id="74" name="Shape 72"/>
+          <p:cNvPr id="73" name="Shape 71"/>
           <p:cNvSpPr/>
           <p:nvPr/>
         </p:nvSpPr>
@@ -20636,35 +20588,33 @@
       </p:sp>
       <p:sp>
         <p:nvSpPr>
-          <p:cNvPr id="75" name="Text 73"/>
-          <p:cNvSpPr/>
-          <p:nvPr/>
-        </p:nvSpPr>
-        <p:spPr>
-          <a:xfrm>
-            <a:off x="1560881" y="3955694"/>
-            <a:ext cx="2115922" cy="192024"/>
-          </a:xfrm>
-          <a:prstGeom prst="rect">
-            <a:avLst/>
-          </a:prstGeom>
-          <a:noFill/>
-          <a:ln/>
-        </p:spPr>
-        <p:txBody>
-          <a:bodyPr wrap="square" lIns="0" tIns="0" rIns="0" bIns="0" rtlCol="0" anchor="t">
-            <a:normAutofit/>
-          </a:bodyPr>
+          <p:cNvPr id="74" name="Text 72"/>
+          <p:cNvSpPr/>
+          <p:nvPr/>
+        </p:nvSpPr>
+        <p:spPr>
+          <a:xfrm>
+            <a:off x="1560881" y="3970325"/>
+            <a:ext cx="2115922" cy="210312"/>
+          </a:xfrm>
+          <a:prstGeom prst="rect">
+            <a:avLst/>
+          </a:prstGeom>
+          <a:noFill/>
+          <a:ln/>
+        </p:spPr>
+        <p:txBody>
+          <a:bodyPr wrap="square" lIns="0" tIns="0" rIns="0" bIns="0" rtlCol="0" anchor="t"/>
           <a:lstStyle/>
           <a:p>
             <a:pPr algn="l" indent="0" marL="0">
               <a:lnSpc>
-                <a:spcPct val="85000"/>
+                <a:spcPct val="102000"/>
               </a:lnSpc>
               <a:buNone/>
             </a:pPr>
             <a:r>
-              <a:rPr lang="en-US" sz="490" b="1" dirty="0">
+              <a:rPr lang="en-US" sz="470" b="1" dirty="0">
                 <a:solidFill>
                   <a:srgbClr val="202124"/>
                 </a:solidFill>
@@ -20674,17 +20624,17 @@
               </a:rPr>
               <a:t>3. Pooled Agent Runtime (shared by all tenants)</a:t>
             </a:r>
-            <a:endParaRPr lang="en-US" sz="490" dirty="0"/>
+            <a:endParaRPr lang="en-US" sz="470" dirty="0"/>
           </a:p>
           <a:p>
             <a:pPr algn="l" indent="0" marL="0">
               <a:lnSpc>
-                <a:spcPct val="85000"/>
+                <a:spcPct val="102000"/>
               </a:lnSpc>
               <a:buNone/>
             </a:pPr>
             <a:r>
-              <a:rPr lang="en-US" sz="420" dirty="0">
+              <a:rPr lang="en-US" sz="400" dirty="0">
                 <a:solidFill>
                   <a:srgbClr val="202124"/>
                 </a:solidFill>
@@ -20694,13 +20644,13 @@
               </a:rPr>
               <a:t>Ephemeral gVisor sandboxes • per-tenant Model Armor • 90% prefix cache</a:t>
             </a:r>
-            <a:endParaRPr lang="en-US" sz="490" dirty="0"/>
-          </a:p>
-        </p:txBody>
-      </p:sp>
-      <p:sp>
-        <p:nvSpPr>
-          <p:cNvPr id="76" name="Shape 74"/>
+            <a:endParaRPr lang="en-US" sz="470" dirty="0"/>
+          </a:p>
+        </p:txBody>
+      </p:sp>
+      <p:sp>
+        <p:nvSpPr>
+          <p:cNvPr id="75" name="Shape 73"/>
           <p:cNvSpPr/>
           <p:nvPr/>
         </p:nvSpPr>
@@ -20727,35 +20677,33 @@
       </p:sp>
       <p:sp>
         <p:nvSpPr>
-          <p:cNvPr id="77" name="Text 75"/>
-          <p:cNvSpPr/>
-          <p:nvPr/>
-        </p:nvSpPr>
-        <p:spPr>
-          <a:xfrm>
-            <a:off x="3856025" y="3955694"/>
-            <a:ext cx="2063801" cy="192024"/>
-          </a:xfrm>
-          <a:prstGeom prst="rect">
-            <a:avLst/>
-          </a:prstGeom>
-          <a:noFill/>
-          <a:ln/>
-        </p:spPr>
-        <p:txBody>
-          <a:bodyPr wrap="square" lIns="0" tIns="0" rIns="0" bIns="0" rtlCol="0" anchor="t">
-            <a:normAutofit/>
-          </a:bodyPr>
+          <p:cNvPr id="76" name="Text 74"/>
+          <p:cNvSpPr/>
+          <p:nvPr/>
+        </p:nvSpPr>
+        <p:spPr>
+          <a:xfrm>
+            <a:off x="3856025" y="3970325"/>
+            <a:ext cx="2063801" cy="210312"/>
+          </a:xfrm>
+          <a:prstGeom prst="rect">
+            <a:avLst/>
+          </a:prstGeom>
+          <a:noFill/>
+          <a:ln/>
+        </p:spPr>
+        <p:txBody>
+          <a:bodyPr wrap="square" lIns="0" tIns="0" rIns="0" bIns="0" rtlCol="0" anchor="t"/>
           <a:lstStyle/>
           <a:p>
             <a:pPr algn="l" indent="0" marL="0">
               <a:lnSpc>
-                <a:spcPct val="85000"/>
+                <a:spcPct val="102000"/>
               </a:lnSpc>
               <a:buNone/>
             </a:pPr>
             <a:r>
-              <a:rPr lang="en-US" sz="490" b="1" dirty="0">
+              <a:rPr lang="en-US" sz="470" b="1" dirty="0">
                 <a:solidFill>
                   <a:srgbClr val="202124"/>
                 </a:solidFill>
@@ -20765,17 +20713,17 @@
               </a:rPr>
               <a:t>4. Shared Data &amp; Tool Plane (RLS-partitioned)</a:t>
             </a:r>
-            <a:endParaRPr lang="en-US" sz="490" dirty="0"/>
+            <a:endParaRPr lang="en-US" sz="470" dirty="0"/>
           </a:p>
           <a:p>
             <a:pPr algn="l" indent="0" marL="0">
               <a:lnSpc>
-                <a:spcPct val="85000"/>
+                <a:spcPct val="102000"/>
               </a:lnSpc>
               <a:buNone/>
             </a:pPr>
             <a:r>
-              <a:rPr lang="en-US" sz="420" dirty="0">
+              <a:rPr lang="en-US" sz="400" dirty="0">
                 <a:solidFill>
                   <a:srgbClr val="202124"/>
                 </a:solidFill>
@@ -20785,13 +20733,13 @@
               </a:rPr>
               <a:t>Mandatory Row-Level Security • scoped 2LO/3LO MCP • egress SDP masking</a:t>
             </a:r>
-            <a:endParaRPr lang="en-US" sz="490" dirty="0"/>
-          </a:p>
-        </p:txBody>
-      </p:sp>
-      <p:sp>
-        <p:nvSpPr>
-          <p:cNvPr id="78" name="Shape 76"/>
+            <a:endParaRPr lang="en-US" sz="470" dirty="0"/>
+          </a:p>
+        </p:txBody>
+      </p:sp>
+      <p:sp>
+        <p:nvSpPr>
+          <p:cNvPr id="77" name="Shape 75"/>
           <p:cNvSpPr/>
           <p:nvPr/>
         </p:nvSpPr>
@@ -20818,35 +20766,33 @@
       </p:sp>
       <p:sp>
         <p:nvSpPr>
-          <p:cNvPr id="79" name="Text 77"/>
-          <p:cNvSpPr/>
-          <p:nvPr/>
-        </p:nvSpPr>
-        <p:spPr>
-          <a:xfrm>
-            <a:off x="1482242" y="1912010"/>
-            <a:ext cx="1847088" cy="192024"/>
-          </a:xfrm>
-          <a:prstGeom prst="rect">
-            <a:avLst/>
-          </a:prstGeom>
-          <a:noFill/>
-          <a:ln/>
-        </p:spPr>
-        <p:txBody>
-          <a:bodyPr wrap="square" lIns="0" tIns="0" rIns="0" bIns="0" rtlCol="0" anchor="t">
-            <a:normAutofit/>
-          </a:bodyPr>
+          <p:cNvPr id="78" name="Text 76"/>
+          <p:cNvSpPr/>
+          <p:nvPr/>
+        </p:nvSpPr>
+        <p:spPr>
+          <a:xfrm>
+            <a:off x="1482242" y="1926641"/>
+            <a:ext cx="1901952" cy="210312"/>
+          </a:xfrm>
+          <a:prstGeom prst="rect">
+            <a:avLst/>
+          </a:prstGeom>
+          <a:noFill/>
+          <a:ln/>
+        </p:spPr>
+        <p:txBody>
+          <a:bodyPr wrap="square" lIns="0" tIns="0" rIns="0" bIns="0" rtlCol="0" anchor="t"/>
           <a:lstStyle/>
           <a:p>
             <a:pPr algn="l" indent="0" marL="0">
               <a:lnSpc>
-                <a:spcPct val="85000"/>
+                <a:spcPct val="102000"/>
               </a:lnSpc>
               <a:buNone/>
             </a:pPr>
             <a:r>
-              <a:rPr lang="en-US" sz="490" b="1" dirty="0">
+              <a:rPr lang="en-US" sz="470" b="1" dirty="0">
                 <a:solidFill>
                   <a:srgbClr val="202124"/>
                 </a:solidFill>
@@ -20856,17 +20802,17 @@
               </a:rPr>
               <a:t>Hop 1 &amp; Hop 2: Edge PEP &amp; Agent Catalog PDP</a:t>
             </a:r>
-            <a:endParaRPr lang="en-US" sz="490" dirty="0"/>
+            <a:endParaRPr lang="en-US" sz="470" dirty="0"/>
           </a:p>
           <a:p>
             <a:pPr algn="l" indent="0" marL="0">
               <a:lnSpc>
-                <a:spcPct val="85000"/>
+                <a:spcPct val="102000"/>
               </a:lnSpc>
               <a:buNone/>
             </a:pPr>
             <a:r>
-              <a:rPr lang="en-US" sz="420" dirty="0">
+              <a:rPr lang="en-US" sz="400" dirty="0">
                 <a:solidFill>
                   <a:srgbClr val="202124"/>
                 </a:solidFill>
@@ -20876,13 +20822,13 @@
               </a:rPr>
               <a:t>Header stripping, OBO+DPoP KMS Sign &amp; Discovery Engine Catalog pruning</a:t>
             </a:r>
-            <a:endParaRPr lang="en-US" sz="490" dirty="0"/>
-          </a:p>
-        </p:txBody>
-      </p:sp>
-      <p:sp>
-        <p:nvSpPr>
-          <p:cNvPr id="80" name="Shape 78"/>
+            <a:endParaRPr lang="en-US" sz="470" dirty="0"/>
+          </a:p>
+        </p:txBody>
+      </p:sp>
+      <p:sp>
+        <p:nvSpPr>
+          <p:cNvPr id="79" name="Shape 77"/>
           <p:cNvSpPr/>
           <p:nvPr/>
         </p:nvSpPr>
@@ -20909,35 +20855,33 @@
       </p:sp>
       <p:sp>
         <p:nvSpPr>
-          <p:cNvPr id="81" name="Text 79"/>
-          <p:cNvSpPr/>
-          <p:nvPr/>
-        </p:nvSpPr>
-        <p:spPr>
-          <a:xfrm>
-            <a:off x="4655210" y="1946758"/>
-            <a:ext cx="1315822" cy="192024"/>
-          </a:xfrm>
-          <a:prstGeom prst="rect">
-            <a:avLst/>
-          </a:prstGeom>
-          <a:noFill/>
-          <a:ln/>
-        </p:spPr>
-        <p:txBody>
-          <a:bodyPr wrap="square" lIns="0" tIns="0" rIns="0" bIns="0" rtlCol="0" anchor="t">
-            <a:normAutofit/>
-          </a:bodyPr>
+          <p:cNvPr id="80" name="Text 78"/>
+          <p:cNvSpPr/>
+          <p:nvPr/>
+        </p:nvSpPr>
+        <p:spPr>
+          <a:xfrm>
+            <a:off x="4655210" y="1961388"/>
+            <a:ext cx="1315822" cy="210312"/>
+          </a:xfrm>
+          <a:prstGeom prst="rect">
+            <a:avLst/>
+          </a:prstGeom>
+          <a:noFill/>
+          <a:ln/>
+        </p:spPr>
+        <p:txBody>
+          <a:bodyPr wrap="square" lIns="0" tIns="0" rIns="0" bIns="0" rtlCol="0" anchor="t"/>
           <a:lstStyle/>
           <a:p>
             <a:pPr algn="l" indent="0" marL="0">
               <a:lnSpc>
-                <a:spcPct val="85000"/>
+                <a:spcPct val="102000"/>
               </a:lnSpc>
               <a:buNone/>
             </a:pPr>
             <a:r>
-              <a:rPr lang="en-US" sz="490" b="1" dirty="0">
+              <a:rPr lang="en-US" sz="430" b="1" dirty="0">
                 <a:solidFill>
                   <a:srgbClr val="202124"/>
                 </a:solidFill>
@@ -20947,13 +20891,13 @@
               </a:rPr>
               <a:t>Hop 3 &amp; 5: Shared FinOps, Cache &amp; OTel Hub</a:t>
             </a:r>
-            <a:endParaRPr lang="en-US" sz="490" dirty="0"/>
-          </a:p>
-        </p:txBody>
-      </p:sp>
-      <p:sp>
-        <p:nvSpPr>
-          <p:cNvPr id="82" name="Shape 80"/>
+            <a:endParaRPr lang="en-US" sz="430" dirty="0"/>
+          </a:p>
+        </p:txBody>
+      </p:sp>
+      <p:sp>
+        <p:nvSpPr>
+          <p:cNvPr id="81" name="Shape 79"/>
           <p:cNvSpPr/>
           <p:nvPr/>
         </p:nvSpPr>
@@ -20980,7 +20924,7 @@
       </p:sp>
       <p:pic>
         <p:nvPicPr>
-          <p:cNvPr id="83" name="Image 0" descr="preencoded.png">    </p:cNvPr>
+          <p:cNvPr id="82" name="Image 0" descr="preencoded.png">    </p:cNvPr>
           <p:cNvPicPr>
             <a:picLocks noChangeAspect="1"/>
           </p:cNvPicPr>
@@ -20994,7 +20938,7 @@
         </p:blipFill>
         <p:spPr>
           <a:xfrm>
-            <a:off x="1607515" y="5244998"/>
+            <a:off x="1607515" y="5247742"/>
             <a:ext cx="164592" cy="164592"/>
           </a:xfrm>
           <a:prstGeom prst="rect">
@@ -21004,35 +20948,33 @@
       </p:pic>
       <p:sp>
         <p:nvSpPr>
-          <p:cNvPr id="84" name="Text 81"/>
-          <p:cNvSpPr/>
-          <p:nvPr/>
-        </p:nvSpPr>
-        <p:spPr>
-          <a:xfrm>
-            <a:off x="1840687" y="5233111"/>
-            <a:ext cx="1774850" cy="237744"/>
-          </a:xfrm>
-          <a:prstGeom prst="rect">
-            <a:avLst/>
-          </a:prstGeom>
-          <a:noFill/>
-          <a:ln/>
-        </p:spPr>
-        <p:txBody>
-          <a:bodyPr wrap="square" lIns="0" tIns="0" rIns="0" bIns="0" rtlCol="0" anchor="t">
-            <a:normAutofit/>
-          </a:bodyPr>
+          <p:cNvPr id="83" name="Text 80"/>
+          <p:cNvSpPr/>
+          <p:nvPr/>
+        </p:nvSpPr>
+        <p:spPr>
+          <a:xfrm>
+            <a:off x="1840687" y="5247742"/>
+            <a:ext cx="1774850" cy="228600"/>
+          </a:xfrm>
+          <a:prstGeom prst="rect">
+            <a:avLst/>
+          </a:prstGeom>
+          <a:noFill/>
+          <a:ln/>
+        </p:spPr>
+        <p:txBody>
+          <a:bodyPr wrap="square" lIns="0" tIns="0" rIns="0" bIns="0" rtlCol="0" anchor="t"/>
           <a:lstStyle/>
           <a:p>
             <a:pPr algn="l" indent="0" marL="0">
               <a:lnSpc>
-                <a:spcPct val="85000"/>
+                <a:spcPct val="102000"/>
               </a:lnSpc>
               <a:buNone/>
             </a:pPr>
             <a:r>
-              <a:rPr lang="en-US" sz="550" b="1" dirty="0">
+              <a:rPr lang="en-US" sz="480" b="1" dirty="0">
                 <a:solidFill>
                   <a:srgbClr val="202124"/>
                 </a:solidFill>
@@ -21042,17 +20984,17 @@
               </a:rPr>
               <a:t>5-Level Memory Bank (ONE bank)</a:t>
             </a:r>
-            <a:endParaRPr lang="en-US" sz="550" dirty="0"/>
+            <a:endParaRPr lang="en-US" sz="480" dirty="0"/>
           </a:p>
           <a:p>
             <a:pPr algn="l" indent="0" marL="0">
               <a:lnSpc>
-                <a:spcPct val="85000"/>
+                <a:spcPct val="102000"/>
               </a:lnSpc>
               <a:buNone/>
             </a:pPr>
             <a:r>
-              <a:rPr lang="en-US" sz="420" dirty="0">
+              <a:rPr lang="en-US" sz="400" dirty="0">
                 <a:solidFill>
                   <a:srgbClr val="3C4043"/>
                 </a:solidFill>
@@ -21062,13 +21004,13 @@
               </a:rPr>
               <a:t>Namespaced per tenant — same service, disjoint keys</a:t>
             </a:r>
-            <a:endParaRPr lang="en-US" sz="550" dirty="0"/>
-          </a:p>
-        </p:txBody>
-      </p:sp>
-      <p:sp>
-        <p:nvSpPr>
-          <p:cNvPr id="85" name="Shape 82"/>
+            <a:endParaRPr lang="en-US" sz="480" dirty="0"/>
+          </a:p>
+        </p:txBody>
+      </p:sp>
+      <p:sp>
+        <p:nvSpPr>
+          <p:cNvPr id="84" name="Shape 81"/>
           <p:cNvSpPr/>
           <p:nvPr/>
         </p:nvSpPr>
@@ -21095,7 +21037,7 @@
       </p:sp>
       <p:pic>
         <p:nvPicPr>
-          <p:cNvPr id="86" name="Image 1" descr="preencoded.png">    </p:cNvPr>
+          <p:cNvPr id="85" name="Image 1" descr="preencoded.png">    </p:cNvPr>
           <p:cNvPicPr>
             <a:picLocks noChangeAspect="1"/>
           </p:cNvPicPr>
@@ -21109,7 +21051,7 @@
         </p:blipFill>
         <p:spPr>
           <a:xfrm>
-            <a:off x="3902659" y="4253789"/>
+            <a:off x="3902659" y="4256532"/>
             <a:ext cx="164592" cy="164592"/>
           </a:xfrm>
           <a:prstGeom prst="rect">
@@ -21119,35 +21061,33 @@
       </p:pic>
       <p:sp>
         <p:nvSpPr>
-          <p:cNvPr id="87" name="Text 83"/>
-          <p:cNvSpPr/>
-          <p:nvPr/>
-        </p:nvSpPr>
-        <p:spPr>
-          <a:xfrm>
-            <a:off x="4135831" y="4241902"/>
-            <a:ext cx="1722730" cy="237744"/>
-          </a:xfrm>
-          <a:prstGeom prst="rect">
-            <a:avLst/>
-          </a:prstGeom>
-          <a:noFill/>
-          <a:ln/>
-        </p:spPr>
-        <p:txBody>
-          <a:bodyPr wrap="square" lIns="0" tIns="0" rIns="0" bIns="0" rtlCol="0" anchor="t">
-            <a:normAutofit/>
-          </a:bodyPr>
+          <p:cNvPr id="86" name="Text 82"/>
+          <p:cNvSpPr/>
+          <p:nvPr/>
+        </p:nvSpPr>
+        <p:spPr>
+          <a:xfrm>
+            <a:off x="4135831" y="4256532"/>
+            <a:ext cx="1722730" cy="228600"/>
+          </a:xfrm>
+          <a:prstGeom prst="rect">
+            <a:avLst/>
+          </a:prstGeom>
+          <a:noFill/>
+          <a:ln/>
+        </p:spPr>
+        <p:txBody>
+          <a:bodyPr wrap="square" lIns="0" tIns="0" rIns="0" bIns="0" rtlCol="0" anchor="t"/>
           <a:lstStyle/>
           <a:p>
             <a:pPr algn="l" indent="0" marL="0">
               <a:lnSpc>
-                <a:spcPct val="85000"/>
+                <a:spcPct val="102000"/>
               </a:lnSpc>
               <a:buNone/>
             </a:pPr>
             <a:r>
-              <a:rPr lang="en-US" sz="550" b="1" dirty="0">
+              <a:rPr lang="en-US" sz="480" b="1" dirty="0">
                 <a:solidFill>
                   <a:srgbClr val="202124"/>
                 </a:solidFill>
@@ -21157,17 +21097,17 @@
               </a:rPr>
               <a:t>AlloyDB (ONE schema) + BigQuery (ONE dataset)</a:t>
             </a:r>
-            <a:endParaRPr lang="en-US" sz="550" dirty="0"/>
+            <a:endParaRPr lang="en-US" sz="480" dirty="0"/>
           </a:p>
           <a:p>
             <a:pPr algn="l" indent="0" marL="0">
               <a:lnSpc>
-                <a:spcPct val="85000"/>
+                <a:spcPct val="102000"/>
               </a:lnSpc>
               <a:buNone/>
             </a:pPr>
             <a:r>
-              <a:rPr lang="en-US" sz="420" dirty="0">
+              <a:rPr lang="en-US" sz="400" dirty="0">
                 <a:solidFill>
                   <a:srgbClr val="3C4043"/>
                 </a:solidFill>
@@ -21177,13 +21117,13 @@
               </a:rPr>
               <a:t>pattern_a_pooled_rls_entities • FORCE ROW LEVEL SECURITY</a:t>
             </a:r>
-            <a:endParaRPr lang="en-US" sz="550" dirty="0"/>
+            <a:endParaRPr lang="en-US" sz="480" dirty="0"/>
           </a:p>
         </p:txBody>
       </p:sp>
       <p:pic>
         <p:nvPicPr>
-          <p:cNvPr id="88" name="Image 2" descr="preencoded.png">    </p:cNvPr>
+          <p:cNvPr id="87" name="Image 2" descr="preencoded.png">    </p:cNvPr>
           <p:cNvPicPr>
             <a:picLocks noChangeAspect="1"/>
           </p:cNvPicPr>
@@ -21207,7 +21147,7 @@
       </p:pic>
       <p:sp>
         <p:nvSpPr>
-          <p:cNvPr id="89" name="Shape 84"/>
+          <p:cNvPr id="88" name="Shape 83"/>
           <p:cNvSpPr/>
           <p:nvPr/>
         </p:nvSpPr>
@@ -21231,7 +21171,7 @@
       </p:sp>
       <p:sp>
         <p:nvSpPr>
-          <p:cNvPr id="90" name="Shape 85"/>
+          <p:cNvPr id="89" name="Shape 84"/>
           <p:cNvSpPr/>
           <p:nvPr/>
         </p:nvSpPr>
@@ -21255,7 +21195,7 @@
       </p:sp>
       <p:sp>
         <p:nvSpPr>
-          <p:cNvPr id="91" name="Shape 86"/>
+          <p:cNvPr id="90" name="Shape 85"/>
           <p:cNvSpPr/>
           <p:nvPr/>
         </p:nvSpPr>
@@ -21279,7 +21219,7 @@
       </p:sp>
       <p:sp>
         <p:nvSpPr>
-          <p:cNvPr id="92" name="Shape 87"/>
+          <p:cNvPr id="91" name="Shape 86"/>
           <p:cNvSpPr/>
           <p:nvPr/>
         </p:nvSpPr>
@@ -21302,7 +21242,7 @@
       </p:sp>
       <p:sp>
         <p:nvSpPr>
-          <p:cNvPr id="93" name="Shape 88"/>
+          <p:cNvPr id="92" name="Shape 87"/>
           <p:cNvSpPr/>
           <p:nvPr/>
         </p:nvSpPr>
@@ -21326,7 +21266,7 @@
       </p:sp>
       <p:sp>
         <p:nvSpPr>
-          <p:cNvPr id="94" name="Shape 89"/>
+          <p:cNvPr id="93" name="Shape 88"/>
           <p:cNvSpPr/>
           <p:nvPr/>
         </p:nvSpPr>
@@ -21350,7 +21290,7 @@
       </p:sp>
       <p:sp>
         <p:nvSpPr>
-          <p:cNvPr id="95" name="Shape 90"/>
+          <p:cNvPr id="94" name="Shape 89"/>
           <p:cNvSpPr/>
           <p:nvPr/>
         </p:nvSpPr>
@@ -21373,7 +21313,7 @@
       </p:sp>
       <p:sp>
         <p:nvSpPr>
-          <p:cNvPr id="96" name="Shape 91"/>
+          <p:cNvPr id="95" name="Shape 90"/>
           <p:cNvSpPr/>
           <p:nvPr/>
         </p:nvSpPr>
@@ -21397,7 +21337,7 @@
       </p:sp>
       <p:sp>
         <p:nvSpPr>
-          <p:cNvPr id="97" name="Shape 92"/>
+          <p:cNvPr id="96" name="Shape 91"/>
           <p:cNvSpPr/>
           <p:nvPr/>
         </p:nvSpPr>
@@ -21422,7 +21362,7 @@
       </p:sp>
       <p:sp>
         <p:nvSpPr>
-          <p:cNvPr id="98" name="Shape 93"/>
+          <p:cNvPr id="97" name="Shape 92"/>
           <p:cNvSpPr/>
           <p:nvPr/>
         </p:nvSpPr>
@@ -21446,7 +21386,7 @@
       </p:sp>
       <p:sp>
         <p:nvSpPr>
-          <p:cNvPr id="99" name="Shape 94"/>
+          <p:cNvPr id="98" name="Shape 93"/>
           <p:cNvSpPr/>
           <p:nvPr/>
         </p:nvSpPr>
@@ -21470,7 +21410,7 @@
       </p:sp>
       <p:sp>
         <p:nvSpPr>
-          <p:cNvPr id="100" name="Shape 95"/>
+          <p:cNvPr id="99" name="Shape 94"/>
           <p:cNvSpPr/>
           <p:nvPr/>
         </p:nvSpPr>
@@ -21493,7 +21433,7 @@
       </p:sp>
       <p:sp>
         <p:nvSpPr>
-          <p:cNvPr id="101" name="Shape 96"/>
+          <p:cNvPr id="100" name="Shape 95"/>
           <p:cNvSpPr/>
           <p:nvPr/>
         </p:nvSpPr>
@@ -21516,7 +21456,7 @@
       </p:sp>
       <p:sp>
         <p:nvSpPr>
-          <p:cNvPr id="102" name="Shape 97"/>
+          <p:cNvPr id="101" name="Shape 96"/>
           <p:cNvSpPr/>
           <p:nvPr/>
         </p:nvSpPr>
@@ -21540,7 +21480,7 @@
       </p:sp>
       <p:sp>
         <p:nvSpPr>
-          <p:cNvPr id="103" name="Shape 98"/>
+          <p:cNvPr id="102" name="Shape 97"/>
           <p:cNvSpPr/>
           <p:nvPr/>
         </p:nvSpPr>
@@ -21565,7 +21505,7 @@
       </p:sp>
       <p:sp>
         <p:nvSpPr>
-          <p:cNvPr id="104" name="Shape 99"/>
+          <p:cNvPr id="103" name="Shape 98"/>
           <p:cNvSpPr/>
           <p:nvPr/>
         </p:nvSpPr>
@@ -21590,7 +21530,7 @@
       </p:sp>
       <p:sp>
         <p:nvSpPr>
-          <p:cNvPr id="105" name="Shape 100"/>
+          <p:cNvPr id="104" name="Shape 99"/>
           <p:cNvSpPr/>
           <p:nvPr/>
         </p:nvSpPr>
@@ -21614,7 +21554,7 @@
       </p:sp>
       <p:sp>
         <p:nvSpPr>
-          <p:cNvPr id="106" name="Shape 101"/>
+          <p:cNvPr id="105" name="Shape 100"/>
           <p:cNvSpPr/>
           <p:nvPr/>
         </p:nvSpPr>
@@ -21639,7 +21579,7 @@
       </p:sp>
       <p:sp>
         <p:nvSpPr>
-          <p:cNvPr id="107" name="Shape 102"/>
+          <p:cNvPr id="106" name="Shape 101"/>
           <p:cNvSpPr/>
           <p:nvPr/>
         </p:nvSpPr>
@@ -21663,7 +21603,7 @@
       </p:sp>
       <p:sp>
         <p:nvSpPr>
-          <p:cNvPr id="108" name="Shape 103"/>
+          <p:cNvPr id="107" name="Shape 102"/>
           <p:cNvSpPr/>
           <p:nvPr/>
         </p:nvSpPr>
@@ -21687,7 +21627,7 @@
       </p:sp>
       <p:sp>
         <p:nvSpPr>
-          <p:cNvPr id="109" name="Shape 104"/>
+          <p:cNvPr id="108" name="Shape 103"/>
           <p:cNvSpPr/>
           <p:nvPr/>
         </p:nvSpPr>
@@ -21711,7 +21651,7 @@
       </p:sp>
       <p:sp>
         <p:nvSpPr>
-          <p:cNvPr id="110" name="Shape 105"/>
+          <p:cNvPr id="109" name="Shape 104"/>
           <p:cNvSpPr/>
           <p:nvPr/>
         </p:nvSpPr>
@@ -21735,7 +21675,7 @@
       </p:sp>
       <p:sp>
         <p:nvSpPr>
-          <p:cNvPr id="111" name="Shape 106"/>
+          <p:cNvPr id="110" name="Shape 105"/>
           <p:cNvSpPr/>
           <p:nvPr/>
         </p:nvSpPr>
@@ -21759,7 +21699,7 @@
       </p:sp>
       <p:sp>
         <p:nvSpPr>
-          <p:cNvPr id="112" name="Shape 107"/>
+          <p:cNvPr id="111" name="Shape 106"/>
           <p:cNvSpPr/>
           <p:nvPr/>
         </p:nvSpPr>
@@ -21782,7 +21722,7 @@
       </p:sp>
       <p:sp>
         <p:nvSpPr>
-          <p:cNvPr id="113" name="Shape 108"/>
+          <p:cNvPr id="112" name="Shape 107"/>
           <p:cNvSpPr/>
           <p:nvPr/>
         </p:nvSpPr>
@@ -21805,7 +21745,7 @@
       </p:sp>
       <p:sp>
         <p:nvSpPr>
-          <p:cNvPr id="114" name="Shape 109"/>
+          <p:cNvPr id="113" name="Shape 108"/>
           <p:cNvSpPr/>
           <p:nvPr/>
         </p:nvSpPr>
@@ -21828,7 +21768,7 @@
       </p:sp>
       <p:sp>
         <p:nvSpPr>
-          <p:cNvPr id="115" name="Shape 110"/>
+          <p:cNvPr id="114" name="Shape 109"/>
           <p:cNvSpPr/>
           <p:nvPr/>
         </p:nvSpPr>
@@ -21851,7 +21791,7 @@
       </p:sp>
       <p:sp>
         <p:nvSpPr>
-          <p:cNvPr id="116" name="Shape 111"/>
+          <p:cNvPr id="115" name="Shape 110"/>
           <p:cNvSpPr/>
           <p:nvPr/>
         </p:nvSpPr>
@@ -21875,7 +21815,7 @@
       </p:sp>
       <p:sp>
         <p:nvSpPr>
-          <p:cNvPr id="117" name="Shape 112"/>
+          <p:cNvPr id="116" name="Shape 111"/>
           <p:cNvSpPr/>
           <p:nvPr/>
         </p:nvSpPr>
@@ -21898,7 +21838,7 @@
       </p:sp>
       <p:sp>
         <p:nvSpPr>
-          <p:cNvPr id="118" name="Shape 113"/>
+          <p:cNvPr id="117" name="Shape 112"/>
           <p:cNvSpPr/>
           <p:nvPr/>
         </p:nvSpPr>
@@ -21921,7 +21861,7 @@
       </p:sp>
       <p:sp>
         <p:nvSpPr>
-          <p:cNvPr id="119" name="Shape 114"/>
+          <p:cNvPr id="118" name="Shape 113"/>
           <p:cNvSpPr/>
           <p:nvPr/>
         </p:nvSpPr>
@@ -21945,7 +21885,7 @@
       </p:sp>
       <p:sp>
         <p:nvSpPr>
-          <p:cNvPr id="120" name="Shape 115"/>
+          <p:cNvPr id="119" name="Shape 114"/>
           <p:cNvSpPr/>
           <p:nvPr/>
         </p:nvSpPr>
@@ -21969,7 +21909,69 @@
       </p:sp>
       <p:sp>
         <p:nvSpPr>
-          <p:cNvPr id="121" name="Shape 116"/>
+          <p:cNvPr id="120" name="Shape 115"/>
+          <p:cNvSpPr/>
+          <p:nvPr/>
+        </p:nvSpPr>
+        <p:spPr>
+          <a:xfrm>
+            <a:off x="1473098" y="3802075"/>
+            <a:ext cx="4242816" cy="113386"/>
+          </a:xfrm>
+          <a:prstGeom prst="rect">
+            <a:avLst/>
+          </a:prstGeom>
+          <a:solidFill>
+            <a:srgbClr val="FFFFFF"/>
+          </a:solidFill>
+          <a:ln/>
+        </p:spPr>
+      </p:sp>
+      <p:sp>
+        <p:nvSpPr>
+          <p:cNvPr id="121" name="Text 116"/>
+          <p:cNvSpPr/>
+          <p:nvPr/>
+        </p:nvSpPr>
+        <p:spPr>
+          <a:xfrm>
+            <a:off x="1491386" y="3803904"/>
+            <a:ext cx="4497934" cy="111557"/>
+          </a:xfrm>
+          <a:prstGeom prst="rect">
+            <a:avLst/>
+          </a:prstGeom>
+          <a:noFill/>
+          <a:ln/>
+        </p:spPr>
+        <p:txBody>
+          <a:bodyPr wrap="none" lIns="0" tIns="0" rIns="0" bIns="0" rtlCol="0" anchor="ctr"/>
+          <a:lstStyle/>
+          <a:p>
+            <a:pPr algn="l" indent="0" marL="0">
+              <a:lnSpc>
+                <a:spcPct val="100000"/>
+              </a:lnSpc>
+              <a:buNone/>
+            </a:pPr>
+            <a:r>
+              <a:rPr lang="en-US" sz="400" b="1" dirty="0">
+                <a:solidFill>
+                  <a:srgbClr val="202124"/>
+                </a:solidFill>
+                <a:latin typeface="Arial" pitchFamily="34" charset="0"/>
+                <a:ea typeface="Arial" pitchFamily="34" charset="-122"/>
+                <a:cs typeface="Arial" pitchFamily="34" charset="-120"/>
+              </a:rPr>
+              <a:t>ONE Shared Data Plane • ONE Agent Engine Pool • ONE AlloyDB Schema — tenants are rows &amp; namespaces, never projects (0 per-tenant infrastructure)</a:t>
+            </a:r>
+            <a:endParaRPr lang="en-US" sz="400" dirty="0"/>
+          </a:p>
+        </p:txBody>
+      </p:sp>
+      <p:sp>
+        <p:nvSpPr>
+          <p:cNvPr id="122" name="Shape 117"/>
           <p:cNvSpPr/>
           <p:nvPr/>
         </p:nvSpPr>
@@ -21996,7 +21998,7 @@
       </p:sp>
       <p:pic>
         <p:nvPicPr>
-          <p:cNvPr id="122" name="Image 3" descr="preencoded.png">    </p:cNvPr>
+          <p:cNvPr id="123" name="Image 3" descr="preencoded.png">    </p:cNvPr>
           <p:cNvPicPr>
             <a:picLocks noChangeAspect="1"/>
           </p:cNvPicPr>
@@ -22020,35 +22022,33 @@
       </p:pic>
       <p:sp>
         <p:nvSpPr>
-          <p:cNvPr id="123" name="Text 117"/>
+          <p:cNvPr id="124" name="Text 118"/>
           <p:cNvSpPr/>
           <p:nvPr/>
         </p:nvSpPr>
         <p:spPr>
           <a:xfrm>
             <a:off x="3372307" y="658368"/>
-            <a:ext cx="839419" cy="373990"/>
-          </a:xfrm>
-          <a:prstGeom prst="rect">
-            <a:avLst/>
-          </a:prstGeom>
-          <a:noFill/>
-          <a:ln/>
-        </p:spPr>
-        <p:txBody>
-          <a:bodyPr wrap="square" lIns="0" tIns="0" rIns="0" bIns="0" rtlCol="0" anchor="ctr">
-            <a:normAutofit/>
-          </a:bodyPr>
+            <a:ext cx="834847" cy="373990"/>
+          </a:xfrm>
+          <a:prstGeom prst="rect">
+            <a:avLst/>
+          </a:prstGeom>
+          <a:noFill/>
+          <a:ln/>
+        </p:spPr>
+        <p:txBody>
+          <a:bodyPr wrap="square" lIns="0" tIns="0" rIns="0" bIns="0" rtlCol="0" anchor="ctr"/>
           <a:lstStyle/>
           <a:p>
             <a:pPr algn="l" indent="0" marL="0">
               <a:lnSpc>
-                <a:spcPct val="88000"/>
+                <a:spcPct val="104000"/>
               </a:lnSpc>
               <a:buNone/>
             </a:pPr>
             <a:r>
-              <a:rPr lang="en-US" sz="520" b="1" dirty="0">
+              <a:rPr lang="en-US" sz="480" b="1" dirty="0">
                 <a:solidFill>
                   <a:srgbClr val="202124"/>
                 </a:solidFill>
@@ -22058,17 +22058,17 @@
               </a:rPr>
               <a:t>FinVault &amp; RetailStream</a:t>
             </a:r>
-            <a:endParaRPr lang="en-US" sz="520" dirty="0"/>
+            <a:endParaRPr lang="en-US" sz="480" dirty="0"/>
           </a:p>
           <a:p>
             <a:pPr algn="l" indent="0" marL="0">
               <a:lnSpc>
-                <a:spcPct val="88000"/>
+                <a:spcPct val="104000"/>
               </a:lnSpc>
               <a:buNone/>
             </a:pPr>
             <a:r>
-              <a:rPr lang="en-US" sz="440" dirty="0">
+              <a:rPr lang="en-US" sz="410" dirty="0">
                 <a:solidFill>
                   <a:srgbClr val="3C4043"/>
                 </a:solidFill>
@@ -22078,13 +22078,13 @@
               </a:rPr>
               <a:t>Competing SaaS Tenants</a:t>
             </a:r>
-            <a:endParaRPr lang="en-US" sz="520" dirty="0"/>
-          </a:p>
-        </p:txBody>
-      </p:sp>
-      <p:sp>
-        <p:nvSpPr>
-          <p:cNvPr id="124" name="Shape 118"/>
+            <a:endParaRPr lang="en-US" sz="480" dirty="0"/>
+          </a:p>
+        </p:txBody>
+      </p:sp>
+      <p:sp>
+        <p:nvSpPr>
+          <p:cNvPr id="125" name="Shape 119"/>
           <p:cNvSpPr/>
           <p:nvPr/>
         </p:nvSpPr>
@@ -22111,7 +22111,7 @@
       </p:sp>
       <p:pic>
         <p:nvPicPr>
-          <p:cNvPr id="125" name="Image 4" descr="preencoded.png">    </p:cNvPr>
+          <p:cNvPr id="126" name="Image 4" descr="preencoded.png">    </p:cNvPr>
           <p:cNvPicPr>
             <a:picLocks noChangeAspect="1"/>
           </p:cNvPicPr>
@@ -22135,35 +22135,33 @@
       </p:pic>
       <p:sp>
         <p:nvSpPr>
-          <p:cNvPr id="126" name="Text 119"/>
+          <p:cNvPr id="127" name="Text 120"/>
           <p:cNvSpPr/>
           <p:nvPr/>
         </p:nvSpPr>
         <p:spPr>
           <a:xfrm>
             <a:off x="3332988" y="2309774"/>
-            <a:ext cx="879653" cy="330098"/>
-          </a:xfrm>
-          <a:prstGeom prst="rect">
-            <a:avLst/>
-          </a:prstGeom>
-          <a:noFill/>
-          <a:ln/>
-        </p:spPr>
-        <p:txBody>
-          <a:bodyPr wrap="square" lIns="0" tIns="0" rIns="0" bIns="0" rtlCol="0" anchor="ctr">
-            <a:normAutofit/>
-          </a:bodyPr>
+            <a:ext cx="875081" cy="330098"/>
+          </a:xfrm>
+          <a:prstGeom prst="rect">
+            <a:avLst/>
+          </a:prstGeom>
+          <a:noFill/>
+          <a:ln/>
+        </p:spPr>
+        <p:txBody>
+          <a:bodyPr wrap="square" lIns="0" tIns="0" rIns="0" bIns="0" rtlCol="0" anchor="ctr"/>
           <a:lstStyle/>
           <a:p>
             <a:pPr algn="l" indent="0" marL="0">
               <a:lnSpc>
-                <a:spcPct val="85000"/>
+                <a:spcPct val="100000"/>
               </a:lnSpc>
               <a:buNone/>
             </a:pPr>
             <a:r>
-              <a:rPr lang="en-US" sz="500" b="1" dirty="0">
+              <a:rPr lang="en-US" sz="490" b="1" dirty="0">
                 <a:solidFill>
                   <a:srgbClr val="202124"/>
                 </a:solidFill>
@@ -22173,17 +22171,17 @@
               </a:rPr>
               <a:t>External Application Load Balancer</a:t>
             </a:r>
-            <a:endParaRPr lang="en-US" sz="500" dirty="0"/>
+            <a:endParaRPr lang="en-US" sz="490" dirty="0"/>
           </a:p>
           <a:p>
             <a:pPr algn="l" indent="0" marL="0">
               <a:lnSpc>
-                <a:spcPct val="85000"/>
+                <a:spcPct val="100000"/>
               </a:lnSpc>
               <a:buNone/>
             </a:pPr>
             <a:r>
-              <a:rPr lang="en-US" sz="430" dirty="0">
+              <a:rPr lang="en-US" sz="420" dirty="0">
                 <a:solidFill>
                   <a:srgbClr val="3C4043"/>
                 </a:solidFill>
@@ -22193,13 +22191,13 @@
               </a:rPr>
               <a:t>Cloud Load Balancing</a:t>
             </a:r>
-            <a:endParaRPr lang="en-US" sz="500" dirty="0"/>
-          </a:p>
-        </p:txBody>
-      </p:sp>
-      <p:sp>
-        <p:nvSpPr>
-          <p:cNvPr id="127" name="Shape 120"/>
+            <a:endParaRPr lang="en-US" sz="490" dirty="0"/>
+          </a:p>
+        </p:txBody>
+      </p:sp>
+      <p:sp>
+        <p:nvSpPr>
+          <p:cNvPr id="128" name="Shape 121"/>
           <p:cNvSpPr/>
           <p:nvPr/>
         </p:nvSpPr>
@@ -22226,7 +22224,7 @@
       </p:sp>
       <p:pic>
         <p:nvPicPr>
-          <p:cNvPr id="128" name="Image 5" descr="preencoded.png">    </p:cNvPr>
+          <p:cNvPr id="129" name="Image 5" descr="preencoded.png">    </p:cNvPr>
           <p:cNvPicPr>
             <a:picLocks noChangeAspect="1"/>
           </p:cNvPicPr>
@@ -22250,35 +22248,33 @@
       </p:pic>
       <p:sp>
         <p:nvSpPr>
-          <p:cNvPr id="129" name="Text 121"/>
+          <p:cNvPr id="130" name="Text 122"/>
           <p:cNvSpPr/>
           <p:nvPr/>
         </p:nvSpPr>
         <p:spPr>
           <a:xfrm>
             <a:off x="4940503" y="2197303"/>
-            <a:ext cx="950062" cy="312725"/>
-          </a:xfrm>
-          <a:prstGeom prst="rect">
-            <a:avLst/>
-          </a:prstGeom>
-          <a:noFill/>
-          <a:ln/>
-        </p:spPr>
-        <p:txBody>
-          <a:bodyPr wrap="square" lIns="0" tIns="0" rIns="0" bIns="0" rtlCol="0" anchor="ctr">
-            <a:normAutofit/>
-          </a:bodyPr>
+            <a:ext cx="945490" cy="312725"/>
+          </a:xfrm>
+          <a:prstGeom prst="rect">
+            <a:avLst/>
+          </a:prstGeom>
+          <a:noFill/>
+          <a:ln/>
+        </p:spPr>
+        <p:txBody>
+          <a:bodyPr wrap="square" lIns="0" tIns="0" rIns="0" bIns="0" rtlCol="0" anchor="ctr"/>
           <a:lstStyle/>
           <a:p>
             <a:pPr algn="l" indent="0" marL="0">
               <a:lnSpc>
-                <a:spcPct val="85000"/>
+                <a:spcPct val="100000"/>
               </a:lnSpc>
               <a:buNone/>
             </a:pPr>
             <a:r>
-              <a:rPr lang="en-US" sz="500" b="1" dirty="0">
+              <a:rPr lang="en-US" sz="490" b="1" dirty="0">
                 <a:solidFill>
                   <a:srgbClr val="202124"/>
                 </a:solidFill>
@@ -22288,17 +22284,17 @@
               </a:rPr>
               <a:t>ContextCacheConfig (90% COGS Save)</a:t>
             </a:r>
-            <a:endParaRPr lang="en-US" sz="500" dirty="0"/>
+            <a:endParaRPr lang="en-US" sz="490" dirty="0"/>
           </a:p>
           <a:p>
             <a:pPr algn="l" indent="0" marL="0">
               <a:lnSpc>
-                <a:spcPct val="85000"/>
+                <a:spcPct val="100000"/>
               </a:lnSpc>
               <a:buNone/>
             </a:pPr>
             <a:r>
-              <a:rPr lang="en-US" sz="430" dirty="0">
+              <a:rPr lang="en-US" sz="420" dirty="0">
                 <a:solidFill>
                   <a:srgbClr val="3C4043"/>
                 </a:solidFill>
@@ -22308,13 +22304,13 @@
               </a:rPr>
               <a:t>32k Shared Operator Prefix</a:t>
             </a:r>
-            <a:endParaRPr lang="en-US" sz="500" dirty="0"/>
-          </a:p>
-        </p:txBody>
-      </p:sp>
-      <p:sp>
-        <p:nvSpPr>
-          <p:cNvPr id="130" name="Shape 122"/>
+            <a:endParaRPr lang="en-US" sz="490" dirty="0"/>
+          </a:p>
+        </p:txBody>
+      </p:sp>
+      <p:sp>
+        <p:nvSpPr>
+          <p:cNvPr id="131" name="Shape 123"/>
           <p:cNvSpPr/>
           <p:nvPr/>
         </p:nvSpPr>
@@ -22341,7 +22337,7 @@
       </p:sp>
       <p:pic>
         <p:nvPicPr>
-          <p:cNvPr id="131" name="Image 6" descr="preencoded.png">    </p:cNvPr>
+          <p:cNvPr id="132" name="Image 6" descr="preencoded.png">    </p:cNvPr>
           <p:cNvPicPr>
             <a:picLocks noChangeAspect="1"/>
           </p:cNvPicPr>
@@ -22365,35 +22361,33 @@
       </p:pic>
       <p:sp>
         <p:nvSpPr>
-          <p:cNvPr id="132" name="Text 123"/>
+          <p:cNvPr id="133" name="Text 124"/>
           <p:cNvSpPr/>
           <p:nvPr/>
         </p:nvSpPr>
         <p:spPr>
           <a:xfrm>
             <a:off x="4948733" y="2926994"/>
-            <a:ext cx="924458" cy="295351"/>
-          </a:xfrm>
-          <a:prstGeom prst="rect">
-            <a:avLst/>
-          </a:prstGeom>
-          <a:noFill/>
-          <a:ln/>
-        </p:spPr>
-        <p:txBody>
-          <a:bodyPr wrap="square" lIns="0" tIns="0" rIns="0" bIns="0" rtlCol="0" anchor="ctr">
-            <a:normAutofit/>
-          </a:bodyPr>
+            <a:ext cx="919886" cy="295351"/>
+          </a:xfrm>
+          <a:prstGeom prst="rect">
+            <a:avLst/>
+          </a:prstGeom>
+          <a:noFill/>
+          <a:ln/>
+        </p:spPr>
+        <p:txBody>
+          <a:bodyPr wrap="square" lIns="0" tIns="0" rIns="0" bIns="0" rtlCol="0" anchor="ctr"/>
           <a:lstStyle/>
           <a:p>
             <a:pPr algn="l" indent="0" marL="0">
               <a:lnSpc>
-                <a:spcPct val="85000"/>
+                <a:spcPct val="100000"/>
               </a:lnSpc>
               <a:buNone/>
             </a:pPr>
             <a:r>
-              <a:rPr lang="en-US" sz="500" b="1" dirty="0">
+              <a:rPr lang="en-US" sz="490" b="1" dirty="0">
                 <a:solidFill>
                   <a:srgbClr val="202124"/>
                 </a:solidFill>
@@ -22403,17 +22397,17 @@
               </a:rPr>
               <a:t>BigQuery OTel Sink</a:t>
             </a:r>
-            <a:endParaRPr lang="en-US" sz="500" dirty="0"/>
+            <a:endParaRPr lang="en-US" sz="490" dirty="0"/>
           </a:p>
           <a:p>
             <a:pPr algn="l" indent="0" marL="0">
               <a:lnSpc>
-                <a:spcPct val="85000"/>
+                <a:spcPct val="100000"/>
               </a:lnSpc>
               <a:buNone/>
             </a:pPr>
             <a:r>
-              <a:rPr lang="en-US" sz="430" dirty="0">
+              <a:rPr lang="en-US" sz="420" dirty="0">
                 <a:solidFill>
                   <a:srgbClr val="3C4043"/>
                 </a:solidFill>
@@ -22423,13 +22417,13 @@
               </a:rPr>
               <a:t>tenant_telemetry_spans</a:t>
             </a:r>
-            <a:endParaRPr lang="en-US" sz="500" dirty="0"/>
-          </a:p>
-        </p:txBody>
-      </p:sp>
-      <p:sp>
-        <p:nvSpPr>
-          <p:cNvPr id="133" name="Shape 124"/>
+            <a:endParaRPr lang="en-US" sz="490" dirty="0"/>
+          </a:p>
+        </p:txBody>
+      </p:sp>
+      <p:sp>
+        <p:nvSpPr>
+          <p:cNvPr id="134" name="Shape 125"/>
           <p:cNvSpPr/>
           <p:nvPr/>
         </p:nvSpPr>
@@ -22456,7 +22450,7 @@
       </p:sp>
       <p:pic>
         <p:nvPicPr>
-          <p:cNvPr id="134" name="Image 7" descr="preencoded.png">    </p:cNvPr>
+          <p:cNvPr id="135" name="Image 7" descr="preencoded.png">    </p:cNvPr>
           <p:cNvPicPr>
             <a:picLocks noChangeAspect="1"/>
           </p:cNvPicPr>
@@ -22480,35 +22474,33 @@
       </p:pic>
       <p:sp>
         <p:nvSpPr>
-          <p:cNvPr id="135" name="Text 125"/>
+          <p:cNvPr id="136" name="Text 126"/>
           <p:cNvSpPr/>
           <p:nvPr/>
         </p:nvSpPr>
         <p:spPr>
           <a:xfrm>
             <a:off x="4956962" y="2570378"/>
-            <a:ext cx="907085" cy="295351"/>
-          </a:xfrm>
-          <a:prstGeom prst="rect">
-            <a:avLst/>
-          </a:prstGeom>
-          <a:noFill/>
-          <a:ln/>
-        </p:spPr>
-        <p:txBody>
-          <a:bodyPr wrap="square" lIns="0" tIns="0" rIns="0" bIns="0" rtlCol="0" anchor="ctr">
-            <a:normAutofit/>
-          </a:bodyPr>
+            <a:ext cx="902513" cy="295351"/>
+          </a:xfrm>
+          <a:prstGeom prst="rect">
+            <a:avLst/>
+          </a:prstGeom>
+          <a:noFill/>
+          <a:ln/>
+        </p:spPr>
+        <p:txBody>
+          <a:bodyPr wrap="square" lIns="0" tIns="0" rIns="0" bIns="0" rtlCol="0" anchor="ctr"/>
           <a:lstStyle/>
           <a:p>
             <a:pPr algn="l" indent="0" marL="0">
               <a:lnSpc>
-                <a:spcPct val="85000"/>
+                <a:spcPct val="100000"/>
               </a:lnSpc>
               <a:buNone/>
             </a:pPr>
             <a:r>
-              <a:rPr lang="en-US" sz="500" b="1" dirty="0">
+              <a:rPr lang="en-US" sz="490" b="1" dirty="0">
                 <a:solidFill>
                   <a:srgbClr val="202124"/>
                 </a:solidFill>
@@ -22518,17 +22510,17 @@
               </a:rPr>
               <a:t>Memorystore Valkey</a:t>
             </a:r>
-            <a:endParaRPr lang="en-US" sz="500" dirty="0"/>
+            <a:endParaRPr lang="en-US" sz="490" dirty="0"/>
           </a:p>
           <a:p>
             <a:pPr algn="l" indent="0" marL="0">
               <a:lnSpc>
-                <a:spcPct val="85000"/>
+                <a:spcPct val="100000"/>
               </a:lnSpc>
               <a:buNone/>
             </a:pPr>
             <a:r>
-              <a:rPr lang="en-US" sz="430" dirty="0">
+              <a:rPr lang="en-US" sz="420" dirty="0">
                 <a:solidFill>
                   <a:srgbClr val="3C4043"/>
                 </a:solidFill>
@@ -22538,13 +22530,13 @@
               </a:rPr>
               <a:t>4k Standard vs 8k Enterprise</a:t>
             </a:r>
-            <a:endParaRPr lang="en-US" sz="500" dirty="0"/>
-          </a:p>
-        </p:txBody>
-      </p:sp>
-      <p:sp>
-        <p:nvSpPr>
-          <p:cNvPr id="136" name="Shape 126"/>
+            <a:endParaRPr lang="en-US" sz="490" dirty="0"/>
+          </a:p>
+        </p:txBody>
+      </p:sp>
+      <p:sp>
+        <p:nvSpPr>
+          <p:cNvPr id="137" name="Shape 127"/>
           <p:cNvSpPr/>
           <p:nvPr/>
         </p:nvSpPr>
@@ -22571,7 +22563,7 @@
       </p:sp>
       <p:pic>
         <p:nvPicPr>
-          <p:cNvPr id="137" name="Image 8" descr="preencoded.png">    </p:cNvPr>
+          <p:cNvPr id="138" name="Image 8" descr="preencoded.png">    </p:cNvPr>
           <p:cNvPicPr>
             <a:picLocks noChangeAspect="1"/>
           </p:cNvPicPr>
@@ -22595,35 +22587,33 @@
       </p:pic>
       <p:sp>
         <p:nvSpPr>
-          <p:cNvPr id="138" name="Text 127"/>
+          <p:cNvPr id="139" name="Text 128"/>
           <p:cNvSpPr/>
           <p:nvPr/>
         </p:nvSpPr>
         <p:spPr>
           <a:xfrm>
             <a:off x="4092854" y="5196535"/>
-            <a:ext cx="719633" cy="321869"/>
-          </a:xfrm>
-          <a:prstGeom prst="rect">
-            <a:avLst/>
-          </a:prstGeom>
-          <a:noFill/>
-          <a:ln/>
-        </p:spPr>
-        <p:txBody>
-          <a:bodyPr wrap="square" lIns="0" tIns="0" rIns="0" bIns="0" rtlCol="0" anchor="ctr">
-            <a:normAutofit/>
-          </a:bodyPr>
+            <a:ext cx="715061" cy="321869"/>
+          </a:xfrm>
+          <a:prstGeom prst="rect">
+            <a:avLst/>
+          </a:prstGeom>
+          <a:noFill/>
+          <a:ln/>
+        </p:spPr>
+        <p:txBody>
+          <a:bodyPr wrap="square" lIns="0" tIns="0" rIns="0" bIns="0" rtlCol="0" anchor="ctr"/>
           <a:lstStyle/>
           <a:p>
             <a:pPr algn="l" indent="0" marL="0">
               <a:lnSpc>
-                <a:spcPct val="85000"/>
+                <a:spcPct val="100000"/>
               </a:lnSpc>
               <a:buNone/>
             </a:pPr>
             <a:r>
-              <a:rPr lang="en-US" sz="500" b="1" dirty="0">
+              <a:rPr lang="en-US" sz="490" b="1" dirty="0">
                 <a:solidFill>
                   <a:srgbClr val="202124"/>
                 </a:solidFill>
@@ -22633,17 +22623,17 @@
               </a:rPr>
               <a:t>BigQuery ROW ACCESS POLICY</a:t>
             </a:r>
-            <a:endParaRPr lang="en-US" sz="500" dirty="0"/>
+            <a:endParaRPr lang="en-US" sz="490" dirty="0"/>
           </a:p>
           <a:p>
             <a:pPr algn="l" indent="0" marL="0">
               <a:lnSpc>
-                <a:spcPct val="85000"/>
+                <a:spcPct val="100000"/>
               </a:lnSpc>
               <a:buNone/>
             </a:pPr>
             <a:r>
-              <a:rPr lang="en-US" sz="430" dirty="0">
+              <a:rPr lang="en-US" sz="420" dirty="0">
                 <a:solidFill>
                   <a:srgbClr val="3C4043"/>
                 </a:solidFill>
@@ -22653,13 +22643,13 @@
               </a:rPr>
               <a:t>SESSION_USER tenant filter</a:t>
             </a:r>
-            <a:endParaRPr lang="en-US" sz="500" dirty="0"/>
-          </a:p>
-        </p:txBody>
-      </p:sp>
-      <p:sp>
-        <p:nvSpPr>
-          <p:cNvPr id="139" name="Shape 128"/>
+            <a:endParaRPr lang="en-US" sz="490" dirty="0"/>
+          </a:p>
+        </p:txBody>
+      </p:sp>
+      <p:sp>
+        <p:nvSpPr>
+          <p:cNvPr id="140" name="Shape 129"/>
           <p:cNvSpPr/>
           <p:nvPr/>
         </p:nvSpPr>
@@ -22686,7 +22676,7 @@
       </p:sp>
       <p:pic>
         <p:nvPicPr>
-          <p:cNvPr id="140" name="Image 9" descr="preencoded.png">    </p:cNvPr>
+          <p:cNvPr id="141" name="Image 9" descr="preencoded.png">    </p:cNvPr>
           <p:cNvPicPr>
             <a:picLocks noChangeAspect="1"/>
           </p:cNvPicPr>
@@ -22710,35 +22700,33 @@
       </p:pic>
       <p:sp>
         <p:nvSpPr>
-          <p:cNvPr id="141" name="Text 129"/>
+          <p:cNvPr id="142" name="Text 130"/>
           <p:cNvSpPr/>
           <p:nvPr/>
         </p:nvSpPr>
         <p:spPr>
           <a:xfrm>
             <a:off x="5170932" y="5196535"/>
-            <a:ext cx="719633" cy="321869"/>
-          </a:xfrm>
-          <a:prstGeom prst="rect">
-            <a:avLst/>
-          </a:prstGeom>
-          <a:noFill/>
-          <a:ln/>
-        </p:spPr>
-        <p:txBody>
-          <a:bodyPr wrap="square" lIns="0" tIns="0" rIns="0" bIns="0" rtlCol="0" anchor="ctr">
-            <a:normAutofit/>
-          </a:bodyPr>
+            <a:ext cx="715061" cy="321869"/>
+          </a:xfrm>
+          <a:prstGeom prst="rect">
+            <a:avLst/>
+          </a:prstGeom>
+          <a:noFill/>
+          <a:ln/>
+        </p:spPr>
+        <p:txBody>
+          <a:bodyPr wrap="square" lIns="0" tIns="0" rIns="0" bIns="0" rtlCol="0" anchor="ctr"/>
           <a:lstStyle/>
           <a:p>
             <a:pPr algn="l" indent="0" marL="0">
               <a:lnSpc>
-                <a:spcPct val="85000"/>
+                <a:spcPct val="100000"/>
               </a:lnSpc>
               <a:buNone/>
             </a:pPr>
             <a:r>
-              <a:rPr lang="en-US" sz="500" b="1" dirty="0">
+              <a:rPr lang="en-US" sz="490" b="1" dirty="0">
                 <a:solidFill>
                   <a:srgbClr val="202124"/>
                 </a:solidFill>
@@ -22748,17 +22736,17 @@
               </a:rPr>
               <a:t>MCP Hub (shared)</a:t>
             </a:r>
-            <a:endParaRPr lang="en-US" sz="500" dirty="0"/>
+            <a:endParaRPr lang="en-US" sz="490" dirty="0"/>
           </a:p>
           <a:p>
             <a:pPr algn="l" indent="0" marL="0">
               <a:lnSpc>
-                <a:spcPct val="85000"/>
+                <a:spcPct val="100000"/>
               </a:lnSpc>
               <a:buNone/>
             </a:pPr>
             <a:r>
-              <a:rPr lang="en-US" sz="430" dirty="0">
+              <a:rPr lang="en-US" sz="420" dirty="0">
                 <a:solidFill>
                   <a:srgbClr val="3C4043"/>
                 </a:solidFill>
@@ -22768,13 +22756,13 @@
               </a:rPr>
               <a:t>2LO service + per-tenant 3LO consent</a:t>
             </a:r>
-            <a:endParaRPr lang="en-US" sz="500" dirty="0"/>
-          </a:p>
-        </p:txBody>
-      </p:sp>
-      <p:sp>
-        <p:nvSpPr>
-          <p:cNvPr id="142" name="Shape 130"/>
+            <a:endParaRPr lang="en-US" sz="490" dirty="0"/>
+          </a:p>
+        </p:txBody>
+      </p:sp>
+      <p:sp>
+        <p:nvSpPr>
+          <p:cNvPr id="143" name="Shape 131"/>
           <p:cNvSpPr/>
           <p:nvPr/>
         </p:nvSpPr>
@@ -22801,7 +22789,7 @@
       </p:sp>
       <p:pic>
         <p:nvPicPr>
-          <p:cNvPr id="143" name="Image 10" descr="preencoded.png">    </p:cNvPr>
+          <p:cNvPr id="144" name="Image 10" descr="preencoded.png">    </p:cNvPr>
           <p:cNvPicPr>
             <a:picLocks noChangeAspect="1"/>
           </p:cNvPicPr>
@@ -22825,35 +22813,33 @@
       </p:pic>
       <p:sp>
         <p:nvSpPr>
-          <p:cNvPr id="144" name="Text 131"/>
+          <p:cNvPr id="145" name="Text 132"/>
           <p:cNvSpPr/>
           <p:nvPr/>
         </p:nvSpPr>
         <p:spPr>
           <a:xfrm>
             <a:off x="4092854" y="5648249"/>
-            <a:ext cx="719633" cy="321869"/>
-          </a:xfrm>
-          <a:prstGeom prst="rect">
-            <a:avLst/>
-          </a:prstGeom>
-          <a:noFill/>
-          <a:ln/>
-        </p:spPr>
-        <p:txBody>
-          <a:bodyPr wrap="square" lIns="0" tIns="0" rIns="0" bIns="0" rtlCol="0" anchor="ctr">
-            <a:normAutofit/>
-          </a:bodyPr>
+            <a:ext cx="715061" cy="321869"/>
+          </a:xfrm>
+          <a:prstGeom prst="rect">
+            <a:avLst/>
+          </a:prstGeom>
+          <a:noFill/>
+          <a:ln/>
+        </p:spPr>
+        <p:txBody>
+          <a:bodyPr wrap="square" lIns="0" tIns="0" rIns="0" bIns="0" rtlCol="0" anchor="ctr"/>
           <a:lstStyle/>
           <a:p>
             <a:pPr algn="l" indent="0" marL="0">
               <a:lnSpc>
-                <a:spcPct val="85000"/>
+                <a:spcPct val="100000"/>
               </a:lnSpc>
               <a:buNone/>
             </a:pPr>
             <a:r>
-              <a:rPr lang="en-US" sz="500" b="1" dirty="0">
+              <a:rPr lang="en-US" sz="490" b="1" dirty="0">
                 <a:solidFill>
                   <a:srgbClr val="202124"/>
                 </a:solidFill>
@@ -22863,17 +22849,17 @@
               </a:rPr>
               <a:t>Cloud SDP Egress</a:t>
             </a:r>
-            <a:endParaRPr lang="en-US" sz="500" dirty="0"/>
+            <a:endParaRPr lang="en-US" sz="490" dirty="0"/>
           </a:p>
           <a:p>
             <a:pPr algn="l" indent="0" marL="0">
               <a:lnSpc>
-                <a:spcPct val="85000"/>
+                <a:spcPct val="100000"/>
               </a:lnSpc>
               <a:buNone/>
             </a:pPr>
             <a:r>
-              <a:rPr lang="en-US" sz="430" dirty="0">
+              <a:rPr lang="en-US" sz="420" dirty="0">
                 <a:solidFill>
                   <a:srgbClr val="3C4043"/>
                 </a:solidFill>
@@ -22883,13 +22869,13 @@
               </a:rPr>
               <a:t>IBAN / SWIFT / PAN masking</a:t>
             </a:r>
-            <a:endParaRPr lang="en-US" sz="500" dirty="0"/>
-          </a:p>
-        </p:txBody>
-      </p:sp>
-      <p:sp>
-        <p:nvSpPr>
-          <p:cNvPr id="145" name="Shape 132"/>
+            <a:endParaRPr lang="en-US" sz="490" dirty="0"/>
+          </a:p>
+        </p:txBody>
+      </p:sp>
+      <p:sp>
+        <p:nvSpPr>
+          <p:cNvPr id="146" name="Shape 133"/>
           <p:cNvSpPr/>
           <p:nvPr/>
         </p:nvSpPr>
@@ -22916,7 +22902,7 @@
       </p:sp>
       <p:pic>
         <p:nvPicPr>
-          <p:cNvPr id="146" name="Image 11" descr="preencoded.png">    </p:cNvPr>
+          <p:cNvPr id="147" name="Image 11" descr="preencoded.png">    </p:cNvPr>
           <p:cNvPicPr>
             <a:picLocks noChangeAspect="1"/>
           </p:cNvPicPr>
@@ -22940,35 +22926,33 @@
       </p:pic>
       <p:sp>
         <p:nvSpPr>
-          <p:cNvPr id="147" name="Text 133"/>
+          <p:cNvPr id="148" name="Text 134"/>
           <p:cNvSpPr/>
           <p:nvPr/>
         </p:nvSpPr>
         <p:spPr>
           <a:xfrm>
             <a:off x="5170932" y="5648249"/>
-            <a:ext cx="719633" cy="321869"/>
-          </a:xfrm>
-          <a:prstGeom prst="rect">
-            <a:avLst/>
-          </a:prstGeom>
-          <a:noFill/>
-          <a:ln/>
-        </p:spPr>
-        <p:txBody>
-          <a:bodyPr wrap="square" lIns="0" tIns="0" rIns="0" bIns="0" rtlCol="0" anchor="ctr">
-            <a:normAutofit/>
-          </a:bodyPr>
+            <a:ext cx="715061" cy="321869"/>
+          </a:xfrm>
+          <a:prstGeom prst="rect">
+            <a:avLst/>
+          </a:prstGeom>
+          <a:noFill/>
+          <a:ln/>
+        </p:spPr>
+        <p:txBody>
+          <a:bodyPr wrap="square" lIns="0" tIns="0" rIns="0" bIns="0" rtlCol="0" anchor="ctr"/>
           <a:lstStyle/>
           <a:p>
             <a:pPr algn="l" indent="0" marL="0">
               <a:lnSpc>
-                <a:spcPct val="85000"/>
+                <a:spcPct val="100000"/>
               </a:lnSpc>
               <a:buNone/>
             </a:pPr>
             <a:r>
-              <a:rPr lang="en-US" sz="500" b="1" dirty="0">
+              <a:rPr lang="en-US" sz="490" b="1" dirty="0">
                 <a:solidFill>
                   <a:srgbClr val="202124"/>
                 </a:solidFill>
@@ -22978,17 +22962,17 @@
               </a:rPr>
               <a:t>Cloud KMS</a:t>
             </a:r>
-            <a:endParaRPr lang="en-US" sz="500" dirty="0"/>
+            <a:endParaRPr lang="en-US" sz="490" dirty="0"/>
           </a:p>
           <a:p>
             <a:pPr algn="l" indent="0" marL="0">
               <a:lnSpc>
-                <a:spcPct val="85000"/>
+                <a:spcPct val="100000"/>
               </a:lnSpc>
               <a:buNone/>
             </a:pPr>
             <a:r>
-              <a:rPr lang="en-US" sz="430" dirty="0">
+              <a:rPr lang="en-US" sz="420" dirty="0">
                 <a:solidFill>
                   <a:srgbClr val="3C4043"/>
                 </a:solidFill>
@@ -22998,13 +22982,13 @@
               </a:rPr>
               <a:t>adk-agent-signing-key • per-tenant claims</a:t>
             </a:r>
-            <a:endParaRPr lang="en-US" sz="500" dirty="0"/>
-          </a:p>
-        </p:txBody>
-      </p:sp>
-      <p:sp>
-        <p:nvSpPr>
-          <p:cNvPr id="148" name="Shape 134"/>
+            <a:endParaRPr lang="en-US" sz="490" dirty="0"/>
+          </a:p>
+        </p:txBody>
+      </p:sp>
+      <p:sp>
+        <p:nvSpPr>
+          <p:cNvPr id="149" name="Shape 135"/>
           <p:cNvSpPr/>
           <p:nvPr/>
         </p:nvSpPr>
@@ -23031,7 +23015,7 @@
       </p:sp>
       <p:pic>
         <p:nvPicPr>
-          <p:cNvPr id="149" name="Image 12" descr="preencoded.png">    </p:cNvPr>
+          <p:cNvPr id="150" name="Image 12" descr="preencoded.png">    </p:cNvPr>
           <p:cNvPicPr>
             <a:picLocks noChangeAspect="1"/>
           </p:cNvPicPr>
@@ -23055,35 +23039,33 @@
       </p:pic>
       <p:sp>
         <p:nvSpPr>
-          <p:cNvPr id="150" name="Text 135"/>
+          <p:cNvPr id="151" name="Text 136"/>
           <p:cNvSpPr/>
           <p:nvPr/>
         </p:nvSpPr>
         <p:spPr>
           <a:xfrm>
             <a:off x="2954426" y="4205326"/>
-            <a:ext cx="693115" cy="321869"/>
-          </a:xfrm>
-          <a:prstGeom prst="rect">
-            <a:avLst/>
-          </a:prstGeom>
-          <a:noFill/>
-          <a:ln/>
-        </p:spPr>
-        <p:txBody>
-          <a:bodyPr wrap="square" lIns="0" tIns="0" rIns="0" bIns="0" rtlCol="0" anchor="ctr">
-            <a:normAutofit/>
-          </a:bodyPr>
+            <a:ext cx="688543" cy="321869"/>
+          </a:xfrm>
+          <a:prstGeom prst="rect">
+            <a:avLst/>
+          </a:prstGeom>
+          <a:noFill/>
+          <a:ln/>
+        </p:spPr>
+        <p:txBody>
+          <a:bodyPr wrap="square" lIns="0" tIns="0" rIns="0" bIns="0" rtlCol="0" anchor="ctr"/>
           <a:lstStyle/>
           <a:p>
             <a:pPr algn="l" indent="0" marL="0">
               <a:lnSpc>
-                <a:spcPct val="85000"/>
+                <a:spcPct val="100000"/>
               </a:lnSpc>
               <a:buNone/>
             </a:pPr>
             <a:r>
-              <a:rPr lang="en-US" sz="500" b="1" dirty="0">
+              <a:rPr lang="en-US" sz="490" b="1" dirty="0">
                 <a:solidFill>
                   <a:srgbClr val="202124"/>
                 </a:solidFill>
@@ -23093,17 +23075,17 @@
               </a:rPr>
               <a:t>Vertex AI Agent Engine</a:t>
             </a:r>
-            <a:endParaRPr lang="en-US" sz="500" dirty="0"/>
+            <a:endParaRPr lang="en-US" sz="490" dirty="0"/>
           </a:p>
           <a:p>
             <a:pPr algn="l" indent="0" marL="0">
               <a:lnSpc>
-                <a:spcPct val="85000"/>
+                <a:spcPct val="100000"/>
               </a:lnSpc>
               <a:buNone/>
             </a:pPr>
             <a:r>
-              <a:rPr lang="en-US" sz="430" dirty="0">
+              <a:rPr lang="en-US" sz="420" dirty="0">
                 <a:solidFill>
                   <a:srgbClr val="3C4043"/>
                 </a:solidFill>
@@ -23113,13 +23095,13 @@
               </a:rPr>
               <a:t>ONE gVisor pool • temp:tenant_id</a:t>
             </a:r>
-            <a:endParaRPr lang="en-US" sz="500" dirty="0"/>
-          </a:p>
-        </p:txBody>
-      </p:sp>
-      <p:sp>
-        <p:nvSpPr>
-          <p:cNvPr id="151" name="Shape 136"/>
+            <a:endParaRPr lang="en-US" sz="490" dirty="0"/>
+          </a:p>
+        </p:txBody>
+      </p:sp>
+      <p:sp>
+        <p:nvSpPr>
+          <p:cNvPr id="152" name="Shape 137"/>
           <p:cNvSpPr/>
           <p:nvPr/>
         </p:nvSpPr>
@@ -23146,7 +23128,7 @@
       </p:sp>
       <p:pic>
         <p:nvPicPr>
-          <p:cNvPr id="152" name="Image 13" descr="preencoded.png">    </p:cNvPr>
+          <p:cNvPr id="153" name="Image 13" descr="preencoded.png">    </p:cNvPr>
           <p:cNvPicPr>
             <a:picLocks noChangeAspect="1"/>
           </p:cNvPicPr>
@@ -23170,35 +23152,33 @@
       </p:pic>
       <p:sp>
         <p:nvSpPr>
-          <p:cNvPr id="153" name="Text 137"/>
+          <p:cNvPr id="154" name="Text 138"/>
           <p:cNvSpPr/>
           <p:nvPr/>
         </p:nvSpPr>
         <p:spPr>
           <a:xfrm>
             <a:off x="2954426" y="4691786"/>
-            <a:ext cx="693115" cy="321869"/>
-          </a:xfrm>
-          <a:prstGeom prst="rect">
-            <a:avLst/>
-          </a:prstGeom>
-          <a:noFill/>
-          <a:ln/>
-        </p:spPr>
-        <p:txBody>
-          <a:bodyPr wrap="square" lIns="0" tIns="0" rIns="0" bIns="0" rtlCol="0" anchor="ctr">
-            <a:normAutofit/>
-          </a:bodyPr>
+            <a:ext cx="688543" cy="321869"/>
+          </a:xfrm>
+          <a:prstGeom prst="rect">
+            <a:avLst/>
+          </a:prstGeom>
+          <a:noFill/>
+          <a:ln/>
+        </p:spPr>
+        <p:txBody>
+          <a:bodyPr wrap="square" lIns="0" tIns="0" rIns="0" bIns="0" rtlCol="0" anchor="ctr"/>
           <a:lstStyle/>
           <a:p>
             <a:pPr algn="l" indent="0" marL="0">
               <a:lnSpc>
-                <a:spcPct val="85000"/>
+                <a:spcPct val="100000"/>
               </a:lnSpc>
               <a:buNone/>
             </a:pPr>
             <a:r>
-              <a:rPr lang="en-US" sz="500" b="1" dirty="0">
+              <a:rPr lang="en-US" sz="490" b="1" dirty="0">
                 <a:solidFill>
                   <a:srgbClr val="202124"/>
                 </a:solidFill>
@@ -23208,17 +23188,17 @@
               </a:rPr>
               <a:t>Memorystore Valkey</a:t>
             </a:r>
-            <a:endParaRPr lang="en-US" sz="500" dirty="0"/>
+            <a:endParaRPr lang="en-US" sz="490" dirty="0"/>
           </a:p>
           <a:p>
             <a:pPr algn="l" indent="0" marL="0">
               <a:lnSpc>
-                <a:spcPct val="85000"/>
+                <a:spcPct val="100000"/>
               </a:lnSpc>
               <a:buNone/>
             </a:pPr>
             <a:r>
-              <a:rPr lang="en-US" sz="430" dirty="0">
+              <a:rPr lang="en-US" sz="420" dirty="0">
                 <a:solidFill>
                   <a:srgbClr val="3C4043"/>
                 </a:solidFill>
@@ -23228,13 +23208,13 @@
               </a:rPr>
               <a:t>RPM bulkheads 120 Std / 600 Ent</a:t>
             </a:r>
-            <a:endParaRPr lang="en-US" sz="500" dirty="0"/>
-          </a:p>
-        </p:txBody>
-      </p:sp>
-      <p:sp>
-        <p:nvSpPr>
-          <p:cNvPr id="154" name="Shape 138"/>
+            <a:endParaRPr lang="en-US" sz="490" dirty="0"/>
+          </a:p>
+        </p:txBody>
+      </p:sp>
+      <p:sp>
+        <p:nvSpPr>
+          <p:cNvPr id="155" name="Shape 139"/>
           <p:cNvSpPr/>
           <p:nvPr/>
         </p:nvSpPr>
@@ -23261,7 +23241,7 @@
       </p:sp>
       <p:pic>
         <p:nvPicPr>
-          <p:cNvPr id="155" name="Image 14" descr="preencoded.png">    </p:cNvPr>
+          <p:cNvPr id="156" name="Image 14" descr="preencoded.png">    </p:cNvPr>
           <p:cNvPicPr>
             <a:picLocks noChangeAspect="1"/>
           </p:cNvPicPr>
@@ -23285,35 +23265,33 @@
       </p:pic>
       <p:sp>
         <p:nvSpPr>
-          <p:cNvPr id="156" name="Text 139"/>
+          <p:cNvPr id="157" name="Text 140"/>
           <p:cNvSpPr/>
           <p:nvPr/>
         </p:nvSpPr>
         <p:spPr>
           <a:xfrm>
             <a:off x="1793138" y="4205326"/>
-            <a:ext cx="645566" cy="312725"/>
-          </a:xfrm>
-          <a:prstGeom prst="rect">
-            <a:avLst/>
-          </a:prstGeom>
-          <a:noFill/>
-          <a:ln/>
-        </p:spPr>
-        <p:txBody>
-          <a:bodyPr wrap="square" lIns="0" tIns="0" rIns="0" bIns="0" rtlCol="0" anchor="ctr">
-            <a:normAutofit/>
-          </a:bodyPr>
+            <a:ext cx="640994" cy="312725"/>
+          </a:xfrm>
+          <a:prstGeom prst="rect">
+            <a:avLst/>
+          </a:prstGeom>
+          <a:noFill/>
+          <a:ln/>
+        </p:spPr>
+        <p:txBody>
+          <a:bodyPr wrap="square" lIns="0" tIns="0" rIns="0" bIns="0" rtlCol="0" anchor="ctr"/>
           <a:lstStyle/>
           <a:p>
             <a:pPr algn="l" indent="0" marL="0">
               <a:lnSpc>
-                <a:spcPct val="85000"/>
+                <a:spcPct val="100000"/>
               </a:lnSpc>
               <a:buNone/>
             </a:pPr>
             <a:r>
-              <a:rPr lang="en-US" sz="500" b="1" dirty="0">
+              <a:rPr lang="en-US" sz="490" b="1" dirty="0">
                 <a:solidFill>
                   <a:srgbClr val="202124"/>
                 </a:solidFill>
@@ -23323,17 +23301,17 @@
               </a:rPr>
               <a:t>Model Armor (shared)</a:t>
             </a:r>
-            <a:endParaRPr lang="en-US" sz="500" dirty="0"/>
+            <a:endParaRPr lang="en-US" sz="490" dirty="0"/>
           </a:p>
           <a:p>
             <a:pPr algn="l" indent="0" marL="0">
               <a:lnSpc>
-                <a:spcPct val="85000"/>
+                <a:spcPct val="100000"/>
               </a:lnSpc>
               <a:buNone/>
             </a:pPr>
             <a:r>
-              <a:rPr lang="en-US" sz="430" dirty="0">
+              <a:rPr lang="en-US" sz="420" dirty="0">
                 <a:solidFill>
                   <a:srgbClr val="3C4043"/>
                 </a:solidFill>
@@ -23343,13 +23321,13 @@
               </a:rPr>
               <a:t>Per-tenant templates: FINRA / PCI</a:t>
             </a:r>
-            <a:endParaRPr lang="en-US" sz="500" dirty="0"/>
-          </a:p>
-        </p:txBody>
-      </p:sp>
-      <p:sp>
-        <p:nvSpPr>
-          <p:cNvPr id="157" name="Shape 140"/>
+            <a:endParaRPr lang="en-US" sz="490" dirty="0"/>
+          </a:p>
+        </p:txBody>
+      </p:sp>
+      <p:sp>
+        <p:nvSpPr>
+          <p:cNvPr id="158" name="Shape 141"/>
           <p:cNvSpPr/>
           <p:nvPr/>
         </p:nvSpPr>
@@ -23376,7 +23354,7 @@
       </p:sp>
       <p:pic>
         <p:nvPicPr>
-          <p:cNvPr id="158" name="Image 15" descr="preencoded.png">    </p:cNvPr>
+          <p:cNvPr id="159" name="Image 15" descr="preencoded.png">    </p:cNvPr>
           <p:cNvPicPr>
             <a:picLocks noChangeAspect="1"/>
           </p:cNvPicPr>
@@ -23400,35 +23378,33 @@
       </p:pic>
       <p:sp>
         <p:nvSpPr>
-          <p:cNvPr id="159" name="Text 141"/>
+          <p:cNvPr id="160" name="Text 142"/>
           <p:cNvSpPr/>
           <p:nvPr/>
         </p:nvSpPr>
         <p:spPr>
           <a:xfrm>
             <a:off x="1793138" y="4691786"/>
-            <a:ext cx="645566" cy="312725"/>
-          </a:xfrm>
-          <a:prstGeom prst="rect">
-            <a:avLst/>
-          </a:prstGeom>
-          <a:noFill/>
-          <a:ln/>
-        </p:spPr>
-        <p:txBody>
-          <a:bodyPr wrap="square" lIns="0" tIns="0" rIns="0" bIns="0" rtlCol="0" anchor="ctr">
-            <a:normAutofit/>
-          </a:bodyPr>
+            <a:ext cx="640994" cy="312725"/>
+          </a:xfrm>
+          <a:prstGeom prst="rect">
+            <a:avLst/>
+          </a:prstGeom>
+          <a:noFill/>
+          <a:ln/>
+        </p:spPr>
+        <p:txBody>
+          <a:bodyPr wrap="square" lIns="0" tIns="0" rIns="0" bIns="0" rtlCol="0" anchor="ctr"/>
           <a:lstStyle/>
           <a:p>
             <a:pPr algn="l" indent="0" marL="0">
               <a:lnSpc>
-                <a:spcPct val="85000"/>
+                <a:spcPct val="100000"/>
               </a:lnSpc>
               <a:buNone/>
             </a:pPr>
             <a:r>
-              <a:rPr lang="en-US" sz="500" b="1" dirty="0">
+              <a:rPr lang="en-US" sz="490" b="1" dirty="0">
                 <a:solidFill>
                   <a:srgbClr val="202124"/>
                 </a:solidFill>
@@ -23438,17 +23414,17 @@
               </a:rPr>
               <a:t>Gemini 2.5 Pro</a:t>
             </a:r>
-            <a:endParaRPr lang="en-US" sz="500" dirty="0"/>
+            <a:endParaRPr lang="en-US" sz="490" dirty="0"/>
           </a:p>
           <a:p>
             <a:pPr algn="l" indent="0" marL="0">
               <a:lnSpc>
-                <a:spcPct val="85000"/>
+                <a:spcPct val="100000"/>
               </a:lnSpc>
               <a:buNone/>
             </a:pPr>
             <a:r>
-              <a:rPr lang="en-US" sz="430" dirty="0">
+              <a:rPr lang="en-US" sz="420" dirty="0">
                 <a:solidFill>
                   <a:srgbClr val="3C4043"/>
                 </a:solidFill>
@@ -23458,13 +23434,13 @@
               </a:rPr>
               <a:t>Shared 32k prefix • 4k / 8k caps</a:t>
             </a:r>
-            <a:endParaRPr lang="en-US" sz="500" dirty="0"/>
-          </a:p>
-        </p:txBody>
-      </p:sp>
-      <p:sp>
-        <p:nvSpPr>
-          <p:cNvPr id="160" name="Shape 142"/>
+            <a:endParaRPr lang="en-US" sz="490" dirty="0"/>
+          </a:p>
+        </p:txBody>
+      </p:sp>
+      <p:sp>
+        <p:nvSpPr>
+          <p:cNvPr id="161" name="Shape 143"/>
           <p:cNvSpPr/>
           <p:nvPr/>
         </p:nvSpPr>
@@ -23491,7 +23467,7 @@
       </p:sp>
       <p:pic>
         <p:nvPicPr>
-          <p:cNvPr id="161" name="Image 16" descr="preencoded.png">    </p:cNvPr>
+          <p:cNvPr id="162" name="Image 16" descr="preencoded.png">    </p:cNvPr>
           <p:cNvPicPr>
             <a:picLocks noChangeAspect="1"/>
           </p:cNvPicPr>
@@ -23515,35 +23491,33 @@
       </p:pic>
       <p:sp>
         <p:nvSpPr>
-          <p:cNvPr id="162" name="Text 143"/>
+          <p:cNvPr id="163" name="Text 144"/>
           <p:cNvSpPr/>
           <p:nvPr/>
         </p:nvSpPr>
         <p:spPr>
           <a:xfrm>
             <a:off x="3414370" y="2953512"/>
-            <a:ext cx="737921" cy="287122"/>
-          </a:xfrm>
-          <a:prstGeom prst="rect">
-            <a:avLst/>
-          </a:prstGeom>
-          <a:noFill/>
-          <a:ln/>
-        </p:spPr>
-        <p:txBody>
-          <a:bodyPr wrap="square" lIns="0" tIns="0" rIns="0" bIns="0" rtlCol="0" anchor="ctr">
-            <a:normAutofit/>
-          </a:bodyPr>
+            <a:ext cx="733349" cy="287122"/>
+          </a:xfrm>
+          <a:prstGeom prst="rect">
+            <a:avLst/>
+          </a:prstGeom>
+          <a:noFill/>
+          <a:ln/>
+        </p:spPr>
+        <p:txBody>
+          <a:bodyPr wrap="square" lIns="0" tIns="0" rIns="0" bIns="0" rtlCol="0" anchor="ctr"/>
           <a:lstStyle/>
           <a:p>
             <a:pPr algn="l" indent="0" marL="0">
               <a:lnSpc>
-                <a:spcPct val="85000"/>
+                <a:spcPct val="100000"/>
               </a:lnSpc>
               <a:buNone/>
             </a:pPr>
             <a:r>
-              <a:rPr lang="en-US" sz="500" b="1" dirty="0">
+              <a:rPr lang="en-US" sz="490" b="1" dirty="0">
                 <a:solidFill>
                   <a:srgbClr val="202124"/>
                 </a:solidFill>
@@ -23553,17 +23527,17 @@
               </a:rPr>
               <a:t>ADK Callback Gate</a:t>
             </a:r>
-            <a:endParaRPr lang="en-US" sz="500" dirty="0"/>
+            <a:endParaRPr lang="en-US" sz="490" dirty="0"/>
           </a:p>
           <a:p>
             <a:pPr algn="l" indent="0" marL="0">
               <a:lnSpc>
-                <a:spcPct val="85000"/>
+                <a:spcPct val="100000"/>
               </a:lnSpc>
               <a:buNone/>
             </a:pPr>
             <a:r>
-              <a:rPr lang="en-US" sz="430" dirty="0">
+              <a:rPr lang="en-US" sz="420" dirty="0">
                 <a:solidFill>
                   <a:srgbClr val="3C4043"/>
                 </a:solidFill>
@@ -23573,13 +23547,13 @@
               </a:rPr>
               <a:t>before_agent_callback Prune</a:t>
             </a:r>
-            <a:endParaRPr lang="en-US" sz="500" dirty="0"/>
-          </a:p>
-        </p:txBody>
-      </p:sp>
-      <p:sp>
-        <p:nvSpPr>
-          <p:cNvPr id="163" name="Shape 144"/>
+            <a:endParaRPr lang="en-US" sz="490" dirty="0"/>
+          </a:p>
+        </p:txBody>
+      </p:sp>
+      <p:sp>
+        <p:nvSpPr>
+          <p:cNvPr id="164" name="Shape 145"/>
           <p:cNvSpPr/>
           <p:nvPr/>
         </p:nvSpPr>
@@ -23606,7 +23580,7 @@
       </p:sp>
       <p:pic>
         <p:nvPicPr>
-          <p:cNvPr id="164" name="Image 17" descr="preencoded.png">    </p:cNvPr>
+          <p:cNvPr id="165" name="Image 17" descr="preencoded.png">    </p:cNvPr>
           <p:cNvPicPr>
             <a:picLocks noChangeAspect="1"/>
           </p:cNvPicPr>
@@ -23630,35 +23604,33 @@
       </p:pic>
       <p:sp>
         <p:nvSpPr>
-          <p:cNvPr id="165" name="Text 145"/>
+          <p:cNvPr id="166" name="Text 146"/>
           <p:cNvSpPr/>
           <p:nvPr/>
         </p:nvSpPr>
         <p:spPr>
           <a:xfrm>
             <a:off x="1727302" y="2162556"/>
-            <a:ext cx="651053" cy="287122"/>
-          </a:xfrm>
-          <a:prstGeom prst="rect">
-            <a:avLst/>
-          </a:prstGeom>
-          <a:noFill/>
-          <a:ln/>
-        </p:spPr>
-        <p:txBody>
-          <a:bodyPr wrap="square" lIns="0" tIns="0" rIns="0" bIns="0" rtlCol="0" anchor="ctr">
-            <a:normAutofit/>
-          </a:bodyPr>
+            <a:ext cx="646481" cy="287122"/>
+          </a:xfrm>
+          <a:prstGeom prst="rect">
+            <a:avLst/>
+          </a:prstGeom>
+          <a:noFill/>
+          <a:ln/>
+        </p:spPr>
+        <p:txBody>
+          <a:bodyPr wrap="square" lIns="0" tIns="0" rIns="0" bIns="0" rtlCol="0" anchor="ctr"/>
           <a:lstStyle/>
           <a:p>
             <a:pPr algn="l" indent="0" marL="0">
               <a:lnSpc>
-                <a:spcPct val="85000"/>
+                <a:spcPct val="100000"/>
               </a:lnSpc>
               <a:buNone/>
             </a:pPr>
             <a:r>
-              <a:rPr lang="en-US" sz="500" b="1" dirty="0">
+              <a:rPr lang="en-US" sz="490" b="1" dirty="0">
                 <a:solidFill>
                   <a:srgbClr val="202124"/>
                 </a:solidFill>
@@ -23668,17 +23640,17 @@
               </a:rPr>
               <a:t>Google Cloud Armor</a:t>
             </a:r>
-            <a:endParaRPr lang="en-US" sz="500" dirty="0"/>
+            <a:endParaRPr lang="en-US" sz="490" dirty="0"/>
           </a:p>
           <a:p>
             <a:pPr algn="l" indent="0" marL="0">
               <a:lnSpc>
-                <a:spcPct val="85000"/>
+                <a:spcPct val="100000"/>
               </a:lnSpc>
               <a:buNone/>
             </a:pPr>
             <a:r>
-              <a:rPr lang="en-US" sz="430" dirty="0">
+              <a:rPr lang="en-US" sz="420" dirty="0">
                 <a:solidFill>
                   <a:srgbClr val="3C4043"/>
                 </a:solidFill>
@@ -23688,13 +23660,13 @@
               </a:rPr>
               <a:t>WAF &amp; DDoS • Strips X-Tenant-ID</a:t>
             </a:r>
-            <a:endParaRPr lang="en-US" sz="500" dirty="0"/>
-          </a:p>
-        </p:txBody>
-      </p:sp>
-      <p:sp>
-        <p:nvSpPr>
-          <p:cNvPr id="166" name="Shape 146"/>
+            <a:endParaRPr lang="en-US" sz="490" dirty="0"/>
+          </a:p>
+        </p:txBody>
+      </p:sp>
+      <p:sp>
+        <p:nvSpPr>
+          <p:cNvPr id="167" name="Shape 147"/>
           <p:cNvSpPr/>
           <p:nvPr/>
         </p:nvSpPr>
@@ -23721,7 +23693,7 @@
       </p:sp>
       <p:pic>
         <p:nvPicPr>
-          <p:cNvPr id="167" name="Image 18" descr="preencoded.png">    </p:cNvPr>
+          <p:cNvPr id="168" name="Image 18" descr="preencoded.png">    </p:cNvPr>
           <p:cNvPicPr>
             <a:picLocks noChangeAspect="1"/>
           </p:cNvPicPr>
@@ -23745,35 +23717,33 @@
       </p:pic>
       <p:sp>
         <p:nvSpPr>
-          <p:cNvPr id="168" name="Text 147"/>
+          <p:cNvPr id="169" name="Text 148"/>
           <p:cNvSpPr/>
           <p:nvPr/>
         </p:nvSpPr>
         <p:spPr>
           <a:xfrm>
             <a:off x="1727302" y="2527402"/>
-            <a:ext cx="651053" cy="287122"/>
-          </a:xfrm>
-          <a:prstGeom prst="rect">
-            <a:avLst/>
-          </a:prstGeom>
-          <a:noFill/>
-          <a:ln/>
-        </p:spPr>
-        <p:txBody>
-          <a:bodyPr wrap="square" lIns="0" tIns="0" rIns="0" bIns="0" rtlCol="0" anchor="ctr">
-            <a:normAutofit/>
-          </a:bodyPr>
+            <a:ext cx="646481" cy="287122"/>
+          </a:xfrm>
+          <a:prstGeom prst="rect">
+            <a:avLst/>
+          </a:prstGeom>
+          <a:noFill/>
+          <a:ln/>
+        </p:spPr>
+        <p:txBody>
+          <a:bodyPr wrap="square" lIns="0" tIns="0" rIns="0" bIns="0" rtlCol="0" anchor="ctr"/>
           <a:lstStyle/>
           <a:p>
             <a:pPr algn="l" indent="0" marL="0">
               <a:lnSpc>
-                <a:spcPct val="85000"/>
+                <a:spcPct val="100000"/>
               </a:lnSpc>
               <a:buNone/>
             </a:pPr>
             <a:r>
-              <a:rPr lang="en-US" sz="500" b="1" dirty="0">
+              <a:rPr lang="en-US" sz="490" b="1" dirty="0">
                 <a:solidFill>
                   <a:srgbClr val="202124"/>
                 </a:solidFill>
@@ -23783,17 +23753,17 @@
               </a:rPr>
               <a:t>Discovery Engine PDP</a:t>
             </a:r>
-            <a:endParaRPr lang="en-US" sz="500" dirty="0"/>
+            <a:endParaRPr lang="en-US" sz="490" dirty="0"/>
           </a:p>
           <a:p>
             <a:pPr algn="l" indent="0" marL="0">
               <a:lnSpc>
-                <a:spcPct val="85000"/>
+                <a:spcPct val="100000"/>
               </a:lnSpc>
               <a:buNone/>
             </a:pPr>
             <a:r>
-              <a:rPr lang="en-US" sz="430" dirty="0">
+              <a:rPr lang="en-US" sz="420" dirty="0">
                 <a:solidFill>
                   <a:srgbClr val="3C4043"/>
                 </a:solidFill>
@@ -23803,13 +23773,13 @@
               </a:rPr>
               <a:t>Catalog Filter (403 Alpha)</a:t>
             </a:r>
-            <a:endParaRPr lang="en-US" sz="500" dirty="0"/>
-          </a:p>
-        </p:txBody>
-      </p:sp>
-      <p:sp>
-        <p:nvSpPr>
-          <p:cNvPr id="169" name="Shape 148"/>
+            <a:endParaRPr lang="en-US" sz="490" dirty="0"/>
+          </a:p>
+        </p:txBody>
+      </p:sp>
+      <p:sp>
+        <p:nvSpPr>
+          <p:cNvPr id="170" name="Shape 149"/>
           <p:cNvSpPr/>
           <p:nvPr/>
         </p:nvSpPr>
@@ -23836,7 +23806,7 @@
       </p:sp>
       <p:pic>
         <p:nvPicPr>
-          <p:cNvPr id="170" name="Image 19" descr="preencoded.png">    </p:cNvPr>
+          <p:cNvPr id="171" name="Image 19" descr="preencoded.png">    </p:cNvPr>
           <p:cNvPicPr>
             <a:picLocks noChangeAspect="1"/>
           </p:cNvPicPr>
@@ -23860,35 +23830,33 @@
       </p:pic>
       <p:sp>
         <p:nvSpPr>
-          <p:cNvPr id="171" name="Text 149"/>
+          <p:cNvPr id="172" name="Text 150"/>
           <p:cNvSpPr/>
           <p:nvPr/>
         </p:nvSpPr>
         <p:spPr>
           <a:xfrm>
             <a:off x="1762049" y="2953512"/>
-            <a:ext cx="616306" cy="287122"/>
-          </a:xfrm>
-          <a:prstGeom prst="rect">
-            <a:avLst/>
-          </a:prstGeom>
-          <a:noFill/>
-          <a:ln/>
-        </p:spPr>
-        <p:txBody>
-          <a:bodyPr wrap="square" lIns="0" tIns="0" rIns="0" bIns="0" rtlCol="0" anchor="ctr">
-            <a:normAutofit/>
-          </a:bodyPr>
+            <a:ext cx="611734" cy="287122"/>
+          </a:xfrm>
+          <a:prstGeom prst="rect">
+            <a:avLst/>
+          </a:prstGeom>
+          <a:noFill/>
+          <a:ln/>
+        </p:spPr>
+        <p:txBody>
+          <a:bodyPr wrap="square" lIns="0" tIns="0" rIns="0" bIns="0" rtlCol="0" anchor="ctr"/>
           <a:lstStyle/>
           <a:p>
             <a:pPr algn="l" indent="0" marL="0">
               <a:lnSpc>
-                <a:spcPct val="85000"/>
+                <a:spcPct val="100000"/>
               </a:lnSpc>
               <a:buNone/>
             </a:pPr>
             <a:r>
-              <a:rPr lang="en-US" sz="500" b="1" dirty="0">
+              <a:rPr lang="en-US" sz="490" b="1" dirty="0">
                 <a:solidFill>
                   <a:srgbClr val="202124"/>
                 </a:solidFill>
@@ -23898,17 +23866,17 @@
               </a:rPr>
               <a:t>IAP + OBO Broker</a:t>
             </a:r>
-            <a:endParaRPr lang="en-US" sz="500" dirty="0"/>
+            <a:endParaRPr lang="en-US" sz="490" dirty="0"/>
           </a:p>
           <a:p>
             <a:pPr algn="l" indent="0" marL="0">
               <a:lnSpc>
-                <a:spcPct val="85000"/>
+                <a:spcPct val="100000"/>
               </a:lnSpc>
               <a:buNone/>
             </a:pPr>
             <a:r>
-              <a:rPr lang="en-US" sz="430" dirty="0">
+              <a:rPr lang="en-US" sz="389" dirty="0">
                 <a:solidFill>
                   <a:srgbClr val="3C4043"/>
                 </a:solidFill>
@@ -23918,13 +23886,13 @@
               </a:rPr>
               <a:t>OBO + DPoP + adk-agent-signing-key</a:t>
             </a:r>
-            <a:endParaRPr lang="en-US" sz="500" dirty="0"/>
-          </a:p>
-        </p:txBody>
-      </p:sp>
-      <p:sp>
-        <p:nvSpPr>
-          <p:cNvPr id="172" name="Shape 150"/>
+            <a:endParaRPr lang="en-US" sz="490" dirty="0"/>
+          </a:p>
+        </p:txBody>
+      </p:sp>
+      <p:sp>
+        <p:nvSpPr>
+          <p:cNvPr id="173" name="Shape 151"/>
           <p:cNvSpPr/>
           <p:nvPr/>
         </p:nvSpPr>
@@ -23951,35 +23919,33 @@
       </p:sp>
       <p:sp>
         <p:nvSpPr>
-          <p:cNvPr id="173" name="Text 151"/>
-          <p:cNvSpPr/>
-          <p:nvPr/>
-        </p:nvSpPr>
-        <p:spPr>
-          <a:xfrm>
-            <a:off x="3922776" y="4726534"/>
-            <a:ext cx="1929384" cy="121615"/>
-          </a:xfrm>
-          <a:prstGeom prst="rect">
-            <a:avLst/>
-          </a:prstGeom>
-          <a:noFill/>
-          <a:ln/>
-        </p:spPr>
-        <p:txBody>
-          <a:bodyPr wrap="square" lIns="0" tIns="0" rIns="0" bIns="0" rtlCol="0" anchor="ctr">
-            <a:normAutofit/>
-          </a:bodyPr>
+          <p:cNvPr id="174" name="Text 152"/>
+          <p:cNvSpPr/>
+          <p:nvPr/>
+        </p:nvSpPr>
+        <p:spPr>
+          <a:xfrm>
+            <a:off x="3936492" y="4726534"/>
+            <a:ext cx="1901952" cy="121615"/>
+          </a:xfrm>
+          <a:prstGeom prst="rect">
+            <a:avLst/>
+          </a:prstGeom>
+          <a:noFill/>
+          <a:ln/>
+        </p:spPr>
+        <p:txBody>
+          <a:bodyPr wrap="none" lIns="0" tIns="0" rIns="0" bIns="0" rtlCol="0" anchor="ctr"/>
           <a:lstStyle/>
           <a:p>
             <a:pPr algn="ctr" indent="0" marL="0">
               <a:lnSpc>
-                <a:spcPct val="88000"/>
+                <a:spcPct val="100000"/>
               </a:lnSpc>
               <a:buNone/>
             </a:pPr>
             <a:r>
-              <a:rPr lang="en-US" sz="420" b="1" dirty="0">
+              <a:rPr lang="en-US" sz="349" dirty="0">
                 <a:solidFill>
                   <a:srgbClr val="174EA6"/>
                 </a:solidFill>
@@ -23989,13 +23955,13 @@
               </a:rPr>
               <a:t>POLICY tenant_isolation USING (tenant_id = current_setting('app.current_tenant'))</a:t>
             </a:r>
-            <a:endParaRPr lang="en-US" sz="420" dirty="0"/>
-          </a:p>
-        </p:txBody>
-      </p:sp>
-      <p:sp>
-        <p:nvSpPr>
-          <p:cNvPr id="174" name="Shape 152"/>
+            <a:endParaRPr lang="en-US" sz="349" dirty="0"/>
+          </a:p>
+        </p:txBody>
+      </p:sp>
+      <p:sp>
+        <p:nvSpPr>
+          <p:cNvPr id="175" name="Shape 153"/>
           <p:cNvSpPr/>
           <p:nvPr/>
         </p:nvSpPr>
@@ -24022,35 +23988,33 @@
       </p:sp>
       <p:sp>
         <p:nvSpPr>
-          <p:cNvPr id="175" name="Text 153"/>
-          <p:cNvSpPr/>
-          <p:nvPr/>
-        </p:nvSpPr>
-        <p:spPr>
-          <a:xfrm>
-            <a:off x="3922776" y="4535424"/>
-            <a:ext cx="929945" cy="138989"/>
-          </a:xfrm>
-          <a:prstGeom prst="rect">
-            <a:avLst/>
-          </a:prstGeom>
-          <a:noFill/>
-          <a:ln/>
-        </p:spPr>
-        <p:txBody>
-          <a:bodyPr wrap="square" lIns="0" tIns="0" rIns="0" bIns="0" rtlCol="0" anchor="ctr">
-            <a:normAutofit/>
-          </a:bodyPr>
+          <p:cNvPr id="176" name="Text 154"/>
+          <p:cNvSpPr/>
+          <p:nvPr/>
+        </p:nvSpPr>
+        <p:spPr>
+          <a:xfrm>
+            <a:off x="3936492" y="4535424"/>
+            <a:ext cx="902513" cy="138989"/>
+          </a:xfrm>
+          <a:prstGeom prst="rect">
+            <a:avLst/>
+          </a:prstGeom>
+          <a:noFill/>
+          <a:ln/>
+        </p:spPr>
+        <p:txBody>
+          <a:bodyPr wrap="none" lIns="0" tIns="0" rIns="0" bIns="0" rtlCol="0" anchor="ctr"/>
           <a:lstStyle/>
           <a:p>
             <a:pPr algn="ctr" indent="0" marL="0">
               <a:lnSpc>
-                <a:spcPct val="88000"/>
+                <a:spcPct val="100000"/>
               </a:lnSpc>
               <a:buNone/>
             </a:pPr>
             <a:r>
-              <a:rPr lang="en-US" sz="420" b="1" dirty="0">
+              <a:rPr lang="en-US" sz="400" b="1" dirty="0">
                 <a:solidFill>
                   <a:srgbClr val="174EA6"/>
                 </a:solidFill>
@@ -24060,13 +24024,13 @@
               </a:rPr>
               <a:t>tenant_id = 'finvault' • 2 rows</a:t>
             </a:r>
-            <a:endParaRPr lang="en-US" sz="420" dirty="0"/>
-          </a:p>
-        </p:txBody>
-      </p:sp>
-      <p:sp>
-        <p:nvSpPr>
-          <p:cNvPr id="176" name="Shape 154"/>
+            <a:endParaRPr lang="en-US" sz="400" dirty="0"/>
+          </a:p>
+        </p:txBody>
+      </p:sp>
+      <p:sp>
+        <p:nvSpPr>
+          <p:cNvPr id="177" name="Shape 155"/>
           <p:cNvSpPr/>
           <p:nvPr/>
         </p:nvSpPr>
@@ -24093,35 +24057,33 @@
       </p:sp>
       <p:sp>
         <p:nvSpPr>
-          <p:cNvPr id="177" name="Text 155"/>
-          <p:cNvSpPr/>
-          <p:nvPr/>
-        </p:nvSpPr>
-        <p:spPr>
-          <a:xfrm>
-            <a:off x="4922215" y="4535424"/>
-            <a:ext cx="929945" cy="138989"/>
-          </a:xfrm>
-          <a:prstGeom prst="rect">
-            <a:avLst/>
-          </a:prstGeom>
-          <a:noFill/>
-          <a:ln/>
-        </p:spPr>
-        <p:txBody>
-          <a:bodyPr wrap="square" lIns="0" tIns="0" rIns="0" bIns="0" rtlCol="0" anchor="ctr">
-            <a:normAutofit/>
-          </a:bodyPr>
+          <p:cNvPr id="178" name="Text 156"/>
+          <p:cNvSpPr/>
+          <p:nvPr/>
+        </p:nvSpPr>
+        <p:spPr>
+          <a:xfrm>
+            <a:off x="4935931" y="4535424"/>
+            <a:ext cx="902513" cy="138989"/>
+          </a:xfrm>
+          <a:prstGeom prst="rect">
+            <a:avLst/>
+          </a:prstGeom>
+          <a:noFill/>
+          <a:ln/>
+        </p:spPr>
+        <p:txBody>
+          <a:bodyPr wrap="none" lIns="0" tIns="0" rIns="0" bIns="0" rtlCol="0" anchor="ctr"/>
           <a:lstStyle/>
           <a:p>
             <a:pPr algn="ctr" indent="0" marL="0">
               <a:lnSpc>
-                <a:spcPct val="88000"/>
+                <a:spcPct val="100000"/>
               </a:lnSpc>
               <a:buNone/>
             </a:pPr>
             <a:r>
-              <a:rPr lang="en-US" sz="420" b="1" dirty="0">
+              <a:rPr lang="en-US" sz="383" b="1" dirty="0">
                 <a:solidFill>
                   <a:srgbClr val="C5221F"/>
                 </a:solidFill>
@@ -24131,13 +24093,13 @@
               </a:rPr>
               <a:t>tenant_id = 'retailstream' • 2 rows</a:t>
             </a:r>
-            <a:endParaRPr lang="en-US" sz="420" dirty="0"/>
-          </a:p>
-        </p:txBody>
-      </p:sp>
-      <p:sp>
-        <p:nvSpPr>
-          <p:cNvPr id="178" name="Shape 156"/>
+            <a:endParaRPr lang="en-US" sz="383" dirty="0"/>
+          </a:p>
+        </p:txBody>
+      </p:sp>
+      <p:sp>
+        <p:nvSpPr>
+          <p:cNvPr id="179" name="Shape 157"/>
           <p:cNvSpPr/>
           <p:nvPr/>
         </p:nvSpPr>
@@ -24164,35 +24126,33 @@
       </p:sp>
       <p:sp>
         <p:nvSpPr>
-          <p:cNvPr id="179" name="Text 157"/>
-          <p:cNvSpPr/>
-          <p:nvPr/>
-        </p:nvSpPr>
-        <p:spPr>
-          <a:xfrm>
-            <a:off x="1627632" y="5517490"/>
-            <a:ext cx="634594" cy="130759"/>
-          </a:xfrm>
-          <a:prstGeom prst="rect">
-            <a:avLst/>
-          </a:prstGeom>
-          <a:noFill/>
-          <a:ln/>
-        </p:spPr>
-        <p:txBody>
-          <a:bodyPr wrap="square" lIns="0" tIns="0" rIns="0" bIns="0" rtlCol="0" anchor="ctr">
-            <a:normAutofit/>
-          </a:bodyPr>
+          <p:cNvPr id="180" name="Text 158"/>
+          <p:cNvSpPr/>
+          <p:nvPr/>
+        </p:nvSpPr>
+        <p:spPr>
+          <a:xfrm>
+            <a:off x="1641348" y="5517490"/>
+            <a:ext cx="607162" cy="130759"/>
+          </a:xfrm>
+          <a:prstGeom prst="rect">
+            <a:avLst/>
+          </a:prstGeom>
+          <a:noFill/>
+          <a:ln/>
+        </p:spPr>
+        <p:txBody>
+          <a:bodyPr wrap="none" lIns="0" tIns="0" rIns="0" bIns="0" rtlCol="0" anchor="ctr"/>
           <a:lstStyle/>
           <a:p>
             <a:pPr algn="ctr" indent="0" marL="0">
               <a:lnSpc>
-                <a:spcPct val="88000"/>
+                <a:spcPct val="100000"/>
               </a:lnSpc>
               <a:buNone/>
             </a:pPr>
             <a:r>
-              <a:rPr lang="en-US" sz="420" b="1" dirty="0">
+              <a:rPr lang="en-US" sz="361" b="1" dirty="0">
                 <a:solidFill>
                   <a:srgbClr val="174EA6"/>
                 </a:solidFill>
@@ -24202,13 +24162,13 @@
               </a:rPr>
               <a:t>finvault:{user}:{session}</a:t>
             </a:r>
-            <a:endParaRPr lang="en-US" sz="420" dirty="0"/>
-          </a:p>
-        </p:txBody>
-      </p:sp>
-      <p:sp>
-        <p:nvSpPr>
-          <p:cNvPr id="180" name="Shape 158"/>
+            <a:endParaRPr lang="en-US" sz="361" dirty="0"/>
+          </a:p>
+        </p:txBody>
+      </p:sp>
+      <p:sp>
+        <p:nvSpPr>
+          <p:cNvPr id="181" name="Shape 159"/>
           <p:cNvSpPr/>
           <p:nvPr/>
         </p:nvSpPr>
@@ -24235,35 +24195,33 @@
       </p:sp>
       <p:sp>
         <p:nvSpPr>
-          <p:cNvPr id="181" name="Text 159"/>
-          <p:cNvSpPr/>
-          <p:nvPr/>
-        </p:nvSpPr>
-        <p:spPr>
-          <a:xfrm>
-            <a:off x="2301545" y="5517490"/>
-            <a:ext cx="634594" cy="130759"/>
-          </a:xfrm>
-          <a:prstGeom prst="rect">
-            <a:avLst/>
-          </a:prstGeom>
-          <a:noFill/>
-          <a:ln/>
-        </p:spPr>
-        <p:txBody>
-          <a:bodyPr wrap="square" lIns="0" tIns="0" rIns="0" bIns="0" rtlCol="0" anchor="ctr">
-            <a:normAutofit/>
-          </a:bodyPr>
+          <p:cNvPr id="182" name="Text 160"/>
+          <p:cNvSpPr/>
+          <p:nvPr/>
+        </p:nvSpPr>
+        <p:spPr>
+          <a:xfrm>
+            <a:off x="2315261" y="5517490"/>
+            <a:ext cx="607162" cy="130759"/>
+          </a:xfrm>
+          <a:prstGeom prst="rect">
+            <a:avLst/>
+          </a:prstGeom>
+          <a:noFill/>
+          <a:ln/>
+        </p:spPr>
+        <p:txBody>
+          <a:bodyPr wrap="none" lIns="0" tIns="0" rIns="0" bIns="0" rtlCol="0" anchor="ctr"/>
           <a:lstStyle/>
           <a:p>
             <a:pPr algn="ctr" indent="0" marL="0">
               <a:lnSpc>
-                <a:spcPct val="88000"/>
+                <a:spcPct val="100000"/>
               </a:lnSpc>
               <a:buNone/>
             </a:pPr>
             <a:r>
-              <a:rPr lang="en-US" sz="420" b="1" dirty="0">
+              <a:rPr lang="en-US" sz="311" dirty="0">
                 <a:solidFill>
                   <a:srgbClr val="C5221F"/>
                 </a:solidFill>
@@ -24273,13 +24231,13 @@
               </a:rPr>
               <a:t>retailstream:{user}:{session}</a:t>
             </a:r>
-            <a:endParaRPr lang="en-US" sz="420" dirty="0"/>
-          </a:p>
-        </p:txBody>
-      </p:sp>
-      <p:sp>
-        <p:nvSpPr>
-          <p:cNvPr id="182" name="Shape 160"/>
+            <a:endParaRPr lang="en-US" sz="311" dirty="0"/>
+          </a:p>
+        </p:txBody>
+      </p:sp>
+      <p:sp>
+        <p:nvSpPr>
+          <p:cNvPr id="183" name="Shape 161"/>
           <p:cNvSpPr/>
           <p:nvPr/>
         </p:nvSpPr>
@@ -24306,35 +24264,33 @@
       </p:sp>
       <p:sp>
         <p:nvSpPr>
-          <p:cNvPr id="183" name="Text 161"/>
-          <p:cNvSpPr/>
-          <p:nvPr/>
-        </p:nvSpPr>
-        <p:spPr>
-          <a:xfrm>
-            <a:off x="2974543" y="5517490"/>
-            <a:ext cx="634594" cy="130759"/>
-          </a:xfrm>
-          <a:prstGeom prst="rect">
-            <a:avLst/>
-          </a:prstGeom>
-          <a:noFill/>
-          <a:ln/>
-        </p:spPr>
-        <p:txBody>
-          <a:bodyPr wrap="square" lIns="0" tIns="0" rIns="0" bIns="0" rtlCol="0" anchor="ctr">
-            <a:normAutofit/>
-          </a:bodyPr>
+          <p:cNvPr id="184" name="Text 162"/>
+          <p:cNvSpPr/>
+          <p:nvPr/>
+        </p:nvSpPr>
+        <p:spPr>
+          <a:xfrm>
+            <a:off x="2988259" y="5517490"/>
+            <a:ext cx="607162" cy="130759"/>
+          </a:xfrm>
+          <a:prstGeom prst="rect">
+            <a:avLst/>
+          </a:prstGeom>
+          <a:noFill/>
+          <a:ln/>
+        </p:spPr>
+        <p:txBody>
+          <a:bodyPr wrap="none" lIns="0" tIns="0" rIns="0" bIns="0" rtlCol="0" anchor="ctr"/>
           <a:lstStyle/>
           <a:p>
             <a:pPr algn="ctr" indent="0" marL="0">
               <a:lnSpc>
-                <a:spcPct val="88000"/>
+                <a:spcPct val="100000"/>
               </a:lnSpc>
               <a:buNone/>
             </a:pPr>
             <a:r>
-              <a:rPr lang="en-US" sz="420" b="1" dirty="0">
+              <a:rPr lang="en-US" sz="322" dirty="0">
                 <a:solidFill>
                   <a:srgbClr val="137333"/>
                 </a:solidFill>
@@ -24344,13 +24300,13 @@
               </a:rPr>
               <a:t>L1 shared prefix (read-only)</a:t>
             </a:r>
-            <a:endParaRPr lang="en-US" sz="420" dirty="0"/>
-          </a:p>
-        </p:txBody>
-      </p:sp>
-      <p:sp>
-        <p:nvSpPr>
-          <p:cNvPr id="184" name="Shape 162"/>
+            <a:endParaRPr lang="en-US" sz="322" dirty="0"/>
+          </a:p>
+        </p:txBody>
+      </p:sp>
+      <p:sp>
+        <p:nvSpPr>
+          <p:cNvPr id="185" name="Shape 163"/>
           <p:cNvSpPr/>
           <p:nvPr/>
         </p:nvSpPr>
@@ -24375,7 +24331,7 @@
       </p:sp>
       <p:sp>
         <p:nvSpPr>
-          <p:cNvPr id="185" name="Text 163"/>
+          <p:cNvPr id="186" name="Text 164"/>
           <p:cNvSpPr/>
           <p:nvPr/>
         </p:nvSpPr>
@@ -24414,7 +24370,7 @@
       </p:sp>
       <p:sp>
         <p:nvSpPr>
-          <p:cNvPr id="186" name="Shape 164"/>
+          <p:cNvPr id="187" name="Shape 165"/>
           <p:cNvSpPr/>
           <p:nvPr/>
         </p:nvSpPr>
@@ -24439,7 +24395,7 @@
       </p:sp>
       <p:sp>
         <p:nvSpPr>
-          <p:cNvPr id="187" name="Text 165"/>
+          <p:cNvPr id="188" name="Text 166"/>
           <p:cNvSpPr/>
           <p:nvPr/>
         </p:nvSpPr>
@@ -24478,7 +24434,7 @@
       </p:sp>
       <p:sp>
         <p:nvSpPr>
-          <p:cNvPr id="188" name="Shape 166"/>
+          <p:cNvPr id="189" name="Shape 167"/>
           <p:cNvSpPr/>
           <p:nvPr/>
         </p:nvSpPr>
@@ -24503,7 +24459,7 @@
       </p:sp>
       <p:sp>
         <p:nvSpPr>
-          <p:cNvPr id="189" name="Text 167"/>
+          <p:cNvPr id="190" name="Text 168"/>
           <p:cNvSpPr/>
           <p:nvPr/>
         </p:nvSpPr>
@@ -24542,7 +24498,7 @@
       </p:sp>
       <p:sp>
         <p:nvSpPr>
-          <p:cNvPr id="190" name="Shape 168"/>
+          <p:cNvPr id="191" name="Shape 169"/>
           <p:cNvSpPr/>
           <p:nvPr/>
         </p:nvSpPr>
@@ -24567,7 +24523,7 @@
       </p:sp>
       <p:sp>
         <p:nvSpPr>
-          <p:cNvPr id="191" name="Text 169"/>
+          <p:cNvPr id="192" name="Text 170"/>
           <p:cNvSpPr/>
           <p:nvPr/>
         </p:nvSpPr>
@@ -24606,7 +24562,7 @@
       </p:sp>
       <p:sp>
         <p:nvSpPr>
-          <p:cNvPr id="192" name="Shape 170"/>
+          <p:cNvPr id="193" name="Shape 171"/>
           <p:cNvSpPr/>
           <p:nvPr/>
         </p:nvSpPr>
@@ -24631,7 +24587,7 @@
       </p:sp>
       <p:sp>
         <p:nvSpPr>
-          <p:cNvPr id="193" name="Text 171"/>
+          <p:cNvPr id="194" name="Text 172"/>
           <p:cNvSpPr/>
           <p:nvPr/>
         </p:nvSpPr>
@@ -24670,7 +24626,7 @@
       </p:sp>
       <p:sp>
         <p:nvSpPr>
-          <p:cNvPr id="194" name="Shape 172"/>
+          <p:cNvPr id="195" name="Shape 173"/>
           <p:cNvSpPr/>
           <p:nvPr/>
         </p:nvSpPr>
@@ -24695,7 +24651,7 @@
       </p:sp>
       <p:sp>
         <p:nvSpPr>
-          <p:cNvPr id="195" name="Text 173"/>
+          <p:cNvPr id="196" name="Text 174"/>
           <p:cNvSpPr/>
           <p:nvPr/>
         </p:nvSpPr>
@@ -24734,7 +24690,7 @@
       </p:sp>
       <p:sp>
         <p:nvSpPr>
-          <p:cNvPr id="196" name="Shape 174"/>
+          <p:cNvPr id="197" name="Shape 175"/>
           <p:cNvSpPr/>
           <p:nvPr/>
         </p:nvSpPr>
@@ -24759,7 +24715,7 @@
       </p:sp>
       <p:sp>
         <p:nvSpPr>
-          <p:cNvPr id="197" name="Text 175"/>
+          <p:cNvPr id="198" name="Text 176"/>
           <p:cNvSpPr/>
           <p:nvPr/>
         </p:nvSpPr>
@@ -24798,7 +24754,7 @@
       </p:sp>
       <p:sp>
         <p:nvSpPr>
-          <p:cNvPr id="198" name="Shape 176"/>
+          <p:cNvPr id="199" name="Shape 177"/>
           <p:cNvSpPr/>
           <p:nvPr/>
         </p:nvSpPr>
@@ -24823,7 +24779,7 @@
       </p:sp>
       <p:sp>
         <p:nvSpPr>
-          <p:cNvPr id="199" name="Text 177"/>
+          <p:cNvPr id="200" name="Text 178"/>
           <p:cNvSpPr/>
           <p:nvPr/>
         </p:nvSpPr>
@@ -24862,7 +24818,7 @@
       </p:sp>
       <p:sp>
         <p:nvSpPr>
-          <p:cNvPr id="200" name="Shape 178"/>
+          <p:cNvPr id="201" name="Shape 179"/>
           <p:cNvSpPr/>
           <p:nvPr/>
         </p:nvSpPr>
@@ -24887,7 +24843,7 @@
       </p:sp>
       <p:sp>
         <p:nvSpPr>
-          <p:cNvPr id="201" name="Text 179"/>
+          <p:cNvPr id="202" name="Text 180"/>
           <p:cNvSpPr/>
           <p:nvPr/>
         </p:nvSpPr>
@@ -24926,7 +24882,7 @@
       </p:sp>
       <p:sp>
         <p:nvSpPr>
-          <p:cNvPr id="202" name="Text 180"/>
+          <p:cNvPr id="203" name="Text 181"/>
           <p:cNvSpPr/>
           <p:nvPr/>
         </p:nvSpPr>
@@ -24942,19 +24898,17 @@
           <a:ln/>
         </p:spPr>
         <p:txBody>
-          <a:bodyPr wrap="square" lIns="0" tIns="0" rIns="0" bIns="0" rtlCol="0" anchor="ctr">
-            <a:normAutofit/>
-          </a:bodyPr>
+          <a:bodyPr wrap="square" lIns="0" tIns="0" rIns="0" bIns="0" rtlCol="0" anchor="ctr"/>
           <a:lstStyle/>
           <a:p>
             <a:pPr algn="l" indent="0" marL="0">
               <a:lnSpc>
-                <a:spcPct val="88000"/>
+                <a:spcPct val="104000"/>
               </a:lnSpc>
               <a:buNone/>
             </a:pPr>
             <a:r>
-              <a:rPr lang="en-US" sz="410" dirty="0">
+              <a:rPr lang="en-US" sz="400" dirty="0">
                 <a:solidFill>
                   <a:srgbClr val="202124"/>
                 </a:solidFill>
@@ -24964,17 +24918,17 @@
               </a:rPr>
               <a:t>Cross-namespace read → PermissionError (Hop 3 ACL) • 0 cross-tenant cached tokens</a:t>
             </a:r>
-            <a:endParaRPr lang="en-US" sz="410" dirty="0"/>
+            <a:endParaRPr lang="en-US" sz="400" dirty="0"/>
           </a:p>
           <a:p>
             <a:pPr algn="l" indent="0" marL="0">
               <a:lnSpc>
-                <a:spcPct val="88000"/>
+                <a:spcPct val="104000"/>
               </a:lnSpc>
               <a:buNone/>
             </a:pPr>
             <a:r>
-              <a:rPr lang="en-US" sz="400" dirty="0">
+              <a:rPr lang="en-US" sz="390" dirty="0">
                 <a:solidFill>
                   <a:srgbClr val="202124"/>
                 </a:solidFill>
@@ -24984,13 +24938,13 @@
               </a:rPr>
               <a:t>Private Agent Alpha visible to FinVault only (RetailStream → HTTP 403 at Hop 2)</a:t>
             </a:r>
-            <a:endParaRPr lang="en-US" sz="410" dirty="0"/>
-          </a:p>
-        </p:txBody>
-      </p:sp>
-      <p:sp>
-        <p:nvSpPr>
-          <p:cNvPr id="203" name="Text 181"/>
+            <a:endParaRPr lang="en-US" sz="400" dirty="0"/>
+          </a:p>
+        </p:txBody>
+      </p:sp>
+      <p:sp>
+        <p:nvSpPr>
+          <p:cNvPr id="204" name="Text 182"/>
           <p:cNvSpPr/>
           <p:nvPr/>
         </p:nvSpPr>
@@ -25006,19 +24960,17 @@
           <a:ln/>
         </p:spPr>
         <p:txBody>
-          <a:bodyPr wrap="square" lIns="0" tIns="0" rIns="0" bIns="0" rtlCol="0" anchor="ctr">
-            <a:normAutofit/>
-          </a:bodyPr>
+          <a:bodyPr wrap="square" lIns="0" tIns="0" rIns="0" bIns="0" rtlCol="0" anchor="ctr"/>
           <a:lstStyle/>
           <a:p>
             <a:pPr algn="l" indent="0" marL="0">
               <a:lnSpc>
-                <a:spcPct val="88000"/>
+                <a:spcPct val="104000"/>
               </a:lnSpc>
               <a:buNone/>
             </a:pPr>
             <a:r>
-              <a:rPr lang="en-US" sz="410" dirty="0">
+              <a:rPr lang="en-US" sz="400" dirty="0">
                 <a:solidFill>
                   <a:srgbClr val="202124"/>
                 </a:solidFill>
@@ -25028,24 +24980,24 @@
               </a:rPr>
               <a:t>⑥ SET LOCAL app.current_tenant → each tenant reads only its 2 rows • 0 cross-tenant rows</a:t>
             </a:r>
-            <a:endParaRPr lang="en-US" sz="410" dirty="0"/>
-          </a:p>
-        </p:txBody>
-      </p:sp>
-      <p:sp>
-        <p:nvSpPr>
-          <p:cNvPr id="204" name="Shape 182"/>
-          <p:cNvSpPr/>
-          <p:nvPr/>
-        </p:nvSpPr>
-        <p:spPr>
-          <a:xfrm>
-            <a:off x="3696005" y="3565246"/>
-            <a:ext cx="1390802" cy="132588"/>
+            <a:endParaRPr lang="en-US" sz="400" dirty="0"/>
+          </a:p>
+        </p:txBody>
+      </p:sp>
+      <p:sp>
+        <p:nvSpPr>
+          <p:cNvPr id="205" name="Shape 183"/>
+          <p:cNvSpPr/>
+          <p:nvPr/>
+        </p:nvSpPr>
+        <p:spPr>
+          <a:xfrm>
+            <a:off x="3770071" y="3561588"/>
+            <a:ext cx="1243584" cy="138989"/>
           </a:xfrm>
           <a:prstGeom prst="roundRect">
             <a:avLst>
-              <a:gd name="adj" fmla="val 34483"/>
+              <a:gd name="adj" fmla="val 32895"/>
             </a:avLst>
           </a:prstGeom>
           <a:solidFill>
@@ -25061,35 +25013,33 @@
       </p:sp>
       <p:sp>
         <p:nvSpPr>
-          <p:cNvPr id="205" name="Text 183"/>
-          <p:cNvSpPr/>
-          <p:nvPr/>
-        </p:nvSpPr>
-        <p:spPr>
-          <a:xfrm>
-            <a:off x="3714293" y="3574390"/>
-            <a:ext cx="1354226" cy="114300"/>
-          </a:xfrm>
-          <a:prstGeom prst="rect">
-            <a:avLst/>
-          </a:prstGeom>
-          <a:noFill/>
-          <a:ln/>
-        </p:spPr>
-        <p:txBody>
-          <a:bodyPr wrap="square" lIns="0" tIns="0" rIns="0" bIns="0" rtlCol="0" anchor="ctr">
-            <a:normAutofit/>
-          </a:bodyPr>
+          <p:cNvPr id="206" name="Text 184"/>
+          <p:cNvSpPr/>
+          <p:nvPr/>
+        </p:nvSpPr>
+        <p:spPr>
+          <a:xfrm>
+            <a:off x="3790188" y="3570732"/>
+            <a:ext cx="1203350" cy="120701"/>
+          </a:xfrm>
+          <a:prstGeom prst="rect">
+            <a:avLst/>
+          </a:prstGeom>
+          <a:noFill/>
+          <a:ln/>
+        </p:spPr>
+        <p:txBody>
+          <a:bodyPr wrap="square" lIns="0" tIns="0" rIns="0" bIns="0" rtlCol="0" anchor="ctr"/>
           <a:lstStyle/>
           <a:p>
             <a:pPr algn="ctr" indent="0" marL="0">
               <a:lnSpc>
-                <a:spcPct val="86000"/>
+                <a:spcPct val="102000"/>
               </a:lnSpc>
               <a:buNone/>
             </a:pPr>
             <a:r>
-              <a:rPr lang="en-US" sz="470" b="1" dirty="0">
+              <a:rPr lang="en-US" sz="410" b="1" dirty="0">
                 <a:solidFill>
                   <a:srgbClr val="202124"/>
                 </a:solidFill>
@@ -25099,24 +25049,24 @@
               </a:rPr>
               <a:t>Cache hits • RPM • per-tenant span cost → BigQuery</a:t>
             </a:r>
-            <a:endParaRPr lang="en-US" sz="470" dirty="0"/>
-          </a:p>
-        </p:txBody>
-      </p:sp>
-      <p:sp>
-        <p:nvSpPr>
-          <p:cNvPr id="206" name="Shape 184"/>
-          <p:cNvSpPr/>
-          <p:nvPr/>
-        </p:nvSpPr>
-        <p:spPr>
-          <a:xfrm>
-            <a:off x="2844698" y="3376879"/>
-            <a:ext cx="738835" cy="178308"/>
+            <a:endParaRPr lang="en-US" sz="410" dirty="0"/>
+          </a:p>
+        </p:txBody>
+      </p:sp>
+      <p:sp>
+        <p:nvSpPr>
+          <p:cNvPr id="207" name="Shape 185"/>
+          <p:cNvSpPr/>
+          <p:nvPr/>
+        </p:nvSpPr>
+        <p:spPr>
+          <a:xfrm>
+            <a:off x="2844698" y="3362249"/>
+            <a:ext cx="738835" cy="208483"/>
           </a:xfrm>
           <a:prstGeom prst="roundRect">
             <a:avLst>
-              <a:gd name="adj" fmla="val 25641"/>
+              <a:gd name="adj" fmla="val 21930"/>
             </a:avLst>
           </a:prstGeom>
           <a:solidFill>
@@ -25132,35 +25082,33 @@
       </p:sp>
       <p:sp>
         <p:nvSpPr>
-          <p:cNvPr id="207" name="Text 185"/>
-          <p:cNvSpPr/>
-          <p:nvPr/>
-        </p:nvSpPr>
-        <p:spPr>
-          <a:xfrm>
-            <a:off x="2862986" y="3386023"/>
-            <a:ext cx="702259" cy="160020"/>
-          </a:xfrm>
-          <a:prstGeom prst="rect">
-            <a:avLst/>
-          </a:prstGeom>
-          <a:noFill/>
-          <a:ln/>
-        </p:spPr>
-        <p:txBody>
-          <a:bodyPr wrap="square" lIns="0" tIns="0" rIns="0" bIns="0" rtlCol="0" anchor="ctr">
-            <a:normAutofit/>
-          </a:bodyPr>
+          <p:cNvPr id="208" name="Text 186"/>
+          <p:cNvSpPr/>
+          <p:nvPr/>
+        </p:nvSpPr>
+        <p:spPr>
+          <a:xfrm>
+            <a:off x="2864815" y="3371393"/>
+            <a:ext cx="698602" cy="190195"/>
+          </a:xfrm>
+          <a:prstGeom prst="rect">
+            <a:avLst/>
+          </a:prstGeom>
+          <a:noFill/>
+          <a:ln/>
+        </p:spPr>
+        <p:txBody>
+          <a:bodyPr wrap="square" lIns="0" tIns="0" rIns="0" bIns="0" rtlCol="0" anchor="ctr"/>
           <a:lstStyle/>
           <a:p>
             <a:pPr algn="ctr" indent="0" marL="0">
               <a:lnSpc>
-                <a:spcPct val="86000"/>
+                <a:spcPct val="102000"/>
               </a:lnSpc>
               <a:buNone/>
             </a:pPr>
             <a:r>
-              <a:rPr lang="en-US" sz="470" b="1" dirty="0">
+              <a:rPr lang="en-US" sz="410" b="1" dirty="0">
                 <a:solidFill>
                   <a:srgbClr val="202124"/>
                 </a:solidFill>
@@ -25170,17 +25118,17 @@
               </a:rPr>
               <a:t>Allocate gVisor sandbox</a:t>
             </a:r>
-            <a:endParaRPr lang="en-US" sz="470" dirty="0"/>
+            <a:endParaRPr lang="en-US" sz="410" dirty="0"/>
           </a:p>
           <a:p>
             <a:pPr algn="ctr" indent="0" marL="0">
               <a:lnSpc>
-                <a:spcPct val="86000"/>
+                <a:spcPct val="102000"/>
               </a:lnSpc>
               <a:buNone/>
             </a:pPr>
             <a:r>
-              <a:rPr lang="en-US" sz="410" dirty="0">
+              <a:rPr lang="en-US" sz="375" dirty="0">
                 <a:solidFill>
                   <a:srgbClr val="202124"/>
                 </a:solidFill>
@@ -25190,24 +25138,24 @@
               </a:rPr>
               <a:t>+ Valkey quota check</a:t>
             </a:r>
-            <a:endParaRPr lang="en-US" sz="470" dirty="0"/>
-          </a:p>
-        </p:txBody>
-      </p:sp>
-      <p:sp>
-        <p:nvSpPr>
-          <p:cNvPr id="208" name="Shape 186"/>
-          <p:cNvSpPr/>
-          <p:nvPr/>
-        </p:nvSpPr>
-        <p:spPr>
-          <a:xfrm>
-            <a:off x="1757477" y="4529938"/>
-            <a:ext cx="686714" cy="178308"/>
+            <a:endParaRPr lang="en-US" sz="410" dirty="0"/>
+          </a:p>
+        </p:txBody>
+      </p:sp>
+      <p:sp>
+        <p:nvSpPr>
+          <p:cNvPr id="209" name="Shape 187"/>
+          <p:cNvSpPr/>
+          <p:nvPr/>
+        </p:nvSpPr>
+        <p:spPr>
+          <a:xfrm>
+            <a:off x="1757477" y="4459529"/>
+            <a:ext cx="708660" cy="208483"/>
           </a:xfrm>
           <a:prstGeom prst="roundRect">
             <a:avLst>
-              <a:gd name="adj" fmla="val 25641"/>
+              <a:gd name="adj" fmla="val 21930"/>
             </a:avLst>
           </a:prstGeom>
           <a:solidFill>
@@ -25223,35 +25171,33 @@
       </p:sp>
       <p:sp>
         <p:nvSpPr>
-          <p:cNvPr id="209" name="Text 187"/>
-          <p:cNvSpPr/>
-          <p:nvPr/>
-        </p:nvSpPr>
-        <p:spPr>
-          <a:xfrm>
-            <a:off x="1775765" y="4539082"/>
-            <a:ext cx="650138" cy="160020"/>
-          </a:xfrm>
-          <a:prstGeom prst="rect">
-            <a:avLst/>
-          </a:prstGeom>
-          <a:noFill/>
-          <a:ln/>
-        </p:spPr>
-        <p:txBody>
-          <a:bodyPr wrap="square" lIns="0" tIns="0" rIns="0" bIns="0" rtlCol="0" anchor="ctr">
-            <a:normAutofit/>
-          </a:bodyPr>
+          <p:cNvPr id="210" name="Text 188"/>
+          <p:cNvSpPr/>
+          <p:nvPr/>
+        </p:nvSpPr>
+        <p:spPr>
+          <a:xfrm>
+            <a:off x="1777594" y="4468673"/>
+            <a:ext cx="668426" cy="190195"/>
+          </a:xfrm>
+          <a:prstGeom prst="rect">
+            <a:avLst/>
+          </a:prstGeom>
+          <a:noFill/>
+          <a:ln/>
+        </p:spPr>
+        <p:txBody>
+          <a:bodyPr wrap="square" lIns="0" tIns="0" rIns="0" bIns="0" rtlCol="0" anchor="ctr"/>
           <a:lstStyle/>
           <a:p>
             <a:pPr algn="ctr" indent="0" marL="0">
               <a:lnSpc>
-                <a:spcPct val="86000"/>
+                <a:spcPct val="102000"/>
               </a:lnSpc>
               <a:buNone/>
             </a:pPr>
             <a:r>
-              <a:rPr lang="en-US" sz="470" b="1" dirty="0">
+              <a:rPr lang="en-US" sz="410" b="1" dirty="0">
                 <a:solidFill>
                   <a:srgbClr val="202124"/>
                 </a:solidFill>
@@ -25261,17 +25207,17 @@
               </a:rPr>
               <a:t>Screen prompt with</a:t>
             </a:r>
-            <a:endParaRPr lang="en-US" sz="470" dirty="0"/>
+            <a:endParaRPr lang="en-US" sz="410" dirty="0"/>
           </a:p>
           <a:p>
             <a:pPr algn="ctr" indent="0" marL="0">
               <a:lnSpc>
-                <a:spcPct val="86000"/>
+                <a:spcPct val="102000"/>
               </a:lnSpc>
               <a:buNone/>
             </a:pPr>
             <a:r>
-              <a:rPr lang="en-US" sz="410" dirty="0">
+              <a:rPr lang="en-US" sz="375" dirty="0">
                 <a:solidFill>
                   <a:srgbClr val="202124"/>
                 </a:solidFill>
@@ -25281,24 +25227,24 @@
               </a:rPr>
               <a:t>tenant's Armor template</a:t>
             </a:r>
-            <a:endParaRPr lang="en-US" sz="470" dirty="0"/>
-          </a:p>
-        </p:txBody>
-      </p:sp>
-      <p:sp>
-        <p:nvSpPr>
-          <p:cNvPr id="210" name="Shape 188"/>
-          <p:cNvSpPr/>
-          <p:nvPr/>
-        </p:nvSpPr>
-        <p:spPr>
-          <a:xfrm>
-            <a:off x="1757477" y="5033772"/>
-            <a:ext cx="686714" cy="178308"/>
+            <a:endParaRPr lang="en-US" sz="410" dirty="0"/>
+          </a:p>
+        </p:txBody>
+      </p:sp>
+      <p:sp>
+        <p:nvSpPr>
+          <p:cNvPr id="211" name="Shape 189"/>
+          <p:cNvSpPr/>
+          <p:nvPr/>
+        </p:nvSpPr>
+        <p:spPr>
+          <a:xfrm>
+            <a:off x="1757477" y="5018227"/>
+            <a:ext cx="672084" cy="208483"/>
           </a:xfrm>
           <a:prstGeom prst="roundRect">
             <a:avLst>
-              <a:gd name="adj" fmla="val 25641"/>
+              <a:gd name="adj" fmla="val 21930"/>
             </a:avLst>
           </a:prstGeom>
           <a:solidFill>
@@ -25314,35 +25260,33 @@
       </p:sp>
       <p:sp>
         <p:nvSpPr>
-          <p:cNvPr id="211" name="Text 189"/>
-          <p:cNvSpPr/>
-          <p:nvPr/>
-        </p:nvSpPr>
-        <p:spPr>
-          <a:xfrm>
-            <a:off x="1775765" y="5042916"/>
-            <a:ext cx="650138" cy="160020"/>
-          </a:xfrm>
-          <a:prstGeom prst="rect">
-            <a:avLst/>
-          </a:prstGeom>
-          <a:noFill/>
-          <a:ln/>
-        </p:spPr>
-        <p:txBody>
-          <a:bodyPr wrap="square" lIns="0" tIns="0" rIns="0" bIns="0" rtlCol="0" anchor="ctr">
-            <a:normAutofit/>
-          </a:bodyPr>
+          <p:cNvPr id="212" name="Text 190"/>
+          <p:cNvSpPr/>
+          <p:nvPr/>
+        </p:nvSpPr>
+        <p:spPr>
+          <a:xfrm>
+            <a:off x="1777594" y="5027371"/>
+            <a:ext cx="631850" cy="190195"/>
+          </a:xfrm>
+          <a:prstGeom prst="rect">
+            <a:avLst/>
+          </a:prstGeom>
+          <a:noFill/>
+          <a:ln/>
+        </p:spPr>
+        <p:txBody>
+          <a:bodyPr wrap="square" lIns="0" tIns="0" rIns="0" bIns="0" rtlCol="0" anchor="ctr"/>
           <a:lstStyle/>
           <a:p>
             <a:pPr algn="ctr" indent="0" marL="0">
               <a:lnSpc>
-                <a:spcPct val="86000"/>
+                <a:spcPct val="102000"/>
               </a:lnSpc>
               <a:buNone/>
             </a:pPr>
             <a:r>
-              <a:rPr lang="en-US" sz="470" b="1" dirty="0">
+              <a:rPr lang="en-US" sz="410" b="1" dirty="0">
                 <a:solidFill>
                   <a:srgbClr val="202124"/>
                 </a:solidFill>
@@ -25352,17 +25296,17 @@
               </a:rPr>
               <a:t>90% cached prefix +</a:t>
             </a:r>
-            <a:endParaRPr lang="en-US" sz="470" dirty="0"/>
+            <a:endParaRPr lang="en-US" sz="410" dirty="0"/>
           </a:p>
           <a:p>
             <a:pPr algn="ctr" indent="0" marL="0">
               <a:lnSpc>
-                <a:spcPct val="86000"/>
+                <a:spcPct val="102000"/>
               </a:lnSpc>
               <a:buNone/>
             </a:pPr>
             <a:r>
-              <a:rPr lang="en-US" sz="410" dirty="0">
+              <a:rPr lang="en-US" sz="375" dirty="0">
                 <a:solidFill>
                   <a:srgbClr val="202124"/>
                 </a:solidFill>
@@ -25372,24 +25316,24 @@
               </a:rPr>
               <a:t>namespaced memory</a:t>
             </a:r>
-            <a:endParaRPr lang="en-US" sz="470" dirty="0"/>
-          </a:p>
-        </p:txBody>
-      </p:sp>
-      <p:sp>
-        <p:nvSpPr>
-          <p:cNvPr id="212" name="Shape 190"/>
-          <p:cNvSpPr/>
-          <p:nvPr/>
-        </p:nvSpPr>
-        <p:spPr>
-          <a:xfrm>
-            <a:off x="2502713" y="2885846"/>
-            <a:ext cx="597103" cy="178308"/>
+            <a:endParaRPr lang="en-US" sz="410" dirty="0"/>
+          </a:p>
+        </p:txBody>
+      </p:sp>
+      <p:sp>
+        <p:nvSpPr>
+          <p:cNvPr id="213" name="Shape 191"/>
+          <p:cNvSpPr/>
+          <p:nvPr/>
+        </p:nvSpPr>
+        <p:spPr>
+          <a:xfrm>
+            <a:off x="2548433" y="2871216"/>
+            <a:ext cx="507492" cy="208483"/>
           </a:xfrm>
           <a:prstGeom prst="roundRect">
             <a:avLst>
-              <a:gd name="adj" fmla="val 25641"/>
+              <a:gd name="adj" fmla="val 21930"/>
             </a:avLst>
           </a:prstGeom>
           <a:solidFill>
@@ -25405,35 +25349,33 @@
       </p:sp>
       <p:sp>
         <p:nvSpPr>
-          <p:cNvPr id="213" name="Text 191"/>
-          <p:cNvSpPr/>
-          <p:nvPr/>
-        </p:nvSpPr>
-        <p:spPr>
-          <a:xfrm>
-            <a:off x="2521001" y="2894990"/>
-            <a:ext cx="560527" cy="160020"/>
-          </a:xfrm>
-          <a:prstGeom prst="rect">
-            <a:avLst/>
-          </a:prstGeom>
-          <a:noFill/>
-          <a:ln/>
-        </p:spPr>
-        <p:txBody>
-          <a:bodyPr wrap="square" lIns="0" tIns="0" rIns="0" bIns="0" rtlCol="0" anchor="ctr">
-            <a:normAutofit/>
-          </a:bodyPr>
+          <p:cNvPr id="214" name="Text 192"/>
+          <p:cNvSpPr/>
+          <p:nvPr/>
+        </p:nvSpPr>
+        <p:spPr>
+          <a:xfrm>
+            <a:off x="2568550" y="2880360"/>
+            <a:ext cx="467258" cy="190195"/>
+          </a:xfrm>
+          <a:prstGeom prst="rect">
+            <a:avLst/>
+          </a:prstGeom>
+          <a:noFill/>
+          <a:ln/>
+        </p:spPr>
+        <p:txBody>
+          <a:bodyPr wrap="square" lIns="0" tIns="0" rIns="0" bIns="0" rtlCol="0" anchor="ctr"/>
           <a:lstStyle/>
           <a:p>
             <a:pPr algn="ctr" indent="0" marL="0">
               <a:lnSpc>
-                <a:spcPct val="86000"/>
+                <a:spcPct val="102000"/>
               </a:lnSpc>
               <a:buNone/>
             </a:pPr>
             <a:r>
-              <a:rPr lang="en-US" sz="470" b="1" dirty="0">
+              <a:rPr lang="en-US" sz="410" b="1" dirty="0">
                 <a:solidFill>
                   <a:srgbClr val="202124"/>
                 </a:solidFill>
@@ -25443,17 +25385,17 @@
               </a:rPr>
               <a:t>Mint OBO +</a:t>
             </a:r>
-            <a:endParaRPr lang="en-US" sz="470" dirty="0"/>
+            <a:endParaRPr lang="en-US" sz="410" dirty="0"/>
           </a:p>
           <a:p>
             <a:pPr algn="ctr" indent="0" marL="0">
               <a:lnSpc>
-                <a:spcPct val="86000"/>
+                <a:spcPct val="102000"/>
               </a:lnSpc>
               <a:buNone/>
             </a:pPr>
             <a:r>
-              <a:rPr lang="en-US" sz="410" dirty="0">
+              <a:rPr lang="en-US" sz="375" dirty="0">
                 <a:solidFill>
                   <a:srgbClr val="202124"/>
                 </a:solidFill>
@@ -25463,24 +25405,24 @@
               </a:rPr>
               <a:t>KMS P-256 sig</a:t>
             </a:r>
-            <a:endParaRPr lang="en-US" sz="470" dirty="0"/>
-          </a:p>
-        </p:txBody>
-      </p:sp>
-      <p:sp>
-        <p:nvSpPr>
-          <p:cNvPr id="214" name="Shape 192"/>
-          <p:cNvSpPr/>
-          <p:nvPr/>
-        </p:nvSpPr>
-        <p:spPr>
-          <a:xfrm>
-            <a:off x="5383073" y="3546043"/>
-            <a:ext cx="617220" cy="178308"/>
+            <a:endParaRPr lang="en-US" sz="410" dirty="0"/>
+          </a:p>
+        </p:txBody>
+      </p:sp>
+      <p:sp>
+        <p:nvSpPr>
+          <p:cNvPr id="215" name="Shape 193"/>
+          <p:cNvSpPr/>
+          <p:nvPr/>
+        </p:nvSpPr>
+        <p:spPr>
+          <a:xfrm>
+            <a:off x="5383073" y="3531413"/>
+            <a:ext cx="653796" cy="208483"/>
           </a:xfrm>
           <a:prstGeom prst="roundRect">
             <a:avLst>
-              <a:gd name="adj" fmla="val 25641"/>
+              <a:gd name="adj" fmla="val 21930"/>
             </a:avLst>
           </a:prstGeom>
           <a:solidFill>
@@ -25496,35 +25438,33 @@
       </p:sp>
       <p:sp>
         <p:nvSpPr>
-          <p:cNvPr id="215" name="Text 193"/>
-          <p:cNvSpPr/>
-          <p:nvPr/>
-        </p:nvSpPr>
-        <p:spPr>
-          <a:xfrm>
-            <a:off x="5401361" y="3555187"/>
-            <a:ext cx="580644" cy="160020"/>
-          </a:xfrm>
-          <a:prstGeom prst="rect">
-            <a:avLst/>
-          </a:prstGeom>
-          <a:noFill/>
-          <a:ln/>
-        </p:spPr>
-        <p:txBody>
-          <a:bodyPr wrap="square" lIns="0" tIns="0" rIns="0" bIns="0" rtlCol="0" anchor="ctr">
-            <a:normAutofit/>
-          </a:bodyPr>
+          <p:cNvPr id="216" name="Text 194"/>
+          <p:cNvSpPr/>
+          <p:nvPr/>
+        </p:nvSpPr>
+        <p:spPr>
+          <a:xfrm>
+            <a:off x="5403190" y="3540557"/>
+            <a:ext cx="613562" cy="190195"/>
+          </a:xfrm>
+          <a:prstGeom prst="rect">
+            <a:avLst/>
+          </a:prstGeom>
+          <a:noFill/>
+          <a:ln/>
+        </p:spPr>
+        <p:txBody>
+          <a:bodyPr wrap="square" lIns="0" tIns="0" rIns="0" bIns="0" rtlCol="0" anchor="ctr"/>
           <a:lstStyle/>
           <a:p>
             <a:pPr algn="ctr" indent="0" marL="0">
               <a:lnSpc>
-                <a:spcPct val="86000"/>
+                <a:spcPct val="102000"/>
               </a:lnSpc>
               <a:buNone/>
             </a:pPr>
             <a:r>
-              <a:rPr lang="en-US" sz="470" b="1" dirty="0">
+              <a:rPr lang="en-US" sz="410" b="1" dirty="0">
                 <a:solidFill>
                   <a:srgbClr val="202124"/>
                 </a:solidFill>
@@ -25534,17 +25474,17 @@
               </a:rPr>
               <a:t>SDP-redacted response</a:t>
             </a:r>
-            <a:endParaRPr lang="en-US" sz="470" dirty="0"/>
+            <a:endParaRPr lang="en-US" sz="410" dirty="0"/>
           </a:p>
           <a:p>
             <a:pPr algn="ctr" indent="0" marL="0">
               <a:lnSpc>
-                <a:spcPct val="86000"/>
+                <a:spcPct val="102000"/>
               </a:lnSpc>
               <a:buNone/>
             </a:pPr>
             <a:r>
-              <a:rPr lang="en-US" sz="410" dirty="0">
+              <a:rPr lang="en-US" sz="375" dirty="0">
                 <a:solidFill>
                   <a:srgbClr val="202124"/>
                 </a:solidFill>
@@ -25554,24 +25494,24 @@
               </a:rPr>
               <a:t>+ per-turn OTel span</a:t>
             </a:r>
-            <a:endParaRPr lang="en-US" sz="470" dirty="0"/>
-          </a:p>
-        </p:txBody>
-      </p:sp>
-      <p:sp>
-        <p:nvSpPr>
-          <p:cNvPr id="216" name="Shape 194"/>
-          <p:cNvSpPr/>
-          <p:nvPr/>
-        </p:nvSpPr>
-        <p:spPr>
-          <a:xfrm>
-            <a:off x="2435962" y="2094890"/>
-            <a:ext cx="495605" cy="178308"/>
+            <a:endParaRPr lang="en-US" sz="410" dirty="0"/>
+          </a:p>
+        </p:txBody>
+      </p:sp>
+      <p:sp>
+        <p:nvSpPr>
+          <p:cNvPr id="217" name="Shape 195"/>
+          <p:cNvSpPr/>
+          <p:nvPr/>
+        </p:nvSpPr>
+        <p:spPr>
+          <a:xfrm>
+            <a:off x="2443277" y="2080260"/>
+            <a:ext cx="480060" cy="208483"/>
           </a:xfrm>
           <a:prstGeom prst="roundRect">
             <a:avLst>
-              <a:gd name="adj" fmla="val 25641"/>
+              <a:gd name="adj" fmla="val 21930"/>
             </a:avLst>
           </a:prstGeom>
           <a:solidFill>
@@ -25587,35 +25527,33 @@
       </p:sp>
       <p:sp>
         <p:nvSpPr>
-          <p:cNvPr id="217" name="Text 195"/>
-          <p:cNvSpPr/>
-          <p:nvPr/>
-        </p:nvSpPr>
-        <p:spPr>
-          <a:xfrm>
-            <a:off x="2454250" y="2104034"/>
-            <a:ext cx="459029" cy="160020"/>
-          </a:xfrm>
-          <a:prstGeom prst="rect">
-            <a:avLst/>
-          </a:prstGeom>
-          <a:noFill/>
-          <a:ln/>
-        </p:spPr>
-        <p:txBody>
-          <a:bodyPr wrap="square" lIns="0" tIns="0" rIns="0" bIns="0" rtlCol="0" anchor="ctr">
-            <a:normAutofit/>
-          </a:bodyPr>
+          <p:cNvPr id="218" name="Text 196"/>
+          <p:cNvSpPr/>
+          <p:nvPr/>
+        </p:nvSpPr>
+        <p:spPr>
+          <a:xfrm>
+            <a:off x="2463394" y="2089404"/>
+            <a:ext cx="439826" cy="190195"/>
+          </a:xfrm>
+          <a:prstGeom prst="rect">
+            <a:avLst/>
+          </a:prstGeom>
+          <a:noFill/>
+          <a:ln/>
+        </p:spPr>
+        <p:txBody>
+          <a:bodyPr wrap="square" lIns="0" tIns="0" rIns="0" bIns="0" rtlCol="0" anchor="ctr"/>
           <a:lstStyle/>
           <a:p>
             <a:pPr algn="ctr" indent="0" marL="0">
               <a:lnSpc>
-                <a:spcPct val="86000"/>
+                <a:spcPct val="102000"/>
               </a:lnSpc>
               <a:buNone/>
             </a:pPr>
             <a:r>
-              <a:rPr lang="en-US" sz="470" b="1" dirty="0">
+              <a:rPr lang="en-US" sz="410" b="1" dirty="0">
                 <a:solidFill>
                   <a:srgbClr val="202124"/>
                 </a:solidFill>
@@ -25625,17 +25563,17 @@
               </a:rPr>
               <a:t>Strip header</a:t>
             </a:r>
-            <a:endParaRPr lang="en-US" sz="470" dirty="0"/>
+            <a:endParaRPr lang="en-US" sz="410" dirty="0"/>
           </a:p>
           <a:p>
             <a:pPr algn="ctr" indent="0" marL="0">
               <a:lnSpc>
-                <a:spcPct val="86000"/>
+                <a:spcPct val="102000"/>
               </a:lnSpc>
               <a:buNone/>
             </a:pPr>
             <a:r>
-              <a:rPr lang="en-US" sz="410" dirty="0">
+              <a:rPr lang="en-US" sz="375" dirty="0">
                 <a:solidFill>
                   <a:srgbClr val="202124"/>
                 </a:solidFill>
@@ -25645,24 +25583,24 @@
               </a:rPr>
               <a:t>X-Tenant-ID</a:t>
             </a:r>
-            <a:endParaRPr lang="en-US" sz="470" dirty="0"/>
-          </a:p>
-        </p:txBody>
-      </p:sp>
-      <p:sp>
-        <p:nvSpPr>
-          <p:cNvPr id="218" name="Shape 196"/>
-          <p:cNvSpPr/>
-          <p:nvPr/>
-        </p:nvSpPr>
-        <p:spPr>
-          <a:xfrm>
-            <a:off x="2435962" y="2639873"/>
-            <a:ext cx="495605" cy="178308"/>
+            <a:endParaRPr lang="en-US" sz="410" dirty="0"/>
+          </a:p>
+        </p:txBody>
+      </p:sp>
+      <p:sp>
+        <p:nvSpPr>
+          <p:cNvPr id="219" name="Shape 197"/>
+          <p:cNvSpPr/>
+          <p:nvPr/>
+        </p:nvSpPr>
+        <p:spPr>
+          <a:xfrm>
+            <a:off x="2443277" y="2625242"/>
+            <a:ext cx="480060" cy="208483"/>
           </a:xfrm>
           <a:prstGeom prst="roundRect">
             <a:avLst>
-              <a:gd name="adj" fmla="val 25641"/>
+              <a:gd name="adj" fmla="val 21930"/>
             </a:avLst>
           </a:prstGeom>
           <a:solidFill>
@@ -25678,35 +25616,33 @@
       </p:sp>
       <p:sp>
         <p:nvSpPr>
-          <p:cNvPr id="219" name="Text 197"/>
-          <p:cNvSpPr/>
-          <p:nvPr/>
-        </p:nvSpPr>
-        <p:spPr>
-          <a:xfrm>
-            <a:off x="2454250" y="2649017"/>
-            <a:ext cx="459029" cy="160020"/>
-          </a:xfrm>
-          <a:prstGeom prst="rect">
-            <a:avLst/>
-          </a:prstGeom>
-          <a:noFill/>
-          <a:ln/>
-        </p:spPr>
-        <p:txBody>
-          <a:bodyPr wrap="square" lIns="0" tIns="0" rIns="0" bIns="0" rtlCol="0" anchor="ctr">
-            <a:normAutofit/>
-          </a:bodyPr>
+          <p:cNvPr id="220" name="Text 198"/>
+          <p:cNvSpPr/>
+          <p:nvPr/>
+        </p:nvSpPr>
+        <p:spPr>
+          <a:xfrm>
+            <a:off x="2463394" y="2634386"/>
+            <a:ext cx="439826" cy="190195"/>
+          </a:xfrm>
+          <a:prstGeom prst="rect">
+            <a:avLst/>
+          </a:prstGeom>
+          <a:noFill/>
+          <a:ln/>
+        </p:spPr>
+        <p:txBody>
+          <a:bodyPr wrap="square" lIns="0" tIns="0" rIns="0" bIns="0" rtlCol="0" anchor="ctr"/>
           <a:lstStyle/>
           <a:p>
             <a:pPr algn="ctr" indent="0" marL="0">
               <a:lnSpc>
-                <a:spcPct val="86000"/>
+                <a:spcPct val="102000"/>
               </a:lnSpc>
               <a:buNone/>
             </a:pPr>
             <a:r>
-              <a:rPr lang="en-US" sz="470" b="1" dirty="0">
+              <a:rPr lang="en-US" sz="410" b="1" dirty="0">
                 <a:solidFill>
                   <a:srgbClr val="202124"/>
                 </a:solidFill>
@@ -25716,17 +25652,17 @@
               </a:rPr>
               <a:t>Filter Agent</a:t>
             </a:r>
-            <a:endParaRPr lang="en-US" sz="470" dirty="0"/>
+            <a:endParaRPr lang="en-US" sz="410" dirty="0"/>
           </a:p>
           <a:p>
             <a:pPr algn="ctr" indent="0" marL="0">
               <a:lnSpc>
-                <a:spcPct val="86000"/>
+                <a:spcPct val="102000"/>
               </a:lnSpc>
               <a:buNone/>
             </a:pPr>
             <a:r>
-              <a:rPr lang="en-US" sz="410" dirty="0">
+              <a:rPr lang="en-US" sz="375" dirty="0">
                 <a:solidFill>
                   <a:srgbClr val="202124"/>
                 </a:solidFill>
@@ -25736,24 +25672,24 @@
               </a:rPr>
               <a:t>Catalog</a:t>
             </a:r>
-            <a:endParaRPr lang="en-US" sz="470" dirty="0"/>
-          </a:p>
-        </p:txBody>
-      </p:sp>
-      <p:sp>
-        <p:nvSpPr>
-          <p:cNvPr id="220" name="Shape 198"/>
-          <p:cNvSpPr/>
-          <p:nvPr/>
-        </p:nvSpPr>
-        <p:spPr>
-          <a:xfrm>
-            <a:off x="5435194" y="5064862"/>
-            <a:ext cx="493776" cy="132588"/>
+            <a:endParaRPr lang="en-US" sz="410" dirty="0"/>
+          </a:p>
+        </p:txBody>
+      </p:sp>
+      <p:sp>
+        <p:nvSpPr>
+          <p:cNvPr id="221" name="Shape 199"/>
+          <p:cNvSpPr/>
+          <p:nvPr/>
+        </p:nvSpPr>
+        <p:spPr>
+          <a:xfrm>
+            <a:off x="5443423" y="5006340"/>
+            <a:ext cx="452628" cy="138989"/>
           </a:xfrm>
           <a:prstGeom prst="roundRect">
             <a:avLst>
-              <a:gd name="adj" fmla="val 34483"/>
+              <a:gd name="adj" fmla="val 32895"/>
             </a:avLst>
           </a:prstGeom>
           <a:solidFill>
@@ -25769,35 +25705,33 @@
       </p:sp>
       <p:sp>
         <p:nvSpPr>
-          <p:cNvPr id="221" name="Text 199"/>
-          <p:cNvSpPr/>
-          <p:nvPr/>
-        </p:nvSpPr>
-        <p:spPr>
-          <a:xfrm>
-            <a:off x="5453482" y="5074006"/>
-            <a:ext cx="457200" cy="114300"/>
-          </a:xfrm>
-          <a:prstGeom prst="rect">
-            <a:avLst/>
-          </a:prstGeom>
-          <a:noFill/>
-          <a:ln/>
-        </p:spPr>
-        <p:txBody>
-          <a:bodyPr wrap="square" lIns="0" tIns="0" rIns="0" bIns="0" rtlCol="0" anchor="ctr">
-            <a:normAutofit/>
-          </a:bodyPr>
+          <p:cNvPr id="222" name="Text 200"/>
+          <p:cNvSpPr/>
+          <p:nvPr/>
+        </p:nvSpPr>
+        <p:spPr>
+          <a:xfrm>
+            <a:off x="5463540" y="5015484"/>
+            <a:ext cx="412394" cy="120701"/>
+          </a:xfrm>
+          <a:prstGeom prst="rect">
+            <a:avLst/>
+          </a:prstGeom>
+          <a:noFill/>
+          <a:ln/>
+        </p:spPr>
+        <p:txBody>
+          <a:bodyPr wrap="square" lIns="0" tIns="0" rIns="0" bIns="0" rtlCol="0" anchor="ctr"/>
           <a:lstStyle/>
           <a:p>
             <a:pPr algn="ctr" indent="0" marL="0">
               <a:lnSpc>
-                <a:spcPct val="86000"/>
+                <a:spcPct val="102000"/>
               </a:lnSpc>
               <a:buNone/>
             </a:pPr>
             <a:r>
-              <a:rPr lang="en-US" sz="470" b="1" dirty="0">
+              <a:rPr lang="en-US" sz="410" b="1" dirty="0">
                 <a:solidFill>
                   <a:srgbClr val="202124"/>
                 </a:solidFill>
@@ -25807,24 +25741,24 @@
               </a:rPr>
               <a:t>3LO consent</a:t>
             </a:r>
-            <a:endParaRPr lang="en-US" sz="470" dirty="0"/>
-          </a:p>
-        </p:txBody>
-      </p:sp>
-      <p:sp>
-        <p:nvSpPr>
-          <p:cNvPr id="222" name="Shape 200"/>
-          <p:cNvSpPr/>
-          <p:nvPr/>
-        </p:nvSpPr>
-        <p:spPr>
-          <a:xfrm>
-            <a:off x="3862426" y="1148486"/>
-            <a:ext cx="493776" cy="132588"/>
+            <a:endParaRPr lang="en-US" sz="410" dirty="0"/>
+          </a:p>
+        </p:txBody>
+      </p:sp>
+      <p:sp>
+        <p:nvSpPr>
+          <p:cNvPr id="223" name="Shape 201"/>
+          <p:cNvSpPr/>
+          <p:nvPr/>
+        </p:nvSpPr>
+        <p:spPr>
+          <a:xfrm>
+            <a:off x="3888029" y="1144829"/>
+            <a:ext cx="370332" cy="138989"/>
           </a:xfrm>
           <a:prstGeom prst="roundRect">
             <a:avLst>
-              <a:gd name="adj" fmla="val 34483"/>
+              <a:gd name="adj" fmla="val 32895"/>
             </a:avLst>
           </a:prstGeom>
           <a:solidFill>
@@ -25840,35 +25774,33 @@
       </p:sp>
       <p:sp>
         <p:nvSpPr>
-          <p:cNvPr id="223" name="Text 201"/>
-          <p:cNvSpPr/>
-          <p:nvPr/>
-        </p:nvSpPr>
-        <p:spPr>
-          <a:xfrm>
-            <a:off x="3880714" y="1157630"/>
-            <a:ext cx="457200" cy="114300"/>
-          </a:xfrm>
-          <a:prstGeom prst="rect">
-            <a:avLst/>
-          </a:prstGeom>
-          <a:noFill/>
-          <a:ln/>
-        </p:spPr>
-        <p:txBody>
-          <a:bodyPr wrap="square" lIns="0" tIns="0" rIns="0" bIns="0" rtlCol="0" anchor="ctr">
-            <a:normAutofit/>
-          </a:bodyPr>
+          <p:cNvPr id="224" name="Text 202"/>
+          <p:cNvSpPr/>
+          <p:nvPr/>
+        </p:nvSpPr>
+        <p:spPr>
+          <a:xfrm>
+            <a:off x="3908146" y="1153973"/>
+            <a:ext cx="330098" cy="120701"/>
+          </a:xfrm>
+          <a:prstGeom prst="rect">
+            <a:avLst/>
+          </a:prstGeom>
+          <a:noFill/>
+          <a:ln/>
+        </p:spPr>
+        <p:txBody>
+          <a:bodyPr wrap="square" lIns="0" tIns="0" rIns="0" bIns="0" rtlCol="0" anchor="ctr"/>
           <a:lstStyle/>
           <a:p>
             <a:pPr algn="ctr" indent="0" marL="0">
               <a:lnSpc>
-                <a:spcPct val="86000"/>
+                <a:spcPct val="102000"/>
               </a:lnSpc>
               <a:buNone/>
             </a:pPr>
             <a:r>
-              <a:rPr lang="en-US" sz="470" b="1" dirty="0">
+              <a:rPr lang="en-US" sz="410" b="1" dirty="0">
                 <a:solidFill>
                   <a:srgbClr val="202124"/>
                 </a:solidFill>
@@ -25878,24 +25810,24 @@
               </a:rPr>
               <a:t>Response</a:t>
             </a:r>
-            <a:endParaRPr lang="en-US" sz="470" dirty="0"/>
-          </a:p>
-        </p:txBody>
-      </p:sp>
-      <p:sp>
-        <p:nvSpPr>
-          <p:cNvPr id="224" name="Shape 202"/>
-          <p:cNvSpPr/>
-          <p:nvPr/>
-        </p:nvSpPr>
-        <p:spPr>
-          <a:xfrm>
-            <a:off x="3862426" y="2725826"/>
-            <a:ext cx="493776" cy="132588"/>
+            <a:endParaRPr lang="en-US" sz="410" dirty="0"/>
+          </a:p>
+        </p:txBody>
+      </p:sp>
+      <p:sp>
+        <p:nvSpPr>
+          <p:cNvPr id="225" name="Shape 203"/>
+          <p:cNvSpPr/>
+          <p:nvPr/>
+        </p:nvSpPr>
+        <p:spPr>
+          <a:xfrm>
+            <a:off x="3888029" y="2723083"/>
+            <a:ext cx="370332" cy="138989"/>
           </a:xfrm>
           <a:prstGeom prst="roundRect">
             <a:avLst>
-              <a:gd name="adj" fmla="val 34483"/>
+              <a:gd name="adj" fmla="val 32895"/>
             </a:avLst>
           </a:prstGeom>
           <a:solidFill>
@@ -25911,35 +25843,33 @@
       </p:sp>
       <p:sp>
         <p:nvSpPr>
-          <p:cNvPr id="225" name="Text 203"/>
-          <p:cNvSpPr/>
-          <p:nvPr/>
-        </p:nvSpPr>
-        <p:spPr>
-          <a:xfrm>
-            <a:off x="3880714" y="2734970"/>
-            <a:ext cx="457200" cy="114300"/>
-          </a:xfrm>
-          <a:prstGeom prst="rect">
-            <a:avLst/>
-          </a:prstGeom>
-          <a:noFill/>
-          <a:ln/>
-        </p:spPr>
-        <p:txBody>
-          <a:bodyPr wrap="square" lIns="0" tIns="0" rIns="0" bIns="0" rtlCol="0" anchor="ctr">
-            <a:normAutofit/>
-          </a:bodyPr>
+          <p:cNvPr id="226" name="Text 204"/>
+          <p:cNvSpPr/>
+          <p:nvPr/>
+        </p:nvSpPr>
+        <p:spPr>
+          <a:xfrm>
+            <a:off x="3908146" y="2732227"/>
+            <a:ext cx="330098" cy="120701"/>
+          </a:xfrm>
+          <a:prstGeom prst="rect">
+            <a:avLst/>
+          </a:prstGeom>
+          <a:noFill/>
+          <a:ln/>
+        </p:spPr>
+        <p:txBody>
+          <a:bodyPr wrap="square" lIns="0" tIns="0" rIns="0" bIns="0" rtlCol="0" anchor="ctr"/>
           <a:lstStyle/>
           <a:p>
             <a:pPr algn="ctr" indent="0" marL="0">
               <a:lnSpc>
-                <a:spcPct val="86000"/>
+                <a:spcPct val="102000"/>
               </a:lnSpc>
               <a:buNone/>
             </a:pPr>
             <a:r>
-              <a:rPr lang="en-US" sz="470" b="1" dirty="0">
+              <a:rPr lang="en-US" sz="410" b="1" dirty="0">
                 <a:solidFill>
                   <a:srgbClr val="202124"/>
                 </a:solidFill>
@@ -25949,24 +25879,24 @@
               </a:rPr>
               <a:t>Response</a:t>
             </a:r>
-            <a:endParaRPr lang="en-US" sz="470" dirty="0"/>
-          </a:p>
-        </p:txBody>
-      </p:sp>
-      <p:sp>
-        <p:nvSpPr>
-          <p:cNvPr id="226" name="Shape 204"/>
-          <p:cNvSpPr/>
-          <p:nvPr/>
-        </p:nvSpPr>
-        <p:spPr>
-          <a:xfrm>
-            <a:off x="3040380" y="1148486"/>
-            <a:ext cx="493776" cy="132588"/>
+            <a:endParaRPr lang="en-US" sz="410" dirty="0"/>
+          </a:p>
+        </p:txBody>
+      </p:sp>
+      <p:sp>
+        <p:nvSpPr>
+          <p:cNvPr id="227" name="Shape 205"/>
+          <p:cNvSpPr/>
+          <p:nvPr/>
+        </p:nvSpPr>
+        <p:spPr>
+          <a:xfrm>
+            <a:off x="3144622" y="1144829"/>
+            <a:ext cx="342900" cy="138989"/>
           </a:xfrm>
           <a:prstGeom prst="roundRect">
             <a:avLst>
-              <a:gd name="adj" fmla="val 34483"/>
+              <a:gd name="adj" fmla="val 32895"/>
             </a:avLst>
           </a:prstGeom>
           <a:solidFill>
@@ -25982,35 +25912,33 @@
       </p:sp>
       <p:sp>
         <p:nvSpPr>
-          <p:cNvPr id="227" name="Text 205"/>
-          <p:cNvSpPr/>
-          <p:nvPr/>
-        </p:nvSpPr>
-        <p:spPr>
-          <a:xfrm>
-            <a:off x="3058668" y="1157630"/>
-            <a:ext cx="457200" cy="114300"/>
-          </a:xfrm>
-          <a:prstGeom prst="rect">
-            <a:avLst/>
-          </a:prstGeom>
-          <a:noFill/>
-          <a:ln/>
-        </p:spPr>
-        <p:txBody>
-          <a:bodyPr wrap="square" lIns="0" tIns="0" rIns="0" bIns="0" rtlCol="0" anchor="ctr">
-            <a:normAutofit/>
-          </a:bodyPr>
+          <p:cNvPr id="228" name="Text 206"/>
+          <p:cNvSpPr/>
+          <p:nvPr/>
+        </p:nvSpPr>
+        <p:spPr>
+          <a:xfrm>
+            <a:off x="3164738" y="1153973"/>
+            <a:ext cx="302666" cy="120701"/>
+          </a:xfrm>
+          <a:prstGeom prst="rect">
+            <a:avLst/>
+          </a:prstGeom>
+          <a:noFill/>
+          <a:ln/>
+        </p:spPr>
+        <p:txBody>
+          <a:bodyPr wrap="square" lIns="0" tIns="0" rIns="0" bIns="0" rtlCol="0" anchor="ctr"/>
           <a:lstStyle/>
           <a:p>
             <a:pPr algn="ctr" indent="0" marL="0">
               <a:lnSpc>
-                <a:spcPct val="86000"/>
+                <a:spcPct val="102000"/>
               </a:lnSpc>
               <a:buNone/>
             </a:pPr>
             <a:r>
-              <a:rPr lang="en-US" sz="470" b="1" dirty="0">
+              <a:rPr lang="en-US" sz="410" b="1" dirty="0">
                 <a:solidFill>
                   <a:srgbClr val="202124"/>
                 </a:solidFill>
@@ -26020,24 +25948,24 @@
               </a:rPr>
               <a:t>Request</a:t>
             </a:r>
-            <a:endParaRPr lang="en-US" sz="470" dirty="0"/>
-          </a:p>
-        </p:txBody>
-      </p:sp>
-      <p:sp>
-        <p:nvSpPr>
-          <p:cNvPr id="228" name="Shape 206"/>
-          <p:cNvSpPr/>
-          <p:nvPr/>
-        </p:nvSpPr>
-        <p:spPr>
-          <a:xfrm>
-            <a:off x="3040380" y="2725826"/>
-            <a:ext cx="493776" cy="132588"/>
+            <a:endParaRPr lang="en-US" sz="410" dirty="0"/>
+          </a:p>
+        </p:txBody>
+      </p:sp>
+      <p:sp>
+        <p:nvSpPr>
+          <p:cNvPr id="229" name="Shape 207"/>
+          <p:cNvSpPr/>
+          <p:nvPr/>
+        </p:nvSpPr>
+        <p:spPr>
+          <a:xfrm>
+            <a:off x="3144622" y="2723083"/>
+            <a:ext cx="342900" cy="138989"/>
           </a:xfrm>
           <a:prstGeom prst="roundRect">
             <a:avLst>
-              <a:gd name="adj" fmla="val 34483"/>
+              <a:gd name="adj" fmla="val 32895"/>
             </a:avLst>
           </a:prstGeom>
           <a:solidFill>
@@ -26053,35 +25981,33 @@
       </p:sp>
       <p:sp>
         <p:nvSpPr>
-          <p:cNvPr id="229" name="Text 207"/>
-          <p:cNvSpPr/>
-          <p:nvPr/>
-        </p:nvSpPr>
-        <p:spPr>
-          <a:xfrm>
-            <a:off x="3058668" y="2734970"/>
-            <a:ext cx="457200" cy="114300"/>
-          </a:xfrm>
-          <a:prstGeom prst="rect">
-            <a:avLst/>
-          </a:prstGeom>
-          <a:noFill/>
-          <a:ln/>
-        </p:spPr>
-        <p:txBody>
-          <a:bodyPr wrap="square" lIns="0" tIns="0" rIns="0" bIns="0" rtlCol="0" anchor="ctr">
-            <a:normAutofit/>
-          </a:bodyPr>
+          <p:cNvPr id="230" name="Text 208"/>
+          <p:cNvSpPr/>
+          <p:nvPr/>
+        </p:nvSpPr>
+        <p:spPr>
+          <a:xfrm>
+            <a:off x="3164738" y="2732227"/>
+            <a:ext cx="302666" cy="120701"/>
+          </a:xfrm>
+          <a:prstGeom prst="rect">
+            <a:avLst/>
+          </a:prstGeom>
+          <a:noFill/>
+          <a:ln/>
+        </p:spPr>
+        <p:txBody>
+          <a:bodyPr wrap="square" lIns="0" tIns="0" rIns="0" bIns="0" rtlCol="0" anchor="ctr"/>
           <a:lstStyle/>
           <a:p>
             <a:pPr algn="ctr" indent="0" marL="0">
               <a:lnSpc>
-                <a:spcPct val="86000"/>
+                <a:spcPct val="102000"/>
               </a:lnSpc>
               <a:buNone/>
             </a:pPr>
             <a:r>
-              <a:rPr lang="en-US" sz="470" b="1" dirty="0">
+              <a:rPr lang="en-US" sz="410" b="1" dirty="0">
                 <a:solidFill>
                   <a:srgbClr val="202124"/>
                 </a:solidFill>
@@ -26091,24 +26017,24 @@
               </a:rPr>
               <a:t>Request</a:t>
             </a:r>
-            <a:endParaRPr lang="en-US" sz="470" dirty="0"/>
-          </a:p>
-        </p:txBody>
-      </p:sp>
-      <p:sp>
-        <p:nvSpPr>
-          <p:cNvPr id="230" name="Shape 208"/>
-          <p:cNvSpPr/>
-          <p:nvPr/>
-        </p:nvSpPr>
-        <p:spPr>
-          <a:xfrm>
-            <a:off x="3240634" y="5064862"/>
-            <a:ext cx="493776" cy="132588"/>
+            <a:endParaRPr lang="en-US" sz="410" dirty="0"/>
+          </a:p>
+        </p:txBody>
+      </p:sp>
+      <p:sp>
+        <p:nvSpPr>
+          <p:cNvPr id="231" name="Shape 209"/>
+          <p:cNvSpPr/>
+          <p:nvPr/>
+        </p:nvSpPr>
+        <p:spPr>
+          <a:xfrm>
+            <a:off x="3279038" y="5061204"/>
+            <a:ext cx="397764" cy="138989"/>
           </a:xfrm>
           <a:prstGeom prst="roundRect">
             <a:avLst>
-              <a:gd name="adj" fmla="val 34483"/>
+              <a:gd name="adj" fmla="val 32895"/>
             </a:avLst>
           </a:prstGeom>
           <a:solidFill>
@@ -26124,35 +26050,33 @@
       </p:sp>
       <p:sp>
         <p:nvSpPr>
-          <p:cNvPr id="231" name="Text 209"/>
-          <p:cNvSpPr/>
-          <p:nvPr/>
-        </p:nvSpPr>
-        <p:spPr>
-          <a:xfrm>
-            <a:off x="3258922" y="5074006"/>
-            <a:ext cx="457200" cy="114300"/>
-          </a:xfrm>
-          <a:prstGeom prst="rect">
-            <a:avLst/>
-          </a:prstGeom>
-          <a:noFill/>
-          <a:ln/>
-        </p:spPr>
-        <p:txBody>
-          <a:bodyPr wrap="square" lIns="0" tIns="0" rIns="0" bIns="0" rtlCol="0" anchor="ctr">
-            <a:normAutofit/>
-          </a:bodyPr>
+          <p:cNvPr id="232" name="Text 210"/>
+          <p:cNvSpPr/>
+          <p:nvPr/>
+        </p:nvSpPr>
+        <p:spPr>
+          <a:xfrm>
+            <a:off x="3299155" y="5070348"/>
+            <a:ext cx="357530" cy="120701"/>
+          </a:xfrm>
+          <a:prstGeom prst="rect">
+            <a:avLst/>
+          </a:prstGeom>
+          <a:noFill/>
+          <a:ln/>
+        </p:spPr>
+        <p:txBody>
+          <a:bodyPr wrap="square" lIns="0" tIns="0" rIns="0" bIns="0" rtlCol="0" anchor="ctr"/>
           <a:lstStyle/>
           <a:p>
             <a:pPr algn="ctr" indent="0" marL="0">
               <a:lnSpc>
-                <a:spcPct val="86000"/>
+                <a:spcPct val="102000"/>
               </a:lnSpc>
               <a:buNone/>
             </a:pPr>
             <a:r>
-              <a:rPr lang="en-US" sz="470" b="1" dirty="0">
+              <a:rPr lang="en-US" sz="410" b="1" dirty="0">
                 <a:solidFill>
                   <a:srgbClr val="202124"/>
                 </a:solidFill>
@@ -26162,13 +26086,13 @@
               </a:rPr>
               <a:t>namespace</a:t>
             </a:r>
-            <a:endParaRPr lang="en-US" sz="470" dirty="0"/>
-          </a:p>
-        </p:txBody>
-      </p:sp>
-      <p:sp>
-        <p:nvSpPr>
-          <p:cNvPr id="232" name="Text 210"/>
+            <a:endParaRPr lang="en-US" sz="410" dirty="0"/>
+          </a:p>
+        </p:txBody>
+      </p:sp>
+      <p:sp>
+        <p:nvSpPr>
+          <p:cNvPr id="233" name="Text 211"/>
           <p:cNvSpPr/>
           <p:nvPr/>
         </p:nvSpPr>
@@ -26184,14 +26108,14 @@
           <a:ln/>
         </p:spPr>
         <p:txBody>
-          <a:bodyPr wrap="square" rtlCol="0" anchor="ctr"/>
+          <a:bodyPr wrap="none" rtlCol="0" anchor="ctr"/>
           <a:lstStyle/>
           <a:p>
             <a:pPr algn="l" indent="0" marL="0">
               <a:buNone/>
             </a:pPr>
             <a:r>
-              <a:rPr lang="en-US" sz="780" b="1" dirty="0">
+              <a:rPr lang="en-US" sz="700" b="1" dirty="0">
                 <a:solidFill>
                   <a:srgbClr val="4285F4"/>
                 </a:solidFill>
@@ -26205,7 +26129,7 @@
               <a:buNone/>
             </a:pPr>
             <a:r>
-              <a:rPr lang="en-US" sz="760" dirty="0">
+              <a:rPr lang="en-US" sz="690" dirty="0">
                 <a:solidFill>
                   <a:srgbClr val="5F6368"/>
                 </a:solidFill>
@@ -26219,7 +26143,7 @@
               <a:buNone/>
             </a:pPr>
             <a:r>
-              <a:rPr lang="en-US" sz="780" b="1" dirty="0">
+              <a:rPr lang="en-US" sz="700" b="1" dirty="0">
                 <a:solidFill>
                   <a:srgbClr val="3C4043"/>
                 </a:solidFill>
@@ -26229,7 +26153,7 @@
               </a:rPr>
               <a:t>Proprietary + Confidential</a:t>
             </a:r>
-            <a:endParaRPr lang="en-US" sz="780" dirty="0"/>
+            <a:endParaRPr lang="en-US" sz="700" dirty="0"/>
           </a:p>
         </p:txBody>
       </p:sp>
@@ -29141,7 +29065,7 @@
           <a:ln/>
         </p:spPr>
         <p:txBody>
-          <a:bodyPr wrap="square" rtlCol="0" anchor="ctr"/>
+          <a:bodyPr wrap="none" rtlCol="0" anchor="ctr"/>
           <a:lstStyle/>
           <a:p>
             <a:pPr algn="l" indent="0" marL="0">
@@ -31200,7 +31124,7 @@
           <a:ln/>
         </p:spPr>
         <p:txBody>
-          <a:bodyPr wrap="square" rtlCol="0" anchor="ctr"/>
+          <a:bodyPr wrap="none" rtlCol="0" anchor="ctr"/>
           <a:lstStyle/>
           <a:p>
             <a:pPr algn="l" indent="0" marL="0">
@@ -32708,7 +32632,7 @@
           <a:ln/>
         </p:spPr>
         <p:txBody>
-          <a:bodyPr wrap="square" rtlCol="0" anchor="ctr"/>
+          <a:bodyPr wrap="none" rtlCol="0" anchor="ctr"/>
           <a:lstStyle/>
           <a:p>
             <a:pPr algn="l" indent="0" marL="0">
@@ -35823,7 +35747,7 @@
           <a:ln/>
         </p:spPr>
         <p:txBody>
-          <a:bodyPr wrap="square" rtlCol="0" anchor="ctr"/>
+          <a:bodyPr wrap="none" rtlCol="0" anchor="ctr"/>
           <a:lstStyle/>
           <a:p>
             <a:pPr algn="l" indent="0" marL="0">

--- a/slides/ws2-pattern-a-pooled-editable-slides.pptx
+++ b/slides/ws2-pattern-a-pooled-editable-slides.pptx
@@ -20588,69 +20588,7 @@
       </p:sp>
       <p:sp>
         <p:nvSpPr>
-          <p:cNvPr id="74" name="Text 72"/>
-          <p:cNvSpPr/>
-          <p:nvPr/>
-        </p:nvSpPr>
-        <p:spPr>
-          <a:xfrm>
-            <a:off x="1560881" y="3970325"/>
-            <a:ext cx="2115922" cy="210312"/>
-          </a:xfrm>
-          <a:prstGeom prst="rect">
-            <a:avLst/>
-          </a:prstGeom>
-          <a:noFill/>
-          <a:ln/>
-        </p:spPr>
-        <p:txBody>
-          <a:bodyPr wrap="square" lIns="0" tIns="0" rIns="0" bIns="0" rtlCol="0" anchor="t"/>
-          <a:lstStyle/>
-          <a:p>
-            <a:pPr algn="l" indent="0" marL="0">
-              <a:lnSpc>
-                <a:spcPct val="102000"/>
-              </a:lnSpc>
-              <a:buNone/>
-            </a:pPr>
-            <a:r>
-              <a:rPr lang="en-US" sz="470" b="1" dirty="0">
-                <a:solidFill>
-                  <a:srgbClr val="202124"/>
-                </a:solidFill>
-                <a:latin typeface="Arial" pitchFamily="34" charset="0"/>
-                <a:ea typeface="Arial" pitchFamily="34" charset="-122"/>
-                <a:cs typeface="Arial" pitchFamily="34" charset="-120"/>
-              </a:rPr>
-              <a:t>3. Pooled Agent Runtime (shared by all tenants)</a:t>
-            </a:r>
-            <a:endParaRPr lang="en-US" sz="470" dirty="0"/>
-          </a:p>
-          <a:p>
-            <a:pPr algn="l" indent="0" marL="0">
-              <a:lnSpc>
-                <a:spcPct val="102000"/>
-              </a:lnSpc>
-              <a:buNone/>
-            </a:pPr>
-            <a:r>
-              <a:rPr lang="en-US" sz="400" dirty="0">
-                <a:solidFill>
-                  <a:srgbClr val="202124"/>
-                </a:solidFill>
-                <a:latin typeface="Arial" pitchFamily="34" charset="0"/>
-                <a:ea typeface="Arial" pitchFamily="34" charset="-122"/>
-                <a:cs typeface="Arial" pitchFamily="34" charset="-120"/>
-              </a:rPr>
-              <a:t>Ephemeral gVisor sandboxes • per-tenant Model Armor • 90% prefix cache</a:t>
-            </a:r>
-            <a:endParaRPr lang="en-US" sz="470" dirty="0"/>
-          </a:p>
-        </p:txBody>
-      </p:sp>
-      <p:sp>
-        <p:nvSpPr>
-          <p:cNvPr id="75" name="Shape 73"/>
+          <p:cNvPr id="74" name="Shape 72"/>
           <p:cNvSpPr/>
           <p:nvPr/>
         </p:nvSpPr>
@@ -20677,69 +20615,7 @@
       </p:sp>
       <p:sp>
         <p:nvSpPr>
-          <p:cNvPr id="76" name="Text 74"/>
-          <p:cNvSpPr/>
-          <p:nvPr/>
-        </p:nvSpPr>
-        <p:spPr>
-          <a:xfrm>
-            <a:off x="3856025" y="3970325"/>
-            <a:ext cx="2063801" cy="210312"/>
-          </a:xfrm>
-          <a:prstGeom prst="rect">
-            <a:avLst/>
-          </a:prstGeom>
-          <a:noFill/>
-          <a:ln/>
-        </p:spPr>
-        <p:txBody>
-          <a:bodyPr wrap="square" lIns="0" tIns="0" rIns="0" bIns="0" rtlCol="0" anchor="t"/>
-          <a:lstStyle/>
-          <a:p>
-            <a:pPr algn="l" indent="0" marL="0">
-              <a:lnSpc>
-                <a:spcPct val="102000"/>
-              </a:lnSpc>
-              <a:buNone/>
-            </a:pPr>
-            <a:r>
-              <a:rPr lang="en-US" sz="470" b="1" dirty="0">
-                <a:solidFill>
-                  <a:srgbClr val="202124"/>
-                </a:solidFill>
-                <a:latin typeface="Arial" pitchFamily="34" charset="0"/>
-                <a:ea typeface="Arial" pitchFamily="34" charset="-122"/>
-                <a:cs typeface="Arial" pitchFamily="34" charset="-120"/>
-              </a:rPr>
-              <a:t>4. Shared Data &amp; Tool Plane (RLS-partitioned)</a:t>
-            </a:r>
-            <a:endParaRPr lang="en-US" sz="470" dirty="0"/>
-          </a:p>
-          <a:p>
-            <a:pPr algn="l" indent="0" marL="0">
-              <a:lnSpc>
-                <a:spcPct val="102000"/>
-              </a:lnSpc>
-              <a:buNone/>
-            </a:pPr>
-            <a:r>
-              <a:rPr lang="en-US" sz="400" dirty="0">
-                <a:solidFill>
-                  <a:srgbClr val="202124"/>
-                </a:solidFill>
-                <a:latin typeface="Arial" pitchFamily="34" charset="0"/>
-                <a:ea typeface="Arial" pitchFamily="34" charset="-122"/>
-                <a:cs typeface="Arial" pitchFamily="34" charset="-120"/>
-              </a:rPr>
-              <a:t>Mandatory Row-Level Security • scoped 2LO/3LO MCP • egress SDP masking</a:t>
-            </a:r>
-            <a:endParaRPr lang="en-US" sz="470" dirty="0"/>
-          </a:p>
-        </p:txBody>
-      </p:sp>
-      <p:sp>
-        <p:nvSpPr>
-          <p:cNvPr id="77" name="Shape 75"/>
+          <p:cNvPr id="75" name="Shape 73"/>
           <p:cNvSpPr/>
           <p:nvPr/>
         </p:nvSpPr>
@@ -20766,69 +20642,7 @@
       </p:sp>
       <p:sp>
         <p:nvSpPr>
-          <p:cNvPr id="78" name="Text 76"/>
-          <p:cNvSpPr/>
-          <p:nvPr/>
-        </p:nvSpPr>
-        <p:spPr>
-          <a:xfrm>
-            <a:off x="1482242" y="1926641"/>
-            <a:ext cx="1901952" cy="210312"/>
-          </a:xfrm>
-          <a:prstGeom prst="rect">
-            <a:avLst/>
-          </a:prstGeom>
-          <a:noFill/>
-          <a:ln/>
-        </p:spPr>
-        <p:txBody>
-          <a:bodyPr wrap="square" lIns="0" tIns="0" rIns="0" bIns="0" rtlCol="0" anchor="t"/>
-          <a:lstStyle/>
-          <a:p>
-            <a:pPr algn="l" indent="0" marL="0">
-              <a:lnSpc>
-                <a:spcPct val="102000"/>
-              </a:lnSpc>
-              <a:buNone/>
-            </a:pPr>
-            <a:r>
-              <a:rPr lang="en-US" sz="470" b="1" dirty="0">
-                <a:solidFill>
-                  <a:srgbClr val="202124"/>
-                </a:solidFill>
-                <a:latin typeface="Arial" pitchFamily="34" charset="0"/>
-                <a:ea typeface="Arial" pitchFamily="34" charset="-122"/>
-                <a:cs typeface="Arial" pitchFamily="34" charset="-120"/>
-              </a:rPr>
-              <a:t>Hop 1 &amp; Hop 2: Edge PEP &amp; Agent Catalog PDP</a:t>
-            </a:r>
-            <a:endParaRPr lang="en-US" sz="470" dirty="0"/>
-          </a:p>
-          <a:p>
-            <a:pPr algn="l" indent="0" marL="0">
-              <a:lnSpc>
-                <a:spcPct val="102000"/>
-              </a:lnSpc>
-              <a:buNone/>
-            </a:pPr>
-            <a:r>
-              <a:rPr lang="en-US" sz="400" dirty="0">
-                <a:solidFill>
-                  <a:srgbClr val="202124"/>
-                </a:solidFill>
-                <a:latin typeface="Arial" pitchFamily="34" charset="0"/>
-                <a:ea typeface="Arial" pitchFamily="34" charset="-122"/>
-                <a:cs typeface="Arial" pitchFamily="34" charset="-120"/>
-              </a:rPr>
-              <a:t>Header stripping, OBO+DPoP KMS Sign &amp; Discovery Engine Catalog pruning</a:t>
-            </a:r>
-            <a:endParaRPr lang="en-US" sz="470" dirty="0"/>
-          </a:p>
-        </p:txBody>
-      </p:sp>
-      <p:sp>
-        <p:nvSpPr>
-          <p:cNvPr id="79" name="Shape 77"/>
+          <p:cNvPr id="76" name="Shape 74"/>
           <p:cNvSpPr/>
           <p:nvPr/>
         </p:nvSpPr>
@@ -20855,49 +20669,7 @@
       </p:sp>
       <p:sp>
         <p:nvSpPr>
-          <p:cNvPr id="80" name="Text 78"/>
-          <p:cNvSpPr/>
-          <p:nvPr/>
-        </p:nvSpPr>
-        <p:spPr>
-          <a:xfrm>
-            <a:off x="4655210" y="1961388"/>
-            <a:ext cx="1315822" cy="210312"/>
-          </a:xfrm>
-          <a:prstGeom prst="rect">
-            <a:avLst/>
-          </a:prstGeom>
-          <a:noFill/>
-          <a:ln/>
-        </p:spPr>
-        <p:txBody>
-          <a:bodyPr wrap="square" lIns="0" tIns="0" rIns="0" bIns="0" rtlCol="0" anchor="t"/>
-          <a:lstStyle/>
-          <a:p>
-            <a:pPr algn="l" indent="0" marL="0">
-              <a:lnSpc>
-                <a:spcPct val="102000"/>
-              </a:lnSpc>
-              <a:buNone/>
-            </a:pPr>
-            <a:r>
-              <a:rPr lang="en-US" sz="430" b="1" dirty="0">
-                <a:solidFill>
-                  <a:srgbClr val="202124"/>
-                </a:solidFill>
-                <a:latin typeface="Arial" pitchFamily="34" charset="0"/>
-                <a:ea typeface="Arial" pitchFamily="34" charset="-122"/>
-                <a:cs typeface="Arial" pitchFamily="34" charset="-120"/>
-              </a:rPr>
-              <a:t>Hop 3 &amp; 5: Shared FinOps, Cache &amp; OTel Hub</a:t>
-            </a:r>
-            <a:endParaRPr lang="en-US" sz="430" dirty="0"/>
-          </a:p>
-        </p:txBody>
-      </p:sp>
-      <p:sp>
-        <p:nvSpPr>
-          <p:cNvPr id="81" name="Shape 79"/>
+          <p:cNvPr id="77" name="Shape 75"/>
           <p:cNvSpPr/>
           <p:nvPr/>
         </p:nvSpPr>
@@ -20924,7 +20696,7 @@
       </p:sp>
       <p:pic>
         <p:nvPicPr>
-          <p:cNvPr id="82" name="Image 0" descr="preencoded.png">    </p:cNvPr>
+          <p:cNvPr id="78" name="Image 0" descr="preencoded.png">    </p:cNvPr>
           <p:cNvPicPr>
             <a:picLocks noChangeAspect="1"/>
           </p:cNvPicPr>
@@ -20948,7 +20720,7 @@
       </p:pic>
       <p:sp>
         <p:nvSpPr>
-          <p:cNvPr id="83" name="Text 80"/>
+          <p:cNvPr id="79" name="Text 76"/>
           <p:cNvSpPr/>
           <p:nvPr/>
         </p:nvSpPr>
@@ -21010,7 +20782,7 @@
       </p:sp>
       <p:sp>
         <p:nvSpPr>
-          <p:cNvPr id="84" name="Shape 81"/>
+          <p:cNvPr id="80" name="Shape 77"/>
           <p:cNvSpPr/>
           <p:nvPr/>
         </p:nvSpPr>
@@ -21037,7 +20809,7 @@
       </p:sp>
       <p:pic>
         <p:nvPicPr>
-          <p:cNvPr id="85" name="Image 1" descr="preencoded.png">    </p:cNvPr>
+          <p:cNvPr id="81" name="Image 1" descr="preencoded.png">    </p:cNvPr>
           <p:cNvPicPr>
             <a:picLocks noChangeAspect="1"/>
           </p:cNvPicPr>
@@ -21061,7 +20833,7 @@
       </p:pic>
       <p:sp>
         <p:nvSpPr>
-          <p:cNvPr id="86" name="Text 82"/>
+          <p:cNvPr id="82" name="Text 78"/>
           <p:cNvSpPr/>
           <p:nvPr/>
         </p:nvSpPr>
@@ -21123,7 +20895,7 @@
       </p:sp>
       <p:pic>
         <p:nvPicPr>
-          <p:cNvPr id="87" name="Image 2" descr="preencoded.png">    </p:cNvPr>
+          <p:cNvPr id="83" name="Image 2" descr="preencoded.png">    </p:cNvPr>
           <p:cNvPicPr>
             <a:picLocks noChangeAspect="1"/>
           </p:cNvPicPr>
@@ -21147,7 +20919,7 @@
       </p:pic>
       <p:sp>
         <p:nvSpPr>
-          <p:cNvPr id="88" name="Shape 83"/>
+          <p:cNvPr id="84" name="Shape 79"/>
           <p:cNvSpPr/>
           <p:nvPr/>
         </p:nvSpPr>
@@ -21171,7 +20943,7 @@
       </p:sp>
       <p:sp>
         <p:nvSpPr>
-          <p:cNvPr id="89" name="Shape 84"/>
+          <p:cNvPr id="85" name="Shape 80"/>
           <p:cNvSpPr/>
           <p:nvPr/>
         </p:nvSpPr>
@@ -21195,7 +20967,7 @@
       </p:sp>
       <p:sp>
         <p:nvSpPr>
-          <p:cNvPr id="90" name="Shape 85"/>
+          <p:cNvPr id="86" name="Shape 81"/>
           <p:cNvSpPr/>
           <p:nvPr/>
         </p:nvSpPr>
@@ -21219,7 +20991,7 @@
       </p:sp>
       <p:sp>
         <p:nvSpPr>
-          <p:cNvPr id="91" name="Shape 86"/>
+          <p:cNvPr id="87" name="Shape 82"/>
           <p:cNvSpPr/>
           <p:nvPr/>
         </p:nvSpPr>
@@ -21242,7 +21014,7 @@
       </p:sp>
       <p:sp>
         <p:nvSpPr>
-          <p:cNvPr id="92" name="Shape 87"/>
+          <p:cNvPr id="88" name="Shape 83"/>
           <p:cNvSpPr/>
           <p:nvPr/>
         </p:nvSpPr>
@@ -21266,7 +21038,7 @@
       </p:sp>
       <p:sp>
         <p:nvSpPr>
-          <p:cNvPr id="93" name="Shape 88"/>
+          <p:cNvPr id="89" name="Shape 84"/>
           <p:cNvSpPr/>
           <p:nvPr/>
         </p:nvSpPr>
@@ -21290,7 +21062,7 @@
       </p:sp>
       <p:sp>
         <p:nvSpPr>
-          <p:cNvPr id="94" name="Shape 89"/>
+          <p:cNvPr id="90" name="Shape 85"/>
           <p:cNvSpPr/>
           <p:nvPr/>
         </p:nvSpPr>
@@ -21313,7 +21085,7 @@
       </p:sp>
       <p:sp>
         <p:nvSpPr>
-          <p:cNvPr id="95" name="Shape 90"/>
+          <p:cNvPr id="91" name="Shape 86"/>
           <p:cNvSpPr/>
           <p:nvPr/>
         </p:nvSpPr>
@@ -21337,7 +21109,7 @@
       </p:sp>
       <p:sp>
         <p:nvSpPr>
-          <p:cNvPr id="96" name="Shape 91"/>
+          <p:cNvPr id="92" name="Shape 87"/>
           <p:cNvSpPr/>
           <p:nvPr/>
         </p:nvSpPr>
@@ -21362,7 +21134,7 @@
       </p:sp>
       <p:sp>
         <p:nvSpPr>
-          <p:cNvPr id="97" name="Shape 92"/>
+          <p:cNvPr id="93" name="Shape 88"/>
           <p:cNvSpPr/>
           <p:nvPr/>
         </p:nvSpPr>
@@ -21386,7 +21158,7 @@
       </p:sp>
       <p:sp>
         <p:nvSpPr>
-          <p:cNvPr id="98" name="Shape 93"/>
+          <p:cNvPr id="94" name="Shape 89"/>
           <p:cNvSpPr/>
           <p:nvPr/>
         </p:nvSpPr>
@@ -21410,7 +21182,7 @@
       </p:sp>
       <p:sp>
         <p:nvSpPr>
-          <p:cNvPr id="99" name="Shape 94"/>
+          <p:cNvPr id="95" name="Shape 90"/>
           <p:cNvSpPr/>
           <p:nvPr/>
         </p:nvSpPr>
@@ -21433,7 +21205,7 @@
       </p:sp>
       <p:sp>
         <p:nvSpPr>
-          <p:cNvPr id="100" name="Shape 95"/>
+          <p:cNvPr id="96" name="Shape 91"/>
           <p:cNvSpPr/>
           <p:nvPr/>
         </p:nvSpPr>
@@ -21456,7 +21228,7 @@
       </p:sp>
       <p:sp>
         <p:nvSpPr>
-          <p:cNvPr id="101" name="Shape 96"/>
+          <p:cNvPr id="97" name="Shape 92"/>
           <p:cNvSpPr/>
           <p:nvPr/>
         </p:nvSpPr>
@@ -21480,7 +21252,7 @@
       </p:sp>
       <p:sp>
         <p:nvSpPr>
-          <p:cNvPr id="102" name="Shape 97"/>
+          <p:cNvPr id="98" name="Shape 93"/>
           <p:cNvSpPr/>
           <p:nvPr/>
         </p:nvSpPr>
@@ -21505,7 +21277,7 @@
       </p:sp>
       <p:sp>
         <p:nvSpPr>
-          <p:cNvPr id="103" name="Shape 98"/>
+          <p:cNvPr id="99" name="Shape 94"/>
           <p:cNvSpPr/>
           <p:nvPr/>
         </p:nvSpPr>
@@ -21530,7 +21302,7 @@
       </p:sp>
       <p:sp>
         <p:nvSpPr>
-          <p:cNvPr id="104" name="Shape 99"/>
+          <p:cNvPr id="100" name="Shape 95"/>
           <p:cNvSpPr/>
           <p:nvPr/>
         </p:nvSpPr>
@@ -21554,7 +21326,7 @@
       </p:sp>
       <p:sp>
         <p:nvSpPr>
-          <p:cNvPr id="105" name="Shape 100"/>
+          <p:cNvPr id="101" name="Shape 96"/>
           <p:cNvSpPr/>
           <p:nvPr/>
         </p:nvSpPr>
@@ -21579,7 +21351,7 @@
       </p:sp>
       <p:sp>
         <p:nvSpPr>
-          <p:cNvPr id="106" name="Shape 101"/>
+          <p:cNvPr id="102" name="Shape 97"/>
           <p:cNvSpPr/>
           <p:nvPr/>
         </p:nvSpPr>
@@ -21603,7 +21375,7 @@
       </p:sp>
       <p:sp>
         <p:nvSpPr>
-          <p:cNvPr id="107" name="Shape 102"/>
+          <p:cNvPr id="103" name="Shape 98"/>
           <p:cNvSpPr/>
           <p:nvPr/>
         </p:nvSpPr>
@@ -21627,7 +21399,7 @@
       </p:sp>
       <p:sp>
         <p:nvSpPr>
-          <p:cNvPr id="108" name="Shape 103"/>
+          <p:cNvPr id="104" name="Shape 99"/>
           <p:cNvSpPr/>
           <p:nvPr/>
         </p:nvSpPr>
@@ -21651,7 +21423,7 @@
       </p:sp>
       <p:sp>
         <p:nvSpPr>
-          <p:cNvPr id="109" name="Shape 104"/>
+          <p:cNvPr id="105" name="Shape 100"/>
           <p:cNvSpPr/>
           <p:nvPr/>
         </p:nvSpPr>
@@ -21675,7 +21447,7 @@
       </p:sp>
       <p:sp>
         <p:nvSpPr>
-          <p:cNvPr id="110" name="Shape 105"/>
+          <p:cNvPr id="106" name="Shape 101"/>
           <p:cNvSpPr/>
           <p:nvPr/>
         </p:nvSpPr>
@@ -21699,7 +21471,7 @@
       </p:sp>
       <p:sp>
         <p:nvSpPr>
-          <p:cNvPr id="111" name="Shape 106"/>
+          <p:cNvPr id="107" name="Shape 102"/>
           <p:cNvSpPr/>
           <p:nvPr/>
         </p:nvSpPr>
@@ -21722,7 +21494,7 @@
       </p:sp>
       <p:sp>
         <p:nvSpPr>
-          <p:cNvPr id="112" name="Shape 107"/>
+          <p:cNvPr id="108" name="Shape 103"/>
           <p:cNvSpPr/>
           <p:nvPr/>
         </p:nvSpPr>
@@ -21745,7 +21517,7 @@
       </p:sp>
       <p:sp>
         <p:nvSpPr>
-          <p:cNvPr id="113" name="Shape 108"/>
+          <p:cNvPr id="109" name="Shape 104"/>
           <p:cNvSpPr/>
           <p:nvPr/>
         </p:nvSpPr>
@@ -21768,7 +21540,7 @@
       </p:sp>
       <p:sp>
         <p:nvSpPr>
-          <p:cNvPr id="114" name="Shape 109"/>
+          <p:cNvPr id="110" name="Shape 105"/>
           <p:cNvSpPr/>
           <p:nvPr/>
         </p:nvSpPr>
@@ -21791,7 +21563,7 @@
       </p:sp>
       <p:sp>
         <p:nvSpPr>
-          <p:cNvPr id="115" name="Shape 110"/>
+          <p:cNvPr id="111" name="Shape 106"/>
           <p:cNvSpPr/>
           <p:nvPr/>
         </p:nvSpPr>
@@ -21815,7 +21587,7 @@
       </p:sp>
       <p:sp>
         <p:nvSpPr>
-          <p:cNvPr id="116" name="Shape 111"/>
+          <p:cNvPr id="112" name="Shape 107"/>
           <p:cNvSpPr/>
           <p:nvPr/>
         </p:nvSpPr>
@@ -21838,7 +21610,7 @@
       </p:sp>
       <p:sp>
         <p:nvSpPr>
-          <p:cNvPr id="117" name="Shape 112"/>
+          <p:cNvPr id="113" name="Shape 108"/>
           <p:cNvSpPr/>
           <p:nvPr/>
         </p:nvSpPr>
@@ -21861,7 +21633,7 @@
       </p:sp>
       <p:sp>
         <p:nvSpPr>
-          <p:cNvPr id="118" name="Shape 113"/>
+          <p:cNvPr id="114" name="Shape 109"/>
           <p:cNvSpPr/>
           <p:nvPr/>
         </p:nvSpPr>
@@ -21885,7 +21657,7 @@
       </p:sp>
       <p:sp>
         <p:nvSpPr>
-          <p:cNvPr id="119" name="Shape 114"/>
+          <p:cNvPr id="115" name="Shape 110"/>
           <p:cNvSpPr/>
           <p:nvPr/>
         </p:nvSpPr>
@@ -21909,13 +21681,13 @@
       </p:sp>
       <p:sp>
         <p:nvSpPr>
-          <p:cNvPr id="120" name="Shape 115"/>
-          <p:cNvSpPr/>
-          <p:nvPr/>
-        </p:nvSpPr>
-        <p:spPr>
-          <a:xfrm>
-            <a:off x="1473098" y="3802075"/>
+          <p:cNvPr id="116" name="Shape 111"/>
+          <p:cNvSpPr/>
+          <p:nvPr/>
+        </p:nvSpPr>
+        <p:spPr>
+          <a:xfrm>
+            <a:off x="1477670" y="3802075"/>
             <a:ext cx="4242816" cy="113386"/>
           </a:xfrm>
           <a:prstGeom prst="rect">
@@ -21929,7 +21701,7 @@
       </p:sp>
       <p:sp>
         <p:nvSpPr>
-          <p:cNvPr id="121" name="Text 116"/>
+          <p:cNvPr id="117" name="Text 112"/>
           <p:cNvSpPr/>
           <p:nvPr/>
         </p:nvSpPr>
@@ -21971,7 +21743,315 @@
       </p:sp>
       <p:sp>
         <p:nvSpPr>
+          <p:cNvPr id="118" name="Shape 113"/>
+          <p:cNvSpPr/>
+          <p:nvPr/>
+        </p:nvSpPr>
+        <p:spPr>
+          <a:xfrm>
+            <a:off x="1547165" y="3964838"/>
+            <a:ext cx="2064715" cy="196596"/>
+          </a:xfrm>
+          <a:prstGeom prst="rect">
+            <a:avLst/>
+          </a:prstGeom>
+          <a:solidFill>
+            <a:srgbClr val="FEEFC3"/>
+          </a:solidFill>
+          <a:ln/>
+        </p:spPr>
+      </p:sp>
+      <p:sp>
+        <p:nvSpPr>
+          <p:cNvPr id="119" name="Text 114"/>
+          <p:cNvSpPr/>
+          <p:nvPr/>
+        </p:nvSpPr>
+        <p:spPr>
+          <a:xfrm>
+            <a:off x="1560881" y="3970325"/>
+            <a:ext cx="2115922" cy="210312"/>
+          </a:xfrm>
+          <a:prstGeom prst="rect">
+            <a:avLst/>
+          </a:prstGeom>
+          <a:noFill/>
+          <a:ln/>
+        </p:spPr>
+        <p:txBody>
+          <a:bodyPr wrap="square" lIns="0" tIns="0" rIns="0" bIns="0" rtlCol="0" anchor="t"/>
+          <a:lstStyle/>
+          <a:p>
+            <a:pPr algn="l" indent="0" marL="0">
+              <a:lnSpc>
+                <a:spcPct val="102000"/>
+              </a:lnSpc>
+              <a:buNone/>
+            </a:pPr>
+            <a:r>
+              <a:rPr lang="en-US" sz="470" b="1" dirty="0">
+                <a:solidFill>
+                  <a:srgbClr val="202124"/>
+                </a:solidFill>
+                <a:latin typeface="Arial" pitchFamily="34" charset="0"/>
+                <a:ea typeface="Arial" pitchFamily="34" charset="-122"/>
+                <a:cs typeface="Arial" pitchFamily="34" charset="-120"/>
+              </a:rPr>
+              <a:t>3. Pooled Agent Runtime (shared by all tenants)</a:t>
+            </a:r>
+            <a:endParaRPr lang="en-US" sz="470" dirty="0"/>
+          </a:p>
+          <a:p>
+            <a:pPr algn="l" indent="0" marL="0">
+              <a:lnSpc>
+                <a:spcPct val="102000"/>
+              </a:lnSpc>
+              <a:buNone/>
+            </a:pPr>
+            <a:r>
+              <a:rPr lang="en-US" sz="400" dirty="0">
+                <a:solidFill>
+                  <a:srgbClr val="202124"/>
+                </a:solidFill>
+                <a:latin typeface="Arial" pitchFamily="34" charset="0"/>
+                <a:ea typeface="Arial" pitchFamily="34" charset="-122"/>
+                <a:cs typeface="Arial" pitchFamily="34" charset="-120"/>
+              </a:rPr>
+              <a:t>Ephemeral gVisor sandboxes • per-tenant Model Armor • 90% prefix cache</a:t>
+            </a:r>
+            <a:endParaRPr lang="en-US" sz="470" dirty="0"/>
+          </a:p>
+        </p:txBody>
+      </p:sp>
+      <p:sp>
+        <p:nvSpPr>
+          <p:cNvPr id="120" name="Shape 115"/>
+          <p:cNvSpPr/>
+          <p:nvPr/>
+        </p:nvSpPr>
+        <p:spPr>
+          <a:xfrm>
+            <a:off x="3842309" y="3964838"/>
+            <a:ext cx="2063801" cy="196596"/>
+          </a:xfrm>
+          <a:prstGeom prst="rect">
+            <a:avLst/>
+          </a:prstGeom>
+          <a:solidFill>
+            <a:srgbClr val="FAD2CF"/>
+          </a:solidFill>
+          <a:ln/>
+        </p:spPr>
+      </p:sp>
+      <p:sp>
+        <p:nvSpPr>
+          <p:cNvPr id="121" name="Text 116"/>
+          <p:cNvSpPr/>
+          <p:nvPr/>
+        </p:nvSpPr>
+        <p:spPr>
+          <a:xfrm>
+            <a:off x="3856025" y="3970325"/>
+            <a:ext cx="2063801" cy="210312"/>
+          </a:xfrm>
+          <a:prstGeom prst="rect">
+            <a:avLst/>
+          </a:prstGeom>
+          <a:noFill/>
+          <a:ln/>
+        </p:spPr>
+        <p:txBody>
+          <a:bodyPr wrap="square" lIns="0" tIns="0" rIns="0" bIns="0" rtlCol="0" anchor="t"/>
+          <a:lstStyle/>
+          <a:p>
+            <a:pPr algn="l" indent="0" marL="0">
+              <a:lnSpc>
+                <a:spcPct val="102000"/>
+              </a:lnSpc>
+              <a:buNone/>
+            </a:pPr>
+            <a:r>
+              <a:rPr lang="en-US" sz="470" b="1" dirty="0">
+                <a:solidFill>
+                  <a:srgbClr val="202124"/>
+                </a:solidFill>
+                <a:latin typeface="Arial" pitchFamily="34" charset="0"/>
+                <a:ea typeface="Arial" pitchFamily="34" charset="-122"/>
+                <a:cs typeface="Arial" pitchFamily="34" charset="-120"/>
+              </a:rPr>
+              <a:t>4. Shared Data &amp; Tool Plane (RLS-partitioned)</a:t>
+            </a:r>
+            <a:endParaRPr lang="en-US" sz="470" dirty="0"/>
+          </a:p>
+          <a:p>
+            <a:pPr algn="l" indent="0" marL="0">
+              <a:lnSpc>
+                <a:spcPct val="102000"/>
+              </a:lnSpc>
+              <a:buNone/>
+            </a:pPr>
+            <a:r>
+              <a:rPr lang="en-US" sz="400" dirty="0">
+                <a:solidFill>
+                  <a:srgbClr val="202124"/>
+                </a:solidFill>
+                <a:latin typeface="Arial" pitchFamily="34" charset="0"/>
+                <a:ea typeface="Arial" pitchFamily="34" charset="-122"/>
+                <a:cs typeface="Arial" pitchFamily="34" charset="-120"/>
+              </a:rPr>
+              <a:t>Mandatory Row-Level Security • scoped 2LO/3LO MCP • egress SDP masking</a:t>
+            </a:r>
+            <a:endParaRPr lang="en-US" sz="470" dirty="0"/>
+          </a:p>
+        </p:txBody>
+      </p:sp>
+      <p:sp>
+        <p:nvSpPr>
           <p:cNvPr id="122" name="Shape 117"/>
+          <p:cNvSpPr/>
+          <p:nvPr/>
+        </p:nvSpPr>
+        <p:spPr>
+          <a:xfrm>
+            <a:off x="1468526" y="1921154"/>
+            <a:ext cx="1901952" cy="196596"/>
+          </a:xfrm>
+          <a:prstGeom prst="rect">
+            <a:avLst/>
+          </a:prstGeom>
+          <a:solidFill>
+            <a:srgbClr val="AECBFA"/>
+          </a:solidFill>
+          <a:ln/>
+        </p:spPr>
+      </p:sp>
+      <p:sp>
+        <p:nvSpPr>
+          <p:cNvPr id="123" name="Text 118"/>
+          <p:cNvSpPr/>
+          <p:nvPr/>
+        </p:nvSpPr>
+        <p:spPr>
+          <a:xfrm>
+            <a:off x="1482242" y="1926641"/>
+            <a:ext cx="1901952" cy="210312"/>
+          </a:xfrm>
+          <a:prstGeom prst="rect">
+            <a:avLst/>
+          </a:prstGeom>
+          <a:noFill/>
+          <a:ln/>
+        </p:spPr>
+        <p:txBody>
+          <a:bodyPr wrap="square" lIns="0" tIns="0" rIns="0" bIns="0" rtlCol="0" anchor="t"/>
+          <a:lstStyle/>
+          <a:p>
+            <a:pPr algn="l" indent="0" marL="0">
+              <a:lnSpc>
+                <a:spcPct val="102000"/>
+              </a:lnSpc>
+              <a:buNone/>
+            </a:pPr>
+            <a:r>
+              <a:rPr lang="en-US" sz="470" b="1" dirty="0">
+                <a:solidFill>
+                  <a:srgbClr val="202124"/>
+                </a:solidFill>
+                <a:latin typeface="Arial" pitchFamily="34" charset="0"/>
+                <a:ea typeface="Arial" pitchFamily="34" charset="-122"/>
+                <a:cs typeface="Arial" pitchFamily="34" charset="-120"/>
+              </a:rPr>
+              <a:t>Hop 1 &amp; Hop 2: Edge PEP &amp; Agent Catalog PDP</a:t>
+            </a:r>
+            <a:endParaRPr lang="en-US" sz="470" dirty="0"/>
+          </a:p>
+          <a:p>
+            <a:pPr algn="l" indent="0" marL="0">
+              <a:lnSpc>
+                <a:spcPct val="102000"/>
+              </a:lnSpc>
+              <a:buNone/>
+            </a:pPr>
+            <a:r>
+              <a:rPr lang="en-US" sz="400" dirty="0">
+                <a:solidFill>
+                  <a:srgbClr val="202124"/>
+                </a:solidFill>
+                <a:latin typeface="Arial" pitchFamily="34" charset="0"/>
+                <a:ea typeface="Arial" pitchFamily="34" charset="-122"/>
+                <a:cs typeface="Arial" pitchFamily="34" charset="-120"/>
+              </a:rPr>
+              <a:t>Header stripping, OBO+DPoP KMS Sign &amp; Discovery Engine Catalog pruning</a:t>
+            </a:r>
+            <a:endParaRPr lang="en-US" sz="470" dirty="0"/>
+          </a:p>
+        </p:txBody>
+      </p:sp>
+      <p:sp>
+        <p:nvSpPr>
+          <p:cNvPr id="124" name="Shape 119"/>
+          <p:cNvSpPr/>
+          <p:nvPr/>
+        </p:nvSpPr>
+        <p:spPr>
+          <a:xfrm>
+            <a:off x="4641494" y="1955902"/>
+            <a:ext cx="1315822" cy="118872"/>
+          </a:xfrm>
+          <a:prstGeom prst="rect">
+            <a:avLst/>
+          </a:prstGeom>
+          <a:solidFill>
+            <a:srgbClr val="CEEAD6"/>
+          </a:solidFill>
+          <a:ln/>
+        </p:spPr>
+      </p:sp>
+      <p:sp>
+        <p:nvSpPr>
+          <p:cNvPr id="125" name="Text 120"/>
+          <p:cNvSpPr/>
+          <p:nvPr/>
+        </p:nvSpPr>
+        <p:spPr>
+          <a:xfrm>
+            <a:off x="4655210" y="1961388"/>
+            <a:ext cx="1315822" cy="210312"/>
+          </a:xfrm>
+          <a:prstGeom prst="rect">
+            <a:avLst/>
+          </a:prstGeom>
+          <a:noFill/>
+          <a:ln/>
+        </p:spPr>
+        <p:txBody>
+          <a:bodyPr wrap="square" lIns="0" tIns="0" rIns="0" bIns="0" rtlCol="0" anchor="t"/>
+          <a:lstStyle/>
+          <a:p>
+            <a:pPr algn="l" indent="0" marL="0">
+              <a:lnSpc>
+                <a:spcPct val="102000"/>
+              </a:lnSpc>
+              <a:buNone/>
+            </a:pPr>
+            <a:r>
+              <a:rPr lang="en-US" sz="430" b="1" dirty="0">
+                <a:solidFill>
+                  <a:srgbClr val="202124"/>
+                </a:solidFill>
+                <a:latin typeface="Arial" pitchFamily="34" charset="0"/>
+                <a:ea typeface="Arial" pitchFamily="34" charset="-122"/>
+                <a:cs typeface="Arial" pitchFamily="34" charset="-120"/>
+              </a:rPr>
+              <a:t>Hop 3 &amp; 5: Shared FinOps, Cache &amp; OTel Hub</a:t>
+            </a:r>
+            <a:endParaRPr lang="en-US" sz="430" dirty="0"/>
+          </a:p>
+        </p:txBody>
+      </p:sp>
+      <p:sp>
+        <p:nvSpPr>
+          <p:cNvPr id="126" name="Shape 121"/>
           <p:cNvSpPr/>
           <p:nvPr/>
         </p:nvSpPr>
@@ -21998,7 +22078,7 @@
       </p:sp>
       <p:pic>
         <p:nvPicPr>
-          <p:cNvPr id="123" name="Image 3" descr="preencoded.png">    </p:cNvPr>
+          <p:cNvPr id="127" name="Image 3" descr="preencoded.png">    </p:cNvPr>
           <p:cNvPicPr>
             <a:picLocks noChangeAspect="1"/>
           </p:cNvPicPr>
@@ -22022,7 +22102,7 @@
       </p:pic>
       <p:sp>
         <p:nvSpPr>
-          <p:cNvPr id="124" name="Text 118"/>
+          <p:cNvPr id="128" name="Text 122"/>
           <p:cNvSpPr/>
           <p:nvPr/>
         </p:nvSpPr>
@@ -22084,7 +22164,7 @@
       </p:sp>
       <p:sp>
         <p:nvSpPr>
-          <p:cNvPr id="125" name="Shape 119"/>
+          <p:cNvPr id="129" name="Shape 123"/>
           <p:cNvSpPr/>
           <p:nvPr/>
         </p:nvSpPr>
@@ -22111,7 +22191,7 @@
       </p:sp>
       <p:pic>
         <p:nvPicPr>
-          <p:cNvPr id="126" name="Image 4" descr="preencoded.png">    </p:cNvPr>
+          <p:cNvPr id="130" name="Image 4" descr="preencoded.png">    </p:cNvPr>
           <p:cNvPicPr>
             <a:picLocks noChangeAspect="1"/>
           </p:cNvPicPr>
@@ -22135,7 +22215,7 @@
       </p:pic>
       <p:sp>
         <p:nvSpPr>
-          <p:cNvPr id="127" name="Text 120"/>
+          <p:cNvPr id="131" name="Text 124"/>
           <p:cNvSpPr/>
           <p:nvPr/>
         </p:nvSpPr>
@@ -22197,7 +22277,7 @@
       </p:sp>
       <p:sp>
         <p:nvSpPr>
-          <p:cNvPr id="128" name="Shape 121"/>
+          <p:cNvPr id="132" name="Shape 125"/>
           <p:cNvSpPr/>
           <p:nvPr/>
         </p:nvSpPr>
@@ -22224,7 +22304,7 @@
       </p:sp>
       <p:pic>
         <p:nvPicPr>
-          <p:cNvPr id="129" name="Image 5" descr="preencoded.png">    </p:cNvPr>
+          <p:cNvPr id="133" name="Image 5" descr="preencoded.png">    </p:cNvPr>
           <p:cNvPicPr>
             <a:picLocks noChangeAspect="1"/>
           </p:cNvPicPr>
@@ -22248,7 +22328,7 @@
       </p:pic>
       <p:sp>
         <p:nvSpPr>
-          <p:cNvPr id="130" name="Text 122"/>
+          <p:cNvPr id="134" name="Text 126"/>
           <p:cNvSpPr/>
           <p:nvPr/>
         </p:nvSpPr>
@@ -22310,7 +22390,7 @@
       </p:sp>
       <p:sp>
         <p:nvSpPr>
-          <p:cNvPr id="131" name="Shape 123"/>
+          <p:cNvPr id="135" name="Shape 127"/>
           <p:cNvSpPr/>
           <p:nvPr/>
         </p:nvSpPr>
@@ -22337,7 +22417,7 @@
       </p:sp>
       <p:pic>
         <p:nvPicPr>
-          <p:cNvPr id="132" name="Image 6" descr="preencoded.png">    </p:cNvPr>
+          <p:cNvPr id="136" name="Image 6" descr="preencoded.png">    </p:cNvPr>
           <p:cNvPicPr>
             <a:picLocks noChangeAspect="1"/>
           </p:cNvPicPr>
@@ -22361,7 +22441,7 @@
       </p:pic>
       <p:sp>
         <p:nvSpPr>
-          <p:cNvPr id="133" name="Text 124"/>
+          <p:cNvPr id="137" name="Text 128"/>
           <p:cNvSpPr/>
           <p:nvPr/>
         </p:nvSpPr>
@@ -22423,7 +22503,7 @@
       </p:sp>
       <p:sp>
         <p:nvSpPr>
-          <p:cNvPr id="134" name="Shape 125"/>
+          <p:cNvPr id="138" name="Shape 129"/>
           <p:cNvSpPr/>
           <p:nvPr/>
         </p:nvSpPr>
@@ -22450,7 +22530,7 @@
       </p:sp>
       <p:pic>
         <p:nvPicPr>
-          <p:cNvPr id="135" name="Image 7" descr="preencoded.png">    </p:cNvPr>
+          <p:cNvPr id="139" name="Image 7" descr="preencoded.png">    </p:cNvPr>
           <p:cNvPicPr>
             <a:picLocks noChangeAspect="1"/>
           </p:cNvPicPr>
@@ -22474,7 +22554,7 @@
       </p:pic>
       <p:sp>
         <p:nvSpPr>
-          <p:cNvPr id="136" name="Text 126"/>
+          <p:cNvPr id="140" name="Text 130"/>
           <p:cNvSpPr/>
           <p:nvPr/>
         </p:nvSpPr>
@@ -22536,7 +22616,7 @@
       </p:sp>
       <p:sp>
         <p:nvSpPr>
-          <p:cNvPr id="137" name="Shape 127"/>
+          <p:cNvPr id="141" name="Shape 131"/>
           <p:cNvSpPr/>
           <p:nvPr/>
         </p:nvSpPr>
@@ -22563,7 +22643,7 @@
       </p:sp>
       <p:pic>
         <p:nvPicPr>
-          <p:cNvPr id="138" name="Image 8" descr="preencoded.png">    </p:cNvPr>
+          <p:cNvPr id="142" name="Image 8" descr="preencoded.png">    </p:cNvPr>
           <p:cNvPicPr>
             <a:picLocks noChangeAspect="1"/>
           </p:cNvPicPr>
@@ -22587,7 +22667,7 @@
       </p:pic>
       <p:sp>
         <p:nvSpPr>
-          <p:cNvPr id="139" name="Text 128"/>
+          <p:cNvPr id="143" name="Text 132"/>
           <p:cNvSpPr/>
           <p:nvPr/>
         </p:nvSpPr>
@@ -22649,7 +22729,7 @@
       </p:sp>
       <p:sp>
         <p:nvSpPr>
-          <p:cNvPr id="140" name="Shape 129"/>
+          <p:cNvPr id="144" name="Shape 133"/>
           <p:cNvSpPr/>
           <p:nvPr/>
         </p:nvSpPr>
@@ -22676,7 +22756,7 @@
       </p:sp>
       <p:pic>
         <p:nvPicPr>
-          <p:cNvPr id="141" name="Image 9" descr="preencoded.png">    </p:cNvPr>
+          <p:cNvPr id="145" name="Image 9" descr="preencoded.png">    </p:cNvPr>
           <p:cNvPicPr>
             <a:picLocks noChangeAspect="1"/>
           </p:cNvPicPr>
@@ -22700,7 +22780,7 @@
       </p:pic>
       <p:sp>
         <p:nvSpPr>
-          <p:cNvPr id="142" name="Text 130"/>
+          <p:cNvPr id="146" name="Text 134"/>
           <p:cNvSpPr/>
           <p:nvPr/>
         </p:nvSpPr>
@@ -22762,7 +22842,7 @@
       </p:sp>
       <p:sp>
         <p:nvSpPr>
-          <p:cNvPr id="143" name="Shape 131"/>
+          <p:cNvPr id="147" name="Shape 135"/>
           <p:cNvSpPr/>
           <p:nvPr/>
         </p:nvSpPr>
@@ -22789,7 +22869,7 @@
       </p:sp>
       <p:pic>
         <p:nvPicPr>
-          <p:cNvPr id="144" name="Image 10" descr="preencoded.png">    </p:cNvPr>
+          <p:cNvPr id="148" name="Image 10" descr="preencoded.png">    </p:cNvPr>
           <p:cNvPicPr>
             <a:picLocks noChangeAspect="1"/>
           </p:cNvPicPr>
@@ -22813,7 +22893,7 @@
       </p:pic>
       <p:sp>
         <p:nvSpPr>
-          <p:cNvPr id="145" name="Text 132"/>
+          <p:cNvPr id="149" name="Text 136"/>
           <p:cNvSpPr/>
           <p:nvPr/>
         </p:nvSpPr>
@@ -22875,7 +22955,7 @@
       </p:sp>
       <p:sp>
         <p:nvSpPr>
-          <p:cNvPr id="146" name="Shape 133"/>
+          <p:cNvPr id="150" name="Shape 137"/>
           <p:cNvSpPr/>
           <p:nvPr/>
         </p:nvSpPr>
@@ -22902,7 +22982,7 @@
       </p:sp>
       <p:pic>
         <p:nvPicPr>
-          <p:cNvPr id="147" name="Image 11" descr="preencoded.png">    </p:cNvPr>
+          <p:cNvPr id="151" name="Image 11" descr="preencoded.png">    </p:cNvPr>
           <p:cNvPicPr>
             <a:picLocks noChangeAspect="1"/>
           </p:cNvPicPr>
@@ -22926,7 +23006,7 @@
       </p:pic>
       <p:sp>
         <p:nvSpPr>
-          <p:cNvPr id="148" name="Text 134"/>
+          <p:cNvPr id="152" name="Text 138"/>
           <p:cNvSpPr/>
           <p:nvPr/>
         </p:nvSpPr>
@@ -22988,7 +23068,7 @@
       </p:sp>
       <p:sp>
         <p:nvSpPr>
-          <p:cNvPr id="149" name="Shape 135"/>
+          <p:cNvPr id="153" name="Shape 139"/>
           <p:cNvSpPr/>
           <p:nvPr/>
         </p:nvSpPr>
@@ -23015,7 +23095,7 @@
       </p:sp>
       <p:pic>
         <p:nvPicPr>
-          <p:cNvPr id="150" name="Image 12" descr="preencoded.png">    </p:cNvPr>
+          <p:cNvPr id="154" name="Image 12" descr="preencoded.png">    </p:cNvPr>
           <p:cNvPicPr>
             <a:picLocks noChangeAspect="1"/>
           </p:cNvPicPr>
@@ -23039,7 +23119,7 @@
       </p:pic>
       <p:sp>
         <p:nvSpPr>
-          <p:cNvPr id="151" name="Text 136"/>
+          <p:cNvPr id="155" name="Text 140"/>
           <p:cNvSpPr/>
           <p:nvPr/>
         </p:nvSpPr>
@@ -23101,7 +23181,7 @@
       </p:sp>
       <p:sp>
         <p:nvSpPr>
-          <p:cNvPr id="152" name="Shape 137"/>
+          <p:cNvPr id="156" name="Shape 141"/>
           <p:cNvSpPr/>
           <p:nvPr/>
         </p:nvSpPr>
@@ -23128,7 +23208,7 @@
       </p:sp>
       <p:pic>
         <p:nvPicPr>
-          <p:cNvPr id="153" name="Image 13" descr="preencoded.png">    </p:cNvPr>
+          <p:cNvPr id="157" name="Image 13" descr="preencoded.png">    </p:cNvPr>
           <p:cNvPicPr>
             <a:picLocks noChangeAspect="1"/>
           </p:cNvPicPr>
@@ -23152,7 +23232,7 @@
       </p:pic>
       <p:sp>
         <p:nvSpPr>
-          <p:cNvPr id="154" name="Text 138"/>
+          <p:cNvPr id="158" name="Text 142"/>
           <p:cNvSpPr/>
           <p:nvPr/>
         </p:nvSpPr>
@@ -23214,7 +23294,7 @@
       </p:sp>
       <p:sp>
         <p:nvSpPr>
-          <p:cNvPr id="155" name="Shape 139"/>
+          <p:cNvPr id="159" name="Shape 143"/>
           <p:cNvSpPr/>
           <p:nvPr/>
         </p:nvSpPr>
@@ -23241,7 +23321,7 @@
       </p:sp>
       <p:pic>
         <p:nvPicPr>
-          <p:cNvPr id="156" name="Image 14" descr="preencoded.png">    </p:cNvPr>
+          <p:cNvPr id="160" name="Image 14" descr="preencoded.png">    </p:cNvPr>
           <p:cNvPicPr>
             <a:picLocks noChangeAspect="1"/>
           </p:cNvPicPr>
@@ -23265,7 +23345,7 @@
       </p:pic>
       <p:sp>
         <p:nvSpPr>
-          <p:cNvPr id="157" name="Text 140"/>
+          <p:cNvPr id="161" name="Text 144"/>
           <p:cNvSpPr/>
           <p:nvPr/>
         </p:nvSpPr>
@@ -23327,7 +23407,7 @@
       </p:sp>
       <p:sp>
         <p:nvSpPr>
-          <p:cNvPr id="158" name="Shape 141"/>
+          <p:cNvPr id="162" name="Shape 145"/>
           <p:cNvSpPr/>
           <p:nvPr/>
         </p:nvSpPr>
@@ -23354,7 +23434,7 @@
       </p:sp>
       <p:pic>
         <p:nvPicPr>
-          <p:cNvPr id="159" name="Image 15" descr="preencoded.png">    </p:cNvPr>
+          <p:cNvPr id="163" name="Image 15" descr="preencoded.png">    </p:cNvPr>
           <p:cNvPicPr>
             <a:picLocks noChangeAspect="1"/>
           </p:cNvPicPr>
@@ -23378,7 +23458,7 @@
       </p:pic>
       <p:sp>
         <p:nvSpPr>
-          <p:cNvPr id="160" name="Text 142"/>
+          <p:cNvPr id="164" name="Text 146"/>
           <p:cNvSpPr/>
           <p:nvPr/>
         </p:nvSpPr>
@@ -23440,7 +23520,7 @@
       </p:sp>
       <p:sp>
         <p:nvSpPr>
-          <p:cNvPr id="161" name="Shape 143"/>
+          <p:cNvPr id="165" name="Shape 147"/>
           <p:cNvSpPr/>
           <p:nvPr/>
         </p:nvSpPr>
@@ -23467,7 +23547,7 @@
       </p:sp>
       <p:pic>
         <p:nvPicPr>
-          <p:cNvPr id="162" name="Image 16" descr="preencoded.png">    </p:cNvPr>
+          <p:cNvPr id="166" name="Image 16" descr="preencoded.png">    </p:cNvPr>
           <p:cNvPicPr>
             <a:picLocks noChangeAspect="1"/>
           </p:cNvPicPr>
@@ -23491,7 +23571,7 @@
       </p:pic>
       <p:sp>
         <p:nvSpPr>
-          <p:cNvPr id="163" name="Text 144"/>
+          <p:cNvPr id="167" name="Text 148"/>
           <p:cNvSpPr/>
           <p:nvPr/>
         </p:nvSpPr>
@@ -23553,7 +23633,7 @@
       </p:sp>
       <p:sp>
         <p:nvSpPr>
-          <p:cNvPr id="164" name="Shape 145"/>
+          <p:cNvPr id="168" name="Shape 149"/>
           <p:cNvSpPr/>
           <p:nvPr/>
         </p:nvSpPr>
@@ -23580,7 +23660,7 @@
       </p:sp>
       <p:pic>
         <p:nvPicPr>
-          <p:cNvPr id="165" name="Image 17" descr="preencoded.png">    </p:cNvPr>
+          <p:cNvPr id="169" name="Image 17" descr="preencoded.png">    </p:cNvPr>
           <p:cNvPicPr>
             <a:picLocks noChangeAspect="1"/>
           </p:cNvPicPr>
@@ -23604,7 +23684,7 @@
       </p:pic>
       <p:sp>
         <p:nvSpPr>
-          <p:cNvPr id="166" name="Text 146"/>
+          <p:cNvPr id="170" name="Text 150"/>
           <p:cNvSpPr/>
           <p:nvPr/>
         </p:nvSpPr>
@@ -23666,7 +23746,7 @@
       </p:sp>
       <p:sp>
         <p:nvSpPr>
-          <p:cNvPr id="167" name="Shape 147"/>
+          <p:cNvPr id="171" name="Shape 151"/>
           <p:cNvSpPr/>
           <p:nvPr/>
         </p:nvSpPr>
@@ -23693,7 +23773,7 @@
       </p:sp>
       <p:pic>
         <p:nvPicPr>
-          <p:cNvPr id="168" name="Image 18" descr="preencoded.png">    </p:cNvPr>
+          <p:cNvPr id="172" name="Image 18" descr="preencoded.png">    </p:cNvPr>
           <p:cNvPicPr>
             <a:picLocks noChangeAspect="1"/>
           </p:cNvPicPr>
@@ -23717,7 +23797,7 @@
       </p:pic>
       <p:sp>
         <p:nvSpPr>
-          <p:cNvPr id="169" name="Text 148"/>
+          <p:cNvPr id="173" name="Text 152"/>
           <p:cNvSpPr/>
           <p:nvPr/>
         </p:nvSpPr>
@@ -23779,7 +23859,7 @@
       </p:sp>
       <p:sp>
         <p:nvSpPr>
-          <p:cNvPr id="170" name="Shape 149"/>
+          <p:cNvPr id="174" name="Shape 153"/>
           <p:cNvSpPr/>
           <p:nvPr/>
         </p:nvSpPr>
@@ -23806,7 +23886,7 @@
       </p:sp>
       <p:pic>
         <p:nvPicPr>
-          <p:cNvPr id="171" name="Image 19" descr="preencoded.png">    </p:cNvPr>
+          <p:cNvPr id="175" name="Image 19" descr="preencoded.png">    </p:cNvPr>
           <p:cNvPicPr>
             <a:picLocks noChangeAspect="1"/>
           </p:cNvPicPr>
@@ -23830,7 +23910,7 @@
       </p:pic>
       <p:sp>
         <p:nvSpPr>
-          <p:cNvPr id="172" name="Text 150"/>
+          <p:cNvPr id="176" name="Text 154"/>
           <p:cNvSpPr/>
           <p:nvPr/>
         </p:nvSpPr>
@@ -23892,7 +23972,7 @@
       </p:sp>
       <p:sp>
         <p:nvSpPr>
-          <p:cNvPr id="173" name="Shape 151"/>
+          <p:cNvPr id="177" name="Shape 155"/>
           <p:cNvSpPr/>
           <p:nvPr/>
         </p:nvSpPr>
@@ -23919,7 +23999,7 @@
       </p:sp>
       <p:sp>
         <p:nvSpPr>
-          <p:cNvPr id="174" name="Text 152"/>
+          <p:cNvPr id="178" name="Text 156"/>
           <p:cNvSpPr/>
           <p:nvPr/>
         </p:nvSpPr>
@@ -23961,7 +24041,7 @@
       </p:sp>
       <p:sp>
         <p:nvSpPr>
-          <p:cNvPr id="175" name="Shape 153"/>
+          <p:cNvPr id="179" name="Shape 157"/>
           <p:cNvSpPr/>
           <p:nvPr/>
         </p:nvSpPr>
@@ -23988,7 +24068,7 @@
       </p:sp>
       <p:sp>
         <p:nvSpPr>
-          <p:cNvPr id="176" name="Text 154"/>
+          <p:cNvPr id="180" name="Text 158"/>
           <p:cNvSpPr/>
           <p:nvPr/>
         </p:nvSpPr>
@@ -24030,7 +24110,7 @@
       </p:sp>
       <p:sp>
         <p:nvSpPr>
-          <p:cNvPr id="177" name="Shape 155"/>
+          <p:cNvPr id="181" name="Shape 159"/>
           <p:cNvSpPr/>
           <p:nvPr/>
         </p:nvSpPr>
@@ -24057,7 +24137,7 @@
       </p:sp>
       <p:sp>
         <p:nvSpPr>
-          <p:cNvPr id="178" name="Text 156"/>
+          <p:cNvPr id="182" name="Text 160"/>
           <p:cNvSpPr/>
           <p:nvPr/>
         </p:nvSpPr>
@@ -24099,7 +24179,7 @@
       </p:sp>
       <p:sp>
         <p:nvSpPr>
-          <p:cNvPr id="179" name="Shape 157"/>
+          <p:cNvPr id="183" name="Shape 161"/>
           <p:cNvSpPr/>
           <p:nvPr/>
         </p:nvSpPr>
@@ -24126,7 +24206,7 @@
       </p:sp>
       <p:sp>
         <p:nvSpPr>
-          <p:cNvPr id="180" name="Text 158"/>
+          <p:cNvPr id="184" name="Text 162"/>
           <p:cNvSpPr/>
           <p:nvPr/>
         </p:nvSpPr>
@@ -24168,7 +24248,7 @@
       </p:sp>
       <p:sp>
         <p:nvSpPr>
-          <p:cNvPr id="181" name="Shape 159"/>
+          <p:cNvPr id="185" name="Shape 163"/>
           <p:cNvSpPr/>
           <p:nvPr/>
         </p:nvSpPr>
@@ -24195,7 +24275,7 @@
       </p:sp>
       <p:sp>
         <p:nvSpPr>
-          <p:cNvPr id="182" name="Text 160"/>
+          <p:cNvPr id="186" name="Text 164"/>
           <p:cNvSpPr/>
           <p:nvPr/>
         </p:nvSpPr>
@@ -24237,7 +24317,7 @@
       </p:sp>
       <p:sp>
         <p:nvSpPr>
-          <p:cNvPr id="183" name="Shape 161"/>
+          <p:cNvPr id="187" name="Shape 165"/>
           <p:cNvSpPr/>
           <p:nvPr/>
         </p:nvSpPr>
@@ -24264,7 +24344,7 @@
       </p:sp>
       <p:sp>
         <p:nvSpPr>
-          <p:cNvPr id="184" name="Text 162"/>
+          <p:cNvPr id="188" name="Text 166"/>
           <p:cNvSpPr/>
           <p:nvPr/>
         </p:nvSpPr>
@@ -24306,7 +24386,7 @@
       </p:sp>
       <p:sp>
         <p:nvSpPr>
-          <p:cNvPr id="185" name="Shape 163"/>
+          <p:cNvPr id="189" name="Shape 167"/>
           <p:cNvSpPr/>
           <p:nvPr/>
         </p:nvSpPr>
@@ -24331,7 +24411,7 @@
       </p:sp>
       <p:sp>
         <p:nvSpPr>
-          <p:cNvPr id="186" name="Text 164"/>
+          <p:cNvPr id="190" name="Text 168"/>
           <p:cNvSpPr/>
           <p:nvPr/>
         </p:nvSpPr>
@@ -24370,7 +24450,7 @@
       </p:sp>
       <p:sp>
         <p:nvSpPr>
-          <p:cNvPr id="187" name="Shape 165"/>
+          <p:cNvPr id="191" name="Shape 169"/>
           <p:cNvSpPr/>
           <p:nvPr/>
         </p:nvSpPr>
@@ -24395,7 +24475,7 @@
       </p:sp>
       <p:sp>
         <p:nvSpPr>
-          <p:cNvPr id="188" name="Text 166"/>
+          <p:cNvPr id="192" name="Text 170"/>
           <p:cNvSpPr/>
           <p:nvPr/>
         </p:nvSpPr>
@@ -24434,7 +24514,7 @@
       </p:sp>
       <p:sp>
         <p:nvSpPr>
-          <p:cNvPr id="189" name="Shape 167"/>
+          <p:cNvPr id="193" name="Shape 171"/>
           <p:cNvSpPr/>
           <p:nvPr/>
         </p:nvSpPr>
@@ -24459,7 +24539,7 @@
       </p:sp>
       <p:sp>
         <p:nvSpPr>
-          <p:cNvPr id="190" name="Text 168"/>
+          <p:cNvPr id="194" name="Text 172"/>
           <p:cNvSpPr/>
           <p:nvPr/>
         </p:nvSpPr>
@@ -24498,7 +24578,7 @@
       </p:sp>
       <p:sp>
         <p:nvSpPr>
-          <p:cNvPr id="191" name="Shape 169"/>
+          <p:cNvPr id="195" name="Shape 173"/>
           <p:cNvSpPr/>
           <p:nvPr/>
         </p:nvSpPr>
@@ -24523,7 +24603,7 @@
       </p:sp>
       <p:sp>
         <p:nvSpPr>
-          <p:cNvPr id="192" name="Text 170"/>
+          <p:cNvPr id="196" name="Text 174"/>
           <p:cNvSpPr/>
           <p:nvPr/>
         </p:nvSpPr>
@@ -24562,7 +24642,7 @@
       </p:sp>
       <p:sp>
         <p:nvSpPr>
-          <p:cNvPr id="193" name="Shape 171"/>
+          <p:cNvPr id="197" name="Shape 175"/>
           <p:cNvSpPr/>
           <p:nvPr/>
         </p:nvSpPr>
@@ -24587,7 +24667,7 @@
       </p:sp>
       <p:sp>
         <p:nvSpPr>
-          <p:cNvPr id="194" name="Text 172"/>
+          <p:cNvPr id="198" name="Text 176"/>
           <p:cNvSpPr/>
           <p:nvPr/>
         </p:nvSpPr>
@@ -24626,7 +24706,7 @@
       </p:sp>
       <p:sp>
         <p:nvSpPr>
-          <p:cNvPr id="195" name="Shape 173"/>
+          <p:cNvPr id="199" name="Shape 177"/>
           <p:cNvSpPr/>
           <p:nvPr/>
         </p:nvSpPr>
@@ -24651,7 +24731,7 @@
       </p:sp>
       <p:sp>
         <p:nvSpPr>
-          <p:cNvPr id="196" name="Text 174"/>
+          <p:cNvPr id="200" name="Text 178"/>
           <p:cNvSpPr/>
           <p:nvPr/>
         </p:nvSpPr>
@@ -24690,7 +24770,7 @@
       </p:sp>
       <p:sp>
         <p:nvSpPr>
-          <p:cNvPr id="197" name="Shape 175"/>
+          <p:cNvPr id="201" name="Shape 179"/>
           <p:cNvSpPr/>
           <p:nvPr/>
         </p:nvSpPr>
@@ -24715,7 +24795,7 @@
       </p:sp>
       <p:sp>
         <p:nvSpPr>
-          <p:cNvPr id="198" name="Text 176"/>
+          <p:cNvPr id="202" name="Text 180"/>
           <p:cNvSpPr/>
           <p:nvPr/>
         </p:nvSpPr>
@@ -24754,7 +24834,7 @@
       </p:sp>
       <p:sp>
         <p:nvSpPr>
-          <p:cNvPr id="199" name="Shape 177"/>
+          <p:cNvPr id="203" name="Shape 181"/>
           <p:cNvSpPr/>
           <p:nvPr/>
         </p:nvSpPr>
@@ -24779,7 +24859,7 @@
       </p:sp>
       <p:sp>
         <p:nvSpPr>
-          <p:cNvPr id="200" name="Text 178"/>
+          <p:cNvPr id="204" name="Text 182"/>
           <p:cNvSpPr/>
           <p:nvPr/>
         </p:nvSpPr>
@@ -24818,7 +24898,7 @@
       </p:sp>
       <p:sp>
         <p:nvSpPr>
-          <p:cNvPr id="201" name="Shape 179"/>
+          <p:cNvPr id="205" name="Shape 183"/>
           <p:cNvSpPr/>
           <p:nvPr/>
         </p:nvSpPr>
@@ -24843,7 +24923,7 @@
       </p:sp>
       <p:sp>
         <p:nvSpPr>
-          <p:cNvPr id="202" name="Text 180"/>
+          <p:cNvPr id="206" name="Text 184"/>
           <p:cNvSpPr/>
           <p:nvPr/>
         </p:nvSpPr>
@@ -24882,7 +24962,7 @@
       </p:sp>
       <p:sp>
         <p:nvSpPr>
-          <p:cNvPr id="203" name="Text 181"/>
+          <p:cNvPr id="207" name="Text 185"/>
           <p:cNvSpPr/>
           <p:nvPr/>
         </p:nvSpPr>
@@ -24944,7 +25024,7 @@
       </p:sp>
       <p:sp>
         <p:nvSpPr>
-          <p:cNvPr id="204" name="Text 182"/>
+          <p:cNvPr id="208" name="Text 186"/>
           <p:cNvSpPr/>
           <p:nvPr/>
         </p:nvSpPr>
@@ -24986,18 +25066,18 @@
       </p:sp>
       <p:sp>
         <p:nvSpPr>
-          <p:cNvPr id="205" name="Shape 183"/>
-          <p:cNvSpPr/>
-          <p:nvPr/>
-        </p:nvSpPr>
-        <p:spPr>
-          <a:xfrm>
-            <a:off x="3770071" y="3561588"/>
-            <a:ext cx="1243584" cy="138989"/>
+          <p:cNvPr id="209" name="Shape 187"/>
+          <p:cNvSpPr/>
+          <p:nvPr/>
+        </p:nvSpPr>
+        <p:spPr>
+          <a:xfrm>
+            <a:off x="3770071" y="3581705"/>
+            <a:ext cx="1243584" cy="98755"/>
           </a:xfrm>
           <a:prstGeom prst="roundRect">
             <a:avLst>
-              <a:gd name="adj" fmla="val 32895"/>
+              <a:gd name="adj" fmla="val 41667"/>
             </a:avLst>
           </a:prstGeom>
           <a:solidFill>
@@ -25013,14 +25093,14 @@
       </p:sp>
       <p:sp>
         <p:nvSpPr>
-          <p:cNvPr id="206" name="Text 184"/>
-          <p:cNvSpPr/>
-          <p:nvPr/>
-        </p:nvSpPr>
-        <p:spPr>
-          <a:xfrm>
-            <a:off x="3790188" y="3570732"/>
-            <a:ext cx="1203350" cy="120701"/>
+          <p:cNvPr id="210" name="Text 188"/>
+          <p:cNvSpPr/>
+          <p:nvPr/>
+        </p:nvSpPr>
+        <p:spPr>
+          <a:xfrm>
+            <a:off x="3788359" y="3587191"/>
+            <a:ext cx="1207008" cy="87782"/>
           </a:xfrm>
           <a:prstGeom prst="rect">
             <a:avLst/>
@@ -25034,12 +25114,12 @@
           <a:p>
             <a:pPr algn="ctr" indent="0" marL="0">
               <a:lnSpc>
-                <a:spcPct val="102000"/>
+                <a:spcPct val="100000"/>
               </a:lnSpc>
               <a:buNone/>
             </a:pPr>
             <a:r>
-              <a:rPr lang="en-US" sz="410" b="1" dirty="0">
+              <a:rPr lang="en-US" sz="385" b="1" dirty="0">
                 <a:solidFill>
                   <a:srgbClr val="202124"/>
                 </a:solidFill>
@@ -25049,24 +25129,24 @@
               </a:rPr>
               <a:t>Cache hits • RPM • per-tenant span cost → BigQuery</a:t>
             </a:r>
-            <a:endParaRPr lang="en-US" sz="410" dirty="0"/>
-          </a:p>
-        </p:txBody>
-      </p:sp>
-      <p:sp>
-        <p:nvSpPr>
-          <p:cNvPr id="207" name="Shape 185"/>
-          <p:cNvSpPr/>
-          <p:nvPr/>
-        </p:nvSpPr>
-        <p:spPr>
-          <a:xfrm>
-            <a:off x="2844698" y="3362249"/>
-            <a:ext cx="738835" cy="208483"/>
+            <a:endParaRPr lang="en-US" sz="385" dirty="0"/>
+          </a:p>
+        </p:txBody>
+      </p:sp>
+      <p:sp>
+        <p:nvSpPr>
+          <p:cNvPr id="211" name="Shape 189"/>
+          <p:cNvSpPr/>
+          <p:nvPr/>
+        </p:nvSpPr>
+        <p:spPr>
+          <a:xfrm>
+            <a:off x="2844698" y="3397910"/>
+            <a:ext cx="736092" cy="137160"/>
           </a:xfrm>
           <a:prstGeom prst="roundRect">
             <a:avLst>
-              <a:gd name="adj" fmla="val 21930"/>
+              <a:gd name="adj" fmla="val 30000"/>
             </a:avLst>
           </a:prstGeom>
           <a:solidFill>
@@ -25082,14 +25162,14 @@
       </p:sp>
       <p:sp>
         <p:nvSpPr>
-          <p:cNvPr id="208" name="Text 186"/>
-          <p:cNvSpPr/>
-          <p:nvPr/>
-        </p:nvSpPr>
-        <p:spPr>
-          <a:xfrm>
-            <a:off x="2864815" y="3371393"/>
-            <a:ext cx="698602" cy="190195"/>
+          <p:cNvPr id="212" name="Text 190"/>
+          <p:cNvSpPr/>
+          <p:nvPr/>
+        </p:nvSpPr>
+        <p:spPr>
+          <a:xfrm>
+            <a:off x="2862986" y="3403397"/>
+            <a:ext cx="699516" cy="126187"/>
           </a:xfrm>
           <a:prstGeom prst="rect">
             <a:avLst/>
@@ -25103,12 +25183,12 @@
           <a:p>
             <a:pPr algn="ctr" indent="0" marL="0">
               <a:lnSpc>
-                <a:spcPct val="102000"/>
+                <a:spcPct val="100000"/>
               </a:lnSpc>
               <a:buNone/>
             </a:pPr>
             <a:r>
-              <a:rPr lang="en-US" sz="410" b="1" dirty="0">
+              <a:rPr lang="en-US" sz="385" b="1" dirty="0">
                 <a:solidFill>
                   <a:srgbClr val="202124"/>
                 </a:solidFill>
@@ -25118,17 +25198,17 @@
               </a:rPr>
               <a:t>Allocate gVisor sandbox</a:t>
             </a:r>
-            <a:endParaRPr lang="en-US" sz="410" dirty="0"/>
+            <a:endParaRPr lang="en-US" sz="385" dirty="0"/>
           </a:p>
           <a:p>
             <a:pPr algn="ctr" indent="0" marL="0">
               <a:lnSpc>
-                <a:spcPct val="102000"/>
+                <a:spcPct val="100000"/>
               </a:lnSpc>
               <a:buNone/>
             </a:pPr>
             <a:r>
-              <a:rPr lang="en-US" sz="375" dirty="0">
+              <a:rPr lang="en-US" sz="350" dirty="0">
                 <a:solidFill>
                   <a:srgbClr val="202124"/>
                 </a:solidFill>
@@ -25138,24 +25218,24 @@
               </a:rPr>
               <a:t>+ Valkey quota check</a:t>
             </a:r>
-            <a:endParaRPr lang="en-US" sz="410" dirty="0"/>
-          </a:p>
-        </p:txBody>
-      </p:sp>
-      <p:sp>
-        <p:nvSpPr>
-          <p:cNvPr id="209" name="Shape 187"/>
-          <p:cNvSpPr/>
-          <p:nvPr/>
-        </p:nvSpPr>
-        <p:spPr>
-          <a:xfrm>
-            <a:off x="1757477" y="4459529"/>
-            <a:ext cx="708660" cy="208483"/>
+            <a:endParaRPr lang="en-US" sz="385" dirty="0"/>
+          </a:p>
+        </p:txBody>
+      </p:sp>
+      <p:sp>
+        <p:nvSpPr>
+          <p:cNvPr id="213" name="Shape 191"/>
+          <p:cNvSpPr/>
+          <p:nvPr/>
+        </p:nvSpPr>
+        <p:spPr>
+          <a:xfrm>
+            <a:off x="1757477" y="4551883"/>
+            <a:ext cx="686714" cy="133502"/>
           </a:xfrm>
           <a:prstGeom prst="roundRect">
             <a:avLst>
-              <a:gd name="adj" fmla="val 21930"/>
+              <a:gd name="adj" fmla="val 30822"/>
             </a:avLst>
           </a:prstGeom>
           <a:solidFill>
@@ -25171,14 +25251,14 @@
       </p:sp>
       <p:sp>
         <p:nvSpPr>
-          <p:cNvPr id="210" name="Text 188"/>
-          <p:cNvSpPr/>
-          <p:nvPr/>
-        </p:nvSpPr>
-        <p:spPr>
-          <a:xfrm>
-            <a:off x="1777594" y="4468673"/>
-            <a:ext cx="668426" cy="190195"/>
+          <p:cNvPr id="214" name="Text 192"/>
+          <p:cNvSpPr/>
+          <p:nvPr/>
+        </p:nvSpPr>
+        <p:spPr>
+          <a:xfrm>
+            <a:off x="1775765" y="4557370"/>
+            <a:ext cx="650138" cy="122530"/>
           </a:xfrm>
           <a:prstGeom prst="rect">
             <a:avLst/>
@@ -25192,12 +25272,12 @@
           <a:p>
             <a:pPr algn="ctr" indent="0" marL="0">
               <a:lnSpc>
-                <a:spcPct val="102000"/>
+                <a:spcPct val="100000"/>
               </a:lnSpc>
               <a:buNone/>
             </a:pPr>
             <a:r>
-              <a:rPr lang="en-US" sz="410" b="1" dirty="0">
+              <a:rPr lang="en-US" sz="385" b="1" dirty="0">
                 <a:solidFill>
                   <a:srgbClr val="202124"/>
                 </a:solidFill>
@@ -25207,17 +25287,17 @@
               </a:rPr>
               <a:t>Screen prompt with</a:t>
             </a:r>
-            <a:endParaRPr lang="en-US" sz="410" dirty="0"/>
+            <a:endParaRPr lang="en-US" sz="385" dirty="0"/>
           </a:p>
           <a:p>
             <a:pPr algn="ctr" indent="0" marL="0">
               <a:lnSpc>
-                <a:spcPct val="102000"/>
+                <a:spcPct val="100000"/>
               </a:lnSpc>
               <a:buNone/>
             </a:pPr>
             <a:r>
-              <a:rPr lang="en-US" sz="375" dirty="0">
+              <a:rPr lang="en-US" sz="350" dirty="0">
                 <a:solidFill>
                   <a:srgbClr val="202124"/>
                 </a:solidFill>
@@ -25227,24 +25307,24 @@
               </a:rPr>
               <a:t>tenant's Armor template</a:t>
             </a:r>
-            <a:endParaRPr lang="en-US" sz="410" dirty="0"/>
-          </a:p>
-        </p:txBody>
-      </p:sp>
-      <p:sp>
-        <p:nvSpPr>
-          <p:cNvPr id="211" name="Shape 189"/>
-          <p:cNvSpPr/>
-          <p:nvPr/>
-        </p:nvSpPr>
-        <p:spPr>
-          <a:xfrm>
-            <a:off x="1757477" y="5018227"/>
-            <a:ext cx="672084" cy="208483"/>
+            <a:endParaRPr lang="en-US" sz="385" dirty="0"/>
+          </a:p>
+        </p:txBody>
+      </p:sp>
+      <p:sp>
+        <p:nvSpPr>
+          <p:cNvPr id="215" name="Shape 193"/>
+          <p:cNvSpPr/>
+          <p:nvPr/>
+        </p:nvSpPr>
+        <p:spPr>
+          <a:xfrm>
+            <a:off x="1757477" y="5055718"/>
+            <a:ext cx="632765" cy="133502"/>
           </a:xfrm>
           <a:prstGeom prst="roundRect">
             <a:avLst>
-              <a:gd name="adj" fmla="val 21930"/>
+              <a:gd name="adj" fmla="val 30822"/>
             </a:avLst>
           </a:prstGeom>
           <a:solidFill>
@@ -25260,14 +25340,14 @@
       </p:sp>
       <p:sp>
         <p:nvSpPr>
-          <p:cNvPr id="212" name="Text 190"/>
-          <p:cNvSpPr/>
-          <p:nvPr/>
-        </p:nvSpPr>
-        <p:spPr>
-          <a:xfrm>
-            <a:off x="1777594" y="5027371"/>
-            <a:ext cx="631850" cy="190195"/>
+          <p:cNvPr id="216" name="Text 194"/>
+          <p:cNvSpPr/>
+          <p:nvPr/>
+        </p:nvSpPr>
+        <p:spPr>
+          <a:xfrm>
+            <a:off x="1775765" y="5061204"/>
+            <a:ext cx="596189" cy="122530"/>
           </a:xfrm>
           <a:prstGeom prst="rect">
             <a:avLst/>
@@ -25281,12 +25361,12 @@
           <a:p>
             <a:pPr algn="ctr" indent="0" marL="0">
               <a:lnSpc>
-                <a:spcPct val="102000"/>
+                <a:spcPct val="100000"/>
               </a:lnSpc>
               <a:buNone/>
             </a:pPr>
             <a:r>
-              <a:rPr lang="en-US" sz="410" b="1" dirty="0">
+              <a:rPr lang="en-US" sz="385" b="1" dirty="0">
                 <a:solidFill>
                   <a:srgbClr val="202124"/>
                 </a:solidFill>
@@ -25296,17 +25376,17 @@
               </a:rPr>
               <a:t>90% cached prefix +</a:t>
             </a:r>
-            <a:endParaRPr lang="en-US" sz="410" dirty="0"/>
+            <a:endParaRPr lang="en-US" sz="385" dirty="0"/>
           </a:p>
           <a:p>
             <a:pPr algn="ctr" indent="0" marL="0">
               <a:lnSpc>
-                <a:spcPct val="102000"/>
+                <a:spcPct val="100000"/>
               </a:lnSpc>
               <a:buNone/>
             </a:pPr>
             <a:r>
-              <a:rPr lang="en-US" sz="375" dirty="0">
+              <a:rPr lang="en-US" sz="350" dirty="0">
                 <a:solidFill>
                   <a:srgbClr val="202124"/>
                 </a:solidFill>
@@ -25316,24 +25396,24 @@
               </a:rPr>
               <a:t>namespaced memory</a:t>
             </a:r>
-            <a:endParaRPr lang="en-US" sz="410" dirty="0"/>
-          </a:p>
-        </p:txBody>
-      </p:sp>
-      <p:sp>
-        <p:nvSpPr>
-          <p:cNvPr id="213" name="Shape 191"/>
-          <p:cNvSpPr/>
-          <p:nvPr/>
-        </p:nvSpPr>
-        <p:spPr>
-          <a:xfrm>
-            <a:off x="2548433" y="2871216"/>
-            <a:ext cx="507492" cy="208483"/>
+            <a:endParaRPr lang="en-US" sz="385" dirty="0"/>
+          </a:p>
+        </p:txBody>
+      </p:sp>
+      <p:sp>
+        <p:nvSpPr>
+          <p:cNvPr id="217" name="Shape 195"/>
+          <p:cNvSpPr/>
+          <p:nvPr/>
+        </p:nvSpPr>
+        <p:spPr>
+          <a:xfrm>
+            <a:off x="2563978" y="2908706"/>
+            <a:ext cx="475488" cy="133502"/>
           </a:xfrm>
           <a:prstGeom prst="roundRect">
             <a:avLst>
-              <a:gd name="adj" fmla="val 21930"/>
+              <a:gd name="adj" fmla="val 30822"/>
             </a:avLst>
           </a:prstGeom>
           <a:solidFill>
@@ -25349,14 +25429,14 @@
       </p:sp>
       <p:sp>
         <p:nvSpPr>
-          <p:cNvPr id="214" name="Text 192"/>
-          <p:cNvSpPr/>
-          <p:nvPr/>
-        </p:nvSpPr>
-        <p:spPr>
-          <a:xfrm>
-            <a:off x="2568550" y="2880360"/>
-            <a:ext cx="467258" cy="190195"/>
+          <p:cNvPr id="218" name="Text 196"/>
+          <p:cNvSpPr/>
+          <p:nvPr/>
+        </p:nvSpPr>
+        <p:spPr>
+          <a:xfrm>
+            <a:off x="2582266" y="2914193"/>
+            <a:ext cx="438912" cy="122530"/>
           </a:xfrm>
           <a:prstGeom prst="rect">
             <a:avLst/>
@@ -25370,12 +25450,12 @@
           <a:p>
             <a:pPr algn="ctr" indent="0" marL="0">
               <a:lnSpc>
-                <a:spcPct val="102000"/>
+                <a:spcPct val="100000"/>
               </a:lnSpc>
               <a:buNone/>
             </a:pPr>
             <a:r>
-              <a:rPr lang="en-US" sz="410" b="1" dirty="0">
+              <a:rPr lang="en-US" sz="385" b="1" dirty="0">
                 <a:solidFill>
                   <a:srgbClr val="202124"/>
                 </a:solidFill>
@@ -25385,17 +25465,17 @@
               </a:rPr>
               <a:t>Mint OBO +</a:t>
             </a:r>
-            <a:endParaRPr lang="en-US" sz="410" dirty="0"/>
+            <a:endParaRPr lang="en-US" sz="385" dirty="0"/>
           </a:p>
           <a:p>
             <a:pPr algn="ctr" indent="0" marL="0">
               <a:lnSpc>
-                <a:spcPct val="102000"/>
+                <a:spcPct val="100000"/>
               </a:lnSpc>
               <a:buNone/>
             </a:pPr>
             <a:r>
-              <a:rPr lang="en-US" sz="375" dirty="0">
+              <a:rPr lang="en-US" sz="350" dirty="0">
                 <a:solidFill>
                   <a:srgbClr val="202124"/>
                 </a:solidFill>
@@ -25405,24 +25485,24 @@
               </a:rPr>
               <a:t>KMS P-256 sig</a:t>
             </a:r>
-            <a:endParaRPr lang="en-US" sz="410" dirty="0"/>
-          </a:p>
-        </p:txBody>
-      </p:sp>
-      <p:sp>
-        <p:nvSpPr>
-          <p:cNvPr id="215" name="Shape 193"/>
-          <p:cNvSpPr/>
-          <p:nvPr/>
-        </p:nvSpPr>
-        <p:spPr>
-          <a:xfrm>
-            <a:off x="5383073" y="3531413"/>
-            <a:ext cx="653796" cy="208483"/>
+            <a:endParaRPr lang="en-US" sz="385" dirty="0"/>
+          </a:p>
+        </p:txBody>
+      </p:sp>
+      <p:sp>
+        <p:nvSpPr>
+          <p:cNvPr id="219" name="Shape 197"/>
+          <p:cNvSpPr/>
+          <p:nvPr/>
+        </p:nvSpPr>
+        <p:spPr>
+          <a:xfrm>
+            <a:off x="5383073" y="3568903"/>
+            <a:ext cx="619963" cy="133502"/>
           </a:xfrm>
           <a:prstGeom prst="roundRect">
             <a:avLst>
-              <a:gd name="adj" fmla="val 21930"/>
+              <a:gd name="adj" fmla="val 30822"/>
             </a:avLst>
           </a:prstGeom>
           <a:solidFill>
@@ -25438,14 +25518,14 @@
       </p:sp>
       <p:sp>
         <p:nvSpPr>
-          <p:cNvPr id="216" name="Text 194"/>
-          <p:cNvSpPr/>
-          <p:nvPr/>
-        </p:nvSpPr>
-        <p:spPr>
-          <a:xfrm>
-            <a:off x="5403190" y="3540557"/>
-            <a:ext cx="613562" cy="190195"/>
+          <p:cNvPr id="220" name="Text 198"/>
+          <p:cNvSpPr/>
+          <p:nvPr/>
+        </p:nvSpPr>
+        <p:spPr>
+          <a:xfrm>
+            <a:off x="5401361" y="3574390"/>
+            <a:ext cx="583387" cy="122530"/>
           </a:xfrm>
           <a:prstGeom prst="rect">
             <a:avLst/>
@@ -25459,12 +25539,12 @@
           <a:p>
             <a:pPr algn="ctr" indent="0" marL="0">
               <a:lnSpc>
-                <a:spcPct val="102000"/>
+                <a:spcPct val="100000"/>
               </a:lnSpc>
               <a:buNone/>
             </a:pPr>
             <a:r>
-              <a:rPr lang="en-US" sz="410" b="1" dirty="0">
+              <a:rPr lang="en-US" sz="385" b="1" dirty="0">
                 <a:solidFill>
                   <a:srgbClr val="202124"/>
                 </a:solidFill>
@@ -25474,17 +25554,17 @@
               </a:rPr>
               <a:t>SDP-redacted response</a:t>
             </a:r>
-            <a:endParaRPr lang="en-US" sz="410" dirty="0"/>
+            <a:endParaRPr lang="en-US" sz="385" dirty="0"/>
           </a:p>
           <a:p>
             <a:pPr algn="ctr" indent="0" marL="0">
               <a:lnSpc>
-                <a:spcPct val="102000"/>
+                <a:spcPct val="100000"/>
               </a:lnSpc>
               <a:buNone/>
             </a:pPr>
             <a:r>
-              <a:rPr lang="en-US" sz="375" dirty="0">
+              <a:rPr lang="en-US" sz="350" dirty="0">
                 <a:solidFill>
                   <a:srgbClr val="202124"/>
                 </a:solidFill>
@@ -25494,24 +25574,24 @@
               </a:rPr>
               <a:t>+ per-turn OTel span</a:t>
             </a:r>
-            <a:endParaRPr lang="en-US" sz="410" dirty="0"/>
-          </a:p>
-        </p:txBody>
-      </p:sp>
-      <p:sp>
-        <p:nvSpPr>
-          <p:cNvPr id="217" name="Shape 195"/>
-          <p:cNvSpPr/>
-          <p:nvPr/>
-        </p:nvSpPr>
-        <p:spPr>
-          <a:xfrm>
-            <a:off x="2443277" y="2080260"/>
-            <a:ext cx="480060" cy="208483"/>
+            <a:endParaRPr lang="en-US" sz="385" dirty="0"/>
+          </a:p>
+        </p:txBody>
+      </p:sp>
+      <p:sp>
+        <p:nvSpPr>
+          <p:cNvPr id="221" name="Shape 199"/>
+          <p:cNvSpPr/>
+          <p:nvPr/>
+        </p:nvSpPr>
+        <p:spPr>
+          <a:xfrm>
+            <a:off x="2458822" y="2117750"/>
+            <a:ext cx="449885" cy="133502"/>
           </a:xfrm>
           <a:prstGeom prst="roundRect">
             <a:avLst>
-              <a:gd name="adj" fmla="val 21930"/>
+              <a:gd name="adj" fmla="val 30822"/>
             </a:avLst>
           </a:prstGeom>
           <a:solidFill>
@@ -25527,14 +25607,14 @@
       </p:sp>
       <p:sp>
         <p:nvSpPr>
-          <p:cNvPr id="218" name="Text 196"/>
-          <p:cNvSpPr/>
-          <p:nvPr/>
-        </p:nvSpPr>
-        <p:spPr>
-          <a:xfrm>
-            <a:off x="2463394" y="2089404"/>
-            <a:ext cx="439826" cy="190195"/>
+          <p:cNvPr id="222" name="Text 200"/>
+          <p:cNvSpPr/>
+          <p:nvPr/>
+        </p:nvSpPr>
+        <p:spPr>
+          <a:xfrm>
+            <a:off x="2477110" y="2123237"/>
+            <a:ext cx="413309" cy="122530"/>
           </a:xfrm>
           <a:prstGeom prst="rect">
             <a:avLst/>
@@ -25548,12 +25628,12 @@
           <a:p>
             <a:pPr algn="ctr" indent="0" marL="0">
               <a:lnSpc>
-                <a:spcPct val="102000"/>
+                <a:spcPct val="100000"/>
               </a:lnSpc>
               <a:buNone/>
             </a:pPr>
             <a:r>
-              <a:rPr lang="en-US" sz="410" b="1" dirty="0">
+              <a:rPr lang="en-US" sz="385" b="1" dirty="0">
                 <a:solidFill>
                   <a:srgbClr val="202124"/>
                 </a:solidFill>
@@ -25563,17 +25643,17 @@
               </a:rPr>
               <a:t>Strip header</a:t>
             </a:r>
-            <a:endParaRPr lang="en-US" sz="410" dirty="0"/>
+            <a:endParaRPr lang="en-US" sz="385" dirty="0"/>
           </a:p>
           <a:p>
             <a:pPr algn="ctr" indent="0" marL="0">
               <a:lnSpc>
-                <a:spcPct val="102000"/>
+                <a:spcPct val="100000"/>
               </a:lnSpc>
               <a:buNone/>
             </a:pPr>
             <a:r>
-              <a:rPr lang="en-US" sz="375" dirty="0">
+              <a:rPr lang="en-US" sz="350" dirty="0">
                 <a:solidFill>
                   <a:srgbClr val="202124"/>
                 </a:solidFill>
@@ -25583,24 +25663,24 @@
               </a:rPr>
               <a:t>X-Tenant-ID</a:t>
             </a:r>
-            <a:endParaRPr lang="en-US" sz="410" dirty="0"/>
-          </a:p>
-        </p:txBody>
-      </p:sp>
-      <p:sp>
-        <p:nvSpPr>
-          <p:cNvPr id="219" name="Shape 197"/>
-          <p:cNvSpPr/>
-          <p:nvPr/>
-        </p:nvSpPr>
-        <p:spPr>
-          <a:xfrm>
-            <a:off x="2443277" y="2625242"/>
-            <a:ext cx="480060" cy="208483"/>
+            <a:endParaRPr lang="en-US" sz="385" dirty="0"/>
+          </a:p>
+        </p:txBody>
+      </p:sp>
+      <p:sp>
+        <p:nvSpPr>
+          <p:cNvPr id="223" name="Shape 201"/>
+          <p:cNvSpPr/>
+          <p:nvPr/>
+        </p:nvSpPr>
+        <p:spPr>
+          <a:xfrm>
+            <a:off x="2458822" y="2717597"/>
+            <a:ext cx="449885" cy="133502"/>
           </a:xfrm>
           <a:prstGeom prst="roundRect">
             <a:avLst>
-              <a:gd name="adj" fmla="val 21930"/>
+              <a:gd name="adj" fmla="val 30822"/>
             </a:avLst>
           </a:prstGeom>
           <a:solidFill>
@@ -25616,14 +25696,14 @@
       </p:sp>
       <p:sp>
         <p:nvSpPr>
-          <p:cNvPr id="220" name="Text 198"/>
-          <p:cNvSpPr/>
-          <p:nvPr/>
-        </p:nvSpPr>
-        <p:spPr>
-          <a:xfrm>
-            <a:off x="2463394" y="2634386"/>
-            <a:ext cx="439826" cy="190195"/>
+          <p:cNvPr id="224" name="Text 202"/>
+          <p:cNvSpPr/>
+          <p:nvPr/>
+        </p:nvSpPr>
+        <p:spPr>
+          <a:xfrm>
+            <a:off x="2477110" y="2723083"/>
+            <a:ext cx="413309" cy="122530"/>
           </a:xfrm>
           <a:prstGeom prst="rect">
             <a:avLst/>
@@ -25637,12 +25717,12 @@
           <a:p>
             <a:pPr algn="ctr" indent="0" marL="0">
               <a:lnSpc>
-                <a:spcPct val="102000"/>
+                <a:spcPct val="100000"/>
               </a:lnSpc>
               <a:buNone/>
             </a:pPr>
             <a:r>
-              <a:rPr lang="en-US" sz="410" b="1" dirty="0">
+              <a:rPr lang="en-US" sz="385" b="1" dirty="0">
                 <a:solidFill>
                   <a:srgbClr val="202124"/>
                 </a:solidFill>
@@ -25652,17 +25732,17 @@
               </a:rPr>
               <a:t>Filter Agent</a:t>
             </a:r>
-            <a:endParaRPr lang="en-US" sz="410" dirty="0"/>
+            <a:endParaRPr lang="en-US" sz="385" dirty="0"/>
           </a:p>
           <a:p>
             <a:pPr algn="ctr" indent="0" marL="0">
               <a:lnSpc>
-                <a:spcPct val="102000"/>
+                <a:spcPct val="100000"/>
               </a:lnSpc>
               <a:buNone/>
             </a:pPr>
             <a:r>
-              <a:rPr lang="en-US" sz="375" dirty="0">
+              <a:rPr lang="en-US" sz="350" dirty="0">
                 <a:solidFill>
                   <a:srgbClr val="202124"/>
                 </a:solidFill>
@@ -25672,24 +25752,24 @@
               </a:rPr>
               <a:t>Catalog</a:t>
             </a:r>
-            <a:endParaRPr lang="en-US" sz="410" dirty="0"/>
-          </a:p>
-        </p:txBody>
-      </p:sp>
-      <p:sp>
-        <p:nvSpPr>
-          <p:cNvPr id="221" name="Shape 199"/>
-          <p:cNvSpPr/>
-          <p:nvPr/>
-        </p:nvSpPr>
-        <p:spPr>
-          <a:xfrm>
-            <a:off x="5443423" y="5006340"/>
-            <a:ext cx="452628" cy="138989"/>
+            <a:endParaRPr lang="en-US" sz="385" dirty="0"/>
+          </a:p>
+        </p:txBody>
+      </p:sp>
+      <p:sp>
+        <p:nvSpPr>
+          <p:cNvPr id="225" name="Shape 203"/>
+          <p:cNvSpPr/>
+          <p:nvPr/>
+        </p:nvSpPr>
+        <p:spPr>
+          <a:xfrm>
+            <a:off x="5443423" y="5081321"/>
+            <a:ext cx="424282" cy="98755"/>
           </a:xfrm>
           <a:prstGeom prst="roundRect">
             <a:avLst>
-              <a:gd name="adj" fmla="val 32895"/>
+              <a:gd name="adj" fmla="val 41667"/>
             </a:avLst>
           </a:prstGeom>
           <a:solidFill>
@@ -25705,14 +25785,14 @@
       </p:sp>
       <p:sp>
         <p:nvSpPr>
-          <p:cNvPr id="222" name="Text 200"/>
-          <p:cNvSpPr/>
-          <p:nvPr/>
-        </p:nvSpPr>
-        <p:spPr>
-          <a:xfrm>
-            <a:off x="5463540" y="5015484"/>
-            <a:ext cx="412394" cy="120701"/>
+          <p:cNvPr id="226" name="Text 204"/>
+          <p:cNvSpPr/>
+          <p:nvPr/>
+        </p:nvSpPr>
+        <p:spPr>
+          <a:xfrm>
+            <a:off x="5461711" y="5086807"/>
+            <a:ext cx="387706" cy="87782"/>
           </a:xfrm>
           <a:prstGeom prst="rect">
             <a:avLst/>
@@ -25726,12 +25806,12 @@
           <a:p>
             <a:pPr algn="ctr" indent="0" marL="0">
               <a:lnSpc>
-                <a:spcPct val="102000"/>
+                <a:spcPct val="100000"/>
               </a:lnSpc>
               <a:buNone/>
             </a:pPr>
             <a:r>
-              <a:rPr lang="en-US" sz="410" b="1" dirty="0">
+              <a:rPr lang="en-US" sz="385" b="1" dirty="0">
                 <a:solidFill>
                   <a:srgbClr val="202124"/>
                 </a:solidFill>
@@ -25741,24 +25821,24 @@
               </a:rPr>
               <a:t>3LO consent</a:t>
             </a:r>
-            <a:endParaRPr lang="en-US" sz="410" dirty="0"/>
-          </a:p>
-        </p:txBody>
-      </p:sp>
-      <p:sp>
-        <p:nvSpPr>
-          <p:cNvPr id="223" name="Shape 201"/>
-          <p:cNvSpPr/>
-          <p:nvPr/>
-        </p:nvSpPr>
-        <p:spPr>
-          <a:xfrm>
-            <a:off x="3888029" y="1144829"/>
-            <a:ext cx="370332" cy="138989"/>
+            <a:endParaRPr lang="en-US" sz="385" dirty="0"/>
+          </a:p>
+        </p:txBody>
+      </p:sp>
+      <p:sp>
+        <p:nvSpPr>
+          <p:cNvPr id="227" name="Shape 205"/>
+          <p:cNvSpPr/>
+          <p:nvPr/>
+        </p:nvSpPr>
+        <p:spPr>
+          <a:xfrm>
+            <a:off x="3888029" y="1163117"/>
+            <a:ext cx="345643" cy="103327"/>
           </a:xfrm>
           <a:prstGeom prst="roundRect">
             <a:avLst>
-              <a:gd name="adj" fmla="val 32895"/>
+              <a:gd name="adj" fmla="val 39823"/>
             </a:avLst>
           </a:prstGeom>
           <a:solidFill>
@@ -25774,14 +25854,14 @@
       </p:sp>
       <p:sp>
         <p:nvSpPr>
-          <p:cNvPr id="224" name="Text 202"/>
-          <p:cNvSpPr/>
-          <p:nvPr/>
-        </p:nvSpPr>
-        <p:spPr>
-          <a:xfrm>
-            <a:off x="3908146" y="1153973"/>
-            <a:ext cx="330098" cy="120701"/>
+          <p:cNvPr id="228" name="Text 206"/>
+          <p:cNvSpPr/>
+          <p:nvPr/>
+        </p:nvSpPr>
+        <p:spPr>
+          <a:xfrm>
+            <a:off x="3906317" y="1168603"/>
+            <a:ext cx="309067" cy="92354"/>
           </a:xfrm>
           <a:prstGeom prst="rect">
             <a:avLst/>
@@ -25795,12 +25875,12 @@
           <a:p>
             <a:pPr algn="ctr" indent="0" marL="0">
               <a:lnSpc>
-                <a:spcPct val="102000"/>
+                <a:spcPct val="100000"/>
               </a:lnSpc>
               <a:buNone/>
             </a:pPr>
             <a:r>
-              <a:rPr lang="en-US" sz="410" b="1" dirty="0">
+              <a:rPr lang="en-US" sz="385" b="1" dirty="0">
                 <a:solidFill>
                   <a:srgbClr val="202124"/>
                 </a:solidFill>
@@ -25810,24 +25890,24 @@
               </a:rPr>
               <a:t>Response</a:t>
             </a:r>
-            <a:endParaRPr lang="en-US" sz="410" dirty="0"/>
-          </a:p>
-        </p:txBody>
-      </p:sp>
-      <p:sp>
-        <p:nvSpPr>
-          <p:cNvPr id="225" name="Shape 203"/>
-          <p:cNvSpPr/>
-          <p:nvPr/>
-        </p:nvSpPr>
-        <p:spPr>
-          <a:xfrm>
-            <a:off x="3888029" y="2723083"/>
-            <a:ext cx="370332" cy="138989"/>
+            <a:endParaRPr lang="en-US" sz="385" dirty="0"/>
+          </a:p>
+        </p:txBody>
+      </p:sp>
+      <p:sp>
+        <p:nvSpPr>
+          <p:cNvPr id="229" name="Shape 207"/>
+          <p:cNvSpPr/>
+          <p:nvPr/>
+        </p:nvSpPr>
+        <p:spPr>
+          <a:xfrm>
+            <a:off x="3888029" y="2740457"/>
+            <a:ext cx="345643" cy="103327"/>
           </a:xfrm>
           <a:prstGeom prst="roundRect">
             <a:avLst>
-              <a:gd name="adj" fmla="val 32895"/>
+              <a:gd name="adj" fmla="val 39823"/>
             </a:avLst>
           </a:prstGeom>
           <a:solidFill>
@@ -25843,14 +25923,14 @@
       </p:sp>
       <p:sp>
         <p:nvSpPr>
-          <p:cNvPr id="226" name="Text 204"/>
-          <p:cNvSpPr/>
-          <p:nvPr/>
-        </p:nvSpPr>
-        <p:spPr>
-          <a:xfrm>
-            <a:off x="3908146" y="2732227"/>
-            <a:ext cx="330098" cy="120701"/>
+          <p:cNvPr id="230" name="Text 208"/>
+          <p:cNvSpPr/>
+          <p:nvPr/>
+        </p:nvSpPr>
+        <p:spPr>
+          <a:xfrm>
+            <a:off x="3906317" y="2745943"/>
+            <a:ext cx="309067" cy="92354"/>
           </a:xfrm>
           <a:prstGeom prst="rect">
             <a:avLst/>
@@ -25864,12 +25944,12 @@
           <a:p>
             <a:pPr algn="ctr" indent="0" marL="0">
               <a:lnSpc>
-                <a:spcPct val="102000"/>
+                <a:spcPct val="100000"/>
               </a:lnSpc>
               <a:buNone/>
             </a:pPr>
             <a:r>
-              <a:rPr lang="en-US" sz="410" b="1" dirty="0">
+              <a:rPr lang="en-US" sz="385" b="1" dirty="0">
                 <a:solidFill>
                   <a:srgbClr val="202124"/>
                 </a:solidFill>
@@ -25879,24 +25959,24 @@
               </a:rPr>
               <a:t>Response</a:t>
             </a:r>
-            <a:endParaRPr lang="en-US" sz="410" dirty="0"/>
-          </a:p>
-        </p:txBody>
-      </p:sp>
-      <p:sp>
-        <p:nvSpPr>
-          <p:cNvPr id="227" name="Shape 205"/>
-          <p:cNvSpPr/>
-          <p:nvPr/>
-        </p:nvSpPr>
-        <p:spPr>
-          <a:xfrm>
-            <a:off x="3144622" y="1144829"/>
-            <a:ext cx="342900" cy="138989"/>
+            <a:endParaRPr lang="en-US" sz="385" dirty="0"/>
+          </a:p>
+        </p:txBody>
+      </p:sp>
+      <p:sp>
+        <p:nvSpPr>
+          <p:cNvPr id="231" name="Shape 209"/>
+          <p:cNvSpPr/>
+          <p:nvPr/>
+        </p:nvSpPr>
+        <p:spPr>
+          <a:xfrm>
+            <a:off x="3167482" y="1163117"/>
+            <a:ext cx="320040" cy="103327"/>
           </a:xfrm>
           <a:prstGeom prst="roundRect">
             <a:avLst>
-              <a:gd name="adj" fmla="val 32895"/>
+              <a:gd name="adj" fmla="val 39823"/>
             </a:avLst>
           </a:prstGeom>
           <a:solidFill>
@@ -25912,14 +25992,14 @@
       </p:sp>
       <p:sp>
         <p:nvSpPr>
-          <p:cNvPr id="228" name="Text 206"/>
-          <p:cNvSpPr/>
-          <p:nvPr/>
-        </p:nvSpPr>
-        <p:spPr>
-          <a:xfrm>
-            <a:off x="3164738" y="1153973"/>
-            <a:ext cx="302666" cy="120701"/>
+          <p:cNvPr id="232" name="Text 210"/>
+          <p:cNvSpPr/>
+          <p:nvPr/>
+        </p:nvSpPr>
+        <p:spPr>
+          <a:xfrm>
+            <a:off x="3185770" y="1168603"/>
+            <a:ext cx="283464" cy="92354"/>
           </a:xfrm>
           <a:prstGeom prst="rect">
             <a:avLst/>
@@ -25933,12 +26013,12 @@
           <a:p>
             <a:pPr algn="ctr" indent="0" marL="0">
               <a:lnSpc>
-                <a:spcPct val="102000"/>
+                <a:spcPct val="100000"/>
               </a:lnSpc>
               <a:buNone/>
             </a:pPr>
             <a:r>
-              <a:rPr lang="en-US" sz="410" b="1" dirty="0">
+              <a:rPr lang="en-US" sz="385" b="1" dirty="0">
                 <a:solidFill>
                   <a:srgbClr val="202124"/>
                 </a:solidFill>
@@ -25948,24 +26028,24 @@
               </a:rPr>
               <a:t>Request</a:t>
             </a:r>
-            <a:endParaRPr lang="en-US" sz="410" dirty="0"/>
-          </a:p>
-        </p:txBody>
-      </p:sp>
-      <p:sp>
-        <p:nvSpPr>
-          <p:cNvPr id="229" name="Shape 207"/>
-          <p:cNvSpPr/>
-          <p:nvPr/>
-        </p:nvSpPr>
-        <p:spPr>
-          <a:xfrm>
-            <a:off x="3144622" y="2723083"/>
-            <a:ext cx="342900" cy="138989"/>
+            <a:endParaRPr lang="en-US" sz="385" dirty="0"/>
+          </a:p>
+        </p:txBody>
+      </p:sp>
+      <p:sp>
+        <p:nvSpPr>
+          <p:cNvPr id="233" name="Shape 211"/>
+          <p:cNvSpPr/>
+          <p:nvPr/>
+        </p:nvSpPr>
+        <p:spPr>
+          <a:xfrm>
+            <a:off x="3167482" y="2740457"/>
+            <a:ext cx="320040" cy="103327"/>
           </a:xfrm>
           <a:prstGeom prst="roundRect">
             <a:avLst>
-              <a:gd name="adj" fmla="val 32895"/>
+              <a:gd name="adj" fmla="val 39823"/>
             </a:avLst>
           </a:prstGeom>
           <a:solidFill>
@@ -25981,14 +26061,14 @@
       </p:sp>
       <p:sp>
         <p:nvSpPr>
-          <p:cNvPr id="230" name="Text 208"/>
-          <p:cNvSpPr/>
-          <p:nvPr/>
-        </p:nvSpPr>
-        <p:spPr>
-          <a:xfrm>
-            <a:off x="3164738" y="2732227"/>
-            <a:ext cx="302666" cy="120701"/>
+          <p:cNvPr id="234" name="Text 212"/>
+          <p:cNvSpPr/>
+          <p:nvPr/>
+        </p:nvSpPr>
+        <p:spPr>
+          <a:xfrm>
+            <a:off x="3185770" y="2745943"/>
+            <a:ext cx="283464" cy="92354"/>
           </a:xfrm>
           <a:prstGeom prst="rect">
             <a:avLst/>
@@ -26002,12 +26082,12 @@
           <a:p>
             <a:pPr algn="ctr" indent="0" marL="0">
               <a:lnSpc>
-                <a:spcPct val="102000"/>
+                <a:spcPct val="100000"/>
               </a:lnSpc>
               <a:buNone/>
             </a:pPr>
             <a:r>
-              <a:rPr lang="en-US" sz="410" b="1" dirty="0">
+              <a:rPr lang="en-US" sz="385" b="1" dirty="0">
                 <a:solidFill>
                   <a:srgbClr val="202124"/>
                 </a:solidFill>
@@ -26017,24 +26097,24 @@
               </a:rPr>
               <a:t>Request</a:t>
             </a:r>
-            <a:endParaRPr lang="en-US" sz="410" dirty="0"/>
-          </a:p>
-        </p:txBody>
-      </p:sp>
-      <p:sp>
-        <p:nvSpPr>
-          <p:cNvPr id="231" name="Shape 209"/>
-          <p:cNvSpPr/>
-          <p:nvPr/>
-        </p:nvSpPr>
-        <p:spPr>
-          <a:xfrm>
-            <a:off x="3279038" y="5061204"/>
-            <a:ext cx="397764" cy="138989"/>
+            <a:endParaRPr lang="en-US" sz="385" dirty="0"/>
+          </a:p>
+        </p:txBody>
+      </p:sp>
+      <p:sp>
+        <p:nvSpPr>
+          <p:cNvPr id="235" name="Shape 213"/>
+          <p:cNvSpPr/>
+          <p:nvPr/>
+        </p:nvSpPr>
+        <p:spPr>
+          <a:xfrm>
+            <a:off x="3279038" y="5081321"/>
+            <a:ext cx="372161" cy="98755"/>
           </a:xfrm>
           <a:prstGeom prst="roundRect">
             <a:avLst>
-              <a:gd name="adj" fmla="val 32895"/>
+              <a:gd name="adj" fmla="val 41667"/>
             </a:avLst>
           </a:prstGeom>
           <a:solidFill>
@@ -26050,14 +26130,14 @@
       </p:sp>
       <p:sp>
         <p:nvSpPr>
-          <p:cNvPr id="232" name="Text 210"/>
-          <p:cNvSpPr/>
-          <p:nvPr/>
-        </p:nvSpPr>
-        <p:spPr>
-          <a:xfrm>
-            <a:off x="3299155" y="5070348"/>
-            <a:ext cx="357530" cy="120701"/>
+          <p:cNvPr id="236" name="Text 214"/>
+          <p:cNvSpPr/>
+          <p:nvPr/>
+        </p:nvSpPr>
+        <p:spPr>
+          <a:xfrm>
+            <a:off x="3297326" y="5086807"/>
+            <a:ext cx="335585" cy="87782"/>
           </a:xfrm>
           <a:prstGeom prst="rect">
             <a:avLst/>
@@ -26071,12 +26151,12 @@
           <a:p>
             <a:pPr algn="ctr" indent="0" marL="0">
               <a:lnSpc>
-                <a:spcPct val="102000"/>
+                <a:spcPct val="100000"/>
               </a:lnSpc>
               <a:buNone/>
             </a:pPr>
             <a:r>
-              <a:rPr lang="en-US" sz="410" b="1" dirty="0">
+              <a:rPr lang="en-US" sz="385" b="1" dirty="0">
                 <a:solidFill>
                   <a:srgbClr val="202124"/>
                 </a:solidFill>
@@ -26086,13 +26166,13 @@
               </a:rPr>
               <a:t>namespace</a:t>
             </a:r>
-            <a:endParaRPr lang="en-US" sz="410" dirty="0"/>
-          </a:p>
-        </p:txBody>
-      </p:sp>
-      <p:sp>
-        <p:nvSpPr>
-          <p:cNvPr id="233" name="Text 211"/>
+            <a:endParaRPr lang="en-US" sz="385" dirty="0"/>
+          </a:p>
+        </p:txBody>
+      </p:sp>
+      <p:sp>
+        <p:nvSpPr>
+          <p:cNvPr id="237" name="Text 215"/>
           <p:cNvSpPr/>
           <p:nvPr/>
         </p:nvSpPr>
